--- a/virtual_human_course/Module_2/Chapter_03/Slides/Module_2_Chapter_03_Integration_with_the_Virtual_Human.pptx
+++ b/virtual_human_course/Module_2/Chapter_03/Slides/Module_2_Chapter_03_Integration_with_the_Virtual_Human.pptx
@@ -2,39 +2,39 @@
 <file path=ppt/presentation.xml><?xml version="1.0" encoding="utf-8"?>
 <ns0:presentation xmlns:ns0="http://schemas.openxmlformats.org/presentationml/2006/main" xmlns:ns1="http://schemas.openxmlformats.org/officeDocument/2006/relationships">
   <ns0:sldMasterIdLst>
-    <ns0:sldMasterId id="2147483648" ns1:id="Rcd88db70f7684384"/>
+    <ns0:sldMasterId id="2147483648" ns1:id="R9045587b18db4e59"/>
   </ns0:sldMasterIdLst>
   <ns0:sldIdLst>
-    <ns0:sldId id="256" ns1:id="R127b34bfa2304827"/>
-    <ns0:sldId id="257" ns1:id="R8ce5849a6f284649"/>
-    <ns0:sldId id="258" ns1:id="R53caccd9c1f84bba"/>
-    <ns0:sldId id="259" ns1:id="R9ef103a205d64952"/>
-    <ns0:sldId id="260" ns1:id="Rf708217045634f0e"/>
-    <ns0:sldId id="261" ns1:id="R72eb0b7df9474768"/>
-    <ns0:sldId id="262" ns1:id="R10c6f43fb1954b48"/>
-    <ns0:sldId id="263" ns1:id="R331e893c275d4997"/>
-    <ns0:sldId id="264" ns1:id="R52f7ff78a6ff4889"/>
-    <ns0:sldId id="265" ns1:id="R73eacd1ba0ee416a"/>
-    <ns0:sldId id="266" ns1:id="R4d8f831ae0c34c25"/>
-    <ns0:sldId id="267" ns1:id="R50d3a60b13ab4b58"/>
-    <ns0:sldId id="268" ns1:id="Rea0245ec3c9a453c"/>
-    <ns0:sldId id="269" ns1:id="Rc3f44f2dadc74134"/>
-    <ns0:sldId id="270" ns1:id="R06a85abf6d4746b4"/>
-    <ns0:sldId id="271" ns1:id="R7b1f794b59fd4c30"/>
-    <ns0:sldId id="272" ns1:id="R045d5b45a5ed4adc"/>
-    <ns0:sldId id="273" ns1:id="R4a4406187af74155"/>
-    <ns0:sldId id="274" ns1:id="R034b4f1e378f4d6c"/>
-    <ns0:sldId id="275" ns1:id="R3d64e747189a478e"/>
-    <ns0:sldId id="276" ns1:id="R98f29a0b8dd3469e"/>
-    <ns0:sldId id="277" ns1:id="R9d4d5150b30c4070"/>
-    <ns0:sldId id="278" ns1:id="Ra2505aea05024c7c"/>
-    <ns0:sldId id="279" ns1:id="R6b8eb82cbc07447f"/>
-    <ns0:sldId id="280" ns1:id="Rf22f9d166c8d4094"/>
-    <ns0:sldId id="281" ns1:id="R2badea5a5d294d0d"/>
-    <ns0:sldId id="282" ns1:id="Rf0f22dc002a14b61"/>
-    <ns0:sldId id="283" ns1:id="R3943938319f9455b"/>
-    <ns0:sldId id="284" ns1:id="Ra198b179bb47491e"/>
-    <ns0:sldId id="285" ns1:id="R5d85be4731014d18"/>
+    <ns0:sldId id="256" ns1:id="R9b87cbb3ad7849a8"/>
+    <ns0:sldId id="257" ns1:id="R88f34a728b564784"/>
+    <ns0:sldId id="258" ns1:id="Rb99860c0597d41ae"/>
+    <ns0:sldId id="259" ns1:id="R7d361a7e64464f3b"/>
+    <ns0:sldId id="260" ns1:id="R0b18972b62484279"/>
+    <ns0:sldId id="261" ns1:id="R7369716e59314b5a"/>
+    <ns0:sldId id="262" ns1:id="Rc266cf7faae248b5"/>
+    <ns0:sldId id="263" ns1:id="R07cdbcccb50541ba"/>
+    <ns0:sldId id="264" ns1:id="Ra0e0f6ff3b4c4e46"/>
+    <ns0:sldId id="265" ns1:id="Rc758cdb5a6914c9f"/>
+    <ns0:sldId id="266" ns1:id="Ref602a4fa8bf414c"/>
+    <ns0:sldId id="267" ns1:id="R96a04198dbbd4def"/>
+    <ns0:sldId id="268" ns1:id="Rf8e05e60dbb042d4"/>
+    <ns0:sldId id="269" ns1:id="R42e2827534694fa5"/>
+    <ns0:sldId id="270" ns1:id="R16ca10ad30904437"/>
+    <ns0:sldId id="271" ns1:id="R3500a27546524af4"/>
+    <ns0:sldId id="272" ns1:id="R070c8ccfe64046e2"/>
+    <ns0:sldId id="273" ns1:id="R88b83751731045bf"/>
+    <ns0:sldId id="274" ns1:id="Refbd580c519a49c8"/>
+    <ns0:sldId id="275" ns1:id="Re001637d70794bb8"/>
+    <ns0:sldId id="276" ns1:id="Ra40ab7317b3b46ce"/>
+    <ns0:sldId id="277" ns1:id="R6711db30faef4824"/>
+    <ns0:sldId id="278" ns1:id="R6008b6ccc82d4be2"/>
+    <ns0:sldId id="279" ns1:id="Rfdaf17273dc24780"/>
+    <ns0:sldId id="280" ns1:id="R47a5ea7ac0904949"/>
+    <ns0:sldId id="281" ns1:id="R7d456dc2b9f041d1"/>
+    <ns0:sldId id="282" ns1:id="Rf01d30a3f695433d"/>
+    <ns0:sldId id="283" ns1:id="R580aed109a6642cb"/>
+    <ns0:sldId id="284" ns1:id="R61886c3fc9314349"/>
+    <ns0:sldId id="285" ns1:id="R93ffa63a0f284886"/>
   </ns0:sldIdLst>
   <ns0:sldSz cx="9144000" cy="5143500"/>
   <ns0:notesSz cx="6858000" cy="9144000"/>
@@ -91,7 +91,7 @@
           <p:nvPr/>
         </p:nvPicPr>
         <p:blipFill>
-          <a:blip xmlns:r="http://schemas.openxmlformats.org/officeDocument/2006/relationships" xmlns:a="http://schemas.openxmlformats.org/drawingml/2006/main" r:embed="R08cdeb88c7cf43a2"/>
+          <a:blip xmlns:r="http://schemas.openxmlformats.org/officeDocument/2006/relationships" xmlns:a="http://schemas.openxmlformats.org/drawingml/2006/main" r:embed="R022e9b8dc3334995"/>
           <a:srcRect xmlns:a="http://schemas.openxmlformats.org/drawingml/2006/main" l="0" t="0" r="0" b="0"/>
           <a:stretch xmlns:a="http://schemas.openxmlformats.org/drawingml/2006/main"/>
         </p:blipFill>
@@ -236,7 +236,7 @@
           <p:nvPr/>
         </p:nvPicPr>
         <p:blipFill>
-          <a:blip xmlns:r="http://schemas.openxmlformats.org/officeDocument/2006/relationships" xmlns:a="http://schemas.openxmlformats.org/drawingml/2006/main" r:embed="Rcc9bd794a1544e2b"/>
+          <a:blip xmlns:r="http://schemas.openxmlformats.org/officeDocument/2006/relationships" xmlns:a="http://schemas.openxmlformats.org/drawingml/2006/main" r:embed="R323fed1f35a74191"/>
           <a:srcRect xmlns:a="http://schemas.openxmlformats.org/drawingml/2006/main" l="0" t="0" r="0" b="0"/>
           <a:stretch xmlns:a="http://schemas.openxmlformats.org/drawingml/2006/main"/>
         </p:blipFill>
@@ -1173,14 +1173,14 @@
   </p:cSld>
   <p:clrMap bg1="lt1" tx1="dk1" bg2="lt2" tx2="dk2" accent1="accent1" accent2="accent2" accent3="accent3" accent4="accent4" accent5="accent5" accent6="accent6" hlink="hlink" folHlink="folHlink"/>
   <p:sldLayoutIdLst>
-    <p:sldLayoutId xmlns:r="http://schemas.openxmlformats.org/officeDocument/2006/relationships" id="2147483649" r:id="R763196b14e004c39"/>
-    <p:sldLayoutId xmlns:r="http://schemas.openxmlformats.org/officeDocument/2006/relationships" id="2147483650" r:id="R453c7fa32dae4139"/>
-    <p:sldLayoutId xmlns:r="http://schemas.openxmlformats.org/officeDocument/2006/relationships" id="2147483651" r:id="R57d6eb64da694be8"/>
-    <p:sldLayoutId xmlns:r="http://schemas.openxmlformats.org/officeDocument/2006/relationships" id="2147483652" r:id="Rcf56db4a49fd49cc"/>
-    <p:sldLayoutId xmlns:r="http://schemas.openxmlformats.org/officeDocument/2006/relationships" id="2147483653" r:id="Rad84f95db9724e6a"/>
-    <p:sldLayoutId xmlns:r="http://schemas.openxmlformats.org/officeDocument/2006/relationships" id="2147483654" r:id="Rad3e090dbcb14c67"/>
-    <p:sldLayoutId xmlns:r="http://schemas.openxmlformats.org/officeDocument/2006/relationships" id="2147483655" r:id="R3dbef3c7de854209"/>
-    <p:sldLayoutId xmlns:r="http://schemas.openxmlformats.org/officeDocument/2006/relationships" id="2147483656" r:id="R3732e69071884cf1"/>
+    <p:sldLayoutId xmlns:r="http://schemas.openxmlformats.org/officeDocument/2006/relationships" id="2147483649" r:id="R82a4ea87cfd84ea4"/>
+    <p:sldLayoutId xmlns:r="http://schemas.openxmlformats.org/officeDocument/2006/relationships" id="2147483650" r:id="R3100fb4832314215"/>
+    <p:sldLayoutId xmlns:r="http://schemas.openxmlformats.org/officeDocument/2006/relationships" id="2147483651" r:id="Rcd0eb26230ec4bee"/>
+    <p:sldLayoutId xmlns:r="http://schemas.openxmlformats.org/officeDocument/2006/relationships" id="2147483652" r:id="R91b4fbd8bfea4aa6"/>
+    <p:sldLayoutId xmlns:r="http://schemas.openxmlformats.org/officeDocument/2006/relationships" id="2147483653" r:id="R884ae245988c47ed"/>
+    <p:sldLayoutId xmlns:r="http://schemas.openxmlformats.org/officeDocument/2006/relationships" id="2147483654" r:id="Rd4cb3034f85146ff"/>
+    <p:sldLayoutId xmlns:r="http://schemas.openxmlformats.org/officeDocument/2006/relationships" id="2147483655" r:id="Rfeda93fdd8d24222"/>
+    <p:sldLayoutId xmlns:r="http://schemas.openxmlformats.org/officeDocument/2006/relationships" id="2147483656" r:id="Rd8c8a9d77c8842d0"/>
   </p:sldLayoutIdLst>
   <p:hf sldNum="0" hdr="0" ftr="0" dt="0"/>
   <p:txStyles>
@@ -1846,7 +1846,7 @@
           <p:nvPr/>
         </p:nvPicPr>
         <p:blipFill>
-          <a:blip xmlns:r="http://schemas.openxmlformats.org/officeDocument/2006/relationships" xmlns:a="http://schemas.openxmlformats.org/drawingml/2006/main" r:embed="Re70b58bc3fa5499b"/>
+          <a:blip xmlns:r="http://schemas.openxmlformats.org/officeDocument/2006/relationships" xmlns:a="http://schemas.openxmlformats.org/drawingml/2006/main" r:embed="R922c885a86074b81"/>
           <a:srcRect xmlns:a="http://schemas.openxmlformats.org/drawingml/2006/main" l="0" t="27" r="0" b="27"/>
           <a:stretch xmlns:a="http://schemas.openxmlformats.org/drawingml/2006/main">
             <a:fillRect l="0" t="0" r="0" b="0"/>
@@ -2642,10 +2642,10 @@
       </p:sp>
       <p:sp>
         <p:nvSpPr>
-          <p:cNvPr id="53" name="c3-text-311">
-            <a:extLst xmlns:a="http://schemas.openxmlformats.org/drawingml/2006/main">
-              <a:ext uri="{FF2B5EF4-FFF2-40B4-BE49-F238E27FC236}">
-                <a16:creationId xmlns:a16="http://schemas.microsoft.com/office/drawing/2014/main" id="{3C6F6072-32B1-41A7-95DB-AD0BC5061C41}"/>
+          <p:cNvPr id="53" name="c3-text-309">
+            <a:extLst xmlns:a="http://schemas.openxmlformats.org/drawingml/2006/main">
+              <a:ext uri="{FF2B5EF4-FFF2-40B4-BE49-F238E27FC236}">
+                <a16:creationId xmlns:a16="http://schemas.microsoft.com/office/drawing/2014/main" id="{660D9B60-4885-4B9A-BAD0-4600EB7B3A34}"/>
               </a:ext>
             </a:extLst>
           </p:cNvPr>
@@ -2728,10 +2728,10 @@
       </p:grpSpPr>
       <p:sp>
         <p:nvSpPr>
-          <p:cNvPr id="8" name="c3-text-96">
-            <a:extLst xmlns:a="http://schemas.openxmlformats.org/drawingml/2006/main">
-              <a:ext uri="{FF2B5EF4-FFF2-40B4-BE49-F238E27FC236}">
-                <a16:creationId xmlns:a16="http://schemas.microsoft.com/office/drawing/2014/main" id="{EDA88D13-8183-4225-8467-302ED6F3CA41}"/>
+          <p:cNvPr id="7" name="c3-text-96">
+            <a:extLst xmlns:a="http://schemas.openxmlformats.org/drawingml/2006/main">
+              <a:ext uri="{FF2B5EF4-FFF2-40B4-BE49-F238E27FC236}">
+                <a16:creationId xmlns:a16="http://schemas.microsoft.com/office/drawing/2014/main" id="{51265DCB-59D1-48C4-B9F8-551549D11F3A}"/>
               </a:ext>
             </a:extLst>
           </p:cNvPr>
@@ -2788,7 +2788,7 @@
           <p:cNvPr id="2" name="c3-text-97">
             <a:extLst xmlns:a="http://schemas.openxmlformats.org/drawingml/2006/main">
               <a:ext uri="{FF2B5EF4-FFF2-40B4-BE49-F238E27FC236}">
-                <a16:creationId xmlns:a16="http://schemas.microsoft.com/office/drawing/2014/main" id="{076C5FC5-11DB-4098-B8BD-6F085A3AAE6E}"/>
+                <a16:creationId xmlns:a16="http://schemas.microsoft.com/office/drawing/2014/main" id="{8D92E9F8-2216-420F-AF5B-4203EE55DD7C}"/>
               </a:ext>
             </a:extLst>
           </p:cNvPr>
@@ -2845,7 +2845,7 @@
           <p:cNvPr id="3" name="c3-text-98">
             <a:extLst xmlns:a="http://schemas.openxmlformats.org/drawingml/2006/main">
               <a:ext uri="{FF2B5EF4-FFF2-40B4-BE49-F238E27FC236}">
-                <a16:creationId xmlns:a16="http://schemas.microsoft.com/office/drawing/2014/main" id="{2C59CA4D-B702-4DEC-8065-0C64384ECAA1}"/>
+                <a16:creationId xmlns:a16="http://schemas.microsoft.com/office/drawing/2014/main" id="{E3C4D7DA-4CA1-4666-BB4E-E3A5BBDF84E1}"/>
               </a:ext>
             </a:extLst>
           </p:cNvPr>
@@ -2902,7 +2902,7 @@
           <p:cNvPr id="4" name="c3-shape-99">
             <a:extLst xmlns:a="http://schemas.openxmlformats.org/drawingml/2006/main">
               <a:ext uri="{FF2B5EF4-FFF2-40B4-BE49-F238E27FC236}">
-                <a16:creationId xmlns:a16="http://schemas.microsoft.com/office/drawing/2014/main" id="{60B220C0-F0C3-4036-8B51-FCDA69E913AD}"/>
+                <a16:creationId xmlns:a16="http://schemas.microsoft.com/office/drawing/2014/main" id="{8E900392-478C-4467-B6BD-92CA42F7E60F}"/>
               </a:ext>
             </a:extLst>
           </p:cNvPr>
@@ -2936,7 +2936,7 @@
           <p:cNvPr id="5" name="c3-text-100">
             <a:extLst xmlns:a="http://schemas.openxmlformats.org/drawingml/2006/main">
               <a:ext uri="{FF2B5EF4-FFF2-40B4-BE49-F238E27FC236}">
-                <a16:creationId xmlns:a16="http://schemas.microsoft.com/office/drawing/2014/main" id="{51D185C7-70DB-4184-8295-8163F0A0A0C0}"/>
+                <a16:creationId xmlns:a16="http://schemas.microsoft.com/office/drawing/2014/main" id="{7F08916D-DD24-4781-B4DB-57AEE17F4026}"/>
               </a:ext>
             </a:extLst>
           </p:cNvPr>
@@ -3437,68 +3437,10 @@
       </p:sp>
       <p:sp>
         <p:nvSpPr>
-          <p:cNvPr id="6" name="c3-text-101">
-            <a:hlinkClick xmlns:r="http://schemas.openxmlformats.org/officeDocument/2006/relationships" xmlns:a="http://schemas.openxmlformats.org/drawingml/2006/main" r:id="Rd89c74499c7f4e3c"/>
-            <a:extLst xmlns:a="http://schemas.openxmlformats.org/drawingml/2006/main">
-              <a:ext uri="{FF2B5EF4-FFF2-40B4-BE49-F238E27FC236}">
-                <a16:creationId xmlns:a16="http://schemas.microsoft.com/office/drawing/2014/main" id="{67FFF181-A434-42C0-A4AE-CF1A57C84491}"/>
-              </a:ext>
-            </a:extLst>
-          </p:cNvPr>
-          <p:cNvSpPr>
-            <a:spLocks xmlns:a="http://schemas.openxmlformats.org/drawingml/2006/main" noGrp="1"/>
-          </p:cNvSpPr>
-          <p:nvPr/>
-        </p:nvSpPr>
-        <p:spPr>
-          <a:xfrm xmlns:a="http://schemas.openxmlformats.org/drawingml/2006/main">
-            <a:off x="609600" y="4295775"/>
-            <a:ext cx="7924800" cy="323850"/>
-          </a:xfrm>
-          <a:prstGeom xmlns:a="http://schemas.openxmlformats.org/drawingml/2006/main" prst="rect">
-            <a:avLst/>
-          </a:prstGeom>
-          <a:noFill xmlns:a="http://schemas.openxmlformats.org/drawingml/2006/main"/>
-          <a:ln xmlns:a="http://schemas.openxmlformats.org/drawingml/2006/main" w="0">
-            <a:noFill/>
-          </a:ln>
-        </p:spPr>
-        <p:txBody>
-          <a:bodyPr xmlns:a="http://schemas.openxmlformats.org/drawingml/2006/main" wrap="square" lIns="9525" tIns="9525" rIns="9525" bIns="9525" anchor="ctr">
-            <a:noAutofit/>
-          </a:bodyPr>
-          <a:lstStyle xmlns:a="http://schemas.openxmlformats.org/drawingml/2006/main"/>
-          <a:p xmlns:a="http://schemas.openxmlformats.org/drawingml/2006/main">
-            <a:pPr>
-              <a:defRPr sz="1575" b="0">
-                <a:solidFill>
-                  <a:srgbClr val="7FA8E3"/>
-                </a:solidFill>
-                <a:latin typeface="Calibri"/>
-                <a:ea typeface="Calibri"/>
-                <a:cs typeface="Calibri"/>
-              </a:defRPr>
-            </a:pPr>
-            <a:r>
-              <a:rPr sz="1575" b="0" u="sng">
-                <a:solidFill>
-                  <a:srgbClr val="7FA8E3"/>
-                </a:solidFill>
-                <a:latin typeface="Calibri"/>
-                <a:ea typeface="Calibri"/>
-                <a:cs typeface="Calibri"/>
-              </a:rPr>
-              <a:t>Guided exercise: agent hook, server route and browser test</a:t>
-            </a:r>
-          </a:p>
-        </p:txBody>
-      </p:sp>
-      <p:sp>
-        <p:nvSpPr>
-          <p:cNvPr id="7" name="c3-text-320">
-            <a:extLst xmlns:a="http://schemas.openxmlformats.org/drawingml/2006/main">
-              <a:ext uri="{FF2B5EF4-FFF2-40B4-BE49-F238E27FC236}">
-                <a16:creationId xmlns:a16="http://schemas.microsoft.com/office/drawing/2014/main" id="{7A488D1F-F8C1-4B93-9AA0-380BEBFE5F0C}"/>
+          <p:cNvPr id="6" name="c3-text-318">
+            <a:extLst xmlns:a="http://schemas.openxmlformats.org/drawingml/2006/main">
+              <a:ext uri="{FF2B5EF4-FFF2-40B4-BE49-F238E27FC236}">
+                <a16:creationId xmlns:a16="http://schemas.microsoft.com/office/drawing/2014/main" id="{FCBD9617-4820-49FA-A3A6-BC403402C719}"/>
               </a:ext>
             </a:extLst>
           </p:cNvPr>
@@ -3553,7 +3495,7 @@
     </p:spTree>
     <p:extLst>
       <p:ext uri="{BB962C8B-B14F-4D97-AF65-F5344CB8AC3E}">
-        <p14:creationId xmlns:p14="http://schemas.microsoft.com/office/powerpoint/2010/main" val="1004510995"/>
+        <p14:creationId xmlns:p14="http://schemas.microsoft.com/office/powerpoint/2010/main" val="1266671835"/>
       </p:ext>
     </p:extLst>
   </p:cSld>
@@ -3581,10 +3523,10 @@
       </p:grpSpPr>
       <p:sp>
         <p:nvSpPr>
-          <p:cNvPr id="19" name="c3-text-102">
-            <a:extLst xmlns:a="http://schemas.openxmlformats.org/drawingml/2006/main">
-              <a:ext uri="{FF2B5EF4-FFF2-40B4-BE49-F238E27FC236}">
-                <a16:creationId xmlns:a16="http://schemas.microsoft.com/office/drawing/2014/main" id="{A6B912F8-2854-4C86-B328-C50F484AA712}"/>
+          <p:cNvPr id="19" name="c3-text-101">
+            <a:extLst xmlns:a="http://schemas.openxmlformats.org/drawingml/2006/main">
+              <a:ext uri="{FF2B5EF4-FFF2-40B4-BE49-F238E27FC236}">
+                <a16:creationId xmlns:a16="http://schemas.microsoft.com/office/drawing/2014/main" id="{3CAC22D2-CACF-4563-84EB-60A286A92E2B}"/>
               </a:ext>
             </a:extLst>
           </p:cNvPr>
@@ -3638,10 +3580,10 @@
       </p:sp>
       <p:sp>
         <p:nvSpPr>
-          <p:cNvPr id="2" name="c3-text-103">
-            <a:extLst xmlns:a="http://schemas.openxmlformats.org/drawingml/2006/main">
-              <a:ext uri="{FF2B5EF4-FFF2-40B4-BE49-F238E27FC236}">
-                <a16:creationId xmlns:a16="http://schemas.microsoft.com/office/drawing/2014/main" id="{2EFB67B8-B40C-4868-9791-3A506F1C2332}"/>
+          <p:cNvPr id="2" name="c3-text-102">
+            <a:extLst xmlns:a="http://schemas.openxmlformats.org/drawingml/2006/main">
+              <a:ext uri="{FF2B5EF4-FFF2-40B4-BE49-F238E27FC236}">
+                <a16:creationId xmlns:a16="http://schemas.microsoft.com/office/drawing/2014/main" id="{E6269C87-E089-4247-BC3B-F39DBBFC0015}"/>
               </a:ext>
             </a:extLst>
           </p:cNvPr>
@@ -3695,10 +3637,10 @@
       </p:sp>
       <p:sp>
         <p:nvSpPr>
-          <p:cNvPr id="3" name="c3-text-104">
-            <a:extLst xmlns:a="http://schemas.openxmlformats.org/drawingml/2006/main">
-              <a:ext uri="{FF2B5EF4-FFF2-40B4-BE49-F238E27FC236}">
-                <a16:creationId xmlns:a16="http://schemas.microsoft.com/office/drawing/2014/main" id="{D8561E58-9A52-4F66-BD43-5464152E9AB7}"/>
+          <p:cNvPr id="3" name="c3-text-103">
+            <a:extLst xmlns:a="http://schemas.openxmlformats.org/drawingml/2006/main">
+              <a:ext uri="{FF2B5EF4-FFF2-40B4-BE49-F238E27FC236}">
+                <a16:creationId xmlns:a16="http://schemas.microsoft.com/office/drawing/2014/main" id="{F78835BB-D4BB-4EE5-92ED-487E944436E4}"/>
               </a:ext>
             </a:extLst>
           </p:cNvPr>
@@ -3752,10 +3694,10 @@
       </p:sp>
       <p:sp>
         <p:nvSpPr>
-          <p:cNvPr id="4" name="c3-shape-105">
-            <a:extLst xmlns:a="http://schemas.openxmlformats.org/drawingml/2006/main">
-              <a:ext uri="{FF2B5EF4-FFF2-40B4-BE49-F238E27FC236}">
-                <a16:creationId xmlns:a16="http://schemas.microsoft.com/office/drawing/2014/main" id="{5B9706E2-B3B1-4F09-93B4-D3336FBCF6B7}"/>
+          <p:cNvPr id="4" name="c3-shape-104">
+            <a:extLst xmlns:a="http://schemas.openxmlformats.org/drawingml/2006/main">
+              <a:ext uri="{FF2B5EF4-FFF2-40B4-BE49-F238E27FC236}">
+                <a16:creationId xmlns:a16="http://schemas.microsoft.com/office/drawing/2014/main" id="{22258AB1-A18E-43EF-9BD6-254B1EEFED29}"/>
               </a:ext>
             </a:extLst>
           </p:cNvPr>
@@ -3786,10 +3728,10 @@
       </p:sp>
       <p:sp>
         <p:nvSpPr>
-          <p:cNvPr id="5" name="c3-shape-106">
-            <a:extLst xmlns:a="http://schemas.openxmlformats.org/drawingml/2006/main">
-              <a:ext uri="{FF2B5EF4-FFF2-40B4-BE49-F238E27FC236}">
-                <a16:creationId xmlns:a16="http://schemas.microsoft.com/office/drawing/2014/main" id="{E232D77D-DA70-481E-874E-5D42B39C3502}"/>
+          <p:cNvPr id="5" name="c3-shape-105">
+            <a:extLst xmlns:a="http://schemas.openxmlformats.org/drawingml/2006/main">
+              <a:ext uri="{FF2B5EF4-FFF2-40B4-BE49-F238E27FC236}">
+                <a16:creationId xmlns:a16="http://schemas.microsoft.com/office/drawing/2014/main" id="{4879FBBA-F9C5-4426-8EA6-00C045984467}"/>
               </a:ext>
             </a:extLst>
           </p:cNvPr>
@@ -3818,10 +3760,10 @@
       </p:sp>
       <p:sp>
         <p:nvSpPr>
-          <p:cNvPr id="6" name="c3-text-107">
-            <a:extLst xmlns:a="http://schemas.openxmlformats.org/drawingml/2006/main">
-              <a:ext uri="{FF2B5EF4-FFF2-40B4-BE49-F238E27FC236}">
-                <a16:creationId xmlns:a16="http://schemas.microsoft.com/office/drawing/2014/main" id="{C7FB3EF8-0E02-4520-B3C2-A42C9EFDA42B}"/>
+          <p:cNvPr id="6" name="c3-text-106">
+            <a:extLst xmlns:a="http://schemas.openxmlformats.org/drawingml/2006/main">
+              <a:ext uri="{FF2B5EF4-FFF2-40B4-BE49-F238E27FC236}">
+                <a16:creationId xmlns:a16="http://schemas.microsoft.com/office/drawing/2014/main" id="{A248AC83-D5C1-4583-A149-CAA70A9B52B6}"/>
               </a:ext>
             </a:extLst>
           </p:cNvPr>
@@ -3875,10 +3817,10 @@
       </p:sp>
       <p:sp>
         <p:nvSpPr>
-          <p:cNvPr id="7" name="c3-text-108">
-            <a:extLst xmlns:a="http://schemas.openxmlformats.org/drawingml/2006/main">
-              <a:ext uri="{FF2B5EF4-FFF2-40B4-BE49-F238E27FC236}">
-                <a16:creationId xmlns:a16="http://schemas.microsoft.com/office/drawing/2014/main" id="{A68DA795-5E8B-4AF2-A692-9D6E32E26042}"/>
+          <p:cNvPr id="7" name="c3-text-107">
+            <a:extLst xmlns:a="http://schemas.openxmlformats.org/drawingml/2006/main">
+              <a:ext uri="{FF2B5EF4-FFF2-40B4-BE49-F238E27FC236}">
+                <a16:creationId xmlns:a16="http://schemas.microsoft.com/office/drawing/2014/main" id="{43C9FB5E-A434-4DD3-B3EB-FBC20B5C7373}"/>
               </a:ext>
             </a:extLst>
           </p:cNvPr>
@@ -3932,10 +3874,10 @@
       </p:sp>
       <p:sp>
         <p:nvSpPr>
-          <p:cNvPr id="8" name="c3-shape-109">
-            <a:extLst xmlns:a="http://schemas.openxmlformats.org/drawingml/2006/main">
-              <a:ext uri="{FF2B5EF4-FFF2-40B4-BE49-F238E27FC236}">
-                <a16:creationId xmlns:a16="http://schemas.microsoft.com/office/drawing/2014/main" id="{00CF1267-B5CE-496D-9417-50113D80E09B}"/>
+          <p:cNvPr id="8" name="c3-shape-108">
+            <a:extLst xmlns:a="http://schemas.openxmlformats.org/drawingml/2006/main">
+              <a:ext uri="{FF2B5EF4-FFF2-40B4-BE49-F238E27FC236}">
+                <a16:creationId xmlns:a16="http://schemas.microsoft.com/office/drawing/2014/main" id="{0C5CE471-DCAF-4CAF-9340-B227374CB7F6}"/>
               </a:ext>
             </a:extLst>
           </p:cNvPr>
@@ -3966,10 +3908,10 @@
       </p:sp>
       <p:sp>
         <p:nvSpPr>
-          <p:cNvPr id="9" name="c3-shape-110">
-            <a:extLst xmlns:a="http://schemas.openxmlformats.org/drawingml/2006/main">
-              <a:ext uri="{FF2B5EF4-FFF2-40B4-BE49-F238E27FC236}">
-                <a16:creationId xmlns:a16="http://schemas.microsoft.com/office/drawing/2014/main" id="{DD7F06F4-ACAE-4AFD-8910-11E1A6F28107}"/>
+          <p:cNvPr id="9" name="c3-shape-109">
+            <a:extLst xmlns:a="http://schemas.openxmlformats.org/drawingml/2006/main">
+              <a:ext uri="{FF2B5EF4-FFF2-40B4-BE49-F238E27FC236}">
+                <a16:creationId xmlns:a16="http://schemas.microsoft.com/office/drawing/2014/main" id="{9CA00873-C4F1-4BAF-BF0A-6E0FBBCB2E7B}"/>
               </a:ext>
             </a:extLst>
           </p:cNvPr>
@@ -3998,10 +3940,10 @@
       </p:sp>
       <p:sp>
         <p:nvSpPr>
-          <p:cNvPr id="10" name="c3-text-111">
-            <a:extLst xmlns:a="http://schemas.openxmlformats.org/drawingml/2006/main">
-              <a:ext uri="{FF2B5EF4-FFF2-40B4-BE49-F238E27FC236}">
-                <a16:creationId xmlns:a16="http://schemas.microsoft.com/office/drawing/2014/main" id="{2AB0CFD8-0F90-4561-B806-FE3DBA76B9F1}"/>
+          <p:cNvPr id="10" name="c3-text-110">
+            <a:extLst xmlns:a="http://schemas.openxmlformats.org/drawingml/2006/main">
+              <a:ext uri="{FF2B5EF4-FFF2-40B4-BE49-F238E27FC236}">
+                <a16:creationId xmlns:a16="http://schemas.microsoft.com/office/drawing/2014/main" id="{825D896F-73AF-41A8-8FA8-7C911E67A25C}"/>
               </a:ext>
             </a:extLst>
           </p:cNvPr>
@@ -4055,10 +3997,10 @@
       </p:sp>
       <p:sp>
         <p:nvSpPr>
-          <p:cNvPr id="11" name="c3-text-112">
-            <a:extLst xmlns:a="http://schemas.openxmlformats.org/drawingml/2006/main">
-              <a:ext uri="{FF2B5EF4-FFF2-40B4-BE49-F238E27FC236}">
-                <a16:creationId xmlns:a16="http://schemas.microsoft.com/office/drawing/2014/main" id="{6616C8A1-2903-4A69-B871-FA7444E3EE6F}"/>
+          <p:cNvPr id="11" name="c3-text-111">
+            <a:extLst xmlns:a="http://schemas.openxmlformats.org/drawingml/2006/main">
+              <a:ext uri="{FF2B5EF4-FFF2-40B4-BE49-F238E27FC236}">
+                <a16:creationId xmlns:a16="http://schemas.microsoft.com/office/drawing/2014/main" id="{61BA9CB1-D4AC-4422-B9FB-F97F30E2AD48}"/>
               </a:ext>
             </a:extLst>
           </p:cNvPr>
@@ -4112,10 +4054,10 @@
       </p:sp>
       <p:sp>
         <p:nvSpPr>
-          <p:cNvPr id="12" name="c3-shape-113">
-            <a:extLst xmlns:a="http://schemas.openxmlformats.org/drawingml/2006/main">
-              <a:ext uri="{FF2B5EF4-FFF2-40B4-BE49-F238E27FC236}">
-                <a16:creationId xmlns:a16="http://schemas.microsoft.com/office/drawing/2014/main" id="{07D76B9C-7F0C-4622-A2F3-B7870606F64D}"/>
+          <p:cNvPr id="12" name="c3-shape-112">
+            <a:extLst xmlns:a="http://schemas.openxmlformats.org/drawingml/2006/main">
+              <a:ext uri="{FF2B5EF4-FFF2-40B4-BE49-F238E27FC236}">
+                <a16:creationId xmlns:a16="http://schemas.microsoft.com/office/drawing/2014/main" id="{62F98031-CB86-4DAF-A258-7D2E36C1988D}"/>
               </a:ext>
             </a:extLst>
           </p:cNvPr>
@@ -4146,10 +4088,10 @@
       </p:sp>
       <p:sp>
         <p:nvSpPr>
-          <p:cNvPr id="13" name="c3-shape-114">
-            <a:extLst xmlns:a="http://schemas.openxmlformats.org/drawingml/2006/main">
-              <a:ext uri="{FF2B5EF4-FFF2-40B4-BE49-F238E27FC236}">
-                <a16:creationId xmlns:a16="http://schemas.microsoft.com/office/drawing/2014/main" id="{8B90FD5F-1A34-41FC-A1FF-E664810E3848}"/>
+          <p:cNvPr id="13" name="c3-shape-113">
+            <a:extLst xmlns:a="http://schemas.openxmlformats.org/drawingml/2006/main">
+              <a:ext uri="{FF2B5EF4-FFF2-40B4-BE49-F238E27FC236}">
+                <a16:creationId xmlns:a16="http://schemas.microsoft.com/office/drawing/2014/main" id="{511164D7-0111-475A-B078-31255DDBB985}"/>
               </a:ext>
             </a:extLst>
           </p:cNvPr>
@@ -4178,10 +4120,10 @@
       </p:sp>
       <p:sp>
         <p:nvSpPr>
-          <p:cNvPr id="14" name="c3-text-115">
-            <a:extLst xmlns:a="http://schemas.openxmlformats.org/drawingml/2006/main">
-              <a:ext uri="{FF2B5EF4-FFF2-40B4-BE49-F238E27FC236}">
-                <a16:creationId xmlns:a16="http://schemas.microsoft.com/office/drawing/2014/main" id="{1D77753C-204D-4E5E-A145-FC0836D89FFC}"/>
+          <p:cNvPr id="14" name="c3-text-114">
+            <a:extLst xmlns:a="http://schemas.openxmlformats.org/drawingml/2006/main">
+              <a:ext uri="{FF2B5EF4-FFF2-40B4-BE49-F238E27FC236}">
+                <a16:creationId xmlns:a16="http://schemas.microsoft.com/office/drawing/2014/main" id="{8E4AA3CD-8729-43FE-850C-5EAA2C1CFD64}"/>
               </a:ext>
             </a:extLst>
           </p:cNvPr>
@@ -4235,10 +4177,10 @@
       </p:sp>
       <p:sp>
         <p:nvSpPr>
-          <p:cNvPr id="15" name="c3-text-116">
-            <a:extLst xmlns:a="http://schemas.openxmlformats.org/drawingml/2006/main">
-              <a:ext uri="{FF2B5EF4-FFF2-40B4-BE49-F238E27FC236}">
-                <a16:creationId xmlns:a16="http://schemas.microsoft.com/office/drawing/2014/main" id="{A2C669C2-539F-43DE-958A-54364283A4D4}"/>
+          <p:cNvPr id="15" name="c3-text-115">
+            <a:extLst xmlns:a="http://schemas.openxmlformats.org/drawingml/2006/main">
+              <a:ext uri="{FF2B5EF4-FFF2-40B4-BE49-F238E27FC236}">
+                <a16:creationId xmlns:a16="http://schemas.microsoft.com/office/drawing/2014/main" id="{A7BBA961-74A9-4E97-A239-D4376736816A}"/>
               </a:ext>
             </a:extLst>
           </p:cNvPr>
@@ -4292,10 +4234,10 @@
       </p:sp>
       <p:sp>
         <p:nvSpPr>
-          <p:cNvPr id="16" name="c3-shape-117">
-            <a:extLst xmlns:a="http://schemas.openxmlformats.org/drawingml/2006/main">
-              <a:ext uri="{FF2B5EF4-FFF2-40B4-BE49-F238E27FC236}">
-                <a16:creationId xmlns:a16="http://schemas.microsoft.com/office/drawing/2014/main" id="{1000CEF6-B962-459E-9704-9BA06E41F4CC}"/>
+          <p:cNvPr id="16" name="c3-shape-116">
+            <a:extLst xmlns:a="http://schemas.openxmlformats.org/drawingml/2006/main">
+              <a:ext uri="{FF2B5EF4-FFF2-40B4-BE49-F238E27FC236}">
+                <a16:creationId xmlns:a16="http://schemas.microsoft.com/office/drawing/2014/main" id="{700282C5-194F-4859-B931-D964C675BA2F}"/>
               </a:ext>
             </a:extLst>
           </p:cNvPr>
@@ -4326,10 +4268,10 @@
       </p:sp>
       <p:sp>
         <p:nvSpPr>
-          <p:cNvPr id="17" name="c3-text-118">
-            <a:extLst xmlns:a="http://schemas.openxmlformats.org/drawingml/2006/main">
-              <a:ext uri="{FF2B5EF4-FFF2-40B4-BE49-F238E27FC236}">
-                <a16:creationId xmlns:a16="http://schemas.microsoft.com/office/drawing/2014/main" id="{96BFE593-6C3E-4CC9-B1BE-899853477537}"/>
+          <p:cNvPr id="17" name="c3-text-117">
+            <a:extLst xmlns:a="http://schemas.openxmlformats.org/drawingml/2006/main">
+              <a:ext uri="{FF2B5EF4-FFF2-40B4-BE49-F238E27FC236}">
+                <a16:creationId xmlns:a16="http://schemas.microsoft.com/office/drawing/2014/main" id="{DE29C1A9-46BF-480E-923F-48BE5585522A}"/>
               </a:ext>
             </a:extLst>
           </p:cNvPr>
@@ -4383,10 +4325,10 @@
       </p:sp>
       <p:sp>
         <p:nvSpPr>
-          <p:cNvPr id="18" name="c3-text-321">
-            <a:extLst xmlns:a="http://schemas.openxmlformats.org/drawingml/2006/main">
-              <a:ext uri="{FF2B5EF4-FFF2-40B4-BE49-F238E27FC236}">
-                <a16:creationId xmlns:a16="http://schemas.microsoft.com/office/drawing/2014/main" id="{4F1E76F1-D5F3-497D-AFE5-6BF8BB6A7BA8}"/>
+          <p:cNvPr id="18" name="c3-text-319">
+            <a:extLst xmlns:a="http://schemas.openxmlformats.org/drawingml/2006/main">
+              <a:ext uri="{FF2B5EF4-FFF2-40B4-BE49-F238E27FC236}">
+                <a16:creationId xmlns:a16="http://schemas.microsoft.com/office/drawing/2014/main" id="{A25E9D34-4E36-495B-B2AB-D215930D278C}"/>
               </a:ext>
             </a:extLst>
           </p:cNvPr>
@@ -4441,7 +4383,7 @@
     </p:spTree>
     <p:extLst>
       <p:ext uri="{BB962C8B-B14F-4D97-AF65-F5344CB8AC3E}">
-        <p14:creationId xmlns:p14="http://schemas.microsoft.com/office/powerpoint/2010/main" val="381841417"/>
+        <p14:creationId xmlns:p14="http://schemas.microsoft.com/office/powerpoint/2010/main" val="1664243877"/>
       </p:ext>
     </p:extLst>
   </p:cSld>
@@ -4469,10 +4411,10 @@
       </p:grpSpPr>
       <p:sp>
         <p:nvSpPr>
-          <p:cNvPr id="15" name="c3-text-119">
-            <a:extLst xmlns:a="http://schemas.openxmlformats.org/drawingml/2006/main">
-              <a:ext uri="{FF2B5EF4-FFF2-40B4-BE49-F238E27FC236}">
-                <a16:creationId xmlns:a16="http://schemas.microsoft.com/office/drawing/2014/main" id="{272C219A-58A1-4E3F-8277-25C8671DB3E4}"/>
+          <p:cNvPr id="15" name="c3-text-118">
+            <a:extLst xmlns:a="http://schemas.openxmlformats.org/drawingml/2006/main">
+              <a:ext uri="{FF2B5EF4-FFF2-40B4-BE49-F238E27FC236}">
+                <a16:creationId xmlns:a16="http://schemas.microsoft.com/office/drawing/2014/main" id="{9DAC8A85-14F6-4146-AF08-EC686F935EED}"/>
               </a:ext>
             </a:extLst>
           </p:cNvPr>
@@ -4526,10 +4468,10 @@
       </p:sp>
       <p:sp>
         <p:nvSpPr>
-          <p:cNvPr id="2" name="c3-text-120">
-            <a:extLst xmlns:a="http://schemas.openxmlformats.org/drawingml/2006/main">
-              <a:ext uri="{FF2B5EF4-FFF2-40B4-BE49-F238E27FC236}">
-                <a16:creationId xmlns:a16="http://schemas.microsoft.com/office/drawing/2014/main" id="{D4AE4B1F-979A-41DF-A01A-6BB85CE3C4EE}"/>
+          <p:cNvPr id="2" name="c3-text-119">
+            <a:extLst xmlns:a="http://schemas.openxmlformats.org/drawingml/2006/main">
+              <a:ext uri="{FF2B5EF4-FFF2-40B4-BE49-F238E27FC236}">
+                <a16:creationId xmlns:a16="http://schemas.microsoft.com/office/drawing/2014/main" id="{38140C4C-BC87-40A8-9104-15A6689B3CC0}"/>
               </a:ext>
             </a:extLst>
           </p:cNvPr>
@@ -4583,10 +4525,10 @@
       </p:sp>
       <p:sp>
         <p:nvSpPr>
-          <p:cNvPr id="3" name="c3-text-121">
-            <a:extLst xmlns:a="http://schemas.openxmlformats.org/drawingml/2006/main">
-              <a:ext uri="{FF2B5EF4-FFF2-40B4-BE49-F238E27FC236}">
-                <a16:creationId xmlns:a16="http://schemas.microsoft.com/office/drawing/2014/main" id="{0F56AE0F-5BE6-464F-A81C-A6AA3727F5FA}"/>
+          <p:cNvPr id="3" name="c3-text-120">
+            <a:extLst xmlns:a="http://schemas.openxmlformats.org/drawingml/2006/main">
+              <a:ext uri="{FF2B5EF4-FFF2-40B4-BE49-F238E27FC236}">
+                <a16:creationId xmlns:a16="http://schemas.microsoft.com/office/drawing/2014/main" id="{A8EEBE47-92C4-4B97-B80D-EB0B47C57D10}"/>
               </a:ext>
             </a:extLst>
           </p:cNvPr>
@@ -4640,10 +4582,10 @@
       </p:sp>
       <p:sp>
         <p:nvSpPr>
-          <p:cNvPr id="4" name="c3-shape-122">
-            <a:extLst xmlns:a="http://schemas.openxmlformats.org/drawingml/2006/main">
-              <a:ext uri="{FF2B5EF4-FFF2-40B4-BE49-F238E27FC236}">
-                <a16:creationId xmlns:a16="http://schemas.microsoft.com/office/drawing/2014/main" id="{6800158C-81D7-48F9-9BC3-3E48D121B204}"/>
+          <p:cNvPr id="4" name="c3-shape-121">
+            <a:extLst xmlns:a="http://schemas.openxmlformats.org/drawingml/2006/main">
+              <a:ext uri="{FF2B5EF4-FFF2-40B4-BE49-F238E27FC236}">
+                <a16:creationId xmlns:a16="http://schemas.microsoft.com/office/drawing/2014/main" id="{22A087B3-4BFD-468D-B5AD-EFC2B7D7DAF9}"/>
               </a:ext>
             </a:extLst>
           </p:cNvPr>
@@ -4674,10 +4616,10 @@
       </p:sp>
       <p:sp>
         <p:nvSpPr>
-          <p:cNvPr id="5" name="c3-shape-123">
-            <a:extLst xmlns:a="http://schemas.openxmlformats.org/drawingml/2006/main">
-              <a:ext uri="{FF2B5EF4-FFF2-40B4-BE49-F238E27FC236}">
-                <a16:creationId xmlns:a16="http://schemas.microsoft.com/office/drawing/2014/main" id="{C93807CD-D2B6-40B5-9321-386222C26D64}"/>
+          <p:cNvPr id="5" name="c3-shape-122">
+            <a:extLst xmlns:a="http://schemas.openxmlformats.org/drawingml/2006/main">
+              <a:ext uri="{FF2B5EF4-FFF2-40B4-BE49-F238E27FC236}">
+                <a16:creationId xmlns:a16="http://schemas.microsoft.com/office/drawing/2014/main" id="{37923DF9-B138-4277-96B4-F10F42666748}"/>
               </a:ext>
             </a:extLst>
           </p:cNvPr>
@@ -4706,10 +4648,10 @@
       </p:sp>
       <p:sp>
         <p:nvSpPr>
-          <p:cNvPr id="6" name="c3-text-124">
-            <a:extLst xmlns:a="http://schemas.openxmlformats.org/drawingml/2006/main">
-              <a:ext uri="{FF2B5EF4-FFF2-40B4-BE49-F238E27FC236}">
-                <a16:creationId xmlns:a16="http://schemas.microsoft.com/office/drawing/2014/main" id="{0BBEDF7E-DC6B-4CBB-8B51-9500DF982CD6}"/>
+          <p:cNvPr id="6" name="c3-text-123">
+            <a:extLst xmlns:a="http://schemas.openxmlformats.org/drawingml/2006/main">
+              <a:ext uri="{FF2B5EF4-FFF2-40B4-BE49-F238E27FC236}">
+                <a16:creationId xmlns:a16="http://schemas.microsoft.com/office/drawing/2014/main" id="{4BA10FA2-1670-45AC-B770-225DADDECFB1}"/>
               </a:ext>
             </a:extLst>
           </p:cNvPr>
@@ -4763,10 +4705,10 @@
       </p:sp>
       <p:sp>
         <p:nvSpPr>
-          <p:cNvPr id="7" name="c3-text-125">
-            <a:extLst xmlns:a="http://schemas.openxmlformats.org/drawingml/2006/main">
-              <a:ext uri="{FF2B5EF4-FFF2-40B4-BE49-F238E27FC236}">
-                <a16:creationId xmlns:a16="http://schemas.microsoft.com/office/drawing/2014/main" id="{3B689EC0-485A-4020-90DA-864E1DFC33B6}"/>
+          <p:cNvPr id="7" name="c3-text-124">
+            <a:extLst xmlns:a="http://schemas.openxmlformats.org/drawingml/2006/main">
+              <a:ext uri="{FF2B5EF4-FFF2-40B4-BE49-F238E27FC236}">
+                <a16:creationId xmlns:a16="http://schemas.microsoft.com/office/drawing/2014/main" id="{D398A808-736B-4D87-A942-E8889BEEC0C0}"/>
               </a:ext>
             </a:extLst>
           </p:cNvPr>
@@ -4866,10 +4808,10 @@
       </p:sp>
       <p:sp>
         <p:nvSpPr>
-          <p:cNvPr id="8" name="c3-shape-126">
-            <a:extLst xmlns:a="http://schemas.openxmlformats.org/drawingml/2006/main">
-              <a:ext uri="{FF2B5EF4-FFF2-40B4-BE49-F238E27FC236}">
-                <a16:creationId xmlns:a16="http://schemas.microsoft.com/office/drawing/2014/main" id="{4F1659AE-7F3F-4FC4-A6D0-7C38FFAE1568}"/>
+          <p:cNvPr id="8" name="c3-shape-125">
+            <a:extLst xmlns:a="http://schemas.openxmlformats.org/drawingml/2006/main">
+              <a:ext uri="{FF2B5EF4-FFF2-40B4-BE49-F238E27FC236}">
+                <a16:creationId xmlns:a16="http://schemas.microsoft.com/office/drawing/2014/main" id="{FE680531-E952-4473-AEBD-9AAF12773897}"/>
               </a:ext>
             </a:extLst>
           </p:cNvPr>
@@ -4900,10 +4842,10 @@
       </p:sp>
       <p:sp>
         <p:nvSpPr>
-          <p:cNvPr id="9" name="c3-shape-127">
-            <a:extLst xmlns:a="http://schemas.openxmlformats.org/drawingml/2006/main">
-              <a:ext uri="{FF2B5EF4-FFF2-40B4-BE49-F238E27FC236}">
-                <a16:creationId xmlns:a16="http://schemas.microsoft.com/office/drawing/2014/main" id="{520EB127-A116-4130-B7DD-B052B05BC49B}"/>
+          <p:cNvPr id="9" name="c3-shape-126">
+            <a:extLst xmlns:a="http://schemas.openxmlformats.org/drawingml/2006/main">
+              <a:ext uri="{FF2B5EF4-FFF2-40B4-BE49-F238E27FC236}">
+                <a16:creationId xmlns:a16="http://schemas.microsoft.com/office/drawing/2014/main" id="{C7A37CE0-8D88-425E-B1BC-54F0FE86F880}"/>
               </a:ext>
             </a:extLst>
           </p:cNvPr>
@@ -4932,10 +4874,10 @@
       </p:sp>
       <p:sp>
         <p:nvSpPr>
-          <p:cNvPr id="10" name="c3-text-128">
-            <a:extLst xmlns:a="http://schemas.openxmlformats.org/drawingml/2006/main">
-              <a:ext uri="{FF2B5EF4-FFF2-40B4-BE49-F238E27FC236}">
-                <a16:creationId xmlns:a16="http://schemas.microsoft.com/office/drawing/2014/main" id="{E7F6584A-EA28-4E4C-9DD2-6F86E9730988}"/>
+          <p:cNvPr id="10" name="c3-text-127">
+            <a:extLst xmlns:a="http://schemas.openxmlformats.org/drawingml/2006/main">
+              <a:ext uri="{FF2B5EF4-FFF2-40B4-BE49-F238E27FC236}">
+                <a16:creationId xmlns:a16="http://schemas.microsoft.com/office/drawing/2014/main" id="{C24C18A5-665F-4269-B898-8F63C8402ED4}"/>
               </a:ext>
             </a:extLst>
           </p:cNvPr>
@@ -4989,10 +4931,10 @@
       </p:sp>
       <p:sp>
         <p:nvSpPr>
-          <p:cNvPr id="11" name="c3-text-129">
-            <a:extLst xmlns:a="http://schemas.openxmlformats.org/drawingml/2006/main">
-              <a:ext uri="{FF2B5EF4-FFF2-40B4-BE49-F238E27FC236}">
-                <a16:creationId xmlns:a16="http://schemas.microsoft.com/office/drawing/2014/main" id="{EF283C16-E0F4-4BF7-910E-9D36054BD840}"/>
+          <p:cNvPr id="11" name="c3-text-128">
+            <a:extLst xmlns:a="http://schemas.openxmlformats.org/drawingml/2006/main">
+              <a:ext uri="{FF2B5EF4-FFF2-40B4-BE49-F238E27FC236}">
+                <a16:creationId xmlns:a16="http://schemas.microsoft.com/office/drawing/2014/main" id="{AB2370C4-92CF-43A9-9FD9-B72C4C9BA927}"/>
               </a:ext>
             </a:extLst>
           </p:cNvPr>
@@ -5092,10 +5034,10 @@
       </p:sp>
       <p:sp>
         <p:nvSpPr>
-          <p:cNvPr id="12" name="c3-shape-130">
-            <a:extLst xmlns:a="http://schemas.openxmlformats.org/drawingml/2006/main">
-              <a:ext uri="{FF2B5EF4-FFF2-40B4-BE49-F238E27FC236}">
-                <a16:creationId xmlns:a16="http://schemas.microsoft.com/office/drawing/2014/main" id="{54C33E34-7F97-4C0B-AB7C-9074A9FB1E88}"/>
+          <p:cNvPr id="12" name="c3-shape-129">
+            <a:extLst xmlns:a="http://schemas.openxmlformats.org/drawingml/2006/main">
+              <a:ext uri="{FF2B5EF4-FFF2-40B4-BE49-F238E27FC236}">
+                <a16:creationId xmlns:a16="http://schemas.microsoft.com/office/drawing/2014/main" id="{DEF1E839-A488-4ED7-B30F-E2CE0299F1DD}"/>
               </a:ext>
             </a:extLst>
           </p:cNvPr>
@@ -5126,10 +5068,10 @@
       </p:sp>
       <p:sp>
         <p:nvSpPr>
-          <p:cNvPr id="13" name="c3-text-131">
-            <a:extLst xmlns:a="http://schemas.openxmlformats.org/drawingml/2006/main">
-              <a:ext uri="{FF2B5EF4-FFF2-40B4-BE49-F238E27FC236}">
-                <a16:creationId xmlns:a16="http://schemas.microsoft.com/office/drawing/2014/main" id="{1946E463-3B2D-40B2-9290-31631F7332A2}"/>
+          <p:cNvPr id="13" name="c3-text-130">
+            <a:extLst xmlns:a="http://schemas.openxmlformats.org/drawingml/2006/main">
+              <a:ext uri="{FF2B5EF4-FFF2-40B4-BE49-F238E27FC236}">
+                <a16:creationId xmlns:a16="http://schemas.microsoft.com/office/drawing/2014/main" id="{5D41BD65-9EEF-4B3D-A9EE-F4EF59778614}"/>
               </a:ext>
             </a:extLst>
           </p:cNvPr>
@@ -5183,10 +5125,10 @@
       </p:sp>
       <p:sp>
         <p:nvSpPr>
-          <p:cNvPr id="14" name="c3-text-322">
-            <a:extLst xmlns:a="http://schemas.openxmlformats.org/drawingml/2006/main">
-              <a:ext uri="{FF2B5EF4-FFF2-40B4-BE49-F238E27FC236}">
-                <a16:creationId xmlns:a16="http://schemas.microsoft.com/office/drawing/2014/main" id="{D8DA9B03-BC3C-4BAF-981A-D3B4D1CA2020}"/>
+          <p:cNvPr id="14" name="c3-text-320">
+            <a:extLst xmlns:a="http://schemas.openxmlformats.org/drawingml/2006/main">
+              <a:ext uri="{FF2B5EF4-FFF2-40B4-BE49-F238E27FC236}">
+                <a16:creationId xmlns:a16="http://schemas.microsoft.com/office/drawing/2014/main" id="{6CE58F99-CAC5-4D95-9C67-9B2A49E69D56}"/>
               </a:ext>
             </a:extLst>
           </p:cNvPr>
@@ -5241,7 +5183,7 @@
     </p:spTree>
     <p:extLst>
       <p:ext uri="{BB962C8B-B14F-4D97-AF65-F5344CB8AC3E}">
-        <p14:creationId xmlns:p14="http://schemas.microsoft.com/office/powerpoint/2010/main" val="841120574"/>
+        <p14:creationId xmlns:p14="http://schemas.microsoft.com/office/powerpoint/2010/main" val="1549004263"/>
       </p:ext>
     </p:extLst>
   </p:cSld>
@@ -5269,10 +5211,10 @@
       </p:grpSpPr>
       <p:sp>
         <p:nvSpPr>
-          <p:cNvPr id="19" name="c3-text-132">
-            <a:extLst xmlns:a="http://schemas.openxmlformats.org/drawingml/2006/main">
-              <a:ext uri="{FF2B5EF4-FFF2-40B4-BE49-F238E27FC236}">
-                <a16:creationId xmlns:a16="http://schemas.microsoft.com/office/drawing/2014/main" id="{7F8FC2B1-F09C-4A43-A534-B8BA70CF33BA}"/>
+          <p:cNvPr id="19" name="c3-text-131">
+            <a:extLst xmlns:a="http://schemas.openxmlformats.org/drawingml/2006/main">
+              <a:ext uri="{FF2B5EF4-FFF2-40B4-BE49-F238E27FC236}">
+                <a16:creationId xmlns:a16="http://schemas.microsoft.com/office/drawing/2014/main" id="{CDE6FB5B-6F6F-4613-B96D-FFA16DF75611}"/>
               </a:ext>
             </a:extLst>
           </p:cNvPr>
@@ -5326,10 +5268,10 @@
       </p:sp>
       <p:sp>
         <p:nvSpPr>
-          <p:cNvPr id="2" name="c3-text-133">
-            <a:extLst xmlns:a="http://schemas.openxmlformats.org/drawingml/2006/main">
-              <a:ext uri="{FF2B5EF4-FFF2-40B4-BE49-F238E27FC236}">
-                <a16:creationId xmlns:a16="http://schemas.microsoft.com/office/drawing/2014/main" id="{B3B43C6F-EACC-4816-B9A0-528C1B95CDDA}"/>
+          <p:cNvPr id="2" name="c3-text-132">
+            <a:extLst xmlns:a="http://schemas.openxmlformats.org/drawingml/2006/main">
+              <a:ext uri="{FF2B5EF4-FFF2-40B4-BE49-F238E27FC236}">
+                <a16:creationId xmlns:a16="http://schemas.microsoft.com/office/drawing/2014/main" id="{AA6C05A7-FBAE-42E8-B2AC-181FE353ECC7}"/>
               </a:ext>
             </a:extLst>
           </p:cNvPr>
@@ -5383,10 +5325,10 @@
       </p:sp>
       <p:sp>
         <p:nvSpPr>
-          <p:cNvPr id="3" name="c3-text-134">
-            <a:extLst xmlns:a="http://schemas.openxmlformats.org/drawingml/2006/main">
-              <a:ext uri="{FF2B5EF4-FFF2-40B4-BE49-F238E27FC236}">
-                <a16:creationId xmlns:a16="http://schemas.microsoft.com/office/drawing/2014/main" id="{515BB5C0-1B46-4529-B244-873856AA1FD1}"/>
+          <p:cNvPr id="3" name="c3-text-133">
+            <a:extLst xmlns:a="http://schemas.openxmlformats.org/drawingml/2006/main">
+              <a:ext uri="{FF2B5EF4-FFF2-40B4-BE49-F238E27FC236}">
+                <a16:creationId xmlns:a16="http://schemas.microsoft.com/office/drawing/2014/main" id="{DA59DB70-1551-49EC-9349-C68463EF0F95}"/>
               </a:ext>
             </a:extLst>
           </p:cNvPr>
@@ -5440,10 +5382,10 @@
       </p:sp>
       <p:sp>
         <p:nvSpPr>
-          <p:cNvPr id="4" name="c3-shape-135">
-            <a:extLst xmlns:a="http://schemas.openxmlformats.org/drawingml/2006/main">
-              <a:ext uri="{FF2B5EF4-FFF2-40B4-BE49-F238E27FC236}">
-                <a16:creationId xmlns:a16="http://schemas.microsoft.com/office/drawing/2014/main" id="{654F2116-A128-4172-8AC3-58442F99C0A0}"/>
+          <p:cNvPr id="4" name="c3-shape-134">
+            <a:extLst xmlns:a="http://schemas.openxmlformats.org/drawingml/2006/main">
+              <a:ext uri="{FF2B5EF4-FFF2-40B4-BE49-F238E27FC236}">
+                <a16:creationId xmlns:a16="http://schemas.microsoft.com/office/drawing/2014/main" id="{36D1E619-5924-4337-A785-C58DECF70036}"/>
               </a:ext>
             </a:extLst>
           </p:cNvPr>
@@ -5474,10 +5416,10 @@
       </p:sp>
       <p:sp>
         <p:nvSpPr>
-          <p:cNvPr id="5" name="c3-shape-136">
-            <a:extLst xmlns:a="http://schemas.openxmlformats.org/drawingml/2006/main">
-              <a:ext uri="{FF2B5EF4-FFF2-40B4-BE49-F238E27FC236}">
-                <a16:creationId xmlns:a16="http://schemas.microsoft.com/office/drawing/2014/main" id="{0AB5E511-DCF2-4F66-87D8-0C0D9123A929}"/>
+          <p:cNvPr id="5" name="c3-shape-135">
+            <a:extLst xmlns:a="http://schemas.openxmlformats.org/drawingml/2006/main">
+              <a:ext uri="{FF2B5EF4-FFF2-40B4-BE49-F238E27FC236}">
+                <a16:creationId xmlns:a16="http://schemas.microsoft.com/office/drawing/2014/main" id="{C4261830-8B6E-491E-9AB0-AFCFB6B380F0}"/>
               </a:ext>
             </a:extLst>
           </p:cNvPr>
@@ -5506,10 +5448,10 @@
       </p:sp>
       <p:sp>
         <p:nvSpPr>
-          <p:cNvPr id="6" name="c3-text-137">
-            <a:extLst xmlns:a="http://schemas.openxmlformats.org/drawingml/2006/main">
-              <a:ext uri="{FF2B5EF4-FFF2-40B4-BE49-F238E27FC236}">
-                <a16:creationId xmlns:a16="http://schemas.microsoft.com/office/drawing/2014/main" id="{7CD77F4A-FCFF-4D6E-A4B9-21E9166D21E5}"/>
+          <p:cNvPr id="6" name="c3-text-136">
+            <a:extLst xmlns:a="http://schemas.openxmlformats.org/drawingml/2006/main">
+              <a:ext uri="{FF2B5EF4-FFF2-40B4-BE49-F238E27FC236}">
+                <a16:creationId xmlns:a16="http://schemas.microsoft.com/office/drawing/2014/main" id="{BE1B3389-E941-47FB-B3AF-9FC24D348076}"/>
               </a:ext>
             </a:extLst>
           </p:cNvPr>
@@ -5563,10 +5505,10 @@
       </p:sp>
       <p:sp>
         <p:nvSpPr>
-          <p:cNvPr id="7" name="c3-text-138">
-            <a:extLst xmlns:a="http://schemas.openxmlformats.org/drawingml/2006/main">
-              <a:ext uri="{FF2B5EF4-FFF2-40B4-BE49-F238E27FC236}">
-                <a16:creationId xmlns:a16="http://schemas.microsoft.com/office/drawing/2014/main" id="{14EEFDE3-E7A7-46F2-BA8D-45FD1E9C39EC}"/>
+          <p:cNvPr id="7" name="c3-text-137">
+            <a:extLst xmlns:a="http://schemas.openxmlformats.org/drawingml/2006/main">
+              <a:ext uri="{FF2B5EF4-FFF2-40B4-BE49-F238E27FC236}">
+                <a16:creationId xmlns:a16="http://schemas.microsoft.com/office/drawing/2014/main" id="{C659F584-49FB-4F9E-BFE2-B92288297D57}"/>
               </a:ext>
             </a:extLst>
           </p:cNvPr>
@@ -5620,10 +5562,10 @@
       </p:sp>
       <p:sp>
         <p:nvSpPr>
-          <p:cNvPr id="8" name="c3-shape-139">
-            <a:extLst xmlns:a="http://schemas.openxmlformats.org/drawingml/2006/main">
-              <a:ext uri="{FF2B5EF4-FFF2-40B4-BE49-F238E27FC236}">
-                <a16:creationId xmlns:a16="http://schemas.microsoft.com/office/drawing/2014/main" id="{F3D36CC1-18AE-48DE-AC51-520D7C96E834}"/>
+          <p:cNvPr id="8" name="c3-shape-138">
+            <a:extLst xmlns:a="http://schemas.openxmlformats.org/drawingml/2006/main">
+              <a:ext uri="{FF2B5EF4-FFF2-40B4-BE49-F238E27FC236}">
+                <a16:creationId xmlns:a16="http://schemas.microsoft.com/office/drawing/2014/main" id="{EC018A45-E249-4430-9CBF-92E437AAF5CE}"/>
               </a:ext>
             </a:extLst>
           </p:cNvPr>
@@ -5654,10 +5596,10 @@
       </p:sp>
       <p:sp>
         <p:nvSpPr>
-          <p:cNvPr id="9" name="c3-shape-140">
-            <a:extLst xmlns:a="http://schemas.openxmlformats.org/drawingml/2006/main">
-              <a:ext uri="{FF2B5EF4-FFF2-40B4-BE49-F238E27FC236}">
-                <a16:creationId xmlns:a16="http://schemas.microsoft.com/office/drawing/2014/main" id="{F3D57DA6-8B01-4CC4-912E-3A334110C2A9}"/>
+          <p:cNvPr id="9" name="c3-shape-139">
+            <a:extLst xmlns:a="http://schemas.openxmlformats.org/drawingml/2006/main">
+              <a:ext uri="{FF2B5EF4-FFF2-40B4-BE49-F238E27FC236}">
+                <a16:creationId xmlns:a16="http://schemas.microsoft.com/office/drawing/2014/main" id="{F9CEAE83-CB41-4ABE-B78C-E3191FAD968D}"/>
               </a:ext>
             </a:extLst>
           </p:cNvPr>
@@ -5686,10 +5628,10 @@
       </p:sp>
       <p:sp>
         <p:nvSpPr>
-          <p:cNvPr id="10" name="c3-text-141">
-            <a:extLst xmlns:a="http://schemas.openxmlformats.org/drawingml/2006/main">
-              <a:ext uri="{FF2B5EF4-FFF2-40B4-BE49-F238E27FC236}">
-                <a16:creationId xmlns:a16="http://schemas.microsoft.com/office/drawing/2014/main" id="{EDF4D181-C47E-443D-8194-D56B793202C5}"/>
+          <p:cNvPr id="10" name="c3-text-140">
+            <a:extLst xmlns:a="http://schemas.openxmlformats.org/drawingml/2006/main">
+              <a:ext uri="{FF2B5EF4-FFF2-40B4-BE49-F238E27FC236}">
+                <a16:creationId xmlns:a16="http://schemas.microsoft.com/office/drawing/2014/main" id="{3F0D50BF-98C2-4FDE-936A-93B079629F67}"/>
               </a:ext>
             </a:extLst>
           </p:cNvPr>
@@ -5743,10 +5685,10 @@
       </p:sp>
       <p:sp>
         <p:nvSpPr>
-          <p:cNvPr id="11" name="c3-text-142">
-            <a:extLst xmlns:a="http://schemas.openxmlformats.org/drawingml/2006/main">
-              <a:ext uri="{FF2B5EF4-FFF2-40B4-BE49-F238E27FC236}">
-                <a16:creationId xmlns:a16="http://schemas.microsoft.com/office/drawing/2014/main" id="{8BDA7EA1-9B11-4C9C-AC2C-415F68E09650}"/>
+          <p:cNvPr id="11" name="c3-text-141">
+            <a:extLst xmlns:a="http://schemas.openxmlformats.org/drawingml/2006/main">
+              <a:ext uri="{FF2B5EF4-FFF2-40B4-BE49-F238E27FC236}">
+                <a16:creationId xmlns:a16="http://schemas.microsoft.com/office/drawing/2014/main" id="{0D693C75-F5D0-4316-BAD0-B91C45E48099}"/>
               </a:ext>
             </a:extLst>
           </p:cNvPr>
@@ -5823,10 +5765,10 @@
       </p:sp>
       <p:sp>
         <p:nvSpPr>
-          <p:cNvPr id="12" name="c3-shape-143">
-            <a:extLst xmlns:a="http://schemas.openxmlformats.org/drawingml/2006/main">
-              <a:ext uri="{FF2B5EF4-FFF2-40B4-BE49-F238E27FC236}">
-                <a16:creationId xmlns:a16="http://schemas.microsoft.com/office/drawing/2014/main" id="{F52A53E8-3D5A-4B96-9A88-2B1027AAA76E}"/>
+          <p:cNvPr id="12" name="c3-shape-142">
+            <a:extLst xmlns:a="http://schemas.openxmlformats.org/drawingml/2006/main">
+              <a:ext uri="{FF2B5EF4-FFF2-40B4-BE49-F238E27FC236}">
+                <a16:creationId xmlns:a16="http://schemas.microsoft.com/office/drawing/2014/main" id="{6B26D12C-57E5-44C7-8CA6-DEA2FF0771E4}"/>
               </a:ext>
             </a:extLst>
           </p:cNvPr>
@@ -5857,10 +5799,10 @@
       </p:sp>
       <p:sp>
         <p:nvSpPr>
-          <p:cNvPr id="13" name="c3-shape-144">
-            <a:extLst xmlns:a="http://schemas.openxmlformats.org/drawingml/2006/main">
-              <a:ext uri="{FF2B5EF4-FFF2-40B4-BE49-F238E27FC236}">
-                <a16:creationId xmlns:a16="http://schemas.microsoft.com/office/drawing/2014/main" id="{E98C5BAF-C259-43FF-8E9F-B78C5AB91965}"/>
+          <p:cNvPr id="13" name="c3-shape-143">
+            <a:extLst xmlns:a="http://schemas.openxmlformats.org/drawingml/2006/main">
+              <a:ext uri="{FF2B5EF4-FFF2-40B4-BE49-F238E27FC236}">
+                <a16:creationId xmlns:a16="http://schemas.microsoft.com/office/drawing/2014/main" id="{A6FED281-8314-4F4A-BDB0-E5311885B8E5}"/>
               </a:ext>
             </a:extLst>
           </p:cNvPr>
@@ -5889,10 +5831,10 @@
       </p:sp>
       <p:sp>
         <p:nvSpPr>
-          <p:cNvPr id="14" name="c3-text-145">
-            <a:extLst xmlns:a="http://schemas.openxmlformats.org/drawingml/2006/main">
-              <a:ext uri="{FF2B5EF4-FFF2-40B4-BE49-F238E27FC236}">
-                <a16:creationId xmlns:a16="http://schemas.microsoft.com/office/drawing/2014/main" id="{1802C2B8-4F5E-46AF-ACB2-469BBDCC2E14}"/>
+          <p:cNvPr id="14" name="c3-text-144">
+            <a:extLst xmlns:a="http://schemas.openxmlformats.org/drawingml/2006/main">
+              <a:ext uri="{FF2B5EF4-FFF2-40B4-BE49-F238E27FC236}">
+                <a16:creationId xmlns:a16="http://schemas.microsoft.com/office/drawing/2014/main" id="{F0BAE611-96AB-4C18-A628-07CE1FC27F6F}"/>
               </a:ext>
             </a:extLst>
           </p:cNvPr>
@@ -5946,10 +5888,10 @@
       </p:sp>
       <p:sp>
         <p:nvSpPr>
-          <p:cNvPr id="15" name="c3-text-146">
-            <a:extLst xmlns:a="http://schemas.openxmlformats.org/drawingml/2006/main">
-              <a:ext uri="{FF2B5EF4-FFF2-40B4-BE49-F238E27FC236}">
-                <a16:creationId xmlns:a16="http://schemas.microsoft.com/office/drawing/2014/main" id="{001AE2E3-1A9E-44AC-A6AC-63CBEA9F543F}"/>
+          <p:cNvPr id="15" name="c3-text-145">
+            <a:extLst xmlns:a="http://schemas.openxmlformats.org/drawingml/2006/main">
+              <a:ext uri="{FF2B5EF4-FFF2-40B4-BE49-F238E27FC236}">
+                <a16:creationId xmlns:a16="http://schemas.microsoft.com/office/drawing/2014/main" id="{04D37263-5FE3-4527-8A07-875CCA5ACEBB}"/>
               </a:ext>
             </a:extLst>
           </p:cNvPr>
@@ -6003,10 +5945,10 @@
       </p:sp>
       <p:sp>
         <p:nvSpPr>
-          <p:cNvPr id="16" name="c3-shape-147">
-            <a:extLst xmlns:a="http://schemas.openxmlformats.org/drawingml/2006/main">
-              <a:ext uri="{FF2B5EF4-FFF2-40B4-BE49-F238E27FC236}">
-                <a16:creationId xmlns:a16="http://schemas.microsoft.com/office/drawing/2014/main" id="{91F6A5C7-AFB8-4F53-A4C6-42FE441B901D}"/>
+          <p:cNvPr id="16" name="c3-shape-146">
+            <a:extLst xmlns:a="http://schemas.openxmlformats.org/drawingml/2006/main">
+              <a:ext uri="{FF2B5EF4-FFF2-40B4-BE49-F238E27FC236}">
+                <a16:creationId xmlns:a16="http://schemas.microsoft.com/office/drawing/2014/main" id="{775A8498-08AB-4D49-AA6B-DB5292502503}"/>
               </a:ext>
             </a:extLst>
           </p:cNvPr>
@@ -6037,10 +5979,10 @@
       </p:sp>
       <p:sp>
         <p:nvSpPr>
-          <p:cNvPr id="17" name="c3-text-148">
-            <a:extLst xmlns:a="http://schemas.openxmlformats.org/drawingml/2006/main">
-              <a:ext uri="{FF2B5EF4-FFF2-40B4-BE49-F238E27FC236}">
-                <a16:creationId xmlns:a16="http://schemas.microsoft.com/office/drawing/2014/main" id="{9B4E2836-7576-4A0D-9620-652583F70ADE}"/>
+          <p:cNvPr id="17" name="c3-text-147">
+            <a:extLst xmlns:a="http://schemas.openxmlformats.org/drawingml/2006/main">
+              <a:ext uri="{FF2B5EF4-FFF2-40B4-BE49-F238E27FC236}">
+                <a16:creationId xmlns:a16="http://schemas.microsoft.com/office/drawing/2014/main" id="{FE3B5A73-8152-432A-9736-76C235539C23}"/>
               </a:ext>
             </a:extLst>
           </p:cNvPr>
@@ -6094,10 +6036,10 @@
       </p:sp>
       <p:sp>
         <p:nvSpPr>
-          <p:cNvPr id="18" name="c3-text-323">
-            <a:extLst xmlns:a="http://schemas.openxmlformats.org/drawingml/2006/main">
-              <a:ext uri="{FF2B5EF4-FFF2-40B4-BE49-F238E27FC236}">
-                <a16:creationId xmlns:a16="http://schemas.microsoft.com/office/drawing/2014/main" id="{3C836956-DBF3-4277-88B2-B31BD80A73B9}"/>
+          <p:cNvPr id="18" name="c3-text-321">
+            <a:extLst xmlns:a="http://schemas.openxmlformats.org/drawingml/2006/main">
+              <a:ext uri="{FF2B5EF4-FFF2-40B4-BE49-F238E27FC236}">
+                <a16:creationId xmlns:a16="http://schemas.microsoft.com/office/drawing/2014/main" id="{B0A89B6C-CDFC-470E-8198-5904439BC7D0}"/>
               </a:ext>
             </a:extLst>
           </p:cNvPr>
@@ -6152,7 +6094,7 @@
     </p:spTree>
     <p:extLst>
       <p:ext uri="{BB962C8B-B14F-4D97-AF65-F5344CB8AC3E}">
-        <p14:creationId xmlns:p14="http://schemas.microsoft.com/office/powerpoint/2010/main" val="549769224"/>
+        <p14:creationId xmlns:p14="http://schemas.microsoft.com/office/powerpoint/2010/main" val="1256595178"/>
       </p:ext>
     </p:extLst>
   </p:cSld>
@@ -6180,10 +6122,10 @@
       </p:grpSpPr>
       <p:sp>
         <p:nvSpPr>
-          <p:cNvPr id="19" name="c3-text-149">
-            <a:extLst xmlns:a="http://schemas.openxmlformats.org/drawingml/2006/main">
-              <a:ext uri="{FF2B5EF4-FFF2-40B4-BE49-F238E27FC236}">
-                <a16:creationId xmlns:a16="http://schemas.microsoft.com/office/drawing/2014/main" id="{50FDA0BC-0E94-4BD2-9130-9A804E60FDE6}"/>
+          <p:cNvPr id="19" name="c3-text-148">
+            <a:extLst xmlns:a="http://schemas.openxmlformats.org/drawingml/2006/main">
+              <a:ext uri="{FF2B5EF4-FFF2-40B4-BE49-F238E27FC236}">
+                <a16:creationId xmlns:a16="http://schemas.microsoft.com/office/drawing/2014/main" id="{99328313-ED47-4E37-A05B-69782B8F5D52}"/>
               </a:ext>
             </a:extLst>
           </p:cNvPr>
@@ -6237,10 +6179,10 @@
       </p:sp>
       <p:sp>
         <p:nvSpPr>
-          <p:cNvPr id="2" name="c3-text-150">
-            <a:extLst xmlns:a="http://schemas.openxmlformats.org/drawingml/2006/main">
-              <a:ext uri="{FF2B5EF4-FFF2-40B4-BE49-F238E27FC236}">
-                <a16:creationId xmlns:a16="http://schemas.microsoft.com/office/drawing/2014/main" id="{651B9CDB-10BB-4084-A958-CE593700255A}"/>
+          <p:cNvPr id="2" name="c3-text-149">
+            <a:extLst xmlns:a="http://schemas.openxmlformats.org/drawingml/2006/main">
+              <a:ext uri="{FF2B5EF4-FFF2-40B4-BE49-F238E27FC236}">
+                <a16:creationId xmlns:a16="http://schemas.microsoft.com/office/drawing/2014/main" id="{B6B9623F-3351-48B7-B120-0358FFE201F1}"/>
               </a:ext>
             </a:extLst>
           </p:cNvPr>
@@ -6294,10 +6236,10 @@
       </p:sp>
       <p:sp>
         <p:nvSpPr>
-          <p:cNvPr id="3" name="c3-text-151">
-            <a:extLst xmlns:a="http://schemas.openxmlformats.org/drawingml/2006/main">
-              <a:ext uri="{FF2B5EF4-FFF2-40B4-BE49-F238E27FC236}">
-                <a16:creationId xmlns:a16="http://schemas.microsoft.com/office/drawing/2014/main" id="{F4D21383-8EDE-4F52-9A5A-FA793E6B697D}"/>
+          <p:cNvPr id="3" name="c3-text-150">
+            <a:extLst xmlns:a="http://schemas.openxmlformats.org/drawingml/2006/main">
+              <a:ext uri="{FF2B5EF4-FFF2-40B4-BE49-F238E27FC236}">
+                <a16:creationId xmlns:a16="http://schemas.microsoft.com/office/drawing/2014/main" id="{52B8AE82-4034-4F5E-983D-EA055E08676E}"/>
               </a:ext>
             </a:extLst>
           </p:cNvPr>
@@ -6351,10 +6293,10 @@
       </p:sp>
       <p:sp>
         <p:nvSpPr>
-          <p:cNvPr id="4" name="c3-shape-152">
-            <a:extLst xmlns:a="http://schemas.openxmlformats.org/drawingml/2006/main">
-              <a:ext uri="{FF2B5EF4-FFF2-40B4-BE49-F238E27FC236}">
-                <a16:creationId xmlns:a16="http://schemas.microsoft.com/office/drawing/2014/main" id="{E93A9579-A88F-40F0-9B3B-E682B2924016}"/>
+          <p:cNvPr id="4" name="c3-shape-151">
+            <a:extLst xmlns:a="http://schemas.openxmlformats.org/drawingml/2006/main">
+              <a:ext uri="{FF2B5EF4-FFF2-40B4-BE49-F238E27FC236}">
+                <a16:creationId xmlns:a16="http://schemas.microsoft.com/office/drawing/2014/main" id="{3DB2D7F1-271A-456D-B240-3319EB2789C2}"/>
               </a:ext>
             </a:extLst>
           </p:cNvPr>
@@ -6385,10 +6327,10 @@
       </p:sp>
       <p:sp>
         <p:nvSpPr>
-          <p:cNvPr id="5" name="c3-shape-153">
-            <a:extLst xmlns:a="http://schemas.openxmlformats.org/drawingml/2006/main">
-              <a:ext uri="{FF2B5EF4-FFF2-40B4-BE49-F238E27FC236}">
-                <a16:creationId xmlns:a16="http://schemas.microsoft.com/office/drawing/2014/main" id="{C1024B48-20EA-44E1-87DF-A2E3333EC122}"/>
+          <p:cNvPr id="5" name="c3-shape-152">
+            <a:extLst xmlns:a="http://schemas.openxmlformats.org/drawingml/2006/main">
+              <a:ext uri="{FF2B5EF4-FFF2-40B4-BE49-F238E27FC236}">
+                <a16:creationId xmlns:a16="http://schemas.microsoft.com/office/drawing/2014/main" id="{43A1076F-58A2-4B55-AF32-D404BFA6B9CA}"/>
               </a:ext>
             </a:extLst>
           </p:cNvPr>
@@ -6417,10 +6359,10 @@
       </p:sp>
       <p:sp>
         <p:nvSpPr>
-          <p:cNvPr id="6" name="c3-text-154">
-            <a:extLst xmlns:a="http://schemas.openxmlformats.org/drawingml/2006/main">
-              <a:ext uri="{FF2B5EF4-FFF2-40B4-BE49-F238E27FC236}">
-                <a16:creationId xmlns:a16="http://schemas.microsoft.com/office/drawing/2014/main" id="{81E9032A-924F-4E79-8E9B-41CCEB42CBC7}"/>
+          <p:cNvPr id="6" name="c3-text-153">
+            <a:extLst xmlns:a="http://schemas.openxmlformats.org/drawingml/2006/main">
+              <a:ext uri="{FF2B5EF4-FFF2-40B4-BE49-F238E27FC236}">
+                <a16:creationId xmlns:a16="http://schemas.microsoft.com/office/drawing/2014/main" id="{0B43CC6D-7A4B-40D4-8159-EC425100B481}"/>
               </a:ext>
             </a:extLst>
           </p:cNvPr>
@@ -6474,10 +6416,10 @@
       </p:sp>
       <p:sp>
         <p:nvSpPr>
-          <p:cNvPr id="7" name="c3-text-155">
-            <a:extLst xmlns:a="http://schemas.openxmlformats.org/drawingml/2006/main">
-              <a:ext uri="{FF2B5EF4-FFF2-40B4-BE49-F238E27FC236}">
-                <a16:creationId xmlns:a16="http://schemas.microsoft.com/office/drawing/2014/main" id="{D87B724A-1CC9-46D0-8959-95CFDA530C09}"/>
+          <p:cNvPr id="7" name="c3-text-154">
+            <a:extLst xmlns:a="http://schemas.openxmlformats.org/drawingml/2006/main">
+              <a:ext uri="{FF2B5EF4-FFF2-40B4-BE49-F238E27FC236}">
+                <a16:creationId xmlns:a16="http://schemas.microsoft.com/office/drawing/2014/main" id="{AD21073E-22A4-4EEE-9017-65EB9D4BE9FC}"/>
               </a:ext>
             </a:extLst>
           </p:cNvPr>
@@ -6531,10 +6473,10 @@
       </p:sp>
       <p:sp>
         <p:nvSpPr>
-          <p:cNvPr id="8" name="c3-shape-156">
-            <a:extLst xmlns:a="http://schemas.openxmlformats.org/drawingml/2006/main">
-              <a:ext uri="{FF2B5EF4-FFF2-40B4-BE49-F238E27FC236}">
-                <a16:creationId xmlns:a16="http://schemas.microsoft.com/office/drawing/2014/main" id="{3A26EABD-A6E5-4EE7-9B41-51B71677D7D5}"/>
+          <p:cNvPr id="8" name="c3-shape-155">
+            <a:extLst xmlns:a="http://schemas.openxmlformats.org/drawingml/2006/main">
+              <a:ext uri="{FF2B5EF4-FFF2-40B4-BE49-F238E27FC236}">
+                <a16:creationId xmlns:a16="http://schemas.microsoft.com/office/drawing/2014/main" id="{10F89FFA-6417-4B71-A37C-CC57B286C4B0}"/>
               </a:ext>
             </a:extLst>
           </p:cNvPr>
@@ -6565,10 +6507,10 @@
       </p:sp>
       <p:sp>
         <p:nvSpPr>
-          <p:cNvPr id="9" name="c3-shape-157">
-            <a:extLst xmlns:a="http://schemas.openxmlformats.org/drawingml/2006/main">
-              <a:ext uri="{FF2B5EF4-FFF2-40B4-BE49-F238E27FC236}">
-                <a16:creationId xmlns:a16="http://schemas.microsoft.com/office/drawing/2014/main" id="{36EA8797-F0BF-4A32-82F3-19DB7D95A72F}"/>
+          <p:cNvPr id="9" name="c3-shape-156">
+            <a:extLst xmlns:a="http://schemas.openxmlformats.org/drawingml/2006/main">
+              <a:ext uri="{FF2B5EF4-FFF2-40B4-BE49-F238E27FC236}">
+                <a16:creationId xmlns:a16="http://schemas.microsoft.com/office/drawing/2014/main" id="{8EF87CC5-5A06-4197-B05B-83BA24539A3F}"/>
               </a:ext>
             </a:extLst>
           </p:cNvPr>
@@ -6597,10 +6539,10 @@
       </p:sp>
       <p:sp>
         <p:nvSpPr>
-          <p:cNvPr id="10" name="c3-text-158">
-            <a:extLst xmlns:a="http://schemas.openxmlformats.org/drawingml/2006/main">
-              <a:ext uri="{FF2B5EF4-FFF2-40B4-BE49-F238E27FC236}">
-                <a16:creationId xmlns:a16="http://schemas.microsoft.com/office/drawing/2014/main" id="{32242E0A-B113-4C53-BBBB-8ECDDC9DD82D}"/>
+          <p:cNvPr id="10" name="c3-text-157">
+            <a:extLst xmlns:a="http://schemas.openxmlformats.org/drawingml/2006/main">
+              <a:ext uri="{FF2B5EF4-FFF2-40B4-BE49-F238E27FC236}">
+                <a16:creationId xmlns:a16="http://schemas.microsoft.com/office/drawing/2014/main" id="{0C73901F-ADC0-4174-A71C-0B01CD6E93EF}"/>
               </a:ext>
             </a:extLst>
           </p:cNvPr>
@@ -6654,10 +6596,10 @@
       </p:sp>
       <p:sp>
         <p:nvSpPr>
-          <p:cNvPr id="11" name="c3-text-159">
-            <a:extLst xmlns:a="http://schemas.openxmlformats.org/drawingml/2006/main">
-              <a:ext uri="{FF2B5EF4-FFF2-40B4-BE49-F238E27FC236}">
-                <a16:creationId xmlns:a16="http://schemas.microsoft.com/office/drawing/2014/main" id="{6DD36177-DD9C-4BCC-A662-5B2E742B97AC}"/>
+          <p:cNvPr id="11" name="c3-text-158">
+            <a:extLst xmlns:a="http://schemas.openxmlformats.org/drawingml/2006/main">
+              <a:ext uri="{FF2B5EF4-FFF2-40B4-BE49-F238E27FC236}">
+                <a16:creationId xmlns:a16="http://schemas.microsoft.com/office/drawing/2014/main" id="{EC0F88E0-DFCC-4FAA-9895-6915E646F2B1}"/>
               </a:ext>
             </a:extLst>
           </p:cNvPr>
@@ -6711,10 +6653,10 @@
       </p:sp>
       <p:sp>
         <p:nvSpPr>
-          <p:cNvPr id="12" name="c3-shape-160">
-            <a:extLst xmlns:a="http://schemas.openxmlformats.org/drawingml/2006/main">
-              <a:ext uri="{FF2B5EF4-FFF2-40B4-BE49-F238E27FC236}">
-                <a16:creationId xmlns:a16="http://schemas.microsoft.com/office/drawing/2014/main" id="{CBC50A0F-1134-41C1-9521-2DC295BFBEFE}"/>
+          <p:cNvPr id="12" name="c3-shape-159">
+            <a:extLst xmlns:a="http://schemas.openxmlformats.org/drawingml/2006/main">
+              <a:ext uri="{FF2B5EF4-FFF2-40B4-BE49-F238E27FC236}">
+                <a16:creationId xmlns:a16="http://schemas.microsoft.com/office/drawing/2014/main" id="{9DDFDC0E-ED43-471A-9D3A-5B10D9E5E1E2}"/>
               </a:ext>
             </a:extLst>
           </p:cNvPr>
@@ -6745,10 +6687,10 @@
       </p:sp>
       <p:sp>
         <p:nvSpPr>
-          <p:cNvPr id="13" name="c3-shape-161">
-            <a:extLst xmlns:a="http://schemas.openxmlformats.org/drawingml/2006/main">
-              <a:ext uri="{FF2B5EF4-FFF2-40B4-BE49-F238E27FC236}">
-                <a16:creationId xmlns:a16="http://schemas.microsoft.com/office/drawing/2014/main" id="{DA378D58-60E4-4940-8B80-2B8801E33CAD}"/>
+          <p:cNvPr id="13" name="c3-shape-160">
+            <a:extLst xmlns:a="http://schemas.openxmlformats.org/drawingml/2006/main">
+              <a:ext uri="{FF2B5EF4-FFF2-40B4-BE49-F238E27FC236}">
+                <a16:creationId xmlns:a16="http://schemas.microsoft.com/office/drawing/2014/main" id="{DBDB65CF-4917-4C0D-B488-365AB3FD3D3B}"/>
               </a:ext>
             </a:extLst>
           </p:cNvPr>
@@ -6777,10 +6719,10 @@
       </p:sp>
       <p:sp>
         <p:nvSpPr>
-          <p:cNvPr id="14" name="c3-text-162">
-            <a:extLst xmlns:a="http://schemas.openxmlformats.org/drawingml/2006/main">
-              <a:ext uri="{FF2B5EF4-FFF2-40B4-BE49-F238E27FC236}">
-                <a16:creationId xmlns:a16="http://schemas.microsoft.com/office/drawing/2014/main" id="{3DBDB0D1-CD10-4762-9483-2D705FCD7DD1}"/>
+          <p:cNvPr id="14" name="c3-text-161">
+            <a:extLst xmlns:a="http://schemas.openxmlformats.org/drawingml/2006/main">
+              <a:ext uri="{FF2B5EF4-FFF2-40B4-BE49-F238E27FC236}">
+                <a16:creationId xmlns:a16="http://schemas.microsoft.com/office/drawing/2014/main" id="{EA78A52E-1CC2-497A-81B1-BA243202205D}"/>
               </a:ext>
             </a:extLst>
           </p:cNvPr>
@@ -6834,10 +6776,10 @@
       </p:sp>
       <p:sp>
         <p:nvSpPr>
-          <p:cNvPr id="15" name="c3-text-163">
-            <a:extLst xmlns:a="http://schemas.openxmlformats.org/drawingml/2006/main">
-              <a:ext uri="{FF2B5EF4-FFF2-40B4-BE49-F238E27FC236}">
-                <a16:creationId xmlns:a16="http://schemas.microsoft.com/office/drawing/2014/main" id="{BB996CF5-4154-4FF0-A493-4C3C19E8B395}"/>
+          <p:cNvPr id="15" name="c3-text-162">
+            <a:extLst xmlns:a="http://schemas.openxmlformats.org/drawingml/2006/main">
+              <a:ext uri="{FF2B5EF4-FFF2-40B4-BE49-F238E27FC236}">
+                <a16:creationId xmlns:a16="http://schemas.microsoft.com/office/drawing/2014/main" id="{27CD181E-FF27-4B6E-987C-B30AF80B91E8}"/>
               </a:ext>
             </a:extLst>
           </p:cNvPr>
@@ -6891,10 +6833,10 @@
       </p:sp>
       <p:sp>
         <p:nvSpPr>
-          <p:cNvPr id="16" name="c3-shape-164">
-            <a:extLst xmlns:a="http://schemas.openxmlformats.org/drawingml/2006/main">
-              <a:ext uri="{FF2B5EF4-FFF2-40B4-BE49-F238E27FC236}">
-                <a16:creationId xmlns:a16="http://schemas.microsoft.com/office/drawing/2014/main" id="{68F183DE-1BA9-4951-9B5E-9E776492DE49}"/>
+          <p:cNvPr id="16" name="c3-shape-163">
+            <a:extLst xmlns:a="http://schemas.openxmlformats.org/drawingml/2006/main">
+              <a:ext uri="{FF2B5EF4-FFF2-40B4-BE49-F238E27FC236}">
+                <a16:creationId xmlns:a16="http://schemas.microsoft.com/office/drawing/2014/main" id="{A09D6C1F-5DBC-49B7-AFDB-41FFCEFFE278}"/>
               </a:ext>
             </a:extLst>
           </p:cNvPr>
@@ -6925,10 +6867,10 @@
       </p:sp>
       <p:sp>
         <p:nvSpPr>
-          <p:cNvPr id="17" name="c3-text-165">
-            <a:extLst xmlns:a="http://schemas.openxmlformats.org/drawingml/2006/main">
-              <a:ext uri="{FF2B5EF4-FFF2-40B4-BE49-F238E27FC236}">
-                <a16:creationId xmlns:a16="http://schemas.microsoft.com/office/drawing/2014/main" id="{2E022316-7B92-4D86-910A-9D78D97C57F2}"/>
+          <p:cNvPr id="17" name="c3-text-164">
+            <a:extLst xmlns:a="http://schemas.openxmlformats.org/drawingml/2006/main">
+              <a:ext uri="{FF2B5EF4-FFF2-40B4-BE49-F238E27FC236}">
+                <a16:creationId xmlns:a16="http://schemas.microsoft.com/office/drawing/2014/main" id="{C0E39CE0-BF8B-4653-BF64-CC2B06BCE776}"/>
               </a:ext>
             </a:extLst>
           </p:cNvPr>
@@ -6982,10 +6924,10 @@
       </p:sp>
       <p:sp>
         <p:nvSpPr>
-          <p:cNvPr id="18" name="c3-text-324">
-            <a:extLst xmlns:a="http://schemas.openxmlformats.org/drawingml/2006/main">
-              <a:ext uri="{FF2B5EF4-FFF2-40B4-BE49-F238E27FC236}">
-                <a16:creationId xmlns:a16="http://schemas.microsoft.com/office/drawing/2014/main" id="{3AB7BF6F-EA8C-4A71-9ED6-49BB8CD22432}"/>
+          <p:cNvPr id="18" name="c3-text-322">
+            <a:extLst xmlns:a="http://schemas.openxmlformats.org/drawingml/2006/main">
+              <a:ext uri="{FF2B5EF4-FFF2-40B4-BE49-F238E27FC236}">
+                <a16:creationId xmlns:a16="http://schemas.microsoft.com/office/drawing/2014/main" id="{619F4FDF-1D62-4541-962B-E44210187610}"/>
               </a:ext>
             </a:extLst>
           </p:cNvPr>
@@ -7040,7 +6982,7 @@
     </p:spTree>
     <p:extLst>
       <p:ext uri="{BB962C8B-B14F-4D97-AF65-F5344CB8AC3E}">
-        <p14:creationId xmlns:p14="http://schemas.microsoft.com/office/powerpoint/2010/main" val="1746583797"/>
+        <p14:creationId xmlns:p14="http://schemas.microsoft.com/office/powerpoint/2010/main" val="1679719652"/>
       </p:ext>
     </p:extLst>
   </p:cSld>
@@ -7068,10 +7010,10 @@
       </p:grpSpPr>
       <p:sp>
         <p:nvSpPr>
-          <p:cNvPr id="8" name="c3-text-166">
-            <a:extLst xmlns:a="http://schemas.openxmlformats.org/drawingml/2006/main">
-              <a:ext uri="{FF2B5EF4-FFF2-40B4-BE49-F238E27FC236}">
-                <a16:creationId xmlns:a16="http://schemas.microsoft.com/office/drawing/2014/main" id="{65D4A3E1-FD9D-43E5-A9B3-D9C6D9424B21}"/>
+          <p:cNvPr id="8" name="c3-text-165">
+            <a:extLst xmlns:a="http://schemas.openxmlformats.org/drawingml/2006/main">
+              <a:ext uri="{FF2B5EF4-FFF2-40B4-BE49-F238E27FC236}">
+                <a16:creationId xmlns:a16="http://schemas.microsoft.com/office/drawing/2014/main" id="{74087D5D-835E-4DBF-ABA8-F5A550B7C8F9}"/>
               </a:ext>
             </a:extLst>
           </p:cNvPr>
@@ -7125,10 +7067,10 @@
       </p:sp>
       <p:sp>
         <p:nvSpPr>
-          <p:cNvPr id="2" name="c3-text-167">
-            <a:extLst xmlns:a="http://schemas.openxmlformats.org/drawingml/2006/main">
-              <a:ext uri="{FF2B5EF4-FFF2-40B4-BE49-F238E27FC236}">
-                <a16:creationId xmlns:a16="http://schemas.microsoft.com/office/drawing/2014/main" id="{B81F2833-3F1A-4E83-A351-E311182DF650}"/>
+          <p:cNvPr id="2" name="c3-text-166">
+            <a:extLst xmlns:a="http://schemas.openxmlformats.org/drawingml/2006/main">
+              <a:ext uri="{FF2B5EF4-FFF2-40B4-BE49-F238E27FC236}">
+                <a16:creationId xmlns:a16="http://schemas.microsoft.com/office/drawing/2014/main" id="{74A24560-5CF1-4533-8CB7-FFC58E174532}"/>
               </a:ext>
             </a:extLst>
           </p:cNvPr>
@@ -7182,10 +7124,10 @@
       </p:sp>
       <p:sp>
         <p:nvSpPr>
-          <p:cNvPr id="3" name="c3-text-168">
-            <a:extLst xmlns:a="http://schemas.openxmlformats.org/drawingml/2006/main">
-              <a:ext uri="{FF2B5EF4-FFF2-40B4-BE49-F238E27FC236}">
-                <a16:creationId xmlns:a16="http://schemas.microsoft.com/office/drawing/2014/main" id="{BF014FA0-640D-491D-8598-077D8F97C6DC}"/>
+          <p:cNvPr id="3" name="c3-text-167">
+            <a:extLst xmlns:a="http://schemas.openxmlformats.org/drawingml/2006/main">
+              <a:ext uri="{FF2B5EF4-FFF2-40B4-BE49-F238E27FC236}">
+                <a16:creationId xmlns:a16="http://schemas.microsoft.com/office/drawing/2014/main" id="{EDE0B4EC-C790-41E8-BC69-82EEEF4A7820}"/>
               </a:ext>
             </a:extLst>
           </p:cNvPr>
@@ -7239,10 +7181,10 @@
       </p:sp>
       <p:sp>
         <p:nvSpPr>
-          <p:cNvPr id="4" name="c3-text-169">
-            <a:extLst xmlns:a="http://schemas.openxmlformats.org/drawingml/2006/main">
-              <a:ext uri="{FF2B5EF4-FFF2-40B4-BE49-F238E27FC236}">
-                <a16:creationId xmlns:a16="http://schemas.microsoft.com/office/drawing/2014/main" id="{BA34C960-EB27-46F4-BBDF-5408ED1EA6C2}"/>
+          <p:cNvPr id="4" name="c3-text-168">
+            <a:extLst xmlns:a="http://schemas.openxmlformats.org/drawingml/2006/main">
+              <a:ext uri="{FF2B5EF4-FFF2-40B4-BE49-F238E27FC236}">
+                <a16:creationId xmlns:a16="http://schemas.microsoft.com/office/drawing/2014/main" id="{C6922525-BDBE-4187-B16B-7DED1B9F7D7A}"/>
               </a:ext>
             </a:extLst>
           </p:cNvPr>
@@ -7296,10 +7238,10 @@
       </p:sp>
       <p:sp>
         <p:nvSpPr>
-          <p:cNvPr id="5" name="c3-text-170">
-            <a:extLst xmlns:a="http://schemas.openxmlformats.org/drawingml/2006/main">
-              <a:ext uri="{FF2B5EF4-FFF2-40B4-BE49-F238E27FC236}">
-                <a16:creationId xmlns:a16="http://schemas.microsoft.com/office/drawing/2014/main" id="{D380BD68-2955-4AD3-B87E-F100BA6DF8B1}"/>
+          <p:cNvPr id="5" name="c3-text-169">
+            <a:extLst xmlns:a="http://schemas.openxmlformats.org/drawingml/2006/main">
+              <a:ext uri="{FF2B5EF4-FFF2-40B4-BE49-F238E27FC236}">
+                <a16:creationId xmlns:a16="http://schemas.microsoft.com/office/drawing/2014/main" id="{9702B361-A74F-492C-A2EE-A0350EB58C63}"/>
               </a:ext>
             </a:extLst>
           </p:cNvPr>
@@ -7353,10 +7295,10 @@
       </p:sp>
       <p:sp>
         <p:nvSpPr>
-          <p:cNvPr id="6" name="c3-text-171">
-            <a:extLst xmlns:a="http://schemas.openxmlformats.org/drawingml/2006/main">
-              <a:ext uri="{FF2B5EF4-FFF2-40B4-BE49-F238E27FC236}">
-                <a16:creationId xmlns:a16="http://schemas.microsoft.com/office/drawing/2014/main" id="{CF6D8D4C-1916-44BC-A53C-76155294F9B7}"/>
+          <p:cNvPr id="6" name="c3-text-170">
+            <a:extLst xmlns:a="http://schemas.openxmlformats.org/drawingml/2006/main">
+              <a:ext uri="{FF2B5EF4-FFF2-40B4-BE49-F238E27FC236}">
+                <a16:creationId xmlns:a16="http://schemas.microsoft.com/office/drawing/2014/main" id="{E5F36BE4-D720-449F-AF87-EDAC97A0149D}"/>
               </a:ext>
             </a:extLst>
           </p:cNvPr>
@@ -7410,10 +7352,10 @@
       </p:sp>
       <p:sp>
         <p:nvSpPr>
-          <p:cNvPr id="7" name="c3-text-325">
-            <a:extLst xmlns:a="http://schemas.openxmlformats.org/drawingml/2006/main">
-              <a:ext uri="{FF2B5EF4-FFF2-40B4-BE49-F238E27FC236}">
-                <a16:creationId xmlns:a16="http://schemas.microsoft.com/office/drawing/2014/main" id="{F961A726-AB5F-43BA-80E6-56A75CC064F4}"/>
+          <p:cNvPr id="7" name="c3-text-323">
+            <a:extLst xmlns:a="http://schemas.openxmlformats.org/drawingml/2006/main">
+              <a:ext uri="{FF2B5EF4-FFF2-40B4-BE49-F238E27FC236}">
+                <a16:creationId xmlns:a16="http://schemas.microsoft.com/office/drawing/2014/main" id="{4742ECE8-E8AD-41BB-90FE-6BFB030E72A3}"/>
               </a:ext>
             </a:extLst>
           </p:cNvPr>
@@ -7468,7 +7410,7 @@
     </p:spTree>
     <p:extLst>
       <p:ext uri="{BB962C8B-B14F-4D97-AF65-F5344CB8AC3E}">
-        <p14:creationId xmlns:p14="http://schemas.microsoft.com/office/powerpoint/2010/main" val="1804936517"/>
+        <p14:creationId xmlns:p14="http://schemas.microsoft.com/office/powerpoint/2010/main" val="1875636353"/>
       </p:ext>
     </p:extLst>
   </p:cSld>
@@ -7496,10 +7438,10 @@
       </p:grpSpPr>
       <p:sp>
         <p:nvSpPr>
-          <p:cNvPr id="26" name="c3-text-172">
-            <a:extLst xmlns:a="http://schemas.openxmlformats.org/drawingml/2006/main">
-              <a:ext uri="{FF2B5EF4-FFF2-40B4-BE49-F238E27FC236}">
-                <a16:creationId xmlns:a16="http://schemas.microsoft.com/office/drawing/2014/main" id="{B4091996-EE34-4056-90F8-978C068EC06B}"/>
+          <p:cNvPr id="26" name="c3-text-171">
+            <a:extLst xmlns:a="http://schemas.openxmlformats.org/drawingml/2006/main">
+              <a:ext uri="{FF2B5EF4-FFF2-40B4-BE49-F238E27FC236}">
+                <a16:creationId xmlns:a16="http://schemas.microsoft.com/office/drawing/2014/main" id="{6019EE5C-44D4-4385-B891-927EC518CA96}"/>
               </a:ext>
             </a:extLst>
           </p:cNvPr>
@@ -7553,10 +7495,10 @@
       </p:sp>
       <p:sp>
         <p:nvSpPr>
-          <p:cNvPr id="2" name="c3-text-173">
-            <a:extLst xmlns:a="http://schemas.openxmlformats.org/drawingml/2006/main">
-              <a:ext uri="{FF2B5EF4-FFF2-40B4-BE49-F238E27FC236}">
-                <a16:creationId xmlns:a16="http://schemas.microsoft.com/office/drawing/2014/main" id="{CFBBFA3C-C10B-4782-B854-79FBBD5EEF4B}"/>
+          <p:cNvPr id="2" name="c3-text-172">
+            <a:extLst xmlns:a="http://schemas.openxmlformats.org/drawingml/2006/main">
+              <a:ext uri="{FF2B5EF4-FFF2-40B4-BE49-F238E27FC236}">
+                <a16:creationId xmlns:a16="http://schemas.microsoft.com/office/drawing/2014/main" id="{18D349D7-B7EB-467D-9845-9EFF4B8AFB0A}"/>
               </a:ext>
             </a:extLst>
           </p:cNvPr>
@@ -7610,10 +7552,10 @@
       </p:sp>
       <p:sp>
         <p:nvSpPr>
-          <p:cNvPr id="3" name="c3-text-174">
-            <a:extLst xmlns:a="http://schemas.openxmlformats.org/drawingml/2006/main">
-              <a:ext uri="{FF2B5EF4-FFF2-40B4-BE49-F238E27FC236}">
-                <a16:creationId xmlns:a16="http://schemas.microsoft.com/office/drawing/2014/main" id="{DD542881-7470-43C1-9C9D-2ACC27671C02}"/>
+          <p:cNvPr id="3" name="c3-text-173">
+            <a:extLst xmlns:a="http://schemas.openxmlformats.org/drawingml/2006/main">
+              <a:ext uri="{FF2B5EF4-FFF2-40B4-BE49-F238E27FC236}">
+                <a16:creationId xmlns:a16="http://schemas.microsoft.com/office/drawing/2014/main" id="{5291AE6C-BB6A-401F-BBE8-B6DE98BBAF03}"/>
               </a:ext>
             </a:extLst>
           </p:cNvPr>
@@ -7667,10 +7609,10 @@
       </p:sp>
       <p:sp>
         <p:nvSpPr>
-          <p:cNvPr id="4" name="c3-shape-175">
-            <a:extLst xmlns:a="http://schemas.openxmlformats.org/drawingml/2006/main">
-              <a:ext uri="{FF2B5EF4-FFF2-40B4-BE49-F238E27FC236}">
-                <a16:creationId xmlns:a16="http://schemas.microsoft.com/office/drawing/2014/main" id="{6FF0AEAA-1488-4815-AE45-F11CF34258D4}"/>
+          <p:cNvPr id="4" name="c3-shape-174">
+            <a:extLst xmlns:a="http://schemas.openxmlformats.org/drawingml/2006/main">
+              <a:ext uri="{FF2B5EF4-FFF2-40B4-BE49-F238E27FC236}">
+                <a16:creationId xmlns:a16="http://schemas.microsoft.com/office/drawing/2014/main" id="{7268DCF5-F986-4417-B342-554A579FB817}"/>
               </a:ext>
             </a:extLst>
           </p:cNvPr>
@@ -7701,10 +7643,10 @@
       </p:sp>
       <p:sp>
         <p:nvSpPr>
-          <p:cNvPr id="5" name="c3-text-176">
-            <a:extLst xmlns:a="http://schemas.openxmlformats.org/drawingml/2006/main">
-              <a:ext uri="{FF2B5EF4-FFF2-40B4-BE49-F238E27FC236}">
-                <a16:creationId xmlns:a16="http://schemas.microsoft.com/office/drawing/2014/main" id="{D361BCF0-9E45-4616-87FE-8C3172802B61}"/>
+          <p:cNvPr id="5" name="c3-text-175">
+            <a:extLst xmlns:a="http://schemas.openxmlformats.org/drawingml/2006/main">
+              <a:ext uri="{FF2B5EF4-FFF2-40B4-BE49-F238E27FC236}">
+                <a16:creationId xmlns:a16="http://schemas.microsoft.com/office/drawing/2014/main" id="{12859D52-4F90-44F0-B2BB-0E56582D54B9}"/>
               </a:ext>
             </a:extLst>
           </p:cNvPr>
@@ -7758,10 +7700,10 @@
       </p:sp>
       <p:sp>
         <p:nvSpPr>
-          <p:cNvPr id="6" name="c3-shape-177">
-            <a:extLst xmlns:a="http://schemas.openxmlformats.org/drawingml/2006/main">
-              <a:ext uri="{FF2B5EF4-FFF2-40B4-BE49-F238E27FC236}">
-                <a16:creationId xmlns:a16="http://schemas.microsoft.com/office/drawing/2014/main" id="{55F978DF-96E5-43CB-83C0-7569BBE05EFD}"/>
+          <p:cNvPr id="6" name="c3-shape-176">
+            <a:extLst xmlns:a="http://schemas.openxmlformats.org/drawingml/2006/main">
+              <a:ext uri="{FF2B5EF4-FFF2-40B4-BE49-F238E27FC236}">
+                <a16:creationId xmlns:a16="http://schemas.microsoft.com/office/drawing/2014/main" id="{1D9BEF35-DD0B-45F4-8518-83A18D0D6E03}"/>
               </a:ext>
             </a:extLst>
           </p:cNvPr>
@@ -7790,10 +7732,10 @@
       </p:sp>
       <p:sp>
         <p:nvSpPr>
-          <p:cNvPr id="7" name="c3-shape-178">
-            <a:extLst xmlns:a="http://schemas.openxmlformats.org/drawingml/2006/main">
-              <a:ext uri="{FF2B5EF4-FFF2-40B4-BE49-F238E27FC236}">
-                <a16:creationId xmlns:a16="http://schemas.microsoft.com/office/drawing/2014/main" id="{B2422D01-A6ED-470C-87C4-0EC1E0C29D6C}"/>
+          <p:cNvPr id="7" name="c3-shape-177">
+            <a:extLst xmlns:a="http://schemas.openxmlformats.org/drawingml/2006/main">
+              <a:ext uri="{FF2B5EF4-FFF2-40B4-BE49-F238E27FC236}">
+                <a16:creationId xmlns:a16="http://schemas.microsoft.com/office/drawing/2014/main" id="{98F0A9E5-D691-4355-B409-AFF1A4F986C1}"/>
               </a:ext>
             </a:extLst>
           </p:cNvPr>
@@ -7824,10 +7766,10 @@
       </p:sp>
       <p:sp>
         <p:nvSpPr>
-          <p:cNvPr id="8" name="c3-text-179">
-            <a:extLst xmlns:a="http://schemas.openxmlformats.org/drawingml/2006/main">
-              <a:ext uri="{FF2B5EF4-FFF2-40B4-BE49-F238E27FC236}">
-                <a16:creationId xmlns:a16="http://schemas.microsoft.com/office/drawing/2014/main" id="{7EF7D935-D0ED-4CF6-9CD8-AA93A722CA5C}"/>
+          <p:cNvPr id="8" name="c3-text-178">
+            <a:extLst xmlns:a="http://schemas.openxmlformats.org/drawingml/2006/main">
+              <a:ext uri="{FF2B5EF4-FFF2-40B4-BE49-F238E27FC236}">
+                <a16:creationId xmlns:a16="http://schemas.microsoft.com/office/drawing/2014/main" id="{DA3B26F7-8368-4BA6-8BA8-2EDDE836C717}"/>
               </a:ext>
             </a:extLst>
           </p:cNvPr>
@@ -7881,10 +7823,10 @@
       </p:sp>
       <p:sp>
         <p:nvSpPr>
-          <p:cNvPr id="9" name="c3-shape-180">
-            <a:extLst xmlns:a="http://schemas.openxmlformats.org/drawingml/2006/main">
-              <a:ext uri="{FF2B5EF4-FFF2-40B4-BE49-F238E27FC236}">
-                <a16:creationId xmlns:a16="http://schemas.microsoft.com/office/drawing/2014/main" id="{F1D312AF-01B9-4390-9E79-326EF4A2FF1B}"/>
+          <p:cNvPr id="9" name="c3-shape-179">
+            <a:extLst xmlns:a="http://schemas.openxmlformats.org/drawingml/2006/main">
+              <a:ext uri="{FF2B5EF4-FFF2-40B4-BE49-F238E27FC236}">
+                <a16:creationId xmlns:a16="http://schemas.microsoft.com/office/drawing/2014/main" id="{584F7772-103E-4A02-A4EE-1682BEE6DBA1}"/>
               </a:ext>
             </a:extLst>
           </p:cNvPr>
@@ -7913,10 +7855,10 @@
       </p:sp>
       <p:sp>
         <p:nvSpPr>
-          <p:cNvPr id="10" name="c3-shape-181">
-            <a:extLst xmlns:a="http://schemas.openxmlformats.org/drawingml/2006/main">
-              <a:ext uri="{FF2B5EF4-FFF2-40B4-BE49-F238E27FC236}">
-                <a16:creationId xmlns:a16="http://schemas.microsoft.com/office/drawing/2014/main" id="{7520325B-1D04-44A3-9CC3-4083081C32BB}"/>
+          <p:cNvPr id="10" name="c3-shape-180">
+            <a:extLst xmlns:a="http://schemas.openxmlformats.org/drawingml/2006/main">
+              <a:ext uri="{FF2B5EF4-FFF2-40B4-BE49-F238E27FC236}">
+                <a16:creationId xmlns:a16="http://schemas.microsoft.com/office/drawing/2014/main" id="{6C170663-0761-4D1A-BBE5-6AAC4C503DEC}"/>
               </a:ext>
             </a:extLst>
           </p:cNvPr>
@@ -7947,10 +7889,10 @@
       </p:sp>
       <p:sp>
         <p:nvSpPr>
-          <p:cNvPr id="11" name="c3-text-182">
-            <a:extLst xmlns:a="http://schemas.openxmlformats.org/drawingml/2006/main">
-              <a:ext uri="{FF2B5EF4-FFF2-40B4-BE49-F238E27FC236}">
-                <a16:creationId xmlns:a16="http://schemas.microsoft.com/office/drawing/2014/main" id="{50CA01B3-8C10-4B74-B85E-9779F9C2D09A}"/>
+          <p:cNvPr id="11" name="c3-text-181">
+            <a:extLst xmlns:a="http://schemas.openxmlformats.org/drawingml/2006/main">
+              <a:ext uri="{FF2B5EF4-FFF2-40B4-BE49-F238E27FC236}">
+                <a16:creationId xmlns:a16="http://schemas.microsoft.com/office/drawing/2014/main" id="{4D905D96-3C30-41A5-8A51-0B10B4ACC94D}"/>
               </a:ext>
             </a:extLst>
           </p:cNvPr>
@@ -8004,10 +7946,10 @@
       </p:sp>
       <p:sp>
         <p:nvSpPr>
-          <p:cNvPr id="12" name="c3-text-183">
-            <a:extLst xmlns:a="http://schemas.openxmlformats.org/drawingml/2006/main">
-              <a:ext uri="{FF2B5EF4-FFF2-40B4-BE49-F238E27FC236}">
-                <a16:creationId xmlns:a16="http://schemas.microsoft.com/office/drawing/2014/main" id="{BAC17EAC-1AA0-48A2-B44C-5048CC087CD5}"/>
+          <p:cNvPr id="12" name="c3-text-182">
+            <a:extLst xmlns:a="http://schemas.openxmlformats.org/drawingml/2006/main">
+              <a:ext uri="{FF2B5EF4-FFF2-40B4-BE49-F238E27FC236}">
+                <a16:creationId xmlns:a16="http://schemas.microsoft.com/office/drawing/2014/main" id="{9D3CFC7D-9AE9-4B48-BCBD-C1AD1D17A00A}"/>
               </a:ext>
             </a:extLst>
           </p:cNvPr>
@@ -8061,10 +8003,10 @@
       </p:sp>
       <p:sp>
         <p:nvSpPr>
-          <p:cNvPr id="13" name="c3-shape-184">
-            <a:extLst xmlns:a="http://schemas.openxmlformats.org/drawingml/2006/main">
-              <a:ext uri="{FF2B5EF4-FFF2-40B4-BE49-F238E27FC236}">
-                <a16:creationId xmlns:a16="http://schemas.microsoft.com/office/drawing/2014/main" id="{C3E38FFB-989A-4292-9FF9-A927999D934D}"/>
+          <p:cNvPr id="13" name="c3-shape-183">
+            <a:extLst xmlns:a="http://schemas.openxmlformats.org/drawingml/2006/main">
+              <a:ext uri="{FF2B5EF4-FFF2-40B4-BE49-F238E27FC236}">
+                <a16:creationId xmlns:a16="http://schemas.microsoft.com/office/drawing/2014/main" id="{322854E2-3920-46B6-B30B-426DF8F4AA97}"/>
               </a:ext>
             </a:extLst>
           </p:cNvPr>
@@ -8095,10 +8037,10 @@
       </p:sp>
       <p:sp>
         <p:nvSpPr>
-          <p:cNvPr id="14" name="c3-text-185">
-            <a:extLst xmlns:a="http://schemas.openxmlformats.org/drawingml/2006/main">
-              <a:ext uri="{FF2B5EF4-FFF2-40B4-BE49-F238E27FC236}">
-                <a16:creationId xmlns:a16="http://schemas.microsoft.com/office/drawing/2014/main" id="{68B1A41D-F1BB-4D13-B54A-E1BAB5FFA89E}"/>
+          <p:cNvPr id="14" name="c3-text-184">
+            <a:extLst xmlns:a="http://schemas.openxmlformats.org/drawingml/2006/main">
+              <a:ext uri="{FF2B5EF4-FFF2-40B4-BE49-F238E27FC236}">
+                <a16:creationId xmlns:a16="http://schemas.microsoft.com/office/drawing/2014/main" id="{B0607065-5072-4881-BAA1-B88F38E95658}"/>
               </a:ext>
             </a:extLst>
           </p:cNvPr>
@@ -8152,10 +8094,10 @@
       </p:sp>
       <p:sp>
         <p:nvSpPr>
-          <p:cNvPr id="15" name="c3-shape-186">
-            <a:extLst xmlns:a="http://schemas.openxmlformats.org/drawingml/2006/main">
-              <a:ext uri="{FF2B5EF4-FFF2-40B4-BE49-F238E27FC236}">
-                <a16:creationId xmlns:a16="http://schemas.microsoft.com/office/drawing/2014/main" id="{A6488A14-CC82-4335-B5B3-708E7F28B915}"/>
+          <p:cNvPr id="15" name="c3-shape-185">
+            <a:extLst xmlns:a="http://schemas.openxmlformats.org/drawingml/2006/main">
+              <a:ext uri="{FF2B5EF4-FFF2-40B4-BE49-F238E27FC236}">
+                <a16:creationId xmlns:a16="http://schemas.microsoft.com/office/drawing/2014/main" id="{0D07F45E-441F-402D-8488-5586E1E94934}"/>
               </a:ext>
             </a:extLst>
           </p:cNvPr>
@@ -8184,10 +8126,10 @@
       </p:sp>
       <p:sp>
         <p:nvSpPr>
-          <p:cNvPr id="16" name="c3-shape-187">
-            <a:extLst xmlns:a="http://schemas.openxmlformats.org/drawingml/2006/main">
-              <a:ext uri="{FF2B5EF4-FFF2-40B4-BE49-F238E27FC236}">
-                <a16:creationId xmlns:a16="http://schemas.microsoft.com/office/drawing/2014/main" id="{4E8CFD78-26EA-4BDB-9947-AECFC178F573}"/>
+          <p:cNvPr id="16" name="c3-shape-186">
+            <a:extLst xmlns:a="http://schemas.openxmlformats.org/drawingml/2006/main">
+              <a:ext uri="{FF2B5EF4-FFF2-40B4-BE49-F238E27FC236}">
+                <a16:creationId xmlns:a16="http://schemas.microsoft.com/office/drawing/2014/main" id="{EDC8D76C-A267-4719-BA8A-E4D974AA2DD7}"/>
               </a:ext>
             </a:extLst>
           </p:cNvPr>
@@ -8218,10 +8160,10 @@
       </p:sp>
       <p:sp>
         <p:nvSpPr>
-          <p:cNvPr id="17" name="c3-text-188">
-            <a:extLst xmlns:a="http://schemas.openxmlformats.org/drawingml/2006/main">
-              <a:ext uri="{FF2B5EF4-FFF2-40B4-BE49-F238E27FC236}">
-                <a16:creationId xmlns:a16="http://schemas.microsoft.com/office/drawing/2014/main" id="{17FE4985-9EDD-4FCF-8123-64C4E7437D9F}"/>
+          <p:cNvPr id="17" name="c3-text-187">
+            <a:extLst xmlns:a="http://schemas.openxmlformats.org/drawingml/2006/main">
+              <a:ext uri="{FF2B5EF4-FFF2-40B4-BE49-F238E27FC236}">
+                <a16:creationId xmlns:a16="http://schemas.microsoft.com/office/drawing/2014/main" id="{13BBB929-9979-459D-8498-B42DFD106732}"/>
               </a:ext>
             </a:extLst>
           </p:cNvPr>
@@ -8275,10 +8217,10 @@
       </p:sp>
       <p:sp>
         <p:nvSpPr>
-          <p:cNvPr id="18" name="c3-shape-189">
-            <a:extLst xmlns:a="http://schemas.openxmlformats.org/drawingml/2006/main">
-              <a:ext uri="{FF2B5EF4-FFF2-40B4-BE49-F238E27FC236}">
-                <a16:creationId xmlns:a16="http://schemas.microsoft.com/office/drawing/2014/main" id="{E8CB0885-E164-4A38-B2E8-1FE704D33E6B}"/>
+          <p:cNvPr id="18" name="c3-shape-188">
+            <a:extLst xmlns:a="http://schemas.openxmlformats.org/drawingml/2006/main">
+              <a:ext uri="{FF2B5EF4-FFF2-40B4-BE49-F238E27FC236}">
+                <a16:creationId xmlns:a16="http://schemas.microsoft.com/office/drawing/2014/main" id="{F897472A-A373-462B-8F17-C90147C1BC59}"/>
               </a:ext>
             </a:extLst>
           </p:cNvPr>
@@ -8307,10 +8249,10 @@
       </p:sp>
       <p:sp>
         <p:nvSpPr>
-          <p:cNvPr id="19" name="c3-text-190">
-            <a:extLst xmlns:a="http://schemas.openxmlformats.org/drawingml/2006/main">
-              <a:ext uri="{FF2B5EF4-FFF2-40B4-BE49-F238E27FC236}">
-                <a16:creationId xmlns:a16="http://schemas.microsoft.com/office/drawing/2014/main" id="{76E89234-14D8-4BBF-B91E-C1F09F5E81AE}"/>
+          <p:cNvPr id="19" name="c3-text-189">
+            <a:extLst xmlns:a="http://schemas.openxmlformats.org/drawingml/2006/main">
+              <a:ext uri="{FF2B5EF4-FFF2-40B4-BE49-F238E27FC236}">
+                <a16:creationId xmlns:a16="http://schemas.microsoft.com/office/drawing/2014/main" id="{1E537ECD-58D2-4993-B929-53AA9659D2FC}"/>
               </a:ext>
             </a:extLst>
           </p:cNvPr>
@@ -8364,10 +8306,10 @@
       </p:sp>
       <p:sp>
         <p:nvSpPr>
-          <p:cNvPr id="20" name="c3-shape-191">
-            <a:extLst xmlns:a="http://schemas.openxmlformats.org/drawingml/2006/main">
-              <a:ext uri="{FF2B5EF4-FFF2-40B4-BE49-F238E27FC236}">
-                <a16:creationId xmlns:a16="http://schemas.microsoft.com/office/drawing/2014/main" id="{8B2BB90C-941B-423A-9DC1-D224F7545D74}"/>
+          <p:cNvPr id="20" name="c3-shape-190">
+            <a:extLst xmlns:a="http://schemas.openxmlformats.org/drawingml/2006/main">
+              <a:ext uri="{FF2B5EF4-FFF2-40B4-BE49-F238E27FC236}">
+                <a16:creationId xmlns:a16="http://schemas.microsoft.com/office/drawing/2014/main" id="{E47B317B-C927-454E-974F-39BA834E2438}"/>
               </a:ext>
             </a:extLst>
           </p:cNvPr>
@@ -8396,10 +8338,10 @@
       </p:sp>
       <p:sp>
         <p:nvSpPr>
-          <p:cNvPr id="21" name="c3-shape-192">
-            <a:extLst xmlns:a="http://schemas.openxmlformats.org/drawingml/2006/main">
-              <a:ext uri="{FF2B5EF4-FFF2-40B4-BE49-F238E27FC236}">
-                <a16:creationId xmlns:a16="http://schemas.microsoft.com/office/drawing/2014/main" id="{EE71F16B-AB87-40CD-BE37-FC5EA86BF737}"/>
+          <p:cNvPr id="21" name="c3-shape-191">
+            <a:extLst xmlns:a="http://schemas.openxmlformats.org/drawingml/2006/main">
+              <a:ext uri="{FF2B5EF4-FFF2-40B4-BE49-F238E27FC236}">
+                <a16:creationId xmlns:a16="http://schemas.microsoft.com/office/drawing/2014/main" id="{FD88FD48-FC6A-4175-8730-C33CBF149C43}"/>
               </a:ext>
             </a:extLst>
           </p:cNvPr>
@@ -8428,10 +8370,10 @@
       </p:sp>
       <p:sp>
         <p:nvSpPr>
-          <p:cNvPr id="22" name="c3-shape-193">
-            <a:extLst xmlns:a="http://schemas.openxmlformats.org/drawingml/2006/main">
-              <a:ext uri="{FF2B5EF4-FFF2-40B4-BE49-F238E27FC236}">
-                <a16:creationId xmlns:a16="http://schemas.microsoft.com/office/drawing/2014/main" id="{3409DC82-C7A9-47C1-8217-8D57EB984A66}"/>
+          <p:cNvPr id="22" name="c3-shape-192">
+            <a:extLst xmlns:a="http://schemas.openxmlformats.org/drawingml/2006/main">
+              <a:ext uri="{FF2B5EF4-FFF2-40B4-BE49-F238E27FC236}">
+                <a16:creationId xmlns:a16="http://schemas.microsoft.com/office/drawing/2014/main" id="{AB6D8262-F6DA-4573-944C-797CEB9F187D}"/>
               </a:ext>
             </a:extLst>
           </p:cNvPr>
@@ -8460,10 +8402,10 @@
       </p:sp>
       <p:sp>
         <p:nvSpPr>
-          <p:cNvPr id="23" name="c3-text-194">
-            <a:extLst xmlns:a="http://schemas.openxmlformats.org/drawingml/2006/main">
-              <a:ext uri="{FF2B5EF4-FFF2-40B4-BE49-F238E27FC236}">
-                <a16:creationId xmlns:a16="http://schemas.microsoft.com/office/drawing/2014/main" id="{F5ACA0CE-5177-4AB8-8A83-29572BCDDF1D}"/>
+          <p:cNvPr id="23" name="c3-text-193">
+            <a:extLst xmlns:a="http://schemas.openxmlformats.org/drawingml/2006/main">
+              <a:ext uri="{FF2B5EF4-FFF2-40B4-BE49-F238E27FC236}">
+                <a16:creationId xmlns:a16="http://schemas.microsoft.com/office/drawing/2014/main" id="{C8C95989-58F7-4B4A-99B1-0E1A96ADF5A6}"/>
               </a:ext>
             </a:extLst>
           </p:cNvPr>
@@ -8517,10 +8459,10 @@
       </p:sp>
       <p:sp>
         <p:nvSpPr>
-          <p:cNvPr id="24" name="c3-text-195">
-            <a:extLst xmlns:a="http://schemas.openxmlformats.org/drawingml/2006/main">
-              <a:ext uri="{FF2B5EF4-FFF2-40B4-BE49-F238E27FC236}">
-                <a16:creationId xmlns:a16="http://schemas.microsoft.com/office/drawing/2014/main" id="{9AC41DA8-3E8A-49D4-A7E1-8096E73BD9F1}"/>
+          <p:cNvPr id="24" name="c3-text-194">
+            <a:extLst xmlns:a="http://schemas.openxmlformats.org/drawingml/2006/main">
+              <a:ext uri="{FF2B5EF4-FFF2-40B4-BE49-F238E27FC236}">
+                <a16:creationId xmlns:a16="http://schemas.microsoft.com/office/drawing/2014/main" id="{06F51AFE-7CA8-4D6C-B87D-D0AC76D45799}"/>
               </a:ext>
             </a:extLst>
           </p:cNvPr>
@@ -8574,10 +8516,10 @@
       </p:sp>
       <p:sp>
         <p:nvSpPr>
-          <p:cNvPr id="25" name="c3-text-326">
-            <a:extLst xmlns:a="http://schemas.openxmlformats.org/drawingml/2006/main">
-              <a:ext uri="{FF2B5EF4-FFF2-40B4-BE49-F238E27FC236}">
-                <a16:creationId xmlns:a16="http://schemas.microsoft.com/office/drawing/2014/main" id="{73ACC0EF-974B-4F42-A283-E5A6E6613829}"/>
+          <p:cNvPr id="25" name="c3-text-324">
+            <a:extLst xmlns:a="http://schemas.openxmlformats.org/drawingml/2006/main">
+              <a:ext uri="{FF2B5EF4-FFF2-40B4-BE49-F238E27FC236}">
+                <a16:creationId xmlns:a16="http://schemas.microsoft.com/office/drawing/2014/main" id="{E8F267D3-CF21-434A-AF2C-AEA02AF21DE8}"/>
               </a:ext>
             </a:extLst>
           </p:cNvPr>
@@ -8632,7 +8574,7 @@
     </p:spTree>
     <p:extLst>
       <p:ext uri="{BB962C8B-B14F-4D97-AF65-F5344CB8AC3E}">
-        <p14:creationId xmlns:p14="http://schemas.microsoft.com/office/powerpoint/2010/main" val="346269742"/>
+        <p14:creationId xmlns:p14="http://schemas.microsoft.com/office/powerpoint/2010/main" val="732418880"/>
       </p:ext>
     </p:extLst>
   </p:cSld>
@@ -8660,10 +8602,10 @@
       </p:grpSpPr>
       <p:sp>
         <p:nvSpPr>
-          <p:cNvPr id="10" name="c3-text-196">
-            <a:extLst xmlns:a="http://schemas.openxmlformats.org/drawingml/2006/main">
-              <a:ext uri="{FF2B5EF4-FFF2-40B4-BE49-F238E27FC236}">
-                <a16:creationId xmlns:a16="http://schemas.microsoft.com/office/drawing/2014/main" id="{A2DFAE29-5795-4A4B-8A80-931C3DACDAB2}"/>
+          <p:cNvPr id="10" name="c3-text-195">
+            <a:extLst xmlns:a="http://schemas.openxmlformats.org/drawingml/2006/main">
+              <a:ext uri="{FF2B5EF4-FFF2-40B4-BE49-F238E27FC236}">
+                <a16:creationId xmlns:a16="http://schemas.microsoft.com/office/drawing/2014/main" id="{203665FE-5548-42B8-B22D-94CD6F8AD095}"/>
               </a:ext>
             </a:extLst>
           </p:cNvPr>
@@ -8717,10 +8659,10 @@
       </p:sp>
       <p:sp>
         <p:nvSpPr>
-          <p:cNvPr id="2" name="c3-text-197">
-            <a:extLst xmlns:a="http://schemas.openxmlformats.org/drawingml/2006/main">
-              <a:ext uri="{FF2B5EF4-FFF2-40B4-BE49-F238E27FC236}">
-                <a16:creationId xmlns:a16="http://schemas.microsoft.com/office/drawing/2014/main" id="{68EA408B-C9FC-458A-9496-2E4016813B3C}"/>
+          <p:cNvPr id="2" name="c3-text-196">
+            <a:extLst xmlns:a="http://schemas.openxmlformats.org/drawingml/2006/main">
+              <a:ext uri="{FF2B5EF4-FFF2-40B4-BE49-F238E27FC236}">
+                <a16:creationId xmlns:a16="http://schemas.microsoft.com/office/drawing/2014/main" id="{4DC060CA-D51D-454C-8E36-95350D0F99A7}"/>
               </a:ext>
             </a:extLst>
           </p:cNvPr>
@@ -8774,10 +8716,10 @@
       </p:sp>
       <p:sp>
         <p:nvSpPr>
-          <p:cNvPr id="3" name="c3-text-198">
-            <a:extLst xmlns:a="http://schemas.openxmlformats.org/drawingml/2006/main">
-              <a:ext uri="{FF2B5EF4-FFF2-40B4-BE49-F238E27FC236}">
-                <a16:creationId xmlns:a16="http://schemas.microsoft.com/office/drawing/2014/main" id="{2DD7E0DA-C89C-4422-A99F-6924104B891B}"/>
+          <p:cNvPr id="3" name="c3-text-197">
+            <a:extLst xmlns:a="http://schemas.openxmlformats.org/drawingml/2006/main">
+              <a:ext uri="{FF2B5EF4-FFF2-40B4-BE49-F238E27FC236}">
+                <a16:creationId xmlns:a16="http://schemas.microsoft.com/office/drawing/2014/main" id="{9C6AC457-626D-47EE-B5E8-7A7941BC04A4}"/>
               </a:ext>
             </a:extLst>
           </p:cNvPr>
@@ -8831,10 +8773,10 @@
       </p:sp>
       <p:sp>
         <p:nvSpPr>
-          <p:cNvPr id="4" name="c3-shape-199">
-            <a:extLst xmlns:a="http://schemas.openxmlformats.org/drawingml/2006/main">
-              <a:ext uri="{FF2B5EF4-FFF2-40B4-BE49-F238E27FC236}">
-                <a16:creationId xmlns:a16="http://schemas.microsoft.com/office/drawing/2014/main" id="{DC5C1C83-A63A-4694-B480-E0DE216B92C9}"/>
+          <p:cNvPr id="4" name="c3-shape-198">
+            <a:extLst xmlns:a="http://schemas.openxmlformats.org/drawingml/2006/main">
+              <a:ext uri="{FF2B5EF4-FFF2-40B4-BE49-F238E27FC236}">
+                <a16:creationId xmlns:a16="http://schemas.microsoft.com/office/drawing/2014/main" id="{4A34CC17-357D-4AEE-853C-C76CFD6A89D8}"/>
               </a:ext>
             </a:extLst>
           </p:cNvPr>
@@ -8865,10 +8807,10 @@
       </p:sp>
       <p:sp>
         <p:nvSpPr>
-          <p:cNvPr id="5" name="c3-text-200">
-            <a:extLst xmlns:a="http://schemas.openxmlformats.org/drawingml/2006/main">
-              <a:ext uri="{FF2B5EF4-FFF2-40B4-BE49-F238E27FC236}">
-                <a16:creationId xmlns:a16="http://schemas.microsoft.com/office/drawing/2014/main" id="{4CEA15D9-5915-40BD-9B86-FB67A4FF5425}"/>
+          <p:cNvPr id="5" name="c3-text-199">
+            <a:extLst xmlns:a="http://schemas.openxmlformats.org/drawingml/2006/main">
+              <a:ext uri="{FF2B5EF4-FFF2-40B4-BE49-F238E27FC236}">
+                <a16:creationId xmlns:a16="http://schemas.microsoft.com/office/drawing/2014/main" id="{CA696BA0-6F58-4029-8F33-AF995F1CCBB3}"/>
               </a:ext>
             </a:extLst>
           </p:cNvPr>
@@ -9110,10 +9052,10 @@
       </p:sp>
       <p:sp>
         <p:nvSpPr>
-          <p:cNvPr id="6" name="c3-text-201">
-            <a:extLst xmlns:a="http://schemas.openxmlformats.org/drawingml/2006/main">
-              <a:ext uri="{FF2B5EF4-FFF2-40B4-BE49-F238E27FC236}">
-                <a16:creationId xmlns:a16="http://schemas.microsoft.com/office/drawing/2014/main" id="{3AC63F04-F83E-4420-A60D-D93E2A19A808}"/>
+          <p:cNvPr id="6" name="c3-text-200">
+            <a:extLst xmlns:a="http://schemas.openxmlformats.org/drawingml/2006/main">
+              <a:ext uri="{FF2B5EF4-FFF2-40B4-BE49-F238E27FC236}">
+                <a16:creationId xmlns:a16="http://schemas.microsoft.com/office/drawing/2014/main" id="{6A7519F0-8275-47A2-AF11-046CC6C1DCA0}"/>
               </a:ext>
             </a:extLst>
           </p:cNvPr>
@@ -9167,10 +9109,10 @@
       </p:sp>
       <p:sp>
         <p:nvSpPr>
-          <p:cNvPr id="7" name="c3-shape-202">
-            <a:extLst xmlns:a="http://schemas.openxmlformats.org/drawingml/2006/main">
-              <a:ext uri="{FF2B5EF4-FFF2-40B4-BE49-F238E27FC236}">
-                <a16:creationId xmlns:a16="http://schemas.microsoft.com/office/drawing/2014/main" id="{684684BA-9718-47BA-8785-4A6958D0423F}"/>
+          <p:cNvPr id="7" name="c3-shape-201">
+            <a:extLst xmlns:a="http://schemas.openxmlformats.org/drawingml/2006/main">
+              <a:ext uri="{FF2B5EF4-FFF2-40B4-BE49-F238E27FC236}">
+                <a16:creationId xmlns:a16="http://schemas.microsoft.com/office/drawing/2014/main" id="{091E2B02-058C-4706-A90E-02D2E7E13D6C}"/>
               </a:ext>
             </a:extLst>
           </p:cNvPr>
@@ -9201,10 +9143,10 @@
       </p:sp>
       <p:sp>
         <p:nvSpPr>
-          <p:cNvPr id="8" name="c3-text-203">
-            <a:extLst xmlns:a="http://schemas.openxmlformats.org/drawingml/2006/main">
-              <a:ext uri="{FF2B5EF4-FFF2-40B4-BE49-F238E27FC236}">
-                <a16:creationId xmlns:a16="http://schemas.microsoft.com/office/drawing/2014/main" id="{49CC2052-4BC1-4834-B8BB-881A6E32D555}"/>
+          <p:cNvPr id="8" name="c3-text-202">
+            <a:extLst xmlns:a="http://schemas.openxmlformats.org/drawingml/2006/main">
+              <a:ext uri="{FF2B5EF4-FFF2-40B4-BE49-F238E27FC236}">
+                <a16:creationId xmlns:a16="http://schemas.microsoft.com/office/drawing/2014/main" id="{9DE942A3-0150-45C9-83F3-2847694A8DB0}"/>
               </a:ext>
             </a:extLst>
           </p:cNvPr>
@@ -9548,10 +9490,10 @@
       </p:sp>
       <p:sp>
         <p:nvSpPr>
-          <p:cNvPr id="9" name="c3-text-327">
-            <a:extLst xmlns:a="http://schemas.openxmlformats.org/drawingml/2006/main">
-              <a:ext uri="{FF2B5EF4-FFF2-40B4-BE49-F238E27FC236}">
-                <a16:creationId xmlns:a16="http://schemas.microsoft.com/office/drawing/2014/main" id="{954BD8B5-2DF3-4CDD-A089-E192F6747CE8}"/>
+          <p:cNvPr id="9" name="c3-text-325">
+            <a:extLst xmlns:a="http://schemas.openxmlformats.org/drawingml/2006/main">
+              <a:ext uri="{FF2B5EF4-FFF2-40B4-BE49-F238E27FC236}">
+                <a16:creationId xmlns:a16="http://schemas.microsoft.com/office/drawing/2014/main" id="{82534A44-F731-4C49-ADFC-EFD848F819FD}"/>
               </a:ext>
             </a:extLst>
           </p:cNvPr>
@@ -9606,7 +9548,7 @@
     </p:spTree>
     <p:extLst>
       <p:ext uri="{BB962C8B-B14F-4D97-AF65-F5344CB8AC3E}">
-        <p14:creationId xmlns:p14="http://schemas.microsoft.com/office/powerpoint/2010/main" val="1304923711"/>
+        <p14:creationId xmlns:p14="http://schemas.microsoft.com/office/powerpoint/2010/main" val="1267360527"/>
       </p:ext>
     </p:extLst>
   </p:cSld>
@@ -9634,10 +9576,10 @@
       </p:grpSpPr>
       <p:sp>
         <p:nvSpPr>
-          <p:cNvPr id="9" name="c3-text-204">
-            <a:extLst xmlns:a="http://schemas.openxmlformats.org/drawingml/2006/main">
-              <a:ext uri="{FF2B5EF4-FFF2-40B4-BE49-F238E27FC236}">
-                <a16:creationId xmlns:a16="http://schemas.microsoft.com/office/drawing/2014/main" id="{1023444F-ADD0-4C84-8B24-90593BD5DF87}"/>
+          <p:cNvPr id="9" name="c3-text-203">
+            <a:extLst xmlns:a="http://schemas.openxmlformats.org/drawingml/2006/main">
+              <a:ext uri="{FF2B5EF4-FFF2-40B4-BE49-F238E27FC236}">
+                <a16:creationId xmlns:a16="http://schemas.microsoft.com/office/drawing/2014/main" id="{1A12218C-C883-4CB4-A773-53B42741229B}"/>
               </a:ext>
             </a:extLst>
           </p:cNvPr>
@@ -9691,10 +9633,10 @@
       </p:sp>
       <p:sp>
         <p:nvSpPr>
-          <p:cNvPr id="2" name="c3-text-205">
-            <a:extLst xmlns:a="http://schemas.openxmlformats.org/drawingml/2006/main">
-              <a:ext uri="{FF2B5EF4-FFF2-40B4-BE49-F238E27FC236}">
-                <a16:creationId xmlns:a16="http://schemas.microsoft.com/office/drawing/2014/main" id="{0372B8AF-6059-4E2C-A79D-AC36FAFA4AD5}"/>
+          <p:cNvPr id="2" name="c3-text-204">
+            <a:extLst xmlns:a="http://schemas.openxmlformats.org/drawingml/2006/main">
+              <a:ext uri="{FF2B5EF4-FFF2-40B4-BE49-F238E27FC236}">
+                <a16:creationId xmlns:a16="http://schemas.microsoft.com/office/drawing/2014/main" id="{8605535B-3307-4BCE-B3D1-75161E3243B5}"/>
               </a:ext>
             </a:extLst>
           </p:cNvPr>
@@ -9748,10 +9690,10 @@
       </p:sp>
       <p:sp>
         <p:nvSpPr>
-          <p:cNvPr id="3" name="c3-text-206">
-            <a:extLst xmlns:a="http://schemas.openxmlformats.org/drawingml/2006/main">
-              <a:ext uri="{FF2B5EF4-FFF2-40B4-BE49-F238E27FC236}">
-                <a16:creationId xmlns:a16="http://schemas.microsoft.com/office/drawing/2014/main" id="{1A532708-A2F8-42AA-8310-059E11B5AE29}"/>
+          <p:cNvPr id="3" name="c3-text-205">
+            <a:extLst xmlns:a="http://schemas.openxmlformats.org/drawingml/2006/main">
+              <a:ext uri="{FF2B5EF4-FFF2-40B4-BE49-F238E27FC236}">
+                <a16:creationId xmlns:a16="http://schemas.microsoft.com/office/drawing/2014/main" id="{EC3D0853-DDB8-4C9A-BDFB-7DD9DB49B069}"/>
               </a:ext>
             </a:extLst>
           </p:cNvPr>
@@ -9805,11 +9747,11 @@
       </p:sp>
       <p:sp>
         <p:nvSpPr>
-          <p:cNvPr id="4" name="c3-text-207">
-            <a:hlinkClick xmlns:r="http://schemas.openxmlformats.org/officeDocument/2006/relationships" xmlns:a="http://schemas.openxmlformats.org/drawingml/2006/main" r:id="R85cbd8b9c9f34c4f"/>
-            <a:extLst xmlns:a="http://schemas.openxmlformats.org/drawingml/2006/main">
-              <a:ext uri="{FF2B5EF4-FFF2-40B4-BE49-F238E27FC236}">
-                <a16:creationId xmlns:a16="http://schemas.microsoft.com/office/drawing/2014/main" id="{5EA64679-ABD8-4BD4-8C82-1C33B5528CC4}"/>
+          <p:cNvPr id="4" name="c3-text-206">
+            <a:hlinkClick xmlns:r="http://schemas.openxmlformats.org/officeDocument/2006/relationships" xmlns:a="http://schemas.openxmlformats.org/drawingml/2006/main" r:id="R700acb241c874853"/>
+            <a:extLst xmlns:a="http://schemas.openxmlformats.org/drawingml/2006/main">
+              <a:ext uri="{FF2B5EF4-FFF2-40B4-BE49-F238E27FC236}">
+                <a16:creationId xmlns:a16="http://schemas.microsoft.com/office/drawing/2014/main" id="{CE98F11E-3478-4361-8A97-4CBC534E1602}"/>
               </a:ext>
             </a:extLst>
           </p:cNvPr>
@@ -9863,10 +9805,10 @@
       </p:sp>
       <p:sp>
         <p:nvSpPr>
-          <p:cNvPr id="5" name="c3-text-208">
-            <a:extLst xmlns:a="http://schemas.openxmlformats.org/drawingml/2006/main">
-              <a:ext uri="{FF2B5EF4-FFF2-40B4-BE49-F238E27FC236}">
-                <a16:creationId xmlns:a16="http://schemas.microsoft.com/office/drawing/2014/main" id="{86EFFD7E-0311-4668-85C3-DAFC17A75523}"/>
+          <p:cNvPr id="5" name="c3-text-207">
+            <a:extLst xmlns:a="http://schemas.openxmlformats.org/drawingml/2006/main">
+              <a:ext uri="{FF2B5EF4-FFF2-40B4-BE49-F238E27FC236}">
+                <a16:creationId xmlns:a16="http://schemas.microsoft.com/office/drawing/2014/main" id="{84CE2A72-6DBF-4835-9C61-861D379FAD6D}"/>
               </a:ext>
             </a:extLst>
           </p:cNvPr>
@@ -9920,11 +9862,11 @@
       </p:sp>
       <p:sp>
         <p:nvSpPr>
-          <p:cNvPr id="6" name="c3-text-209">
-            <a:hlinkClick xmlns:r="http://schemas.openxmlformats.org/officeDocument/2006/relationships" xmlns:a="http://schemas.openxmlformats.org/drawingml/2006/main" r:id="R369b5f4974104979"/>
-            <a:extLst xmlns:a="http://schemas.openxmlformats.org/drawingml/2006/main">
-              <a:ext uri="{FF2B5EF4-FFF2-40B4-BE49-F238E27FC236}">
-                <a16:creationId xmlns:a16="http://schemas.microsoft.com/office/drawing/2014/main" id="{3B70FB41-381A-481F-B4D7-6383AB503F9C}"/>
+          <p:cNvPr id="6" name="c3-text-208">
+            <a:hlinkClick xmlns:r="http://schemas.openxmlformats.org/officeDocument/2006/relationships" xmlns:a="http://schemas.openxmlformats.org/drawingml/2006/main" r:id="R0140a672fc7040e5"/>
+            <a:extLst xmlns:a="http://schemas.openxmlformats.org/drawingml/2006/main">
+              <a:ext uri="{FF2B5EF4-FFF2-40B4-BE49-F238E27FC236}">
+                <a16:creationId xmlns:a16="http://schemas.microsoft.com/office/drawing/2014/main" id="{B90C5ED4-5560-4016-8FC3-720D2F2BE568}"/>
               </a:ext>
             </a:extLst>
           </p:cNvPr>
@@ -9978,10 +9920,10 @@
       </p:sp>
       <p:sp>
         <p:nvSpPr>
-          <p:cNvPr id="7" name="c3-text-210">
-            <a:extLst xmlns:a="http://schemas.openxmlformats.org/drawingml/2006/main">
-              <a:ext uri="{FF2B5EF4-FFF2-40B4-BE49-F238E27FC236}">
-                <a16:creationId xmlns:a16="http://schemas.microsoft.com/office/drawing/2014/main" id="{CC0CB196-2459-4E3B-AEC5-1A5D5DFF2AA0}"/>
+          <p:cNvPr id="7" name="c3-text-209">
+            <a:extLst xmlns:a="http://schemas.openxmlformats.org/drawingml/2006/main">
+              <a:ext uri="{FF2B5EF4-FFF2-40B4-BE49-F238E27FC236}">
+                <a16:creationId xmlns:a16="http://schemas.microsoft.com/office/drawing/2014/main" id="{6947C0CE-5CF9-4B5E-9976-AE1A2431D53B}"/>
               </a:ext>
             </a:extLst>
           </p:cNvPr>
@@ -10035,10 +9977,10 @@
       </p:sp>
       <p:sp>
         <p:nvSpPr>
-          <p:cNvPr id="8" name="c3-text-328">
-            <a:extLst xmlns:a="http://schemas.openxmlformats.org/drawingml/2006/main">
-              <a:ext uri="{FF2B5EF4-FFF2-40B4-BE49-F238E27FC236}">
-                <a16:creationId xmlns:a16="http://schemas.microsoft.com/office/drawing/2014/main" id="{3DFA0FBF-A7F8-476F-8CC8-343656216AD1}"/>
+          <p:cNvPr id="8" name="c3-text-326">
+            <a:extLst xmlns:a="http://schemas.openxmlformats.org/drawingml/2006/main">
+              <a:ext uri="{FF2B5EF4-FFF2-40B4-BE49-F238E27FC236}">
+                <a16:creationId xmlns:a16="http://schemas.microsoft.com/office/drawing/2014/main" id="{81427726-C953-446A-92EA-618D56DADEC1}"/>
               </a:ext>
             </a:extLst>
           </p:cNvPr>
@@ -10093,7 +10035,7 @@
     </p:spTree>
     <p:extLst>
       <p:ext uri="{BB962C8B-B14F-4D97-AF65-F5344CB8AC3E}">
-        <p14:creationId xmlns:p14="http://schemas.microsoft.com/office/powerpoint/2010/main" val="2090271613"/>
+        <p14:creationId xmlns:p14="http://schemas.microsoft.com/office/powerpoint/2010/main" val="292981810"/>
       </p:ext>
     </p:extLst>
   </p:cSld>
@@ -10121,10 +10063,10 @@
       </p:grpSpPr>
       <p:sp>
         <p:nvSpPr>
-          <p:cNvPr id="9" name="c3-text-211">
-            <a:extLst xmlns:a="http://schemas.openxmlformats.org/drawingml/2006/main">
-              <a:ext uri="{FF2B5EF4-FFF2-40B4-BE49-F238E27FC236}">
-                <a16:creationId xmlns:a16="http://schemas.microsoft.com/office/drawing/2014/main" id="{D2ACFB04-3EE7-4E77-993D-AA1204059F88}"/>
+          <p:cNvPr id="9" name="c3-text-210">
+            <a:extLst xmlns:a="http://schemas.openxmlformats.org/drawingml/2006/main">
+              <a:ext uri="{FF2B5EF4-FFF2-40B4-BE49-F238E27FC236}">
+                <a16:creationId xmlns:a16="http://schemas.microsoft.com/office/drawing/2014/main" id="{9A4C4ED3-F8B4-4B7C-94F9-E9338F189F3C}"/>
               </a:ext>
             </a:extLst>
           </p:cNvPr>
@@ -10178,10 +10120,10 @@
       </p:sp>
       <p:sp>
         <p:nvSpPr>
-          <p:cNvPr id="2" name="c3-text-212">
-            <a:extLst xmlns:a="http://schemas.openxmlformats.org/drawingml/2006/main">
-              <a:ext uri="{FF2B5EF4-FFF2-40B4-BE49-F238E27FC236}">
-                <a16:creationId xmlns:a16="http://schemas.microsoft.com/office/drawing/2014/main" id="{11B7671D-8CD3-4426-A3AA-18B4C26A8B2E}"/>
+          <p:cNvPr id="2" name="c3-text-211">
+            <a:extLst xmlns:a="http://schemas.openxmlformats.org/drawingml/2006/main">
+              <a:ext uri="{FF2B5EF4-FFF2-40B4-BE49-F238E27FC236}">
+                <a16:creationId xmlns:a16="http://schemas.microsoft.com/office/drawing/2014/main" id="{BA90458C-88EA-46C7-BAE8-3F9EA8306AE3}"/>
               </a:ext>
             </a:extLst>
           </p:cNvPr>
@@ -10235,10 +10177,10 @@
       </p:sp>
       <p:sp>
         <p:nvSpPr>
-          <p:cNvPr id="3" name="c3-text-213">
-            <a:extLst xmlns:a="http://schemas.openxmlformats.org/drawingml/2006/main">
-              <a:ext uri="{FF2B5EF4-FFF2-40B4-BE49-F238E27FC236}">
-                <a16:creationId xmlns:a16="http://schemas.microsoft.com/office/drawing/2014/main" id="{7B7230A6-0143-4B6A-9106-B4A0E164C8C1}"/>
+          <p:cNvPr id="3" name="c3-text-212">
+            <a:extLst xmlns:a="http://schemas.openxmlformats.org/drawingml/2006/main">
+              <a:ext uri="{FF2B5EF4-FFF2-40B4-BE49-F238E27FC236}">
+                <a16:creationId xmlns:a16="http://schemas.microsoft.com/office/drawing/2014/main" id="{AA79FAE8-C68F-46D4-BE64-5F72E379B5E0}"/>
               </a:ext>
             </a:extLst>
           </p:cNvPr>
@@ -10292,10 +10234,10 @@
       </p:sp>
       <p:sp>
         <p:nvSpPr>
-          <p:cNvPr id="4" name="c3-text-214">
-            <a:extLst xmlns:a="http://schemas.openxmlformats.org/drawingml/2006/main">
-              <a:ext uri="{FF2B5EF4-FFF2-40B4-BE49-F238E27FC236}">
-                <a16:creationId xmlns:a16="http://schemas.microsoft.com/office/drawing/2014/main" id="{F0347495-D2C8-4109-BCAE-233CF4CBBAAB}"/>
+          <p:cNvPr id="4" name="c3-text-213">
+            <a:extLst xmlns:a="http://schemas.openxmlformats.org/drawingml/2006/main">
+              <a:ext uri="{FF2B5EF4-FFF2-40B4-BE49-F238E27FC236}">
+                <a16:creationId xmlns:a16="http://schemas.microsoft.com/office/drawing/2014/main" id="{87273C7D-8632-4796-94A8-67A44625089F}"/>
               </a:ext>
             </a:extLst>
           </p:cNvPr>
@@ -10349,10 +10291,10 @@
       </p:sp>
       <p:sp>
         <p:nvSpPr>
-          <p:cNvPr id="5" name="c3-shape-215">
-            <a:extLst xmlns:a="http://schemas.openxmlformats.org/drawingml/2006/main">
-              <a:ext uri="{FF2B5EF4-FFF2-40B4-BE49-F238E27FC236}">
-                <a16:creationId xmlns:a16="http://schemas.microsoft.com/office/drawing/2014/main" id="{197AC459-E9EE-4F0D-AFB0-CA3E120854A5}"/>
+          <p:cNvPr id="5" name="c3-shape-214">
+            <a:extLst xmlns:a="http://schemas.openxmlformats.org/drawingml/2006/main">
+              <a:ext uri="{FF2B5EF4-FFF2-40B4-BE49-F238E27FC236}">
+                <a16:creationId xmlns:a16="http://schemas.microsoft.com/office/drawing/2014/main" id="{939CB703-6A1C-48E6-9942-F8DA648F9BD3}"/>
               </a:ext>
             </a:extLst>
           </p:cNvPr>
@@ -10383,10 +10325,10 @@
       </p:sp>
       <p:sp>
         <p:nvSpPr>
-          <p:cNvPr id="6" name="c3-text-216">
-            <a:extLst xmlns:a="http://schemas.openxmlformats.org/drawingml/2006/main">
-              <a:ext uri="{FF2B5EF4-FFF2-40B4-BE49-F238E27FC236}">
-                <a16:creationId xmlns:a16="http://schemas.microsoft.com/office/drawing/2014/main" id="{9CD74D7B-793D-431A-BA8C-776270FF10AB}"/>
+          <p:cNvPr id="6" name="c3-text-215">
+            <a:extLst xmlns:a="http://schemas.openxmlformats.org/drawingml/2006/main">
+              <a:ext uri="{FF2B5EF4-FFF2-40B4-BE49-F238E27FC236}">
+                <a16:creationId xmlns:a16="http://schemas.microsoft.com/office/drawing/2014/main" id="{591DA5D9-4951-4D27-ADCF-B34C8218A32F}"/>
               </a:ext>
             </a:extLst>
           </p:cNvPr>
@@ -10451,10 +10393,10 @@
       </p:sp>
       <p:sp>
         <p:nvSpPr>
-          <p:cNvPr id="7" name="c3-text-217">
-            <a:extLst xmlns:a="http://schemas.openxmlformats.org/drawingml/2006/main">
-              <a:ext uri="{FF2B5EF4-FFF2-40B4-BE49-F238E27FC236}">
-                <a16:creationId xmlns:a16="http://schemas.microsoft.com/office/drawing/2014/main" id="{86F49F58-2170-4CF8-8464-633889CB49C6}"/>
+          <p:cNvPr id="7" name="c3-text-216">
+            <a:extLst xmlns:a="http://schemas.openxmlformats.org/drawingml/2006/main">
+              <a:ext uri="{FF2B5EF4-FFF2-40B4-BE49-F238E27FC236}">
+                <a16:creationId xmlns:a16="http://schemas.microsoft.com/office/drawing/2014/main" id="{9674AA66-47DD-4592-BCE8-438091E9E05C}"/>
               </a:ext>
             </a:extLst>
           </p:cNvPr>
@@ -10508,10 +10450,10 @@
       </p:sp>
       <p:sp>
         <p:nvSpPr>
-          <p:cNvPr id="8" name="c3-text-329">
-            <a:extLst xmlns:a="http://schemas.openxmlformats.org/drawingml/2006/main">
-              <a:ext uri="{FF2B5EF4-FFF2-40B4-BE49-F238E27FC236}">
-                <a16:creationId xmlns:a16="http://schemas.microsoft.com/office/drawing/2014/main" id="{45F70CF9-EECD-47E7-8536-CCA4587929DB}"/>
+          <p:cNvPr id="8" name="c3-text-327">
+            <a:extLst xmlns:a="http://schemas.openxmlformats.org/drawingml/2006/main">
+              <a:ext uri="{FF2B5EF4-FFF2-40B4-BE49-F238E27FC236}">
+                <a16:creationId xmlns:a16="http://schemas.microsoft.com/office/drawing/2014/main" id="{1A3FF6D0-35A1-42CC-9137-3C1F8B4A7C8F}"/>
               </a:ext>
             </a:extLst>
           </p:cNvPr>
@@ -10566,7 +10508,7 @@
     </p:spTree>
     <p:extLst>
       <p:ext uri="{BB962C8B-B14F-4D97-AF65-F5344CB8AC3E}">
-        <p14:creationId xmlns:p14="http://schemas.microsoft.com/office/powerpoint/2010/main" val="218930808"/>
+        <p14:creationId xmlns:p14="http://schemas.microsoft.com/office/powerpoint/2010/main" val="427851398"/>
       </p:ext>
     </p:extLst>
   </p:cSld>
@@ -10597,7 +10539,7 @@
           <p:cNvPr id="19" name="c3-text-1">
             <a:extLst xmlns:a="http://schemas.openxmlformats.org/drawingml/2006/main">
               <a:ext uri="{FF2B5EF4-FFF2-40B4-BE49-F238E27FC236}">
-                <a16:creationId xmlns:a16="http://schemas.microsoft.com/office/drawing/2014/main" id="{0E3861A8-6994-416B-B05C-E71F5CADFDC7}"/>
+                <a16:creationId xmlns:a16="http://schemas.microsoft.com/office/drawing/2014/main" id="{75E82D30-1395-46B4-84F6-A8A82D906336}"/>
               </a:ext>
             </a:extLst>
           </p:cNvPr>
@@ -10654,7 +10596,7 @@
           <p:cNvPr id="2" name="c3-text-2">
             <a:extLst xmlns:a="http://schemas.openxmlformats.org/drawingml/2006/main">
               <a:ext uri="{FF2B5EF4-FFF2-40B4-BE49-F238E27FC236}">
-                <a16:creationId xmlns:a16="http://schemas.microsoft.com/office/drawing/2014/main" id="{A3A3C7F6-2D1E-49AF-8004-FCD326798758}"/>
+                <a16:creationId xmlns:a16="http://schemas.microsoft.com/office/drawing/2014/main" id="{7B7A91F1-807E-4628-976C-495E56F98E8F}"/>
               </a:ext>
             </a:extLst>
           </p:cNvPr>
@@ -10711,7 +10653,7 @@
           <p:cNvPr id="3" name="c3-text-3">
             <a:extLst xmlns:a="http://schemas.openxmlformats.org/drawingml/2006/main">
               <a:ext uri="{FF2B5EF4-FFF2-40B4-BE49-F238E27FC236}">
-                <a16:creationId xmlns:a16="http://schemas.microsoft.com/office/drawing/2014/main" id="{AB49749B-0364-40B8-AD9B-D5755B39E2C2}"/>
+                <a16:creationId xmlns:a16="http://schemas.microsoft.com/office/drawing/2014/main" id="{0F14D7AD-781A-4566-9C76-5D4BF9613582}"/>
               </a:ext>
             </a:extLst>
           </p:cNvPr>
@@ -10768,7 +10710,7 @@
           <p:cNvPr id="4" name="c3-shape-4">
             <a:extLst xmlns:a="http://schemas.openxmlformats.org/drawingml/2006/main">
               <a:ext uri="{FF2B5EF4-FFF2-40B4-BE49-F238E27FC236}">
-                <a16:creationId xmlns:a16="http://schemas.microsoft.com/office/drawing/2014/main" id="{5A934EB2-E411-4700-90F5-3244AB03119B}"/>
+                <a16:creationId xmlns:a16="http://schemas.microsoft.com/office/drawing/2014/main" id="{00C629C2-0E67-41E6-AAA7-ED5753111F0E}"/>
               </a:ext>
             </a:extLst>
           </p:cNvPr>
@@ -10802,7 +10744,7 @@
           <p:cNvPr id="5" name="c3-text-5">
             <a:extLst xmlns:a="http://schemas.openxmlformats.org/drawingml/2006/main">
               <a:ext uri="{FF2B5EF4-FFF2-40B4-BE49-F238E27FC236}">
-                <a16:creationId xmlns:a16="http://schemas.microsoft.com/office/drawing/2014/main" id="{0CF27658-DD6B-4028-8C69-2632D4D8EA61}"/>
+                <a16:creationId xmlns:a16="http://schemas.microsoft.com/office/drawing/2014/main" id="{79BB6DEE-891D-4894-B07A-522D84347376}"/>
               </a:ext>
             </a:extLst>
           </p:cNvPr>
@@ -10882,7 +10824,7 @@
           <p:cNvPr id="6" name="c3-shape-6">
             <a:extLst xmlns:a="http://schemas.openxmlformats.org/drawingml/2006/main">
               <a:ext uri="{FF2B5EF4-FFF2-40B4-BE49-F238E27FC236}">
-                <a16:creationId xmlns:a16="http://schemas.microsoft.com/office/drawing/2014/main" id="{99645FAC-DFF8-481F-8CFE-2C30A5D1C00E}"/>
+                <a16:creationId xmlns:a16="http://schemas.microsoft.com/office/drawing/2014/main" id="{FAFEBF8E-9F14-4681-88A4-51A743520E21}"/>
               </a:ext>
             </a:extLst>
           </p:cNvPr>
@@ -10914,7 +10856,7 @@
           <p:cNvPr id="7" name="c3-shape-7">
             <a:extLst xmlns:a="http://schemas.openxmlformats.org/drawingml/2006/main">
               <a:ext uri="{FF2B5EF4-FFF2-40B4-BE49-F238E27FC236}">
-                <a16:creationId xmlns:a16="http://schemas.microsoft.com/office/drawing/2014/main" id="{ABBD3286-4931-4961-8BA4-72B180B498AD}"/>
+                <a16:creationId xmlns:a16="http://schemas.microsoft.com/office/drawing/2014/main" id="{84776253-3F21-4020-A8E7-F5F0D44DDF97}"/>
               </a:ext>
             </a:extLst>
           </p:cNvPr>
@@ -10948,7 +10890,7 @@
           <p:cNvPr id="8" name="c3-text-8">
             <a:extLst xmlns:a="http://schemas.openxmlformats.org/drawingml/2006/main">
               <a:ext uri="{FF2B5EF4-FFF2-40B4-BE49-F238E27FC236}">
-                <a16:creationId xmlns:a16="http://schemas.microsoft.com/office/drawing/2014/main" id="{796B3201-36DA-49FD-8FB1-5674F56246BA}"/>
+                <a16:creationId xmlns:a16="http://schemas.microsoft.com/office/drawing/2014/main" id="{F359791B-55FF-4510-AB54-7C6524E4C4E5}"/>
               </a:ext>
             </a:extLst>
           </p:cNvPr>
@@ -11028,7 +10970,7 @@
           <p:cNvPr id="9" name="c3-shape-9">
             <a:extLst xmlns:a="http://schemas.openxmlformats.org/drawingml/2006/main">
               <a:ext uri="{FF2B5EF4-FFF2-40B4-BE49-F238E27FC236}">
-                <a16:creationId xmlns:a16="http://schemas.microsoft.com/office/drawing/2014/main" id="{F2B66AF7-BB31-447E-87B3-50EF491C2D9E}"/>
+                <a16:creationId xmlns:a16="http://schemas.microsoft.com/office/drawing/2014/main" id="{17F046F8-A78A-4171-B87E-A13FE8446DC1}"/>
               </a:ext>
             </a:extLst>
           </p:cNvPr>
@@ -11060,7 +11002,7 @@
           <p:cNvPr id="10" name="c3-shape-10">
             <a:extLst xmlns:a="http://schemas.openxmlformats.org/drawingml/2006/main">
               <a:ext uri="{FF2B5EF4-FFF2-40B4-BE49-F238E27FC236}">
-                <a16:creationId xmlns:a16="http://schemas.microsoft.com/office/drawing/2014/main" id="{71E17074-D181-4498-839B-9CD0B96D38FD}"/>
+                <a16:creationId xmlns:a16="http://schemas.microsoft.com/office/drawing/2014/main" id="{129B2D72-A613-4A2C-BC40-25645A540650}"/>
               </a:ext>
             </a:extLst>
           </p:cNvPr>
@@ -11094,7 +11036,7 @@
           <p:cNvPr id="11" name="c3-text-11">
             <a:extLst xmlns:a="http://schemas.openxmlformats.org/drawingml/2006/main">
               <a:ext uri="{FF2B5EF4-FFF2-40B4-BE49-F238E27FC236}">
-                <a16:creationId xmlns:a16="http://schemas.microsoft.com/office/drawing/2014/main" id="{DF4E4EAF-30F2-4F58-B11E-0E8641DAC3E4}"/>
+                <a16:creationId xmlns:a16="http://schemas.microsoft.com/office/drawing/2014/main" id="{A64A08FF-4C08-46EE-937A-7EC3E96E8C27}"/>
               </a:ext>
             </a:extLst>
           </p:cNvPr>
@@ -11174,7 +11116,7 @@
           <p:cNvPr id="12" name="c3-shape-12">
             <a:extLst xmlns:a="http://schemas.openxmlformats.org/drawingml/2006/main">
               <a:ext uri="{FF2B5EF4-FFF2-40B4-BE49-F238E27FC236}">
-                <a16:creationId xmlns:a16="http://schemas.microsoft.com/office/drawing/2014/main" id="{0F1D9BBB-DA5C-4A2E-AD0D-D32458C9CF61}"/>
+                <a16:creationId xmlns:a16="http://schemas.microsoft.com/office/drawing/2014/main" id="{484EA26E-EAB8-4477-9AD8-244981015350}"/>
               </a:ext>
             </a:extLst>
           </p:cNvPr>
@@ -11206,7 +11148,7 @@
           <p:cNvPr id="13" name="c3-shape-13">
             <a:extLst xmlns:a="http://schemas.openxmlformats.org/drawingml/2006/main">
               <a:ext uri="{FF2B5EF4-FFF2-40B4-BE49-F238E27FC236}">
-                <a16:creationId xmlns:a16="http://schemas.microsoft.com/office/drawing/2014/main" id="{8ABC6436-443B-4BCE-B395-6F8C5961F57F}"/>
+                <a16:creationId xmlns:a16="http://schemas.microsoft.com/office/drawing/2014/main" id="{E5928EDF-600B-4065-9B97-150EF3E00D11}"/>
               </a:ext>
             </a:extLst>
           </p:cNvPr>
@@ -11240,7 +11182,7 @@
           <p:cNvPr id="14" name="c3-text-14">
             <a:extLst xmlns:a="http://schemas.openxmlformats.org/drawingml/2006/main">
               <a:ext uri="{FF2B5EF4-FFF2-40B4-BE49-F238E27FC236}">
-                <a16:creationId xmlns:a16="http://schemas.microsoft.com/office/drawing/2014/main" id="{5F5E0C3D-E3FC-4773-95F3-8713C2F967C6}"/>
+                <a16:creationId xmlns:a16="http://schemas.microsoft.com/office/drawing/2014/main" id="{D188FA71-95D7-4796-AE2D-4335C867C39A}"/>
               </a:ext>
             </a:extLst>
           </p:cNvPr>
@@ -11320,7 +11262,7 @@
           <p:cNvPr id="15" name="c3-shape-15">
             <a:extLst xmlns:a="http://schemas.openxmlformats.org/drawingml/2006/main">
               <a:ext uri="{FF2B5EF4-FFF2-40B4-BE49-F238E27FC236}">
-                <a16:creationId xmlns:a16="http://schemas.microsoft.com/office/drawing/2014/main" id="{5C3ACC10-AE92-44D2-A5BC-582E1BEF67F7}"/>
+                <a16:creationId xmlns:a16="http://schemas.microsoft.com/office/drawing/2014/main" id="{DE458AC3-6967-45E2-8F37-1176D23A6D4D}"/>
               </a:ext>
             </a:extLst>
           </p:cNvPr>
@@ -11354,7 +11296,7 @@
           <p:cNvPr id="16" name="c3-text-16">
             <a:extLst xmlns:a="http://schemas.openxmlformats.org/drawingml/2006/main">
               <a:ext uri="{FF2B5EF4-FFF2-40B4-BE49-F238E27FC236}">
-                <a16:creationId xmlns:a16="http://schemas.microsoft.com/office/drawing/2014/main" id="{5E8E07E7-C5D8-4643-88E6-DE1F81BD1E75}"/>
+                <a16:creationId xmlns:a16="http://schemas.microsoft.com/office/drawing/2014/main" id="{092EAD84-E641-4C0B-A85E-190ADDE4C41C}"/>
               </a:ext>
             </a:extLst>
           </p:cNvPr>
@@ -11411,7 +11353,7 @@
           <p:cNvPr id="17" name="c3-text-17">
             <a:extLst xmlns:a="http://schemas.openxmlformats.org/drawingml/2006/main">
               <a:ext uri="{FF2B5EF4-FFF2-40B4-BE49-F238E27FC236}">
-                <a16:creationId xmlns:a16="http://schemas.microsoft.com/office/drawing/2014/main" id="{E0DF3755-DB9F-4F0B-AF15-FED0AA29079B}"/>
+                <a16:creationId xmlns:a16="http://schemas.microsoft.com/office/drawing/2014/main" id="{86C335CF-32A3-43A7-9EA8-4F35C8A9ED59}"/>
               </a:ext>
             </a:extLst>
           </p:cNvPr>
@@ -11465,10 +11407,10 @@
       </p:sp>
       <p:sp>
         <p:nvSpPr>
-          <p:cNvPr id="18" name="c3-text-312">
-            <a:extLst xmlns:a="http://schemas.openxmlformats.org/drawingml/2006/main">
-              <a:ext uri="{FF2B5EF4-FFF2-40B4-BE49-F238E27FC236}">
-                <a16:creationId xmlns:a16="http://schemas.microsoft.com/office/drawing/2014/main" id="{CBF9E894-85EB-442B-92C4-6209230572BC}"/>
+          <p:cNvPr id="18" name="c3-text-310">
+            <a:extLst xmlns:a="http://schemas.openxmlformats.org/drawingml/2006/main">
+              <a:ext uri="{FF2B5EF4-FFF2-40B4-BE49-F238E27FC236}">
+                <a16:creationId xmlns:a16="http://schemas.microsoft.com/office/drawing/2014/main" id="{CDB436B5-A401-4FF2-97CD-CC03761C6F4D}"/>
               </a:ext>
             </a:extLst>
           </p:cNvPr>
@@ -11523,7 +11465,7 @@
     </p:spTree>
     <p:extLst>
       <p:ext uri="{BB962C8B-B14F-4D97-AF65-F5344CB8AC3E}">
-        <p14:creationId xmlns:p14="http://schemas.microsoft.com/office/powerpoint/2010/main" val="2081731214"/>
+        <p14:creationId xmlns:p14="http://schemas.microsoft.com/office/powerpoint/2010/main" val="2067829571"/>
       </p:ext>
     </p:extLst>
   </p:cSld>
@@ -11551,10 +11493,10 @@
       </p:grpSpPr>
       <p:sp>
         <p:nvSpPr>
-          <p:cNvPr id="8" name="c3-text-218">
-            <a:extLst xmlns:a="http://schemas.openxmlformats.org/drawingml/2006/main">
-              <a:ext uri="{FF2B5EF4-FFF2-40B4-BE49-F238E27FC236}">
-                <a16:creationId xmlns:a16="http://schemas.microsoft.com/office/drawing/2014/main" id="{F633E076-23EC-43D2-82F7-8F9FEFA285BE}"/>
+          <p:cNvPr id="8" name="c3-text-217">
+            <a:extLst xmlns:a="http://schemas.openxmlformats.org/drawingml/2006/main">
+              <a:ext uri="{FF2B5EF4-FFF2-40B4-BE49-F238E27FC236}">
+                <a16:creationId xmlns:a16="http://schemas.microsoft.com/office/drawing/2014/main" id="{AB9AE90A-7C96-40FF-B8FC-64CF766E9DBF}"/>
               </a:ext>
             </a:extLst>
           </p:cNvPr>
@@ -11608,10 +11550,10 @@
       </p:sp>
       <p:sp>
         <p:nvSpPr>
-          <p:cNvPr id="2" name="c3-text-219">
-            <a:extLst xmlns:a="http://schemas.openxmlformats.org/drawingml/2006/main">
-              <a:ext uri="{FF2B5EF4-FFF2-40B4-BE49-F238E27FC236}">
-                <a16:creationId xmlns:a16="http://schemas.microsoft.com/office/drawing/2014/main" id="{C8EE6522-BC28-4AB7-B410-72DE10395BA4}"/>
+          <p:cNvPr id="2" name="c3-text-218">
+            <a:extLst xmlns:a="http://schemas.openxmlformats.org/drawingml/2006/main">
+              <a:ext uri="{FF2B5EF4-FFF2-40B4-BE49-F238E27FC236}">
+                <a16:creationId xmlns:a16="http://schemas.microsoft.com/office/drawing/2014/main" id="{E0D8AEE9-E5F1-42F2-85AA-88BD4325E975}"/>
               </a:ext>
             </a:extLst>
           </p:cNvPr>
@@ -11665,10 +11607,10 @@
       </p:sp>
       <p:sp>
         <p:nvSpPr>
-          <p:cNvPr id="3" name="c3-text-220">
-            <a:extLst xmlns:a="http://schemas.openxmlformats.org/drawingml/2006/main">
-              <a:ext uri="{FF2B5EF4-FFF2-40B4-BE49-F238E27FC236}">
-                <a16:creationId xmlns:a16="http://schemas.microsoft.com/office/drawing/2014/main" id="{388C9C72-CF3A-456F-BFAF-9785ED38C9FE}"/>
+          <p:cNvPr id="3" name="c3-text-219">
+            <a:extLst xmlns:a="http://schemas.openxmlformats.org/drawingml/2006/main">
+              <a:ext uri="{FF2B5EF4-FFF2-40B4-BE49-F238E27FC236}">
+                <a16:creationId xmlns:a16="http://schemas.microsoft.com/office/drawing/2014/main" id="{2B7EF638-EB1D-45D7-A20F-F77299941BC8}"/>
               </a:ext>
             </a:extLst>
           </p:cNvPr>
@@ -11722,10 +11664,10 @@
       </p:sp>
       <p:sp>
         <p:nvSpPr>
-          <p:cNvPr id="4" name="c3-text-221">
-            <a:extLst xmlns:a="http://schemas.openxmlformats.org/drawingml/2006/main">
-              <a:ext uri="{FF2B5EF4-FFF2-40B4-BE49-F238E27FC236}">
-                <a16:creationId xmlns:a16="http://schemas.microsoft.com/office/drawing/2014/main" id="{8762DEFB-0BF8-4E02-ADC2-8C12D987EE62}"/>
+          <p:cNvPr id="4" name="c3-text-220">
+            <a:extLst xmlns:a="http://schemas.openxmlformats.org/drawingml/2006/main">
+              <a:ext uri="{FF2B5EF4-FFF2-40B4-BE49-F238E27FC236}">
+                <a16:creationId xmlns:a16="http://schemas.microsoft.com/office/drawing/2014/main" id="{D1E87769-1426-4831-8A18-29B94170AB7C}"/>
               </a:ext>
             </a:extLst>
           </p:cNvPr>
@@ -11779,10 +11721,10 @@
       </p:sp>
       <p:sp>
         <p:nvSpPr>
-          <p:cNvPr id="5" name="c3-text-222">
-            <a:extLst xmlns:a="http://schemas.openxmlformats.org/drawingml/2006/main">
-              <a:ext uri="{FF2B5EF4-FFF2-40B4-BE49-F238E27FC236}">
-                <a16:creationId xmlns:a16="http://schemas.microsoft.com/office/drawing/2014/main" id="{2CA5422B-409A-436D-A657-B1B2AD1F687B}"/>
+          <p:cNvPr id="5" name="c3-text-221">
+            <a:extLst xmlns:a="http://schemas.openxmlformats.org/drawingml/2006/main">
+              <a:ext uri="{FF2B5EF4-FFF2-40B4-BE49-F238E27FC236}">
+                <a16:creationId xmlns:a16="http://schemas.microsoft.com/office/drawing/2014/main" id="{723DAD53-AD0F-48D2-8219-CFFDE4D57C9B}"/>
               </a:ext>
             </a:extLst>
           </p:cNvPr>
@@ -11836,10 +11778,10 @@
       </p:sp>
       <p:sp>
         <p:nvSpPr>
-          <p:cNvPr id="6" name="c3-text-223">
-            <a:extLst xmlns:a="http://schemas.openxmlformats.org/drawingml/2006/main">
-              <a:ext uri="{FF2B5EF4-FFF2-40B4-BE49-F238E27FC236}">
-                <a16:creationId xmlns:a16="http://schemas.microsoft.com/office/drawing/2014/main" id="{784D0841-2188-4388-82F4-FD5E4752DDBE}"/>
+          <p:cNvPr id="6" name="c3-text-222">
+            <a:extLst xmlns:a="http://schemas.openxmlformats.org/drawingml/2006/main">
+              <a:ext uri="{FF2B5EF4-FFF2-40B4-BE49-F238E27FC236}">
+                <a16:creationId xmlns:a16="http://schemas.microsoft.com/office/drawing/2014/main" id="{6AB9635A-E4BA-4A32-8682-0911C0E9CE8A}"/>
               </a:ext>
             </a:extLst>
           </p:cNvPr>
@@ -11893,10 +11835,10 @@
       </p:sp>
       <p:sp>
         <p:nvSpPr>
-          <p:cNvPr id="7" name="c3-text-330">
-            <a:extLst xmlns:a="http://schemas.openxmlformats.org/drawingml/2006/main">
-              <a:ext uri="{FF2B5EF4-FFF2-40B4-BE49-F238E27FC236}">
-                <a16:creationId xmlns:a16="http://schemas.microsoft.com/office/drawing/2014/main" id="{645F7CD2-0ED5-4F68-862D-F375F617F686}"/>
+          <p:cNvPr id="7" name="c3-text-328">
+            <a:extLst xmlns:a="http://schemas.openxmlformats.org/drawingml/2006/main">
+              <a:ext uri="{FF2B5EF4-FFF2-40B4-BE49-F238E27FC236}">
+                <a16:creationId xmlns:a16="http://schemas.microsoft.com/office/drawing/2014/main" id="{290CDBE6-0E14-4619-AE75-85A2588D60F3}"/>
               </a:ext>
             </a:extLst>
           </p:cNvPr>
@@ -11951,7 +11893,7 @@
     </p:spTree>
     <p:extLst>
       <p:ext uri="{BB962C8B-B14F-4D97-AF65-F5344CB8AC3E}">
-        <p14:creationId xmlns:p14="http://schemas.microsoft.com/office/powerpoint/2010/main" val="440042455"/>
+        <p14:creationId xmlns:p14="http://schemas.microsoft.com/office/powerpoint/2010/main" val="862626166"/>
       </p:ext>
     </p:extLst>
   </p:cSld>
@@ -11979,10 +11921,10 @@
       </p:grpSpPr>
       <p:sp>
         <p:nvSpPr>
-          <p:cNvPr id="8" name="c3-text-224">
-            <a:extLst xmlns:a="http://schemas.openxmlformats.org/drawingml/2006/main">
-              <a:ext uri="{FF2B5EF4-FFF2-40B4-BE49-F238E27FC236}">
-                <a16:creationId xmlns:a16="http://schemas.microsoft.com/office/drawing/2014/main" id="{37F619D1-409E-4C15-85F6-D168F3102CA6}"/>
+          <p:cNvPr id="8" name="c3-text-223">
+            <a:extLst xmlns:a="http://schemas.openxmlformats.org/drawingml/2006/main">
+              <a:ext uri="{FF2B5EF4-FFF2-40B4-BE49-F238E27FC236}">
+                <a16:creationId xmlns:a16="http://schemas.microsoft.com/office/drawing/2014/main" id="{91BC1B29-2F78-4DC3-B8C5-BF18CF975203}"/>
               </a:ext>
             </a:extLst>
           </p:cNvPr>
@@ -12036,10 +11978,10 @@
       </p:sp>
       <p:sp>
         <p:nvSpPr>
-          <p:cNvPr id="2" name="c3-text-225">
-            <a:extLst xmlns:a="http://schemas.openxmlformats.org/drawingml/2006/main">
-              <a:ext uri="{FF2B5EF4-FFF2-40B4-BE49-F238E27FC236}">
-                <a16:creationId xmlns:a16="http://schemas.microsoft.com/office/drawing/2014/main" id="{35EE843E-237A-4B4A-A7A4-D4DD51DD876D}"/>
+          <p:cNvPr id="2" name="c3-text-224">
+            <a:extLst xmlns:a="http://schemas.openxmlformats.org/drawingml/2006/main">
+              <a:ext uri="{FF2B5EF4-FFF2-40B4-BE49-F238E27FC236}">
+                <a16:creationId xmlns:a16="http://schemas.microsoft.com/office/drawing/2014/main" id="{B64B8420-5A66-4A18-821E-B53244B43C2B}"/>
               </a:ext>
             </a:extLst>
           </p:cNvPr>
@@ -12093,10 +12035,10 @@
       </p:sp>
       <p:sp>
         <p:nvSpPr>
-          <p:cNvPr id="3" name="c3-text-226">
-            <a:extLst xmlns:a="http://schemas.openxmlformats.org/drawingml/2006/main">
-              <a:ext uri="{FF2B5EF4-FFF2-40B4-BE49-F238E27FC236}">
-                <a16:creationId xmlns:a16="http://schemas.microsoft.com/office/drawing/2014/main" id="{EACE46FA-52B6-4882-9F10-F54E14215B7B}"/>
+          <p:cNvPr id="3" name="c3-text-225">
+            <a:extLst xmlns:a="http://schemas.openxmlformats.org/drawingml/2006/main">
+              <a:ext uri="{FF2B5EF4-FFF2-40B4-BE49-F238E27FC236}">
+                <a16:creationId xmlns:a16="http://schemas.microsoft.com/office/drawing/2014/main" id="{306D0132-E551-4856-9A21-6BB2FE4F02A7}"/>
               </a:ext>
             </a:extLst>
           </p:cNvPr>
@@ -12150,11 +12092,11 @@
       </p:sp>
       <p:sp>
         <p:nvSpPr>
-          <p:cNvPr id="4" name="c3-text-227">
-            <a:hlinkClick xmlns:r="http://schemas.openxmlformats.org/officeDocument/2006/relationships" xmlns:a="http://schemas.openxmlformats.org/drawingml/2006/main" r:id="R2854282db2604d00"/>
-            <a:extLst xmlns:a="http://schemas.openxmlformats.org/drawingml/2006/main">
-              <a:ext uri="{FF2B5EF4-FFF2-40B4-BE49-F238E27FC236}">
-                <a16:creationId xmlns:a16="http://schemas.microsoft.com/office/drawing/2014/main" id="{DEDFAE33-582E-4406-9F61-0F35D454B32D}"/>
+          <p:cNvPr id="4" name="c3-text-226">
+            <a:hlinkClick xmlns:r="http://schemas.openxmlformats.org/officeDocument/2006/relationships" xmlns:a="http://schemas.openxmlformats.org/drawingml/2006/main" r:id="Rc8c5108329544df3"/>
+            <a:extLst xmlns:a="http://schemas.openxmlformats.org/drawingml/2006/main">
+              <a:ext uri="{FF2B5EF4-FFF2-40B4-BE49-F238E27FC236}">
+                <a16:creationId xmlns:a16="http://schemas.microsoft.com/office/drawing/2014/main" id="{1C4E7137-E89B-468F-8458-8AB286DFAFB0}"/>
               </a:ext>
             </a:extLst>
           </p:cNvPr>
@@ -12208,10 +12150,10 @@
       </p:sp>
       <p:sp>
         <p:nvSpPr>
-          <p:cNvPr id="5" name="c3-text-228">
-            <a:extLst xmlns:a="http://schemas.openxmlformats.org/drawingml/2006/main">
-              <a:ext uri="{FF2B5EF4-FFF2-40B4-BE49-F238E27FC236}">
-                <a16:creationId xmlns:a16="http://schemas.microsoft.com/office/drawing/2014/main" id="{F0DD033A-226E-42EA-99DF-09042A9A116A}"/>
+          <p:cNvPr id="5" name="c3-text-227">
+            <a:extLst xmlns:a="http://schemas.openxmlformats.org/drawingml/2006/main">
+              <a:ext uri="{FF2B5EF4-FFF2-40B4-BE49-F238E27FC236}">
+                <a16:creationId xmlns:a16="http://schemas.microsoft.com/office/drawing/2014/main" id="{DEE530FE-9D56-4C6B-8B1B-82D79E89F315}"/>
               </a:ext>
             </a:extLst>
           </p:cNvPr>
@@ -12265,10 +12207,10 @@
       </p:sp>
       <p:sp>
         <p:nvSpPr>
-          <p:cNvPr id="6" name="c3-text-229">
-            <a:extLst xmlns:a="http://schemas.openxmlformats.org/drawingml/2006/main">
-              <a:ext uri="{FF2B5EF4-FFF2-40B4-BE49-F238E27FC236}">
-                <a16:creationId xmlns:a16="http://schemas.microsoft.com/office/drawing/2014/main" id="{D319E83A-21B2-4FD1-82C0-381AD044646A}"/>
+          <p:cNvPr id="6" name="c3-text-228">
+            <a:extLst xmlns:a="http://schemas.openxmlformats.org/drawingml/2006/main">
+              <a:ext uri="{FF2B5EF4-FFF2-40B4-BE49-F238E27FC236}">
+                <a16:creationId xmlns:a16="http://schemas.microsoft.com/office/drawing/2014/main" id="{F9D74AE8-48BF-4DCC-8A58-BBBDD7C79D82}"/>
               </a:ext>
             </a:extLst>
           </p:cNvPr>
@@ -12322,10 +12264,10 @@
       </p:sp>
       <p:sp>
         <p:nvSpPr>
-          <p:cNvPr id="7" name="c3-text-331">
-            <a:extLst xmlns:a="http://schemas.openxmlformats.org/drawingml/2006/main">
-              <a:ext uri="{FF2B5EF4-FFF2-40B4-BE49-F238E27FC236}">
-                <a16:creationId xmlns:a16="http://schemas.microsoft.com/office/drawing/2014/main" id="{3729CDA6-78F0-4F01-AEB5-3477771C3BC2}"/>
+          <p:cNvPr id="7" name="c3-text-329">
+            <a:extLst xmlns:a="http://schemas.openxmlformats.org/drawingml/2006/main">
+              <a:ext uri="{FF2B5EF4-FFF2-40B4-BE49-F238E27FC236}">
+                <a16:creationId xmlns:a16="http://schemas.microsoft.com/office/drawing/2014/main" id="{D9A67468-7E69-4B15-9D20-346CA1EFB1A3}"/>
               </a:ext>
             </a:extLst>
           </p:cNvPr>
@@ -12380,7 +12322,7 @@
     </p:spTree>
     <p:extLst>
       <p:ext uri="{BB962C8B-B14F-4D97-AF65-F5344CB8AC3E}">
-        <p14:creationId xmlns:p14="http://schemas.microsoft.com/office/powerpoint/2010/main" val="873015110"/>
+        <p14:creationId xmlns:p14="http://schemas.microsoft.com/office/powerpoint/2010/main" val="1236334534"/>
       </p:ext>
     </p:extLst>
   </p:cSld>
@@ -12408,10 +12350,10 @@
       </p:grpSpPr>
       <p:sp>
         <p:nvSpPr>
-          <p:cNvPr id="8" name="c3-text-230">
-            <a:extLst xmlns:a="http://schemas.openxmlformats.org/drawingml/2006/main">
-              <a:ext uri="{FF2B5EF4-FFF2-40B4-BE49-F238E27FC236}">
-                <a16:creationId xmlns:a16="http://schemas.microsoft.com/office/drawing/2014/main" id="{CC772A37-87F4-4105-B43C-E5B14687102E}"/>
+          <p:cNvPr id="8" name="c3-text-229">
+            <a:extLst xmlns:a="http://schemas.openxmlformats.org/drawingml/2006/main">
+              <a:ext uri="{FF2B5EF4-FFF2-40B4-BE49-F238E27FC236}">
+                <a16:creationId xmlns:a16="http://schemas.microsoft.com/office/drawing/2014/main" id="{818727E1-9A4E-4BE8-94C6-E5CBAFDDE664}"/>
               </a:ext>
             </a:extLst>
           </p:cNvPr>
@@ -12465,10 +12407,10 @@
       </p:sp>
       <p:sp>
         <p:nvSpPr>
-          <p:cNvPr id="2" name="c3-text-231">
-            <a:extLst xmlns:a="http://schemas.openxmlformats.org/drawingml/2006/main">
-              <a:ext uri="{FF2B5EF4-FFF2-40B4-BE49-F238E27FC236}">
-                <a16:creationId xmlns:a16="http://schemas.microsoft.com/office/drawing/2014/main" id="{A50372F1-5D64-4725-9525-244D1FCD1AA7}"/>
+          <p:cNvPr id="2" name="c3-text-230">
+            <a:extLst xmlns:a="http://schemas.openxmlformats.org/drawingml/2006/main">
+              <a:ext uri="{FF2B5EF4-FFF2-40B4-BE49-F238E27FC236}">
+                <a16:creationId xmlns:a16="http://schemas.microsoft.com/office/drawing/2014/main" id="{722DD8B2-3B9E-485B-BE81-9CB7305C2527}"/>
               </a:ext>
             </a:extLst>
           </p:cNvPr>
@@ -12522,10 +12464,10 @@
       </p:sp>
       <p:sp>
         <p:nvSpPr>
-          <p:cNvPr id="3" name="c3-text-232">
-            <a:extLst xmlns:a="http://schemas.openxmlformats.org/drawingml/2006/main">
-              <a:ext uri="{FF2B5EF4-FFF2-40B4-BE49-F238E27FC236}">
-                <a16:creationId xmlns:a16="http://schemas.microsoft.com/office/drawing/2014/main" id="{B6A9E145-3537-4614-B1A4-A73F1ED09BFD}"/>
+          <p:cNvPr id="3" name="c3-text-231">
+            <a:extLst xmlns:a="http://schemas.openxmlformats.org/drawingml/2006/main">
+              <a:ext uri="{FF2B5EF4-FFF2-40B4-BE49-F238E27FC236}">
+                <a16:creationId xmlns:a16="http://schemas.microsoft.com/office/drawing/2014/main" id="{11D7B945-6EED-4DFF-9D6E-2D94603811DA}"/>
               </a:ext>
             </a:extLst>
           </p:cNvPr>
@@ -12579,10 +12521,10 @@
       </p:sp>
       <p:sp>
         <p:nvSpPr>
-          <p:cNvPr id="4" name="c3-text-233">
-            <a:extLst xmlns:a="http://schemas.openxmlformats.org/drawingml/2006/main">
-              <a:ext uri="{FF2B5EF4-FFF2-40B4-BE49-F238E27FC236}">
-                <a16:creationId xmlns:a16="http://schemas.microsoft.com/office/drawing/2014/main" id="{3F8A202B-3991-4929-974B-45E453D30320}"/>
+          <p:cNvPr id="4" name="c3-text-232">
+            <a:extLst xmlns:a="http://schemas.openxmlformats.org/drawingml/2006/main">
+              <a:ext uri="{FF2B5EF4-FFF2-40B4-BE49-F238E27FC236}">
+                <a16:creationId xmlns:a16="http://schemas.microsoft.com/office/drawing/2014/main" id="{20A12B85-5BFB-4828-B3E1-D620E069BE3D}"/>
               </a:ext>
             </a:extLst>
           </p:cNvPr>
@@ -12636,10 +12578,10 @@
       </p:sp>
       <p:sp>
         <p:nvSpPr>
-          <p:cNvPr id="5" name="c3-text-234">
-            <a:extLst xmlns:a="http://schemas.openxmlformats.org/drawingml/2006/main">
-              <a:ext uri="{FF2B5EF4-FFF2-40B4-BE49-F238E27FC236}">
-                <a16:creationId xmlns:a16="http://schemas.microsoft.com/office/drawing/2014/main" id="{2F95CDD3-D1D5-4B6E-9D2C-5F9E0A565B1E}"/>
+          <p:cNvPr id="5" name="c3-text-233">
+            <a:extLst xmlns:a="http://schemas.openxmlformats.org/drawingml/2006/main">
+              <a:ext uri="{FF2B5EF4-FFF2-40B4-BE49-F238E27FC236}">
+                <a16:creationId xmlns:a16="http://schemas.microsoft.com/office/drawing/2014/main" id="{EF5F6BD4-A2AC-439F-9E95-F4DFDA0A4117}"/>
               </a:ext>
             </a:extLst>
           </p:cNvPr>
@@ -12762,10 +12704,10 @@
       </p:sp>
       <p:sp>
         <p:nvSpPr>
-          <p:cNvPr id="6" name="c3-text-235">
-            <a:extLst xmlns:a="http://schemas.openxmlformats.org/drawingml/2006/main">
-              <a:ext uri="{FF2B5EF4-FFF2-40B4-BE49-F238E27FC236}">
-                <a16:creationId xmlns:a16="http://schemas.microsoft.com/office/drawing/2014/main" id="{0D1CB533-7CBA-4D46-A703-AB3549862DF6}"/>
+          <p:cNvPr id="6" name="c3-text-234">
+            <a:extLst xmlns:a="http://schemas.openxmlformats.org/drawingml/2006/main">
+              <a:ext uri="{FF2B5EF4-FFF2-40B4-BE49-F238E27FC236}">
+                <a16:creationId xmlns:a16="http://schemas.microsoft.com/office/drawing/2014/main" id="{585EB925-AAE1-4EF4-A98E-84BA19F0DE66}"/>
               </a:ext>
             </a:extLst>
           </p:cNvPr>
@@ -12819,10 +12761,10 @@
       </p:sp>
       <p:sp>
         <p:nvSpPr>
-          <p:cNvPr id="7" name="c3-text-332">
-            <a:extLst xmlns:a="http://schemas.openxmlformats.org/drawingml/2006/main">
-              <a:ext uri="{FF2B5EF4-FFF2-40B4-BE49-F238E27FC236}">
-                <a16:creationId xmlns:a16="http://schemas.microsoft.com/office/drawing/2014/main" id="{A907DAD1-B371-4BF6-884A-742CB6246970}"/>
+          <p:cNvPr id="7" name="c3-text-330">
+            <a:extLst xmlns:a="http://schemas.openxmlformats.org/drawingml/2006/main">
+              <a:ext uri="{FF2B5EF4-FFF2-40B4-BE49-F238E27FC236}">
+                <a16:creationId xmlns:a16="http://schemas.microsoft.com/office/drawing/2014/main" id="{CBD6FE18-5659-4F58-BD06-5E5512B15F71}"/>
               </a:ext>
             </a:extLst>
           </p:cNvPr>
@@ -12877,7 +12819,7 @@
     </p:spTree>
     <p:extLst>
       <p:ext uri="{BB962C8B-B14F-4D97-AF65-F5344CB8AC3E}">
-        <p14:creationId xmlns:p14="http://schemas.microsoft.com/office/powerpoint/2010/main" val="300253567"/>
+        <p14:creationId xmlns:p14="http://schemas.microsoft.com/office/powerpoint/2010/main" val="1127984243"/>
       </p:ext>
     </p:extLst>
   </p:cSld>
@@ -12905,10 +12847,10 @@
       </p:grpSpPr>
       <p:sp>
         <p:nvSpPr>
-          <p:cNvPr id="9" name="c3-text-236">
-            <a:extLst xmlns:a="http://schemas.openxmlformats.org/drawingml/2006/main">
-              <a:ext uri="{FF2B5EF4-FFF2-40B4-BE49-F238E27FC236}">
-                <a16:creationId xmlns:a16="http://schemas.microsoft.com/office/drawing/2014/main" id="{DAD24F00-8B48-47B2-8D6D-E8F6163EB4AD}"/>
+          <p:cNvPr id="8" name="c3-text-235">
+            <a:extLst xmlns:a="http://schemas.openxmlformats.org/drawingml/2006/main">
+              <a:ext uri="{FF2B5EF4-FFF2-40B4-BE49-F238E27FC236}">
+                <a16:creationId xmlns:a16="http://schemas.microsoft.com/office/drawing/2014/main" id="{34F0299A-9888-4056-9B0D-0173977C405E}"/>
               </a:ext>
             </a:extLst>
           </p:cNvPr>
@@ -12962,10 +12904,10 @@
       </p:sp>
       <p:sp>
         <p:nvSpPr>
-          <p:cNvPr id="2" name="c3-text-237">
-            <a:extLst xmlns:a="http://schemas.openxmlformats.org/drawingml/2006/main">
-              <a:ext uri="{FF2B5EF4-FFF2-40B4-BE49-F238E27FC236}">
-                <a16:creationId xmlns:a16="http://schemas.microsoft.com/office/drawing/2014/main" id="{EC3D3A27-E2D8-490A-8A54-A6FD03937084}"/>
+          <p:cNvPr id="2" name="c3-text-236">
+            <a:extLst xmlns:a="http://schemas.openxmlformats.org/drawingml/2006/main">
+              <a:ext uri="{FF2B5EF4-FFF2-40B4-BE49-F238E27FC236}">
+                <a16:creationId xmlns:a16="http://schemas.microsoft.com/office/drawing/2014/main" id="{045036E5-2D08-407B-9A3F-589CCA8395C9}"/>
               </a:ext>
             </a:extLst>
           </p:cNvPr>
@@ -13019,10 +12961,10 @@
       </p:sp>
       <p:sp>
         <p:nvSpPr>
-          <p:cNvPr id="3" name="c3-text-238">
-            <a:extLst xmlns:a="http://schemas.openxmlformats.org/drawingml/2006/main">
-              <a:ext uri="{FF2B5EF4-FFF2-40B4-BE49-F238E27FC236}">
-                <a16:creationId xmlns:a16="http://schemas.microsoft.com/office/drawing/2014/main" id="{E095E4C0-0704-4778-A855-027623A8AF0A}"/>
+          <p:cNvPr id="3" name="c3-text-237">
+            <a:extLst xmlns:a="http://schemas.openxmlformats.org/drawingml/2006/main">
+              <a:ext uri="{FF2B5EF4-FFF2-40B4-BE49-F238E27FC236}">
+                <a16:creationId xmlns:a16="http://schemas.microsoft.com/office/drawing/2014/main" id="{F4689CCB-B68C-4692-A3A6-F8D99113AECE}"/>
               </a:ext>
             </a:extLst>
           </p:cNvPr>
@@ -13076,10 +13018,10 @@
       </p:sp>
       <p:sp>
         <p:nvSpPr>
-          <p:cNvPr id="4" name="c3-text-239">
-            <a:extLst xmlns:a="http://schemas.openxmlformats.org/drawingml/2006/main">
-              <a:ext uri="{FF2B5EF4-FFF2-40B4-BE49-F238E27FC236}">
-                <a16:creationId xmlns:a16="http://schemas.microsoft.com/office/drawing/2014/main" id="{92E8CCE9-4E2A-4AA8-9756-49DA939BC294}"/>
+          <p:cNvPr id="4" name="c3-text-238">
+            <a:extLst xmlns:a="http://schemas.openxmlformats.org/drawingml/2006/main">
+              <a:ext uri="{FF2B5EF4-FFF2-40B4-BE49-F238E27FC236}">
+                <a16:creationId xmlns:a16="http://schemas.microsoft.com/office/drawing/2014/main" id="{6542BF2F-B78A-4779-A3FF-84F560612A75}"/>
               </a:ext>
             </a:extLst>
           </p:cNvPr>
@@ -13133,10 +13075,10 @@
       </p:sp>
       <p:sp>
         <p:nvSpPr>
-          <p:cNvPr id="5" name="c3-text-240">
-            <a:extLst xmlns:a="http://schemas.openxmlformats.org/drawingml/2006/main">
-              <a:ext uri="{FF2B5EF4-FFF2-40B4-BE49-F238E27FC236}">
-                <a16:creationId xmlns:a16="http://schemas.microsoft.com/office/drawing/2014/main" id="{E4738E5B-12A6-4117-AD17-5E379E521A1D}"/>
+          <p:cNvPr id="5" name="c3-text-239">
+            <a:extLst xmlns:a="http://schemas.openxmlformats.org/drawingml/2006/main">
+              <a:ext uri="{FF2B5EF4-FFF2-40B4-BE49-F238E27FC236}">
+                <a16:creationId xmlns:a16="http://schemas.microsoft.com/office/drawing/2014/main" id="{F385A88D-DE03-473B-B5D9-021C2AAE1D89}"/>
               </a:ext>
             </a:extLst>
           </p:cNvPr>
@@ -13190,10 +13132,10 @@
       </p:sp>
       <p:sp>
         <p:nvSpPr>
-          <p:cNvPr id="6" name="c3-text-241">
-            <a:extLst xmlns:a="http://schemas.openxmlformats.org/drawingml/2006/main">
-              <a:ext uri="{FF2B5EF4-FFF2-40B4-BE49-F238E27FC236}">
-                <a16:creationId xmlns:a16="http://schemas.microsoft.com/office/drawing/2014/main" id="{14006600-A2C0-4979-9431-CA88C65C8322}"/>
+          <p:cNvPr id="6" name="c3-text-240">
+            <a:extLst xmlns:a="http://schemas.openxmlformats.org/drawingml/2006/main">
+              <a:ext uri="{FF2B5EF4-FFF2-40B4-BE49-F238E27FC236}">
+                <a16:creationId xmlns:a16="http://schemas.microsoft.com/office/drawing/2014/main" id="{E626EC1A-B681-4456-9B44-E66B1410BABF}"/>
               </a:ext>
             </a:extLst>
           </p:cNvPr>
@@ -13247,68 +13189,10 @@
       </p:sp>
       <p:sp>
         <p:nvSpPr>
-          <p:cNvPr id="7" name="c3-text-242">
-            <a:hlinkClick xmlns:r="http://schemas.openxmlformats.org/officeDocument/2006/relationships" xmlns:a="http://schemas.openxmlformats.org/drawingml/2006/main" r:id="Re303a40deccc437b"/>
-            <a:extLst xmlns:a="http://schemas.openxmlformats.org/drawingml/2006/main">
-              <a:ext uri="{FF2B5EF4-FFF2-40B4-BE49-F238E27FC236}">
-                <a16:creationId xmlns:a16="http://schemas.microsoft.com/office/drawing/2014/main" id="{A4B04F2C-ADBA-48B2-907A-672E85B9012B}"/>
-              </a:ext>
-            </a:extLst>
-          </p:cNvPr>
-          <p:cNvSpPr>
-            <a:spLocks xmlns:a="http://schemas.openxmlformats.org/drawingml/2006/main" noGrp="1"/>
-          </p:cNvSpPr>
-          <p:nvPr/>
-        </p:nvSpPr>
-        <p:spPr>
-          <a:xfrm xmlns:a="http://schemas.openxmlformats.org/drawingml/2006/main">
-            <a:off x="609600" y="4486275"/>
-            <a:ext cx="7924800" cy="228600"/>
-          </a:xfrm>
-          <a:prstGeom xmlns:a="http://schemas.openxmlformats.org/drawingml/2006/main" prst="rect">
-            <a:avLst/>
-          </a:prstGeom>
-          <a:noFill xmlns:a="http://schemas.openxmlformats.org/drawingml/2006/main"/>
-          <a:ln xmlns:a="http://schemas.openxmlformats.org/drawingml/2006/main" w="0">
-            <a:noFill/>
-          </a:ln>
-        </p:spPr>
-        <p:txBody>
-          <a:bodyPr xmlns:a="http://schemas.openxmlformats.org/drawingml/2006/main" wrap="square" lIns="9525" tIns="9525" rIns="9525" bIns="9525" anchor="ctr">
-            <a:noAutofit/>
-          </a:bodyPr>
-          <a:lstStyle xmlns:a="http://schemas.openxmlformats.org/drawingml/2006/main"/>
-          <a:p xmlns:a="http://schemas.openxmlformats.org/drawingml/2006/main">
-            <a:pPr>
-              <a:defRPr sz="1350" b="0">
-                <a:solidFill>
-                  <a:srgbClr val="7FA8E3"/>
-                </a:solidFill>
-                <a:latin typeface="Calibri"/>
-                <a:ea typeface="Calibri"/>
-                <a:cs typeface="Calibri"/>
-              </a:defRPr>
-            </a:pPr>
-            <a:r>
-              <a:rPr sz="1350" b="0" u="sng">
-                <a:solidFill>
-                  <a:srgbClr val="7FA8E3"/>
-                </a:solidFill>
-                <a:latin typeface="Calibri"/>
-                <a:ea typeface="Calibri"/>
-                <a:cs typeface="Calibri"/>
-              </a:rPr>
-              <a:t>Exercise brief and complete Codex prompt</a:t>
-            </a:r>
-          </a:p>
-        </p:txBody>
-      </p:sp>
-      <p:sp>
-        <p:nvSpPr>
-          <p:cNvPr id="8" name="c3-text-333">
-            <a:extLst xmlns:a="http://schemas.openxmlformats.org/drawingml/2006/main">
-              <a:ext uri="{FF2B5EF4-FFF2-40B4-BE49-F238E27FC236}">
-                <a16:creationId xmlns:a16="http://schemas.microsoft.com/office/drawing/2014/main" id="{0A81B57E-65E5-4D84-9924-270D09AFB6A6}"/>
+          <p:cNvPr id="7" name="c3-text-331">
+            <a:extLst xmlns:a="http://schemas.openxmlformats.org/drawingml/2006/main">
+              <a:ext uri="{FF2B5EF4-FFF2-40B4-BE49-F238E27FC236}">
+                <a16:creationId xmlns:a16="http://schemas.microsoft.com/office/drawing/2014/main" id="{E27102B6-7177-4218-B437-B4E180CADA38}"/>
               </a:ext>
             </a:extLst>
           </p:cNvPr>
@@ -13363,7 +13247,7 @@
     </p:spTree>
     <p:extLst>
       <p:ext uri="{BB962C8B-B14F-4D97-AF65-F5344CB8AC3E}">
-        <p14:creationId xmlns:p14="http://schemas.microsoft.com/office/powerpoint/2010/main" val="1860933013"/>
+        <p14:creationId xmlns:p14="http://schemas.microsoft.com/office/powerpoint/2010/main" val="1184885143"/>
       </p:ext>
     </p:extLst>
   </p:cSld>
@@ -13391,10 +13275,10 @@
       </p:grpSpPr>
       <p:sp>
         <p:nvSpPr>
-          <p:cNvPr id="7" name="c3-text-243">
-            <a:extLst xmlns:a="http://schemas.openxmlformats.org/drawingml/2006/main">
-              <a:ext uri="{FF2B5EF4-FFF2-40B4-BE49-F238E27FC236}">
-                <a16:creationId xmlns:a16="http://schemas.microsoft.com/office/drawing/2014/main" id="{C1B28781-9CB8-4BAC-A192-67083F3F1FDB}"/>
+          <p:cNvPr id="7" name="c3-text-241">
+            <a:extLst xmlns:a="http://schemas.openxmlformats.org/drawingml/2006/main">
+              <a:ext uri="{FF2B5EF4-FFF2-40B4-BE49-F238E27FC236}">
+                <a16:creationId xmlns:a16="http://schemas.microsoft.com/office/drawing/2014/main" id="{AEF626AA-23F3-4851-BE35-A770A5F92B96}"/>
               </a:ext>
             </a:extLst>
           </p:cNvPr>
@@ -13448,10 +13332,10 @@
       </p:sp>
       <p:sp>
         <p:nvSpPr>
-          <p:cNvPr id="2" name="c3-text-244">
-            <a:extLst xmlns:a="http://schemas.openxmlformats.org/drawingml/2006/main">
-              <a:ext uri="{FF2B5EF4-FFF2-40B4-BE49-F238E27FC236}">
-                <a16:creationId xmlns:a16="http://schemas.microsoft.com/office/drawing/2014/main" id="{33DACAB2-9A65-4E16-84A2-FE98B2876F1D}"/>
+          <p:cNvPr id="2" name="c3-text-242">
+            <a:extLst xmlns:a="http://schemas.openxmlformats.org/drawingml/2006/main">
+              <a:ext uri="{FF2B5EF4-FFF2-40B4-BE49-F238E27FC236}">
+                <a16:creationId xmlns:a16="http://schemas.microsoft.com/office/drawing/2014/main" id="{A8541889-4807-4E4B-85D9-9C71C961E786}"/>
               </a:ext>
             </a:extLst>
           </p:cNvPr>
@@ -13505,10 +13389,10 @@
       </p:sp>
       <p:sp>
         <p:nvSpPr>
-          <p:cNvPr id="3" name="c3-text-245">
-            <a:extLst xmlns:a="http://schemas.openxmlformats.org/drawingml/2006/main">
-              <a:ext uri="{FF2B5EF4-FFF2-40B4-BE49-F238E27FC236}">
-                <a16:creationId xmlns:a16="http://schemas.microsoft.com/office/drawing/2014/main" id="{28AD9BA9-336E-481F-BDA2-4F7B257C6444}"/>
+          <p:cNvPr id="3" name="c3-text-243">
+            <a:extLst xmlns:a="http://schemas.openxmlformats.org/drawingml/2006/main">
+              <a:ext uri="{FF2B5EF4-FFF2-40B4-BE49-F238E27FC236}">
+                <a16:creationId xmlns:a16="http://schemas.microsoft.com/office/drawing/2014/main" id="{58716158-2828-400C-947A-0800EC74E7BC}"/>
               </a:ext>
             </a:extLst>
           </p:cNvPr>
@@ -13562,10 +13446,10 @@
       </p:sp>
       <p:sp>
         <p:nvSpPr>
-          <p:cNvPr id="4" name="c3-text-246">
-            <a:extLst xmlns:a="http://schemas.openxmlformats.org/drawingml/2006/main">
-              <a:ext uri="{FF2B5EF4-FFF2-40B4-BE49-F238E27FC236}">
-                <a16:creationId xmlns:a16="http://schemas.microsoft.com/office/drawing/2014/main" id="{E222BD82-0F34-4969-9802-3302822F6153}"/>
+          <p:cNvPr id="4" name="c3-text-244">
+            <a:extLst xmlns:a="http://schemas.openxmlformats.org/drawingml/2006/main">
+              <a:ext uri="{FF2B5EF4-FFF2-40B4-BE49-F238E27FC236}">
+                <a16:creationId xmlns:a16="http://schemas.microsoft.com/office/drawing/2014/main" id="{2F1DA958-18CC-4FE2-B145-38F0364F6F73}"/>
               </a:ext>
             </a:extLst>
           </p:cNvPr>
@@ -13780,10 +13664,10 @@
       </p:sp>
       <p:sp>
         <p:nvSpPr>
-          <p:cNvPr id="5" name="c3-text-247">
-            <a:extLst xmlns:a="http://schemas.openxmlformats.org/drawingml/2006/main">
-              <a:ext uri="{FF2B5EF4-FFF2-40B4-BE49-F238E27FC236}">
-                <a16:creationId xmlns:a16="http://schemas.microsoft.com/office/drawing/2014/main" id="{0293B8DA-3E90-4880-842F-A22F8718A681}"/>
+          <p:cNvPr id="5" name="c3-text-245">
+            <a:extLst xmlns:a="http://schemas.openxmlformats.org/drawingml/2006/main">
+              <a:ext uri="{FF2B5EF4-FFF2-40B4-BE49-F238E27FC236}">
+                <a16:creationId xmlns:a16="http://schemas.microsoft.com/office/drawing/2014/main" id="{5807611C-AAE4-4DC0-AACB-472C855DDBFC}"/>
               </a:ext>
             </a:extLst>
           </p:cNvPr>
@@ -13837,10 +13721,10 @@
       </p:sp>
       <p:sp>
         <p:nvSpPr>
-          <p:cNvPr id="6" name="c3-text-334">
-            <a:extLst xmlns:a="http://schemas.openxmlformats.org/drawingml/2006/main">
-              <a:ext uri="{FF2B5EF4-FFF2-40B4-BE49-F238E27FC236}">
-                <a16:creationId xmlns:a16="http://schemas.microsoft.com/office/drawing/2014/main" id="{8F827FD7-D6A8-4BA5-AC06-2E0773F5DE3C}"/>
+          <p:cNvPr id="6" name="c3-text-332">
+            <a:extLst xmlns:a="http://schemas.openxmlformats.org/drawingml/2006/main">
+              <a:ext uri="{FF2B5EF4-FFF2-40B4-BE49-F238E27FC236}">
+                <a16:creationId xmlns:a16="http://schemas.microsoft.com/office/drawing/2014/main" id="{F1299C90-22B9-4CEF-9A11-627A0724D6C9}"/>
               </a:ext>
             </a:extLst>
           </p:cNvPr>
@@ -13895,7 +13779,7 @@
     </p:spTree>
     <p:extLst>
       <p:ext uri="{BB962C8B-B14F-4D97-AF65-F5344CB8AC3E}">
-        <p14:creationId xmlns:p14="http://schemas.microsoft.com/office/powerpoint/2010/main" val="1855797026"/>
+        <p14:creationId xmlns:p14="http://schemas.microsoft.com/office/powerpoint/2010/main" val="1733599429"/>
       </p:ext>
     </p:extLst>
   </p:cSld>
@@ -13923,10 +13807,10 @@
       </p:grpSpPr>
       <p:sp>
         <p:nvSpPr>
-          <p:cNvPr id="9" name="c3-text-248">
-            <a:extLst xmlns:a="http://schemas.openxmlformats.org/drawingml/2006/main">
-              <a:ext uri="{FF2B5EF4-FFF2-40B4-BE49-F238E27FC236}">
-                <a16:creationId xmlns:a16="http://schemas.microsoft.com/office/drawing/2014/main" id="{9F4A8A6A-1DEC-4354-A3E7-7E6B088EBCF4}"/>
+          <p:cNvPr id="9" name="c3-text-246">
+            <a:extLst xmlns:a="http://schemas.openxmlformats.org/drawingml/2006/main">
+              <a:ext uri="{FF2B5EF4-FFF2-40B4-BE49-F238E27FC236}">
+                <a16:creationId xmlns:a16="http://schemas.microsoft.com/office/drawing/2014/main" id="{752F0944-6B3D-4965-9D90-0C3B382DFD7D}"/>
               </a:ext>
             </a:extLst>
           </p:cNvPr>
@@ -13980,10 +13864,10 @@
       </p:sp>
       <p:sp>
         <p:nvSpPr>
-          <p:cNvPr id="2" name="c3-text-249">
-            <a:extLst xmlns:a="http://schemas.openxmlformats.org/drawingml/2006/main">
-              <a:ext uri="{FF2B5EF4-FFF2-40B4-BE49-F238E27FC236}">
-                <a16:creationId xmlns:a16="http://schemas.microsoft.com/office/drawing/2014/main" id="{23D2DEC5-E5B2-48E7-BAD8-7F910FB4EC9D}"/>
+          <p:cNvPr id="2" name="c3-text-247">
+            <a:extLst xmlns:a="http://schemas.openxmlformats.org/drawingml/2006/main">
+              <a:ext uri="{FF2B5EF4-FFF2-40B4-BE49-F238E27FC236}">
+                <a16:creationId xmlns:a16="http://schemas.microsoft.com/office/drawing/2014/main" id="{A1E81CE9-6855-4FD6-8AE0-D8E1120B58E8}"/>
               </a:ext>
             </a:extLst>
           </p:cNvPr>
@@ -14037,10 +13921,10 @@
       </p:sp>
       <p:sp>
         <p:nvSpPr>
-          <p:cNvPr id="3" name="c3-text-250">
-            <a:extLst xmlns:a="http://schemas.openxmlformats.org/drawingml/2006/main">
-              <a:ext uri="{FF2B5EF4-FFF2-40B4-BE49-F238E27FC236}">
-                <a16:creationId xmlns:a16="http://schemas.microsoft.com/office/drawing/2014/main" id="{F4DDB498-4177-4E96-84E6-6386D553200A}"/>
+          <p:cNvPr id="3" name="c3-text-248">
+            <a:extLst xmlns:a="http://schemas.openxmlformats.org/drawingml/2006/main">
+              <a:ext uri="{FF2B5EF4-FFF2-40B4-BE49-F238E27FC236}">
+                <a16:creationId xmlns:a16="http://schemas.microsoft.com/office/drawing/2014/main" id="{64275B91-120E-41B5-B389-B1629102FE10}"/>
               </a:ext>
             </a:extLst>
           </p:cNvPr>
@@ -14094,10 +13978,10 @@
       </p:sp>
       <p:sp>
         <p:nvSpPr>
-          <p:cNvPr id="4" name="c3-text-251">
-            <a:extLst xmlns:a="http://schemas.openxmlformats.org/drawingml/2006/main">
-              <a:ext uri="{FF2B5EF4-FFF2-40B4-BE49-F238E27FC236}">
-                <a16:creationId xmlns:a16="http://schemas.microsoft.com/office/drawing/2014/main" id="{8BA723DE-5C0E-4305-A0EA-6B3AC4B0BE9F}"/>
+          <p:cNvPr id="4" name="c3-text-249">
+            <a:extLst xmlns:a="http://schemas.openxmlformats.org/drawingml/2006/main">
+              <a:ext uri="{FF2B5EF4-FFF2-40B4-BE49-F238E27FC236}">
+                <a16:creationId xmlns:a16="http://schemas.microsoft.com/office/drawing/2014/main" id="{F3960EAD-070B-48F5-890D-012210ADDDD2}"/>
               </a:ext>
             </a:extLst>
           </p:cNvPr>
@@ -14151,10 +14035,10 @@
       </p:sp>
       <p:sp>
         <p:nvSpPr>
-          <p:cNvPr id="5" name="c3-text-252">
-            <a:extLst xmlns:a="http://schemas.openxmlformats.org/drawingml/2006/main">
-              <a:ext uri="{FF2B5EF4-FFF2-40B4-BE49-F238E27FC236}">
-                <a16:creationId xmlns:a16="http://schemas.microsoft.com/office/drawing/2014/main" id="{09A65207-6CF4-433D-917E-2CECA0D9DFA7}"/>
+          <p:cNvPr id="5" name="c3-text-250">
+            <a:extLst xmlns:a="http://schemas.openxmlformats.org/drawingml/2006/main">
+              <a:ext uri="{FF2B5EF4-FFF2-40B4-BE49-F238E27FC236}">
+                <a16:creationId xmlns:a16="http://schemas.microsoft.com/office/drawing/2014/main" id="{809889A9-8872-4407-A256-1A56CBD085B0}"/>
               </a:ext>
             </a:extLst>
           </p:cNvPr>
@@ -14208,10 +14092,10 @@
       </p:sp>
       <p:sp>
         <p:nvSpPr>
-          <p:cNvPr id="6" name="c3-text-253">
-            <a:extLst xmlns:a="http://schemas.openxmlformats.org/drawingml/2006/main">
-              <a:ext uri="{FF2B5EF4-FFF2-40B4-BE49-F238E27FC236}">
-                <a16:creationId xmlns:a16="http://schemas.microsoft.com/office/drawing/2014/main" id="{6252CEF8-F5E4-487B-96FC-2E10851DA60F}"/>
+          <p:cNvPr id="6" name="c3-text-251">
+            <a:extLst xmlns:a="http://schemas.openxmlformats.org/drawingml/2006/main">
+              <a:ext uri="{FF2B5EF4-FFF2-40B4-BE49-F238E27FC236}">
+                <a16:creationId xmlns:a16="http://schemas.microsoft.com/office/drawing/2014/main" id="{6145FF2B-1959-4F0E-96F4-DE434FAB6DCA}"/>
               </a:ext>
             </a:extLst>
           </p:cNvPr>
@@ -14265,10 +14149,10 @@
       </p:sp>
       <p:sp>
         <p:nvSpPr>
-          <p:cNvPr id="7" name="c3-text-254">
-            <a:extLst xmlns:a="http://schemas.openxmlformats.org/drawingml/2006/main">
-              <a:ext uri="{FF2B5EF4-FFF2-40B4-BE49-F238E27FC236}">
-                <a16:creationId xmlns:a16="http://schemas.microsoft.com/office/drawing/2014/main" id="{6E714C41-2DDC-4FDF-AA24-8E9CD2CD406E}"/>
+          <p:cNvPr id="7" name="c3-text-252">
+            <a:extLst xmlns:a="http://schemas.openxmlformats.org/drawingml/2006/main">
+              <a:ext uri="{FF2B5EF4-FFF2-40B4-BE49-F238E27FC236}">
+                <a16:creationId xmlns:a16="http://schemas.microsoft.com/office/drawing/2014/main" id="{DDF0C86A-5873-4B97-BE0C-156B40D29277}"/>
               </a:ext>
             </a:extLst>
           </p:cNvPr>
@@ -14322,10 +14206,10 @@
       </p:sp>
       <p:sp>
         <p:nvSpPr>
-          <p:cNvPr id="8" name="c3-text-335">
-            <a:extLst xmlns:a="http://schemas.openxmlformats.org/drawingml/2006/main">
-              <a:ext uri="{FF2B5EF4-FFF2-40B4-BE49-F238E27FC236}">
-                <a16:creationId xmlns:a16="http://schemas.microsoft.com/office/drawing/2014/main" id="{1C015711-74AA-46D5-8ADE-5D3E5D9CE16E}"/>
+          <p:cNvPr id="8" name="c3-text-333">
+            <a:extLst xmlns:a="http://schemas.openxmlformats.org/drawingml/2006/main">
+              <a:ext uri="{FF2B5EF4-FFF2-40B4-BE49-F238E27FC236}">
+                <a16:creationId xmlns:a16="http://schemas.microsoft.com/office/drawing/2014/main" id="{BF16A95B-5681-43F7-B24B-530CE775ED06}"/>
               </a:ext>
             </a:extLst>
           </p:cNvPr>
@@ -14380,7 +14264,7 @@
     </p:spTree>
     <p:extLst>
       <p:ext uri="{BB962C8B-B14F-4D97-AF65-F5344CB8AC3E}">
-        <p14:creationId xmlns:p14="http://schemas.microsoft.com/office/powerpoint/2010/main" val="109992973"/>
+        <p14:creationId xmlns:p14="http://schemas.microsoft.com/office/powerpoint/2010/main" val="29291840"/>
       </p:ext>
     </p:extLst>
   </p:cSld>
@@ -14408,10 +14292,10 @@
       </p:grpSpPr>
       <p:sp>
         <p:nvSpPr>
-          <p:cNvPr id="8" name="c3-text-255">
-            <a:extLst xmlns:a="http://schemas.openxmlformats.org/drawingml/2006/main">
-              <a:ext uri="{FF2B5EF4-FFF2-40B4-BE49-F238E27FC236}">
-                <a16:creationId xmlns:a16="http://schemas.microsoft.com/office/drawing/2014/main" id="{B8CB9F2F-F27A-455C-8D00-58FBAF3F6A53}"/>
+          <p:cNvPr id="8" name="c3-text-253">
+            <a:extLst xmlns:a="http://schemas.openxmlformats.org/drawingml/2006/main">
+              <a:ext uri="{FF2B5EF4-FFF2-40B4-BE49-F238E27FC236}">
+                <a16:creationId xmlns:a16="http://schemas.microsoft.com/office/drawing/2014/main" id="{F0307C57-86B5-4A89-B796-D02F0D5756EA}"/>
               </a:ext>
             </a:extLst>
           </p:cNvPr>
@@ -14465,10 +14349,10 @@
       </p:sp>
       <p:sp>
         <p:nvSpPr>
-          <p:cNvPr id="2" name="c3-text-256">
-            <a:extLst xmlns:a="http://schemas.openxmlformats.org/drawingml/2006/main">
-              <a:ext uri="{FF2B5EF4-FFF2-40B4-BE49-F238E27FC236}">
-                <a16:creationId xmlns:a16="http://schemas.microsoft.com/office/drawing/2014/main" id="{133310B7-4D5A-4D0C-958F-E557835D200E}"/>
+          <p:cNvPr id="2" name="c3-text-254">
+            <a:extLst xmlns:a="http://schemas.openxmlformats.org/drawingml/2006/main">
+              <a:ext uri="{FF2B5EF4-FFF2-40B4-BE49-F238E27FC236}">
+                <a16:creationId xmlns:a16="http://schemas.microsoft.com/office/drawing/2014/main" id="{EE9D17E9-ACF1-4237-9D30-EFC6BAAF5DED}"/>
               </a:ext>
             </a:extLst>
           </p:cNvPr>
@@ -14522,10 +14406,10 @@
       </p:sp>
       <p:sp>
         <p:nvSpPr>
-          <p:cNvPr id="3" name="c3-text-257">
-            <a:extLst xmlns:a="http://schemas.openxmlformats.org/drawingml/2006/main">
-              <a:ext uri="{FF2B5EF4-FFF2-40B4-BE49-F238E27FC236}">
-                <a16:creationId xmlns:a16="http://schemas.microsoft.com/office/drawing/2014/main" id="{A05616C7-8F38-471F-9A72-F30F19E684F9}"/>
+          <p:cNvPr id="3" name="c3-text-255">
+            <a:extLst xmlns:a="http://schemas.openxmlformats.org/drawingml/2006/main">
+              <a:ext uri="{FF2B5EF4-FFF2-40B4-BE49-F238E27FC236}">
+                <a16:creationId xmlns:a16="http://schemas.microsoft.com/office/drawing/2014/main" id="{BC8AD749-55C1-4E81-80C0-4C0A0A2BB91B}"/>
               </a:ext>
             </a:extLst>
           </p:cNvPr>
@@ -14579,10 +14463,10 @@
       </p:sp>
       <p:sp>
         <p:nvSpPr>
-          <p:cNvPr id="4" name="c3-text-258">
-            <a:extLst xmlns:a="http://schemas.openxmlformats.org/drawingml/2006/main">
-              <a:ext uri="{FF2B5EF4-FFF2-40B4-BE49-F238E27FC236}">
-                <a16:creationId xmlns:a16="http://schemas.microsoft.com/office/drawing/2014/main" id="{17D37894-8CB6-4F55-B7E3-1D480C8FE096}"/>
+          <p:cNvPr id="4" name="c3-text-256">
+            <a:extLst xmlns:a="http://schemas.openxmlformats.org/drawingml/2006/main">
+              <a:ext uri="{FF2B5EF4-FFF2-40B4-BE49-F238E27FC236}">
+                <a16:creationId xmlns:a16="http://schemas.microsoft.com/office/drawing/2014/main" id="{2FB3079D-B3E5-41EC-9ACE-86C3AE028B13}"/>
               </a:ext>
             </a:extLst>
           </p:cNvPr>
@@ -14636,10 +14520,10 @@
       </p:sp>
       <p:sp>
         <p:nvSpPr>
-          <p:cNvPr id="5" name="c3-text-259">
-            <a:extLst xmlns:a="http://schemas.openxmlformats.org/drawingml/2006/main">
-              <a:ext uri="{FF2B5EF4-FFF2-40B4-BE49-F238E27FC236}">
-                <a16:creationId xmlns:a16="http://schemas.microsoft.com/office/drawing/2014/main" id="{40362B9E-D93B-430E-8273-A92D47702D77}"/>
+          <p:cNvPr id="5" name="c3-text-257">
+            <a:extLst xmlns:a="http://schemas.openxmlformats.org/drawingml/2006/main">
+              <a:ext uri="{FF2B5EF4-FFF2-40B4-BE49-F238E27FC236}">
+                <a16:creationId xmlns:a16="http://schemas.microsoft.com/office/drawing/2014/main" id="{61B40CFA-881A-45A6-89F7-8CD1260394E1}"/>
               </a:ext>
             </a:extLst>
           </p:cNvPr>
@@ -14693,10 +14577,10 @@
       </p:sp>
       <p:sp>
         <p:nvSpPr>
-          <p:cNvPr id="6" name="c3-text-260">
-            <a:extLst xmlns:a="http://schemas.openxmlformats.org/drawingml/2006/main">
-              <a:ext uri="{FF2B5EF4-FFF2-40B4-BE49-F238E27FC236}">
-                <a16:creationId xmlns:a16="http://schemas.microsoft.com/office/drawing/2014/main" id="{8E2999D7-F9B1-4D6C-83A1-5FFAB338319D}"/>
+          <p:cNvPr id="6" name="c3-text-258">
+            <a:extLst xmlns:a="http://schemas.openxmlformats.org/drawingml/2006/main">
+              <a:ext uri="{FF2B5EF4-FFF2-40B4-BE49-F238E27FC236}">
+                <a16:creationId xmlns:a16="http://schemas.microsoft.com/office/drawing/2014/main" id="{71AA9A54-1FC3-4F3D-AABC-B98538D3C4EA}"/>
               </a:ext>
             </a:extLst>
           </p:cNvPr>
@@ -14750,10 +14634,10 @@
       </p:sp>
       <p:sp>
         <p:nvSpPr>
-          <p:cNvPr id="7" name="c3-text-336">
-            <a:extLst xmlns:a="http://schemas.openxmlformats.org/drawingml/2006/main">
-              <a:ext uri="{FF2B5EF4-FFF2-40B4-BE49-F238E27FC236}">
-                <a16:creationId xmlns:a16="http://schemas.microsoft.com/office/drawing/2014/main" id="{4892A241-D65E-4F04-BC0A-C93C233CD7FE}"/>
+          <p:cNvPr id="7" name="c3-text-334">
+            <a:extLst xmlns:a="http://schemas.openxmlformats.org/drawingml/2006/main">
+              <a:ext uri="{FF2B5EF4-FFF2-40B4-BE49-F238E27FC236}">
+                <a16:creationId xmlns:a16="http://schemas.microsoft.com/office/drawing/2014/main" id="{93506EFD-2D3E-4FF5-9DB2-045A071889A1}"/>
               </a:ext>
             </a:extLst>
           </p:cNvPr>
@@ -14808,7 +14692,7 @@
     </p:spTree>
     <p:extLst>
       <p:ext uri="{BB962C8B-B14F-4D97-AF65-F5344CB8AC3E}">
-        <p14:creationId xmlns:p14="http://schemas.microsoft.com/office/powerpoint/2010/main" val="131858399"/>
+        <p14:creationId xmlns:p14="http://schemas.microsoft.com/office/powerpoint/2010/main" val="1181691712"/>
       </p:ext>
     </p:extLst>
   </p:cSld>
@@ -14836,10 +14720,10 @@
       </p:grpSpPr>
       <p:sp>
         <p:nvSpPr>
-          <p:cNvPr id="8" name="c3-text-261">
-            <a:extLst xmlns:a="http://schemas.openxmlformats.org/drawingml/2006/main">
-              <a:ext uri="{FF2B5EF4-FFF2-40B4-BE49-F238E27FC236}">
-                <a16:creationId xmlns:a16="http://schemas.microsoft.com/office/drawing/2014/main" id="{3B485274-DC43-4603-BFCB-DFB2D9A44B8A}"/>
+          <p:cNvPr id="8" name="c3-text-259">
+            <a:extLst xmlns:a="http://schemas.openxmlformats.org/drawingml/2006/main">
+              <a:ext uri="{FF2B5EF4-FFF2-40B4-BE49-F238E27FC236}">
+                <a16:creationId xmlns:a16="http://schemas.microsoft.com/office/drawing/2014/main" id="{99EA98AD-6DA3-444F-9881-0E94DAB1C522}"/>
               </a:ext>
             </a:extLst>
           </p:cNvPr>
@@ -14893,10 +14777,10 @@
       </p:sp>
       <p:sp>
         <p:nvSpPr>
-          <p:cNvPr id="2" name="c3-text-262">
-            <a:extLst xmlns:a="http://schemas.openxmlformats.org/drawingml/2006/main">
-              <a:ext uri="{FF2B5EF4-FFF2-40B4-BE49-F238E27FC236}">
-                <a16:creationId xmlns:a16="http://schemas.microsoft.com/office/drawing/2014/main" id="{09C0C40B-45A7-40CB-9676-4531C7ED7539}"/>
+          <p:cNvPr id="2" name="c3-text-260">
+            <a:extLst xmlns:a="http://schemas.openxmlformats.org/drawingml/2006/main">
+              <a:ext uri="{FF2B5EF4-FFF2-40B4-BE49-F238E27FC236}">
+                <a16:creationId xmlns:a16="http://schemas.microsoft.com/office/drawing/2014/main" id="{CD2D3797-1364-421C-9E92-6CDD32F00EB7}"/>
               </a:ext>
             </a:extLst>
           </p:cNvPr>
@@ -14950,10 +14834,10 @@
       </p:sp>
       <p:sp>
         <p:nvSpPr>
-          <p:cNvPr id="3" name="c3-text-263">
-            <a:extLst xmlns:a="http://schemas.openxmlformats.org/drawingml/2006/main">
-              <a:ext uri="{FF2B5EF4-FFF2-40B4-BE49-F238E27FC236}">
-                <a16:creationId xmlns:a16="http://schemas.microsoft.com/office/drawing/2014/main" id="{271D71DE-F085-45F6-9FB2-EA94B16501AA}"/>
+          <p:cNvPr id="3" name="c3-text-261">
+            <a:extLst xmlns:a="http://schemas.openxmlformats.org/drawingml/2006/main">
+              <a:ext uri="{FF2B5EF4-FFF2-40B4-BE49-F238E27FC236}">
+                <a16:creationId xmlns:a16="http://schemas.microsoft.com/office/drawing/2014/main" id="{2978BBAD-32F1-4CB4-9738-ED9509DF7FBD}"/>
               </a:ext>
             </a:extLst>
           </p:cNvPr>
@@ -15007,10 +14891,10 @@
       </p:sp>
       <p:sp>
         <p:nvSpPr>
-          <p:cNvPr id="4" name="c3-text-264">
-            <a:extLst xmlns:a="http://schemas.openxmlformats.org/drawingml/2006/main">
-              <a:ext uri="{FF2B5EF4-FFF2-40B4-BE49-F238E27FC236}">
-                <a16:creationId xmlns:a16="http://schemas.microsoft.com/office/drawing/2014/main" id="{CAFB5803-15ED-43B1-868A-DCAFA8E644B0}"/>
+          <p:cNvPr id="4" name="c3-text-262">
+            <a:extLst xmlns:a="http://schemas.openxmlformats.org/drawingml/2006/main">
+              <a:ext uri="{FF2B5EF4-FFF2-40B4-BE49-F238E27FC236}">
+                <a16:creationId xmlns:a16="http://schemas.microsoft.com/office/drawing/2014/main" id="{207BE4CA-F73C-4B6C-9BB1-055B91B0C7DE}"/>
               </a:ext>
             </a:extLst>
           </p:cNvPr>
@@ -15064,10 +14948,10 @@
       </p:sp>
       <p:sp>
         <p:nvSpPr>
-          <p:cNvPr id="5" name="c3-text-265">
-            <a:extLst xmlns:a="http://schemas.openxmlformats.org/drawingml/2006/main">
-              <a:ext uri="{FF2B5EF4-FFF2-40B4-BE49-F238E27FC236}">
-                <a16:creationId xmlns:a16="http://schemas.microsoft.com/office/drawing/2014/main" id="{DC881D61-7486-449B-AEAC-5E5C4E9804B8}"/>
+          <p:cNvPr id="5" name="c3-text-263">
+            <a:extLst xmlns:a="http://schemas.openxmlformats.org/drawingml/2006/main">
+              <a:ext uri="{FF2B5EF4-FFF2-40B4-BE49-F238E27FC236}">
+                <a16:creationId xmlns:a16="http://schemas.microsoft.com/office/drawing/2014/main" id="{AAC34BB2-95E5-4295-BF02-29E3A1380BD6}"/>
               </a:ext>
             </a:extLst>
           </p:cNvPr>
@@ -15121,10 +15005,10 @@
       </p:sp>
       <p:sp>
         <p:nvSpPr>
-          <p:cNvPr id="6" name="c3-text-266">
-            <a:extLst xmlns:a="http://schemas.openxmlformats.org/drawingml/2006/main">
-              <a:ext uri="{FF2B5EF4-FFF2-40B4-BE49-F238E27FC236}">
-                <a16:creationId xmlns:a16="http://schemas.microsoft.com/office/drawing/2014/main" id="{9A8D5EEE-E273-4061-80BF-F1D3C86D6478}"/>
+          <p:cNvPr id="6" name="c3-text-264">
+            <a:extLst xmlns:a="http://schemas.openxmlformats.org/drawingml/2006/main">
+              <a:ext uri="{FF2B5EF4-FFF2-40B4-BE49-F238E27FC236}">
+                <a16:creationId xmlns:a16="http://schemas.microsoft.com/office/drawing/2014/main" id="{9DE17D43-EFB5-4573-9BB5-A70B9DC77283}"/>
               </a:ext>
             </a:extLst>
           </p:cNvPr>
@@ -15178,10 +15062,10 @@
       </p:sp>
       <p:sp>
         <p:nvSpPr>
-          <p:cNvPr id="7" name="c3-text-337">
-            <a:extLst xmlns:a="http://schemas.openxmlformats.org/drawingml/2006/main">
-              <a:ext uri="{FF2B5EF4-FFF2-40B4-BE49-F238E27FC236}">
-                <a16:creationId xmlns:a16="http://schemas.microsoft.com/office/drawing/2014/main" id="{C14AF20C-B1BA-4563-B4C7-7371762C10A8}"/>
+          <p:cNvPr id="7" name="c3-text-335">
+            <a:extLst xmlns:a="http://schemas.openxmlformats.org/drawingml/2006/main">
+              <a:ext uri="{FF2B5EF4-FFF2-40B4-BE49-F238E27FC236}">
+                <a16:creationId xmlns:a16="http://schemas.microsoft.com/office/drawing/2014/main" id="{0A3D80B1-7209-4D78-B528-86627321F1E2}"/>
               </a:ext>
             </a:extLst>
           </p:cNvPr>
@@ -15236,7 +15120,7 @@
     </p:spTree>
     <p:extLst>
       <p:ext uri="{BB962C8B-B14F-4D97-AF65-F5344CB8AC3E}">
-        <p14:creationId xmlns:p14="http://schemas.microsoft.com/office/powerpoint/2010/main" val="1480735921"/>
+        <p14:creationId xmlns:p14="http://schemas.microsoft.com/office/powerpoint/2010/main" val="2002708320"/>
       </p:ext>
     </p:extLst>
   </p:cSld>
@@ -15264,10 +15148,10 @@
       </p:grpSpPr>
       <p:sp>
         <p:nvSpPr>
-          <p:cNvPr id="9" name="c3-text-267">
-            <a:extLst xmlns:a="http://schemas.openxmlformats.org/drawingml/2006/main">
-              <a:ext uri="{FF2B5EF4-FFF2-40B4-BE49-F238E27FC236}">
-                <a16:creationId xmlns:a16="http://schemas.microsoft.com/office/drawing/2014/main" id="{F0AB1ED8-A00C-40A2-BF01-DCE142816919}"/>
+          <p:cNvPr id="9" name="c3-text-265">
+            <a:extLst xmlns:a="http://schemas.openxmlformats.org/drawingml/2006/main">
+              <a:ext uri="{FF2B5EF4-FFF2-40B4-BE49-F238E27FC236}">
+                <a16:creationId xmlns:a16="http://schemas.microsoft.com/office/drawing/2014/main" id="{C8644579-5D4E-44FD-AB17-3E2E8490A155}"/>
               </a:ext>
             </a:extLst>
           </p:cNvPr>
@@ -15321,10 +15205,10 @@
       </p:sp>
       <p:sp>
         <p:nvSpPr>
-          <p:cNvPr id="2" name="c3-text-268">
-            <a:extLst xmlns:a="http://schemas.openxmlformats.org/drawingml/2006/main">
-              <a:ext uri="{FF2B5EF4-FFF2-40B4-BE49-F238E27FC236}">
-                <a16:creationId xmlns:a16="http://schemas.microsoft.com/office/drawing/2014/main" id="{520EED1C-2F64-4BA6-84E2-87D6933A2D2B}"/>
+          <p:cNvPr id="2" name="c3-text-266">
+            <a:extLst xmlns:a="http://schemas.openxmlformats.org/drawingml/2006/main">
+              <a:ext uri="{FF2B5EF4-FFF2-40B4-BE49-F238E27FC236}">
+                <a16:creationId xmlns:a16="http://schemas.microsoft.com/office/drawing/2014/main" id="{5B9AF743-1FC3-4984-8A4C-13DC24574BA1}"/>
               </a:ext>
             </a:extLst>
           </p:cNvPr>
@@ -15378,10 +15262,10 @@
       </p:sp>
       <p:sp>
         <p:nvSpPr>
-          <p:cNvPr id="3" name="c3-text-269">
-            <a:extLst xmlns:a="http://schemas.openxmlformats.org/drawingml/2006/main">
-              <a:ext uri="{FF2B5EF4-FFF2-40B4-BE49-F238E27FC236}">
-                <a16:creationId xmlns:a16="http://schemas.microsoft.com/office/drawing/2014/main" id="{FA8DF5E1-D69A-471E-831D-1279C6996429}"/>
+          <p:cNvPr id="3" name="c3-text-267">
+            <a:extLst xmlns:a="http://schemas.openxmlformats.org/drawingml/2006/main">
+              <a:ext uri="{FF2B5EF4-FFF2-40B4-BE49-F238E27FC236}">
+                <a16:creationId xmlns:a16="http://schemas.microsoft.com/office/drawing/2014/main" id="{FC1DF0B5-D754-4D57-84C7-4DA8BC898000}"/>
               </a:ext>
             </a:extLst>
           </p:cNvPr>
@@ -15435,10 +15319,10 @@
       </p:sp>
       <p:sp>
         <p:nvSpPr>
-          <p:cNvPr id="4" name="c3-text-270">
-            <a:extLst xmlns:a="http://schemas.openxmlformats.org/drawingml/2006/main">
-              <a:ext uri="{FF2B5EF4-FFF2-40B4-BE49-F238E27FC236}">
-                <a16:creationId xmlns:a16="http://schemas.microsoft.com/office/drawing/2014/main" id="{C6D409DD-8CCD-4325-8D40-9033273D8724}"/>
+          <p:cNvPr id="4" name="c3-text-268">
+            <a:extLst xmlns:a="http://schemas.openxmlformats.org/drawingml/2006/main">
+              <a:ext uri="{FF2B5EF4-FFF2-40B4-BE49-F238E27FC236}">
+                <a16:creationId xmlns:a16="http://schemas.microsoft.com/office/drawing/2014/main" id="{06FFBBD8-FB65-4A33-8953-1D554625B52A}"/>
               </a:ext>
             </a:extLst>
           </p:cNvPr>
@@ -15492,10 +15376,10 @@
       </p:sp>
       <p:sp>
         <p:nvSpPr>
-          <p:cNvPr id="5" name="c3-text-271">
-            <a:extLst xmlns:a="http://schemas.openxmlformats.org/drawingml/2006/main">
-              <a:ext uri="{FF2B5EF4-FFF2-40B4-BE49-F238E27FC236}">
-                <a16:creationId xmlns:a16="http://schemas.microsoft.com/office/drawing/2014/main" id="{6C74C18E-9AB9-4AB1-A7A2-2E93644BD4A7}"/>
+          <p:cNvPr id="5" name="c3-text-269">
+            <a:extLst xmlns:a="http://schemas.openxmlformats.org/drawingml/2006/main">
+              <a:ext uri="{FF2B5EF4-FFF2-40B4-BE49-F238E27FC236}">
+                <a16:creationId xmlns:a16="http://schemas.microsoft.com/office/drawing/2014/main" id="{0EC0F0C4-55DF-44D6-94ED-EF8FF212869D}"/>
               </a:ext>
             </a:extLst>
           </p:cNvPr>
@@ -15572,10 +15456,10 @@
       </p:sp>
       <p:sp>
         <p:nvSpPr>
-          <p:cNvPr id="6" name="c3-text-272">
-            <a:extLst xmlns:a="http://schemas.openxmlformats.org/drawingml/2006/main">
-              <a:ext uri="{FF2B5EF4-FFF2-40B4-BE49-F238E27FC236}">
-                <a16:creationId xmlns:a16="http://schemas.microsoft.com/office/drawing/2014/main" id="{ECF52579-3DBF-45F4-9459-AD70D6C036BA}"/>
+          <p:cNvPr id="6" name="c3-text-270">
+            <a:extLst xmlns:a="http://schemas.openxmlformats.org/drawingml/2006/main">
+              <a:ext uri="{FF2B5EF4-FFF2-40B4-BE49-F238E27FC236}">
+                <a16:creationId xmlns:a16="http://schemas.microsoft.com/office/drawing/2014/main" id="{665882ED-9125-4882-98A2-65EA5FABED63}"/>
               </a:ext>
             </a:extLst>
           </p:cNvPr>
@@ -15629,10 +15513,10 @@
       </p:sp>
       <p:sp>
         <p:nvSpPr>
-          <p:cNvPr id="7" name="c3-text-273">
-            <a:extLst xmlns:a="http://schemas.openxmlformats.org/drawingml/2006/main">
-              <a:ext uri="{FF2B5EF4-FFF2-40B4-BE49-F238E27FC236}">
-                <a16:creationId xmlns:a16="http://schemas.microsoft.com/office/drawing/2014/main" id="{822112AD-A984-42F1-BA0F-E21FD0C34F40}"/>
+          <p:cNvPr id="7" name="c3-text-271">
+            <a:extLst xmlns:a="http://schemas.openxmlformats.org/drawingml/2006/main">
+              <a:ext uri="{FF2B5EF4-FFF2-40B4-BE49-F238E27FC236}">
+                <a16:creationId xmlns:a16="http://schemas.microsoft.com/office/drawing/2014/main" id="{752C7EB8-16CD-4E9F-9C5E-ED72E15B7D4E}"/>
               </a:ext>
             </a:extLst>
           </p:cNvPr>
@@ -15686,10 +15570,10 @@
       </p:sp>
       <p:sp>
         <p:nvSpPr>
-          <p:cNvPr id="8" name="c3-text-338">
-            <a:extLst xmlns:a="http://schemas.openxmlformats.org/drawingml/2006/main">
-              <a:ext uri="{FF2B5EF4-FFF2-40B4-BE49-F238E27FC236}">
-                <a16:creationId xmlns:a16="http://schemas.microsoft.com/office/drawing/2014/main" id="{02BD71D9-2240-4A86-84BF-F5FBA190203B}"/>
+          <p:cNvPr id="8" name="c3-text-336">
+            <a:extLst xmlns:a="http://schemas.openxmlformats.org/drawingml/2006/main">
+              <a:ext uri="{FF2B5EF4-FFF2-40B4-BE49-F238E27FC236}">
+                <a16:creationId xmlns:a16="http://schemas.microsoft.com/office/drawing/2014/main" id="{37395A8E-2E16-4774-9973-AA54D5C146C3}"/>
               </a:ext>
             </a:extLst>
           </p:cNvPr>
@@ -15744,7 +15628,7 @@
     </p:spTree>
     <p:extLst>
       <p:ext uri="{BB962C8B-B14F-4D97-AF65-F5344CB8AC3E}">
-        <p14:creationId xmlns:p14="http://schemas.microsoft.com/office/powerpoint/2010/main" val="1024670148"/>
+        <p14:creationId xmlns:p14="http://schemas.microsoft.com/office/powerpoint/2010/main" val="616509994"/>
       </p:ext>
     </p:extLst>
   </p:cSld>
@@ -15772,10 +15656,10 @@
       </p:grpSpPr>
       <p:sp>
         <p:nvSpPr>
-          <p:cNvPr id="27" name="c3-text-274">
-            <a:extLst xmlns:a="http://schemas.openxmlformats.org/drawingml/2006/main">
-              <a:ext uri="{FF2B5EF4-FFF2-40B4-BE49-F238E27FC236}">
-                <a16:creationId xmlns:a16="http://schemas.microsoft.com/office/drawing/2014/main" id="{7D03B6EE-CE04-4009-8260-EEEFBC7DA9C5}"/>
+          <p:cNvPr id="27" name="c3-text-272">
+            <a:extLst xmlns:a="http://schemas.openxmlformats.org/drawingml/2006/main">
+              <a:ext uri="{FF2B5EF4-FFF2-40B4-BE49-F238E27FC236}">
+                <a16:creationId xmlns:a16="http://schemas.microsoft.com/office/drawing/2014/main" id="{DBA0732D-E585-42E4-9414-C6979E3CC3C9}"/>
               </a:ext>
             </a:extLst>
           </p:cNvPr>
@@ -15829,10 +15713,10 @@
       </p:sp>
       <p:sp>
         <p:nvSpPr>
-          <p:cNvPr id="2" name="c3-text-275">
-            <a:extLst xmlns:a="http://schemas.openxmlformats.org/drawingml/2006/main">
-              <a:ext uri="{FF2B5EF4-FFF2-40B4-BE49-F238E27FC236}">
-                <a16:creationId xmlns:a16="http://schemas.microsoft.com/office/drawing/2014/main" id="{14828A99-80CB-4AAE-B595-D01672727CAA}"/>
+          <p:cNvPr id="2" name="c3-text-273">
+            <a:extLst xmlns:a="http://schemas.openxmlformats.org/drawingml/2006/main">
+              <a:ext uri="{FF2B5EF4-FFF2-40B4-BE49-F238E27FC236}">
+                <a16:creationId xmlns:a16="http://schemas.microsoft.com/office/drawing/2014/main" id="{56CDFFEF-5655-4867-8C39-07F3801767DF}"/>
               </a:ext>
             </a:extLst>
           </p:cNvPr>
@@ -15886,10 +15770,10 @@
       </p:sp>
       <p:sp>
         <p:nvSpPr>
-          <p:cNvPr id="3" name="c3-text-276">
-            <a:extLst xmlns:a="http://schemas.openxmlformats.org/drawingml/2006/main">
-              <a:ext uri="{FF2B5EF4-FFF2-40B4-BE49-F238E27FC236}">
-                <a16:creationId xmlns:a16="http://schemas.microsoft.com/office/drawing/2014/main" id="{4E8996AC-95D8-4B06-A839-7898E30D1AC9}"/>
+          <p:cNvPr id="3" name="c3-text-274">
+            <a:extLst xmlns:a="http://schemas.openxmlformats.org/drawingml/2006/main">
+              <a:ext uri="{FF2B5EF4-FFF2-40B4-BE49-F238E27FC236}">
+                <a16:creationId xmlns:a16="http://schemas.microsoft.com/office/drawing/2014/main" id="{96C7DA7F-1656-4459-878E-ABAFA366494F}"/>
               </a:ext>
             </a:extLst>
           </p:cNvPr>
@@ -15943,11 +15827,11 @@
       </p:sp>
       <p:sp>
         <p:nvSpPr>
-          <p:cNvPr id="4" name="c3-text-277">
-            <a:hlinkClick xmlns:r="http://schemas.openxmlformats.org/officeDocument/2006/relationships" xmlns:a="http://schemas.openxmlformats.org/drawingml/2006/main" r:id="R56fa5d67201a4d7f"/>
-            <a:extLst xmlns:a="http://schemas.openxmlformats.org/drawingml/2006/main">
-              <a:ext uri="{FF2B5EF4-FFF2-40B4-BE49-F238E27FC236}">
-                <a16:creationId xmlns:a16="http://schemas.microsoft.com/office/drawing/2014/main" id="{F0853344-F557-41DB-B225-AE5DF19902A1}"/>
+          <p:cNvPr id="4" name="c3-text-275">
+            <a:hlinkClick xmlns:r="http://schemas.openxmlformats.org/officeDocument/2006/relationships" xmlns:a="http://schemas.openxmlformats.org/drawingml/2006/main" r:id="R26961adb443e4ef0"/>
+            <a:extLst xmlns:a="http://schemas.openxmlformats.org/drawingml/2006/main">
+              <a:ext uri="{FF2B5EF4-FFF2-40B4-BE49-F238E27FC236}">
+                <a16:creationId xmlns:a16="http://schemas.microsoft.com/office/drawing/2014/main" id="{BB70874F-39AA-4F14-9759-54AC98068583}"/>
               </a:ext>
             </a:extLst>
           </p:cNvPr>
@@ -16001,11 +15885,11 @@
       </p:sp>
       <p:sp>
         <p:nvSpPr>
-          <p:cNvPr id="5" name="c3-text-278">
-            <a:hlinkClick xmlns:r="http://schemas.openxmlformats.org/officeDocument/2006/relationships" xmlns:a="http://schemas.openxmlformats.org/drawingml/2006/main" r:id="Rcd65bf21b94946da"/>
-            <a:extLst xmlns:a="http://schemas.openxmlformats.org/drawingml/2006/main">
-              <a:ext uri="{FF2B5EF4-FFF2-40B4-BE49-F238E27FC236}">
-                <a16:creationId xmlns:a16="http://schemas.microsoft.com/office/drawing/2014/main" id="{2607867D-3E3D-44EB-BDBB-62BBEBFD6F3D}"/>
+          <p:cNvPr id="5" name="c3-text-276">
+            <a:hlinkClick xmlns:r="http://schemas.openxmlformats.org/officeDocument/2006/relationships" xmlns:a="http://schemas.openxmlformats.org/drawingml/2006/main" r:id="Ra3708a828b1a4e3a"/>
+            <a:extLst xmlns:a="http://schemas.openxmlformats.org/drawingml/2006/main">
+              <a:ext uri="{FF2B5EF4-FFF2-40B4-BE49-F238E27FC236}">
+                <a16:creationId xmlns:a16="http://schemas.microsoft.com/office/drawing/2014/main" id="{B6823CF1-1F85-4F4F-A84B-A30DB4243848}"/>
               </a:ext>
             </a:extLst>
           </p:cNvPr>
@@ -16059,10 +15943,10 @@
       </p:sp>
       <p:sp>
         <p:nvSpPr>
-          <p:cNvPr id="6" name="c3-shape-279">
-            <a:extLst xmlns:a="http://schemas.openxmlformats.org/drawingml/2006/main">
-              <a:ext uri="{FF2B5EF4-FFF2-40B4-BE49-F238E27FC236}">
-                <a16:creationId xmlns:a16="http://schemas.microsoft.com/office/drawing/2014/main" id="{88BA952D-4EDC-4FDD-875B-830517736E60}"/>
+          <p:cNvPr id="6" name="c3-shape-277">
+            <a:extLst xmlns:a="http://schemas.openxmlformats.org/drawingml/2006/main">
+              <a:ext uri="{FF2B5EF4-FFF2-40B4-BE49-F238E27FC236}">
+                <a16:creationId xmlns:a16="http://schemas.microsoft.com/office/drawing/2014/main" id="{2FF2C737-3FA6-4D97-84C0-81A16E973154}"/>
               </a:ext>
             </a:extLst>
           </p:cNvPr>
@@ -16091,11 +15975,11 @@
       </p:sp>
       <p:sp>
         <p:nvSpPr>
-          <p:cNvPr id="7" name="c3-text-280">
-            <a:hlinkClick xmlns:r="http://schemas.openxmlformats.org/officeDocument/2006/relationships" xmlns:a="http://schemas.openxmlformats.org/drawingml/2006/main" r:id="R47e0a6eb5b454ec0"/>
-            <a:extLst xmlns:a="http://schemas.openxmlformats.org/drawingml/2006/main">
-              <a:ext uri="{FF2B5EF4-FFF2-40B4-BE49-F238E27FC236}">
-                <a16:creationId xmlns:a16="http://schemas.microsoft.com/office/drawing/2014/main" id="{746123C7-C256-47A4-B0E3-0F001B090F55}"/>
+          <p:cNvPr id="7" name="c3-text-278">
+            <a:hlinkClick xmlns:r="http://schemas.openxmlformats.org/officeDocument/2006/relationships" xmlns:a="http://schemas.openxmlformats.org/drawingml/2006/main" r:id="R8bc7a9ca83f04ef6"/>
+            <a:extLst xmlns:a="http://schemas.openxmlformats.org/drawingml/2006/main">
+              <a:ext uri="{FF2B5EF4-FFF2-40B4-BE49-F238E27FC236}">
+                <a16:creationId xmlns:a16="http://schemas.microsoft.com/office/drawing/2014/main" id="{CD20A3DD-9C8A-492F-BAB6-836BEB73AB99}"/>
               </a:ext>
             </a:extLst>
           </p:cNvPr>
@@ -16149,11 +16033,11 @@
       </p:sp>
       <p:sp>
         <p:nvSpPr>
-          <p:cNvPr id="8" name="c3-text-281">
-            <a:hlinkClick xmlns:r="http://schemas.openxmlformats.org/officeDocument/2006/relationships" xmlns:a="http://schemas.openxmlformats.org/drawingml/2006/main" r:id="R3cf14e6311c4487d"/>
-            <a:extLst xmlns:a="http://schemas.openxmlformats.org/drawingml/2006/main">
-              <a:ext uri="{FF2B5EF4-FFF2-40B4-BE49-F238E27FC236}">
-                <a16:creationId xmlns:a16="http://schemas.microsoft.com/office/drawing/2014/main" id="{BBEFEC91-DA60-443E-936E-6D6216556618}"/>
+          <p:cNvPr id="8" name="c3-text-279">
+            <a:hlinkClick xmlns:r="http://schemas.openxmlformats.org/officeDocument/2006/relationships" xmlns:a="http://schemas.openxmlformats.org/drawingml/2006/main" r:id="Rdf6932e1ab414fd8"/>
+            <a:extLst xmlns:a="http://schemas.openxmlformats.org/drawingml/2006/main">
+              <a:ext uri="{FF2B5EF4-FFF2-40B4-BE49-F238E27FC236}">
+                <a16:creationId xmlns:a16="http://schemas.microsoft.com/office/drawing/2014/main" id="{57B7BA1E-A4D3-460C-AB95-AF7163552C69}"/>
               </a:ext>
             </a:extLst>
           </p:cNvPr>
@@ -16207,10 +16091,10 @@
       </p:sp>
       <p:sp>
         <p:nvSpPr>
-          <p:cNvPr id="9" name="c3-shape-282">
-            <a:extLst xmlns:a="http://schemas.openxmlformats.org/drawingml/2006/main">
-              <a:ext uri="{FF2B5EF4-FFF2-40B4-BE49-F238E27FC236}">
-                <a16:creationId xmlns:a16="http://schemas.microsoft.com/office/drawing/2014/main" id="{3E0B9C36-3571-42B1-BDD9-5D52F288B9CD}"/>
+          <p:cNvPr id="9" name="c3-shape-280">
+            <a:extLst xmlns:a="http://schemas.openxmlformats.org/drawingml/2006/main">
+              <a:ext uri="{FF2B5EF4-FFF2-40B4-BE49-F238E27FC236}">
+                <a16:creationId xmlns:a16="http://schemas.microsoft.com/office/drawing/2014/main" id="{90A35DD6-8E1F-4E1D-A6B1-0D316CFBC176}"/>
               </a:ext>
             </a:extLst>
           </p:cNvPr>
@@ -16239,11 +16123,11 @@
       </p:sp>
       <p:sp>
         <p:nvSpPr>
-          <p:cNvPr id="10" name="c3-text-283">
-            <a:hlinkClick xmlns:r="http://schemas.openxmlformats.org/officeDocument/2006/relationships" xmlns:a="http://schemas.openxmlformats.org/drawingml/2006/main" r:id="R4210b0d22b1047cf"/>
-            <a:extLst xmlns:a="http://schemas.openxmlformats.org/drawingml/2006/main">
-              <a:ext uri="{FF2B5EF4-FFF2-40B4-BE49-F238E27FC236}">
-                <a16:creationId xmlns:a16="http://schemas.microsoft.com/office/drawing/2014/main" id="{7D70C6B7-369A-4E6D-9F67-36245F105F1A}"/>
+          <p:cNvPr id="10" name="c3-text-281">
+            <a:hlinkClick xmlns:r="http://schemas.openxmlformats.org/officeDocument/2006/relationships" xmlns:a="http://schemas.openxmlformats.org/drawingml/2006/main" r:id="R84ab4c8d2aa54c7c"/>
+            <a:extLst xmlns:a="http://schemas.openxmlformats.org/drawingml/2006/main">
+              <a:ext uri="{FF2B5EF4-FFF2-40B4-BE49-F238E27FC236}">
+                <a16:creationId xmlns:a16="http://schemas.microsoft.com/office/drawing/2014/main" id="{D2FD390B-812C-461C-BE71-B624F8A5EA08}"/>
               </a:ext>
             </a:extLst>
           </p:cNvPr>
@@ -16297,11 +16181,11 @@
       </p:sp>
       <p:sp>
         <p:nvSpPr>
-          <p:cNvPr id="11" name="c3-text-284">
-            <a:hlinkClick xmlns:r="http://schemas.openxmlformats.org/officeDocument/2006/relationships" xmlns:a="http://schemas.openxmlformats.org/drawingml/2006/main" r:id="R24a22802efa04c67"/>
-            <a:extLst xmlns:a="http://schemas.openxmlformats.org/drawingml/2006/main">
-              <a:ext uri="{FF2B5EF4-FFF2-40B4-BE49-F238E27FC236}">
-                <a16:creationId xmlns:a16="http://schemas.microsoft.com/office/drawing/2014/main" id="{3C07C573-3F1A-410D-9160-80BFA76E17CD}"/>
+          <p:cNvPr id="11" name="c3-text-282">
+            <a:hlinkClick xmlns:r="http://schemas.openxmlformats.org/officeDocument/2006/relationships" xmlns:a="http://schemas.openxmlformats.org/drawingml/2006/main" r:id="Rf24da2ae2a314d8d"/>
+            <a:extLst xmlns:a="http://schemas.openxmlformats.org/drawingml/2006/main">
+              <a:ext uri="{FF2B5EF4-FFF2-40B4-BE49-F238E27FC236}">
+                <a16:creationId xmlns:a16="http://schemas.microsoft.com/office/drawing/2014/main" id="{6AADE082-C1D7-4E2E-B29E-7AA81595A415}"/>
               </a:ext>
             </a:extLst>
           </p:cNvPr>
@@ -16355,10 +16239,10 @@
       </p:sp>
       <p:sp>
         <p:nvSpPr>
-          <p:cNvPr id="12" name="c3-shape-285">
-            <a:extLst xmlns:a="http://schemas.openxmlformats.org/drawingml/2006/main">
-              <a:ext uri="{FF2B5EF4-FFF2-40B4-BE49-F238E27FC236}">
-                <a16:creationId xmlns:a16="http://schemas.microsoft.com/office/drawing/2014/main" id="{58E05BDD-DC39-4DD3-8895-C70CD9C22D52}"/>
+          <p:cNvPr id="12" name="c3-shape-283">
+            <a:extLst xmlns:a="http://schemas.openxmlformats.org/drawingml/2006/main">
+              <a:ext uri="{FF2B5EF4-FFF2-40B4-BE49-F238E27FC236}">
+                <a16:creationId xmlns:a16="http://schemas.microsoft.com/office/drawing/2014/main" id="{4D085B0A-0BE6-4C79-B932-DC40D87C4685}"/>
               </a:ext>
             </a:extLst>
           </p:cNvPr>
@@ -16387,11 +16271,11 @@
       </p:sp>
       <p:sp>
         <p:nvSpPr>
-          <p:cNvPr id="13" name="c3-text-286">
-            <a:hlinkClick xmlns:r="http://schemas.openxmlformats.org/officeDocument/2006/relationships" xmlns:a="http://schemas.openxmlformats.org/drawingml/2006/main" r:id="R2512e38264164bfa"/>
-            <a:extLst xmlns:a="http://schemas.openxmlformats.org/drawingml/2006/main">
-              <a:ext uri="{FF2B5EF4-FFF2-40B4-BE49-F238E27FC236}">
-                <a16:creationId xmlns:a16="http://schemas.microsoft.com/office/drawing/2014/main" id="{FE6B563F-D60B-4FA1-B383-FE89B2582073}"/>
+          <p:cNvPr id="13" name="c3-text-284">
+            <a:hlinkClick xmlns:r="http://schemas.openxmlformats.org/officeDocument/2006/relationships" xmlns:a="http://schemas.openxmlformats.org/drawingml/2006/main" r:id="R7343094ada3d4418"/>
+            <a:extLst xmlns:a="http://schemas.openxmlformats.org/drawingml/2006/main">
+              <a:ext uri="{FF2B5EF4-FFF2-40B4-BE49-F238E27FC236}">
+                <a16:creationId xmlns:a16="http://schemas.microsoft.com/office/drawing/2014/main" id="{B1855DBD-FEEA-4F0D-9B13-EB11783BC0FC}"/>
               </a:ext>
             </a:extLst>
           </p:cNvPr>
@@ -16445,11 +16329,11 @@
       </p:sp>
       <p:sp>
         <p:nvSpPr>
-          <p:cNvPr id="14" name="c3-text-287">
-            <a:hlinkClick xmlns:r="http://schemas.openxmlformats.org/officeDocument/2006/relationships" xmlns:a="http://schemas.openxmlformats.org/drawingml/2006/main" r:id="Rbc1f4daff26d4d36"/>
-            <a:extLst xmlns:a="http://schemas.openxmlformats.org/drawingml/2006/main">
-              <a:ext uri="{FF2B5EF4-FFF2-40B4-BE49-F238E27FC236}">
-                <a16:creationId xmlns:a16="http://schemas.microsoft.com/office/drawing/2014/main" id="{C9BBCFB7-9887-4F06-96A0-C0944547CE20}"/>
+          <p:cNvPr id="14" name="c3-text-285">
+            <a:hlinkClick xmlns:r="http://schemas.openxmlformats.org/officeDocument/2006/relationships" xmlns:a="http://schemas.openxmlformats.org/drawingml/2006/main" r:id="Rf0fce4653ed1490c"/>
+            <a:extLst xmlns:a="http://schemas.openxmlformats.org/drawingml/2006/main">
+              <a:ext uri="{FF2B5EF4-FFF2-40B4-BE49-F238E27FC236}">
+                <a16:creationId xmlns:a16="http://schemas.microsoft.com/office/drawing/2014/main" id="{24942E7D-ADC7-4F79-99F2-B2C882E686B6}"/>
               </a:ext>
             </a:extLst>
           </p:cNvPr>
@@ -16503,11 +16387,11 @@
       </p:sp>
       <p:sp>
         <p:nvSpPr>
-          <p:cNvPr id="15" name="c3-text-288">
-            <a:hlinkClick xmlns:r="http://schemas.openxmlformats.org/officeDocument/2006/relationships" xmlns:a="http://schemas.openxmlformats.org/drawingml/2006/main" r:id="Re1431d57736e42dd"/>
-            <a:extLst xmlns:a="http://schemas.openxmlformats.org/drawingml/2006/main">
-              <a:ext uri="{FF2B5EF4-FFF2-40B4-BE49-F238E27FC236}">
-                <a16:creationId xmlns:a16="http://schemas.microsoft.com/office/drawing/2014/main" id="{717A828F-B0EC-4829-A16B-9D0C06202A03}"/>
+          <p:cNvPr id="15" name="c3-text-286">
+            <a:hlinkClick xmlns:r="http://schemas.openxmlformats.org/officeDocument/2006/relationships" xmlns:a="http://schemas.openxmlformats.org/drawingml/2006/main" r:id="Rae7acd5097a94570"/>
+            <a:extLst xmlns:a="http://schemas.openxmlformats.org/drawingml/2006/main">
+              <a:ext uri="{FF2B5EF4-FFF2-40B4-BE49-F238E27FC236}">
+                <a16:creationId xmlns:a16="http://schemas.microsoft.com/office/drawing/2014/main" id="{999C4EB8-507C-470F-9754-EB68E1554BE7}"/>
               </a:ext>
             </a:extLst>
           </p:cNvPr>
@@ -16561,11 +16445,11 @@
       </p:sp>
       <p:sp>
         <p:nvSpPr>
-          <p:cNvPr id="16" name="c3-text-289">
-            <a:hlinkClick xmlns:r="http://schemas.openxmlformats.org/officeDocument/2006/relationships" xmlns:a="http://schemas.openxmlformats.org/drawingml/2006/main" r:id="R0fc8f3ecf4be4b80"/>
-            <a:extLst xmlns:a="http://schemas.openxmlformats.org/drawingml/2006/main">
-              <a:ext uri="{FF2B5EF4-FFF2-40B4-BE49-F238E27FC236}">
-                <a16:creationId xmlns:a16="http://schemas.microsoft.com/office/drawing/2014/main" id="{193238F7-CF50-4D78-BFA1-F52CF976C624}"/>
+          <p:cNvPr id="16" name="c3-text-287">
+            <a:hlinkClick xmlns:r="http://schemas.openxmlformats.org/officeDocument/2006/relationships" xmlns:a="http://schemas.openxmlformats.org/drawingml/2006/main" r:id="R28c8422fda774554"/>
+            <a:extLst xmlns:a="http://schemas.openxmlformats.org/drawingml/2006/main">
+              <a:ext uri="{FF2B5EF4-FFF2-40B4-BE49-F238E27FC236}">
+                <a16:creationId xmlns:a16="http://schemas.microsoft.com/office/drawing/2014/main" id="{7C8F10AA-0766-4A59-B5B0-1E87156B3B41}"/>
               </a:ext>
             </a:extLst>
           </p:cNvPr>
@@ -16619,10 +16503,10 @@
       </p:sp>
       <p:sp>
         <p:nvSpPr>
-          <p:cNvPr id="17" name="c3-shape-290">
-            <a:extLst xmlns:a="http://schemas.openxmlformats.org/drawingml/2006/main">
-              <a:ext uri="{FF2B5EF4-FFF2-40B4-BE49-F238E27FC236}">
-                <a16:creationId xmlns:a16="http://schemas.microsoft.com/office/drawing/2014/main" id="{E1AF38D3-BD7B-4125-ABCF-EEDE66C860A2}"/>
+          <p:cNvPr id="17" name="c3-shape-288">
+            <a:extLst xmlns:a="http://schemas.openxmlformats.org/drawingml/2006/main">
+              <a:ext uri="{FF2B5EF4-FFF2-40B4-BE49-F238E27FC236}">
+                <a16:creationId xmlns:a16="http://schemas.microsoft.com/office/drawing/2014/main" id="{DA38F1B0-C457-48F6-B66A-F589449E2FAE}"/>
               </a:ext>
             </a:extLst>
           </p:cNvPr>
@@ -16651,11 +16535,11 @@
       </p:sp>
       <p:sp>
         <p:nvSpPr>
-          <p:cNvPr id="18" name="c3-text-291">
-            <a:hlinkClick xmlns:r="http://schemas.openxmlformats.org/officeDocument/2006/relationships" xmlns:a="http://schemas.openxmlformats.org/drawingml/2006/main" r:id="R1f23a865225f481a"/>
-            <a:extLst xmlns:a="http://schemas.openxmlformats.org/drawingml/2006/main">
-              <a:ext uri="{FF2B5EF4-FFF2-40B4-BE49-F238E27FC236}">
-                <a16:creationId xmlns:a16="http://schemas.microsoft.com/office/drawing/2014/main" id="{AC12ACC6-0ED7-4FBA-9910-D6557836BCB4}"/>
+          <p:cNvPr id="18" name="c3-text-289">
+            <a:hlinkClick xmlns:r="http://schemas.openxmlformats.org/officeDocument/2006/relationships" xmlns:a="http://schemas.openxmlformats.org/drawingml/2006/main" r:id="R78c13416c1724713"/>
+            <a:extLst xmlns:a="http://schemas.openxmlformats.org/drawingml/2006/main">
+              <a:ext uri="{FF2B5EF4-FFF2-40B4-BE49-F238E27FC236}">
+                <a16:creationId xmlns:a16="http://schemas.microsoft.com/office/drawing/2014/main" id="{3D34264C-5F45-44CF-80D8-E6DACECE7269}"/>
               </a:ext>
             </a:extLst>
           </p:cNvPr>
@@ -16709,11 +16593,11 @@
       </p:sp>
       <p:sp>
         <p:nvSpPr>
-          <p:cNvPr id="19" name="c3-text-292">
-            <a:hlinkClick xmlns:r="http://schemas.openxmlformats.org/officeDocument/2006/relationships" xmlns:a="http://schemas.openxmlformats.org/drawingml/2006/main" r:id="R24d3a2bde5f841a7"/>
-            <a:extLst xmlns:a="http://schemas.openxmlformats.org/drawingml/2006/main">
-              <a:ext uri="{FF2B5EF4-FFF2-40B4-BE49-F238E27FC236}">
-                <a16:creationId xmlns:a16="http://schemas.microsoft.com/office/drawing/2014/main" id="{658BC85C-4A88-40A2-BA4D-2D3A9C7B9DDD}"/>
+          <p:cNvPr id="19" name="c3-text-290">
+            <a:hlinkClick xmlns:r="http://schemas.openxmlformats.org/officeDocument/2006/relationships" xmlns:a="http://schemas.openxmlformats.org/drawingml/2006/main" r:id="Ra2f8e6ba7c9440a9"/>
+            <a:extLst xmlns:a="http://schemas.openxmlformats.org/drawingml/2006/main">
+              <a:ext uri="{FF2B5EF4-FFF2-40B4-BE49-F238E27FC236}">
+                <a16:creationId xmlns:a16="http://schemas.microsoft.com/office/drawing/2014/main" id="{9E008852-FB02-4368-B88A-FA7C55370FD1}"/>
               </a:ext>
             </a:extLst>
           </p:cNvPr>
@@ -16767,10 +16651,10 @@
       </p:sp>
       <p:sp>
         <p:nvSpPr>
-          <p:cNvPr id="20" name="c3-shape-293">
-            <a:extLst xmlns:a="http://schemas.openxmlformats.org/drawingml/2006/main">
-              <a:ext uri="{FF2B5EF4-FFF2-40B4-BE49-F238E27FC236}">
-                <a16:creationId xmlns:a16="http://schemas.microsoft.com/office/drawing/2014/main" id="{A9CA12F0-1653-49E0-BC57-12D83F710BB8}"/>
+          <p:cNvPr id="20" name="c3-shape-291">
+            <a:extLst xmlns:a="http://schemas.openxmlformats.org/drawingml/2006/main">
+              <a:ext uri="{FF2B5EF4-FFF2-40B4-BE49-F238E27FC236}">
+                <a16:creationId xmlns:a16="http://schemas.microsoft.com/office/drawing/2014/main" id="{1DA65412-A445-4527-BDA3-188E25B19C02}"/>
               </a:ext>
             </a:extLst>
           </p:cNvPr>
@@ -16799,11 +16683,11 @@
       </p:sp>
       <p:sp>
         <p:nvSpPr>
-          <p:cNvPr id="21" name="c3-text-294">
-            <a:hlinkClick xmlns:r="http://schemas.openxmlformats.org/officeDocument/2006/relationships" xmlns:a="http://schemas.openxmlformats.org/drawingml/2006/main" r:id="Rcddf9fb27711438d"/>
-            <a:extLst xmlns:a="http://schemas.openxmlformats.org/drawingml/2006/main">
-              <a:ext uri="{FF2B5EF4-FFF2-40B4-BE49-F238E27FC236}">
-                <a16:creationId xmlns:a16="http://schemas.microsoft.com/office/drawing/2014/main" id="{55CB7E85-7956-4A38-ABD6-C32F10F905BD}"/>
+          <p:cNvPr id="21" name="c3-text-292">
+            <a:hlinkClick xmlns:r="http://schemas.openxmlformats.org/officeDocument/2006/relationships" xmlns:a="http://schemas.openxmlformats.org/drawingml/2006/main" r:id="R1f32416101a342f5"/>
+            <a:extLst xmlns:a="http://schemas.openxmlformats.org/drawingml/2006/main">
+              <a:ext uri="{FF2B5EF4-FFF2-40B4-BE49-F238E27FC236}">
+                <a16:creationId xmlns:a16="http://schemas.microsoft.com/office/drawing/2014/main" id="{08931209-2033-4833-AD5E-27027AB4AB99}"/>
               </a:ext>
             </a:extLst>
           </p:cNvPr>
@@ -16857,11 +16741,11 @@
       </p:sp>
       <p:sp>
         <p:nvSpPr>
-          <p:cNvPr id="22" name="c3-text-295">
-            <a:hlinkClick xmlns:r="http://schemas.openxmlformats.org/officeDocument/2006/relationships" xmlns:a="http://schemas.openxmlformats.org/drawingml/2006/main" r:id="R0a73f53e1f1b49a8"/>
-            <a:extLst xmlns:a="http://schemas.openxmlformats.org/drawingml/2006/main">
-              <a:ext uri="{FF2B5EF4-FFF2-40B4-BE49-F238E27FC236}">
-                <a16:creationId xmlns:a16="http://schemas.microsoft.com/office/drawing/2014/main" id="{72E10DCF-C1A8-49F9-996F-56161D4F9654}"/>
+          <p:cNvPr id="22" name="c3-text-293">
+            <a:hlinkClick xmlns:r="http://schemas.openxmlformats.org/officeDocument/2006/relationships" xmlns:a="http://schemas.openxmlformats.org/drawingml/2006/main" r:id="R10714949962248ee"/>
+            <a:extLst xmlns:a="http://schemas.openxmlformats.org/drawingml/2006/main">
+              <a:ext uri="{FF2B5EF4-FFF2-40B4-BE49-F238E27FC236}">
+                <a16:creationId xmlns:a16="http://schemas.microsoft.com/office/drawing/2014/main" id="{453AD451-6080-470A-A8CD-E67BA6684119}"/>
               </a:ext>
             </a:extLst>
           </p:cNvPr>
@@ -16915,10 +16799,10 @@
       </p:sp>
       <p:sp>
         <p:nvSpPr>
-          <p:cNvPr id="23" name="c3-shape-296">
-            <a:extLst xmlns:a="http://schemas.openxmlformats.org/drawingml/2006/main">
-              <a:ext uri="{FF2B5EF4-FFF2-40B4-BE49-F238E27FC236}">
-                <a16:creationId xmlns:a16="http://schemas.microsoft.com/office/drawing/2014/main" id="{0CD96167-D280-4FDF-B2C9-5B53B1D54CFE}"/>
+          <p:cNvPr id="23" name="c3-shape-294">
+            <a:extLst xmlns:a="http://schemas.openxmlformats.org/drawingml/2006/main">
+              <a:ext uri="{FF2B5EF4-FFF2-40B4-BE49-F238E27FC236}">
+                <a16:creationId xmlns:a16="http://schemas.microsoft.com/office/drawing/2014/main" id="{5C24DA87-6B89-4EC4-A5FE-CF54CB75698D}"/>
               </a:ext>
             </a:extLst>
           </p:cNvPr>
@@ -16947,11 +16831,11 @@
       </p:sp>
       <p:sp>
         <p:nvSpPr>
-          <p:cNvPr id="24" name="c3-text-297">
-            <a:hlinkClick xmlns:r="http://schemas.openxmlformats.org/officeDocument/2006/relationships" xmlns:a="http://schemas.openxmlformats.org/drawingml/2006/main" r:id="R5f2f1e2d87ab4b53"/>
-            <a:extLst xmlns:a="http://schemas.openxmlformats.org/drawingml/2006/main">
-              <a:ext uri="{FF2B5EF4-FFF2-40B4-BE49-F238E27FC236}">
-                <a16:creationId xmlns:a16="http://schemas.microsoft.com/office/drawing/2014/main" id="{D92F806D-E487-4DFE-A5F8-25EF52C022A6}"/>
+          <p:cNvPr id="24" name="c3-text-295">
+            <a:hlinkClick xmlns:r="http://schemas.openxmlformats.org/officeDocument/2006/relationships" xmlns:a="http://schemas.openxmlformats.org/drawingml/2006/main" r:id="Rb39cdbdf268c40b7"/>
+            <a:extLst xmlns:a="http://schemas.openxmlformats.org/drawingml/2006/main">
+              <a:ext uri="{FF2B5EF4-FFF2-40B4-BE49-F238E27FC236}">
+                <a16:creationId xmlns:a16="http://schemas.microsoft.com/office/drawing/2014/main" id="{74AF8F54-40C1-48ED-8D06-0DFED7E35AAD}"/>
               </a:ext>
             </a:extLst>
           </p:cNvPr>
@@ -17005,11 +16889,11 @@
       </p:sp>
       <p:sp>
         <p:nvSpPr>
-          <p:cNvPr id="25" name="c3-text-298">
-            <a:hlinkClick xmlns:r="http://schemas.openxmlformats.org/officeDocument/2006/relationships" xmlns:a="http://schemas.openxmlformats.org/drawingml/2006/main" r:id="Rd3cfc15bd3b741c0"/>
-            <a:extLst xmlns:a="http://schemas.openxmlformats.org/drawingml/2006/main">
-              <a:ext uri="{FF2B5EF4-FFF2-40B4-BE49-F238E27FC236}">
-                <a16:creationId xmlns:a16="http://schemas.microsoft.com/office/drawing/2014/main" id="{136DC6E0-BBB2-4006-8DF7-E37BE0FCFED0}"/>
+          <p:cNvPr id="25" name="c3-text-296">
+            <a:hlinkClick xmlns:r="http://schemas.openxmlformats.org/officeDocument/2006/relationships" xmlns:a="http://schemas.openxmlformats.org/drawingml/2006/main" r:id="R2ae80565482c4610"/>
+            <a:extLst xmlns:a="http://schemas.openxmlformats.org/drawingml/2006/main">
+              <a:ext uri="{FF2B5EF4-FFF2-40B4-BE49-F238E27FC236}">
+                <a16:creationId xmlns:a16="http://schemas.microsoft.com/office/drawing/2014/main" id="{D2A607EE-AB29-4E2B-9DA9-8A7CE75FC1EB}"/>
               </a:ext>
             </a:extLst>
           </p:cNvPr>
@@ -17063,10 +16947,10 @@
       </p:sp>
       <p:sp>
         <p:nvSpPr>
-          <p:cNvPr id="26" name="c3-text-339">
-            <a:extLst xmlns:a="http://schemas.openxmlformats.org/drawingml/2006/main">
-              <a:ext uri="{FF2B5EF4-FFF2-40B4-BE49-F238E27FC236}">
-                <a16:creationId xmlns:a16="http://schemas.microsoft.com/office/drawing/2014/main" id="{6F6A7DC9-28EE-418E-B38C-030C9539AFCD}"/>
+          <p:cNvPr id="26" name="c3-text-337">
+            <a:extLst xmlns:a="http://schemas.openxmlformats.org/drawingml/2006/main">
+              <a:ext uri="{FF2B5EF4-FFF2-40B4-BE49-F238E27FC236}">
+                <a16:creationId xmlns:a16="http://schemas.microsoft.com/office/drawing/2014/main" id="{5409A4C3-CB66-4F0B-B059-F67553FBADF1}"/>
               </a:ext>
             </a:extLst>
           </p:cNvPr>
@@ -17121,7 +17005,7 @@
     </p:spTree>
     <p:extLst>
       <p:ext uri="{BB962C8B-B14F-4D97-AF65-F5344CB8AC3E}">
-        <p14:creationId xmlns:p14="http://schemas.microsoft.com/office/powerpoint/2010/main" val="1364602471"/>
+        <p14:creationId xmlns:p14="http://schemas.microsoft.com/office/powerpoint/2010/main" val="1495501332"/>
       </p:ext>
     </p:extLst>
   </p:cSld>
@@ -17152,7 +17036,7 @@
           <p:cNvPr id="19" name="c3-text-18">
             <a:extLst xmlns:a="http://schemas.openxmlformats.org/drawingml/2006/main">
               <a:ext uri="{FF2B5EF4-FFF2-40B4-BE49-F238E27FC236}">
-                <a16:creationId xmlns:a16="http://schemas.microsoft.com/office/drawing/2014/main" id="{A5CFB8BA-DD52-430F-8402-316DA8F8132E}"/>
+                <a16:creationId xmlns:a16="http://schemas.microsoft.com/office/drawing/2014/main" id="{FE93E042-DF55-4E8E-B52D-64724C7D6376}"/>
               </a:ext>
             </a:extLst>
           </p:cNvPr>
@@ -17209,7 +17093,7 @@
           <p:cNvPr id="2" name="c3-text-19">
             <a:extLst xmlns:a="http://schemas.openxmlformats.org/drawingml/2006/main">
               <a:ext uri="{FF2B5EF4-FFF2-40B4-BE49-F238E27FC236}">
-                <a16:creationId xmlns:a16="http://schemas.microsoft.com/office/drawing/2014/main" id="{6AF71EAF-6EA2-426F-AD80-484B97148EC5}"/>
+                <a16:creationId xmlns:a16="http://schemas.microsoft.com/office/drawing/2014/main" id="{B59B2BF3-43C5-4B64-A55A-AA81AD47D898}"/>
               </a:ext>
             </a:extLst>
           </p:cNvPr>
@@ -17266,7 +17150,7 @@
           <p:cNvPr id="3" name="c3-text-20">
             <a:extLst xmlns:a="http://schemas.openxmlformats.org/drawingml/2006/main">
               <a:ext uri="{FF2B5EF4-FFF2-40B4-BE49-F238E27FC236}">
-                <a16:creationId xmlns:a16="http://schemas.microsoft.com/office/drawing/2014/main" id="{9EB41479-040D-4FC7-A0A4-74B1BF181670}"/>
+                <a16:creationId xmlns:a16="http://schemas.microsoft.com/office/drawing/2014/main" id="{07BF7E77-6195-4925-8002-EEAC37C0455F}"/>
               </a:ext>
             </a:extLst>
           </p:cNvPr>
@@ -17323,7 +17207,7 @@
           <p:cNvPr id="4" name="c3-shape-21">
             <a:extLst xmlns:a="http://schemas.openxmlformats.org/drawingml/2006/main">
               <a:ext uri="{FF2B5EF4-FFF2-40B4-BE49-F238E27FC236}">
-                <a16:creationId xmlns:a16="http://schemas.microsoft.com/office/drawing/2014/main" id="{D54A50B8-6559-4C01-A705-593E362A87F2}"/>
+                <a16:creationId xmlns:a16="http://schemas.microsoft.com/office/drawing/2014/main" id="{2E12A6BA-9592-4CDF-BECE-6592BDC9C154}"/>
               </a:ext>
             </a:extLst>
           </p:cNvPr>
@@ -17357,7 +17241,7 @@
           <p:cNvPr id="5" name="c3-shape-22">
             <a:extLst xmlns:a="http://schemas.openxmlformats.org/drawingml/2006/main">
               <a:ext uri="{FF2B5EF4-FFF2-40B4-BE49-F238E27FC236}">
-                <a16:creationId xmlns:a16="http://schemas.microsoft.com/office/drawing/2014/main" id="{6814186A-441D-4013-B5AE-567685396941}"/>
+                <a16:creationId xmlns:a16="http://schemas.microsoft.com/office/drawing/2014/main" id="{53A5A7C4-6B6A-4AE1-AD6A-5743ADD12D4B}"/>
               </a:ext>
             </a:extLst>
           </p:cNvPr>
@@ -17389,7 +17273,7 @@
           <p:cNvPr id="6" name="c3-text-23">
             <a:extLst xmlns:a="http://schemas.openxmlformats.org/drawingml/2006/main">
               <a:ext uri="{FF2B5EF4-FFF2-40B4-BE49-F238E27FC236}">
-                <a16:creationId xmlns:a16="http://schemas.microsoft.com/office/drawing/2014/main" id="{564BBF33-EF0C-4AF2-9D6E-7D6C72F7DA3F}"/>
+                <a16:creationId xmlns:a16="http://schemas.microsoft.com/office/drawing/2014/main" id="{31C2F474-6AC2-407D-BF03-C3E5509BC1E7}"/>
               </a:ext>
             </a:extLst>
           </p:cNvPr>
@@ -17446,7 +17330,7 @@
           <p:cNvPr id="7" name="c3-text-24">
             <a:extLst xmlns:a="http://schemas.openxmlformats.org/drawingml/2006/main">
               <a:ext uri="{FF2B5EF4-FFF2-40B4-BE49-F238E27FC236}">
-                <a16:creationId xmlns:a16="http://schemas.microsoft.com/office/drawing/2014/main" id="{8E67C971-2900-43B2-811E-8A42AF5286B0}"/>
+                <a16:creationId xmlns:a16="http://schemas.microsoft.com/office/drawing/2014/main" id="{C3992B19-7C25-4023-8F99-06DB0E709768}"/>
               </a:ext>
             </a:extLst>
           </p:cNvPr>
@@ -17549,7 +17433,7 @@
           <p:cNvPr id="8" name="c3-shape-25">
             <a:extLst xmlns:a="http://schemas.openxmlformats.org/drawingml/2006/main">
               <a:ext uri="{FF2B5EF4-FFF2-40B4-BE49-F238E27FC236}">
-                <a16:creationId xmlns:a16="http://schemas.microsoft.com/office/drawing/2014/main" id="{02B4D9D4-C8C9-4A0F-8F1D-D07E496D4274}"/>
+                <a16:creationId xmlns:a16="http://schemas.microsoft.com/office/drawing/2014/main" id="{E49E45CC-A8CA-41E3-8522-D9AC4203AB1C}"/>
               </a:ext>
             </a:extLst>
           </p:cNvPr>
@@ -17583,7 +17467,7 @@
           <p:cNvPr id="9" name="c3-shape-26">
             <a:extLst xmlns:a="http://schemas.openxmlformats.org/drawingml/2006/main">
               <a:ext uri="{FF2B5EF4-FFF2-40B4-BE49-F238E27FC236}">
-                <a16:creationId xmlns:a16="http://schemas.microsoft.com/office/drawing/2014/main" id="{30383FA3-2A10-4001-A9C4-2A881160DE21}"/>
+                <a16:creationId xmlns:a16="http://schemas.microsoft.com/office/drawing/2014/main" id="{89E251E1-C86D-4F7C-99CA-7A7F678AAC9D}"/>
               </a:ext>
             </a:extLst>
           </p:cNvPr>
@@ -17615,7 +17499,7 @@
           <p:cNvPr id="10" name="c3-text-27">
             <a:extLst xmlns:a="http://schemas.openxmlformats.org/drawingml/2006/main">
               <a:ext uri="{FF2B5EF4-FFF2-40B4-BE49-F238E27FC236}">
-                <a16:creationId xmlns:a16="http://schemas.microsoft.com/office/drawing/2014/main" id="{50B968DC-E66F-431B-9079-5D274CACCAF8}"/>
+                <a16:creationId xmlns:a16="http://schemas.microsoft.com/office/drawing/2014/main" id="{EC4BFC31-EED3-42FB-83EC-8EE94F36D951}"/>
               </a:ext>
             </a:extLst>
           </p:cNvPr>
@@ -17672,7 +17556,7 @@
           <p:cNvPr id="11" name="c3-text-28">
             <a:extLst xmlns:a="http://schemas.openxmlformats.org/drawingml/2006/main">
               <a:ext uri="{FF2B5EF4-FFF2-40B4-BE49-F238E27FC236}">
-                <a16:creationId xmlns:a16="http://schemas.microsoft.com/office/drawing/2014/main" id="{2279F3E6-E49E-4706-AC33-FA34DD2ABEF3}"/>
+                <a16:creationId xmlns:a16="http://schemas.microsoft.com/office/drawing/2014/main" id="{E0B7AEE9-1406-45AB-AA7E-7FEA45FC567B}"/>
               </a:ext>
             </a:extLst>
           </p:cNvPr>
@@ -17752,7 +17636,7 @@
           <p:cNvPr id="12" name="c3-shape-29">
             <a:extLst xmlns:a="http://schemas.openxmlformats.org/drawingml/2006/main">
               <a:ext uri="{FF2B5EF4-FFF2-40B4-BE49-F238E27FC236}">
-                <a16:creationId xmlns:a16="http://schemas.microsoft.com/office/drawing/2014/main" id="{3DF2072B-CE01-48B4-B73B-F7B3F56FA757}"/>
+                <a16:creationId xmlns:a16="http://schemas.microsoft.com/office/drawing/2014/main" id="{77EC85F7-EE2C-4755-BC00-56B48FFD59BE}"/>
               </a:ext>
             </a:extLst>
           </p:cNvPr>
@@ -17786,7 +17670,7 @@
           <p:cNvPr id="13" name="c3-shape-30">
             <a:extLst xmlns:a="http://schemas.openxmlformats.org/drawingml/2006/main">
               <a:ext uri="{FF2B5EF4-FFF2-40B4-BE49-F238E27FC236}">
-                <a16:creationId xmlns:a16="http://schemas.microsoft.com/office/drawing/2014/main" id="{23DE5926-40EB-4FC3-AC2F-326CE1C26C8A}"/>
+                <a16:creationId xmlns:a16="http://schemas.microsoft.com/office/drawing/2014/main" id="{9667A105-152D-4670-8BCC-D9FEF8956E96}"/>
               </a:ext>
             </a:extLst>
           </p:cNvPr>
@@ -17818,7 +17702,7 @@
           <p:cNvPr id="14" name="c3-text-31">
             <a:extLst xmlns:a="http://schemas.openxmlformats.org/drawingml/2006/main">
               <a:ext uri="{FF2B5EF4-FFF2-40B4-BE49-F238E27FC236}">
-                <a16:creationId xmlns:a16="http://schemas.microsoft.com/office/drawing/2014/main" id="{066D3D32-627B-4540-8795-CF83003B1A33}"/>
+                <a16:creationId xmlns:a16="http://schemas.microsoft.com/office/drawing/2014/main" id="{26180DA8-5F28-46C4-AA1C-47CBE011103E}"/>
               </a:ext>
             </a:extLst>
           </p:cNvPr>
@@ -17875,7 +17759,7 @@
           <p:cNvPr id="15" name="c3-text-32">
             <a:extLst xmlns:a="http://schemas.openxmlformats.org/drawingml/2006/main">
               <a:ext uri="{FF2B5EF4-FFF2-40B4-BE49-F238E27FC236}">
-                <a16:creationId xmlns:a16="http://schemas.microsoft.com/office/drawing/2014/main" id="{530009D8-1090-465E-B4B4-9C2AD51047B3}"/>
+                <a16:creationId xmlns:a16="http://schemas.microsoft.com/office/drawing/2014/main" id="{F8E18BEC-29BF-439C-8586-723E482A6942}"/>
               </a:ext>
             </a:extLst>
           </p:cNvPr>
@@ -17955,7 +17839,7 @@
           <p:cNvPr id="16" name="c3-shape-33">
             <a:extLst xmlns:a="http://schemas.openxmlformats.org/drawingml/2006/main">
               <a:ext uri="{FF2B5EF4-FFF2-40B4-BE49-F238E27FC236}">
-                <a16:creationId xmlns:a16="http://schemas.microsoft.com/office/drawing/2014/main" id="{926F6C75-6113-455A-A9F4-F15E1F9F3440}"/>
+                <a16:creationId xmlns:a16="http://schemas.microsoft.com/office/drawing/2014/main" id="{6F4DEBE0-DA63-4654-B743-636B1334B2CD}"/>
               </a:ext>
             </a:extLst>
           </p:cNvPr>
@@ -17989,7 +17873,7 @@
           <p:cNvPr id="17" name="c3-text-34">
             <a:extLst xmlns:a="http://schemas.openxmlformats.org/drawingml/2006/main">
               <a:ext uri="{FF2B5EF4-FFF2-40B4-BE49-F238E27FC236}">
-                <a16:creationId xmlns:a16="http://schemas.microsoft.com/office/drawing/2014/main" id="{202318CE-62D3-4FE0-9C4C-1E202375959F}"/>
+                <a16:creationId xmlns:a16="http://schemas.microsoft.com/office/drawing/2014/main" id="{2D2FB5BE-C1F7-48C6-8FCE-3F9042B0AA10}"/>
               </a:ext>
             </a:extLst>
           </p:cNvPr>
@@ -18043,10 +17927,10 @@
       </p:sp>
       <p:sp>
         <p:nvSpPr>
-          <p:cNvPr id="18" name="c3-text-313">
-            <a:extLst xmlns:a="http://schemas.openxmlformats.org/drawingml/2006/main">
-              <a:ext uri="{FF2B5EF4-FFF2-40B4-BE49-F238E27FC236}">
-                <a16:creationId xmlns:a16="http://schemas.microsoft.com/office/drawing/2014/main" id="{CA254A1E-C66A-4BDE-AF7E-E8CA7E154508}"/>
+          <p:cNvPr id="18" name="c3-text-311">
+            <a:extLst xmlns:a="http://schemas.openxmlformats.org/drawingml/2006/main">
+              <a:ext uri="{FF2B5EF4-FFF2-40B4-BE49-F238E27FC236}">
+                <a16:creationId xmlns:a16="http://schemas.microsoft.com/office/drawing/2014/main" id="{5C1A6D4E-F164-45C8-9194-08665B839EE9}"/>
               </a:ext>
             </a:extLst>
           </p:cNvPr>
@@ -18101,7 +17985,7 @@
     </p:spTree>
     <p:extLst>
       <p:ext uri="{BB962C8B-B14F-4D97-AF65-F5344CB8AC3E}">
-        <p14:creationId xmlns:p14="http://schemas.microsoft.com/office/powerpoint/2010/main" val="1934861081"/>
+        <p14:creationId xmlns:p14="http://schemas.microsoft.com/office/powerpoint/2010/main" val="1821985872"/>
       </p:ext>
     </p:extLst>
   </p:cSld>
@@ -18129,10 +18013,10 @@
       </p:grpSpPr>
       <p:sp>
         <p:nvSpPr>
-          <p:cNvPr id="14" name="c3-text-299">
-            <a:extLst xmlns:a="http://schemas.openxmlformats.org/drawingml/2006/main">
-              <a:ext uri="{FF2B5EF4-FFF2-40B4-BE49-F238E27FC236}">
-                <a16:creationId xmlns:a16="http://schemas.microsoft.com/office/drawing/2014/main" id="{2A3427C0-D8B5-4394-845F-7FE0A49862DB}"/>
+          <p:cNvPr id="14" name="c3-text-297">
+            <a:extLst xmlns:a="http://schemas.openxmlformats.org/drawingml/2006/main">
+              <a:ext uri="{FF2B5EF4-FFF2-40B4-BE49-F238E27FC236}">
+                <a16:creationId xmlns:a16="http://schemas.microsoft.com/office/drawing/2014/main" id="{6601F513-F439-42EB-A76B-28A49F8E25F2}"/>
               </a:ext>
             </a:extLst>
           </p:cNvPr>
@@ -18186,10 +18070,10 @@
       </p:sp>
       <p:sp>
         <p:nvSpPr>
-          <p:cNvPr id="2" name="c3-text-300">
-            <a:extLst xmlns:a="http://schemas.openxmlformats.org/drawingml/2006/main">
-              <a:ext uri="{FF2B5EF4-FFF2-40B4-BE49-F238E27FC236}">
-                <a16:creationId xmlns:a16="http://schemas.microsoft.com/office/drawing/2014/main" id="{32F85D77-F89A-4F24-B9D9-1BA60E347735}"/>
+          <p:cNvPr id="2" name="c3-text-298">
+            <a:extLst xmlns:a="http://schemas.openxmlformats.org/drawingml/2006/main">
+              <a:ext uri="{FF2B5EF4-FFF2-40B4-BE49-F238E27FC236}">
+                <a16:creationId xmlns:a16="http://schemas.microsoft.com/office/drawing/2014/main" id="{642D8DF0-2B4F-4545-B2BF-4EEA5943C1EE}"/>
               </a:ext>
             </a:extLst>
           </p:cNvPr>
@@ -18243,10 +18127,10 @@
       </p:sp>
       <p:sp>
         <p:nvSpPr>
-          <p:cNvPr id="3" name="c3-text-301">
-            <a:extLst xmlns:a="http://schemas.openxmlformats.org/drawingml/2006/main">
-              <a:ext uri="{FF2B5EF4-FFF2-40B4-BE49-F238E27FC236}">
-                <a16:creationId xmlns:a16="http://schemas.microsoft.com/office/drawing/2014/main" id="{8F2BFE9E-B105-4D2A-AFC2-6469FAD79CAC}"/>
+          <p:cNvPr id="3" name="c3-text-299">
+            <a:extLst xmlns:a="http://schemas.openxmlformats.org/drawingml/2006/main">
+              <a:ext uri="{FF2B5EF4-FFF2-40B4-BE49-F238E27FC236}">
+                <a16:creationId xmlns:a16="http://schemas.microsoft.com/office/drawing/2014/main" id="{09F9F351-9E5D-45A6-B394-6D5009891E56}"/>
               </a:ext>
             </a:extLst>
           </p:cNvPr>
@@ -18300,11 +18184,11 @@
       </p:sp>
       <p:sp>
         <p:nvSpPr>
-          <p:cNvPr id="4" name="c3-text-302">
-            <a:hlinkClick xmlns:r="http://schemas.openxmlformats.org/officeDocument/2006/relationships" xmlns:a="http://schemas.openxmlformats.org/drawingml/2006/main" r:id="R22bb255c6d004611"/>
-            <a:extLst xmlns:a="http://schemas.openxmlformats.org/drawingml/2006/main">
-              <a:ext uri="{FF2B5EF4-FFF2-40B4-BE49-F238E27FC236}">
-                <a16:creationId xmlns:a16="http://schemas.microsoft.com/office/drawing/2014/main" id="{0FDACC25-787D-4271-B960-39277C20DC41}"/>
+          <p:cNvPr id="4" name="c3-text-300">
+            <a:hlinkClick xmlns:r="http://schemas.openxmlformats.org/officeDocument/2006/relationships" xmlns:a="http://schemas.openxmlformats.org/drawingml/2006/main" r:id="R58d3b0f7d54241bb"/>
+            <a:extLst xmlns:a="http://schemas.openxmlformats.org/drawingml/2006/main">
+              <a:ext uri="{FF2B5EF4-FFF2-40B4-BE49-F238E27FC236}">
+                <a16:creationId xmlns:a16="http://schemas.microsoft.com/office/drawing/2014/main" id="{B2DFEA30-90D4-4B18-8935-903173EB81D6}"/>
               </a:ext>
             </a:extLst>
           </p:cNvPr>
@@ -18358,11 +18242,11 @@
       </p:sp>
       <p:sp>
         <p:nvSpPr>
-          <p:cNvPr id="5" name="c3-text-303">
-            <a:hlinkClick xmlns:r="http://schemas.openxmlformats.org/officeDocument/2006/relationships" xmlns:a="http://schemas.openxmlformats.org/drawingml/2006/main" r:id="R60eee523dd8442df"/>
-            <a:extLst xmlns:a="http://schemas.openxmlformats.org/drawingml/2006/main">
-              <a:ext uri="{FF2B5EF4-FFF2-40B4-BE49-F238E27FC236}">
-                <a16:creationId xmlns:a16="http://schemas.microsoft.com/office/drawing/2014/main" id="{6AF00842-FA60-49D2-89D5-0B6E9A53D7FE}"/>
+          <p:cNvPr id="5" name="c3-text-301">
+            <a:hlinkClick xmlns:r="http://schemas.openxmlformats.org/officeDocument/2006/relationships" xmlns:a="http://schemas.openxmlformats.org/drawingml/2006/main" r:id="Rf37a7b9adbc3469a"/>
+            <a:extLst xmlns:a="http://schemas.openxmlformats.org/drawingml/2006/main">
+              <a:ext uri="{FF2B5EF4-FFF2-40B4-BE49-F238E27FC236}">
+                <a16:creationId xmlns:a16="http://schemas.microsoft.com/office/drawing/2014/main" id="{45FB0436-D367-4BE8-896F-FDAFFCDE6F69}"/>
               </a:ext>
             </a:extLst>
           </p:cNvPr>
@@ -18416,10 +18300,10 @@
       </p:sp>
       <p:sp>
         <p:nvSpPr>
-          <p:cNvPr id="6" name="c3-shape-304">
-            <a:extLst xmlns:a="http://schemas.openxmlformats.org/drawingml/2006/main">
-              <a:ext uri="{FF2B5EF4-FFF2-40B4-BE49-F238E27FC236}">
-                <a16:creationId xmlns:a16="http://schemas.microsoft.com/office/drawing/2014/main" id="{AF63B0CD-1C4E-4212-8087-C3EC150FF1E3}"/>
+          <p:cNvPr id="6" name="c3-shape-302">
+            <a:extLst xmlns:a="http://schemas.openxmlformats.org/drawingml/2006/main">
+              <a:ext uri="{FF2B5EF4-FFF2-40B4-BE49-F238E27FC236}">
+                <a16:creationId xmlns:a16="http://schemas.microsoft.com/office/drawing/2014/main" id="{048325A0-F892-4115-B99A-0BD43F3C01FC}"/>
               </a:ext>
             </a:extLst>
           </p:cNvPr>
@@ -18448,11 +18332,11 @@
       </p:sp>
       <p:sp>
         <p:nvSpPr>
-          <p:cNvPr id="7" name="c3-text-305">
-            <a:hlinkClick xmlns:r="http://schemas.openxmlformats.org/officeDocument/2006/relationships" xmlns:a="http://schemas.openxmlformats.org/drawingml/2006/main" r:id="Rd2261becac8a43e9"/>
-            <a:extLst xmlns:a="http://schemas.openxmlformats.org/drawingml/2006/main">
-              <a:ext uri="{FF2B5EF4-FFF2-40B4-BE49-F238E27FC236}">
-                <a16:creationId xmlns:a16="http://schemas.microsoft.com/office/drawing/2014/main" id="{B4FB2158-B640-4D9E-9C03-1E199475D3AB}"/>
+          <p:cNvPr id="7" name="c3-text-303">
+            <a:hlinkClick xmlns:r="http://schemas.openxmlformats.org/officeDocument/2006/relationships" xmlns:a="http://schemas.openxmlformats.org/drawingml/2006/main" r:id="Rd06688da2c27461a"/>
+            <a:extLst xmlns:a="http://schemas.openxmlformats.org/drawingml/2006/main">
+              <a:ext uri="{FF2B5EF4-FFF2-40B4-BE49-F238E27FC236}">
+                <a16:creationId xmlns:a16="http://schemas.microsoft.com/office/drawing/2014/main" id="{E890022F-F1F5-4B95-BF14-F10B098CBB4D}"/>
               </a:ext>
             </a:extLst>
           </p:cNvPr>
@@ -18506,11 +18390,11 @@
       </p:sp>
       <p:sp>
         <p:nvSpPr>
-          <p:cNvPr id="8" name="c3-text-306">
-            <a:hlinkClick xmlns:r="http://schemas.openxmlformats.org/officeDocument/2006/relationships" xmlns:a="http://schemas.openxmlformats.org/drawingml/2006/main" r:id="R1f761f67e2cf4a13"/>
-            <a:extLst xmlns:a="http://schemas.openxmlformats.org/drawingml/2006/main">
-              <a:ext uri="{FF2B5EF4-FFF2-40B4-BE49-F238E27FC236}">
-                <a16:creationId xmlns:a16="http://schemas.microsoft.com/office/drawing/2014/main" id="{E1C656CA-A4B3-4BB7-9D7C-05355C08B962}"/>
+          <p:cNvPr id="8" name="c3-text-304">
+            <a:hlinkClick xmlns:r="http://schemas.openxmlformats.org/officeDocument/2006/relationships" xmlns:a="http://schemas.openxmlformats.org/drawingml/2006/main" r:id="Re155524c8a3147f1"/>
+            <a:extLst xmlns:a="http://schemas.openxmlformats.org/drawingml/2006/main">
+              <a:ext uri="{FF2B5EF4-FFF2-40B4-BE49-F238E27FC236}">
+                <a16:creationId xmlns:a16="http://schemas.microsoft.com/office/drawing/2014/main" id="{91C51F5C-0D91-46D7-BCCA-B6821A77A956}"/>
               </a:ext>
             </a:extLst>
           </p:cNvPr>
@@ -18564,10 +18448,10 @@
       </p:sp>
       <p:sp>
         <p:nvSpPr>
-          <p:cNvPr id="9" name="c3-shape-307">
-            <a:extLst xmlns:a="http://schemas.openxmlformats.org/drawingml/2006/main">
-              <a:ext uri="{FF2B5EF4-FFF2-40B4-BE49-F238E27FC236}">
-                <a16:creationId xmlns:a16="http://schemas.microsoft.com/office/drawing/2014/main" id="{8EAA6249-D126-4D1A-8092-84BF58481D7A}"/>
+          <p:cNvPr id="9" name="c3-shape-305">
+            <a:extLst xmlns:a="http://schemas.openxmlformats.org/drawingml/2006/main">
+              <a:ext uri="{FF2B5EF4-FFF2-40B4-BE49-F238E27FC236}">
+                <a16:creationId xmlns:a16="http://schemas.microsoft.com/office/drawing/2014/main" id="{FAA1E989-5AB7-4959-AEE1-947D1F403524}"/>
               </a:ext>
             </a:extLst>
           </p:cNvPr>
@@ -18596,11 +18480,11 @@
       </p:sp>
       <p:sp>
         <p:nvSpPr>
-          <p:cNvPr id="10" name="c3-text-308">
-            <a:hlinkClick xmlns:r="http://schemas.openxmlformats.org/officeDocument/2006/relationships" xmlns:a="http://schemas.openxmlformats.org/drawingml/2006/main" r:id="Rcd2fcd2de0f84a33"/>
-            <a:extLst xmlns:a="http://schemas.openxmlformats.org/drawingml/2006/main">
-              <a:ext uri="{FF2B5EF4-FFF2-40B4-BE49-F238E27FC236}">
-                <a16:creationId xmlns:a16="http://schemas.microsoft.com/office/drawing/2014/main" id="{A0269AA2-1DC1-4797-A3DC-5500ABC674ED}"/>
+          <p:cNvPr id="10" name="c3-text-306">
+            <a:hlinkClick xmlns:r="http://schemas.openxmlformats.org/officeDocument/2006/relationships" xmlns:a="http://schemas.openxmlformats.org/drawingml/2006/main" r:id="Rc373a62047ca4bdc"/>
+            <a:extLst xmlns:a="http://schemas.openxmlformats.org/drawingml/2006/main">
+              <a:ext uri="{FF2B5EF4-FFF2-40B4-BE49-F238E27FC236}">
+                <a16:creationId xmlns:a16="http://schemas.microsoft.com/office/drawing/2014/main" id="{1B454BEE-58AD-446B-A76D-8CFB26038B3F}"/>
               </a:ext>
             </a:extLst>
           </p:cNvPr>
@@ -18654,11 +18538,11 @@
       </p:sp>
       <p:sp>
         <p:nvSpPr>
-          <p:cNvPr id="11" name="c3-text-309">
-            <a:hlinkClick xmlns:r="http://schemas.openxmlformats.org/officeDocument/2006/relationships" xmlns:a="http://schemas.openxmlformats.org/drawingml/2006/main" r:id="R3b41524eae2e4eed"/>
-            <a:extLst xmlns:a="http://schemas.openxmlformats.org/drawingml/2006/main">
-              <a:ext uri="{FF2B5EF4-FFF2-40B4-BE49-F238E27FC236}">
-                <a16:creationId xmlns:a16="http://schemas.microsoft.com/office/drawing/2014/main" id="{873DF323-9E60-45D4-90FC-E7947248AF6D}"/>
+          <p:cNvPr id="11" name="c3-text-307">
+            <a:hlinkClick xmlns:r="http://schemas.openxmlformats.org/officeDocument/2006/relationships" xmlns:a="http://schemas.openxmlformats.org/drawingml/2006/main" r:id="R35d6641e8c22437d"/>
+            <a:extLst xmlns:a="http://schemas.openxmlformats.org/drawingml/2006/main">
+              <a:ext uri="{FF2B5EF4-FFF2-40B4-BE49-F238E27FC236}">
+                <a16:creationId xmlns:a16="http://schemas.microsoft.com/office/drawing/2014/main" id="{0FF3CADD-88AE-42C2-B5FA-7B7CA379FBEC}"/>
               </a:ext>
             </a:extLst>
           </p:cNvPr>
@@ -18712,10 +18596,10 @@
       </p:sp>
       <p:sp>
         <p:nvSpPr>
-          <p:cNvPr id="12" name="c3-shape-310">
-            <a:extLst xmlns:a="http://schemas.openxmlformats.org/drawingml/2006/main">
-              <a:ext uri="{FF2B5EF4-FFF2-40B4-BE49-F238E27FC236}">
-                <a16:creationId xmlns:a16="http://schemas.microsoft.com/office/drawing/2014/main" id="{0C2C3C24-3A80-4BF6-A4B9-DA452F3F8570}"/>
+          <p:cNvPr id="12" name="c3-shape-308">
+            <a:extLst xmlns:a="http://schemas.openxmlformats.org/drawingml/2006/main">
+              <a:ext uri="{FF2B5EF4-FFF2-40B4-BE49-F238E27FC236}">
+                <a16:creationId xmlns:a16="http://schemas.microsoft.com/office/drawing/2014/main" id="{BFC8E4C6-0902-4294-88C6-2146971A9253}"/>
               </a:ext>
             </a:extLst>
           </p:cNvPr>
@@ -18744,10 +18628,10 @@
       </p:sp>
       <p:sp>
         <p:nvSpPr>
-          <p:cNvPr id="13" name="c3-text-340">
-            <a:extLst xmlns:a="http://schemas.openxmlformats.org/drawingml/2006/main">
-              <a:ext uri="{FF2B5EF4-FFF2-40B4-BE49-F238E27FC236}">
-                <a16:creationId xmlns:a16="http://schemas.microsoft.com/office/drawing/2014/main" id="{F93C7C6B-C7F9-4855-8DC0-10457B28213F}"/>
+          <p:cNvPr id="13" name="c3-text-338">
+            <a:extLst xmlns:a="http://schemas.openxmlformats.org/drawingml/2006/main">
+              <a:ext uri="{FF2B5EF4-FFF2-40B4-BE49-F238E27FC236}">
+                <a16:creationId xmlns:a16="http://schemas.microsoft.com/office/drawing/2014/main" id="{1E999C20-C4D1-40D0-9D25-6F1EE92903EA}"/>
               </a:ext>
             </a:extLst>
           </p:cNvPr>
@@ -18802,7 +18686,7 @@
     </p:spTree>
     <p:extLst>
       <p:ext uri="{BB962C8B-B14F-4D97-AF65-F5344CB8AC3E}">
-        <p14:creationId xmlns:p14="http://schemas.microsoft.com/office/powerpoint/2010/main" val="1503792747"/>
+        <p14:creationId xmlns:p14="http://schemas.microsoft.com/office/powerpoint/2010/main" val="1776990760"/>
       </p:ext>
     </p:extLst>
   </p:cSld>
@@ -18833,7 +18717,7 @@
           <p:cNvPr id="16" name="c3-text-35">
             <a:extLst xmlns:a="http://schemas.openxmlformats.org/drawingml/2006/main">
               <a:ext uri="{FF2B5EF4-FFF2-40B4-BE49-F238E27FC236}">
-                <a16:creationId xmlns:a16="http://schemas.microsoft.com/office/drawing/2014/main" id="{2620A077-1E93-4E13-AC50-3E557B93430F}"/>
+                <a16:creationId xmlns:a16="http://schemas.microsoft.com/office/drawing/2014/main" id="{786AFEC3-7029-425E-85EC-C1A4D2F240D3}"/>
               </a:ext>
             </a:extLst>
           </p:cNvPr>
@@ -18890,7 +18774,7 @@
           <p:cNvPr id="2" name="c3-text-36">
             <a:extLst xmlns:a="http://schemas.openxmlformats.org/drawingml/2006/main">
               <a:ext uri="{FF2B5EF4-FFF2-40B4-BE49-F238E27FC236}">
-                <a16:creationId xmlns:a16="http://schemas.microsoft.com/office/drawing/2014/main" id="{37B0AE96-6009-4CC5-8143-32CF69355268}"/>
+                <a16:creationId xmlns:a16="http://schemas.microsoft.com/office/drawing/2014/main" id="{44FA2275-15EA-40CB-9D5B-CC66763890C2}"/>
               </a:ext>
             </a:extLst>
           </p:cNvPr>
@@ -18947,7 +18831,7 @@
           <p:cNvPr id="3" name="c3-text-37">
             <a:extLst xmlns:a="http://schemas.openxmlformats.org/drawingml/2006/main">
               <a:ext uri="{FF2B5EF4-FFF2-40B4-BE49-F238E27FC236}">
-                <a16:creationId xmlns:a16="http://schemas.microsoft.com/office/drawing/2014/main" id="{A5E931EB-3BDA-41F4-9D16-C12E35CA5F3C}"/>
+                <a16:creationId xmlns:a16="http://schemas.microsoft.com/office/drawing/2014/main" id="{9BEF847A-E3F8-4C99-9045-E84DB2572B76}"/>
               </a:ext>
             </a:extLst>
           </p:cNvPr>
@@ -19004,7 +18888,7 @@
           <p:cNvPr id="4" name="c3-shape-38">
             <a:extLst xmlns:a="http://schemas.openxmlformats.org/drawingml/2006/main">
               <a:ext uri="{FF2B5EF4-FFF2-40B4-BE49-F238E27FC236}">
-                <a16:creationId xmlns:a16="http://schemas.microsoft.com/office/drawing/2014/main" id="{82B7AF84-E2FB-428C-A0F0-1948ECB28B2D}"/>
+                <a16:creationId xmlns:a16="http://schemas.microsoft.com/office/drawing/2014/main" id="{22668950-8AB2-4BAA-939F-CB0A55242E4E}"/>
               </a:ext>
             </a:extLst>
           </p:cNvPr>
@@ -19038,7 +18922,7 @@
           <p:cNvPr id="5" name="c3-text-39">
             <a:extLst xmlns:a="http://schemas.openxmlformats.org/drawingml/2006/main">
               <a:ext uri="{FF2B5EF4-FFF2-40B4-BE49-F238E27FC236}">
-                <a16:creationId xmlns:a16="http://schemas.microsoft.com/office/drawing/2014/main" id="{47F07162-DA0B-4DF7-8BA4-6F0EFEF30D04}"/>
+                <a16:creationId xmlns:a16="http://schemas.microsoft.com/office/drawing/2014/main" id="{A496B603-B96D-4DA1-AABB-86FB3DCD20BD}"/>
               </a:ext>
             </a:extLst>
           </p:cNvPr>
@@ -19095,7 +18979,7 @@
           <p:cNvPr id="6" name="c3-shape-40">
             <a:extLst xmlns:a="http://schemas.openxmlformats.org/drawingml/2006/main">
               <a:ext uri="{FF2B5EF4-FFF2-40B4-BE49-F238E27FC236}">
-                <a16:creationId xmlns:a16="http://schemas.microsoft.com/office/drawing/2014/main" id="{4C79CE02-0A8E-4BC6-833E-B42EF8CF8E5F}"/>
+                <a16:creationId xmlns:a16="http://schemas.microsoft.com/office/drawing/2014/main" id="{DFFEA9E3-98BC-4CCE-A087-07AC5B92800C}"/>
               </a:ext>
             </a:extLst>
           </p:cNvPr>
@@ -19127,7 +19011,7 @@
           <p:cNvPr id="7" name="c3-shape-41">
             <a:extLst xmlns:a="http://schemas.openxmlformats.org/drawingml/2006/main">
               <a:ext uri="{FF2B5EF4-FFF2-40B4-BE49-F238E27FC236}">
-                <a16:creationId xmlns:a16="http://schemas.microsoft.com/office/drawing/2014/main" id="{097BF319-6094-4FCE-A13A-E182A1FEB7DB}"/>
+                <a16:creationId xmlns:a16="http://schemas.microsoft.com/office/drawing/2014/main" id="{6667AAFD-55EA-4B19-B47F-278208D6663B}"/>
               </a:ext>
             </a:extLst>
           </p:cNvPr>
@@ -19161,7 +19045,7 @@
           <p:cNvPr id="8" name="c3-text-42">
             <a:extLst xmlns:a="http://schemas.openxmlformats.org/drawingml/2006/main">
               <a:ext uri="{FF2B5EF4-FFF2-40B4-BE49-F238E27FC236}">
-                <a16:creationId xmlns:a16="http://schemas.microsoft.com/office/drawing/2014/main" id="{2B54A2F6-6C7B-4AE9-9A8B-79F8F56D7C8D}"/>
+                <a16:creationId xmlns:a16="http://schemas.microsoft.com/office/drawing/2014/main" id="{B56BF250-5AE9-4A2E-95B9-377A760AFEDC}"/>
               </a:ext>
             </a:extLst>
           </p:cNvPr>
@@ -19218,7 +19102,7 @@
           <p:cNvPr id="9" name="c3-shape-43">
             <a:extLst xmlns:a="http://schemas.openxmlformats.org/drawingml/2006/main">
               <a:ext uri="{FF2B5EF4-FFF2-40B4-BE49-F238E27FC236}">
-                <a16:creationId xmlns:a16="http://schemas.microsoft.com/office/drawing/2014/main" id="{6407B951-60D4-43B2-B9D5-8511BAA476B4}"/>
+                <a16:creationId xmlns:a16="http://schemas.microsoft.com/office/drawing/2014/main" id="{B26E98BC-AD89-4580-843A-80074A039D03}"/>
               </a:ext>
             </a:extLst>
           </p:cNvPr>
@@ -19250,7 +19134,7 @@
           <p:cNvPr id="10" name="c3-shape-44">
             <a:extLst xmlns:a="http://schemas.openxmlformats.org/drawingml/2006/main">
               <a:ext uri="{FF2B5EF4-FFF2-40B4-BE49-F238E27FC236}">
-                <a16:creationId xmlns:a16="http://schemas.microsoft.com/office/drawing/2014/main" id="{5A3B33FD-34A6-467E-84EC-A32F6A1EC96E}"/>
+                <a16:creationId xmlns:a16="http://schemas.microsoft.com/office/drawing/2014/main" id="{63F0F29F-C711-48C2-82FC-7140A8F7D29B}"/>
               </a:ext>
             </a:extLst>
           </p:cNvPr>
@@ -19284,7 +19168,7 @@
           <p:cNvPr id="11" name="c3-text-45">
             <a:extLst xmlns:a="http://schemas.openxmlformats.org/drawingml/2006/main">
               <a:ext uri="{FF2B5EF4-FFF2-40B4-BE49-F238E27FC236}">
-                <a16:creationId xmlns:a16="http://schemas.microsoft.com/office/drawing/2014/main" id="{43346A2F-11B6-4FC9-9087-3115AC2D18C3}"/>
+                <a16:creationId xmlns:a16="http://schemas.microsoft.com/office/drawing/2014/main" id="{D2F8567B-3AB3-4185-ABD6-82929721DC25}"/>
               </a:ext>
             </a:extLst>
           </p:cNvPr>
@@ -19341,7 +19225,7 @@
           <p:cNvPr id="12" name="c3-shape-46">
             <a:extLst xmlns:a="http://schemas.openxmlformats.org/drawingml/2006/main">
               <a:ext uri="{FF2B5EF4-FFF2-40B4-BE49-F238E27FC236}">
-                <a16:creationId xmlns:a16="http://schemas.microsoft.com/office/drawing/2014/main" id="{5316E6AE-BBDA-409B-B098-FF2E03E2C412}"/>
+                <a16:creationId xmlns:a16="http://schemas.microsoft.com/office/drawing/2014/main" id="{807EB786-3AC4-423B-A56A-DBB8FFF45DBF}"/>
               </a:ext>
             </a:extLst>
           </p:cNvPr>
@@ -19375,7 +19259,7 @@
           <p:cNvPr id="13" name="c3-text-47">
             <a:extLst xmlns:a="http://schemas.openxmlformats.org/drawingml/2006/main">
               <a:ext uri="{FF2B5EF4-FFF2-40B4-BE49-F238E27FC236}">
-                <a16:creationId xmlns:a16="http://schemas.microsoft.com/office/drawing/2014/main" id="{D8F4C495-2A04-47E7-BCAC-83CE205B0451}"/>
+                <a16:creationId xmlns:a16="http://schemas.microsoft.com/office/drawing/2014/main" id="{F4FB0FCC-9B74-4B1D-AD26-A018CF8A96BC}"/>
               </a:ext>
             </a:extLst>
           </p:cNvPr>
@@ -19432,7 +19316,7 @@
           <p:cNvPr id="14" name="c3-text-48">
             <a:extLst xmlns:a="http://schemas.openxmlformats.org/drawingml/2006/main">
               <a:ext uri="{FF2B5EF4-FFF2-40B4-BE49-F238E27FC236}">
-                <a16:creationId xmlns:a16="http://schemas.microsoft.com/office/drawing/2014/main" id="{475A2CBD-B8D5-402C-9AC9-BF77AB2686EC}"/>
+                <a16:creationId xmlns:a16="http://schemas.microsoft.com/office/drawing/2014/main" id="{EE5447C5-AF92-43AF-92FA-CA5B23EC286A}"/>
               </a:ext>
             </a:extLst>
           </p:cNvPr>
@@ -19486,10 +19370,10 @@
       </p:sp>
       <p:sp>
         <p:nvSpPr>
-          <p:cNvPr id="15" name="c3-text-314">
-            <a:extLst xmlns:a="http://schemas.openxmlformats.org/drawingml/2006/main">
-              <a:ext uri="{FF2B5EF4-FFF2-40B4-BE49-F238E27FC236}">
-                <a16:creationId xmlns:a16="http://schemas.microsoft.com/office/drawing/2014/main" id="{E06CD558-3288-458A-81EB-6D3CB200A7EA}"/>
+          <p:cNvPr id="15" name="c3-text-312">
+            <a:extLst xmlns:a="http://schemas.openxmlformats.org/drawingml/2006/main">
+              <a:ext uri="{FF2B5EF4-FFF2-40B4-BE49-F238E27FC236}">
+                <a16:creationId xmlns:a16="http://schemas.microsoft.com/office/drawing/2014/main" id="{D202472F-A74D-446D-B26E-9BB299337571}"/>
               </a:ext>
             </a:extLst>
           </p:cNvPr>
@@ -19544,7 +19428,7 @@
     </p:spTree>
     <p:extLst>
       <p:ext uri="{BB962C8B-B14F-4D97-AF65-F5344CB8AC3E}">
-        <p14:creationId xmlns:p14="http://schemas.microsoft.com/office/powerpoint/2010/main" val="1174297236"/>
+        <p14:creationId xmlns:p14="http://schemas.microsoft.com/office/powerpoint/2010/main" val="1143740327"/>
       </p:ext>
     </p:extLst>
   </p:cSld>
@@ -19575,7 +19459,7 @@
           <p:cNvPr id="15" name="c3-text-49">
             <a:extLst xmlns:a="http://schemas.openxmlformats.org/drawingml/2006/main">
               <a:ext uri="{FF2B5EF4-FFF2-40B4-BE49-F238E27FC236}">
-                <a16:creationId xmlns:a16="http://schemas.microsoft.com/office/drawing/2014/main" id="{6B279CBC-EE8E-45EC-89D0-D7334171078A}"/>
+                <a16:creationId xmlns:a16="http://schemas.microsoft.com/office/drawing/2014/main" id="{EEB3D7F1-3571-4612-B9A0-A1435AEBEBA0}"/>
               </a:ext>
             </a:extLst>
           </p:cNvPr>
@@ -19632,7 +19516,7 @@
           <p:cNvPr id="2" name="c3-text-50">
             <a:extLst xmlns:a="http://schemas.openxmlformats.org/drawingml/2006/main">
               <a:ext uri="{FF2B5EF4-FFF2-40B4-BE49-F238E27FC236}">
-                <a16:creationId xmlns:a16="http://schemas.microsoft.com/office/drawing/2014/main" id="{DB3C4F61-6823-415B-AEBA-AFA9CA1793E9}"/>
+                <a16:creationId xmlns:a16="http://schemas.microsoft.com/office/drawing/2014/main" id="{7CFBC8A8-5CC4-484A-8ED9-D75E7E982038}"/>
               </a:ext>
             </a:extLst>
           </p:cNvPr>
@@ -19689,7 +19573,7 @@
           <p:cNvPr id="3" name="c3-text-51">
             <a:extLst xmlns:a="http://schemas.openxmlformats.org/drawingml/2006/main">
               <a:ext uri="{FF2B5EF4-FFF2-40B4-BE49-F238E27FC236}">
-                <a16:creationId xmlns:a16="http://schemas.microsoft.com/office/drawing/2014/main" id="{971FB935-1820-4D76-B806-6E21B0221F3C}"/>
+                <a16:creationId xmlns:a16="http://schemas.microsoft.com/office/drawing/2014/main" id="{C773E329-0784-47CB-A7EC-B9885E22B6B1}"/>
               </a:ext>
             </a:extLst>
           </p:cNvPr>
@@ -19746,7 +19630,7 @@
           <p:cNvPr id="4" name="c3-shape-52">
             <a:extLst xmlns:a="http://schemas.openxmlformats.org/drawingml/2006/main">
               <a:ext uri="{FF2B5EF4-FFF2-40B4-BE49-F238E27FC236}">
-                <a16:creationId xmlns:a16="http://schemas.microsoft.com/office/drawing/2014/main" id="{C6176972-C3C6-4105-88BD-C7BC626EB7AD}"/>
+                <a16:creationId xmlns:a16="http://schemas.microsoft.com/office/drawing/2014/main" id="{AACF5364-DCCC-4CA0-B999-4E311251D8AD}"/>
               </a:ext>
             </a:extLst>
           </p:cNvPr>
@@ -19780,7 +19664,7 @@
           <p:cNvPr id="5" name="c3-text-53">
             <a:extLst xmlns:a="http://schemas.openxmlformats.org/drawingml/2006/main">
               <a:ext uri="{FF2B5EF4-FFF2-40B4-BE49-F238E27FC236}">
-                <a16:creationId xmlns:a16="http://schemas.microsoft.com/office/drawing/2014/main" id="{8483CE40-FADC-4CC6-BD7A-3C33EFDEC790}"/>
+                <a16:creationId xmlns:a16="http://schemas.microsoft.com/office/drawing/2014/main" id="{393DCF8D-39A6-458C-B70F-AAA2B0D4AB07}"/>
               </a:ext>
             </a:extLst>
           </p:cNvPr>
@@ -19893,7 +19777,7 @@
           <p:cNvPr id="6" name="c3-shape-54">
             <a:extLst xmlns:a="http://schemas.openxmlformats.org/drawingml/2006/main">
               <a:ext uri="{FF2B5EF4-FFF2-40B4-BE49-F238E27FC236}">
-                <a16:creationId xmlns:a16="http://schemas.microsoft.com/office/drawing/2014/main" id="{8E7BA54C-4F19-45C6-BD0E-4EF5CC2E44A6}"/>
+                <a16:creationId xmlns:a16="http://schemas.microsoft.com/office/drawing/2014/main" id="{0FA9A0F2-11DB-4577-A0A2-3CDF2BCC247C}"/>
               </a:ext>
             </a:extLst>
           </p:cNvPr>
@@ -19927,7 +19811,7 @@
           <p:cNvPr id="7" name="c3-shape-55">
             <a:extLst xmlns:a="http://schemas.openxmlformats.org/drawingml/2006/main">
               <a:ext uri="{FF2B5EF4-FFF2-40B4-BE49-F238E27FC236}">
-                <a16:creationId xmlns:a16="http://schemas.microsoft.com/office/drawing/2014/main" id="{D71B4808-0B80-4714-8C40-5214A8967B2A}"/>
+                <a16:creationId xmlns:a16="http://schemas.microsoft.com/office/drawing/2014/main" id="{EB74EFA0-E9DD-479B-A046-41AF453E4BAA}"/>
               </a:ext>
             </a:extLst>
           </p:cNvPr>
@@ -19959,7 +19843,7 @@
           <p:cNvPr id="8" name="c3-text-56">
             <a:extLst xmlns:a="http://schemas.openxmlformats.org/drawingml/2006/main">
               <a:ext uri="{FF2B5EF4-FFF2-40B4-BE49-F238E27FC236}">
-                <a16:creationId xmlns:a16="http://schemas.microsoft.com/office/drawing/2014/main" id="{4DF4D5C8-9E69-427F-9AFA-B5B2D9E2ECF0}"/>
+                <a16:creationId xmlns:a16="http://schemas.microsoft.com/office/drawing/2014/main" id="{D77513D6-F3B4-4C4C-8985-8231EC5C2E62}"/>
               </a:ext>
             </a:extLst>
           </p:cNvPr>
@@ -20016,7 +19900,7 @@
           <p:cNvPr id="9" name="c3-text-57">
             <a:extLst xmlns:a="http://schemas.openxmlformats.org/drawingml/2006/main">
               <a:ext uri="{FF2B5EF4-FFF2-40B4-BE49-F238E27FC236}">
-                <a16:creationId xmlns:a16="http://schemas.microsoft.com/office/drawing/2014/main" id="{EC2C0CDB-E249-4E72-97F4-0370C6FE0FE0}"/>
+                <a16:creationId xmlns:a16="http://schemas.microsoft.com/office/drawing/2014/main" id="{E5F6E622-057C-452D-AE34-54AE21023CC2}"/>
               </a:ext>
             </a:extLst>
           </p:cNvPr>
@@ -20096,7 +19980,7 @@
           <p:cNvPr id="10" name="c3-shape-58">
             <a:extLst xmlns:a="http://schemas.openxmlformats.org/drawingml/2006/main">
               <a:ext uri="{FF2B5EF4-FFF2-40B4-BE49-F238E27FC236}">
-                <a16:creationId xmlns:a16="http://schemas.microsoft.com/office/drawing/2014/main" id="{8362043C-F15B-401E-9352-386864946F7D}"/>
+                <a16:creationId xmlns:a16="http://schemas.microsoft.com/office/drawing/2014/main" id="{C3115B16-4A73-4A99-843B-52F8172892EC}"/>
               </a:ext>
             </a:extLst>
           </p:cNvPr>
@@ -20130,7 +20014,7 @@
           <p:cNvPr id="11" name="c3-shape-59">
             <a:extLst xmlns:a="http://schemas.openxmlformats.org/drawingml/2006/main">
               <a:ext uri="{FF2B5EF4-FFF2-40B4-BE49-F238E27FC236}">
-                <a16:creationId xmlns:a16="http://schemas.microsoft.com/office/drawing/2014/main" id="{5D3B69F3-F796-4559-B9E9-181DD34F23EC}"/>
+                <a16:creationId xmlns:a16="http://schemas.microsoft.com/office/drawing/2014/main" id="{595E3FB5-8C7C-4EA3-8B95-B255344DD7C2}"/>
               </a:ext>
             </a:extLst>
           </p:cNvPr>
@@ -20162,7 +20046,7 @@
           <p:cNvPr id="12" name="c3-text-60">
             <a:extLst xmlns:a="http://schemas.openxmlformats.org/drawingml/2006/main">
               <a:ext uri="{FF2B5EF4-FFF2-40B4-BE49-F238E27FC236}">
-                <a16:creationId xmlns:a16="http://schemas.microsoft.com/office/drawing/2014/main" id="{0CBB088F-D5F1-493E-909D-77E733397E54}"/>
+                <a16:creationId xmlns:a16="http://schemas.microsoft.com/office/drawing/2014/main" id="{A0EE8694-FF5D-49E2-80B5-05CBAD57575C}"/>
               </a:ext>
             </a:extLst>
           </p:cNvPr>
@@ -20219,7 +20103,7 @@
           <p:cNvPr id="13" name="c3-text-61">
             <a:extLst xmlns:a="http://schemas.openxmlformats.org/drawingml/2006/main">
               <a:ext uri="{FF2B5EF4-FFF2-40B4-BE49-F238E27FC236}">
-                <a16:creationId xmlns:a16="http://schemas.microsoft.com/office/drawing/2014/main" id="{33BD8CA1-04E3-4021-83F4-844E65A19F45}"/>
+                <a16:creationId xmlns:a16="http://schemas.microsoft.com/office/drawing/2014/main" id="{296E1BD2-4854-4751-A5AF-171F014FEFED}"/>
               </a:ext>
             </a:extLst>
           </p:cNvPr>
@@ -20296,10 +20180,10 @@
       </p:sp>
       <p:sp>
         <p:nvSpPr>
-          <p:cNvPr id="14" name="c3-text-315">
-            <a:extLst xmlns:a="http://schemas.openxmlformats.org/drawingml/2006/main">
-              <a:ext uri="{FF2B5EF4-FFF2-40B4-BE49-F238E27FC236}">
-                <a16:creationId xmlns:a16="http://schemas.microsoft.com/office/drawing/2014/main" id="{7A7BFBE1-2EB6-447A-9FC4-C478900E6A71}"/>
+          <p:cNvPr id="14" name="c3-text-313">
+            <a:extLst xmlns:a="http://schemas.openxmlformats.org/drawingml/2006/main">
+              <a:ext uri="{FF2B5EF4-FFF2-40B4-BE49-F238E27FC236}">
+                <a16:creationId xmlns:a16="http://schemas.microsoft.com/office/drawing/2014/main" id="{F9474FEB-72F4-4AE5-A6D6-588F8E969736}"/>
               </a:ext>
             </a:extLst>
           </p:cNvPr>
@@ -20354,7 +20238,7 @@
     </p:spTree>
     <p:extLst>
       <p:ext uri="{BB962C8B-B14F-4D97-AF65-F5344CB8AC3E}">
-        <p14:creationId xmlns:p14="http://schemas.microsoft.com/office/powerpoint/2010/main" val="1287071987"/>
+        <p14:creationId xmlns:p14="http://schemas.microsoft.com/office/powerpoint/2010/main" val="1871686541"/>
       </p:ext>
     </p:extLst>
   </p:cSld>
@@ -20385,7 +20269,7 @@
           <p:cNvPr id="8" name="c3-text-62">
             <a:extLst xmlns:a="http://schemas.openxmlformats.org/drawingml/2006/main">
               <a:ext uri="{FF2B5EF4-FFF2-40B4-BE49-F238E27FC236}">
-                <a16:creationId xmlns:a16="http://schemas.microsoft.com/office/drawing/2014/main" id="{DE8A1B48-2BF3-43EF-8AA5-3C3A4A8BFBB4}"/>
+                <a16:creationId xmlns:a16="http://schemas.microsoft.com/office/drawing/2014/main" id="{842A8594-FA29-4E22-AE6E-6B261092A91D}"/>
               </a:ext>
             </a:extLst>
           </p:cNvPr>
@@ -20442,7 +20326,7 @@
           <p:cNvPr id="2" name="c3-text-63">
             <a:extLst xmlns:a="http://schemas.openxmlformats.org/drawingml/2006/main">
               <a:ext uri="{FF2B5EF4-FFF2-40B4-BE49-F238E27FC236}">
-                <a16:creationId xmlns:a16="http://schemas.microsoft.com/office/drawing/2014/main" id="{E2FD34FF-83FD-41F8-AC2F-6CABB8C4371E}"/>
+                <a16:creationId xmlns:a16="http://schemas.microsoft.com/office/drawing/2014/main" id="{FF1FBF04-06D9-4BDA-BDD6-5170800BB97F}"/>
               </a:ext>
             </a:extLst>
           </p:cNvPr>
@@ -20499,7 +20383,7 @@
           <p:cNvPr id="3" name="c3-text-64">
             <a:extLst xmlns:a="http://schemas.openxmlformats.org/drawingml/2006/main">
               <a:ext uri="{FF2B5EF4-FFF2-40B4-BE49-F238E27FC236}">
-                <a16:creationId xmlns:a16="http://schemas.microsoft.com/office/drawing/2014/main" id="{196DF3EF-DD0A-4536-A75F-E6533FCDD3FD}"/>
+                <a16:creationId xmlns:a16="http://schemas.microsoft.com/office/drawing/2014/main" id="{43E5C11B-443B-49A0-9B04-85CA082B2A28}"/>
               </a:ext>
             </a:extLst>
           </p:cNvPr>
@@ -20556,7 +20440,7 @@
           <p:cNvPr id="4" name="c3-shape-65">
             <a:extLst xmlns:a="http://schemas.openxmlformats.org/drawingml/2006/main">
               <a:ext uri="{FF2B5EF4-FFF2-40B4-BE49-F238E27FC236}">
-                <a16:creationId xmlns:a16="http://schemas.microsoft.com/office/drawing/2014/main" id="{2246605D-C555-428E-8746-238DE4AB7AF4}"/>
+                <a16:creationId xmlns:a16="http://schemas.microsoft.com/office/drawing/2014/main" id="{4EEFA1AC-ED4D-4017-8AC9-D13DFA94892A}"/>
               </a:ext>
             </a:extLst>
           </p:cNvPr>
@@ -20590,7 +20474,7 @@
           <p:cNvPr id="5" name="c3-text-66">
             <a:extLst xmlns:a="http://schemas.openxmlformats.org/drawingml/2006/main">
               <a:ext uri="{FF2B5EF4-FFF2-40B4-BE49-F238E27FC236}">
-                <a16:creationId xmlns:a16="http://schemas.microsoft.com/office/drawing/2014/main" id="{6D540675-F29E-4BF7-A3FA-D087F5F5D991}"/>
+                <a16:creationId xmlns:a16="http://schemas.microsoft.com/office/drawing/2014/main" id="{65DE386E-B59E-417F-95EB-00B942DA85FD}"/>
               </a:ext>
             </a:extLst>
           </p:cNvPr>
@@ -20849,7 +20733,7 @@
           <p:cNvPr id="6" name="c3-text-67">
             <a:extLst xmlns:a="http://schemas.openxmlformats.org/drawingml/2006/main">
               <a:ext uri="{FF2B5EF4-FFF2-40B4-BE49-F238E27FC236}">
-                <a16:creationId xmlns:a16="http://schemas.microsoft.com/office/drawing/2014/main" id="{05422348-7445-43EA-BBAC-530CAC3ABE0F}"/>
+                <a16:creationId xmlns:a16="http://schemas.microsoft.com/office/drawing/2014/main" id="{7370197E-EA35-4F4A-8418-DD92BBE3100F}"/>
               </a:ext>
             </a:extLst>
           </p:cNvPr>
@@ -20903,10 +20787,10 @@
       </p:sp>
       <p:sp>
         <p:nvSpPr>
-          <p:cNvPr id="7" name="c3-text-316">
-            <a:extLst xmlns:a="http://schemas.openxmlformats.org/drawingml/2006/main">
-              <a:ext uri="{FF2B5EF4-FFF2-40B4-BE49-F238E27FC236}">
-                <a16:creationId xmlns:a16="http://schemas.microsoft.com/office/drawing/2014/main" id="{0711E7D5-42FC-4B2E-BEF8-06ECD44F7C63}"/>
+          <p:cNvPr id="7" name="c3-text-314">
+            <a:extLst xmlns:a="http://schemas.openxmlformats.org/drawingml/2006/main">
+              <a:ext uri="{FF2B5EF4-FFF2-40B4-BE49-F238E27FC236}">
+                <a16:creationId xmlns:a16="http://schemas.microsoft.com/office/drawing/2014/main" id="{55BDED2F-AEEA-4FF2-A86B-442EB267DE0B}"/>
               </a:ext>
             </a:extLst>
           </p:cNvPr>
@@ -20961,7 +20845,7 @@
     </p:spTree>
     <p:extLst>
       <p:ext uri="{BB962C8B-B14F-4D97-AF65-F5344CB8AC3E}">
-        <p14:creationId xmlns:p14="http://schemas.microsoft.com/office/powerpoint/2010/main" val="1992925438"/>
+        <p14:creationId xmlns:p14="http://schemas.microsoft.com/office/powerpoint/2010/main" val="749904653"/>
       </p:ext>
     </p:extLst>
   </p:cSld>
@@ -20992,7 +20876,7 @@
           <p:cNvPr id="9" name="c3-text-68">
             <a:extLst xmlns:a="http://schemas.openxmlformats.org/drawingml/2006/main">
               <a:ext uri="{FF2B5EF4-FFF2-40B4-BE49-F238E27FC236}">
-                <a16:creationId xmlns:a16="http://schemas.microsoft.com/office/drawing/2014/main" id="{D5CFBC35-DD51-4526-B922-0780EEA5C6F4}"/>
+                <a16:creationId xmlns:a16="http://schemas.microsoft.com/office/drawing/2014/main" id="{4E471565-DAEB-47F7-BC19-48B415DD9233}"/>
               </a:ext>
             </a:extLst>
           </p:cNvPr>
@@ -21049,7 +20933,7 @@
           <p:cNvPr id="2" name="c3-text-69">
             <a:extLst xmlns:a="http://schemas.openxmlformats.org/drawingml/2006/main">
               <a:ext uri="{FF2B5EF4-FFF2-40B4-BE49-F238E27FC236}">
-                <a16:creationId xmlns:a16="http://schemas.microsoft.com/office/drawing/2014/main" id="{D56A4D57-8634-43B8-906D-0554FB1BCF4A}"/>
+                <a16:creationId xmlns:a16="http://schemas.microsoft.com/office/drawing/2014/main" id="{05EFE84D-8EE7-44FB-9C0A-387BB91AC7D2}"/>
               </a:ext>
             </a:extLst>
           </p:cNvPr>
@@ -21106,7 +20990,7 @@
           <p:cNvPr id="3" name="c3-text-70">
             <a:extLst xmlns:a="http://schemas.openxmlformats.org/drawingml/2006/main">
               <a:ext uri="{FF2B5EF4-FFF2-40B4-BE49-F238E27FC236}">
-                <a16:creationId xmlns:a16="http://schemas.microsoft.com/office/drawing/2014/main" id="{8775264E-0DDA-4ECD-8666-071FFD7A676B}"/>
+                <a16:creationId xmlns:a16="http://schemas.microsoft.com/office/drawing/2014/main" id="{029CE715-7D96-4F62-BA48-E0BA3F638CAF}"/>
               </a:ext>
             </a:extLst>
           </p:cNvPr>
@@ -21163,7 +21047,7 @@
           <p:cNvPr id="4" name="c3-shape-71">
             <a:extLst xmlns:a="http://schemas.openxmlformats.org/drawingml/2006/main">
               <a:ext uri="{FF2B5EF4-FFF2-40B4-BE49-F238E27FC236}">
-                <a16:creationId xmlns:a16="http://schemas.microsoft.com/office/drawing/2014/main" id="{53C12AA4-30FC-443A-86B8-FA40B0853629}"/>
+                <a16:creationId xmlns:a16="http://schemas.microsoft.com/office/drawing/2014/main" id="{03F53DEA-9AE8-41F3-A875-0D56EF320744}"/>
               </a:ext>
             </a:extLst>
           </p:cNvPr>
@@ -21197,7 +21081,7 @@
           <p:cNvPr id="5" name="c3-text-72">
             <a:extLst xmlns:a="http://schemas.openxmlformats.org/drawingml/2006/main">
               <a:ext uri="{FF2B5EF4-FFF2-40B4-BE49-F238E27FC236}">
-                <a16:creationId xmlns:a16="http://schemas.microsoft.com/office/drawing/2014/main" id="{7E6D0A7B-2191-4B86-B966-29132A203D72}"/>
+                <a16:creationId xmlns:a16="http://schemas.microsoft.com/office/drawing/2014/main" id="{9495FA86-7E24-4C65-A4C3-9EC97AFF4B4A}"/>
               </a:ext>
             </a:extLst>
           </p:cNvPr>
@@ -21623,7 +21507,7 @@
           <p:cNvPr id="6" name="c3-shape-73">
             <a:extLst xmlns:a="http://schemas.openxmlformats.org/drawingml/2006/main">
               <a:ext uri="{FF2B5EF4-FFF2-40B4-BE49-F238E27FC236}">
-                <a16:creationId xmlns:a16="http://schemas.microsoft.com/office/drawing/2014/main" id="{3B5E70DF-2E6E-4162-86BA-8A18C31FD824}"/>
+                <a16:creationId xmlns:a16="http://schemas.microsoft.com/office/drawing/2014/main" id="{3146F8E5-6580-4FCB-B439-C4983D931A0E}"/>
               </a:ext>
             </a:extLst>
           </p:cNvPr>
@@ -21657,7 +21541,7 @@
           <p:cNvPr id="7" name="c3-text-74">
             <a:extLst xmlns:a="http://schemas.openxmlformats.org/drawingml/2006/main">
               <a:ext uri="{FF2B5EF4-FFF2-40B4-BE49-F238E27FC236}">
-                <a16:creationId xmlns:a16="http://schemas.microsoft.com/office/drawing/2014/main" id="{8517AD84-BC85-4B5A-93F7-5A8FEB68C7B8}"/>
+                <a16:creationId xmlns:a16="http://schemas.microsoft.com/office/drawing/2014/main" id="{1E1E4719-7A12-43AC-8912-10E6073B79C8}"/>
               </a:ext>
             </a:extLst>
           </p:cNvPr>
@@ -21711,10 +21595,10 @@
       </p:sp>
       <p:sp>
         <p:nvSpPr>
-          <p:cNvPr id="8" name="c3-text-317">
-            <a:extLst xmlns:a="http://schemas.openxmlformats.org/drawingml/2006/main">
-              <a:ext uri="{FF2B5EF4-FFF2-40B4-BE49-F238E27FC236}">
-                <a16:creationId xmlns:a16="http://schemas.microsoft.com/office/drawing/2014/main" id="{FAD849A0-B84D-49DB-9DB3-133060B0B684}"/>
+          <p:cNvPr id="8" name="c3-text-315">
+            <a:extLst xmlns:a="http://schemas.openxmlformats.org/drawingml/2006/main">
+              <a:ext uri="{FF2B5EF4-FFF2-40B4-BE49-F238E27FC236}">
+                <a16:creationId xmlns:a16="http://schemas.microsoft.com/office/drawing/2014/main" id="{9F140942-B46F-497F-9A42-0EA07399B529}"/>
               </a:ext>
             </a:extLst>
           </p:cNvPr>
@@ -21769,7 +21653,7 @@
     </p:spTree>
     <p:extLst>
       <p:ext uri="{BB962C8B-B14F-4D97-AF65-F5344CB8AC3E}">
-        <p14:creationId xmlns:p14="http://schemas.microsoft.com/office/powerpoint/2010/main" val="306386768"/>
+        <p14:creationId xmlns:p14="http://schemas.microsoft.com/office/powerpoint/2010/main" val="735680209"/>
       </p:ext>
     </p:extLst>
   </p:cSld>
@@ -21800,7 +21684,7 @@
           <p:cNvPr id="9" name="c3-text-75">
             <a:extLst xmlns:a="http://schemas.openxmlformats.org/drawingml/2006/main">
               <a:ext uri="{FF2B5EF4-FFF2-40B4-BE49-F238E27FC236}">
-                <a16:creationId xmlns:a16="http://schemas.microsoft.com/office/drawing/2014/main" id="{6900D5C0-3E59-4A06-B95E-79E81B9C2F44}"/>
+                <a16:creationId xmlns:a16="http://schemas.microsoft.com/office/drawing/2014/main" id="{18E2E0A1-0773-4FBC-B774-7C50EA439FAD}"/>
               </a:ext>
             </a:extLst>
           </p:cNvPr>
@@ -21857,7 +21741,7 @@
           <p:cNvPr id="2" name="c3-text-76">
             <a:extLst xmlns:a="http://schemas.openxmlformats.org/drawingml/2006/main">
               <a:ext uri="{FF2B5EF4-FFF2-40B4-BE49-F238E27FC236}">
-                <a16:creationId xmlns:a16="http://schemas.microsoft.com/office/drawing/2014/main" id="{1E6F8A18-C2B0-41A8-9349-81DCBE11DCE0}"/>
+                <a16:creationId xmlns:a16="http://schemas.microsoft.com/office/drawing/2014/main" id="{BADEDDCC-3B86-4703-8928-7EE0165576F3}"/>
               </a:ext>
             </a:extLst>
           </p:cNvPr>
@@ -21914,7 +21798,7 @@
           <p:cNvPr id="3" name="c3-text-77">
             <a:extLst xmlns:a="http://schemas.openxmlformats.org/drawingml/2006/main">
               <a:ext uri="{FF2B5EF4-FFF2-40B4-BE49-F238E27FC236}">
-                <a16:creationId xmlns:a16="http://schemas.microsoft.com/office/drawing/2014/main" id="{91699634-40E0-4E84-BD31-E0771BC53827}"/>
+                <a16:creationId xmlns:a16="http://schemas.microsoft.com/office/drawing/2014/main" id="{826C942F-C764-44EA-B306-069972DB16E1}"/>
               </a:ext>
             </a:extLst>
           </p:cNvPr>
@@ -21971,7 +21855,7 @@
           <p:cNvPr id="4" name="c3-shape-78">
             <a:extLst xmlns:a="http://schemas.openxmlformats.org/drawingml/2006/main">
               <a:ext uri="{FF2B5EF4-FFF2-40B4-BE49-F238E27FC236}">
-                <a16:creationId xmlns:a16="http://schemas.microsoft.com/office/drawing/2014/main" id="{0D2FF462-FA92-4508-B024-452C2CD9F21B}"/>
+                <a16:creationId xmlns:a16="http://schemas.microsoft.com/office/drawing/2014/main" id="{B074C8BA-0ACB-4B4D-BD66-778C76955ADC}"/>
               </a:ext>
             </a:extLst>
           </p:cNvPr>
@@ -22005,7 +21889,7 @@
           <p:cNvPr id="5" name="c3-text-79">
             <a:extLst xmlns:a="http://schemas.openxmlformats.org/drawingml/2006/main">
               <a:ext uri="{FF2B5EF4-FFF2-40B4-BE49-F238E27FC236}">
-                <a16:creationId xmlns:a16="http://schemas.microsoft.com/office/drawing/2014/main" id="{C7BECBA2-2D28-45DB-9AFB-D0C367045BE8}"/>
+                <a16:creationId xmlns:a16="http://schemas.microsoft.com/office/drawing/2014/main" id="{8A8F194F-4DD2-4B0B-99E7-441381412D20}"/>
               </a:ext>
             </a:extLst>
           </p:cNvPr>
@@ -22412,7 +22296,7 @@
           <p:cNvPr id="6" name="c3-shape-80">
             <a:extLst xmlns:a="http://schemas.openxmlformats.org/drawingml/2006/main">
               <a:ext uri="{FF2B5EF4-FFF2-40B4-BE49-F238E27FC236}">
-                <a16:creationId xmlns:a16="http://schemas.microsoft.com/office/drawing/2014/main" id="{DE86F926-82E8-4A8C-82B4-D2083A222909}"/>
+                <a16:creationId xmlns:a16="http://schemas.microsoft.com/office/drawing/2014/main" id="{00FEFD6C-0748-4330-AECB-EFB352279E35}"/>
               </a:ext>
             </a:extLst>
           </p:cNvPr>
@@ -22446,7 +22330,7 @@
           <p:cNvPr id="7" name="c3-text-81">
             <a:extLst xmlns:a="http://schemas.openxmlformats.org/drawingml/2006/main">
               <a:ext uri="{FF2B5EF4-FFF2-40B4-BE49-F238E27FC236}">
-                <a16:creationId xmlns:a16="http://schemas.microsoft.com/office/drawing/2014/main" id="{752DB2D8-D1CC-438C-BDDA-C35EFBA7281D}"/>
+                <a16:creationId xmlns:a16="http://schemas.microsoft.com/office/drawing/2014/main" id="{FE2A6E1A-870A-4F0F-9330-791C328DA32D}"/>
               </a:ext>
             </a:extLst>
           </p:cNvPr>
@@ -22500,10 +22384,10 @@
       </p:sp>
       <p:sp>
         <p:nvSpPr>
-          <p:cNvPr id="8" name="c3-text-318">
-            <a:extLst xmlns:a="http://schemas.openxmlformats.org/drawingml/2006/main">
-              <a:ext uri="{FF2B5EF4-FFF2-40B4-BE49-F238E27FC236}">
-                <a16:creationId xmlns:a16="http://schemas.microsoft.com/office/drawing/2014/main" id="{7960A387-E96B-4954-8FF3-E0A52B71D033}"/>
+          <p:cNvPr id="8" name="c3-text-316">
+            <a:extLst xmlns:a="http://schemas.openxmlformats.org/drawingml/2006/main">
+              <a:ext uri="{FF2B5EF4-FFF2-40B4-BE49-F238E27FC236}">
+                <a16:creationId xmlns:a16="http://schemas.microsoft.com/office/drawing/2014/main" id="{13A222C3-C947-4251-858C-E3A9925AE1D5}"/>
               </a:ext>
             </a:extLst>
           </p:cNvPr>
@@ -22558,7 +22442,7 @@
     </p:spTree>
     <p:extLst>
       <p:ext uri="{BB962C8B-B14F-4D97-AF65-F5344CB8AC3E}">
-        <p14:creationId xmlns:p14="http://schemas.microsoft.com/office/powerpoint/2010/main" val="469354750"/>
+        <p14:creationId xmlns:p14="http://schemas.microsoft.com/office/powerpoint/2010/main" val="1579526577"/>
       </p:ext>
     </p:extLst>
   </p:cSld>
@@ -22589,7 +22473,7 @@
           <p:cNvPr id="16" name="c3-text-82">
             <a:extLst xmlns:a="http://schemas.openxmlformats.org/drawingml/2006/main">
               <a:ext uri="{FF2B5EF4-FFF2-40B4-BE49-F238E27FC236}">
-                <a16:creationId xmlns:a16="http://schemas.microsoft.com/office/drawing/2014/main" id="{F5B042FC-89C7-42A2-B408-04772A9EBCC9}"/>
+                <a16:creationId xmlns:a16="http://schemas.microsoft.com/office/drawing/2014/main" id="{945F1F66-8B07-4AAC-B2CE-82A1ECC48365}"/>
               </a:ext>
             </a:extLst>
           </p:cNvPr>
@@ -22646,7 +22530,7 @@
           <p:cNvPr id="2" name="c3-text-83">
             <a:extLst xmlns:a="http://schemas.openxmlformats.org/drawingml/2006/main">
               <a:ext uri="{FF2B5EF4-FFF2-40B4-BE49-F238E27FC236}">
-                <a16:creationId xmlns:a16="http://schemas.microsoft.com/office/drawing/2014/main" id="{ACF0ADF8-F0E1-4D58-9BB8-860BE67100F6}"/>
+                <a16:creationId xmlns:a16="http://schemas.microsoft.com/office/drawing/2014/main" id="{CFFB37A4-C0D2-45FC-9A85-FE5E32F07B18}"/>
               </a:ext>
             </a:extLst>
           </p:cNvPr>
@@ -22703,7 +22587,7 @@
           <p:cNvPr id="3" name="c3-text-84">
             <a:extLst xmlns:a="http://schemas.openxmlformats.org/drawingml/2006/main">
               <a:ext uri="{FF2B5EF4-FFF2-40B4-BE49-F238E27FC236}">
-                <a16:creationId xmlns:a16="http://schemas.microsoft.com/office/drawing/2014/main" id="{BE9285C5-0319-4731-A97D-1BEDA9F1A3A4}"/>
+                <a16:creationId xmlns:a16="http://schemas.microsoft.com/office/drawing/2014/main" id="{D2D8C479-F6D7-4B39-90D2-B075FBAB1FBE}"/>
               </a:ext>
             </a:extLst>
           </p:cNvPr>
@@ -22760,7 +22644,7 @@
           <p:cNvPr id="4" name="c3-shape-85">
             <a:extLst xmlns:a="http://schemas.openxmlformats.org/drawingml/2006/main">
               <a:ext uri="{FF2B5EF4-FFF2-40B4-BE49-F238E27FC236}">
-                <a16:creationId xmlns:a16="http://schemas.microsoft.com/office/drawing/2014/main" id="{C8C0D493-762D-4C81-8324-5676DB872714}"/>
+                <a16:creationId xmlns:a16="http://schemas.microsoft.com/office/drawing/2014/main" id="{16C0B6B4-6E5B-4BB0-8226-3F478DF14442}"/>
               </a:ext>
             </a:extLst>
           </p:cNvPr>
@@ -22794,7 +22678,7 @@
           <p:cNvPr id="5" name="c3-text-86">
             <a:extLst xmlns:a="http://schemas.openxmlformats.org/drawingml/2006/main">
               <a:ext uri="{FF2B5EF4-FFF2-40B4-BE49-F238E27FC236}">
-                <a16:creationId xmlns:a16="http://schemas.microsoft.com/office/drawing/2014/main" id="{526D1C31-25CD-4B8D-B956-2D0137FFA120}"/>
+                <a16:creationId xmlns:a16="http://schemas.microsoft.com/office/drawing/2014/main" id="{1DC0F5F0-01F2-4277-AE19-A7144277AF6E}"/>
               </a:ext>
             </a:extLst>
           </p:cNvPr>
@@ -22874,7 +22758,7 @@
           <p:cNvPr id="6" name="c3-shape-87">
             <a:extLst xmlns:a="http://schemas.openxmlformats.org/drawingml/2006/main">
               <a:ext uri="{FF2B5EF4-FFF2-40B4-BE49-F238E27FC236}">
-                <a16:creationId xmlns:a16="http://schemas.microsoft.com/office/drawing/2014/main" id="{BD0C00E9-3E3A-40AB-A107-63C1DDEEEC9C}"/>
+                <a16:creationId xmlns:a16="http://schemas.microsoft.com/office/drawing/2014/main" id="{8625489F-0F20-420B-8883-5FFC45BF8F0F}"/>
               </a:ext>
             </a:extLst>
           </p:cNvPr>
@@ -22906,7 +22790,7 @@
           <p:cNvPr id="7" name="c3-shape-88">
             <a:extLst xmlns:a="http://schemas.openxmlformats.org/drawingml/2006/main">
               <a:ext uri="{FF2B5EF4-FFF2-40B4-BE49-F238E27FC236}">
-                <a16:creationId xmlns:a16="http://schemas.microsoft.com/office/drawing/2014/main" id="{42C0AA22-EAF2-4384-83A6-2913DDC60996}"/>
+                <a16:creationId xmlns:a16="http://schemas.microsoft.com/office/drawing/2014/main" id="{7A759C5F-E8E8-4E73-9658-6222F5A55A3C}"/>
               </a:ext>
             </a:extLst>
           </p:cNvPr>
@@ -22940,7 +22824,7 @@
           <p:cNvPr id="8" name="c3-text-89">
             <a:extLst xmlns:a="http://schemas.openxmlformats.org/drawingml/2006/main">
               <a:ext uri="{FF2B5EF4-FFF2-40B4-BE49-F238E27FC236}">
-                <a16:creationId xmlns:a16="http://schemas.microsoft.com/office/drawing/2014/main" id="{60AFE824-DBA4-4408-97DE-88154CB198F2}"/>
+                <a16:creationId xmlns:a16="http://schemas.microsoft.com/office/drawing/2014/main" id="{179662A2-5310-43A4-A9A8-44127BF32057}"/>
               </a:ext>
             </a:extLst>
           </p:cNvPr>
@@ -23020,7 +22904,7 @@
           <p:cNvPr id="9" name="c3-shape-90">
             <a:extLst xmlns:a="http://schemas.openxmlformats.org/drawingml/2006/main">
               <a:ext uri="{FF2B5EF4-FFF2-40B4-BE49-F238E27FC236}">
-                <a16:creationId xmlns:a16="http://schemas.microsoft.com/office/drawing/2014/main" id="{FE166FB8-FF5A-4F55-9A0F-85F475526E07}"/>
+                <a16:creationId xmlns:a16="http://schemas.microsoft.com/office/drawing/2014/main" id="{7E661FE7-8E9A-4EA1-BA87-2CA83FB6354E}"/>
               </a:ext>
             </a:extLst>
           </p:cNvPr>
@@ -23052,7 +22936,7 @@
           <p:cNvPr id="10" name="c3-shape-91">
             <a:extLst xmlns:a="http://schemas.openxmlformats.org/drawingml/2006/main">
               <a:ext uri="{FF2B5EF4-FFF2-40B4-BE49-F238E27FC236}">
-                <a16:creationId xmlns:a16="http://schemas.microsoft.com/office/drawing/2014/main" id="{019BEA17-188E-48F4-91BF-C57486550156}"/>
+                <a16:creationId xmlns:a16="http://schemas.microsoft.com/office/drawing/2014/main" id="{A0564A30-6D0D-48E2-A007-1073062962DA}"/>
               </a:ext>
             </a:extLst>
           </p:cNvPr>
@@ -23086,7 +22970,7 @@
           <p:cNvPr id="11" name="c3-text-92">
             <a:extLst xmlns:a="http://schemas.openxmlformats.org/drawingml/2006/main">
               <a:ext uri="{FF2B5EF4-FFF2-40B4-BE49-F238E27FC236}">
-                <a16:creationId xmlns:a16="http://schemas.microsoft.com/office/drawing/2014/main" id="{BC9FE08D-3AF3-46EC-9E9F-018C81CEC5BE}"/>
+                <a16:creationId xmlns:a16="http://schemas.microsoft.com/office/drawing/2014/main" id="{FE4FBB14-9F2D-4105-86D0-EAE8E7417CE2}"/>
               </a:ext>
             </a:extLst>
           </p:cNvPr>
@@ -23166,7 +23050,7 @@
           <p:cNvPr id="12" name="c3-shape-93">
             <a:extLst xmlns:a="http://schemas.openxmlformats.org/drawingml/2006/main">
               <a:ext uri="{FF2B5EF4-FFF2-40B4-BE49-F238E27FC236}">
-                <a16:creationId xmlns:a16="http://schemas.microsoft.com/office/drawing/2014/main" id="{82E484D4-7324-4460-8AE5-5A8DA7CAD979}"/>
+                <a16:creationId xmlns:a16="http://schemas.microsoft.com/office/drawing/2014/main" id="{72EAA691-170A-4E07-86F6-DB946469321D}"/>
               </a:ext>
             </a:extLst>
           </p:cNvPr>
@@ -23200,7 +23084,7 @@
           <p:cNvPr id="13" name="c3-text-94">
             <a:extLst xmlns:a="http://schemas.openxmlformats.org/drawingml/2006/main">
               <a:ext uri="{FF2B5EF4-FFF2-40B4-BE49-F238E27FC236}">
-                <a16:creationId xmlns:a16="http://schemas.microsoft.com/office/drawing/2014/main" id="{B0E13D67-D6E9-4048-9E8F-A9529CAC2D57}"/>
+                <a16:creationId xmlns:a16="http://schemas.microsoft.com/office/drawing/2014/main" id="{52C96451-7F43-47D0-834B-BE93E1E78D66}"/>
               </a:ext>
             </a:extLst>
           </p:cNvPr>
@@ -23357,7 +23241,7 @@
           <p:cNvPr id="14" name="c3-text-95">
             <a:extLst xmlns:a="http://schemas.openxmlformats.org/drawingml/2006/main">
               <a:ext uri="{FF2B5EF4-FFF2-40B4-BE49-F238E27FC236}">
-                <a16:creationId xmlns:a16="http://schemas.microsoft.com/office/drawing/2014/main" id="{F154277D-9AAF-4556-8785-785A33AD0F45}"/>
+                <a16:creationId xmlns:a16="http://schemas.microsoft.com/office/drawing/2014/main" id="{5F71308A-CF7A-48AF-B284-65DBC7F104DF}"/>
               </a:ext>
             </a:extLst>
           </p:cNvPr>
@@ -23411,10 +23295,10 @@
       </p:sp>
       <p:sp>
         <p:nvSpPr>
-          <p:cNvPr id="15" name="c3-text-319">
-            <a:extLst xmlns:a="http://schemas.openxmlformats.org/drawingml/2006/main">
-              <a:ext uri="{FF2B5EF4-FFF2-40B4-BE49-F238E27FC236}">
-                <a16:creationId xmlns:a16="http://schemas.microsoft.com/office/drawing/2014/main" id="{015435AD-2CCC-4B46-9BD1-768D86B47282}"/>
+          <p:cNvPr id="15" name="c3-text-317">
+            <a:extLst xmlns:a="http://schemas.openxmlformats.org/drawingml/2006/main">
+              <a:ext uri="{FF2B5EF4-FFF2-40B4-BE49-F238E27FC236}">
+                <a16:creationId xmlns:a16="http://schemas.microsoft.com/office/drawing/2014/main" id="{5C526A2E-D91E-44DC-859F-61174250ED88}"/>
               </a:ext>
             </a:extLst>
           </p:cNvPr>
@@ -23469,7 +23353,7 @@
     </p:spTree>
     <p:extLst>
       <p:ext uri="{BB962C8B-B14F-4D97-AF65-F5344CB8AC3E}">
-        <p14:creationId xmlns:p14="http://schemas.microsoft.com/office/powerpoint/2010/main" val="702918720"/>
+        <p14:creationId xmlns:p14="http://schemas.microsoft.com/office/powerpoint/2010/main" val="2069434908"/>
       </p:ext>
     </p:extLst>
   </p:cSld>

--- a/virtual_human_course/Module_2/Chapter_03/Slides/Module_2_Chapter_03_Integration_with_the_Virtual_Human.pptx
+++ b/virtual_human_course/Module_2/Chapter_03/Slides/Module_2_Chapter_03_Integration_with_the_Virtual_Human.pptx
@@ -2,39 +2,39 @@
 <file path=ppt/presentation.xml><?xml version="1.0" encoding="utf-8"?>
 <ns0:presentation xmlns:ns0="http://schemas.openxmlformats.org/presentationml/2006/main" xmlns:ns1="http://schemas.openxmlformats.org/officeDocument/2006/relationships">
   <ns0:sldMasterIdLst>
-    <ns0:sldMasterId id="2147483648" ns1:id="R9045587b18db4e59"/>
+    <ns0:sldMasterId id="2147483648" ns1:id="R974c7ad43a9245c3"/>
   </ns0:sldMasterIdLst>
   <ns0:sldIdLst>
-    <ns0:sldId id="256" ns1:id="R9b87cbb3ad7849a8"/>
-    <ns0:sldId id="257" ns1:id="R88f34a728b564784"/>
-    <ns0:sldId id="258" ns1:id="Rb99860c0597d41ae"/>
-    <ns0:sldId id="259" ns1:id="R7d361a7e64464f3b"/>
-    <ns0:sldId id="260" ns1:id="R0b18972b62484279"/>
-    <ns0:sldId id="261" ns1:id="R7369716e59314b5a"/>
-    <ns0:sldId id="262" ns1:id="Rc266cf7faae248b5"/>
-    <ns0:sldId id="263" ns1:id="R07cdbcccb50541ba"/>
-    <ns0:sldId id="264" ns1:id="Ra0e0f6ff3b4c4e46"/>
-    <ns0:sldId id="265" ns1:id="Rc758cdb5a6914c9f"/>
-    <ns0:sldId id="266" ns1:id="Ref602a4fa8bf414c"/>
-    <ns0:sldId id="267" ns1:id="R96a04198dbbd4def"/>
-    <ns0:sldId id="268" ns1:id="Rf8e05e60dbb042d4"/>
-    <ns0:sldId id="269" ns1:id="R42e2827534694fa5"/>
-    <ns0:sldId id="270" ns1:id="R16ca10ad30904437"/>
-    <ns0:sldId id="271" ns1:id="R3500a27546524af4"/>
-    <ns0:sldId id="272" ns1:id="R070c8ccfe64046e2"/>
-    <ns0:sldId id="273" ns1:id="R88b83751731045bf"/>
-    <ns0:sldId id="274" ns1:id="Refbd580c519a49c8"/>
-    <ns0:sldId id="275" ns1:id="Re001637d70794bb8"/>
-    <ns0:sldId id="276" ns1:id="Ra40ab7317b3b46ce"/>
-    <ns0:sldId id="277" ns1:id="R6711db30faef4824"/>
-    <ns0:sldId id="278" ns1:id="R6008b6ccc82d4be2"/>
-    <ns0:sldId id="279" ns1:id="Rfdaf17273dc24780"/>
-    <ns0:sldId id="280" ns1:id="R47a5ea7ac0904949"/>
-    <ns0:sldId id="281" ns1:id="R7d456dc2b9f041d1"/>
-    <ns0:sldId id="282" ns1:id="Rf01d30a3f695433d"/>
-    <ns0:sldId id="283" ns1:id="R580aed109a6642cb"/>
-    <ns0:sldId id="284" ns1:id="R61886c3fc9314349"/>
-    <ns0:sldId id="285" ns1:id="R93ffa63a0f284886"/>
+    <ns0:sldId id="256" ns1:id="Re46aeef0fd164fd4"/>
+    <ns0:sldId id="257" ns1:id="Re822417972254cad"/>
+    <ns0:sldId id="258" ns1:id="R6b144ee434a44046"/>
+    <ns0:sldId id="259" ns1:id="Rc128e8f9c6594e44"/>
+    <ns0:sldId id="260" ns1:id="R5bbf371ab2684599"/>
+    <ns0:sldId id="261" ns1:id="R94c5038f8e19496d"/>
+    <ns0:sldId id="262" ns1:id="R2ba8ba2b4def4e08"/>
+    <ns0:sldId id="263" ns1:id="R1e0be1f3583d4ce4"/>
+    <ns0:sldId id="264" ns1:id="Rab4171faa24b4068"/>
+    <ns0:sldId id="265" ns1:id="R134a36a7b62043cc"/>
+    <ns0:sldId id="266" ns1:id="R8665781912f74f98"/>
+    <ns0:sldId id="267" ns1:id="Rba0f3cd530d8430d"/>
+    <ns0:sldId id="268" ns1:id="R6372bf8394f0475a"/>
+    <ns0:sldId id="269" ns1:id="R52da2ccecad4469b"/>
+    <ns0:sldId id="270" ns1:id="Ra326bf9f228a4774"/>
+    <ns0:sldId id="271" ns1:id="Rd7b3e49cde054726"/>
+    <ns0:sldId id="272" ns1:id="R1be3ea7f0e854591"/>
+    <ns0:sldId id="273" ns1:id="Rf4b6a4153cdf481c"/>
+    <ns0:sldId id="274" ns1:id="R17aa4f6c8b0f4603"/>
+    <ns0:sldId id="275" ns1:id="R2b6dc6ddd0f54df7"/>
+    <ns0:sldId id="276" ns1:id="Rc73773b01c824860"/>
+    <ns0:sldId id="277" ns1:id="R641b2db037614cd7"/>
+    <ns0:sldId id="278" ns1:id="R56eb5e4f79dd4526"/>
+    <ns0:sldId id="279" ns1:id="R2d82acf915594468"/>
+    <ns0:sldId id="280" ns1:id="Rf86069d02d964653"/>
+    <ns0:sldId id="281" ns1:id="Rf10220983eaf4339"/>
+    <ns0:sldId id="282" ns1:id="Ra27b56a5916f4657"/>
+    <ns0:sldId id="283" ns1:id="Rca538d106c2944a1"/>
+    <ns0:sldId id="284" ns1:id="R2f76bd1302384467"/>
+    <ns0:sldId id="285" ns1:id="Rda6abe3bb2674359"/>
   </ns0:sldIdLst>
   <ns0:sldSz cx="9144000" cy="5143500"/>
   <ns0:notesSz cx="6858000" cy="9144000"/>
@@ -91,7 +91,7 @@
           <p:nvPr/>
         </p:nvPicPr>
         <p:blipFill>
-          <a:blip xmlns:r="http://schemas.openxmlformats.org/officeDocument/2006/relationships" xmlns:a="http://schemas.openxmlformats.org/drawingml/2006/main" r:embed="R022e9b8dc3334995"/>
+          <a:blip xmlns:r="http://schemas.openxmlformats.org/officeDocument/2006/relationships" xmlns:a="http://schemas.openxmlformats.org/drawingml/2006/main" r:embed="R63dd5fb2b9524af6"/>
           <a:srcRect xmlns:a="http://schemas.openxmlformats.org/drawingml/2006/main" l="0" t="0" r="0" b="0"/>
           <a:stretch xmlns:a="http://schemas.openxmlformats.org/drawingml/2006/main"/>
         </p:blipFill>
@@ -236,7 +236,7 @@
           <p:nvPr/>
         </p:nvPicPr>
         <p:blipFill>
-          <a:blip xmlns:r="http://schemas.openxmlformats.org/officeDocument/2006/relationships" xmlns:a="http://schemas.openxmlformats.org/drawingml/2006/main" r:embed="R323fed1f35a74191"/>
+          <a:blip xmlns:r="http://schemas.openxmlformats.org/officeDocument/2006/relationships" xmlns:a="http://schemas.openxmlformats.org/drawingml/2006/main" r:embed="R440d6c46398d4cc7"/>
           <a:srcRect xmlns:a="http://schemas.openxmlformats.org/drawingml/2006/main" l="0" t="0" r="0" b="0"/>
           <a:stretch xmlns:a="http://schemas.openxmlformats.org/drawingml/2006/main"/>
         </p:blipFill>
@@ -1173,14 +1173,14 @@
   </p:cSld>
   <p:clrMap bg1="lt1" tx1="dk1" bg2="lt2" tx2="dk2" accent1="accent1" accent2="accent2" accent3="accent3" accent4="accent4" accent5="accent5" accent6="accent6" hlink="hlink" folHlink="folHlink"/>
   <p:sldLayoutIdLst>
-    <p:sldLayoutId xmlns:r="http://schemas.openxmlformats.org/officeDocument/2006/relationships" id="2147483649" r:id="R82a4ea87cfd84ea4"/>
-    <p:sldLayoutId xmlns:r="http://schemas.openxmlformats.org/officeDocument/2006/relationships" id="2147483650" r:id="R3100fb4832314215"/>
-    <p:sldLayoutId xmlns:r="http://schemas.openxmlformats.org/officeDocument/2006/relationships" id="2147483651" r:id="Rcd0eb26230ec4bee"/>
-    <p:sldLayoutId xmlns:r="http://schemas.openxmlformats.org/officeDocument/2006/relationships" id="2147483652" r:id="R91b4fbd8bfea4aa6"/>
-    <p:sldLayoutId xmlns:r="http://schemas.openxmlformats.org/officeDocument/2006/relationships" id="2147483653" r:id="R884ae245988c47ed"/>
-    <p:sldLayoutId xmlns:r="http://schemas.openxmlformats.org/officeDocument/2006/relationships" id="2147483654" r:id="Rd4cb3034f85146ff"/>
-    <p:sldLayoutId xmlns:r="http://schemas.openxmlformats.org/officeDocument/2006/relationships" id="2147483655" r:id="Rfeda93fdd8d24222"/>
-    <p:sldLayoutId xmlns:r="http://schemas.openxmlformats.org/officeDocument/2006/relationships" id="2147483656" r:id="Rd8c8a9d77c8842d0"/>
+    <p:sldLayoutId xmlns:r="http://schemas.openxmlformats.org/officeDocument/2006/relationships" id="2147483649" r:id="Rbb5f0ce3da844896"/>
+    <p:sldLayoutId xmlns:r="http://schemas.openxmlformats.org/officeDocument/2006/relationships" id="2147483650" r:id="Raab02497b02a4679"/>
+    <p:sldLayoutId xmlns:r="http://schemas.openxmlformats.org/officeDocument/2006/relationships" id="2147483651" r:id="R90cae51abf5a4df2"/>
+    <p:sldLayoutId xmlns:r="http://schemas.openxmlformats.org/officeDocument/2006/relationships" id="2147483652" r:id="Rad944d6423fb4705"/>
+    <p:sldLayoutId xmlns:r="http://schemas.openxmlformats.org/officeDocument/2006/relationships" id="2147483653" r:id="R0edb43366bd04c65"/>
+    <p:sldLayoutId xmlns:r="http://schemas.openxmlformats.org/officeDocument/2006/relationships" id="2147483654" r:id="R7c07bf09d44a466f"/>
+    <p:sldLayoutId xmlns:r="http://schemas.openxmlformats.org/officeDocument/2006/relationships" id="2147483655" r:id="Rf92bae38c0a541e6"/>
+    <p:sldLayoutId xmlns:r="http://schemas.openxmlformats.org/officeDocument/2006/relationships" id="2147483656" r:id="Rf9cf25a7d68f48e0"/>
   </p:sldLayoutIdLst>
   <p:hf sldNum="0" hdr="0" ftr="0" dt="0"/>
   <p:txStyles>
@@ -1846,7 +1846,7 @@
           <p:nvPr/>
         </p:nvPicPr>
         <p:blipFill>
-          <a:blip xmlns:r="http://schemas.openxmlformats.org/officeDocument/2006/relationships" xmlns:a="http://schemas.openxmlformats.org/drawingml/2006/main" r:embed="R922c885a86074b81"/>
+          <a:blip xmlns:r="http://schemas.openxmlformats.org/officeDocument/2006/relationships" xmlns:a="http://schemas.openxmlformats.org/drawingml/2006/main" r:embed="R48b72a8e6db843c8"/>
           <a:srcRect xmlns:a="http://schemas.openxmlformats.org/drawingml/2006/main" l="0" t="27" r="0" b="27"/>
           <a:stretch xmlns:a="http://schemas.openxmlformats.org/drawingml/2006/main">
             <a:fillRect l="0" t="0" r="0" b="0"/>
@@ -2642,10 +2642,10 @@
       </p:sp>
       <p:sp>
         <p:nvSpPr>
-          <p:cNvPr id="53" name="c3-text-309">
-            <a:extLst xmlns:a="http://schemas.openxmlformats.org/drawingml/2006/main">
-              <a:ext uri="{FF2B5EF4-FFF2-40B4-BE49-F238E27FC236}">
-                <a16:creationId xmlns:a16="http://schemas.microsoft.com/office/drawing/2014/main" id="{660D9B60-4885-4B9A-BAD0-4600EB7B3A34}"/>
+          <p:cNvPr id="53" name="c3-text-327">
+            <a:extLst xmlns:a="http://schemas.openxmlformats.org/drawingml/2006/main">
+              <a:ext uri="{FF2B5EF4-FFF2-40B4-BE49-F238E27FC236}">
+                <a16:creationId xmlns:a16="http://schemas.microsoft.com/office/drawing/2014/main" id="{542131F1-561D-4947-97D0-8F92D9AD045B}"/>
               </a:ext>
             </a:extLst>
           </p:cNvPr>
@@ -2731,7 +2731,7 @@
           <p:cNvPr id="7" name="c3-text-96">
             <a:extLst xmlns:a="http://schemas.openxmlformats.org/drawingml/2006/main">
               <a:ext uri="{FF2B5EF4-FFF2-40B4-BE49-F238E27FC236}">
-                <a16:creationId xmlns:a16="http://schemas.microsoft.com/office/drawing/2014/main" id="{51265DCB-59D1-48C4-B9F8-551549D11F3A}"/>
+                <a16:creationId xmlns:a16="http://schemas.microsoft.com/office/drawing/2014/main" id="{F2C43843-7FD5-4E94-9A8F-DDDB96857273}"/>
               </a:ext>
             </a:extLst>
           </p:cNvPr>
@@ -2788,7 +2788,7 @@
           <p:cNvPr id="2" name="c3-text-97">
             <a:extLst xmlns:a="http://schemas.openxmlformats.org/drawingml/2006/main">
               <a:ext uri="{FF2B5EF4-FFF2-40B4-BE49-F238E27FC236}">
-                <a16:creationId xmlns:a16="http://schemas.microsoft.com/office/drawing/2014/main" id="{8D92E9F8-2216-420F-AF5B-4203EE55DD7C}"/>
+                <a16:creationId xmlns:a16="http://schemas.microsoft.com/office/drawing/2014/main" id="{D2962306-39EC-41BA-A515-E24BBBB01D47}"/>
               </a:ext>
             </a:extLst>
           </p:cNvPr>
@@ -2845,7 +2845,7 @@
           <p:cNvPr id="3" name="c3-text-98">
             <a:extLst xmlns:a="http://schemas.openxmlformats.org/drawingml/2006/main">
               <a:ext uri="{FF2B5EF4-FFF2-40B4-BE49-F238E27FC236}">
-                <a16:creationId xmlns:a16="http://schemas.microsoft.com/office/drawing/2014/main" id="{E3C4D7DA-4CA1-4666-BB4E-E3A5BBDF84E1}"/>
+                <a16:creationId xmlns:a16="http://schemas.microsoft.com/office/drawing/2014/main" id="{620F3B2D-3F0D-4A0C-86BA-F4A1B1008A70}"/>
               </a:ext>
             </a:extLst>
           </p:cNvPr>
@@ -2902,7 +2902,7 @@
           <p:cNvPr id="4" name="c3-shape-99">
             <a:extLst xmlns:a="http://schemas.openxmlformats.org/drawingml/2006/main">
               <a:ext uri="{FF2B5EF4-FFF2-40B4-BE49-F238E27FC236}">
-                <a16:creationId xmlns:a16="http://schemas.microsoft.com/office/drawing/2014/main" id="{8E900392-478C-4467-B6BD-92CA42F7E60F}"/>
+                <a16:creationId xmlns:a16="http://schemas.microsoft.com/office/drawing/2014/main" id="{934EBB7F-DDC9-445F-A308-A41B24DF5F82}"/>
               </a:ext>
             </a:extLst>
           </p:cNvPr>
@@ -2936,7 +2936,7 @@
           <p:cNvPr id="5" name="c3-text-100">
             <a:extLst xmlns:a="http://schemas.openxmlformats.org/drawingml/2006/main">
               <a:ext uri="{FF2B5EF4-FFF2-40B4-BE49-F238E27FC236}">
-                <a16:creationId xmlns:a16="http://schemas.microsoft.com/office/drawing/2014/main" id="{7F08916D-DD24-4781-B4DB-57AEE17F4026}"/>
+                <a16:creationId xmlns:a16="http://schemas.microsoft.com/office/drawing/2014/main" id="{0EFB323D-B1A8-4655-8791-607AD1318C43}"/>
               </a:ext>
             </a:extLst>
           </p:cNvPr>
@@ -3437,10 +3437,10 @@
       </p:sp>
       <p:sp>
         <p:nvSpPr>
-          <p:cNvPr id="6" name="c3-text-318">
-            <a:extLst xmlns:a="http://schemas.openxmlformats.org/drawingml/2006/main">
-              <a:ext uri="{FF2B5EF4-FFF2-40B4-BE49-F238E27FC236}">
-                <a16:creationId xmlns:a16="http://schemas.microsoft.com/office/drawing/2014/main" id="{FCBD9617-4820-49FA-A3A6-BC403402C719}"/>
+          <p:cNvPr id="6" name="c3-text-336">
+            <a:extLst xmlns:a="http://schemas.openxmlformats.org/drawingml/2006/main">
+              <a:ext uri="{FF2B5EF4-FFF2-40B4-BE49-F238E27FC236}">
+                <a16:creationId xmlns:a16="http://schemas.microsoft.com/office/drawing/2014/main" id="{4E586A86-6D1F-4833-9E8F-14A497D73E2D}"/>
               </a:ext>
             </a:extLst>
           </p:cNvPr>
@@ -3495,7 +3495,7 @@
     </p:spTree>
     <p:extLst>
       <p:ext uri="{BB962C8B-B14F-4D97-AF65-F5344CB8AC3E}">
-        <p14:creationId xmlns:p14="http://schemas.microsoft.com/office/powerpoint/2010/main" val="1266671835"/>
+        <p14:creationId xmlns:p14="http://schemas.microsoft.com/office/powerpoint/2010/main" val="1977768221"/>
       </p:ext>
     </p:extLst>
   </p:cSld>
@@ -3526,7 +3526,7 @@
           <p:cNvPr id="19" name="c3-text-101">
             <a:extLst xmlns:a="http://schemas.openxmlformats.org/drawingml/2006/main">
               <a:ext uri="{FF2B5EF4-FFF2-40B4-BE49-F238E27FC236}">
-                <a16:creationId xmlns:a16="http://schemas.microsoft.com/office/drawing/2014/main" id="{3CAC22D2-CACF-4563-84EB-60A286A92E2B}"/>
+                <a16:creationId xmlns:a16="http://schemas.microsoft.com/office/drawing/2014/main" id="{D14218E1-5BC1-4B58-B48F-5A95EDFD8F5C}"/>
               </a:ext>
             </a:extLst>
           </p:cNvPr>
@@ -3583,7 +3583,7 @@
           <p:cNvPr id="2" name="c3-text-102">
             <a:extLst xmlns:a="http://schemas.openxmlformats.org/drawingml/2006/main">
               <a:ext uri="{FF2B5EF4-FFF2-40B4-BE49-F238E27FC236}">
-                <a16:creationId xmlns:a16="http://schemas.microsoft.com/office/drawing/2014/main" id="{E6269C87-E089-4247-BC3B-F39DBBFC0015}"/>
+                <a16:creationId xmlns:a16="http://schemas.microsoft.com/office/drawing/2014/main" id="{1633C678-DD64-4300-B03F-177BC148E9AE}"/>
               </a:ext>
             </a:extLst>
           </p:cNvPr>
@@ -3640,7 +3640,7 @@
           <p:cNvPr id="3" name="c3-text-103">
             <a:extLst xmlns:a="http://schemas.openxmlformats.org/drawingml/2006/main">
               <a:ext uri="{FF2B5EF4-FFF2-40B4-BE49-F238E27FC236}">
-                <a16:creationId xmlns:a16="http://schemas.microsoft.com/office/drawing/2014/main" id="{F78835BB-D4BB-4EE5-92ED-487E944436E4}"/>
+                <a16:creationId xmlns:a16="http://schemas.microsoft.com/office/drawing/2014/main" id="{5606432E-EF3E-4F6B-B9C5-C84586D4FD6D}"/>
               </a:ext>
             </a:extLst>
           </p:cNvPr>
@@ -3697,7 +3697,7 @@
           <p:cNvPr id="4" name="c3-shape-104">
             <a:extLst xmlns:a="http://schemas.openxmlformats.org/drawingml/2006/main">
               <a:ext uri="{FF2B5EF4-FFF2-40B4-BE49-F238E27FC236}">
-                <a16:creationId xmlns:a16="http://schemas.microsoft.com/office/drawing/2014/main" id="{22258AB1-A18E-43EF-9BD6-254B1EEFED29}"/>
+                <a16:creationId xmlns:a16="http://schemas.microsoft.com/office/drawing/2014/main" id="{4561D95E-1FD0-436C-8E2D-B0AF0FA8155F}"/>
               </a:ext>
             </a:extLst>
           </p:cNvPr>
@@ -3731,7 +3731,7 @@
           <p:cNvPr id="5" name="c3-shape-105">
             <a:extLst xmlns:a="http://schemas.openxmlformats.org/drawingml/2006/main">
               <a:ext uri="{FF2B5EF4-FFF2-40B4-BE49-F238E27FC236}">
-                <a16:creationId xmlns:a16="http://schemas.microsoft.com/office/drawing/2014/main" id="{4879FBBA-F9C5-4426-8EA6-00C045984467}"/>
+                <a16:creationId xmlns:a16="http://schemas.microsoft.com/office/drawing/2014/main" id="{6EDCDB5C-E9AD-4320-BAC3-C13F606E3FC8}"/>
               </a:ext>
             </a:extLst>
           </p:cNvPr>
@@ -3763,7 +3763,7 @@
           <p:cNvPr id="6" name="c3-text-106">
             <a:extLst xmlns:a="http://schemas.openxmlformats.org/drawingml/2006/main">
               <a:ext uri="{FF2B5EF4-FFF2-40B4-BE49-F238E27FC236}">
-                <a16:creationId xmlns:a16="http://schemas.microsoft.com/office/drawing/2014/main" id="{A248AC83-D5C1-4583-A149-CAA70A9B52B6}"/>
+                <a16:creationId xmlns:a16="http://schemas.microsoft.com/office/drawing/2014/main" id="{3E74C926-FC6D-478D-9E08-69CF97CF799C}"/>
               </a:ext>
             </a:extLst>
           </p:cNvPr>
@@ -3820,7 +3820,7 @@
           <p:cNvPr id="7" name="c3-text-107">
             <a:extLst xmlns:a="http://schemas.openxmlformats.org/drawingml/2006/main">
               <a:ext uri="{FF2B5EF4-FFF2-40B4-BE49-F238E27FC236}">
-                <a16:creationId xmlns:a16="http://schemas.microsoft.com/office/drawing/2014/main" id="{43C9FB5E-A434-4DD3-B3EB-FBC20B5C7373}"/>
+                <a16:creationId xmlns:a16="http://schemas.microsoft.com/office/drawing/2014/main" id="{BFBCDBF7-B91B-4447-848B-5106CFFC8F78}"/>
               </a:ext>
             </a:extLst>
           </p:cNvPr>
@@ -3877,7 +3877,7 @@
           <p:cNvPr id="8" name="c3-shape-108">
             <a:extLst xmlns:a="http://schemas.openxmlformats.org/drawingml/2006/main">
               <a:ext uri="{FF2B5EF4-FFF2-40B4-BE49-F238E27FC236}">
-                <a16:creationId xmlns:a16="http://schemas.microsoft.com/office/drawing/2014/main" id="{0C5CE471-DCAF-4CAF-9340-B227374CB7F6}"/>
+                <a16:creationId xmlns:a16="http://schemas.microsoft.com/office/drawing/2014/main" id="{0A588B66-19E4-4918-B5FC-06CBE74385CA}"/>
               </a:ext>
             </a:extLst>
           </p:cNvPr>
@@ -3911,7 +3911,7 @@
           <p:cNvPr id="9" name="c3-shape-109">
             <a:extLst xmlns:a="http://schemas.openxmlformats.org/drawingml/2006/main">
               <a:ext uri="{FF2B5EF4-FFF2-40B4-BE49-F238E27FC236}">
-                <a16:creationId xmlns:a16="http://schemas.microsoft.com/office/drawing/2014/main" id="{9CA00873-C4F1-4BAF-BF0A-6E0FBBCB2E7B}"/>
+                <a16:creationId xmlns:a16="http://schemas.microsoft.com/office/drawing/2014/main" id="{639C5C1F-A193-423D-A43A-24D1C755F25B}"/>
               </a:ext>
             </a:extLst>
           </p:cNvPr>
@@ -3943,7 +3943,7 @@
           <p:cNvPr id="10" name="c3-text-110">
             <a:extLst xmlns:a="http://schemas.openxmlformats.org/drawingml/2006/main">
               <a:ext uri="{FF2B5EF4-FFF2-40B4-BE49-F238E27FC236}">
-                <a16:creationId xmlns:a16="http://schemas.microsoft.com/office/drawing/2014/main" id="{825D896F-73AF-41A8-8FA8-7C911E67A25C}"/>
+                <a16:creationId xmlns:a16="http://schemas.microsoft.com/office/drawing/2014/main" id="{745ECC01-2820-48FB-8221-75D7108E7FE0}"/>
               </a:ext>
             </a:extLst>
           </p:cNvPr>
@@ -4000,7 +4000,7 @@
           <p:cNvPr id="11" name="c3-text-111">
             <a:extLst xmlns:a="http://schemas.openxmlformats.org/drawingml/2006/main">
               <a:ext uri="{FF2B5EF4-FFF2-40B4-BE49-F238E27FC236}">
-                <a16:creationId xmlns:a16="http://schemas.microsoft.com/office/drawing/2014/main" id="{61BA9CB1-D4AC-4422-B9FB-F97F30E2AD48}"/>
+                <a16:creationId xmlns:a16="http://schemas.microsoft.com/office/drawing/2014/main" id="{CA2BB258-5938-4010-AD41-F2C97DF1421C}"/>
               </a:ext>
             </a:extLst>
           </p:cNvPr>
@@ -4057,7 +4057,7 @@
           <p:cNvPr id="12" name="c3-shape-112">
             <a:extLst xmlns:a="http://schemas.openxmlformats.org/drawingml/2006/main">
               <a:ext uri="{FF2B5EF4-FFF2-40B4-BE49-F238E27FC236}">
-                <a16:creationId xmlns:a16="http://schemas.microsoft.com/office/drawing/2014/main" id="{62F98031-CB86-4DAF-A258-7D2E36C1988D}"/>
+                <a16:creationId xmlns:a16="http://schemas.microsoft.com/office/drawing/2014/main" id="{DAB103FA-E740-4CE2-81F5-1CB72F88BE09}"/>
               </a:ext>
             </a:extLst>
           </p:cNvPr>
@@ -4091,7 +4091,7 @@
           <p:cNvPr id="13" name="c3-shape-113">
             <a:extLst xmlns:a="http://schemas.openxmlformats.org/drawingml/2006/main">
               <a:ext uri="{FF2B5EF4-FFF2-40B4-BE49-F238E27FC236}">
-                <a16:creationId xmlns:a16="http://schemas.microsoft.com/office/drawing/2014/main" id="{511164D7-0111-475A-B078-31255DDBB985}"/>
+                <a16:creationId xmlns:a16="http://schemas.microsoft.com/office/drawing/2014/main" id="{1DBC1330-5CC6-45EA-8D56-876B6FD5EB04}"/>
               </a:ext>
             </a:extLst>
           </p:cNvPr>
@@ -4123,7 +4123,7 @@
           <p:cNvPr id="14" name="c3-text-114">
             <a:extLst xmlns:a="http://schemas.openxmlformats.org/drawingml/2006/main">
               <a:ext uri="{FF2B5EF4-FFF2-40B4-BE49-F238E27FC236}">
-                <a16:creationId xmlns:a16="http://schemas.microsoft.com/office/drawing/2014/main" id="{8E4AA3CD-8729-43FE-850C-5EAA2C1CFD64}"/>
+                <a16:creationId xmlns:a16="http://schemas.microsoft.com/office/drawing/2014/main" id="{A56A5EC4-7217-43C4-ABF0-937C65145B25}"/>
               </a:ext>
             </a:extLst>
           </p:cNvPr>
@@ -4180,7 +4180,7 @@
           <p:cNvPr id="15" name="c3-text-115">
             <a:extLst xmlns:a="http://schemas.openxmlformats.org/drawingml/2006/main">
               <a:ext uri="{FF2B5EF4-FFF2-40B4-BE49-F238E27FC236}">
-                <a16:creationId xmlns:a16="http://schemas.microsoft.com/office/drawing/2014/main" id="{A7BBA961-74A9-4E97-A239-D4376736816A}"/>
+                <a16:creationId xmlns:a16="http://schemas.microsoft.com/office/drawing/2014/main" id="{2209F4C5-5CE6-490B-AB72-CDD97BFF9F09}"/>
               </a:ext>
             </a:extLst>
           </p:cNvPr>
@@ -4237,7 +4237,7 @@
           <p:cNvPr id="16" name="c3-shape-116">
             <a:extLst xmlns:a="http://schemas.openxmlformats.org/drawingml/2006/main">
               <a:ext uri="{FF2B5EF4-FFF2-40B4-BE49-F238E27FC236}">
-                <a16:creationId xmlns:a16="http://schemas.microsoft.com/office/drawing/2014/main" id="{700282C5-194F-4859-B931-D964C675BA2F}"/>
+                <a16:creationId xmlns:a16="http://schemas.microsoft.com/office/drawing/2014/main" id="{BC5B3D7A-E3D6-447D-9AC9-030427CB6E47}"/>
               </a:ext>
             </a:extLst>
           </p:cNvPr>
@@ -4271,7 +4271,7 @@
           <p:cNvPr id="17" name="c3-text-117">
             <a:extLst xmlns:a="http://schemas.openxmlformats.org/drawingml/2006/main">
               <a:ext uri="{FF2B5EF4-FFF2-40B4-BE49-F238E27FC236}">
-                <a16:creationId xmlns:a16="http://schemas.microsoft.com/office/drawing/2014/main" id="{DE29C1A9-46BF-480E-923F-48BE5585522A}"/>
+                <a16:creationId xmlns:a16="http://schemas.microsoft.com/office/drawing/2014/main" id="{55419BF7-1095-469E-AE8B-B5706D32E8F2}"/>
               </a:ext>
             </a:extLst>
           </p:cNvPr>
@@ -4325,10 +4325,10 @@
       </p:sp>
       <p:sp>
         <p:nvSpPr>
-          <p:cNvPr id="18" name="c3-text-319">
-            <a:extLst xmlns:a="http://schemas.openxmlformats.org/drawingml/2006/main">
-              <a:ext uri="{FF2B5EF4-FFF2-40B4-BE49-F238E27FC236}">
-                <a16:creationId xmlns:a16="http://schemas.microsoft.com/office/drawing/2014/main" id="{A25E9D34-4E36-495B-B2AB-D215930D278C}"/>
+          <p:cNvPr id="18" name="c3-text-337">
+            <a:extLst xmlns:a="http://schemas.openxmlformats.org/drawingml/2006/main">
+              <a:ext uri="{FF2B5EF4-FFF2-40B4-BE49-F238E27FC236}">
+                <a16:creationId xmlns:a16="http://schemas.microsoft.com/office/drawing/2014/main" id="{38073565-E37A-4528-AEDB-BCBDADC703D4}"/>
               </a:ext>
             </a:extLst>
           </p:cNvPr>
@@ -4383,7 +4383,7 @@
     </p:spTree>
     <p:extLst>
       <p:ext uri="{BB962C8B-B14F-4D97-AF65-F5344CB8AC3E}">
-        <p14:creationId xmlns:p14="http://schemas.microsoft.com/office/powerpoint/2010/main" val="1664243877"/>
+        <p14:creationId xmlns:p14="http://schemas.microsoft.com/office/powerpoint/2010/main" val="813115273"/>
       </p:ext>
     </p:extLst>
   </p:cSld>
@@ -4414,7 +4414,7 @@
           <p:cNvPr id="15" name="c3-text-118">
             <a:extLst xmlns:a="http://schemas.openxmlformats.org/drawingml/2006/main">
               <a:ext uri="{FF2B5EF4-FFF2-40B4-BE49-F238E27FC236}">
-                <a16:creationId xmlns:a16="http://schemas.microsoft.com/office/drawing/2014/main" id="{9DAC8A85-14F6-4146-AF08-EC686F935EED}"/>
+                <a16:creationId xmlns:a16="http://schemas.microsoft.com/office/drawing/2014/main" id="{2525ED39-C56E-4150-8817-EFE8B44B19FC}"/>
               </a:ext>
             </a:extLst>
           </p:cNvPr>
@@ -4471,7 +4471,7 @@
           <p:cNvPr id="2" name="c3-text-119">
             <a:extLst xmlns:a="http://schemas.openxmlformats.org/drawingml/2006/main">
               <a:ext uri="{FF2B5EF4-FFF2-40B4-BE49-F238E27FC236}">
-                <a16:creationId xmlns:a16="http://schemas.microsoft.com/office/drawing/2014/main" id="{38140C4C-BC87-40A8-9104-15A6689B3CC0}"/>
+                <a16:creationId xmlns:a16="http://schemas.microsoft.com/office/drawing/2014/main" id="{559FD161-DCE0-41FE-A9AD-7EA80155C514}"/>
               </a:ext>
             </a:extLst>
           </p:cNvPr>
@@ -4528,7 +4528,7 @@
           <p:cNvPr id="3" name="c3-text-120">
             <a:extLst xmlns:a="http://schemas.openxmlformats.org/drawingml/2006/main">
               <a:ext uri="{FF2B5EF4-FFF2-40B4-BE49-F238E27FC236}">
-                <a16:creationId xmlns:a16="http://schemas.microsoft.com/office/drawing/2014/main" id="{A8EEBE47-92C4-4B97-B80D-EB0B47C57D10}"/>
+                <a16:creationId xmlns:a16="http://schemas.microsoft.com/office/drawing/2014/main" id="{FAC5C7EF-8DFE-48A2-BEAA-9CD98A50A736}"/>
               </a:ext>
             </a:extLst>
           </p:cNvPr>
@@ -4585,7 +4585,7 @@
           <p:cNvPr id="4" name="c3-shape-121">
             <a:extLst xmlns:a="http://schemas.openxmlformats.org/drawingml/2006/main">
               <a:ext uri="{FF2B5EF4-FFF2-40B4-BE49-F238E27FC236}">
-                <a16:creationId xmlns:a16="http://schemas.microsoft.com/office/drawing/2014/main" id="{22A087B3-4BFD-468D-B5AD-EFC2B7D7DAF9}"/>
+                <a16:creationId xmlns:a16="http://schemas.microsoft.com/office/drawing/2014/main" id="{A85D29B0-3166-4B6B-886D-F93CA43C66AB}"/>
               </a:ext>
             </a:extLst>
           </p:cNvPr>
@@ -4619,7 +4619,7 @@
           <p:cNvPr id="5" name="c3-shape-122">
             <a:extLst xmlns:a="http://schemas.openxmlformats.org/drawingml/2006/main">
               <a:ext uri="{FF2B5EF4-FFF2-40B4-BE49-F238E27FC236}">
-                <a16:creationId xmlns:a16="http://schemas.microsoft.com/office/drawing/2014/main" id="{37923DF9-B138-4277-96B4-F10F42666748}"/>
+                <a16:creationId xmlns:a16="http://schemas.microsoft.com/office/drawing/2014/main" id="{567609A1-33D1-4A10-9894-45E284438163}"/>
               </a:ext>
             </a:extLst>
           </p:cNvPr>
@@ -4651,7 +4651,7 @@
           <p:cNvPr id="6" name="c3-text-123">
             <a:extLst xmlns:a="http://schemas.openxmlformats.org/drawingml/2006/main">
               <a:ext uri="{FF2B5EF4-FFF2-40B4-BE49-F238E27FC236}">
-                <a16:creationId xmlns:a16="http://schemas.microsoft.com/office/drawing/2014/main" id="{4BA10FA2-1670-45AC-B770-225DADDECFB1}"/>
+                <a16:creationId xmlns:a16="http://schemas.microsoft.com/office/drawing/2014/main" id="{E31E72F1-F8AC-414E-87F7-8660EAF4131E}"/>
               </a:ext>
             </a:extLst>
           </p:cNvPr>
@@ -4708,7 +4708,7 @@
           <p:cNvPr id="7" name="c3-text-124">
             <a:extLst xmlns:a="http://schemas.openxmlformats.org/drawingml/2006/main">
               <a:ext uri="{FF2B5EF4-FFF2-40B4-BE49-F238E27FC236}">
-                <a16:creationId xmlns:a16="http://schemas.microsoft.com/office/drawing/2014/main" id="{D398A808-736B-4D87-A942-E8889BEEC0C0}"/>
+                <a16:creationId xmlns:a16="http://schemas.microsoft.com/office/drawing/2014/main" id="{D896E197-5045-4BCD-878D-9CC773427484}"/>
               </a:ext>
             </a:extLst>
           </p:cNvPr>
@@ -4811,7 +4811,7 @@
           <p:cNvPr id="8" name="c3-shape-125">
             <a:extLst xmlns:a="http://schemas.openxmlformats.org/drawingml/2006/main">
               <a:ext uri="{FF2B5EF4-FFF2-40B4-BE49-F238E27FC236}">
-                <a16:creationId xmlns:a16="http://schemas.microsoft.com/office/drawing/2014/main" id="{FE680531-E952-4473-AEBD-9AAF12773897}"/>
+                <a16:creationId xmlns:a16="http://schemas.microsoft.com/office/drawing/2014/main" id="{FC8FF05F-11C0-42DC-8736-EE39278B81B6}"/>
               </a:ext>
             </a:extLst>
           </p:cNvPr>
@@ -4845,7 +4845,7 @@
           <p:cNvPr id="9" name="c3-shape-126">
             <a:extLst xmlns:a="http://schemas.openxmlformats.org/drawingml/2006/main">
               <a:ext uri="{FF2B5EF4-FFF2-40B4-BE49-F238E27FC236}">
-                <a16:creationId xmlns:a16="http://schemas.microsoft.com/office/drawing/2014/main" id="{C7A37CE0-8D88-425E-B1BC-54F0FE86F880}"/>
+                <a16:creationId xmlns:a16="http://schemas.microsoft.com/office/drawing/2014/main" id="{44536EC4-E604-42DB-90D4-80C9825B28C3}"/>
               </a:ext>
             </a:extLst>
           </p:cNvPr>
@@ -4877,7 +4877,7 @@
           <p:cNvPr id="10" name="c3-text-127">
             <a:extLst xmlns:a="http://schemas.openxmlformats.org/drawingml/2006/main">
               <a:ext uri="{FF2B5EF4-FFF2-40B4-BE49-F238E27FC236}">
-                <a16:creationId xmlns:a16="http://schemas.microsoft.com/office/drawing/2014/main" id="{C24C18A5-665F-4269-B898-8F63C8402ED4}"/>
+                <a16:creationId xmlns:a16="http://schemas.microsoft.com/office/drawing/2014/main" id="{219B029A-088D-40B6-9D61-EB49526987ED}"/>
               </a:ext>
             </a:extLst>
           </p:cNvPr>
@@ -4934,7 +4934,7 @@
           <p:cNvPr id="11" name="c3-text-128">
             <a:extLst xmlns:a="http://schemas.openxmlformats.org/drawingml/2006/main">
               <a:ext uri="{FF2B5EF4-FFF2-40B4-BE49-F238E27FC236}">
-                <a16:creationId xmlns:a16="http://schemas.microsoft.com/office/drawing/2014/main" id="{AB2370C4-92CF-43A9-9FD9-B72C4C9BA927}"/>
+                <a16:creationId xmlns:a16="http://schemas.microsoft.com/office/drawing/2014/main" id="{6F4439A3-5DF6-4DDE-B176-79359BA0E9D5}"/>
               </a:ext>
             </a:extLst>
           </p:cNvPr>
@@ -5037,7 +5037,7 @@
           <p:cNvPr id="12" name="c3-shape-129">
             <a:extLst xmlns:a="http://schemas.openxmlformats.org/drawingml/2006/main">
               <a:ext uri="{FF2B5EF4-FFF2-40B4-BE49-F238E27FC236}">
-                <a16:creationId xmlns:a16="http://schemas.microsoft.com/office/drawing/2014/main" id="{DEF1E839-A488-4ED7-B30F-E2CE0299F1DD}"/>
+                <a16:creationId xmlns:a16="http://schemas.microsoft.com/office/drawing/2014/main" id="{76B07B87-FA49-4C6D-B40B-E56B5661D9FE}"/>
               </a:ext>
             </a:extLst>
           </p:cNvPr>
@@ -5071,7 +5071,7 @@
           <p:cNvPr id="13" name="c3-text-130">
             <a:extLst xmlns:a="http://schemas.openxmlformats.org/drawingml/2006/main">
               <a:ext uri="{FF2B5EF4-FFF2-40B4-BE49-F238E27FC236}">
-                <a16:creationId xmlns:a16="http://schemas.microsoft.com/office/drawing/2014/main" id="{5D41BD65-9EEF-4B3D-A9EE-F4EF59778614}"/>
+                <a16:creationId xmlns:a16="http://schemas.microsoft.com/office/drawing/2014/main" id="{DADFE1BA-858C-4CB9-9D0D-9C4138BD9ABC}"/>
               </a:ext>
             </a:extLst>
           </p:cNvPr>
@@ -5125,10 +5125,10 @@
       </p:sp>
       <p:sp>
         <p:nvSpPr>
-          <p:cNvPr id="14" name="c3-text-320">
-            <a:extLst xmlns:a="http://schemas.openxmlformats.org/drawingml/2006/main">
-              <a:ext uri="{FF2B5EF4-FFF2-40B4-BE49-F238E27FC236}">
-                <a16:creationId xmlns:a16="http://schemas.microsoft.com/office/drawing/2014/main" id="{6CE58F99-CAC5-4D95-9C67-9B2A49E69D56}"/>
+          <p:cNvPr id="14" name="c3-text-338">
+            <a:extLst xmlns:a="http://schemas.openxmlformats.org/drawingml/2006/main">
+              <a:ext uri="{FF2B5EF4-FFF2-40B4-BE49-F238E27FC236}">
+                <a16:creationId xmlns:a16="http://schemas.microsoft.com/office/drawing/2014/main" id="{65E71853-E254-4211-92EA-5D15E488EE4A}"/>
               </a:ext>
             </a:extLst>
           </p:cNvPr>
@@ -5183,7 +5183,7 @@
     </p:spTree>
     <p:extLst>
       <p:ext uri="{BB962C8B-B14F-4D97-AF65-F5344CB8AC3E}">
-        <p14:creationId xmlns:p14="http://schemas.microsoft.com/office/powerpoint/2010/main" val="1549004263"/>
+        <p14:creationId xmlns:p14="http://schemas.microsoft.com/office/powerpoint/2010/main" val="872418530"/>
       </p:ext>
     </p:extLst>
   </p:cSld>
@@ -5214,7 +5214,7 @@
           <p:cNvPr id="19" name="c3-text-131">
             <a:extLst xmlns:a="http://schemas.openxmlformats.org/drawingml/2006/main">
               <a:ext uri="{FF2B5EF4-FFF2-40B4-BE49-F238E27FC236}">
-                <a16:creationId xmlns:a16="http://schemas.microsoft.com/office/drawing/2014/main" id="{CDE6FB5B-6F6F-4613-B96D-FFA16DF75611}"/>
+                <a16:creationId xmlns:a16="http://schemas.microsoft.com/office/drawing/2014/main" id="{B11E43E7-25EA-4186-9A08-18001DF69AC3}"/>
               </a:ext>
             </a:extLst>
           </p:cNvPr>
@@ -5271,7 +5271,7 @@
           <p:cNvPr id="2" name="c3-text-132">
             <a:extLst xmlns:a="http://schemas.openxmlformats.org/drawingml/2006/main">
               <a:ext uri="{FF2B5EF4-FFF2-40B4-BE49-F238E27FC236}">
-                <a16:creationId xmlns:a16="http://schemas.microsoft.com/office/drawing/2014/main" id="{AA6C05A7-FBAE-42E8-B2AC-181FE353ECC7}"/>
+                <a16:creationId xmlns:a16="http://schemas.microsoft.com/office/drawing/2014/main" id="{5072701E-5DE8-4A6F-890D-94B1BC65DD60}"/>
               </a:ext>
             </a:extLst>
           </p:cNvPr>
@@ -5328,7 +5328,7 @@
           <p:cNvPr id="3" name="c3-text-133">
             <a:extLst xmlns:a="http://schemas.openxmlformats.org/drawingml/2006/main">
               <a:ext uri="{FF2B5EF4-FFF2-40B4-BE49-F238E27FC236}">
-                <a16:creationId xmlns:a16="http://schemas.microsoft.com/office/drawing/2014/main" id="{DA59DB70-1551-49EC-9349-C68463EF0F95}"/>
+                <a16:creationId xmlns:a16="http://schemas.microsoft.com/office/drawing/2014/main" id="{B18E2175-23C9-4098-BFDF-FED628B437EA}"/>
               </a:ext>
             </a:extLst>
           </p:cNvPr>
@@ -5385,7 +5385,7 @@
           <p:cNvPr id="4" name="c3-shape-134">
             <a:extLst xmlns:a="http://schemas.openxmlformats.org/drawingml/2006/main">
               <a:ext uri="{FF2B5EF4-FFF2-40B4-BE49-F238E27FC236}">
-                <a16:creationId xmlns:a16="http://schemas.microsoft.com/office/drawing/2014/main" id="{36D1E619-5924-4337-A785-C58DECF70036}"/>
+                <a16:creationId xmlns:a16="http://schemas.microsoft.com/office/drawing/2014/main" id="{4AF0AD4A-143C-47FD-932E-08A71610075B}"/>
               </a:ext>
             </a:extLst>
           </p:cNvPr>
@@ -5419,7 +5419,7 @@
           <p:cNvPr id="5" name="c3-shape-135">
             <a:extLst xmlns:a="http://schemas.openxmlformats.org/drawingml/2006/main">
               <a:ext uri="{FF2B5EF4-FFF2-40B4-BE49-F238E27FC236}">
-                <a16:creationId xmlns:a16="http://schemas.microsoft.com/office/drawing/2014/main" id="{C4261830-8B6E-491E-9AB0-AFCFB6B380F0}"/>
+                <a16:creationId xmlns:a16="http://schemas.microsoft.com/office/drawing/2014/main" id="{B220E505-7FD6-45C1-9438-CBAE32B234F7}"/>
               </a:ext>
             </a:extLst>
           </p:cNvPr>
@@ -5451,7 +5451,7 @@
           <p:cNvPr id="6" name="c3-text-136">
             <a:extLst xmlns:a="http://schemas.openxmlformats.org/drawingml/2006/main">
               <a:ext uri="{FF2B5EF4-FFF2-40B4-BE49-F238E27FC236}">
-                <a16:creationId xmlns:a16="http://schemas.microsoft.com/office/drawing/2014/main" id="{BE1B3389-E941-47FB-B3AF-9FC24D348076}"/>
+                <a16:creationId xmlns:a16="http://schemas.microsoft.com/office/drawing/2014/main" id="{0BD2EC9E-B705-4F15-8546-B04F77AF3116}"/>
               </a:ext>
             </a:extLst>
           </p:cNvPr>
@@ -5508,7 +5508,7 @@
           <p:cNvPr id="7" name="c3-text-137">
             <a:extLst xmlns:a="http://schemas.openxmlformats.org/drawingml/2006/main">
               <a:ext uri="{FF2B5EF4-FFF2-40B4-BE49-F238E27FC236}">
-                <a16:creationId xmlns:a16="http://schemas.microsoft.com/office/drawing/2014/main" id="{C659F584-49FB-4F9E-BFE2-B92288297D57}"/>
+                <a16:creationId xmlns:a16="http://schemas.microsoft.com/office/drawing/2014/main" id="{5AFD07EA-3AB0-4C39-87E6-3B08480FCFF3}"/>
               </a:ext>
             </a:extLst>
           </p:cNvPr>
@@ -5565,7 +5565,7 @@
           <p:cNvPr id="8" name="c3-shape-138">
             <a:extLst xmlns:a="http://schemas.openxmlformats.org/drawingml/2006/main">
               <a:ext uri="{FF2B5EF4-FFF2-40B4-BE49-F238E27FC236}">
-                <a16:creationId xmlns:a16="http://schemas.microsoft.com/office/drawing/2014/main" id="{EC018A45-E249-4430-9CBF-92E437AAF5CE}"/>
+                <a16:creationId xmlns:a16="http://schemas.microsoft.com/office/drawing/2014/main" id="{D7BC42D9-983F-40CF-BF4F-DA94EACE1C20}"/>
               </a:ext>
             </a:extLst>
           </p:cNvPr>
@@ -5599,7 +5599,7 @@
           <p:cNvPr id="9" name="c3-shape-139">
             <a:extLst xmlns:a="http://schemas.openxmlformats.org/drawingml/2006/main">
               <a:ext uri="{FF2B5EF4-FFF2-40B4-BE49-F238E27FC236}">
-                <a16:creationId xmlns:a16="http://schemas.microsoft.com/office/drawing/2014/main" id="{F9CEAE83-CB41-4ABE-B78C-E3191FAD968D}"/>
+                <a16:creationId xmlns:a16="http://schemas.microsoft.com/office/drawing/2014/main" id="{C3829F33-1D0A-4AB7-9E6E-9BBBF01CC44A}"/>
               </a:ext>
             </a:extLst>
           </p:cNvPr>
@@ -5631,7 +5631,7 @@
           <p:cNvPr id="10" name="c3-text-140">
             <a:extLst xmlns:a="http://schemas.openxmlformats.org/drawingml/2006/main">
               <a:ext uri="{FF2B5EF4-FFF2-40B4-BE49-F238E27FC236}">
-                <a16:creationId xmlns:a16="http://schemas.microsoft.com/office/drawing/2014/main" id="{3F0D50BF-98C2-4FDE-936A-93B079629F67}"/>
+                <a16:creationId xmlns:a16="http://schemas.microsoft.com/office/drawing/2014/main" id="{5932210E-8834-4C99-954C-7DAC6E9F3340}"/>
               </a:ext>
             </a:extLst>
           </p:cNvPr>
@@ -5688,7 +5688,7 @@
           <p:cNvPr id="11" name="c3-text-141">
             <a:extLst xmlns:a="http://schemas.openxmlformats.org/drawingml/2006/main">
               <a:ext uri="{FF2B5EF4-FFF2-40B4-BE49-F238E27FC236}">
-                <a16:creationId xmlns:a16="http://schemas.microsoft.com/office/drawing/2014/main" id="{0D693C75-F5D0-4316-BAD0-B91C45E48099}"/>
+                <a16:creationId xmlns:a16="http://schemas.microsoft.com/office/drawing/2014/main" id="{4DDEF941-CA4A-4306-992A-47B5CFECDCCB}"/>
               </a:ext>
             </a:extLst>
           </p:cNvPr>
@@ -5768,7 +5768,7 @@
           <p:cNvPr id="12" name="c3-shape-142">
             <a:extLst xmlns:a="http://schemas.openxmlformats.org/drawingml/2006/main">
               <a:ext uri="{FF2B5EF4-FFF2-40B4-BE49-F238E27FC236}">
-                <a16:creationId xmlns:a16="http://schemas.microsoft.com/office/drawing/2014/main" id="{6B26D12C-57E5-44C7-8CA6-DEA2FF0771E4}"/>
+                <a16:creationId xmlns:a16="http://schemas.microsoft.com/office/drawing/2014/main" id="{2B0B2018-8904-4608-881D-C4A511D5039F}"/>
               </a:ext>
             </a:extLst>
           </p:cNvPr>
@@ -5802,7 +5802,7 @@
           <p:cNvPr id="13" name="c3-shape-143">
             <a:extLst xmlns:a="http://schemas.openxmlformats.org/drawingml/2006/main">
               <a:ext uri="{FF2B5EF4-FFF2-40B4-BE49-F238E27FC236}">
-                <a16:creationId xmlns:a16="http://schemas.microsoft.com/office/drawing/2014/main" id="{A6FED281-8314-4F4A-BDB0-E5311885B8E5}"/>
+                <a16:creationId xmlns:a16="http://schemas.microsoft.com/office/drawing/2014/main" id="{1412FD49-9803-46F4-BCA4-E570CB8298DA}"/>
               </a:ext>
             </a:extLst>
           </p:cNvPr>
@@ -5834,7 +5834,7 @@
           <p:cNvPr id="14" name="c3-text-144">
             <a:extLst xmlns:a="http://schemas.openxmlformats.org/drawingml/2006/main">
               <a:ext uri="{FF2B5EF4-FFF2-40B4-BE49-F238E27FC236}">
-                <a16:creationId xmlns:a16="http://schemas.microsoft.com/office/drawing/2014/main" id="{F0BAE611-96AB-4C18-A628-07CE1FC27F6F}"/>
+                <a16:creationId xmlns:a16="http://schemas.microsoft.com/office/drawing/2014/main" id="{75B4894E-0D0F-46B7-926E-5E55E9141730}"/>
               </a:ext>
             </a:extLst>
           </p:cNvPr>
@@ -5891,7 +5891,7 @@
           <p:cNvPr id="15" name="c3-text-145">
             <a:extLst xmlns:a="http://schemas.openxmlformats.org/drawingml/2006/main">
               <a:ext uri="{FF2B5EF4-FFF2-40B4-BE49-F238E27FC236}">
-                <a16:creationId xmlns:a16="http://schemas.microsoft.com/office/drawing/2014/main" id="{04D37263-5FE3-4527-8A07-875CCA5ACEBB}"/>
+                <a16:creationId xmlns:a16="http://schemas.microsoft.com/office/drawing/2014/main" id="{F5F841B1-C586-4A77-9232-375E143503B9}"/>
               </a:ext>
             </a:extLst>
           </p:cNvPr>
@@ -5948,7 +5948,7 @@
           <p:cNvPr id="16" name="c3-shape-146">
             <a:extLst xmlns:a="http://schemas.openxmlformats.org/drawingml/2006/main">
               <a:ext uri="{FF2B5EF4-FFF2-40B4-BE49-F238E27FC236}">
-                <a16:creationId xmlns:a16="http://schemas.microsoft.com/office/drawing/2014/main" id="{775A8498-08AB-4D49-AA6B-DB5292502503}"/>
+                <a16:creationId xmlns:a16="http://schemas.microsoft.com/office/drawing/2014/main" id="{6EFEB506-70BB-4E87-804B-55C7CDC2E951}"/>
               </a:ext>
             </a:extLst>
           </p:cNvPr>
@@ -5982,7 +5982,7 @@
           <p:cNvPr id="17" name="c3-text-147">
             <a:extLst xmlns:a="http://schemas.openxmlformats.org/drawingml/2006/main">
               <a:ext uri="{FF2B5EF4-FFF2-40B4-BE49-F238E27FC236}">
-                <a16:creationId xmlns:a16="http://schemas.microsoft.com/office/drawing/2014/main" id="{FE3B5A73-8152-432A-9736-76C235539C23}"/>
+                <a16:creationId xmlns:a16="http://schemas.microsoft.com/office/drawing/2014/main" id="{088AB6AB-5DD7-4483-AAC8-AE86549CB9FA}"/>
               </a:ext>
             </a:extLst>
           </p:cNvPr>
@@ -6036,10 +6036,10 @@
       </p:sp>
       <p:sp>
         <p:nvSpPr>
-          <p:cNvPr id="18" name="c3-text-321">
-            <a:extLst xmlns:a="http://schemas.openxmlformats.org/drawingml/2006/main">
-              <a:ext uri="{FF2B5EF4-FFF2-40B4-BE49-F238E27FC236}">
-                <a16:creationId xmlns:a16="http://schemas.microsoft.com/office/drawing/2014/main" id="{B0A89B6C-CDFC-470E-8198-5904439BC7D0}"/>
+          <p:cNvPr id="18" name="c3-text-339">
+            <a:extLst xmlns:a="http://schemas.openxmlformats.org/drawingml/2006/main">
+              <a:ext uri="{FF2B5EF4-FFF2-40B4-BE49-F238E27FC236}">
+                <a16:creationId xmlns:a16="http://schemas.microsoft.com/office/drawing/2014/main" id="{67FB0FE2-0BB6-4926-A459-835E73CB98FE}"/>
               </a:ext>
             </a:extLst>
           </p:cNvPr>
@@ -6094,7 +6094,7 @@
     </p:spTree>
     <p:extLst>
       <p:ext uri="{BB962C8B-B14F-4D97-AF65-F5344CB8AC3E}">
-        <p14:creationId xmlns:p14="http://schemas.microsoft.com/office/powerpoint/2010/main" val="1256595178"/>
+        <p14:creationId xmlns:p14="http://schemas.microsoft.com/office/powerpoint/2010/main" val="1358239144"/>
       </p:ext>
     </p:extLst>
   </p:cSld>
@@ -6125,7 +6125,7 @@
           <p:cNvPr id="19" name="c3-text-148">
             <a:extLst xmlns:a="http://schemas.openxmlformats.org/drawingml/2006/main">
               <a:ext uri="{FF2B5EF4-FFF2-40B4-BE49-F238E27FC236}">
-                <a16:creationId xmlns:a16="http://schemas.microsoft.com/office/drawing/2014/main" id="{99328313-ED47-4E37-A05B-69782B8F5D52}"/>
+                <a16:creationId xmlns:a16="http://schemas.microsoft.com/office/drawing/2014/main" id="{DEB25771-BA54-4905-AF88-371101366AD5}"/>
               </a:ext>
             </a:extLst>
           </p:cNvPr>
@@ -6182,7 +6182,7 @@
           <p:cNvPr id="2" name="c3-text-149">
             <a:extLst xmlns:a="http://schemas.openxmlformats.org/drawingml/2006/main">
               <a:ext uri="{FF2B5EF4-FFF2-40B4-BE49-F238E27FC236}">
-                <a16:creationId xmlns:a16="http://schemas.microsoft.com/office/drawing/2014/main" id="{B6B9623F-3351-48B7-B120-0358FFE201F1}"/>
+                <a16:creationId xmlns:a16="http://schemas.microsoft.com/office/drawing/2014/main" id="{CBF37588-E67D-4CD0-B359-B96FA9FF9321}"/>
               </a:ext>
             </a:extLst>
           </p:cNvPr>
@@ -6239,7 +6239,7 @@
           <p:cNvPr id="3" name="c3-text-150">
             <a:extLst xmlns:a="http://schemas.openxmlformats.org/drawingml/2006/main">
               <a:ext uri="{FF2B5EF4-FFF2-40B4-BE49-F238E27FC236}">
-                <a16:creationId xmlns:a16="http://schemas.microsoft.com/office/drawing/2014/main" id="{52B8AE82-4034-4F5E-983D-EA055E08676E}"/>
+                <a16:creationId xmlns:a16="http://schemas.microsoft.com/office/drawing/2014/main" id="{E35352EB-3B2B-4AB7-84D4-AA7428356DD1}"/>
               </a:ext>
             </a:extLst>
           </p:cNvPr>
@@ -6296,7 +6296,7 @@
           <p:cNvPr id="4" name="c3-shape-151">
             <a:extLst xmlns:a="http://schemas.openxmlformats.org/drawingml/2006/main">
               <a:ext uri="{FF2B5EF4-FFF2-40B4-BE49-F238E27FC236}">
-                <a16:creationId xmlns:a16="http://schemas.microsoft.com/office/drawing/2014/main" id="{3DB2D7F1-271A-456D-B240-3319EB2789C2}"/>
+                <a16:creationId xmlns:a16="http://schemas.microsoft.com/office/drawing/2014/main" id="{1E36279A-8E95-45A3-BDB4-481C6A5D263A}"/>
               </a:ext>
             </a:extLst>
           </p:cNvPr>
@@ -6330,7 +6330,7 @@
           <p:cNvPr id="5" name="c3-shape-152">
             <a:extLst xmlns:a="http://schemas.openxmlformats.org/drawingml/2006/main">
               <a:ext uri="{FF2B5EF4-FFF2-40B4-BE49-F238E27FC236}">
-                <a16:creationId xmlns:a16="http://schemas.microsoft.com/office/drawing/2014/main" id="{43A1076F-58A2-4B55-AF32-D404BFA6B9CA}"/>
+                <a16:creationId xmlns:a16="http://schemas.microsoft.com/office/drawing/2014/main" id="{690F6C4E-51FA-45D9-B5DE-4BE323B9E520}"/>
               </a:ext>
             </a:extLst>
           </p:cNvPr>
@@ -6362,7 +6362,7 @@
           <p:cNvPr id="6" name="c3-text-153">
             <a:extLst xmlns:a="http://schemas.openxmlformats.org/drawingml/2006/main">
               <a:ext uri="{FF2B5EF4-FFF2-40B4-BE49-F238E27FC236}">
-                <a16:creationId xmlns:a16="http://schemas.microsoft.com/office/drawing/2014/main" id="{0B43CC6D-7A4B-40D4-8159-EC425100B481}"/>
+                <a16:creationId xmlns:a16="http://schemas.microsoft.com/office/drawing/2014/main" id="{14AD5B1C-B568-47A4-8947-7E718B609243}"/>
               </a:ext>
             </a:extLst>
           </p:cNvPr>
@@ -6419,7 +6419,7 @@
           <p:cNvPr id="7" name="c3-text-154">
             <a:extLst xmlns:a="http://schemas.openxmlformats.org/drawingml/2006/main">
               <a:ext uri="{FF2B5EF4-FFF2-40B4-BE49-F238E27FC236}">
-                <a16:creationId xmlns:a16="http://schemas.microsoft.com/office/drawing/2014/main" id="{AD21073E-22A4-4EEE-9017-65EB9D4BE9FC}"/>
+                <a16:creationId xmlns:a16="http://schemas.microsoft.com/office/drawing/2014/main" id="{EF62082D-AB45-4DA6-BDC0-D7770A5ACFD8}"/>
               </a:ext>
             </a:extLst>
           </p:cNvPr>
@@ -6476,7 +6476,7 @@
           <p:cNvPr id="8" name="c3-shape-155">
             <a:extLst xmlns:a="http://schemas.openxmlformats.org/drawingml/2006/main">
               <a:ext uri="{FF2B5EF4-FFF2-40B4-BE49-F238E27FC236}">
-                <a16:creationId xmlns:a16="http://schemas.microsoft.com/office/drawing/2014/main" id="{10F89FFA-6417-4B71-A37C-CC57B286C4B0}"/>
+                <a16:creationId xmlns:a16="http://schemas.microsoft.com/office/drawing/2014/main" id="{FCC6E5C9-E49B-4C2F-A68E-0A6574303420}"/>
               </a:ext>
             </a:extLst>
           </p:cNvPr>
@@ -6510,7 +6510,7 @@
           <p:cNvPr id="9" name="c3-shape-156">
             <a:extLst xmlns:a="http://schemas.openxmlformats.org/drawingml/2006/main">
               <a:ext uri="{FF2B5EF4-FFF2-40B4-BE49-F238E27FC236}">
-                <a16:creationId xmlns:a16="http://schemas.microsoft.com/office/drawing/2014/main" id="{8EF87CC5-5A06-4197-B05B-83BA24539A3F}"/>
+                <a16:creationId xmlns:a16="http://schemas.microsoft.com/office/drawing/2014/main" id="{E77882FD-EF3C-4308-B4A8-DE4C7A0E0D08}"/>
               </a:ext>
             </a:extLst>
           </p:cNvPr>
@@ -6542,7 +6542,7 @@
           <p:cNvPr id="10" name="c3-text-157">
             <a:extLst xmlns:a="http://schemas.openxmlformats.org/drawingml/2006/main">
               <a:ext uri="{FF2B5EF4-FFF2-40B4-BE49-F238E27FC236}">
-                <a16:creationId xmlns:a16="http://schemas.microsoft.com/office/drawing/2014/main" id="{0C73901F-ADC0-4174-A71C-0B01CD6E93EF}"/>
+                <a16:creationId xmlns:a16="http://schemas.microsoft.com/office/drawing/2014/main" id="{7B5ECE17-91B7-497F-85FD-864E2D7179EA}"/>
               </a:ext>
             </a:extLst>
           </p:cNvPr>
@@ -6599,7 +6599,7 @@
           <p:cNvPr id="11" name="c3-text-158">
             <a:extLst xmlns:a="http://schemas.openxmlformats.org/drawingml/2006/main">
               <a:ext uri="{FF2B5EF4-FFF2-40B4-BE49-F238E27FC236}">
-                <a16:creationId xmlns:a16="http://schemas.microsoft.com/office/drawing/2014/main" id="{EC0F88E0-DFCC-4FAA-9895-6915E646F2B1}"/>
+                <a16:creationId xmlns:a16="http://schemas.microsoft.com/office/drawing/2014/main" id="{63910BE3-6246-45A8-9910-B6F63F60ADE6}"/>
               </a:ext>
             </a:extLst>
           </p:cNvPr>
@@ -6656,7 +6656,7 @@
           <p:cNvPr id="12" name="c3-shape-159">
             <a:extLst xmlns:a="http://schemas.openxmlformats.org/drawingml/2006/main">
               <a:ext uri="{FF2B5EF4-FFF2-40B4-BE49-F238E27FC236}">
-                <a16:creationId xmlns:a16="http://schemas.microsoft.com/office/drawing/2014/main" id="{9DDFDC0E-ED43-471A-9D3A-5B10D9E5E1E2}"/>
+                <a16:creationId xmlns:a16="http://schemas.microsoft.com/office/drawing/2014/main" id="{EC0905EE-FC58-4A4E-8133-C55755C2AC88}"/>
               </a:ext>
             </a:extLst>
           </p:cNvPr>
@@ -6690,7 +6690,7 @@
           <p:cNvPr id="13" name="c3-shape-160">
             <a:extLst xmlns:a="http://schemas.openxmlformats.org/drawingml/2006/main">
               <a:ext uri="{FF2B5EF4-FFF2-40B4-BE49-F238E27FC236}">
-                <a16:creationId xmlns:a16="http://schemas.microsoft.com/office/drawing/2014/main" id="{DBDB65CF-4917-4C0D-B488-365AB3FD3D3B}"/>
+                <a16:creationId xmlns:a16="http://schemas.microsoft.com/office/drawing/2014/main" id="{7B61E350-6477-4933-AE36-0688E6866E4D}"/>
               </a:ext>
             </a:extLst>
           </p:cNvPr>
@@ -6722,7 +6722,7 @@
           <p:cNvPr id="14" name="c3-text-161">
             <a:extLst xmlns:a="http://schemas.openxmlformats.org/drawingml/2006/main">
               <a:ext uri="{FF2B5EF4-FFF2-40B4-BE49-F238E27FC236}">
-                <a16:creationId xmlns:a16="http://schemas.microsoft.com/office/drawing/2014/main" id="{EA78A52E-1CC2-497A-81B1-BA243202205D}"/>
+                <a16:creationId xmlns:a16="http://schemas.microsoft.com/office/drawing/2014/main" id="{F6D0ACCF-DA6A-4791-B6F2-320315EA4DFC}"/>
               </a:ext>
             </a:extLst>
           </p:cNvPr>
@@ -6779,7 +6779,7 @@
           <p:cNvPr id="15" name="c3-text-162">
             <a:extLst xmlns:a="http://schemas.openxmlformats.org/drawingml/2006/main">
               <a:ext uri="{FF2B5EF4-FFF2-40B4-BE49-F238E27FC236}">
-                <a16:creationId xmlns:a16="http://schemas.microsoft.com/office/drawing/2014/main" id="{27CD181E-FF27-4B6E-987C-B30AF80B91E8}"/>
+                <a16:creationId xmlns:a16="http://schemas.microsoft.com/office/drawing/2014/main" id="{C1C0DBA6-17FC-4034-B8A2-F8E4465CA5A4}"/>
               </a:ext>
             </a:extLst>
           </p:cNvPr>
@@ -6836,7 +6836,7 @@
           <p:cNvPr id="16" name="c3-shape-163">
             <a:extLst xmlns:a="http://schemas.openxmlformats.org/drawingml/2006/main">
               <a:ext uri="{FF2B5EF4-FFF2-40B4-BE49-F238E27FC236}">
-                <a16:creationId xmlns:a16="http://schemas.microsoft.com/office/drawing/2014/main" id="{A09D6C1F-5DBC-49B7-AFDB-41FFCEFFE278}"/>
+                <a16:creationId xmlns:a16="http://schemas.microsoft.com/office/drawing/2014/main" id="{13FCCCF0-88D3-4991-8CF9-A65F59907FE1}"/>
               </a:ext>
             </a:extLst>
           </p:cNvPr>
@@ -6870,7 +6870,7 @@
           <p:cNvPr id="17" name="c3-text-164">
             <a:extLst xmlns:a="http://schemas.openxmlformats.org/drawingml/2006/main">
               <a:ext uri="{FF2B5EF4-FFF2-40B4-BE49-F238E27FC236}">
-                <a16:creationId xmlns:a16="http://schemas.microsoft.com/office/drawing/2014/main" id="{C0E39CE0-BF8B-4653-BF64-CC2B06BCE776}"/>
+                <a16:creationId xmlns:a16="http://schemas.microsoft.com/office/drawing/2014/main" id="{AD0087E8-71B5-4D09-AF8B-E77E31E0795A}"/>
               </a:ext>
             </a:extLst>
           </p:cNvPr>
@@ -6924,10 +6924,10 @@
       </p:sp>
       <p:sp>
         <p:nvSpPr>
-          <p:cNvPr id="18" name="c3-text-322">
-            <a:extLst xmlns:a="http://schemas.openxmlformats.org/drawingml/2006/main">
-              <a:ext uri="{FF2B5EF4-FFF2-40B4-BE49-F238E27FC236}">
-                <a16:creationId xmlns:a16="http://schemas.microsoft.com/office/drawing/2014/main" id="{619F4FDF-1D62-4541-962B-E44210187610}"/>
+          <p:cNvPr id="18" name="c3-text-340">
+            <a:extLst xmlns:a="http://schemas.openxmlformats.org/drawingml/2006/main">
+              <a:ext uri="{FF2B5EF4-FFF2-40B4-BE49-F238E27FC236}">
+                <a16:creationId xmlns:a16="http://schemas.microsoft.com/office/drawing/2014/main" id="{AA2D8878-CB3D-404D-AEBF-6290ABB07D27}"/>
               </a:ext>
             </a:extLst>
           </p:cNvPr>
@@ -6982,7 +6982,7 @@
     </p:spTree>
     <p:extLst>
       <p:ext uri="{BB962C8B-B14F-4D97-AF65-F5344CB8AC3E}">
-        <p14:creationId xmlns:p14="http://schemas.microsoft.com/office/powerpoint/2010/main" val="1679719652"/>
+        <p14:creationId xmlns:p14="http://schemas.microsoft.com/office/powerpoint/2010/main" val="523308279"/>
       </p:ext>
     </p:extLst>
   </p:cSld>
@@ -7013,7 +7013,7 @@
           <p:cNvPr id="8" name="c3-text-165">
             <a:extLst xmlns:a="http://schemas.openxmlformats.org/drawingml/2006/main">
               <a:ext uri="{FF2B5EF4-FFF2-40B4-BE49-F238E27FC236}">
-                <a16:creationId xmlns:a16="http://schemas.microsoft.com/office/drawing/2014/main" id="{74087D5D-835E-4DBF-ABA8-F5A550B7C8F9}"/>
+                <a16:creationId xmlns:a16="http://schemas.microsoft.com/office/drawing/2014/main" id="{55CA7948-369C-4EDD-925C-764ABAB50DF3}"/>
               </a:ext>
             </a:extLst>
           </p:cNvPr>
@@ -7070,7 +7070,7 @@
           <p:cNvPr id="2" name="c3-text-166">
             <a:extLst xmlns:a="http://schemas.openxmlformats.org/drawingml/2006/main">
               <a:ext uri="{FF2B5EF4-FFF2-40B4-BE49-F238E27FC236}">
-                <a16:creationId xmlns:a16="http://schemas.microsoft.com/office/drawing/2014/main" id="{74A24560-5CF1-4533-8CB7-FFC58E174532}"/>
+                <a16:creationId xmlns:a16="http://schemas.microsoft.com/office/drawing/2014/main" id="{EA0A97EC-A7D4-4098-A10B-18BE72625E49}"/>
               </a:ext>
             </a:extLst>
           </p:cNvPr>
@@ -7127,7 +7127,7 @@
           <p:cNvPr id="3" name="c3-text-167">
             <a:extLst xmlns:a="http://schemas.openxmlformats.org/drawingml/2006/main">
               <a:ext uri="{FF2B5EF4-FFF2-40B4-BE49-F238E27FC236}">
-                <a16:creationId xmlns:a16="http://schemas.microsoft.com/office/drawing/2014/main" id="{EDE0B4EC-C790-41E8-BC69-82EEEF4A7820}"/>
+                <a16:creationId xmlns:a16="http://schemas.microsoft.com/office/drawing/2014/main" id="{E82C4835-F037-478E-B962-1B6BB285E5AC}"/>
               </a:ext>
             </a:extLst>
           </p:cNvPr>
@@ -7184,7 +7184,7 @@
           <p:cNvPr id="4" name="c3-text-168">
             <a:extLst xmlns:a="http://schemas.openxmlformats.org/drawingml/2006/main">
               <a:ext uri="{FF2B5EF4-FFF2-40B4-BE49-F238E27FC236}">
-                <a16:creationId xmlns:a16="http://schemas.microsoft.com/office/drawing/2014/main" id="{C6922525-BDBE-4187-B16B-7DED1B9F7D7A}"/>
+                <a16:creationId xmlns:a16="http://schemas.microsoft.com/office/drawing/2014/main" id="{8D367991-CCF2-4C13-A9C3-986DDD0D756D}"/>
               </a:ext>
             </a:extLst>
           </p:cNvPr>
@@ -7241,7 +7241,7 @@
           <p:cNvPr id="5" name="c3-text-169">
             <a:extLst xmlns:a="http://schemas.openxmlformats.org/drawingml/2006/main">
               <a:ext uri="{FF2B5EF4-FFF2-40B4-BE49-F238E27FC236}">
-                <a16:creationId xmlns:a16="http://schemas.microsoft.com/office/drawing/2014/main" id="{9702B361-A74F-492C-A2EE-A0350EB58C63}"/>
+                <a16:creationId xmlns:a16="http://schemas.microsoft.com/office/drawing/2014/main" id="{843273CB-568D-489F-8DA6-2502D7E3D26F}"/>
               </a:ext>
             </a:extLst>
           </p:cNvPr>
@@ -7298,7 +7298,7 @@
           <p:cNvPr id="6" name="c3-text-170">
             <a:extLst xmlns:a="http://schemas.openxmlformats.org/drawingml/2006/main">
               <a:ext uri="{FF2B5EF4-FFF2-40B4-BE49-F238E27FC236}">
-                <a16:creationId xmlns:a16="http://schemas.microsoft.com/office/drawing/2014/main" id="{E5F36BE4-D720-449F-AF87-EDAC97A0149D}"/>
+                <a16:creationId xmlns:a16="http://schemas.microsoft.com/office/drawing/2014/main" id="{95835677-C1E3-43EF-8F87-585FCD0453AD}"/>
               </a:ext>
             </a:extLst>
           </p:cNvPr>
@@ -7352,10 +7352,10 @@
       </p:sp>
       <p:sp>
         <p:nvSpPr>
-          <p:cNvPr id="7" name="c3-text-323">
-            <a:extLst xmlns:a="http://schemas.openxmlformats.org/drawingml/2006/main">
-              <a:ext uri="{FF2B5EF4-FFF2-40B4-BE49-F238E27FC236}">
-                <a16:creationId xmlns:a16="http://schemas.microsoft.com/office/drawing/2014/main" id="{4742ECE8-E8AD-41BB-90FE-6BFB030E72A3}"/>
+          <p:cNvPr id="7" name="c3-text-341">
+            <a:extLst xmlns:a="http://schemas.openxmlformats.org/drawingml/2006/main">
+              <a:ext uri="{FF2B5EF4-FFF2-40B4-BE49-F238E27FC236}">
+                <a16:creationId xmlns:a16="http://schemas.microsoft.com/office/drawing/2014/main" id="{F1D65AF2-3406-4D62-9926-90D0B034709E}"/>
               </a:ext>
             </a:extLst>
           </p:cNvPr>
@@ -7410,7 +7410,7 @@
     </p:spTree>
     <p:extLst>
       <p:ext uri="{BB962C8B-B14F-4D97-AF65-F5344CB8AC3E}">
-        <p14:creationId xmlns:p14="http://schemas.microsoft.com/office/powerpoint/2010/main" val="1875636353"/>
+        <p14:creationId xmlns:p14="http://schemas.microsoft.com/office/powerpoint/2010/main" val="604449495"/>
       </p:ext>
     </p:extLst>
   </p:cSld>
@@ -7441,7 +7441,7 @@
           <p:cNvPr id="26" name="c3-text-171">
             <a:extLst xmlns:a="http://schemas.openxmlformats.org/drawingml/2006/main">
               <a:ext uri="{FF2B5EF4-FFF2-40B4-BE49-F238E27FC236}">
-                <a16:creationId xmlns:a16="http://schemas.microsoft.com/office/drawing/2014/main" id="{6019EE5C-44D4-4385-B891-927EC518CA96}"/>
+                <a16:creationId xmlns:a16="http://schemas.microsoft.com/office/drawing/2014/main" id="{1C0025C9-B489-4DA4-ACF9-226D5E632326}"/>
               </a:ext>
             </a:extLst>
           </p:cNvPr>
@@ -7498,7 +7498,7 @@
           <p:cNvPr id="2" name="c3-text-172">
             <a:extLst xmlns:a="http://schemas.openxmlformats.org/drawingml/2006/main">
               <a:ext uri="{FF2B5EF4-FFF2-40B4-BE49-F238E27FC236}">
-                <a16:creationId xmlns:a16="http://schemas.microsoft.com/office/drawing/2014/main" id="{18D349D7-B7EB-467D-9845-9EFF4B8AFB0A}"/>
+                <a16:creationId xmlns:a16="http://schemas.microsoft.com/office/drawing/2014/main" id="{06FEEE20-03D5-475D-8BCE-ACE4E1253CAD}"/>
               </a:ext>
             </a:extLst>
           </p:cNvPr>
@@ -7555,7 +7555,7 @@
           <p:cNvPr id="3" name="c3-text-173">
             <a:extLst xmlns:a="http://schemas.openxmlformats.org/drawingml/2006/main">
               <a:ext uri="{FF2B5EF4-FFF2-40B4-BE49-F238E27FC236}">
-                <a16:creationId xmlns:a16="http://schemas.microsoft.com/office/drawing/2014/main" id="{5291AE6C-BB6A-401F-BBE8-B6DE98BBAF03}"/>
+                <a16:creationId xmlns:a16="http://schemas.microsoft.com/office/drawing/2014/main" id="{D98BB5A8-EACC-4843-89BC-E006F7E88ECF}"/>
               </a:ext>
             </a:extLst>
           </p:cNvPr>
@@ -7612,7 +7612,7 @@
           <p:cNvPr id="4" name="c3-shape-174">
             <a:extLst xmlns:a="http://schemas.openxmlformats.org/drawingml/2006/main">
               <a:ext uri="{FF2B5EF4-FFF2-40B4-BE49-F238E27FC236}">
-                <a16:creationId xmlns:a16="http://schemas.microsoft.com/office/drawing/2014/main" id="{7268DCF5-F986-4417-B342-554A579FB817}"/>
+                <a16:creationId xmlns:a16="http://schemas.microsoft.com/office/drawing/2014/main" id="{A9D6871C-FFAF-4EB8-B613-96DFAC9F9412}"/>
               </a:ext>
             </a:extLst>
           </p:cNvPr>
@@ -7646,7 +7646,7 @@
           <p:cNvPr id="5" name="c3-text-175">
             <a:extLst xmlns:a="http://schemas.openxmlformats.org/drawingml/2006/main">
               <a:ext uri="{FF2B5EF4-FFF2-40B4-BE49-F238E27FC236}">
-                <a16:creationId xmlns:a16="http://schemas.microsoft.com/office/drawing/2014/main" id="{12859D52-4F90-44F0-B2BB-0E56582D54B9}"/>
+                <a16:creationId xmlns:a16="http://schemas.microsoft.com/office/drawing/2014/main" id="{798766E3-A190-4112-A491-E5C617A98561}"/>
               </a:ext>
             </a:extLst>
           </p:cNvPr>
@@ -7703,7 +7703,7 @@
           <p:cNvPr id="6" name="c3-shape-176">
             <a:extLst xmlns:a="http://schemas.openxmlformats.org/drawingml/2006/main">
               <a:ext uri="{FF2B5EF4-FFF2-40B4-BE49-F238E27FC236}">
-                <a16:creationId xmlns:a16="http://schemas.microsoft.com/office/drawing/2014/main" id="{1D9BEF35-DD0B-45F4-8518-83A18D0D6E03}"/>
+                <a16:creationId xmlns:a16="http://schemas.microsoft.com/office/drawing/2014/main" id="{A6221423-9C2B-466C-937E-98464548A19F}"/>
               </a:ext>
             </a:extLst>
           </p:cNvPr>
@@ -7735,7 +7735,7 @@
           <p:cNvPr id="7" name="c3-shape-177">
             <a:extLst xmlns:a="http://schemas.openxmlformats.org/drawingml/2006/main">
               <a:ext uri="{FF2B5EF4-FFF2-40B4-BE49-F238E27FC236}">
-                <a16:creationId xmlns:a16="http://schemas.microsoft.com/office/drawing/2014/main" id="{98F0A9E5-D691-4355-B409-AFF1A4F986C1}"/>
+                <a16:creationId xmlns:a16="http://schemas.microsoft.com/office/drawing/2014/main" id="{E23106D6-DF68-401C-89B8-E0AB7F5C6EF1}"/>
               </a:ext>
             </a:extLst>
           </p:cNvPr>
@@ -7769,7 +7769,7 @@
           <p:cNvPr id="8" name="c3-text-178">
             <a:extLst xmlns:a="http://schemas.openxmlformats.org/drawingml/2006/main">
               <a:ext uri="{FF2B5EF4-FFF2-40B4-BE49-F238E27FC236}">
-                <a16:creationId xmlns:a16="http://schemas.microsoft.com/office/drawing/2014/main" id="{DA3B26F7-8368-4BA6-8BA8-2EDDE836C717}"/>
+                <a16:creationId xmlns:a16="http://schemas.microsoft.com/office/drawing/2014/main" id="{A3890762-AC3B-46B8-8043-FD2F323883B4}"/>
               </a:ext>
             </a:extLst>
           </p:cNvPr>
@@ -7826,7 +7826,7 @@
           <p:cNvPr id="9" name="c3-shape-179">
             <a:extLst xmlns:a="http://schemas.openxmlformats.org/drawingml/2006/main">
               <a:ext uri="{FF2B5EF4-FFF2-40B4-BE49-F238E27FC236}">
-                <a16:creationId xmlns:a16="http://schemas.microsoft.com/office/drawing/2014/main" id="{584F7772-103E-4A02-A4EE-1682BEE6DBA1}"/>
+                <a16:creationId xmlns:a16="http://schemas.microsoft.com/office/drawing/2014/main" id="{5F70CB96-86BC-40B7-A53F-41B13A4BBC6D}"/>
               </a:ext>
             </a:extLst>
           </p:cNvPr>
@@ -7858,7 +7858,7 @@
           <p:cNvPr id="10" name="c3-shape-180">
             <a:extLst xmlns:a="http://schemas.openxmlformats.org/drawingml/2006/main">
               <a:ext uri="{FF2B5EF4-FFF2-40B4-BE49-F238E27FC236}">
-                <a16:creationId xmlns:a16="http://schemas.microsoft.com/office/drawing/2014/main" id="{6C170663-0761-4D1A-BBE5-6AAC4C503DEC}"/>
+                <a16:creationId xmlns:a16="http://schemas.microsoft.com/office/drawing/2014/main" id="{6B2D00C4-9259-4A2F-8EDF-5409757495F2}"/>
               </a:ext>
             </a:extLst>
           </p:cNvPr>
@@ -7892,7 +7892,7 @@
           <p:cNvPr id="11" name="c3-text-181">
             <a:extLst xmlns:a="http://schemas.openxmlformats.org/drawingml/2006/main">
               <a:ext uri="{FF2B5EF4-FFF2-40B4-BE49-F238E27FC236}">
-                <a16:creationId xmlns:a16="http://schemas.microsoft.com/office/drawing/2014/main" id="{4D905D96-3C30-41A5-8A51-0B10B4ACC94D}"/>
+                <a16:creationId xmlns:a16="http://schemas.microsoft.com/office/drawing/2014/main" id="{D00FE0C8-57F5-4CC8-A177-66B520651706}"/>
               </a:ext>
             </a:extLst>
           </p:cNvPr>
@@ -7949,7 +7949,7 @@
           <p:cNvPr id="12" name="c3-text-182">
             <a:extLst xmlns:a="http://schemas.openxmlformats.org/drawingml/2006/main">
               <a:ext uri="{FF2B5EF4-FFF2-40B4-BE49-F238E27FC236}">
-                <a16:creationId xmlns:a16="http://schemas.microsoft.com/office/drawing/2014/main" id="{9D3CFC7D-9AE9-4B48-BCBD-C1AD1D17A00A}"/>
+                <a16:creationId xmlns:a16="http://schemas.microsoft.com/office/drawing/2014/main" id="{5C7ED2CD-AD89-4C25-9CED-688A48990FF9}"/>
               </a:ext>
             </a:extLst>
           </p:cNvPr>
@@ -8006,7 +8006,7 @@
           <p:cNvPr id="13" name="c3-shape-183">
             <a:extLst xmlns:a="http://schemas.openxmlformats.org/drawingml/2006/main">
               <a:ext uri="{FF2B5EF4-FFF2-40B4-BE49-F238E27FC236}">
-                <a16:creationId xmlns:a16="http://schemas.microsoft.com/office/drawing/2014/main" id="{322854E2-3920-46B6-B30B-426DF8F4AA97}"/>
+                <a16:creationId xmlns:a16="http://schemas.microsoft.com/office/drawing/2014/main" id="{4FD87C3B-CA10-48E1-BD12-6E88A6047E7A}"/>
               </a:ext>
             </a:extLst>
           </p:cNvPr>
@@ -8040,7 +8040,7 @@
           <p:cNvPr id="14" name="c3-text-184">
             <a:extLst xmlns:a="http://schemas.openxmlformats.org/drawingml/2006/main">
               <a:ext uri="{FF2B5EF4-FFF2-40B4-BE49-F238E27FC236}">
-                <a16:creationId xmlns:a16="http://schemas.microsoft.com/office/drawing/2014/main" id="{B0607065-5072-4881-BAA1-B88F38E95658}"/>
+                <a16:creationId xmlns:a16="http://schemas.microsoft.com/office/drawing/2014/main" id="{0EAA7B6B-68F8-4D20-9423-1E60E4261422}"/>
               </a:ext>
             </a:extLst>
           </p:cNvPr>
@@ -8097,7 +8097,7 @@
           <p:cNvPr id="15" name="c3-shape-185">
             <a:extLst xmlns:a="http://schemas.openxmlformats.org/drawingml/2006/main">
               <a:ext uri="{FF2B5EF4-FFF2-40B4-BE49-F238E27FC236}">
-                <a16:creationId xmlns:a16="http://schemas.microsoft.com/office/drawing/2014/main" id="{0D07F45E-441F-402D-8488-5586E1E94934}"/>
+                <a16:creationId xmlns:a16="http://schemas.microsoft.com/office/drawing/2014/main" id="{558E5D3F-CCB7-4F02-A721-0C54777B5A04}"/>
               </a:ext>
             </a:extLst>
           </p:cNvPr>
@@ -8129,7 +8129,7 @@
           <p:cNvPr id="16" name="c3-shape-186">
             <a:extLst xmlns:a="http://schemas.openxmlformats.org/drawingml/2006/main">
               <a:ext uri="{FF2B5EF4-FFF2-40B4-BE49-F238E27FC236}">
-                <a16:creationId xmlns:a16="http://schemas.microsoft.com/office/drawing/2014/main" id="{EDC8D76C-A267-4719-BA8A-E4D974AA2DD7}"/>
+                <a16:creationId xmlns:a16="http://schemas.microsoft.com/office/drawing/2014/main" id="{6F0E3A10-9D7D-4724-9FC6-CE5D792D5E94}"/>
               </a:ext>
             </a:extLst>
           </p:cNvPr>
@@ -8163,7 +8163,7 @@
           <p:cNvPr id="17" name="c3-text-187">
             <a:extLst xmlns:a="http://schemas.openxmlformats.org/drawingml/2006/main">
               <a:ext uri="{FF2B5EF4-FFF2-40B4-BE49-F238E27FC236}">
-                <a16:creationId xmlns:a16="http://schemas.microsoft.com/office/drawing/2014/main" id="{13BBB929-9979-459D-8498-B42DFD106732}"/>
+                <a16:creationId xmlns:a16="http://schemas.microsoft.com/office/drawing/2014/main" id="{4D6B8DAF-18E9-4A70-820E-5EB90F06340F}"/>
               </a:ext>
             </a:extLst>
           </p:cNvPr>
@@ -8220,7 +8220,7 @@
           <p:cNvPr id="18" name="c3-shape-188">
             <a:extLst xmlns:a="http://schemas.openxmlformats.org/drawingml/2006/main">
               <a:ext uri="{FF2B5EF4-FFF2-40B4-BE49-F238E27FC236}">
-                <a16:creationId xmlns:a16="http://schemas.microsoft.com/office/drawing/2014/main" id="{F897472A-A373-462B-8F17-C90147C1BC59}"/>
+                <a16:creationId xmlns:a16="http://schemas.microsoft.com/office/drawing/2014/main" id="{61EAE2AC-2E32-48DF-9D40-FF7508877A90}"/>
               </a:ext>
             </a:extLst>
           </p:cNvPr>
@@ -8252,7 +8252,7 @@
           <p:cNvPr id="19" name="c3-text-189">
             <a:extLst xmlns:a="http://schemas.openxmlformats.org/drawingml/2006/main">
               <a:ext uri="{FF2B5EF4-FFF2-40B4-BE49-F238E27FC236}">
-                <a16:creationId xmlns:a16="http://schemas.microsoft.com/office/drawing/2014/main" id="{1E537ECD-58D2-4993-B929-53AA9659D2FC}"/>
+                <a16:creationId xmlns:a16="http://schemas.microsoft.com/office/drawing/2014/main" id="{3FA043C3-4128-4F69-B67F-12A6F4A8DAE4}"/>
               </a:ext>
             </a:extLst>
           </p:cNvPr>
@@ -8309,7 +8309,7 @@
           <p:cNvPr id="20" name="c3-shape-190">
             <a:extLst xmlns:a="http://schemas.openxmlformats.org/drawingml/2006/main">
               <a:ext uri="{FF2B5EF4-FFF2-40B4-BE49-F238E27FC236}">
-                <a16:creationId xmlns:a16="http://schemas.microsoft.com/office/drawing/2014/main" id="{E47B317B-C927-454E-974F-39BA834E2438}"/>
+                <a16:creationId xmlns:a16="http://schemas.microsoft.com/office/drawing/2014/main" id="{221285FA-DAAA-484B-A5C4-56895A4A5861}"/>
               </a:ext>
             </a:extLst>
           </p:cNvPr>
@@ -8341,7 +8341,7 @@
           <p:cNvPr id="21" name="c3-shape-191">
             <a:extLst xmlns:a="http://schemas.openxmlformats.org/drawingml/2006/main">
               <a:ext uri="{FF2B5EF4-FFF2-40B4-BE49-F238E27FC236}">
-                <a16:creationId xmlns:a16="http://schemas.microsoft.com/office/drawing/2014/main" id="{FD88FD48-FC6A-4175-8730-C33CBF149C43}"/>
+                <a16:creationId xmlns:a16="http://schemas.microsoft.com/office/drawing/2014/main" id="{E9C66288-421F-4541-8D17-B93BC08F535A}"/>
               </a:ext>
             </a:extLst>
           </p:cNvPr>
@@ -8373,7 +8373,7 @@
           <p:cNvPr id="22" name="c3-shape-192">
             <a:extLst xmlns:a="http://schemas.openxmlformats.org/drawingml/2006/main">
               <a:ext uri="{FF2B5EF4-FFF2-40B4-BE49-F238E27FC236}">
-                <a16:creationId xmlns:a16="http://schemas.microsoft.com/office/drawing/2014/main" id="{AB6D8262-F6DA-4573-944C-797CEB9F187D}"/>
+                <a16:creationId xmlns:a16="http://schemas.microsoft.com/office/drawing/2014/main" id="{AE06A3EB-A118-42D0-920C-586DFDA149E5}"/>
               </a:ext>
             </a:extLst>
           </p:cNvPr>
@@ -8405,7 +8405,7 @@
           <p:cNvPr id="23" name="c3-text-193">
             <a:extLst xmlns:a="http://schemas.openxmlformats.org/drawingml/2006/main">
               <a:ext uri="{FF2B5EF4-FFF2-40B4-BE49-F238E27FC236}">
-                <a16:creationId xmlns:a16="http://schemas.microsoft.com/office/drawing/2014/main" id="{C8C95989-58F7-4B4A-99B1-0E1A96ADF5A6}"/>
+                <a16:creationId xmlns:a16="http://schemas.microsoft.com/office/drawing/2014/main" id="{1FB3DB64-FA1E-4E15-AD4B-484D2BA71288}"/>
               </a:ext>
             </a:extLst>
           </p:cNvPr>
@@ -8462,7 +8462,7 @@
           <p:cNvPr id="24" name="c3-text-194">
             <a:extLst xmlns:a="http://schemas.openxmlformats.org/drawingml/2006/main">
               <a:ext uri="{FF2B5EF4-FFF2-40B4-BE49-F238E27FC236}">
-                <a16:creationId xmlns:a16="http://schemas.microsoft.com/office/drawing/2014/main" id="{06F51AFE-7CA8-4D6C-B87D-D0AC76D45799}"/>
+                <a16:creationId xmlns:a16="http://schemas.microsoft.com/office/drawing/2014/main" id="{1AFF953A-DC83-4242-BB7F-22C2FB31B91E}"/>
               </a:ext>
             </a:extLst>
           </p:cNvPr>
@@ -8516,10 +8516,10 @@
       </p:sp>
       <p:sp>
         <p:nvSpPr>
-          <p:cNvPr id="25" name="c3-text-324">
-            <a:extLst xmlns:a="http://schemas.openxmlformats.org/drawingml/2006/main">
-              <a:ext uri="{FF2B5EF4-FFF2-40B4-BE49-F238E27FC236}">
-                <a16:creationId xmlns:a16="http://schemas.microsoft.com/office/drawing/2014/main" id="{E8F267D3-CF21-434A-AF2C-AEA02AF21DE8}"/>
+          <p:cNvPr id="25" name="c3-text-342">
+            <a:extLst xmlns:a="http://schemas.openxmlformats.org/drawingml/2006/main">
+              <a:ext uri="{FF2B5EF4-FFF2-40B4-BE49-F238E27FC236}">
+                <a16:creationId xmlns:a16="http://schemas.microsoft.com/office/drawing/2014/main" id="{BF7F942B-46A7-4A00-93DD-CD5276143524}"/>
               </a:ext>
             </a:extLst>
           </p:cNvPr>
@@ -8574,7 +8574,7 @@
     </p:spTree>
     <p:extLst>
       <p:ext uri="{BB962C8B-B14F-4D97-AF65-F5344CB8AC3E}">
-        <p14:creationId xmlns:p14="http://schemas.microsoft.com/office/powerpoint/2010/main" val="732418880"/>
+        <p14:creationId xmlns:p14="http://schemas.microsoft.com/office/powerpoint/2010/main" val="1390559699"/>
       </p:ext>
     </p:extLst>
   </p:cSld>
@@ -8605,7 +8605,7 @@
           <p:cNvPr id="10" name="c3-text-195">
             <a:extLst xmlns:a="http://schemas.openxmlformats.org/drawingml/2006/main">
               <a:ext uri="{FF2B5EF4-FFF2-40B4-BE49-F238E27FC236}">
-                <a16:creationId xmlns:a16="http://schemas.microsoft.com/office/drawing/2014/main" id="{203665FE-5548-42B8-B22D-94CD6F8AD095}"/>
+                <a16:creationId xmlns:a16="http://schemas.microsoft.com/office/drawing/2014/main" id="{CC5EE0E0-9BFC-43A4-965E-A92BAB761202}"/>
               </a:ext>
             </a:extLst>
           </p:cNvPr>
@@ -8662,7 +8662,7 @@
           <p:cNvPr id="2" name="c3-text-196">
             <a:extLst xmlns:a="http://schemas.openxmlformats.org/drawingml/2006/main">
               <a:ext uri="{FF2B5EF4-FFF2-40B4-BE49-F238E27FC236}">
-                <a16:creationId xmlns:a16="http://schemas.microsoft.com/office/drawing/2014/main" id="{4DC060CA-D51D-454C-8E36-95350D0F99A7}"/>
+                <a16:creationId xmlns:a16="http://schemas.microsoft.com/office/drawing/2014/main" id="{86112007-FA83-43F2-A09D-0340AA765E68}"/>
               </a:ext>
             </a:extLst>
           </p:cNvPr>
@@ -8719,7 +8719,7 @@
           <p:cNvPr id="3" name="c3-text-197">
             <a:extLst xmlns:a="http://schemas.openxmlformats.org/drawingml/2006/main">
               <a:ext uri="{FF2B5EF4-FFF2-40B4-BE49-F238E27FC236}">
-                <a16:creationId xmlns:a16="http://schemas.microsoft.com/office/drawing/2014/main" id="{9C6AC457-626D-47EE-B5E8-7A7941BC04A4}"/>
+                <a16:creationId xmlns:a16="http://schemas.microsoft.com/office/drawing/2014/main" id="{1B7225BE-7256-48AD-B269-15FCA60882ED}"/>
               </a:ext>
             </a:extLst>
           </p:cNvPr>
@@ -8776,7 +8776,7 @@
           <p:cNvPr id="4" name="c3-shape-198">
             <a:extLst xmlns:a="http://schemas.openxmlformats.org/drawingml/2006/main">
               <a:ext uri="{FF2B5EF4-FFF2-40B4-BE49-F238E27FC236}">
-                <a16:creationId xmlns:a16="http://schemas.microsoft.com/office/drawing/2014/main" id="{4A34CC17-357D-4AEE-853C-C76CFD6A89D8}"/>
+                <a16:creationId xmlns:a16="http://schemas.microsoft.com/office/drawing/2014/main" id="{83B51827-F0EB-4D5D-96CE-D81B65DE8BD8}"/>
               </a:ext>
             </a:extLst>
           </p:cNvPr>
@@ -8810,7 +8810,7 @@
           <p:cNvPr id="5" name="c3-text-199">
             <a:extLst xmlns:a="http://schemas.openxmlformats.org/drawingml/2006/main">
               <a:ext uri="{FF2B5EF4-FFF2-40B4-BE49-F238E27FC236}">
-                <a16:creationId xmlns:a16="http://schemas.microsoft.com/office/drawing/2014/main" id="{CA696BA0-6F58-4029-8F33-AF995F1CCBB3}"/>
+                <a16:creationId xmlns:a16="http://schemas.microsoft.com/office/drawing/2014/main" id="{6047E08F-6F81-415B-8C16-0983740F921D}"/>
               </a:ext>
             </a:extLst>
           </p:cNvPr>
@@ -9055,7 +9055,7 @@
           <p:cNvPr id="6" name="c3-text-200">
             <a:extLst xmlns:a="http://schemas.openxmlformats.org/drawingml/2006/main">
               <a:ext uri="{FF2B5EF4-FFF2-40B4-BE49-F238E27FC236}">
-                <a16:creationId xmlns:a16="http://schemas.microsoft.com/office/drawing/2014/main" id="{6A7519F0-8275-47A2-AF11-046CC6C1DCA0}"/>
+                <a16:creationId xmlns:a16="http://schemas.microsoft.com/office/drawing/2014/main" id="{F89ABD8B-0EAA-4E5C-8980-25D9063513CC}"/>
               </a:ext>
             </a:extLst>
           </p:cNvPr>
@@ -9112,7 +9112,7 @@
           <p:cNvPr id="7" name="c3-shape-201">
             <a:extLst xmlns:a="http://schemas.openxmlformats.org/drawingml/2006/main">
               <a:ext uri="{FF2B5EF4-FFF2-40B4-BE49-F238E27FC236}">
-                <a16:creationId xmlns:a16="http://schemas.microsoft.com/office/drawing/2014/main" id="{091E2B02-058C-4706-A90E-02D2E7E13D6C}"/>
+                <a16:creationId xmlns:a16="http://schemas.microsoft.com/office/drawing/2014/main" id="{B5AF999D-1D73-4D68-8663-F83D9F139321}"/>
               </a:ext>
             </a:extLst>
           </p:cNvPr>
@@ -9146,7 +9146,7 @@
           <p:cNvPr id="8" name="c3-text-202">
             <a:extLst xmlns:a="http://schemas.openxmlformats.org/drawingml/2006/main">
               <a:ext uri="{FF2B5EF4-FFF2-40B4-BE49-F238E27FC236}">
-                <a16:creationId xmlns:a16="http://schemas.microsoft.com/office/drawing/2014/main" id="{9DE942A3-0150-45C9-83F3-2847694A8DB0}"/>
+                <a16:creationId xmlns:a16="http://schemas.microsoft.com/office/drawing/2014/main" id="{F1B00882-E237-481A-A17E-FD7E2549ABAC}"/>
               </a:ext>
             </a:extLst>
           </p:cNvPr>
@@ -9490,10 +9490,10 @@
       </p:sp>
       <p:sp>
         <p:nvSpPr>
-          <p:cNvPr id="9" name="c3-text-325">
-            <a:extLst xmlns:a="http://schemas.openxmlformats.org/drawingml/2006/main">
-              <a:ext uri="{FF2B5EF4-FFF2-40B4-BE49-F238E27FC236}">
-                <a16:creationId xmlns:a16="http://schemas.microsoft.com/office/drawing/2014/main" id="{82534A44-F731-4C49-ADFC-EFD848F819FD}"/>
+          <p:cNvPr id="9" name="c3-text-343">
+            <a:extLst xmlns:a="http://schemas.openxmlformats.org/drawingml/2006/main">
+              <a:ext uri="{FF2B5EF4-FFF2-40B4-BE49-F238E27FC236}">
+                <a16:creationId xmlns:a16="http://schemas.microsoft.com/office/drawing/2014/main" id="{5D295146-49B7-480F-8813-CDD79D70A844}"/>
               </a:ext>
             </a:extLst>
           </p:cNvPr>
@@ -9548,7 +9548,7 @@
     </p:spTree>
     <p:extLst>
       <p:ext uri="{BB962C8B-B14F-4D97-AF65-F5344CB8AC3E}">
-        <p14:creationId xmlns:p14="http://schemas.microsoft.com/office/powerpoint/2010/main" val="1267360527"/>
+        <p14:creationId xmlns:p14="http://schemas.microsoft.com/office/powerpoint/2010/main" val="1055849026"/>
       </p:ext>
     </p:extLst>
   </p:cSld>
@@ -9579,7 +9579,7 @@
           <p:cNvPr id="9" name="c3-text-203">
             <a:extLst xmlns:a="http://schemas.openxmlformats.org/drawingml/2006/main">
               <a:ext uri="{FF2B5EF4-FFF2-40B4-BE49-F238E27FC236}">
-                <a16:creationId xmlns:a16="http://schemas.microsoft.com/office/drawing/2014/main" id="{1A12218C-C883-4CB4-A773-53B42741229B}"/>
+                <a16:creationId xmlns:a16="http://schemas.microsoft.com/office/drawing/2014/main" id="{59A9464B-1AB9-4F48-8B59-6A79D1C8BBED}"/>
               </a:ext>
             </a:extLst>
           </p:cNvPr>
@@ -9636,7 +9636,7 @@
           <p:cNvPr id="2" name="c3-text-204">
             <a:extLst xmlns:a="http://schemas.openxmlformats.org/drawingml/2006/main">
               <a:ext uri="{FF2B5EF4-FFF2-40B4-BE49-F238E27FC236}">
-                <a16:creationId xmlns:a16="http://schemas.microsoft.com/office/drawing/2014/main" id="{8605535B-3307-4BCE-B3D1-75161E3243B5}"/>
+                <a16:creationId xmlns:a16="http://schemas.microsoft.com/office/drawing/2014/main" id="{77B6C96E-E5D9-4ECD-8606-E0718BAFEC56}"/>
               </a:ext>
             </a:extLst>
           </p:cNvPr>
@@ -9693,7 +9693,7 @@
           <p:cNvPr id="3" name="c3-text-205">
             <a:extLst xmlns:a="http://schemas.openxmlformats.org/drawingml/2006/main">
               <a:ext uri="{FF2B5EF4-FFF2-40B4-BE49-F238E27FC236}">
-                <a16:creationId xmlns:a16="http://schemas.microsoft.com/office/drawing/2014/main" id="{EC3D0853-DDB8-4C9A-BDFB-7DD9DB49B069}"/>
+                <a16:creationId xmlns:a16="http://schemas.microsoft.com/office/drawing/2014/main" id="{11532CA1-1B0C-458C-96DC-317E949D3049}"/>
               </a:ext>
             </a:extLst>
           </p:cNvPr>
@@ -9748,10 +9748,10 @@
       <p:sp>
         <p:nvSpPr>
           <p:cNvPr id="4" name="c3-text-206">
-            <a:hlinkClick xmlns:r="http://schemas.openxmlformats.org/officeDocument/2006/relationships" xmlns:a="http://schemas.openxmlformats.org/drawingml/2006/main" r:id="R700acb241c874853"/>
-            <a:extLst xmlns:a="http://schemas.openxmlformats.org/drawingml/2006/main">
-              <a:ext uri="{FF2B5EF4-FFF2-40B4-BE49-F238E27FC236}">
-                <a16:creationId xmlns:a16="http://schemas.microsoft.com/office/drawing/2014/main" id="{CE98F11E-3478-4361-8A97-4CBC534E1602}"/>
+            <a:hlinkClick xmlns:r="http://schemas.openxmlformats.org/officeDocument/2006/relationships" xmlns:a="http://schemas.openxmlformats.org/drawingml/2006/main" r:id="Re7f288d805984b8b"/>
+            <a:extLst xmlns:a="http://schemas.openxmlformats.org/drawingml/2006/main">
+              <a:ext uri="{FF2B5EF4-FFF2-40B4-BE49-F238E27FC236}">
+                <a16:creationId xmlns:a16="http://schemas.microsoft.com/office/drawing/2014/main" id="{8F4B696F-21B3-48FF-BABC-ED2DFF5FB647}"/>
               </a:ext>
             </a:extLst>
           </p:cNvPr>
@@ -9808,7 +9808,7 @@
           <p:cNvPr id="5" name="c3-text-207">
             <a:extLst xmlns:a="http://schemas.openxmlformats.org/drawingml/2006/main">
               <a:ext uri="{FF2B5EF4-FFF2-40B4-BE49-F238E27FC236}">
-                <a16:creationId xmlns:a16="http://schemas.microsoft.com/office/drawing/2014/main" id="{84CE2A72-6DBF-4835-9C61-861D379FAD6D}"/>
+                <a16:creationId xmlns:a16="http://schemas.microsoft.com/office/drawing/2014/main" id="{1E65EDA9-9FCC-4181-928F-82B8F8E5EACF}"/>
               </a:ext>
             </a:extLst>
           </p:cNvPr>
@@ -9863,10 +9863,10 @@
       <p:sp>
         <p:nvSpPr>
           <p:cNvPr id="6" name="c3-text-208">
-            <a:hlinkClick xmlns:r="http://schemas.openxmlformats.org/officeDocument/2006/relationships" xmlns:a="http://schemas.openxmlformats.org/drawingml/2006/main" r:id="R0140a672fc7040e5"/>
-            <a:extLst xmlns:a="http://schemas.openxmlformats.org/drawingml/2006/main">
-              <a:ext uri="{FF2B5EF4-FFF2-40B4-BE49-F238E27FC236}">
-                <a16:creationId xmlns:a16="http://schemas.microsoft.com/office/drawing/2014/main" id="{B90C5ED4-5560-4016-8FC3-720D2F2BE568}"/>
+            <a:hlinkClick xmlns:r="http://schemas.openxmlformats.org/officeDocument/2006/relationships" xmlns:a="http://schemas.openxmlformats.org/drawingml/2006/main" r:id="Rc7c9747f50e9437f"/>
+            <a:extLst xmlns:a="http://schemas.openxmlformats.org/drawingml/2006/main">
+              <a:ext uri="{FF2B5EF4-FFF2-40B4-BE49-F238E27FC236}">
+                <a16:creationId xmlns:a16="http://schemas.microsoft.com/office/drawing/2014/main" id="{3D8DC705-4C75-4E66-A4E2-C9DF2E54E32F}"/>
               </a:ext>
             </a:extLst>
           </p:cNvPr>
@@ -9923,7 +9923,7 @@
           <p:cNvPr id="7" name="c3-text-209">
             <a:extLst xmlns:a="http://schemas.openxmlformats.org/drawingml/2006/main">
               <a:ext uri="{FF2B5EF4-FFF2-40B4-BE49-F238E27FC236}">
-                <a16:creationId xmlns:a16="http://schemas.microsoft.com/office/drawing/2014/main" id="{6947C0CE-5CF9-4B5E-9976-AE1A2431D53B}"/>
+                <a16:creationId xmlns:a16="http://schemas.microsoft.com/office/drawing/2014/main" id="{D2B37BD4-832C-4A17-9469-3A855ED47AD8}"/>
               </a:ext>
             </a:extLst>
           </p:cNvPr>
@@ -9977,10 +9977,10 @@
       </p:sp>
       <p:sp>
         <p:nvSpPr>
-          <p:cNvPr id="8" name="c3-text-326">
-            <a:extLst xmlns:a="http://schemas.openxmlformats.org/drawingml/2006/main">
-              <a:ext uri="{FF2B5EF4-FFF2-40B4-BE49-F238E27FC236}">
-                <a16:creationId xmlns:a16="http://schemas.microsoft.com/office/drawing/2014/main" id="{81427726-C953-446A-92EA-618D56DADEC1}"/>
+          <p:cNvPr id="8" name="c3-text-344">
+            <a:extLst xmlns:a="http://schemas.openxmlformats.org/drawingml/2006/main">
+              <a:ext uri="{FF2B5EF4-FFF2-40B4-BE49-F238E27FC236}">
+                <a16:creationId xmlns:a16="http://schemas.microsoft.com/office/drawing/2014/main" id="{9BD5A25A-BD2B-4E61-A0F0-709AFB5B9C9B}"/>
               </a:ext>
             </a:extLst>
           </p:cNvPr>
@@ -10035,7 +10035,7 @@
     </p:spTree>
     <p:extLst>
       <p:ext uri="{BB962C8B-B14F-4D97-AF65-F5344CB8AC3E}">
-        <p14:creationId xmlns:p14="http://schemas.microsoft.com/office/powerpoint/2010/main" val="292981810"/>
+        <p14:creationId xmlns:p14="http://schemas.microsoft.com/office/powerpoint/2010/main" val="1805647806"/>
       </p:ext>
     </p:extLst>
   </p:cSld>
@@ -10066,7 +10066,7 @@
           <p:cNvPr id="9" name="c3-text-210">
             <a:extLst xmlns:a="http://schemas.openxmlformats.org/drawingml/2006/main">
               <a:ext uri="{FF2B5EF4-FFF2-40B4-BE49-F238E27FC236}">
-                <a16:creationId xmlns:a16="http://schemas.microsoft.com/office/drawing/2014/main" id="{9A4C4ED3-F8B4-4B7C-94F9-E9338F189F3C}"/>
+                <a16:creationId xmlns:a16="http://schemas.microsoft.com/office/drawing/2014/main" id="{315C4C44-5E8F-4806-B985-8899F8663A27}"/>
               </a:ext>
             </a:extLst>
           </p:cNvPr>
@@ -10123,7 +10123,7 @@
           <p:cNvPr id="2" name="c3-text-211">
             <a:extLst xmlns:a="http://schemas.openxmlformats.org/drawingml/2006/main">
               <a:ext uri="{FF2B5EF4-FFF2-40B4-BE49-F238E27FC236}">
-                <a16:creationId xmlns:a16="http://schemas.microsoft.com/office/drawing/2014/main" id="{BA90458C-88EA-46C7-BAE8-3F9EA8306AE3}"/>
+                <a16:creationId xmlns:a16="http://schemas.microsoft.com/office/drawing/2014/main" id="{8365F425-A180-4F18-A95B-65CE833B5BDE}"/>
               </a:ext>
             </a:extLst>
           </p:cNvPr>
@@ -10180,7 +10180,7 @@
           <p:cNvPr id="3" name="c3-text-212">
             <a:extLst xmlns:a="http://schemas.openxmlformats.org/drawingml/2006/main">
               <a:ext uri="{FF2B5EF4-FFF2-40B4-BE49-F238E27FC236}">
-                <a16:creationId xmlns:a16="http://schemas.microsoft.com/office/drawing/2014/main" id="{AA79FAE8-C68F-46D4-BE64-5F72E379B5E0}"/>
+                <a16:creationId xmlns:a16="http://schemas.microsoft.com/office/drawing/2014/main" id="{9EAC5B92-5151-4234-917A-A8F3EA88A0D3}"/>
               </a:ext>
             </a:extLst>
           </p:cNvPr>
@@ -10237,7 +10237,7 @@
           <p:cNvPr id="4" name="c3-text-213">
             <a:extLst xmlns:a="http://schemas.openxmlformats.org/drawingml/2006/main">
               <a:ext uri="{FF2B5EF4-FFF2-40B4-BE49-F238E27FC236}">
-                <a16:creationId xmlns:a16="http://schemas.microsoft.com/office/drawing/2014/main" id="{87273C7D-8632-4796-94A8-67A44625089F}"/>
+                <a16:creationId xmlns:a16="http://schemas.microsoft.com/office/drawing/2014/main" id="{3FAA0606-11E5-49CC-A879-39DBD4AB63DF}"/>
               </a:ext>
             </a:extLst>
           </p:cNvPr>
@@ -10294,7 +10294,7 @@
           <p:cNvPr id="5" name="c3-shape-214">
             <a:extLst xmlns:a="http://schemas.openxmlformats.org/drawingml/2006/main">
               <a:ext uri="{FF2B5EF4-FFF2-40B4-BE49-F238E27FC236}">
-                <a16:creationId xmlns:a16="http://schemas.microsoft.com/office/drawing/2014/main" id="{939CB703-6A1C-48E6-9942-F8DA648F9BD3}"/>
+                <a16:creationId xmlns:a16="http://schemas.microsoft.com/office/drawing/2014/main" id="{648EE26E-AD12-4255-B4FA-2C8D74D5EB71}"/>
               </a:ext>
             </a:extLst>
           </p:cNvPr>
@@ -10328,7 +10328,7 @@
           <p:cNvPr id="6" name="c3-text-215">
             <a:extLst xmlns:a="http://schemas.openxmlformats.org/drawingml/2006/main">
               <a:ext uri="{FF2B5EF4-FFF2-40B4-BE49-F238E27FC236}">
-                <a16:creationId xmlns:a16="http://schemas.microsoft.com/office/drawing/2014/main" id="{591DA5D9-4951-4D27-ADCF-B34C8218A32F}"/>
+                <a16:creationId xmlns:a16="http://schemas.microsoft.com/office/drawing/2014/main" id="{046061E8-87BA-4404-A079-37018FA0FD7A}"/>
               </a:ext>
             </a:extLst>
           </p:cNvPr>
@@ -10396,7 +10396,7 @@
           <p:cNvPr id="7" name="c3-text-216">
             <a:extLst xmlns:a="http://schemas.openxmlformats.org/drawingml/2006/main">
               <a:ext uri="{FF2B5EF4-FFF2-40B4-BE49-F238E27FC236}">
-                <a16:creationId xmlns:a16="http://schemas.microsoft.com/office/drawing/2014/main" id="{9674AA66-47DD-4592-BCE8-438091E9E05C}"/>
+                <a16:creationId xmlns:a16="http://schemas.microsoft.com/office/drawing/2014/main" id="{30B0D134-CC21-46AF-B1E8-BE6DB5BE1145}"/>
               </a:ext>
             </a:extLst>
           </p:cNvPr>
@@ -10450,10 +10450,10 @@
       </p:sp>
       <p:sp>
         <p:nvSpPr>
-          <p:cNvPr id="8" name="c3-text-327">
-            <a:extLst xmlns:a="http://schemas.openxmlformats.org/drawingml/2006/main">
-              <a:ext uri="{FF2B5EF4-FFF2-40B4-BE49-F238E27FC236}">
-                <a16:creationId xmlns:a16="http://schemas.microsoft.com/office/drawing/2014/main" id="{1A3FF6D0-35A1-42CC-9137-3C1F8B4A7C8F}"/>
+          <p:cNvPr id="8" name="c3-text-345">
+            <a:extLst xmlns:a="http://schemas.openxmlformats.org/drawingml/2006/main">
+              <a:ext uri="{FF2B5EF4-FFF2-40B4-BE49-F238E27FC236}">
+                <a16:creationId xmlns:a16="http://schemas.microsoft.com/office/drawing/2014/main" id="{D11E0E51-8FC5-4E47-AD10-390112C87F4D}"/>
               </a:ext>
             </a:extLst>
           </p:cNvPr>
@@ -10508,7 +10508,7 @@
     </p:spTree>
     <p:extLst>
       <p:ext uri="{BB962C8B-B14F-4D97-AF65-F5344CB8AC3E}">
-        <p14:creationId xmlns:p14="http://schemas.microsoft.com/office/powerpoint/2010/main" val="427851398"/>
+        <p14:creationId xmlns:p14="http://schemas.microsoft.com/office/powerpoint/2010/main" val="171767742"/>
       </p:ext>
     </p:extLst>
   </p:cSld>
@@ -10539,7 +10539,7 @@
           <p:cNvPr id="19" name="c3-text-1">
             <a:extLst xmlns:a="http://schemas.openxmlformats.org/drawingml/2006/main">
               <a:ext uri="{FF2B5EF4-FFF2-40B4-BE49-F238E27FC236}">
-                <a16:creationId xmlns:a16="http://schemas.microsoft.com/office/drawing/2014/main" id="{75E82D30-1395-46B4-84F6-A8A82D906336}"/>
+                <a16:creationId xmlns:a16="http://schemas.microsoft.com/office/drawing/2014/main" id="{1A63C37B-EB87-4A53-AACE-736CC0CAC3BC}"/>
               </a:ext>
             </a:extLst>
           </p:cNvPr>
@@ -10596,7 +10596,7 @@
           <p:cNvPr id="2" name="c3-text-2">
             <a:extLst xmlns:a="http://schemas.openxmlformats.org/drawingml/2006/main">
               <a:ext uri="{FF2B5EF4-FFF2-40B4-BE49-F238E27FC236}">
-                <a16:creationId xmlns:a16="http://schemas.microsoft.com/office/drawing/2014/main" id="{7B7A91F1-807E-4628-976C-495E56F98E8F}"/>
+                <a16:creationId xmlns:a16="http://schemas.microsoft.com/office/drawing/2014/main" id="{C971385F-CB35-4F72-B268-C99DAC5E2D6D}"/>
               </a:ext>
             </a:extLst>
           </p:cNvPr>
@@ -10653,7 +10653,7 @@
           <p:cNvPr id="3" name="c3-text-3">
             <a:extLst xmlns:a="http://schemas.openxmlformats.org/drawingml/2006/main">
               <a:ext uri="{FF2B5EF4-FFF2-40B4-BE49-F238E27FC236}">
-                <a16:creationId xmlns:a16="http://schemas.microsoft.com/office/drawing/2014/main" id="{0F14D7AD-781A-4566-9C76-5D4BF9613582}"/>
+                <a16:creationId xmlns:a16="http://schemas.microsoft.com/office/drawing/2014/main" id="{154E1341-50A7-40BE-9EF1-E55007716046}"/>
               </a:ext>
             </a:extLst>
           </p:cNvPr>
@@ -10710,7 +10710,7 @@
           <p:cNvPr id="4" name="c3-shape-4">
             <a:extLst xmlns:a="http://schemas.openxmlformats.org/drawingml/2006/main">
               <a:ext uri="{FF2B5EF4-FFF2-40B4-BE49-F238E27FC236}">
-                <a16:creationId xmlns:a16="http://schemas.microsoft.com/office/drawing/2014/main" id="{00C629C2-0E67-41E6-AAA7-ED5753111F0E}"/>
+                <a16:creationId xmlns:a16="http://schemas.microsoft.com/office/drawing/2014/main" id="{A749E67A-6832-4B8C-A0F2-7F088A096D82}"/>
               </a:ext>
             </a:extLst>
           </p:cNvPr>
@@ -10744,7 +10744,7 @@
           <p:cNvPr id="5" name="c3-text-5">
             <a:extLst xmlns:a="http://schemas.openxmlformats.org/drawingml/2006/main">
               <a:ext uri="{FF2B5EF4-FFF2-40B4-BE49-F238E27FC236}">
-                <a16:creationId xmlns:a16="http://schemas.microsoft.com/office/drawing/2014/main" id="{79BB6DEE-891D-4894-B07A-522D84347376}"/>
+                <a16:creationId xmlns:a16="http://schemas.microsoft.com/office/drawing/2014/main" id="{925E1836-8CF9-49E5-9EB8-5A9B2434854C}"/>
               </a:ext>
             </a:extLst>
           </p:cNvPr>
@@ -10824,7 +10824,7 @@
           <p:cNvPr id="6" name="c3-shape-6">
             <a:extLst xmlns:a="http://schemas.openxmlformats.org/drawingml/2006/main">
               <a:ext uri="{FF2B5EF4-FFF2-40B4-BE49-F238E27FC236}">
-                <a16:creationId xmlns:a16="http://schemas.microsoft.com/office/drawing/2014/main" id="{FAFEBF8E-9F14-4681-88A4-51A743520E21}"/>
+                <a16:creationId xmlns:a16="http://schemas.microsoft.com/office/drawing/2014/main" id="{9F3837AB-835C-4AA9-A36F-EF94BD9B8CF8}"/>
               </a:ext>
             </a:extLst>
           </p:cNvPr>
@@ -10856,7 +10856,7 @@
           <p:cNvPr id="7" name="c3-shape-7">
             <a:extLst xmlns:a="http://schemas.openxmlformats.org/drawingml/2006/main">
               <a:ext uri="{FF2B5EF4-FFF2-40B4-BE49-F238E27FC236}">
-                <a16:creationId xmlns:a16="http://schemas.microsoft.com/office/drawing/2014/main" id="{84776253-3F21-4020-A8E7-F5F0D44DDF97}"/>
+                <a16:creationId xmlns:a16="http://schemas.microsoft.com/office/drawing/2014/main" id="{B29E185A-6D10-4A12-BA54-1778B88E8E17}"/>
               </a:ext>
             </a:extLst>
           </p:cNvPr>
@@ -10890,7 +10890,7 @@
           <p:cNvPr id="8" name="c3-text-8">
             <a:extLst xmlns:a="http://schemas.openxmlformats.org/drawingml/2006/main">
               <a:ext uri="{FF2B5EF4-FFF2-40B4-BE49-F238E27FC236}">
-                <a16:creationId xmlns:a16="http://schemas.microsoft.com/office/drawing/2014/main" id="{F359791B-55FF-4510-AB54-7C6524E4C4E5}"/>
+                <a16:creationId xmlns:a16="http://schemas.microsoft.com/office/drawing/2014/main" id="{E62D980C-709F-4FD6-AD7B-8FC38AFB87D5}"/>
               </a:ext>
             </a:extLst>
           </p:cNvPr>
@@ -10970,7 +10970,7 @@
           <p:cNvPr id="9" name="c3-shape-9">
             <a:extLst xmlns:a="http://schemas.openxmlformats.org/drawingml/2006/main">
               <a:ext uri="{FF2B5EF4-FFF2-40B4-BE49-F238E27FC236}">
-                <a16:creationId xmlns:a16="http://schemas.microsoft.com/office/drawing/2014/main" id="{17F046F8-A78A-4171-B87E-A13FE8446DC1}"/>
+                <a16:creationId xmlns:a16="http://schemas.microsoft.com/office/drawing/2014/main" id="{F0DD240F-7882-45C3-B8EC-DE71E3191F52}"/>
               </a:ext>
             </a:extLst>
           </p:cNvPr>
@@ -11002,7 +11002,7 @@
           <p:cNvPr id="10" name="c3-shape-10">
             <a:extLst xmlns:a="http://schemas.openxmlformats.org/drawingml/2006/main">
               <a:ext uri="{FF2B5EF4-FFF2-40B4-BE49-F238E27FC236}">
-                <a16:creationId xmlns:a16="http://schemas.microsoft.com/office/drawing/2014/main" id="{129B2D72-A613-4A2C-BC40-25645A540650}"/>
+                <a16:creationId xmlns:a16="http://schemas.microsoft.com/office/drawing/2014/main" id="{90F96ACE-CDDE-4A80-8DBA-E996B79EF612}"/>
               </a:ext>
             </a:extLst>
           </p:cNvPr>
@@ -11036,7 +11036,7 @@
           <p:cNvPr id="11" name="c3-text-11">
             <a:extLst xmlns:a="http://schemas.openxmlformats.org/drawingml/2006/main">
               <a:ext uri="{FF2B5EF4-FFF2-40B4-BE49-F238E27FC236}">
-                <a16:creationId xmlns:a16="http://schemas.microsoft.com/office/drawing/2014/main" id="{A64A08FF-4C08-46EE-937A-7EC3E96E8C27}"/>
+                <a16:creationId xmlns:a16="http://schemas.microsoft.com/office/drawing/2014/main" id="{D98E2F05-16A6-44C2-80C0-023A511466CC}"/>
               </a:ext>
             </a:extLst>
           </p:cNvPr>
@@ -11116,7 +11116,7 @@
           <p:cNvPr id="12" name="c3-shape-12">
             <a:extLst xmlns:a="http://schemas.openxmlformats.org/drawingml/2006/main">
               <a:ext uri="{FF2B5EF4-FFF2-40B4-BE49-F238E27FC236}">
-                <a16:creationId xmlns:a16="http://schemas.microsoft.com/office/drawing/2014/main" id="{484EA26E-EAB8-4477-9AD8-244981015350}"/>
+                <a16:creationId xmlns:a16="http://schemas.microsoft.com/office/drawing/2014/main" id="{0CD49E03-53B6-4BBD-B44F-E35AC572FD99}"/>
               </a:ext>
             </a:extLst>
           </p:cNvPr>
@@ -11148,7 +11148,7 @@
           <p:cNvPr id="13" name="c3-shape-13">
             <a:extLst xmlns:a="http://schemas.openxmlformats.org/drawingml/2006/main">
               <a:ext uri="{FF2B5EF4-FFF2-40B4-BE49-F238E27FC236}">
-                <a16:creationId xmlns:a16="http://schemas.microsoft.com/office/drawing/2014/main" id="{E5928EDF-600B-4065-9B97-150EF3E00D11}"/>
+                <a16:creationId xmlns:a16="http://schemas.microsoft.com/office/drawing/2014/main" id="{0628C058-43B1-425E-A955-655986211456}"/>
               </a:ext>
             </a:extLst>
           </p:cNvPr>
@@ -11182,7 +11182,7 @@
           <p:cNvPr id="14" name="c3-text-14">
             <a:extLst xmlns:a="http://schemas.openxmlformats.org/drawingml/2006/main">
               <a:ext uri="{FF2B5EF4-FFF2-40B4-BE49-F238E27FC236}">
-                <a16:creationId xmlns:a16="http://schemas.microsoft.com/office/drawing/2014/main" id="{D188FA71-95D7-4796-AE2D-4335C867C39A}"/>
+                <a16:creationId xmlns:a16="http://schemas.microsoft.com/office/drawing/2014/main" id="{A4D5758E-C63F-44BF-9E4F-4D1DFF1B519D}"/>
               </a:ext>
             </a:extLst>
           </p:cNvPr>
@@ -11262,7 +11262,7 @@
           <p:cNvPr id="15" name="c3-shape-15">
             <a:extLst xmlns:a="http://schemas.openxmlformats.org/drawingml/2006/main">
               <a:ext uri="{FF2B5EF4-FFF2-40B4-BE49-F238E27FC236}">
-                <a16:creationId xmlns:a16="http://schemas.microsoft.com/office/drawing/2014/main" id="{DE458AC3-6967-45E2-8F37-1176D23A6D4D}"/>
+                <a16:creationId xmlns:a16="http://schemas.microsoft.com/office/drawing/2014/main" id="{FD99FBF5-943B-4D0E-BC22-06938DE1FA5F}"/>
               </a:ext>
             </a:extLst>
           </p:cNvPr>
@@ -11296,7 +11296,7 @@
           <p:cNvPr id="16" name="c3-text-16">
             <a:extLst xmlns:a="http://schemas.openxmlformats.org/drawingml/2006/main">
               <a:ext uri="{FF2B5EF4-FFF2-40B4-BE49-F238E27FC236}">
-                <a16:creationId xmlns:a16="http://schemas.microsoft.com/office/drawing/2014/main" id="{092EAD84-E641-4C0B-A85E-190ADDE4C41C}"/>
+                <a16:creationId xmlns:a16="http://schemas.microsoft.com/office/drawing/2014/main" id="{5792E4B1-8B6F-477A-BFE2-44C9CA01BB06}"/>
               </a:ext>
             </a:extLst>
           </p:cNvPr>
@@ -11353,7 +11353,7 @@
           <p:cNvPr id="17" name="c3-text-17">
             <a:extLst xmlns:a="http://schemas.openxmlformats.org/drawingml/2006/main">
               <a:ext uri="{FF2B5EF4-FFF2-40B4-BE49-F238E27FC236}">
-                <a16:creationId xmlns:a16="http://schemas.microsoft.com/office/drawing/2014/main" id="{86C335CF-32A3-43A7-9EA8-4F35C8A9ED59}"/>
+                <a16:creationId xmlns:a16="http://schemas.microsoft.com/office/drawing/2014/main" id="{81468DCA-8D01-4710-9A57-B1108367D68C}"/>
               </a:ext>
             </a:extLst>
           </p:cNvPr>
@@ -11407,10 +11407,10 @@
       </p:sp>
       <p:sp>
         <p:nvSpPr>
-          <p:cNvPr id="18" name="c3-text-310">
-            <a:extLst xmlns:a="http://schemas.openxmlformats.org/drawingml/2006/main">
-              <a:ext uri="{FF2B5EF4-FFF2-40B4-BE49-F238E27FC236}">
-                <a16:creationId xmlns:a16="http://schemas.microsoft.com/office/drawing/2014/main" id="{CDB436B5-A401-4FF2-97CD-CC03761C6F4D}"/>
+          <p:cNvPr id="18" name="c3-text-328">
+            <a:extLst xmlns:a="http://schemas.openxmlformats.org/drawingml/2006/main">
+              <a:ext uri="{FF2B5EF4-FFF2-40B4-BE49-F238E27FC236}">
+                <a16:creationId xmlns:a16="http://schemas.microsoft.com/office/drawing/2014/main" id="{438E57D7-BD2D-4138-888A-10A416649E63}"/>
               </a:ext>
             </a:extLst>
           </p:cNvPr>
@@ -11465,7 +11465,7 @@
     </p:spTree>
     <p:extLst>
       <p:ext uri="{BB962C8B-B14F-4D97-AF65-F5344CB8AC3E}">
-        <p14:creationId xmlns:p14="http://schemas.microsoft.com/office/powerpoint/2010/main" val="2067829571"/>
+        <p14:creationId xmlns:p14="http://schemas.microsoft.com/office/powerpoint/2010/main" val="410835045"/>
       </p:ext>
     </p:extLst>
   </p:cSld>
@@ -11493,10 +11493,10 @@
       </p:grpSpPr>
       <p:sp>
         <p:nvSpPr>
-          <p:cNvPr id="8" name="c3-text-217">
-            <a:extLst xmlns:a="http://schemas.openxmlformats.org/drawingml/2006/main">
-              <a:ext uri="{FF2B5EF4-FFF2-40B4-BE49-F238E27FC236}">
-                <a16:creationId xmlns:a16="http://schemas.microsoft.com/office/drawing/2014/main" id="{AB9AE90A-7C96-40FF-B8FC-64CF766E9DBF}"/>
+          <p:cNvPr id="18" name="c3-text-217">
+            <a:extLst xmlns:a="http://schemas.openxmlformats.org/drawingml/2006/main">
+              <a:ext uri="{FF2B5EF4-FFF2-40B4-BE49-F238E27FC236}">
+                <a16:creationId xmlns:a16="http://schemas.microsoft.com/office/drawing/2014/main" id="{84844235-6210-4895-B241-734D005D7084}"/>
               </a:ext>
             </a:extLst>
           </p:cNvPr>
@@ -11553,7 +11553,7 @@
           <p:cNvPr id="2" name="c3-text-218">
             <a:extLst xmlns:a="http://schemas.openxmlformats.org/drawingml/2006/main">
               <a:ext uri="{FF2B5EF4-FFF2-40B4-BE49-F238E27FC236}">
-                <a16:creationId xmlns:a16="http://schemas.microsoft.com/office/drawing/2014/main" id="{E0D8AEE9-E5F1-42F2-85AA-88BD4325E975}"/>
+                <a16:creationId xmlns:a16="http://schemas.microsoft.com/office/drawing/2014/main" id="{C6CF1FEB-808E-476E-B058-7CBABCA34BB7}"/>
               </a:ext>
             </a:extLst>
           </p:cNvPr>
@@ -11600,7 +11600,7 @@
                 <a:ea typeface="Calibri"/>
                 <a:cs typeface="Calibri"/>
               </a:rPr>
-              <a:t>Coding Agents [5] [6]</a:t>
+              <a:t>Claude Code and Codex [5] [6]</a:t>
             </a:r>
           </a:p>
         </p:txBody>
@@ -11610,7 +11610,7 @@
           <p:cNvPr id="3" name="c3-text-219">
             <a:extLst xmlns:a="http://schemas.openxmlformats.org/drawingml/2006/main">
               <a:ext uri="{FF2B5EF4-FFF2-40B4-BE49-F238E27FC236}">
-                <a16:creationId xmlns:a16="http://schemas.microsoft.com/office/drawing/2014/main" id="{2B7EF638-EB1D-45D7-A20F-F77299941BC8}"/>
+                <a16:creationId xmlns:a16="http://schemas.microsoft.com/office/drawing/2014/main" id="{EE9E0DDA-2EE1-47C9-AB0F-79C102F3B2F2}"/>
               </a:ext>
             </a:extLst>
           </p:cNvPr>
@@ -11662,24 +11662,68 @@
           </a:p>
         </p:txBody>
       </p:sp>
-      <p:sp>
-        <p:nvSpPr>
-          <p:cNvPr id="4" name="c3-text-220">
-            <a:extLst xmlns:a="http://schemas.openxmlformats.org/drawingml/2006/main">
-              <a:ext uri="{FF2B5EF4-FFF2-40B4-BE49-F238E27FC236}">
-                <a16:creationId xmlns:a16="http://schemas.microsoft.com/office/drawing/2014/main" id="{D1E87769-1426-4831-8A18-29B94170AB7C}"/>
-              </a:ext>
-            </a:extLst>
-          </p:cNvPr>
-          <p:cNvSpPr>
-            <a:spLocks xmlns:a="http://schemas.openxmlformats.org/drawingml/2006/main" noGrp="1"/>
-          </p:cNvSpPr>
-          <p:nvPr/>
-        </p:nvSpPr>
-        <p:spPr>
-          <a:xfrm xmlns:a="http://schemas.openxmlformats.org/drawingml/2006/main">
-            <a:off x="609600" y="1581150"/>
-            <a:ext cx="7924800" cy="571500"/>
+      <p:pic>
+        <p:nvPicPr>
+          <p:cNvPr id="21" name=""/>
+          <p:cNvPicPr>
+            <a:picLocks xmlns:a="http://schemas.openxmlformats.org/drawingml/2006/main" noChangeAspect="1"/>
+          </p:cNvPicPr>
+          <p:nvPr/>
+        </p:nvPicPr>
+        <p:blipFill>
+          <a:blip xmlns:r="http://schemas.openxmlformats.org/officeDocument/2006/relationships" xmlns:a="http://schemas.openxmlformats.org/drawingml/2006/main" r:embed="Rba37df6ffec74f84"/>
+          <a:stretch xmlns:a="http://schemas.openxmlformats.org/drawingml/2006/main"/>
+        </p:blipFill>
+        <p:spPr>
+          <a:xfrm xmlns:a="http://schemas.openxmlformats.org/drawingml/2006/main">
+            <a:off x="609600" y="1552575"/>
+            <a:ext cx="685800" cy="685800"/>
+          </a:xfrm>
+          <a:prstGeom xmlns:a="http://schemas.openxmlformats.org/drawingml/2006/main" prst="rect">
+            <a:avLst/>
+          </a:prstGeom>
+        </p:spPr>
+      </p:pic>
+      <p:pic>
+        <p:nvPicPr>
+          <p:cNvPr id="22" name=""/>
+          <p:cNvPicPr>
+            <a:picLocks xmlns:a="http://schemas.openxmlformats.org/drawingml/2006/main" noChangeAspect="1"/>
+          </p:cNvPicPr>
+          <p:nvPr/>
+        </p:nvPicPr>
+        <p:blipFill>
+          <a:blip xmlns:r="http://schemas.openxmlformats.org/officeDocument/2006/relationships" xmlns:a="http://schemas.openxmlformats.org/drawingml/2006/main" r:embed="Rc8d6525085a344ad"/>
+          <a:stretch xmlns:a="http://schemas.openxmlformats.org/drawingml/2006/main"/>
+        </p:blipFill>
+        <p:spPr>
+          <a:xfrm xmlns:a="http://schemas.openxmlformats.org/drawingml/2006/main">
+            <a:off x="4762500" y="1552575"/>
+            <a:ext cx="685800" cy="685800"/>
+          </a:xfrm>
+          <a:prstGeom xmlns:a="http://schemas.openxmlformats.org/drawingml/2006/main" prst="rect">
+            <a:avLst/>
+          </a:prstGeom>
+        </p:spPr>
+      </p:pic>
+      <p:sp>
+        <p:nvSpPr>
+          <p:cNvPr id="6" name="c3-text-220">
+            <a:extLst xmlns:a="http://schemas.openxmlformats.org/drawingml/2006/main">
+              <a:ext uri="{FF2B5EF4-FFF2-40B4-BE49-F238E27FC236}">
+                <a16:creationId xmlns:a16="http://schemas.microsoft.com/office/drawing/2014/main" id="{A1EF6B28-7DF1-4D3A-9C99-C97350A5FCB3}"/>
+              </a:ext>
+            </a:extLst>
+          </p:cNvPr>
+          <p:cNvSpPr>
+            <a:spLocks xmlns:a="http://schemas.openxmlformats.org/drawingml/2006/main" noGrp="1"/>
+          </p:cNvSpPr>
+          <p:nvPr/>
+        </p:nvSpPr>
+        <p:spPr>
+          <a:xfrm xmlns:a="http://schemas.openxmlformats.org/drawingml/2006/main">
+            <a:off x="1466850" y="1571625"/>
+            <a:ext cx="2914650" cy="361950"/>
           </a:xfrm>
           <a:prstGeom xmlns:a="http://schemas.openxmlformats.org/drawingml/2006/main" prst="rect">
             <a:avLst/>
@@ -11714,29 +11758,29 @@
                 <a:ea typeface="Calibri"/>
                 <a:cs typeface="Calibri"/>
               </a:rPr>
-              <a:t>Claude Code (Anthropic) and Codex (OpenAI)</a:t>
-            </a:r>
-          </a:p>
-        </p:txBody>
-      </p:sp>
-      <p:sp>
-        <p:nvSpPr>
-          <p:cNvPr id="5" name="c3-text-221">
-            <a:extLst xmlns:a="http://schemas.openxmlformats.org/drawingml/2006/main">
-              <a:ext uri="{FF2B5EF4-FFF2-40B4-BE49-F238E27FC236}">
-                <a16:creationId xmlns:a16="http://schemas.microsoft.com/office/drawing/2014/main" id="{723DAD53-AD0F-48D2-8219-CFFDE4D57C9B}"/>
-              </a:ext>
-            </a:extLst>
-          </p:cNvPr>
-          <p:cNvSpPr>
-            <a:spLocks xmlns:a="http://schemas.openxmlformats.org/drawingml/2006/main" noGrp="1"/>
-          </p:cNvSpPr>
-          <p:nvPr/>
-        </p:nvSpPr>
-        <p:spPr>
-          <a:xfrm xmlns:a="http://schemas.openxmlformats.org/drawingml/2006/main">
-            <a:off x="609600" y="2419350"/>
-            <a:ext cx="7924800" cy="704850"/>
+              <a:t>Claude Code</a:t>
+            </a:r>
+          </a:p>
+        </p:txBody>
+      </p:sp>
+      <p:sp>
+        <p:nvSpPr>
+          <p:cNvPr id="7" name="c3-text-221">
+            <a:extLst xmlns:a="http://schemas.openxmlformats.org/drawingml/2006/main">
+              <a:ext uri="{FF2B5EF4-FFF2-40B4-BE49-F238E27FC236}">
+                <a16:creationId xmlns:a16="http://schemas.microsoft.com/office/drawing/2014/main" id="{C4D5D367-E5EC-4D6B-9933-90724A1928CE}"/>
+              </a:ext>
+            </a:extLst>
+          </p:cNvPr>
+          <p:cNvSpPr>
+            <a:spLocks xmlns:a="http://schemas.openxmlformats.org/drawingml/2006/main" noGrp="1"/>
+          </p:cNvSpPr>
+          <p:nvPr/>
+        </p:nvSpPr>
+        <p:spPr>
+          <a:xfrm xmlns:a="http://schemas.openxmlformats.org/drawingml/2006/main">
+            <a:off x="1466850" y="1971675"/>
+            <a:ext cx="2914650" cy="247650"/>
           </a:xfrm>
           <a:prstGeom xmlns:a="http://schemas.openxmlformats.org/drawingml/2006/main" prst="rect">
             <a:avLst/>
@@ -11753,47 +11797,47 @@
           <a:lstStyle xmlns:a="http://schemas.openxmlformats.org/drawingml/2006/main"/>
           <a:p xmlns:a="http://schemas.openxmlformats.org/drawingml/2006/main">
             <a:pPr>
-              <a:defRPr sz="2025" b="0">
-                <a:solidFill>
-                  <a:srgbClr val="ECE6DE"/>
-                </a:solidFill>
-                <a:latin typeface="Calibri"/>
-                <a:ea typeface="Calibri"/>
-                <a:cs typeface="Calibri"/>
-              </a:defRPr>
-            </a:pPr>
-            <a:r>
-              <a:rPr sz="2025" b="0">
-                <a:solidFill>
-                  <a:srgbClr val="ECE6DE"/>
-                </a:solidFill>
-                <a:latin typeface="Calibri"/>
-                <a:ea typeface="Calibri"/>
-                <a:cs typeface="Calibri"/>
-              </a:rPr>
-              <a:t>They read project files, write code and run it to check the result.</a:t>
-            </a:r>
-          </a:p>
-        </p:txBody>
-      </p:sp>
-      <p:sp>
-        <p:nvSpPr>
-          <p:cNvPr id="6" name="c3-text-222">
-            <a:extLst xmlns:a="http://schemas.openxmlformats.org/drawingml/2006/main">
-              <a:ext uri="{FF2B5EF4-FFF2-40B4-BE49-F238E27FC236}">
-                <a16:creationId xmlns:a16="http://schemas.microsoft.com/office/drawing/2014/main" id="{6AB9635A-E4BA-4A32-8682-0911C0E9CE8A}"/>
-              </a:ext>
-            </a:extLst>
-          </p:cNvPr>
-          <p:cNvSpPr>
-            <a:spLocks xmlns:a="http://schemas.openxmlformats.org/drawingml/2006/main" noGrp="1"/>
-          </p:cNvSpPr>
-          <p:nvPr/>
-        </p:nvSpPr>
-        <p:spPr>
-          <a:xfrm xmlns:a="http://schemas.openxmlformats.org/drawingml/2006/main">
-            <a:off x="609600" y="3505200"/>
-            <a:ext cx="7924800" cy="800100"/>
+              <a:defRPr sz="1500" b="0">
+                <a:solidFill>
+                  <a:srgbClr val="B4BDCB"/>
+                </a:solidFill>
+                <a:latin typeface="Calibri"/>
+                <a:ea typeface="Calibri"/>
+                <a:cs typeface="Calibri"/>
+              </a:defRPr>
+            </a:pPr>
+            <a:r>
+              <a:rPr sz="1500" b="0">
+                <a:solidFill>
+                  <a:srgbClr val="B4BDCB"/>
+                </a:solidFill>
+                <a:latin typeface="Calibri"/>
+                <a:ea typeface="Calibri"/>
+                <a:cs typeface="Calibri"/>
+              </a:rPr>
+              <a:t>Anthropic</a:t>
+            </a:r>
+          </a:p>
+        </p:txBody>
+      </p:sp>
+      <p:sp>
+        <p:nvSpPr>
+          <p:cNvPr id="8" name="c3-text-222">
+            <a:extLst xmlns:a="http://schemas.openxmlformats.org/drawingml/2006/main">
+              <a:ext uri="{FF2B5EF4-FFF2-40B4-BE49-F238E27FC236}">
+                <a16:creationId xmlns:a16="http://schemas.microsoft.com/office/drawing/2014/main" id="{53D0C931-ED1D-4235-B7EE-1B29FD5BB575}"/>
+              </a:ext>
+            </a:extLst>
+          </p:cNvPr>
+          <p:cNvSpPr>
+            <a:spLocks xmlns:a="http://schemas.openxmlformats.org/drawingml/2006/main" noGrp="1"/>
+          </p:cNvSpPr>
+          <p:nvPr/>
+        </p:nvSpPr>
+        <p:spPr>
+          <a:xfrm xmlns:a="http://schemas.openxmlformats.org/drawingml/2006/main">
+            <a:off x="5619750" y="1571625"/>
+            <a:ext cx="2914650" cy="361950"/>
           </a:xfrm>
           <a:prstGeom xmlns:a="http://schemas.openxmlformats.org/drawingml/2006/main" prst="rect">
             <a:avLst/>
@@ -11810,7 +11854,350 @@
           <a:lstStyle xmlns:a="http://schemas.openxmlformats.org/drawingml/2006/main"/>
           <a:p xmlns:a="http://schemas.openxmlformats.org/drawingml/2006/main">
             <a:pPr>
-              <a:defRPr sz="2025" b="0">
+              <a:defRPr sz="2100" b="0">
+                <a:solidFill>
+                  <a:srgbClr val="D9A06B"/>
+                </a:solidFill>
+                <a:latin typeface="Calibri"/>
+                <a:ea typeface="Calibri"/>
+                <a:cs typeface="Calibri"/>
+              </a:defRPr>
+            </a:pPr>
+            <a:r>
+              <a:rPr sz="2100" b="0">
+                <a:solidFill>
+                  <a:srgbClr val="D9A06B"/>
+                </a:solidFill>
+                <a:latin typeface="Calibri"/>
+                <a:ea typeface="Calibri"/>
+                <a:cs typeface="Calibri"/>
+              </a:rPr>
+              <a:t>Codex</a:t>
+            </a:r>
+          </a:p>
+        </p:txBody>
+      </p:sp>
+      <p:sp>
+        <p:nvSpPr>
+          <p:cNvPr id="9" name="c3-text-223">
+            <a:extLst xmlns:a="http://schemas.openxmlformats.org/drawingml/2006/main">
+              <a:ext uri="{FF2B5EF4-FFF2-40B4-BE49-F238E27FC236}">
+                <a16:creationId xmlns:a16="http://schemas.microsoft.com/office/drawing/2014/main" id="{C499196A-B9CC-4FDE-8287-69231A131BE8}"/>
+              </a:ext>
+            </a:extLst>
+          </p:cNvPr>
+          <p:cNvSpPr>
+            <a:spLocks xmlns:a="http://schemas.openxmlformats.org/drawingml/2006/main" noGrp="1"/>
+          </p:cNvSpPr>
+          <p:nvPr/>
+        </p:nvSpPr>
+        <p:spPr>
+          <a:xfrm xmlns:a="http://schemas.openxmlformats.org/drawingml/2006/main">
+            <a:off x="5619750" y="1971675"/>
+            <a:ext cx="2914650" cy="247650"/>
+          </a:xfrm>
+          <a:prstGeom xmlns:a="http://schemas.openxmlformats.org/drawingml/2006/main" prst="rect">
+            <a:avLst/>
+          </a:prstGeom>
+          <a:noFill xmlns:a="http://schemas.openxmlformats.org/drawingml/2006/main"/>
+          <a:ln xmlns:a="http://schemas.openxmlformats.org/drawingml/2006/main" w="0">
+            <a:noFill/>
+          </a:ln>
+        </p:spPr>
+        <p:txBody>
+          <a:bodyPr xmlns:a="http://schemas.openxmlformats.org/drawingml/2006/main" wrap="square" lIns="9525" tIns="9525" rIns="9525" bIns="9525" anchor="ctr">
+            <a:noAutofit/>
+          </a:bodyPr>
+          <a:lstStyle xmlns:a="http://schemas.openxmlformats.org/drawingml/2006/main"/>
+          <a:p xmlns:a="http://schemas.openxmlformats.org/drawingml/2006/main">
+            <a:pPr>
+              <a:defRPr sz="1500" b="0">
+                <a:solidFill>
+                  <a:srgbClr val="B4BDCB"/>
+                </a:solidFill>
+                <a:latin typeface="Calibri"/>
+                <a:ea typeface="Calibri"/>
+                <a:cs typeface="Calibri"/>
+              </a:defRPr>
+            </a:pPr>
+            <a:r>
+              <a:rPr sz="1500" b="0">
+                <a:solidFill>
+                  <a:srgbClr val="B4BDCB"/>
+                </a:solidFill>
+                <a:latin typeface="Calibri"/>
+                <a:ea typeface="Calibri"/>
+                <a:cs typeface="Calibri"/>
+              </a:rPr>
+              <a:t>OpenAI</a:t>
+            </a:r>
+          </a:p>
+        </p:txBody>
+      </p:sp>
+      <p:sp>
+        <p:nvSpPr>
+          <p:cNvPr id="10" name="c3-text-224">
+            <a:extLst xmlns:a="http://schemas.openxmlformats.org/drawingml/2006/main">
+              <a:ext uri="{FF2B5EF4-FFF2-40B4-BE49-F238E27FC236}">
+                <a16:creationId xmlns:a16="http://schemas.microsoft.com/office/drawing/2014/main" id="{1C1EE81E-35C8-4E47-B3EB-8C4C78D7E5FA}"/>
+              </a:ext>
+            </a:extLst>
+          </p:cNvPr>
+          <p:cNvSpPr>
+            <a:spLocks xmlns:a="http://schemas.openxmlformats.org/drawingml/2006/main" noGrp="1"/>
+          </p:cNvSpPr>
+          <p:nvPr/>
+        </p:nvSpPr>
+        <p:spPr>
+          <a:xfrm xmlns:a="http://schemas.openxmlformats.org/drawingml/2006/main">
+            <a:off x="609600" y="2476500"/>
+            <a:ext cx="3771900" cy="990600"/>
+          </a:xfrm>
+          <a:prstGeom xmlns:a="http://schemas.openxmlformats.org/drawingml/2006/main" prst="rect">
+            <a:avLst/>
+          </a:prstGeom>
+          <a:noFill xmlns:a="http://schemas.openxmlformats.org/drawingml/2006/main"/>
+          <a:ln xmlns:a="http://schemas.openxmlformats.org/drawingml/2006/main" w="0">
+            <a:noFill/>
+          </a:ln>
+        </p:spPr>
+        <p:txBody>
+          <a:bodyPr xmlns:a="http://schemas.openxmlformats.org/drawingml/2006/main" wrap="square" lIns="9525" tIns="9525" rIns="9525" bIns="9525" anchor="ctr">
+            <a:noAutofit/>
+          </a:bodyPr>
+          <a:lstStyle xmlns:a="http://schemas.openxmlformats.org/drawingml/2006/main"/>
+          <a:p xmlns:a="http://schemas.openxmlformats.org/drawingml/2006/main">
+            <a:pPr>
+              <a:defRPr sz="1725" b="0">
+                <a:solidFill>
+                  <a:srgbClr val="ECE6DE"/>
+                </a:solidFill>
+                <a:latin typeface="Calibri"/>
+                <a:ea typeface="Calibri"/>
+                <a:cs typeface="Calibri"/>
+              </a:defRPr>
+            </a:pPr>
+            <a:r>
+              <a:rPr sz="1725" b="0">
+                <a:solidFill>
+                  <a:srgbClr val="ECE6DE"/>
+                </a:solidFill>
+                <a:latin typeface="Calibri"/>
+                <a:ea typeface="Calibri"/>
+                <a:cs typeface="Calibri"/>
+              </a:rPr>
+              <a:t>Uses Claude models to explore a codebase, edit files and run terminal commands.</a:t>
+            </a:r>
+          </a:p>
+        </p:txBody>
+      </p:sp>
+      <p:sp>
+        <p:nvSpPr>
+          <p:cNvPr id="11" name="c3-text-225">
+            <a:extLst xmlns:a="http://schemas.openxmlformats.org/drawingml/2006/main">
+              <a:ext uri="{FF2B5EF4-FFF2-40B4-BE49-F238E27FC236}">
+                <a16:creationId xmlns:a16="http://schemas.microsoft.com/office/drawing/2014/main" id="{B33C896D-2403-4BCC-BC65-D3A6A5586503}"/>
+              </a:ext>
+            </a:extLst>
+          </p:cNvPr>
+          <p:cNvSpPr>
+            <a:spLocks xmlns:a="http://schemas.openxmlformats.org/drawingml/2006/main" noGrp="1"/>
+          </p:cNvSpPr>
+          <p:nvPr/>
+        </p:nvSpPr>
+        <p:spPr>
+          <a:xfrm xmlns:a="http://schemas.openxmlformats.org/drawingml/2006/main">
+            <a:off x="4762500" y="2476500"/>
+            <a:ext cx="3771900" cy="990600"/>
+          </a:xfrm>
+          <a:prstGeom xmlns:a="http://schemas.openxmlformats.org/drawingml/2006/main" prst="rect">
+            <a:avLst/>
+          </a:prstGeom>
+          <a:noFill xmlns:a="http://schemas.openxmlformats.org/drawingml/2006/main"/>
+          <a:ln xmlns:a="http://schemas.openxmlformats.org/drawingml/2006/main" w="0">
+            <a:noFill/>
+          </a:ln>
+        </p:spPr>
+        <p:txBody>
+          <a:bodyPr xmlns:a="http://schemas.openxmlformats.org/drawingml/2006/main" wrap="square" lIns="9525" tIns="9525" rIns="9525" bIns="9525" anchor="ctr">
+            <a:noAutofit/>
+          </a:bodyPr>
+          <a:lstStyle xmlns:a="http://schemas.openxmlformats.org/drawingml/2006/main"/>
+          <a:p xmlns:a="http://schemas.openxmlformats.org/drawingml/2006/main">
+            <a:pPr>
+              <a:defRPr sz="1725" b="0">
+                <a:solidFill>
+                  <a:srgbClr val="ECE6DE"/>
+                </a:solidFill>
+                <a:latin typeface="Calibri"/>
+                <a:ea typeface="Calibri"/>
+                <a:cs typeface="Calibri"/>
+              </a:defRPr>
+            </a:pPr>
+            <a:r>
+              <a:rPr sz="1725" b="0">
+                <a:solidFill>
+                  <a:srgbClr val="ECE6DE"/>
+                </a:solidFill>
+                <a:latin typeface="Calibri"/>
+                <a:ea typeface="Calibri"/>
+                <a:cs typeface="Calibri"/>
+              </a:rPr>
+              <a:t>Uses OpenAI models to write, review and change code with the context in your editor.</a:t>
+            </a:r>
+          </a:p>
+        </p:txBody>
+      </p:sp>
+      <p:sp>
+        <p:nvSpPr>
+          <p:cNvPr id="12" name="c3-text-226">
+            <a:extLst xmlns:a="http://schemas.openxmlformats.org/drawingml/2006/main">
+              <a:ext uri="{FF2B5EF4-FFF2-40B4-BE49-F238E27FC236}">
+                <a16:creationId xmlns:a16="http://schemas.microsoft.com/office/drawing/2014/main" id="{3558A142-AA4C-4438-9AE8-250E715B057E}"/>
+              </a:ext>
+            </a:extLst>
+          </p:cNvPr>
+          <p:cNvSpPr>
+            <a:spLocks xmlns:a="http://schemas.openxmlformats.org/drawingml/2006/main" noGrp="1"/>
+          </p:cNvSpPr>
+          <p:nvPr/>
+        </p:nvSpPr>
+        <p:spPr>
+          <a:xfrm xmlns:a="http://schemas.openxmlformats.org/drawingml/2006/main">
+            <a:off x="609600" y="3533775"/>
+            <a:ext cx="3771900" cy="285750"/>
+          </a:xfrm>
+          <a:prstGeom xmlns:a="http://schemas.openxmlformats.org/drawingml/2006/main" prst="rect">
+            <a:avLst/>
+          </a:prstGeom>
+          <a:noFill xmlns:a="http://schemas.openxmlformats.org/drawingml/2006/main"/>
+          <a:ln xmlns:a="http://schemas.openxmlformats.org/drawingml/2006/main" w="0">
+            <a:noFill/>
+          </a:ln>
+        </p:spPr>
+        <p:txBody>
+          <a:bodyPr xmlns:a="http://schemas.openxmlformats.org/drawingml/2006/main" wrap="square" lIns="9525" tIns="9525" rIns="9525" bIns="9525" anchor="ctr">
+            <a:noAutofit/>
+          </a:bodyPr>
+          <a:lstStyle xmlns:a="http://schemas.openxmlformats.org/drawingml/2006/main"/>
+          <a:p xmlns:a="http://schemas.openxmlformats.org/drawingml/2006/main">
+            <a:pPr>
+              <a:defRPr sz="1500" b="0">
+                <a:solidFill>
+                  <a:srgbClr val="B4BDCB"/>
+                </a:solidFill>
+                <a:latin typeface="Calibri"/>
+                <a:ea typeface="Calibri"/>
+                <a:cs typeface="Calibri"/>
+              </a:defRPr>
+            </a:pPr>
+            <a:r>
+              <a:rPr sz="1500" b="0">
+                <a:solidFill>
+                  <a:srgbClr val="B4BDCB"/>
+                </a:solidFill>
+                <a:latin typeface="Calibri"/>
+                <a:ea typeface="Calibri"/>
+                <a:cs typeface="Calibri"/>
+              </a:rPr>
+              <a:t>Terminal and VS Code extension</a:t>
+            </a:r>
+          </a:p>
+        </p:txBody>
+      </p:sp>
+      <p:sp>
+        <p:nvSpPr>
+          <p:cNvPr id="13" name="c3-text-227">
+            <a:extLst xmlns:a="http://schemas.openxmlformats.org/drawingml/2006/main">
+              <a:ext uri="{FF2B5EF4-FFF2-40B4-BE49-F238E27FC236}">
+                <a16:creationId xmlns:a16="http://schemas.microsoft.com/office/drawing/2014/main" id="{41F057DC-201E-4358-8FBA-14044FEEBB6A}"/>
+              </a:ext>
+            </a:extLst>
+          </p:cNvPr>
+          <p:cNvSpPr>
+            <a:spLocks xmlns:a="http://schemas.openxmlformats.org/drawingml/2006/main" noGrp="1"/>
+          </p:cNvSpPr>
+          <p:nvPr/>
+        </p:nvSpPr>
+        <p:spPr>
+          <a:xfrm xmlns:a="http://schemas.openxmlformats.org/drawingml/2006/main">
+            <a:off x="4762500" y="3533775"/>
+            <a:ext cx="3771900" cy="285750"/>
+          </a:xfrm>
+          <a:prstGeom xmlns:a="http://schemas.openxmlformats.org/drawingml/2006/main" prst="rect">
+            <a:avLst/>
+          </a:prstGeom>
+          <a:noFill xmlns:a="http://schemas.openxmlformats.org/drawingml/2006/main"/>
+          <a:ln xmlns:a="http://schemas.openxmlformats.org/drawingml/2006/main" w="0">
+            <a:noFill/>
+          </a:ln>
+        </p:spPr>
+        <p:txBody>
+          <a:bodyPr xmlns:a="http://schemas.openxmlformats.org/drawingml/2006/main" wrap="square" lIns="9525" tIns="9525" rIns="9525" bIns="9525" anchor="ctr">
+            <a:noAutofit/>
+          </a:bodyPr>
+          <a:lstStyle xmlns:a="http://schemas.openxmlformats.org/drawingml/2006/main"/>
+          <a:p xmlns:a="http://schemas.openxmlformats.org/drawingml/2006/main">
+            <a:pPr>
+              <a:defRPr sz="1500" b="0">
+                <a:solidFill>
+                  <a:srgbClr val="B4BDCB"/>
+                </a:solidFill>
+                <a:latin typeface="Calibri"/>
+                <a:ea typeface="Calibri"/>
+                <a:cs typeface="Calibri"/>
+              </a:defRPr>
+            </a:pPr>
+            <a:r>
+              <a:rPr sz="1500" b="0">
+                <a:solidFill>
+                  <a:srgbClr val="B4BDCB"/>
+                </a:solidFill>
+                <a:latin typeface="Calibri"/>
+                <a:ea typeface="Calibri"/>
+                <a:cs typeface="Calibri"/>
+              </a:rPr>
+              <a:t>VS Code extension and CLI</a:t>
+            </a:r>
+          </a:p>
+        </p:txBody>
+      </p:sp>
+      <p:sp>
+        <p:nvSpPr>
+          <p:cNvPr id="14" name="c3-text-228">
+            <a:hlinkClick xmlns:r="http://schemas.openxmlformats.org/officeDocument/2006/relationships" xmlns:a="http://schemas.openxmlformats.org/drawingml/2006/main" r:id="Rbd00344792a74bda"/>
+            <a:extLst xmlns:a="http://schemas.openxmlformats.org/drawingml/2006/main">
+              <a:ext uri="{FF2B5EF4-FFF2-40B4-BE49-F238E27FC236}">
+                <a16:creationId xmlns:a16="http://schemas.microsoft.com/office/drawing/2014/main" id="{E5B175E2-640B-464A-A1E2-DA70D8C628C4}"/>
+              </a:ext>
+            </a:extLst>
+          </p:cNvPr>
+          <p:cNvSpPr>
+            <a:spLocks xmlns:a="http://schemas.openxmlformats.org/drawingml/2006/main" noGrp="1"/>
+          </p:cNvSpPr>
+          <p:nvPr/>
+        </p:nvSpPr>
+        <p:spPr>
+          <a:xfrm xmlns:a="http://schemas.openxmlformats.org/drawingml/2006/main">
+            <a:off x="609600" y="3981450"/>
+            <a:ext cx="3771900" cy="266700"/>
+          </a:xfrm>
+          <a:prstGeom xmlns:a="http://schemas.openxmlformats.org/drawingml/2006/main" prst="rect">
+            <a:avLst/>
+          </a:prstGeom>
+          <a:noFill xmlns:a="http://schemas.openxmlformats.org/drawingml/2006/main"/>
+          <a:ln xmlns:a="http://schemas.openxmlformats.org/drawingml/2006/main" w="0">
+            <a:noFill/>
+          </a:ln>
+        </p:spPr>
+        <p:txBody>
+          <a:bodyPr xmlns:a="http://schemas.openxmlformats.org/drawingml/2006/main" wrap="square" lIns="9525" tIns="9525" rIns="9525" bIns="9525" anchor="ctr">
+            <a:noAutofit/>
+          </a:bodyPr>
+          <a:lstStyle xmlns:a="http://schemas.openxmlformats.org/drawingml/2006/main"/>
+          <a:p xmlns:a="http://schemas.openxmlformats.org/drawingml/2006/main">
+            <a:pPr>
+              <a:defRPr sz="1500" b="0">
                 <a:solidFill>
                   <a:srgbClr val="7FA8E3"/>
                 </a:solidFill>
@@ -11820,7 +12207,7 @@
               </a:defRPr>
             </a:pPr>
             <a:r>
-              <a:rPr sz="2025" b="0">
+              <a:rPr sz="1500" b="0" u="sng">
                 <a:solidFill>
                   <a:srgbClr val="7FA8E3"/>
                 </a:solidFill>
@@ -11828,17 +12215,132 @@
                 <a:ea typeface="Calibri"/>
                 <a:cs typeface="Calibri"/>
               </a:rPr>
-              <a:t>Give a goal, inspect the changes, try the result and ask for improvements.</a:t>
-            </a:r>
-          </a:p>
-        </p:txBody>
-      </p:sp>
-      <p:sp>
-        <p:nvSpPr>
-          <p:cNvPr id="7" name="c3-text-328">
-            <a:extLst xmlns:a="http://schemas.openxmlformats.org/drawingml/2006/main">
-              <a:ext uri="{FF2B5EF4-FFF2-40B4-BE49-F238E27FC236}">
-                <a16:creationId xmlns:a16="http://schemas.microsoft.com/office/drawing/2014/main" id="{290CDBE6-0E14-4619-AE75-85A2588D60F3}"/>
+              <a:t>claude.com/claude-code</a:t>
+            </a:r>
+          </a:p>
+        </p:txBody>
+      </p:sp>
+      <p:sp>
+        <p:nvSpPr>
+          <p:cNvPr id="15" name="c3-text-229">
+            <a:hlinkClick xmlns:r="http://schemas.openxmlformats.org/officeDocument/2006/relationships" xmlns:a="http://schemas.openxmlformats.org/drawingml/2006/main" r:id="R7eb35aad35ea46fc"/>
+            <a:extLst xmlns:a="http://schemas.openxmlformats.org/drawingml/2006/main">
+              <a:ext uri="{FF2B5EF4-FFF2-40B4-BE49-F238E27FC236}">
+                <a16:creationId xmlns:a16="http://schemas.microsoft.com/office/drawing/2014/main" id="{5CE2DD7A-C1AB-4E97-A144-A63AFA0AA7FB}"/>
+              </a:ext>
+            </a:extLst>
+          </p:cNvPr>
+          <p:cNvSpPr>
+            <a:spLocks xmlns:a="http://schemas.openxmlformats.org/drawingml/2006/main" noGrp="1"/>
+          </p:cNvSpPr>
+          <p:nvPr/>
+        </p:nvSpPr>
+        <p:spPr>
+          <a:xfrm xmlns:a="http://schemas.openxmlformats.org/drawingml/2006/main">
+            <a:off x="4762500" y="3981450"/>
+            <a:ext cx="3771900" cy="266700"/>
+          </a:xfrm>
+          <a:prstGeom xmlns:a="http://schemas.openxmlformats.org/drawingml/2006/main" prst="rect">
+            <a:avLst/>
+          </a:prstGeom>
+          <a:noFill xmlns:a="http://schemas.openxmlformats.org/drawingml/2006/main"/>
+          <a:ln xmlns:a="http://schemas.openxmlformats.org/drawingml/2006/main" w="0">
+            <a:noFill/>
+          </a:ln>
+        </p:spPr>
+        <p:txBody>
+          <a:bodyPr xmlns:a="http://schemas.openxmlformats.org/drawingml/2006/main" wrap="square" lIns="9525" tIns="9525" rIns="9525" bIns="9525" anchor="ctr">
+            <a:noAutofit/>
+          </a:bodyPr>
+          <a:lstStyle xmlns:a="http://schemas.openxmlformats.org/drawingml/2006/main"/>
+          <a:p xmlns:a="http://schemas.openxmlformats.org/drawingml/2006/main">
+            <a:pPr>
+              <a:defRPr sz="1500" b="0">
+                <a:solidFill>
+                  <a:srgbClr val="7FA8E3"/>
+                </a:solidFill>
+                <a:latin typeface="Calibri"/>
+                <a:ea typeface="Calibri"/>
+                <a:cs typeface="Calibri"/>
+              </a:defRPr>
+            </a:pPr>
+            <a:r>
+              <a:rPr sz="1500" b="0" u="sng">
+                <a:solidFill>
+                  <a:srgbClr val="7FA8E3"/>
+                </a:solidFill>
+                <a:latin typeface="Calibri"/>
+                <a:ea typeface="Calibri"/>
+                <a:cs typeface="Calibri"/>
+              </a:rPr>
+              <a:t>openai.com/codex</a:t>
+            </a:r>
+          </a:p>
+        </p:txBody>
+      </p:sp>
+      <p:sp>
+        <p:nvSpPr>
+          <p:cNvPr id="16" name="c3-text-230">
+            <a:extLst xmlns:a="http://schemas.openxmlformats.org/drawingml/2006/main">
+              <a:ext uri="{FF2B5EF4-FFF2-40B4-BE49-F238E27FC236}">
+                <a16:creationId xmlns:a16="http://schemas.microsoft.com/office/drawing/2014/main" id="{E29F2FAB-797A-45A5-B4EC-BDB2D1615825}"/>
+              </a:ext>
+            </a:extLst>
+          </p:cNvPr>
+          <p:cNvSpPr>
+            <a:spLocks xmlns:a="http://schemas.openxmlformats.org/drawingml/2006/main" noGrp="1"/>
+          </p:cNvSpPr>
+          <p:nvPr/>
+        </p:nvSpPr>
+        <p:spPr>
+          <a:xfrm xmlns:a="http://schemas.openxmlformats.org/drawingml/2006/main">
+            <a:off x="609600" y="4419600"/>
+            <a:ext cx="7924800" cy="266700"/>
+          </a:xfrm>
+          <a:prstGeom xmlns:a="http://schemas.openxmlformats.org/drawingml/2006/main" prst="rect">
+            <a:avLst/>
+          </a:prstGeom>
+          <a:noFill xmlns:a="http://schemas.openxmlformats.org/drawingml/2006/main"/>
+          <a:ln xmlns:a="http://schemas.openxmlformats.org/drawingml/2006/main" w="0">
+            <a:noFill/>
+          </a:ln>
+        </p:spPr>
+        <p:txBody>
+          <a:bodyPr xmlns:a="http://schemas.openxmlformats.org/drawingml/2006/main" wrap="square" lIns="9525" tIns="9525" rIns="9525" bIns="9525" anchor="ctr">
+            <a:noAutofit/>
+          </a:bodyPr>
+          <a:lstStyle xmlns:a="http://schemas.openxmlformats.org/drawingml/2006/main"/>
+          <a:p xmlns:a="http://schemas.openxmlformats.org/drawingml/2006/main">
+            <a:pPr>
+              <a:defRPr sz="1575" b="0">
+                <a:solidFill>
+                  <a:srgbClr val="ECE6DE"/>
+                </a:solidFill>
+                <a:latin typeface="Calibri"/>
+                <a:ea typeface="Calibri"/>
+                <a:cs typeface="Calibri"/>
+              </a:defRPr>
+            </a:pPr>
+            <a:r>
+              <a:rPr sz="1575" b="0">
+                <a:solidFill>
+                  <a:srgbClr val="ECE6DE"/>
+                </a:solidFill>
+                <a:latin typeface="Calibri"/>
+                <a:ea typeface="Calibri"/>
+                <a:cs typeface="Calibri"/>
+              </a:rPr>
+              <a:t>Describe a goal, inspect the edits and try the result.</a:t>
+            </a:r>
+          </a:p>
+        </p:txBody>
+      </p:sp>
+      <p:sp>
+        <p:nvSpPr>
+          <p:cNvPr id="17" name="c3-text-346">
+            <a:extLst xmlns:a="http://schemas.openxmlformats.org/drawingml/2006/main">
+              <a:ext uri="{FF2B5EF4-FFF2-40B4-BE49-F238E27FC236}">
+                <a16:creationId xmlns:a16="http://schemas.microsoft.com/office/drawing/2014/main" id="{9205BEF3-568A-4E15-A35F-3EA780E7C668}"/>
               </a:ext>
             </a:extLst>
           </p:cNvPr>
@@ -11893,7 +12395,7 @@
     </p:spTree>
     <p:extLst>
       <p:ext uri="{BB962C8B-B14F-4D97-AF65-F5344CB8AC3E}">
-        <p14:creationId xmlns:p14="http://schemas.microsoft.com/office/powerpoint/2010/main" val="862626166"/>
+        <p14:creationId xmlns:p14="http://schemas.microsoft.com/office/powerpoint/2010/main" val="386127341"/>
       </p:ext>
     </p:extLst>
   </p:cSld>
@@ -11921,10 +12423,10 @@
       </p:grpSpPr>
       <p:sp>
         <p:nvSpPr>
-          <p:cNvPr id="8" name="c3-text-223">
-            <a:extLst xmlns:a="http://schemas.openxmlformats.org/drawingml/2006/main">
-              <a:ext uri="{FF2B5EF4-FFF2-40B4-BE49-F238E27FC236}">
-                <a16:creationId xmlns:a16="http://schemas.microsoft.com/office/drawing/2014/main" id="{91BC1B29-2F78-4DC3-B8C5-BF18CF975203}"/>
+          <p:cNvPr id="10" name="c3-text-231">
+            <a:extLst xmlns:a="http://schemas.openxmlformats.org/drawingml/2006/main">
+              <a:ext uri="{FF2B5EF4-FFF2-40B4-BE49-F238E27FC236}">
+                <a16:creationId xmlns:a16="http://schemas.microsoft.com/office/drawing/2014/main" id="{97142F02-A5BD-4C0C-9B6C-DDAF953CAA8B}"/>
               </a:ext>
             </a:extLst>
           </p:cNvPr>
@@ -11978,10 +12480,10 @@
       </p:sp>
       <p:sp>
         <p:nvSpPr>
-          <p:cNvPr id="2" name="c3-text-224">
-            <a:extLst xmlns:a="http://schemas.openxmlformats.org/drawingml/2006/main">
-              <a:ext uri="{FF2B5EF4-FFF2-40B4-BE49-F238E27FC236}">
-                <a16:creationId xmlns:a16="http://schemas.microsoft.com/office/drawing/2014/main" id="{B64B8420-5A66-4A18-821E-B53244B43C2B}"/>
+          <p:cNvPr id="2" name="c3-text-232">
+            <a:extLst xmlns:a="http://schemas.openxmlformats.org/drawingml/2006/main">
+              <a:ext uri="{FF2B5EF4-FFF2-40B4-BE49-F238E27FC236}">
+                <a16:creationId xmlns:a16="http://schemas.microsoft.com/office/drawing/2014/main" id="{6AEF2B25-5A0C-4DB2-A2ED-CBA52A44BFF1}"/>
               </a:ext>
             </a:extLst>
           </p:cNvPr>
@@ -12028,17 +12530,17 @@
                 <a:ea typeface="Calibri"/>
                 <a:cs typeface="Calibri"/>
               </a:rPr>
-              <a:t>Codex: Installation and Setup [5]</a:t>
-            </a:r>
-          </a:p>
-        </p:txBody>
-      </p:sp>
-      <p:sp>
-        <p:nvSpPr>
-          <p:cNvPr id="3" name="c3-text-225">
-            <a:extLst xmlns:a="http://schemas.openxmlformats.org/drawingml/2006/main">
-              <a:ext uri="{FF2B5EF4-FFF2-40B4-BE49-F238E27FC236}">
-                <a16:creationId xmlns:a16="http://schemas.microsoft.com/office/drawing/2014/main" id="{306D0132-E551-4856-9A21-6BB2FE4F02A7}"/>
+              <a:t>Install Codex in VS Code [5] [13]</a:t>
+            </a:r>
+          </a:p>
+        </p:txBody>
+      </p:sp>
+      <p:sp>
+        <p:nvSpPr>
+          <p:cNvPr id="3" name="c3-text-233">
+            <a:extLst xmlns:a="http://schemas.openxmlformats.org/drawingml/2006/main">
+              <a:ext uri="{FF2B5EF4-FFF2-40B4-BE49-F238E27FC236}">
+                <a16:creationId xmlns:a16="http://schemas.microsoft.com/office/drawing/2014/main" id="{AB0CC948-7476-4733-9CFF-40FE08D177F8}"/>
               </a:ext>
             </a:extLst>
           </p:cNvPr>
@@ -12092,23 +12594,22 @@
       </p:sp>
       <p:sp>
         <p:nvSpPr>
-          <p:cNvPr id="4" name="c3-text-226">
-            <a:hlinkClick xmlns:r="http://schemas.openxmlformats.org/officeDocument/2006/relationships" xmlns:a="http://schemas.openxmlformats.org/drawingml/2006/main" r:id="Rc8c5108329544df3"/>
-            <a:extLst xmlns:a="http://schemas.openxmlformats.org/drawingml/2006/main">
-              <a:ext uri="{FF2B5EF4-FFF2-40B4-BE49-F238E27FC236}">
-                <a16:creationId xmlns:a16="http://schemas.microsoft.com/office/drawing/2014/main" id="{1C4E7137-E89B-468F-8458-8AB286DFAFB0}"/>
-              </a:ext>
-            </a:extLst>
-          </p:cNvPr>
-          <p:cNvSpPr>
-            <a:spLocks xmlns:a="http://schemas.openxmlformats.org/drawingml/2006/main" noGrp="1"/>
-          </p:cNvSpPr>
-          <p:nvPr/>
-        </p:nvSpPr>
-        <p:spPr>
-          <a:xfrm xmlns:a="http://schemas.openxmlformats.org/drawingml/2006/main">
-            <a:off x="609600" y="1562100"/>
-            <a:ext cx="7924800" cy="552450"/>
+          <p:cNvPr id="4" name="c3-text-234">
+            <a:extLst xmlns:a="http://schemas.openxmlformats.org/drawingml/2006/main">
+              <a:ext uri="{FF2B5EF4-FFF2-40B4-BE49-F238E27FC236}">
+                <a16:creationId xmlns:a16="http://schemas.microsoft.com/office/drawing/2014/main" id="{335B7447-15F2-4318-A99D-A913B56939A3}"/>
+              </a:ext>
+            </a:extLst>
+          </p:cNvPr>
+          <p:cNvSpPr>
+            <a:spLocks xmlns:a="http://schemas.openxmlformats.org/drawingml/2006/main" noGrp="1"/>
+          </p:cNvSpPr>
+          <p:nvPr/>
+        </p:nvSpPr>
+        <p:spPr>
+          <a:xfrm xmlns:a="http://schemas.openxmlformats.org/drawingml/2006/main">
+            <a:off x="609600" y="1524000"/>
+            <a:ext cx="7924800" cy="495300"/>
           </a:xfrm>
           <a:prstGeom xmlns:a="http://schemas.openxmlformats.org/drawingml/2006/main" prst="rect">
             <a:avLst/>
@@ -12127,45 +12628,45 @@
             <a:pPr>
               <a:defRPr sz="1950" b="0">
                 <a:solidFill>
-                  <a:srgbClr val="7FA8E3"/>
-                </a:solidFill>
-                <a:latin typeface="Calibri"/>
-                <a:ea typeface="Calibri"/>
-                <a:cs typeface="Calibri"/>
-              </a:defRPr>
-            </a:pPr>
-            <a:r>
-              <a:rPr sz="1950" b="0" u="sng">
-                <a:solidFill>
-                  <a:srgbClr val="7FA8E3"/>
-                </a:solidFill>
-                <a:latin typeface="Calibri"/>
-                <a:ea typeface="Calibri"/>
-                <a:cs typeface="Calibri"/>
-              </a:rPr>
-              <a:t>1. Install the desktop app from the official quickstart</a:t>
-            </a:r>
-          </a:p>
-        </p:txBody>
-      </p:sp>
-      <p:sp>
-        <p:nvSpPr>
-          <p:cNvPr id="5" name="c3-text-227">
-            <a:extLst xmlns:a="http://schemas.openxmlformats.org/drawingml/2006/main">
-              <a:ext uri="{FF2B5EF4-FFF2-40B4-BE49-F238E27FC236}">
-                <a16:creationId xmlns:a16="http://schemas.microsoft.com/office/drawing/2014/main" id="{DEE530FE-9D56-4C6B-8B1B-82D79E89F315}"/>
-              </a:ext>
-            </a:extLst>
-          </p:cNvPr>
-          <p:cNvSpPr>
-            <a:spLocks xmlns:a="http://schemas.openxmlformats.org/drawingml/2006/main" noGrp="1"/>
-          </p:cNvSpPr>
-          <p:nvPr/>
-        </p:nvSpPr>
-        <p:spPr>
-          <a:xfrm xmlns:a="http://schemas.openxmlformats.org/drawingml/2006/main">
-            <a:off x="609600" y="2362200"/>
-            <a:ext cx="7924800" cy="590550"/>
+                  <a:srgbClr val="ECE6DE"/>
+                </a:solidFill>
+                <a:latin typeface="Calibri"/>
+                <a:ea typeface="Calibri"/>
+                <a:cs typeface="Calibri"/>
+              </a:defRPr>
+            </a:pPr>
+            <a:r>
+              <a:rPr sz="1950" b="0">
+                <a:solidFill>
+                  <a:srgbClr val="ECE6DE"/>
+                </a:solidFill>
+                <a:latin typeface="Calibri"/>
+                <a:ea typeface="Calibri"/>
+                <a:cs typeface="Calibri"/>
+              </a:rPr>
+              <a:t>1. Open Extensions (Ctrl+Shift+X) and search for Codex.</a:t>
+            </a:r>
+          </a:p>
+        </p:txBody>
+      </p:sp>
+      <p:sp>
+        <p:nvSpPr>
+          <p:cNvPr id="5" name="c3-text-235">
+            <a:extLst xmlns:a="http://schemas.openxmlformats.org/drawingml/2006/main">
+              <a:ext uri="{FF2B5EF4-FFF2-40B4-BE49-F238E27FC236}">
+                <a16:creationId xmlns:a16="http://schemas.microsoft.com/office/drawing/2014/main" id="{3892D147-3E1D-4A22-9CB1-5E82D3D28405}"/>
+              </a:ext>
+            </a:extLst>
+          </p:cNvPr>
+          <p:cNvSpPr>
+            <a:spLocks xmlns:a="http://schemas.openxmlformats.org/drawingml/2006/main" noGrp="1"/>
+          </p:cNvSpPr>
+          <p:nvPr/>
+        </p:nvSpPr>
+        <p:spPr>
+          <a:xfrm xmlns:a="http://schemas.openxmlformats.org/drawingml/2006/main">
+            <a:off x="609600" y="2200275"/>
+            <a:ext cx="7924800" cy="495300"/>
           </a:xfrm>
           <a:prstGeom xmlns:a="http://schemas.openxmlformats.org/drawingml/2006/main" prst="rect">
             <a:avLst/>
@@ -12200,29 +12701,29 @@
                 <a:ea typeface="Calibri"/>
                 <a:cs typeface="Calibri"/>
               </a:rPr>
-              <a:t>2. Sign in with ChatGPT and open a new folder: codex-demo.</a:t>
-            </a:r>
-          </a:p>
-        </p:txBody>
-      </p:sp>
-      <p:sp>
-        <p:nvSpPr>
-          <p:cNvPr id="6" name="c3-text-228">
-            <a:extLst xmlns:a="http://schemas.openxmlformats.org/drawingml/2006/main">
-              <a:ext uri="{FF2B5EF4-FFF2-40B4-BE49-F238E27FC236}">
-                <a16:creationId xmlns:a16="http://schemas.microsoft.com/office/drawing/2014/main" id="{F9D74AE8-48BF-4DCC-8A58-BBBDD7C79D82}"/>
-              </a:ext>
-            </a:extLst>
-          </p:cNvPr>
-          <p:cNvSpPr>
-            <a:spLocks xmlns:a="http://schemas.openxmlformats.org/drawingml/2006/main" noGrp="1"/>
-          </p:cNvSpPr>
-          <p:nvPr/>
-        </p:nvSpPr>
-        <p:spPr>
-          <a:xfrm xmlns:a="http://schemas.openxmlformats.org/drawingml/2006/main">
-            <a:off x="609600" y="3219450"/>
-            <a:ext cx="7924800" cy="590550"/>
+              <a:t>2. Install Codex, published by OpenAI.</a:t>
+            </a:r>
+          </a:p>
+        </p:txBody>
+      </p:sp>
+      <p:sp>
+        <p:nvSpPr>
+          <p:cNvPr id="6" name="c3-text-236">
+            <a:extLst xmlns:a="http://schemas.openxmlformats.org/drawingml/2006/main">
+              <a:ext uri="{FF2B5EF4-FFF2-40B4-BE49-F238E27FC236}">
+                <a16:creationId xmlns:a16="http://schemas.microsoft.com/office/drawing/2014/main" id="{062F99A4-5D06-4D99-9BAA-7DC87AE8E77F}"/>
+              </a:ext>
+            </a:extLst>
+          </p:cNvPr>
+          <p:cNvSpPr>
+            <a:spLocks xmlns:a="http://schemas.openxmlformats.org/drawingml/2006/main" noGrp="1"/>
+          </p:cNvSpPr>
+          <p:nvPr/>
+        </p:nvSpPr>
+        <p:spPr>
+          <a:xfrm xmlns:a="http://schemas.openxmlformats.org/drawingml/2006/main">
+            <a:off x="609600" y="2876550"/>
+            <a:ext cx="7924800" cy="495300"/>
           </a:xfrm>
           <a:prstGeom xmlns:a="http://schemas.openxmlformats.org/drawingml/2006/main" prst="rect">
             <a:avLst/>
@@ -12257,17 +12758,132 @@
                 <a:ea typeface="Calibri"/>
                 <a:cs typeface="Calibri"/>
               </a:rPr>
-              <a:t>3. Try one small task before opening the course project.</a:t>
-            </a:r>
-          </a:p>
-        </p:txBody>
-      </p:sp>
-      <p:sp>
-        <p:nvSpPr>
-          <p:cNvPr id="7" name="c3-text-329">
-            <a:extLst xmlns:a="http://schemas.openxmlformats.org/drawingml/2006/main">
-              <a:ext uri="{FF2B5EF4-FFF2-40B4-BE49-F238E27FC236}">
-                <a16:creationId xmlns:a16="http://schemas.microsoft.com/office/drawing/2014/main" id="{D9A67468-7E69-4B15-9D20-346CA1EFB1A3}"/>
+              <a:t>3. Open the Codex panel and sign in with ChatGPT.</a:t>
+            </a:r>
+          </a:p>
+        </p:txBody>
+      </p:sp>
+      <p:sp>
+        <p:nvSpPr>
+          <p:cNvPr id="7" name="c3-text-237">
+            <a:extLst xmlns:a="http://schemas.openxmlformats.org/drawingml/2006/main">
+              <a:ext uri="{FF2B5EF4-FFF2-40B4-BE49-F238E27FC236}">
+                <a16:creationId xmlns:a16="http://schemas.microsoft.com/office/drawing/2014/main" id="{AB67416A-8BE2-49CA-A4C8-964496C33D2C}"/>
+              </a:ext>
+            </a:extLst>
+          </p:cNvPr>
+          <p:cNvSpPr>
+            <a:spLocks xmlns:a="http://schemas.openxmlformats.org/drawingml/2006/main" noGrp="1"/>
+          </p:cNvSpPr>
+          <p:nvPr/>
+        </p:nvSpPr>
+        <p:spPr>
+          <a:xfrm xmlns:a="http://schemas.openxmlformats.org/drawingml/2006/main">
+            <a:off x="609600" y="3552825"/>
+            <a:ext cx="7924800" cy="542925"/>
+          </a:xfrm>
+          <a:prstGeom xmlns:a="http://schemas.openxmlformats.org/drawingml/2006/main" prst="rect">
+            <a:avLst/>
+          </a:prstGeom>
+          <a:noFill xmlns:a="http://schemas.openxmlformats.org/drawingml/2006/main"/>
+          <a:ln xmlns:a="http://schemas.openxmlformats.org/drawingml/2006/main" w="0">
+            <a:noFill/>
+          </a:ln>
+        </p:spPr>
+        <p:txBody>
+          <a:bodyPr xmlns:a="http://schemas.openxmlformats.org/drawingml/2006/main" wrap="square" lIns="9525" tIns="9525" rIns="9525" bIns="9525" anchor="ctr">
+            <a:noAutofit/>
+          </a:bodyPr>
+          <a:lstStyle xmlns:a="http://schemas.openxmlformats.org/drawingml/2006/main"/>
+          <a:p xmlns:a="http://schemas.openxmlformats.org/drawingml/2006/main">
+            <a:pPr>
+              <a:defRPr sz="1950" b="0">
+                <a:solidFill>
+                  <a:srgbClr val="ECE6DE"/>
+                </a:solidFill>
+                <a:latin typeface="Calibri"/>
+                <a:ea typeface="Calibri"/>
+                <a:cs typeface="Calibri"/>
+              </a:defRPr>
+            </a:pPr>
+            <a:r>
+              <a:rPr sz="1950" b="0">
+                <a:solidFill>
+                  <a:srgbClr val="ECE6DE"/>
+                </a:solidFill>
+                <a:latin typeface="Calibri"/>
+                <a:ea typeface="Calibri"/>
+                <a:cs typeface="Calibri"/>
+              </a:rPr>
+              <a:t>4. Open the codex-demo folder in VS Code and start a chat.</a:t>
+            </a:r>
+          </a:p>
+        </p:txBody>
+      </p:sp>
+      <p:sp>
+        <p:nvSpPr>
+          <p:cNvPr id="8" name="c3-text-238">
+            <a:hlinkClick xmlns:r="http://schemas.openxmlformats.org/officeDocument/2006/relationships" xmlns:a="http://schemas.openxmlformats.org/drawingml/2006/main" r:id="Rda260804d73a4db3"/>
+            <a:extLst xmlns:a="http://schemas.openxmlformats.org/drawingml/2006/main">
+              <a:ext uri="{FF2B5EF4-FFF2-40B4-BE49-F238E27FC236}">
+                <a16:creationId xmlns:a16="http://schemas.microsoft.com/office/drawing/2014/main" id="{B72B8FEE-5C73-47DE-BE85-2ED08A0CBC06}"/>
+              </a:ext>
+            </a:extLst>
+          </p:cNvPr>
+          <p:cNvSpPr>
+            <a:spLocks xmlns:a="http://schemas.openxmlformats.org/drawingml/2006/main" noGrp="1"/>
+          </p:cNvSpPr>
+          <p:nvPr/>
+        </p:nvSpPr>
+        <p:spPr>
+          <a:xfrm xmlns:a="http://schemas.openxmlformats.org/drawingml/2006/main">
+            <a:off x="609600" y="4343400"/>
+            <a:ext cx="7924800" cy="333375"/>
+          </a:xfrm>
+          <a:prstGeom xmlns:a="http://schemas.openxmlformats.org/drawingml/2006/main" prst="rect">
+            <a:avLst/>
+          </a:prstGeom>
+          <a:noFill xmlns:a="http://schemas.openxmlformats.org/drawingml/2006/main"/>
+          <a:ln xmlns:a="http://schemas.openxmlformats.org/drawingml/2006/main" w="0">
+            <a:noFill/>
+          </a:ln>
+        </p:spPr>
+        <p:txBody>
+          <a:bodyPr xmlns:a="http://schemas.openxmlformats.org/drawingml/2006/main" wrap="square" lIns="9525" tIns="9525" rIns="9525" bIns="9525" anchor="ctr">
+            <a:noAutofit/>
+          </a:bodyPr>
+          <a:lstStyle xmlns:a="http://schemas.openxmlformats.org/drawingml/2006/main"/>
+          <a:p xmlns:a="http://schemas.openxmlformats.org/drawingml/2006/main">
+            <a:pPr>
+              <a:defRPr sz="1650" b="0">
+                <a:solidFill>
+                  <a:srgbClr val="7FA8E3"/>
+                </a:solidFill>
+                <a:latin typeface="Calibri"/>
+                <a:ea typeface="Calibri"/>
+                <a:cs typeface="Calibri"/>
+              </a:defRPr>
+            </a:pPr>
+            <a:r>
+              <a:rPr sz="1650" b="0" u="sng">
+                <a:solidFill>
+                  <a:srgbClr val="7FA8E3"/>
+                </a:solidFill>
+                <a:latin typeface="Calibri"/>
+                <a:ea typeface="Calibri"/>
+                <a:cs typeface="Calibri"/>
+              </a:rPr>
+              <a:t>Open the official Codex extension</a:t>
+            </a:r>
+          </a:p>
+        </p:txBody>
+      </p:sp>
+      <p:sp>
+        <p:nvSpPr>
+          <p:cNvPr id="9" name="c3-text-347">
+            <a:extLst xmlns:a="http://schemas.openxmlformats.org/drawingml/2006/main">
+              <a:ext uri="{FF2B5EF4-FFF2-40B4-BE49-F238E27FC236}">
+                <a16:creationId xmlns:a16="http://schemas.microsoft.com/office/drawing/2014/main" id="{061F7C1D-F250-4B34-942E-2CB607C0A96F}"/>
               </a:ext>
             </a:extLst>
           </p:cNvPr>
@@ -12322,7 +12938,7 @@
     </p:spTree>
     <p:extLst>
       <p:ext uri="{BB962C8B-B14F-4D97-AF65-F5344CB8AC3E}">
-        <p14:creationId xmlns:p14="http://schemas.microsoft.com/office/powerpoint/2010/main" val="1236334534"/>
+        <p14:creationId xmlns:p14="http://schemas.microsoft.com/office/powerpoint/2010/main" val="2044670408"/>
       </p:ext>
     </p:extLst>
   </p:cSld>
@@ -12350,10 +12966,10 @@
       </p:grpSpPr>
       <p:sp>
         <p:nvSpPr>
-          <p:cNvPr id="8" name="c3-text-229">
-            <a:extLst xmlns:a="http://schemas.openxmlformats.org/drawingml/2006/main">
-              <a:ext uri="{FF2B5EF4-FFF2-40B4-BE49-F238E27FC236}">
-                <a16:creationId xmlns:a16="http://schemas.microsoft.com/office/drawing/2014/main" id="{818727E1-9A4E-4BE8-94C6-E5CBAFDDE664}"/>
+          <p:cNvPr id="8" name="c3-text-239">
+            <a:extLst xmlns:a="http://schemas.openxmlformats.org/drawingml/2006/main">
+              <a:ext uri="{FF2B5EF4-FFF2-40B4-BE49-F238E27FC236}">
+                <a16:creationId xmlns:a16="http://schemas.microsoft.com/office/drawing/2014/main" id="{388846F4-BCD9-48FB-81D2-9E095F0D7F98}"/>
               </a:ext>
             </a:extLst>
           </p:cNvPr>
@@ -12407,10 +13023,10 @@
       </p:sp>
       <p:sp>
         <p:nvSpPr>
-          <p:cNvPr id="2" name="c3-text-230">
-            <a:extLst xmlns:a="http://schemas.openxmlformats.org/drawingml/2006/main">
-              <a:ext uri="{FF2B5EF4-FFF2-40B4-BE49-F238E27FC236}">
-                <a16:creationId xmlns:a16="http://schemas.microsoft.com/office/drawing/2014/main" id="{722DD8B2-3B9E-485B-BE81-9CB7305C2527}"/>
+          <p:cNvPr id="2" name="c3-text-240">
+            <a:extLst xmlns:a="http://schemas.openxmlformats.org/drawingml/2006/main">
+              <a:ext uri="{FF2B5EF4-FFF2-40B4-BE49-F238E27FC236}">
+                <a16:creationId xmlns:a16="http://schemas.microsoft.com/office/drawing/2014/main" id="{A98DCB60-850F-4863-99B2-5AA396B84B54}"/>
               </a:ext>
             </a:extLst>
           </p:cNvPr>
@@ -12464,10 +13080,10 @@
       </p:sp>
       <p:sp>
         <p:nvSpPr>
-          <p:cNvPr id="3" name="c3-text-231">
-            <a:extLst xmlns:a="http://schemas.openxmlformats.org/drawingml/2006/main">
-              <a:ext uri="{FF2B5EF4-FFF2-40B4-BE49-F238E27FC236}">
-                <a16:creationId xmlns:a16="http://schemas.microsoft.com/office/drawing/2014/main" id="{11D7B945-6EED-4DFF-9D6E-2D94603811DA}"/>
+          <p:cNvPr id="3" name="c3-text-241">
+            <a:extLst xmlns:a="http://schemas.openxmlformats.org/drawingml/2006/main">
+              <a:ext uri="{FF2B5EF4-FFF2-40B4-BE49-F238E27FC236}">
+                <a16:creationId xmlns:a16="http://schemas.microsoft.com/office/drawing/2014/main" id="{4F9A66ED-383E-407B-8994-6274468823D6}"/>
               </a:ext>
             </a:extLst>
           </p:cNvPr>
@@ -12521,10 +13137,10 @@
       </p:sp>
       <p:sp>
         <p:nvSpPr>
-          <p:cNvPr id="4" name="c3-text-232">
-            <a:extLst xmlns:a="http://schemas.openxmlformats.org/drawingml/2006/main">
-              <a:ext uri="{FF2B5EF4-FFF2-40B4-BE49-F238E27FC236}">
-                <a16:creationId xmlns:a16="http://schemas.microsoft.com/office/drawing/2014/main" id="{20A12B85-5BFB-4828-B3E1-D620E069BE3D}"/>
+          <p:cNvPr id="4" name="c3-text-242">
+            <a:extLst xmlns:a="http://schemas.openxmlformats.org/drawingml/2006/main">
+              <a:ext uri="{FF2B5EF4-FFF2-40B4-BE49-F238E27FC236}">
+                <a16:creationId xmlns:a16="http://schemas.microsoft.com/office/drawing/2014/main" id="{3401ADD3-1E9A-4B62-9038-3276D7B21B00}"/>
               </a:ext>
             </a:extLst>
           </p:cNvPr>
@@ -12578,10 +13194,10 @@
       </p:sp>
       <p:sp>
         <p:nvSpPr>
-          <p:cNvPr id="5" name="c3-text-233">
-            <a:extLst xmlns:a="http://schemas.openxmlformats.org/drawingml/2006/main">
-              <a:ext uri="{FF2B5EF4-FFF2-40B4-BE49-F238E27FC236}">
-                <a16:creationId xmlns:a16="http://schemas.microsoft.com/office/drawing/2014/main" id="{EF5F6BD4-A2AC-439F-9E95-F4DFDA0A4117}"/>
+          <p:cNvPr id="5" name="c3-text-243">
+            <a:extLst xmlns:a="http://schemas.openxmlformats.org/drawingml/2006/main">
+              <a:ext uri="{FF2B5EF4-FFF2-40B4-BE49-F238E27FC236}">
+                <a16:creationId xmlns:a16="http://schemas.microsoft.com/office/drawing/2014/main" id="{0F778CDB-32A2-4833-BA82-BD6A8B2607B4}"/>
               </a:ext>
             </a:extLst>
           </p:cNvPr>
@@ -12704,10 +13320,10 @@
       </p:sp>
       <p:sp>
         <p:nvSpPr>
-          <p:cNvPr id="6" name="c3-text-234">
-            <a:extLst xmlns:a="http://schemas.openxmlformats.org/drawingml/2006/main">
-              <a:ext uri="{FF2B5EF4-FFF2-40B4-BE49-F238E27FC236}">
-                <a16:creationId xmlns:a16="http://schemas.microsoft.com/office/drawing/2014/main" id="{585EB925-AAE1-4EF4-A98E-84BA19F0DE66}"/>
+          <p:cNvPr id="6" name="c3-text-244">
+            <a:extLst xmlns:a="http://schemas.openxmlformats.org/drawingml/2006/main">
+              <a:ext uri="{FF2B5EF4-FFF2-40B4-BE49-F238E27FC236}">
+                <a16:creationId xmlns:a16="http://schemas.microsoft.com/office/drawing/2014/main" id="{6B9CF057-6DFE-43E2-AD9E-52CB635C84AA}"/>
               </a:ext>
             </a:extLst>
           </p:cNvPr>
@@ -12761,10 +13377,10 @@
       </p:sp>
       <p:sp>
         <p:nvSpPr>
-          <p:cNvPr id="7" name="c3-text-330">
-            <a:extLst xmlns:a="http://schemas.openxmlformats.org/drawingml/2006/main">
-              <a:ext uri="{FF2B5EF4-FFF2-40B4-BE49-F238E27FC236}">
-                <a16:creationId xmlns:a16="http://schemas.microsoft.com/office/drawing/2014/main" id="{CBD6FE18-5659-4F58-BD06-5E5512B15F71}"/>
+          <p:cNvPr id="7" name="c3-text-348">
+            <a:extLst xmlns:a="http://schemas.openxmlformats.org/drawingml/2006/main">
+              <a:ext uri="{FF2B5EF4-FFF2-40B4-BE49-F238E27FC236}">
+                <a16:creationId xmlns:a16="http://schemas.microsoft.com/office/drawing/2014/main" id="{F755E782-D2AE-4B77-BCE5-CF7D4A21698F}"/>
               </a:ext>
             </a:extLst>
           </p:cNvPr>
@@ -12819,7 +13435,7 @@
     </p:spTree>
     <p:extLst>
       <p:ext uri="{BB962C8B-B14F-4D97-AF65-F5344CB8AC3E}">
-        <p14:creationId xmlns:p14="http://schemas.microsoft.com/office/powerpoint/2010/main" val="1127984243"/>
+        <p14:creationId xmlns:p14="http://schemas.microsoft.com/office/powerpoint/2010/main" val="1415975028"/>
       </p:ext>
     </p:extLst>
   </p:cSld>
@@ -12847,10 +13463,10 @@
       </p:grpSpPr>
       <p:sp>
         <p:nvSpPr>
-          <p:cNvPr id="8" name="c3-text-235">
-            <a:extLst xmlns:a="http://schemas.openxmlformats.org/drawingml/2006/main">
-              <a:ext uri="{FF2B5EF4-FFF2-40B4-BE49-F238E27FC236}">
-                <a16:creationId xmlns:a16="http://schemas.microsoft.com/office/drawing/2014/main" id="{34F0299A-9888-4056-9B0D-0173977C405E}"/>
+          <p:cNvPr id="8" name="c3-text-245">
+            <a:extLst xmlns:a="http://schemas.openxmlformats.org/drawingml/2006/main">
+              <a:ext uri="{FF2B5EF4-FFF2-40B4-BE49-F238E27FC236}">
+                <a16:creationId xmlns:a16="http://schemas.microsoft.com/office/drawing/2014/main" id="{0AB9F3AE-8A23-4637-AA3C-7118C716B7B1}"/>
               </a:ext>
             </a:extLst>
           </p:cNvPr>
@@ -12904,10 +13520,10 @@
       </p:sp>
       <p:sp>
         <p:nvSpPr>
-          <p:cNvPr id="2" name="c3-text-236">
-            <a:extLst xmlns:a="http://schemas.openxmlformats.org/drawingml/2006/main">
-              <a:ext uri="{FF2B5EF4-FFF2-40B4-BE49-F238E27FC236}">
-                <a16:creationId xmlns:a16="http://schemas.microsoft.com/office/drawing/2014/main" id="{045036E5-2D08-407B-9A3F-589CCA8395C9}"/>
+          <p:cNvPr id="2" name="c3-text-246">
+            <a:extLst xmlns:a="http://schemas.openxmlformats.org/drawingml/2006/main">
+              <a:ext uri="{FF2B5EF4-FFF2-40B4-BE49-F238E27FC236}">
+                <a16:creationId xmlns:a16="http://schemas.microsoft.com/office/drawing/2014/main" id="{2E95A778-7353-4564-9306-6A064490E852}"/>
               </a:ext>
             </a:extLst>
           </p:cNvPr>
@@ -12961,10 +13577,10 @@
       </p:sp>
       <p:sp>
         <p:nvSpPr>
-          <p:cNvPr id="3" name="c3-text-237">
-            <a:extLst xmlns:a="http://schemas.openxmlformats.org/drawingml/2006/main">
-              <a:ext uri="{FF2B5EF4-FFF2-40B4-BE49-F238E27FC236}">
-                <a16:creationId xmlns:a16="http://schemas.microsoft.com/office/drawing/2014/main" id="{F4689CCB-B68C-4692-A3A6-F8D99113AECE}"/>
+          <p:cNvPr id="3" name="c3-text-247">
+            <a:extLst xmlns:a="http://schemas.openxmlformats.org/drawingml/2006/main">
+              <a:ext uri="{FF2B5EF4-FFF2-40B4-BE49-F238E27FC236}">
+                <a16:creationId xmlns:a16="http://schemas.microsoft.com/office/drawing/2014/main" id="{40F41678-61AE-41E8-8CCD-B118EA5054AB}"/>
               </a:ext>
             </a:extLst>
           </p:cNvPr>
@@ -13018,10 +13634,10 @@
       </p:sp>
       <p:sp>
         <p:nvSpPr>
-          <p:cNvPr id="4" name="c3-text-238">
-            <a:extLst xmlns:a="http://schemas.openxmlformats.org/drawingml/2006/main">
-              <a:ext uri="{FF2B5EF4-FFF2-40B4-BE49-F238E27FC236}">
-                <a16:creationId xmlns:a16="http://schemas.microsoft.com/office/drawing/2014/main" id="{6542BF2F-B78A-4779-A3FF-84F560612A75}"/>
+          <p:cNvPr id="4" name="c3-text-248">
+            <a:extLst xmlns:a="http://schemas.openxmlformats.org/drawingml/2006/main">
+              <a:ext uri="{FF2B5EF4-FFF2-40B4-BE49-F238E27FC236}">
+                <a16:creationId xmlns:a16="http://schemas.microsoft.com/office/drawing/2014/main" id="{B7CF7F90-3FD0-49E4-809E-418228BE1FDF}"/>
               </a:ext>
             </a:extLst>
           </p:cNvPr>
@@ -13075,10 +13691,10 @@
       </p:sp>
       <p:sp>
         <p:nvSpPr>
-          <p:cNvPr id="5" name="c3-text-239">
-            <a:extLst xmlns:a="http://schemas.openxmlformats.org/drawingml/2006/main">
-              <a:ext uri="{FF2B5EF4-FFF2-40B4-BE49-F238E27FC236}">
-                <a16:creationId xmlns:a16="http://schemas.microsoft.com/office/drawing/2014/main" id="{F385A88D-DE03-473B-B5D9-021C2AAE1D89}"/>
+          <p:cNvPr id="5" name="c3-text-249">
+            <a:extLst xmlns:a="http://schemas.openxmlformats.org/drawingml/2006/main">
+              <a:ext uri="{FF2B5EF4-FFF2-40B4-BE49-F238E27FC236}">
+                <a16:creationId xmlns:a16="http://schemas.microsoft.com/office/drawing/2014/main" id="{A5C38DBC-6DC3-4460-8B13-85A6B4B04044}"/>
               </a:ext>
             </a:extLst>
           </p:cNvPr>
@@ -13132,10 +13748,10 @@
       </p:sp>
       <p:sp>
         <p:nvSpPr>
-          <p:cNvPr id="6" name="c3-text-240">
-            <a:extLst xmlns:a="http://schemas.openxmlformats.org/drawingml/2006/main">
-              <a:ext uri="{FF2B5EF4-FFF2-40B4-BE49-F238E27FC236}">
-                <a16:creationId xmlns:a16="http://schemas.microsoft.com/office/drawing/2014/main" id="{E626EC1A-B681-4456-9B44-E66B1410BABF}"/>
+          <p:cNvPr id="6" name="c3-text-250">
+            <a:extLst xmlns:a="http://schemas.openxmlformats.org/drawingml/2006/main">
+              <a:ext uri="{FF2B5EF4-FFF2-40B4-BE49-F238E27FC236}">
+                <a16:creationId xmlns:a16="http://schemas.microsoft.com/office/drawing/2014/main" id="{EEA0DD6B-9826-4A7D-BA20-CAE520A42634}"/>
               </a:ext>
             </a:extLst>
           </p:cNvPr>
@@ -13189,10 +13805,10 @@
       </p:sp>
       <p:sp>
         <p:nvSpPr>
-          <p:cNvPr id="7" name="c3-text-331">
-            <a:extLst xmlns:a="http://schemas.openxmlformats.org/drawingml/2006/main">
-              <a:ext uri="{FF2B5EF4-FFF2-40B4-BE49-F238E27FC236}">
-                <a16:creationId xmlns:a16="http://schemas.microsoft.com/office/drawing/2014/main" id="{E27102B6-7177-4218-B437-B4E180CADA38}"/>
+          <p:cNvPr id="7" name="c3-text-349">
+            <a:extLst xmlns:a="http://schemas.openxmlformats.org/drawingml/2006/main">
+              <a:ext uri="{FF2B5EF4-FFF2-40B4-BE49-F238E27FC236}">
+                <a16:creationId xmlns:a16="http://schemas.microsoft.com/office/drawing/2014/main" id="{93BAF674-C694-4455-B620-13301CAE8A3D}"/>
               </a:ext>
             </a:extLst>
           </p:cNvPr>
@@ -13247,7 +13863,7 @@
     </p:spTree>
     <p:extLst>
       <p:ext uri="{BB962C8B-B14F-4D97-AF65-F5344CB8AC3E}">
-        <p14:creationId xmlns:p14="http://schemas.microsoft.com/office/powerpoint/2010/main" val="1184885143"/>
+        <p14:creationId xmlns:p14="http://schemas.microsoft.com/office/powerpoint/2010/main" val="643208727"/>
       </p:ext>
     </p:extLst>
   </p:cSld>
@@ -13275,10 +13891,10 @@
       </p:grpSpPr>
       <p:sp>
         <p:nvSpPr>
-          <p:cNvPr id="7" name="c3-text-241">
-            <a:extLst xmlns:a="http://schemas.openxmlformats.org/drawingml/2006/main">
-              <a:ext uri="{FF2B5EF4-FFF2-40B4-BE49-F238E27FC236}">
-                <a16:creationId xmlns:a16="http://schemas.microsoft.com/office/drawing/2014/main" id="{AEF626AA-23F3-4851-BE35-A770A5F92B96}"/>
+          <p:cNvPr id="7" name="c3-text-251">
+            <a:extLst xmlns:a="http://schemas.openxmlformats.org/drawingml/2006/main">
+              <a:ext uri="{FF2B5EF4-FFF2-40B4-BE49-F238E27FC236}">
+                <a16:creationId xmlns:a16="http://schemas.microsoft.com/office/drawing/2014/main" id="{00B7CFA3-A93C-4468-A3A3-C979A075D48C}"/>
               </a:ext>
             </a:extLst>
           </p:cNvPr>
@@ -13332,10 +13948,10 @@
       </p:sp>
       <p:sp>
         <p:nvSpPr>
-          <p:cNvPr id="2" name="c3-text-242">
-            <a:extLst xmlns:a="http://schemas.openxmlformats.org/drawingml/2006/main">
-              <a:ext uri="{FF2B5EF4-FFF2-40B4-BE49-F238E27FC236}">
-                <a16:creationId xmlns:a16="http://schemas.microsoft.com/office/drawing/2014/main" id="{A8541889-4807-4E4B-85D9-9C71C961E786}"/>
+          <p:cNvPr id="2" name="c3-text-252">
+            <a:extLst xmlns:a="http://schemas.openxmlformats.org/drawingml/2006/main">
+              <a:ext uri="{FF2B5EF4-FFF2-40B4-BE49-F238E27FC236}">
+                <a16:creationId xmlns:a16="http://schemas.microsoft.com/office/drawing/2014/main" id="{52449A07-61D3-4FC1-9498-A6D2BF1BF72A}"/>
               </a:ext>
             </a:extLst>
           </p:cNvPr>
@@ -13389,10 +14005,10 @@
       </p:sp>
       <p:sp>
         <p:nvSpPr>
-          <p:cNvPr id="3" name="c3-text-243">
-            <a:extLst xmlns:a="http://schemas.openxmlformats.org/drawingml/2006/main">
-              <a:ext uri="{FF2B5EF4-FFF2-40B4-BE49-F238E27FC236}">
-                <a16:creationId xmlns:a16="http://schemas.microsoft.com/office/drawing/2014/main" id="{58716158-2828-400C-947A-0800EC74E7BC}"/>
+          <p:cNvPr id="3" name="c3-text-253">
+            <a:extLst xmlns:a="http://schemas.openxmlformats.org/drawingml/2006/main">
+              <a:ext uri="{FF2B5EF4-FFF2-40B4-BE49-F238E27FC236}">
+                <a16:creationId xmlns:a16="http://schemas.microsoft.com/office/drawing/2014/main" id="{92C9A617-8BED-4336-A4C6-4F37F56E2FF5}"/>
               </a:ext>
             </a:extLst>
           </p:cNvPr>
@@ -13446,10 +14062,10 @@
       </p:sp>
       <p:sp>
         <p:nvSpPr>
-          <p:cNvPr id="4" name="c3-text-244">
-            <a:extLst xmlns:a="http://schemas.openxmlformats.org/drawingml/2006/main">
-              <a:ext uri="{FF2B5EF4-FFF2-40B4-BE49-F238E27FC236}">
-                <a16:creationId xmlns:a16="http://schemas.microsoft.com/office/drawing/2014/main" id="{2F1DA958-18CC-4FE2-B145-38F0364F6F73}"/>
+          <p:cNvPr id="4" name="c3-text-254">
+            <a:extLst xmlns:a="http://schemas.openxmlformats.org/drawingml/2006/main">
+              <a:ext uri="{FF2B5EF4-FFF2-40B4-BE49-F238E27FC236}">
+                <a16:creationId xmlns:a16="http://schemas.microsoft.com/office/drawing/2014/main" id="{2E460722-2D68-4696-ABF0-F47EC24B0395}"/>
               </a:ext>
             </a:extLst>
           </p:cNvPr>
@@ -13664,10 +14280,10 @@
       </p:sp>
       <p:sp>
         <p:nvSpPr>
-          <p:cNvPr id="5" name="c3-text-245">
-            <a:extLst xmlns:a="http://schemas.openxmlformats.org/drawingml/2006/main">
-              <a:ext uri="{FF2B5EF4-FFF2-40B4-BE49-F238E27FC236}">
-                <a16:creationId xmlns:a16="http://schemas.microsoft.com/office/drawing/2014/main" id="{5807611C-AAE4-4DC0-AACB-472C855DDBFC}"/>
+          <p:cNvPr id="5" name="c3-text-255">
+            <a:extLst xmlns:a="http://schemas.openxmlformats.org/drawingml/2006/main">
+              <a:ext uri="{FF2B5EF4-FFF2-40B4-BE49-F238E27FC236}">
+                <a16:creationId xmlns:a16="http://schemas.microsoft.com/office/drawing/2014/main" id="{CE6BC9CE-C183-483A-92D5-EEC96AD696CF}"/>
               </a:ext>
             </a:extLst>
           </p:cNvPr>
@@ -13721,10 +14337,10 @@
       </p:sp>
       <p:sp>
         <p:nvSpPr>
-          <p:cNvPr id="6" name="c3-text-332">
-            <a:extLst xmlns:a="http://schemas.openxmlformats.org/drawingml/2006/main">
-              <a:ext uri="{FF2B5EF4-FFF2-40B4-BE49-F238E27FC236}">
-                <a16:creationId xmlns:a16="http://schemas.microsoft.com/office/drawing/2014/main" id="{F1299C90-22B9-4CEF-9A11-627A0724D6C9}"/>
+          <p:cNvPr id="6" name="c3-text-350">
+            <a:extLst xmlns:a="http://schemas.openxmlformats.org/drawingml/2006/main">
+              <a:ext uri="{FF2B5EF4-FFF2-40B4-BE49-F238E27FC236}">
+                <a16:creationId xmlns:a16="http://schemas.microsoft.com/office/drawing/2014/main" id="{2BBA2F27-ED25-4559-816A-75A2D5CBD897}"/>
               </a:ext>
             </a:extLst>
           </p:cNvPr>
@@ -13779,7 +14395,7 @@
     </p:spTree>
     <p:extLst>
       <p:ext uri="{BB962C8B-B14F-4D97-AF65-F5344CB8AC3E}">
-        <p14:creationId xmlns:p14="http://schemas.microsoft.com/office/powerpoint/2010/main" val="1733599429"/>
+        <p14:creationId xmlns:p14="http://schemas.microsoft.com/office/powerpoint/2010/main" val="1734824745"/>
       </p:ext>
     </p:extLst>
   </p:cSld>
@@ -13807,10 +14423,10 @@
       </p:grpSpPr>
       <p:sp>
         <p:nvSpPr>
-          <p:cNvPr id="9" name="c3-text-246">
-            <a:extLst xmlns:a="http://schemas.openxmlformats.org/drawingml/2006/main">
-              <a:ext uri="{FF2B5EF4-FFF2-40B4-BE49-F238E27FC236}">
-                <a16:creationId xmlns:a16="http://schemas.microsoft.com/office/drawing/2014/main" id="{752F0944-6B3D-4965-9D90-0C3B382DFD7D}"/>
+          <p:cNvPr id="9" name="c3-text-256">
+            <a:extLst xmlns:a="http://schemas.openxmlformats.org/drawingml/2006/main">
+              <a:ext uri="{FF2B5EF4-FFF2-40B4-BE49-F238E27FC236}">
+                <a16:creationId xmlns:a16="http://schemas.microsoft.com/office/drawing/2014/main" id="{A5A5DEBE-68BB-4962-9B04-87664DA300C0}"/>
               </a:ext>
             </a:extLst>
           </p:cNvPr>
@@ -13864,10 +14480,10 @@
       </p:sp>
       <p:sp>
         <p:nvSpPr>
-          <p:cNvPr id="2" name="c3-text-247">
-            <a:extLst xmlns:a="http://schemas.openxmlformats.org/drawingml/2006/main">
-              <a:ext uri="{FF2B5EF4-FFF2-40B4-BE49-F238E27FC236}">
-                <a16:creationId xmlns:a16="http://schemas.microsoft.com/office/drawing/2014/main" id="{A1E81CE9-6855-4FD6-8AE0-D8E1120B58E8}"/>
+          <p:cNvPr id="2" name="c3-text-257">
+            <a:extLst xmlns:a="http://schemas.openxmlformats.org/drawingml/2006/main">
+              <a:ext uri="{FF2B5EF4-FFF2-40B4-BE49-F238E27FC236}">
+                <a16:creationId xmlns:a16="http://schemas.microsoft.com/office/drawing/2014/main" id="{DAC35777-5E1D-478A-BA60-714E1D1FBBFA}"/>
               </a:ext>
             </a:extLst>
           </p:cNvPr>
@@ -13921,10 +14537,10 @@
       </p:sp>
       <p:sp>
         <p:nvSpPr>
-          <p:cNvPr id="3" name="c3-text-248">
-            <a:extLst xmlns:a="http://schemas.openxmlformats.org/drawingml/2006/main">
-              <a:ext uri="{FF2B5EF4-FFF2-40B4-BE49-F238E27FC236}">
-                <a16:creationId xmlns:a16="http://schemas.microsoft.com/office/drawing/2014/main" id="{64275B91-120E-41B5-B389-B1629102FE10}"/>
+          <p:cNvPr id="3" name="c3-text-258">
+            <a:extLst xmlns:a="http://schemas.openxmlformats.org/drawingml/2006/main">
+              <a:ext uri="{FF2B5EF4-FFF2-40B4-BE49-F238E27FC236}">
+                <a16:creationId xmlns:a16="http://schemas.microsoft.com/office/drawing/2014/main" id="{706F92E7-841C-4B3C-B0F1-B7BFAEC44128}"/>
               </a:ext>
             </a:extLst>
           </p:cNvPr>
@@ -13978,10 +14594,10 @@
       </p:sp>
       <p:sp>
         <p:nvSpPr>
-          <p:cNvPr id="4" name="c3-text-249">
-            <a:extLst xmlns:a="http://schemas.openxmlformats.org/drawingml/2006/main">
-              <a:ext uri="{FF2B5EF4-FFF2-40B4-BE49-F238E27FC236}">
-                <a16:creationId xmlns:a16="http://schemas.microsoft.com/office/drawing/2014/main" id="{F3960EAD-070B-48F5-890D-012210ADDDD2}"/>
+          <p:cNvPr id="4" name="c3-text-259">
+            <a:extLst xmlns:a="http://schemas.openxmlformats.org/drawingml/2006/main">
+              <a:ext uri="{FF2B5EF4-FFF2-40B4-BE49-F238E27FC236}">
+                <a16:creationId xmlns:a16="http://schemas.microsoft.com/office/drawing/2014/main" id="{B5D2570D-5A6A-458D-9B85-1DD89A1A0F63}"/>
               </a:ext>
             </a:extLst>
           </p:cNvPr>
@@ -14035,10 +14651,10 @@
       </p:sp>
       <p:sp>
         <p:nvSpPr>
-          <p:cNvPr id="5" name="c3-text-250">
-            <a:extLst xmlns:a="http://schemas.openxmlformats.org/drawingml/2006/main">
-              <a:ext uri="{FF2B5EF4-FFF2-40B4-BE49-F238E27FC236}">
-                <a16:creationId xmlns:a16="http://schemas.microsoft.com/office/drawing/2014/main" id="{809889A9-8872-4407-A256-1A56CBD085B0}"/>
+          <p:cNvPr id="5" name="c3-text-260">
+            <a:extLst xmlns:a="http://schemas.openxmlformats.org/drawingml/2006/main">
+              <a:ext uri="{FF2B5EF4-FFF2-40B4-BE49-F238E27FC236}">
+                <a16:creationId xmlns:a16="http://schemas.microsoft.com/office/drawing/2014/main" id="{C177981E-DADB-4F0D-84FE-4AEC158323B5}"/>
               </a:ext>
             </a:extLst>
           </p:cNvPr>
@@ -14092,10 +14708,10 @@
       </p:sp>
       <p:sp>
         <p:nvSpPr>
-          <p:cNvPr id="6" name="c3-text-251">
-            <a:extLst xmlns:a="http://schemas.openxmlformats.org/drawingml/2006/main">
-              <a:ext uri="{FF2B5EF4-FFF2-40B4-BE49-F238E27FC236}">
-                <a16:creationId xmlns:a16="http://schemas.microsoft.com/office/drawing/2014/main" id="{6145FF2B-1959-4F0E-96F4-DE434FAB6DCA}"/>
+          <p:cNvPr id="6" name="c3-text-261">
+            <a:extLst xmlns:a="http://schemas.openxmlformats.org/drawingml/2006/main">
+              <a:ext uri="{FF2B5EF4-FFF2-40B4-BE49-F238E27FC236}">
+                <a16:creationId xmlns:a16="http://schemas.microsoft.com/office/drawing/2014/main" id="{8AE35299-EAF1-446F-ADB1-51DCE8ED4DEC}"/>
               </a:ext>
             </a:extLst>
           </p:cNvPr>
@@ -14149,10 +14765,10 @@
       </p:sp>
       <p:sp>
         <p:nvSpPr>
-          <p:cNvPr id="7" name="c3-text-252">
-            <a:extLst xmlns:a="http://schemas.openxmlformats.org/drawingml/2006/main">
-              <a:ext uri="{FF2B5EF4-FFF2-40B4-BE49-F238E27FC236}">
-                <a16:creationId xmlns:a16="http://schemas.microsoft.com/office/drawing/2014/main" id="{DDF0C86A-5873-4B97-BE0C-156B40D29277}"/>
+          <p:cNvPr id="7" name="c3-text-262">
+            <a:extLst xmlns:a="http://schemas.openxmlformats.org/drawingml/2006/main">
+              <a:ext uri="{FF2B5EF4-FFF2-40B4-BE49-F238E27FC236}">
+                <a16:creationId xmlns:a16="http://schemas.microsoft.com/office/drawing/2014/main" id="{905B4D6A-7A23-45CF-BDAD-9D98BF929CF6}"/>
               </a:ext>
             </a:extLst>
           </p:cNvPr>
@@ -14206,10 +14822,10 @@
       </p:sp>
       <p:sp>
         <p:nvSpPr>
-          <p:cNvPr id="8" name="c3-text-333">
-            <a:extLst xmlns:a="http://schemas.openxmlformats.org/drawingml/2006/main">
-              <a:ext uri="{FF2B5EF4-FFF2-40B4-BE49-F238E27FC236}">
-                <a16:creationId xmlns:a16="http://schemas.microsoft.com/office/drawing/2014/main" id="{BF16A95B-5681-43F7-B24B-530CE775ED06}"/>
+          <p:cNvPr id="8" name="c3-text-351">
+            <a:extLst xmlns:a="http://schemas.openxmlformats.org/drawingml/2006/main">
+              <a:ext uri="{FF2B5EF4-FFF2-40B4-BE49-F238E27FC236}">
+                <a16:creationId xmlns:a16="http://schemas.microsoft.com/office/drawing/2014/main" id="{C0182FAF-829B-4821-88B2-38A835DF0C82}"/>
               </a:ext>
             </a:extLst>
           </p:cNvPr>
@@ -14264,7 +14880,7 @@
     </p:spTree>
     <p:extLst>
       <p:ext uri="{BB962C8B-B14F-4D97-AF65-F5344CB8AC3E}">
-        <p14:creationId xmlns:p14="http://schemas.microsoft.com/office/powerpoint/2010/main" val="29291840"/>
+        <p14:creationId xmlns:p14="http://schemas.microsoft.com/office/powerpoint/2010/main" val="995569140"/>
       </p:ext>
     </p:extLst>
   </p:cSld>
@@ -14292,10 +14908,10 @@
       </p:grpSpPr>
       <p:sp>
         <p:nvSpPr>
-          <p:cNvPr id="8" name="c3-text-253">
-            <a:extLst xmlns:a="http://schemas.openxmlformats.org/drawingml/2006/main">
-              <a:ext uri="{FF2B5EF4-FFF2-40B4-BE49-F238E27FC236}">
-                <a16:creationId xmlns:a16="http://schemas.microsoft.com/office/drawing/2014/main" id="{F0307C57-86B5-4A89-B796-D02F0D5756EA}"/>
+          <p:cNvPr id="8" name="c3-text-263">
+            <a:extLst xmlns:a="http://schemas.openxmlformats.org/drawingml/2006/main">
+              <a:ext uri="{FF2B5EF4-FFF2-40B4-BE49-F238E27FC236}">
+                <a16:creationId xmlns:a16="http://schemas.microsoft.com/office/drawing/2014/main" id="{213114E4-7D1D-4D29-BBA2-B5FCA1658D4D}"/>
               </a:ext>
             </a:extLst>
           </p:cNvPr>
@@ -14349,10 +14965,10 @@
       </p:sp>
       <p:sp>
         <p:nvSpPr>
-          <p:cNvPr id="2" name="c3-text-254">
-            <a:extLst xmlns:a="http://schemas.openxmlformats.org/drawingml/2006/main">
-              <a:ext uri="{FF2B5EF4-FFF2-40B4-BE49-F238E27FC236}">
-                <a16:creationId xmlns:a16="http://schemas.microsoft.com/office/drawing/2014/main" id="{EE9D17E9-ACF1-4237-9D30-EFC6BAAF5DED}"/>
+          <p:cNvPr id="2" name="c3-text-264">
+            <a:extLst xmlns:a="http://schemas.openxmlformats.org/drawingml/2006/main">
+              <a:ext uri="{FF2B5EF4-FFF2-40B4-BE49-F238E27FC236}">
+                <a16:creationId xmlns:a16="http://schemas.microsoft.com/office/drawing/2014/main" id="{8F7DC9DA-640B-457C-826C-B3851B3924CC}"/>
               </a:ext>
             </a:extLst>
           </p:cNvPr>
@@ -14406,10 +15022,10 @@
       </p:sp>
       <p:sp>
         <p:nvSpPr>
-          <p:cNvPr id="3" name="c3-text-255">
-            <a:extLst xmlns:a="http://schemas.openxmlformats.org/drawingml/2006/main">
-              <a:ext uri="{FF2B5EF4-FFF2-40B4-BE49-F238E27FC236}">
-                <a16:creationId xmlns:a16="http://schemas.microsoft.com/office/drawing/2014/main" id="{BC8AD749-55C1-4E81-80C0-4C0A0A2BB91B}"/>
+          <p:cNvPr id="3" name="c3-text-265">
+            <a:extLst xmlns:a="http://schemas.openxmlformats.org/drawingml/2006/main">
+              <a:ext uri="{FF2B5EF4-FFF2-40B4-BE49-F238E27FC236}">
+                <a16:creationId xmlns:a16="http://schemas.microsoft.com/office/drawing/2014/main" id="{F910374C-812C-45F5-8D13-B489FADE024F}"/>
               </a:ext>
             </a:extLst>
           </p:cNvPr>
@@ -14463,10 +15079,10 @@
       </p:sp>
       <p:sp>
         <p:nvSpPr>
-          <p:cNvPr id="4" name="c3-text-256">
-            <a:extLst xmlns:a="http://schemas.openxmlformats.org/drawingml/2006/main">
-              <a:ext uri="{FF2B5EF4-FFF2-40B4-BE49-F238E27FC236}">
-                <a16:creationId xmlns:a16="http://schemas.microsoft.com/office/drawing/2014/main" id="{2FB3079D-B3E5-41EC-9ACE-86C3AE028B13}"/>
+          <p:cNvPr id="4" name="c3-text-266">
+            <a:extLst xmlns:a="http://schemas.openxmlformats.org/drawingml/2006/main">
+              <a:ext uri="{FF2B5EF4-FFF2-40B4-BE49-F238E27FC236}">
+                <a16:creationId xmlns:a16="http://schemas.microsoft.com/office/drawing/2014/main" id="{EA355EA3-A288-42EF-94DA-D1DF16C8BA7B}"/>
               </a:ext>
             </a:extLst>
           </p:cNvPr>
@@ -14520,10 +15136,10 @@
       </p:sp>
       <p:sp>
         <p:nvSpPr>
-          <p:cNvPr id="5" name="c3-text-257">
-            <a:extLst xmlns:a="http://schemas.openxmlformats.org/drawingml/2006/main">
-              <a:ext uri="{FF2B5EF4-FFF2-40B4-BE49-F238E27FC236}">
-                <a16:creationId xmlns:a16="http://schemas.microsoft.com/office/drawing/2014/main" id="{61B40CFA-881A-45A6-89F7-8CD1260394E1}"/>
+          <p:cNvPr id="5" name="c3-text-267">
+            <a:extLst xmlns:a="http://schemas.openxmlformats.org/drawingml/2006/main">
+              <a:ext uri="{FF2B5EF4-FFF2-40B4-BE49-F238E27FC236}">
+                <a16:creationId xmlns:a16="http://schemas.microsoft.com/office/drawing/2014/main" id="{4283E8A1-A75E-41FB-94ED-FACF3ACB9C8E}"/>
               </a:ext>
             </a:extLst>
           </p:cNvPr>
@@ -14577,10 +15193,10 @@
       </p:sp>
       <p:sp>
         <p:nvSpPr>
-          <p:cNvPr id="6" name="c3-text-258">
-            <a:extLst xmlns:a="http://schemas.openxmlformats.org/drawingml/2006/main">
-              <a:ext uri="{FF2B5EF4-FFF2-40B4-BE49-F238E27FC236}">
-                <a16:creationId xmlns:a16="http://schemas.microsoft.com/office/drawing/2014/main" id="{71AA9A54-1FC3-4F3D-AABC-B98538D3C4EA}"/>
+          <p:cNvPr id="6" name="c3-text-268">
+            <a:extLst xmlns:a="http://schemas.openxmlformats.org/drawingml/2006/main">
+              <a:ext uri="{FF2B5EF4-FFF2-40B4-BE49-F238E27FC236}">
+                <a16:creationId xmlns:a16="http://schemas.microsoft.com/office/drawing/2014/main" id="{F33BB785-2EC1-4127-902F-B3521DA5B980}"/>
               </a:ext>
             </a:extLst>
           </p:cNvPr>
@@ -14634,10 +15250,10 @@
       </p:sp>
       <p:sp>
         <p:nvSpPr>
-          <p:cNvPr id="7" name="c3-text-334">
-            <a:extLst xmlns:a="http://schemas.openxmlformats.org/drawingml/2006/main">
-              <a:ext uri="{FF2B5EF4-FFF2-40B4-BE49-F238E27FC236}">
-                <a16:creationId xmlns:a16="http://schemas.microsoft.com/office/drawing/2014/main" id="{93506EFD-2D3E-4FF5-9DB2-045A071889A1}"/>
+          <p:cNvPr id="7" name="c3-text-352">
+            <a:extLst xmlns:a="http://schemas.openxmlformats.org/drawingml/2006/main">
+              <a:ext uri="{FF2B5EF4-FFF2-40B4-BE49-F238E27FC236}">
+                <a16:creationId xmlns:a16="http://schemas.microsoft.com/office/drawing/2014/main" id="{BA2C399E-4408-4726-8662-8D5EF87E6F75}"/>
               </a:ext>
             </a:extLst>
           </p:cNvPr>
@@ -14692,7 +15308,7 @@
     </p:spTree>
     <p:extLst>
       <p:ext uri="{BB962C8B-B14F-4D97-AF65-F5344CB8AC3E}">
-        <p14:creationId xmlns:p14="http://schemas.microsoft.com/office/powerpoint/2010/main" val="1181691712"/>
+        <p14:creationId xmlns:p14="http://schemas.microsoft.com/office/powerpoint/2010/main" val="2086863679"/>
       </p:ext>
     </p:extLst>
   </p:cSld>
@@ -14720,10 +15336,10 @@
       </p:grpSpPr>
       <p:sp>
         <p:nvSpPr>
-          <p:cNvPr id="8" name="c3-text-259">
-            <a:extLst xmlns:a="http://schemas.openxmlformats.org/drawingml/2006/main">
-              <a:ext uri="{FF2B5EF4-FFF2-40B4-BE49-F238E27FC236}">
-                <a16:creationId xmlns:a16="http://schemas.microsoft.com/office/drawing/2014/main" id="{99EA98AD-6DA3-444F-9881-0E94DAB1C522}"/>
+          <p:cNvPr id="8" name="c3-text-269">
+            <a:extLst xmlns:a="http://schemas.openxmlformats.org/drawingml/2006/main">
+              <a:ext uri="{FF2B5EF4-FFF2-40B4-BE49-F238E27FC236}">
+                <a16:creationId xmlns:a16="http://schemas.microsoft.com/office/drawing/2014/main" id="{2F2CE539-9654-4204-B697-2B8B948E0462}"/>
               </a:ext>
             </a:extLst>
           </p:cNvPr>
@@ -14777,10 +15393,10 @@
       </p:sp>
       <p:sp>
         <p:nvSpPr>
-          <p:cNvPr id="2" name="c3-text-260">
-            <a:extLst xmlns:a="http://schemas.openxmlformats.org/drawingml/2006/main">
-              <a:ext uri="{FF2B5EF4-FFF2-40B4-BE49-F238E27FC236}">
-                <a16:creationId xmlns:a16="http://schemas.microsoft.com/office/drawing/2014/main" id="{CD2D3797-1364-421C-9E92-6CDD32F00EB7}"/>
+          <p:cNvPr id="2" name="c3-text-270">
+            <a:extLst xmlns:a="http://schemas.openxmlformats.org/drawingml/2006/main">
+              <a:ext uri="{FF2B5EF4-FFF2-40B4-BE49-F238E27FC236}">
+                <a16:creationId xmlns:a16="http://schemas.microsoft.com/office/drawing/2014/main" id="{80789EED-4344-4964-8DDB-07658E63BE2D}"/>
               </a:ext>
             </a:extLst>
           </p:cNvPr>
@@ -14834,10 +15450,10 @@
       </p:sp>
       <p:sp>
         <p:nvSpPr>
-          <p:cNvPr id="3" name="c3-text-261">
-            <a:extLst xmlns:a="http://schemas.openxmlformats.org/drawingml/2006/main">
-              <a:ext uri="{FF2B5EF4-FFF2-40B4-BE49-F238E27FC236}">
-                <a16:creationId xmlns:a16="http://schemas.microsoft.com/office/drawing/2014/main" id="{2978BBAD-32F1-4CB4-9738-ED9509DF7FBD}"/>
+          <p:cNvPr id="3" name="c3-text-271">
+            <a:extLst xmlns:a="http://schemas.openxmlformats.org/drawingml/2006/main">
+              <a:ext uri="{FF2B5EF4-FFF2-40B4-BE49-F238E27FC236}">
+                <a16:creationId xmlns:a16="http://schemas.microsoft.com/office/drawing/2014/main" id="{BAE72736-40CC-450A-B575-E51268C04A4A}"/>
               </a:ext>
             </a:extLst>
           </p:cNvPr>
@@ -14891,10 +15507,10 @@
       </p:sp>
       <p:sp>
         <p:nvSpPr>
-          <p:cNvPr id="4" name="c3-text-262">
-            <a:extLst xmlns:a="http://schemas.openxmlformats.org/drawingml/2006/main">
-              <a:ext uri="{FF2B5EF4-FFF2-40B4-BE49-F238E27FC236}">
-                <a16:creationId xmlns:a16="http://schemas.microsoft.com/office/drawing/2014/main" id="{207BE4CA-F73C-4B6C-9BB1-055B91B0C7DE}"/>
+          <p:cNvPr id="4" name="c3-text-272">
+            <a:extLst xmlns:a="http://schemas.openxmlformats.org/drawingml/2006/main">
+              <a:ext uri="{FF2B5EF4-FFF2-40B4-BE49-F238E27FC236}">
+                <a16:creationId xmlns:a16="http://schemas.microsoft.com/office/drawing/2014/main" id="{3968F4CA-934E-4834-B5D2-C1E72B5824D1}"/>
               </a:ext>
             </a:extLst>
           </p:cNvPr>
@@ -14948,10 +15564,10 @@
       </p:sp>
       <p:sp>
         <p:nvSpPr>
-          <p:cNvPr id="5" name="c3-text-263">
-            <a:extLst xmlns:a="http://schemas.openxmlformats.org/drawingml/2006/main">
-              <a:ext uri="{FF2B5EF4-FFF2-40B4-BE49-F238E27FC236}">
-                <a16:creationId xmlns:a16="http://schemas.microsoft.com/office/drawing/2014/main" id="{AAC34BB2-95E5-4295-BF02-29E3A1380BD6}"/>
+          <p:cNvPr id="5" name="c3-text-273">
+            <a:extLst xmlns:a="http://schemas.openxmlformats.org/drawingml/2006/main">
+              <a:ext uri="{FF2B5EF4-FFF2-40B4-BE49-F238E27FC236}">
+                <a16:creationId xmlns:a16="http://schemas.microsoft.com/office/drawing/2014/main" id="{A38E115E-D804-4C93-944F-3595CA001110}"/>
               </a:ext>
             </a:extLst>
           </p:cNvPr>
@@ -15005,10 +15621,10 @@
       </p:sp>
       <p:sp>
         <p:nvSpPr>
-          <p:cNvPr id="6" name="c3-text-264">
-            <a:extLst xmlns:a="http://schemas.openxmlformats.org/drawingml/2006/main">
-              <a:ext uri="{FF2B5EF4-FFF2-40B4-BE49-F238E27FC236}">
-                <a16:creationId xmlns:a16="http://schemas.microsoft.com/office/drawing/2014/main" id="{9DE17D43-EFB5-4573-9BB5-A70B9DC77283}"/>
+          <p:cNvPr id="6" name="c3-text-274">
+            <a:extLst xmlns:a="http://schemas.openxmlformats.org/drawingml/2006/main">
+              <a:ext uri="{FF2B5EF4-FFF2-40B4-BE49-F238E27FC236}">
+                <a16:creationId xmlns:a16="http://schemas.microsoft.com/office/drawing/2014/main" id="{A50A28BE-8B5C-49C7-AB7A-97C4F379281D}"/>
               </a:ext>
             </a:extLst>
           </p:cNvPr>
@@ -15062,10 +15678,10 @@
       </p:sp>
       <p:sp>
         <p:nvSpPr>
-          <p:cNvPr id="7" name="c3-text-335">
-            <a:extLst xmlns:a="http://schemas.openxmlformats.org/drawingml/2006/main">
-              <a:ext uri="{FF2B5EF4-FFF2-40B4-BE49-F238E27FC236}">
-                <a16:creationId xmlns:a16="http://schemas.microsoft.com/office/drawing/2014/main" id="{0A3D80B1-7209-4D78-B528-86627321F1E2}"/>
+          <p:cNvPr id="7" name="c3-text-353">
+            <a:extLst xmlns:a="http://schemas.openxmlformats.org/drawingml/2006/main">
+              <a:ext uri="{FF2B5EF4-FFF2-40B4-BE49-F238E27FC236}">
+                <a16:creationId xmlns:a16="http://schemas.microsoft.com/office/drawing/2014/main" id="{3157001B-8626-4239-B9C9-052F27FCF7CB}"/>
               </a:ext>
             </a:extLst>
           </p:cNvPr>
@@ -15120,7 +15736,7 @@
     </p:spTree>
     <p:extLst>
       <p:ext uri="{BB962C8B-B14F-4D97-AF65-F5344CB8AC3E}">
-        <p14:creationId xmlns:p14="http://schemas.microsoft.com/office/powerpoint/2010/main" val="2002708320"/>
+        <p14:creationId xmlns:p14="http://schemas.microsoft.com/office/powerpoint/2010/main" val="629054148"/>
       </p:ext>
     </p:extLst>
   </p:cSld>
@@ -15148,10 +15764,10 @@
       </p:grpSpPr>
       <p:sp>
         <p:nvSpPr>
-          <p:cNvPr id="9" name="c3-text-265">
-            <a:extLst xmlns:a="http://schemas.openxmlformats.org/drawingml/2006/main">
-              <a:ext uri="{FF2B5EF4-FFF2-40B4-BE49-F238E27FC236}">
-                <a16:creationId xmlns:a16="http://schemas.microsoft.com/office/drawing/2014/main" id="{C8644579-5D4E-44FD-AB17-3E2E8490A155}"/>
+          <p:cNvPr id="9" name="c3-text-275">
+            <a:extLst xmlns:a="http://schemas.openxmlformats.org/drawingml/2006/main">
+              <a:ext uri="{FF2B5EF4-FFF2-40B4-BE49-F238E27FC236}">
+                <a16:creationId xmlns:a16="http://schemas.microsoft.com/office/drawing/2014/main" id="{D816341C-5601-4406-9013-D721243DFFB3}"/>
               </a:ext>
             </a:extLst>
           </p:cNvPr>
@@ -15205,10 +15821,10 @@
       </p:sp>
       <p:sp>
         <p:nvSpPr>
-          <p:cNvPr id="2" name="c3-text-266">
-            <a:extLst xmlns:a="http://schemas.openxmlformats.org/drawingml/2006/main">
-              <a:ext uri="{FF2B5EF4-FFF2-40B4-BE49-F238E27FC236}">
-                <a16:creationId xmlns:a16="http://schemas.microsoft.com/office/drawing/2014/main" id="{5B9AF743-1FC3-4984-8A4C-13DC24574BA1}"/>
+          <p:cNvPr id="2" name="c3-text-276">
+            <a:extLst xmlns:a="http://schemas.openxmlformats.org/drawingml/2006/main">
+              <a:ext uri="{FF2B5EF4-FFF2-40B4-BE49-F238E27FC236}">
+                <a16:creationId xmlns:a16="http://schemas.microsoft.com/office/drawing/2014/main" id="{E30D8BF2-EC70-4E16-B3EB-D417F54DBC80}"/>
               </a:ext>
             </a:extLst>
           </p:cNvPr>
@@ -15262,10 +15878,10 @@
       </p:sp>
       <p:sp>
         <p:nvSpPr>
-          <p:cNvPr id="3" name="c3-text-267">
-            <a:extLst xmlns:a="http://schemas.openxmlformats.org/drawingml/2006/main">
-              <a:ext uri="{FF2B5EF4-FFF2-40B4-BE49-F238E27FC236}">
-                <a16:creationId xmlns:a16="http://schemas.microsoft.com/office/drawing/2014/main" id="{FC1DF0B5-D754-4D57-84C7-4DA8BC898000}"/>
+          <p:cNvPr id="3" name="c3-text-277">
+            <a:extLst xmlns:a="http://schemas.openxmlformats.org/drawingml/2006/main">
+              <a:ext uri="{FF2B5EF4-FFF2-40B4-BE49-F238E27FC236}">
+                <a16:creationId xmlns:a16="http://schemas.microsoft.com/office/drawing/2014/main" id="{051076CA-2AE1-4EAC-972D-976502F7C7EE}"/>
               </a:ext>
             </a:extLst>
           </p:cNvPr>
@@ -15319,10 +15935,10 @@
       </p:sp>
       <p:sp>
         <p:nvSpPr>
-          <p:cNvPr id="4" name="c3-text-268">
-            <a:extLst xmlns:a="http://schemas.openxmlformats.org/drawingml/2006/main">
-              <a:ext uri="{FF2B5EF4-FFF2-40B4-BE49-F238E27FC236}">
-                <a16:creationId xmlns:a16="http://schemas.microsoft.com/office/drawing/2014/main" id="{06FFBBD8-FB65-4A33-8953-1D554625B52A}"/>
+          <p:cNvPr id="4" name="c3-text-278">
+            <a:extLst xmlns:a="http://schemas.openxmlformats.org/drawingml/2006/main">
+              <a:ext uri="{FF2B5EF4-FFF2-40B4-BE49-F238E27FC236}">
+                <a16:creationId xmlns:a16="http://schemas.microsoft.com/office/drawing/2014/main" id="{BFD0FC6D-B73D-4528-BB5E-9A84A7863CEB}"/>
               </a:ext>
             </a:extLst>
           </p:cNvPr>
@@ -15376,10 +15992,10 @@
       </p:sp>
       <p:sp>
         <p:nvSpPr>
-          <p:cNvPr id="5" name="c3-text-269">
-            <a:extLst xmlns:a="http://schemas.openxmlformats.org/drawingml/2006/main">
-              <a:ext uri="{FF2B5EF4-FFF2-40B4-BE49-F238E27FC236}">
-                <a16:creationId xmlns:a16="http://schemas.microsoft.com/office/drawing/2014/main" id="{0EC0F0C4-55DF-44D6-94ED-EF8FF212869D}"/>
+          <p:cNvPr id="5" name="c3-text-279">
+            <a:extLst xmlns:a="http://schemas.openxmlformats.org/drawingml/2006/main">
+              <a:ext uri="{FF2B5EF4-FFF2-40B4-BE49-F238E27FC236}">
+                <a16:creationId xmlns:a16="http://schemas.microsoft.com/office/drawing/2014/main" id="{5A140E1F-B0D0-4516-83F4-CE8C69C9FB9C}"/>
               </a:ext>
             </a:extLst>
           </p:cNvPr>
@@ -15456,10 +16072,10 @@
       </p:sp>
       <p:sp>
         <p:nvSpPr>
-          <p:cNvPr id="6" name="c3-text-270">
-            <a:extLst xmlns:a="http://schemas.openxmlformats.org/drawingml/2006/main">
-              <a:ext uri="{FF2B5EF4-FFF2-40B4-BE49-F238E27FC236}">
-                <a16:creationId xmlns:a16="http://schemas.microsoft.com/office/drawing/2014/main" id="{665882ED-9125-4882-98A2-65EA5FABED63}"/>
+          <p:cNvPr id="6" name="c3-text-280">
+            <a:extLst xmlns:a="http://schemas.openxmlformats.org/drawingml/2006/main">
+              <a:ext uri="{FF2B5EF4-FFF2-40B4-BE49-F238E27FC236}">
+                <a16:creationId xmlns:a16="http://schemas.microsoft.com/office/drawing/2014/main" id="{24996859-A78E-4711-94D0-F63F05C1E1A6}"/>
               </a:ext>
             </a:extLst>
           </p:cNvPr>
@@ -15513,10 +16129,10 @@
       </p:sp>
       <p:sp>
         <p:nvSpPr>
-          <p:cNvPr id="7" name="c3-text-271">
-            <a:extLst xmlns:a="http://schemas.openxmlformats.org/drawingml/2006/main">
-              <a:ext uri="{FF2B5EF4-FFF2-40B4-BE49-F238E27FC236}">
-                <a16:creationId xmlns:a16="http://schemas.microsoft.com/office/drawing/2014/main" id="{752C7EB8-16CD-4E9F-9C5E-ED72E15B7D4E}"/>
+          <p:cNvPr id="7" name="c3-text-281">
+            <a:extLst xmlns:a="http://schemas.openxmlformats.org/drawingml/2006/main">
+              <a:ext uri="{FF2B5EF4-FFF2-40B4-BE49-F238E27FC236}">
+                <a16:creationId xmlns:a16="http://schemas.microsoft.com/office/drawing/2014/main" id="{A3F74591-E674-4A4F-AE29-6C7D94A34689}"/>
               </a:ext>
             </a:extLst>
           </p:cNvPr>
@@ -15570,10 +16186,10 @@
       </p:sp>
       <p:sp>
         <p:nvSpPr>
-          <p:cNvPr id="8" name="c3-text-336">
-            <a:extLst xmlns:a="http://schemas.openxmlformats.org/drawingml/2006/main">
-              <a:ext uri="{FF2B5EF4-FFF2-40B4-BE49-F238E27FC236}">
-                <a16:creationId xmlns:a16="http://schemas.microsoft.com/office/drawing/2014/main" id="{37395A8E-2E16-4774-9973-AA54D5C146C3}"/>
+          <p:cNvPr id="8" name="c3-text-354">
+            <a:extLst xmlns:a="http://schemas.openxmlformats.org/drawingml/2006/main">
+              <a:ext uri="{FF2B5EF4-FFF2-40B4-BE49-F238E27FC236}">
+                <a16:creationId xmlns:a16="http://schemas.microsoft.com/office/drawing/2014/main" id="{DF548EED-757D-4147-B8A2-E9196F8DEB3B}"/>
               </a:ext>
             </a:extLst>
           </p:cNvPr>
@@ -15628,7 +16244,7 @@
     </p:spTree>
     <p:extLst>
       <p:ext uri="{BB962C8B-B14F-4D97-AF65-F5344CB8AC3E}">
-        <p14:creationId xmlns:p14="http://schemas.microsoft.com/office/powerpoint/2010/main" val="616509994"/>
+        <p14:creationId xmlns:p14="http://schemas.microsoft.com/office/powerpoint/2010/main" val="1018610378"/>
       </p:ext>
     </p:extLst>
   </p:cSld>
@@ -15656,10 +16272,10 @@
       </p:grpSpPr>
       <p:sp>
         <p:nvSpPr>
-          <p:cNvPr id="27" name="c3-text-272">
-            <a:extLst xmlns:a="http://schemas.openxmlformats.org/drawingml/2006/main">
-              <a:ext uri="{FF2B5EF4-FFF2-40B4-BE49-F238E27FC236}">
-                <a16:creationId xmlns:a16="http://schemas.microsoft.com/office/drawing/2014/main" id="{DBA0732D-E585-42E4-9414-C6979E3CC3C9}"/>
+          <p:cNvPr id="27" name="c3-text-282">
+            <a:extLst xmlns:a="http://schemas.openxmlformats.org/drawingml/2006/main">
+              <a:ext uri="{FF2B5EF4-FFF2-40B4-BE49-F238E27FC236}">
+                <a16:creationId xmlns:a16="http://schemas.microsoft.com/office/drawing/2014/main" id="{69AED067-93FA-447F-867E-5DDDA4A5D0B3}"/>
               </a:ext>
             </a:extLst>
           </p:cNvPr>
@@ -15713,10 +16329,10 @@
       </p:sp>
       <p:sp>
         <p:nvSpPr>
-          <p:cNvPr id="2" name="c3-text-273">
-            <a:extLst xmlns:a="http://schemas.openxmlformats.org/drawingml/2006/main">
-              <a:ext uri="{FF2B5EF4-FFF2-40B4-BE49-F238E27FC236}">
-                <a16:creationId xmlns:a16="http://schemas.microsoft.com/office/drawing/2014/main" id="{56CDFFEF-5655-4867-8C39-07F3801767DF}"/>
+          <p:cNvPr id="2" name="c3-text-283">
+            <a:extLst xmlns:a="http://schemas.openxmlformats.org/drawingml/2006/main">
+              <a:ext uri="{FF2B5EF4-FFF2-40B4-BE49-F238E27FC236}">
+                <a16:creationId xmlns:a16="http://schemas.microsoft.com/office/drawing/2014/main" id="{5F3E9543-725D-45F2-9DD1-EF3BD0590A47}"/>
               </a:ext>
             </a:extLst>
           </p:cNvPr>
@@ -15770,10 +16386,10 @@
       </p:sp>
       <p:sp>
         <p:nvSpPr>
-          <p:cNvPr id="3" name="c3-text-274">
-            <a:extLst xmlns:a="http://schemas.openxmlformats.org/drawingml/2006/main">
-              <a:ext uri="{FF2B5EF4-FFF2-40B4-BE49-F238E27FC236}">
-                <a16:creationId xmlns:a16="http://schemas.microsoft.com/office/drawing/2014/main" id="{96C7DA7F-1656-4459-878E-ABAFA366494F}"/>
+          <p:cNvPr id="3" name="c3-text-284">
+            <a:extLst xmlns:a="http://schemas.openxmlformats.org/drawingml/2006/main">
+              <a:ext uri="{FF2B5EF4-FFF2-40B4-BE49-F238E27FC236}">
+                <a16:creationId xmlns:a16="http://schemas.microsoft.com/office/drawing/2014/main" id="{BD913727-79A7-42DA-9C8F-F58D25E0BA80}"/>
               </a:ext>
             </a:extLst>
           </p:cNvPr>
@@ -15827,11 +16443,11 @@
       </p:sp>
       <p:sp>
         <p:nvSpPr>
-          <p:cNvPr id="4" name="c3-text-275">
-            <a:hlinkClick xmlns:r="http://schemas.openxmlformats.org/officeDocument/2006/relationships" xmlns:a="http://schemas.openxmlformats.org/drawingml/2006/main" r:id="R26961adb443e4ef0"/>
-            <a:extLst xmlns:a="http://schemas.openxmlformats.org/drawingml/2006/main">
-              <a:ext uri="{FF2B5EF4-FFF2-40B4-BE49-F238E27FC236}">
-                <a16:creationId xmlns:a16="http://schemas.microsoft.com/office/drawing/2014/main" id="{BB70874F-39AA-4F14-9759-54AC98068583}"/>
+          <p:cNvPr id="4" name="c3-text-285">
+            <a:hlinkClick xmlns:r="http://schemas.openxmlformats.org/officeDocument/2006/relationships" xmlns:a="http://schemas.openxmlformats.org/drawingml/2006/main" r:id="R54d7460087e94d15"/>
+            <a:extLst xmlns:a="http://schemas.openxmlformats.org/drawingml/2006/main">
+              <a:ext uri="{FF2B5EF4-FFF2-40B4-BE49-F238E27FC236}">
+                <a16:creationId xmlns:a16="http://schemas.microsoft.com/office/drawing/2014/main" id="{E522913F-B85F-4128-85A9-457976719D19}"/>
               </a:ext>
             </a:extLst>
           </p:cNvPr>
@@ -15885,11 +16501,11 @@
       </p:sp>
       <p:sp>
         <p:nvSpPr>
-          <p:cNvPr id="5" name="c3-text-276">
-            <a:hlinkClick xmlns:r="http://schemas.openxmlformats.org/officeDocument/2006/relationships" xmlns:a="http://schemas.openxmlformats.org/drawingml/2006/main" r:id="Ra3708a828b1a4e3a"/>
-            <a:extLst xmlns:a="http://schemas.openxmlformats.org/drawingml/2006/main">
-              <a:ext uri="{FF2B5EF4-FFF2-40B4-BE49-F238E27FC236}">
-                <a16:creationId xmlns:a16="http://schemas.microsoft.com/office/drawing/2014/main" id="{B6823CF1-1F85-4F4F-A84B-A30DB4243848}"/>
+          <p:cNvPr id="5" name="c3-text-286">
+            <a:hlinkClick xmlns:r="http://schemas.openxmlformats.org/officeDocument/2006/relationships" xmlns:a="http://schemas.openxmlformats.org/drawingml/2006/main" r:id="R4a5d353c6a3e45dd"/>
+            <a:extLst xmlns:a="http://schemas.openxmlformats.org/drawingml/2006/main">
+              <a:ext uri="{FF2B5EF4-FFF2-40B4-BE49-F238E27FC236}">
+                <a16:creationId xmlns:a16="http://schemas.microsoft.com/office/drawing/2014/main" id="{6C468909-F4AF-4D1F-96D2-AD9BC97D2F8D}"/>
               </a:ext>
             </a:extLst>
           </p:cNvPr>
@@ -15943,10 +16559,10 @@
       </p:sp>
       <p:sp>
         <p:nvSpPr>
-          <p:cNvPr id="6" name="c3-shape-277">
-            <a:extLst xmlns:a="http://schemas.openxmlformats.org/drawingml/2006/main">
-              <a:ext uri="{FF2B5EF4-FFF2-40B4-BE49-F238E27FC236}">
-                <a16:creationId xmlns:a16="http://schemas.microsoft.com/office/drawing/2014/main" id="{2FF2C737-3FA6-4D97-84C0-81A16E973154}"/>
+          <p:cNvPr id="6" name="c3-shape-287">
+            <a:extLst xmlns:a="http://schemas.openxmlformats.org/drawingml/2006/main">
+              <a:ext uri="{FF2B5EF4-FFF2-40B4-BE49-F238E27FC236}">
+                <a16:creationId xmlns:a16="http://schemas.microsoft.com/office/drawing/2014/main" id="{4DAC69E5-CDF7-424A-8654-E81CEC1F27B5}"/>
               </a:ext>
             </a:extLst>
           </p:cNvPr>
@@ -15975,11 +16591,11 @@
       </p:sp>
       <p:sp>
         <p:nvSpPr>
-          <p:cNvPr id="7" name="c3-text-278">
-            <a:hlinkClick xmlns:r="http://schemas.openxmlformats.org/officeDocument/2006/relationships" xmlns:a="http://schemas.openxmlformats.org/drawingml/2006/main" r:id="R8bc7a9ca83f04ef6"/>
-            <a:extLst xmlns:a="http://schemas.openxmlformats.org/drawingml/2006/main">
-              <a:ext uri="{FF2B5EF4-FFF2-40B4-BE49-F238E27FC236}">
-                <a16:creationId xmlns:a16="http://schemas.microsoft.com/office/drawing/2014/main" id="{CD20A3DD-9C8A-492F-BAB6-836BEB73AB99}"/>
+          <p:cNvPr id="7" name="c3-text-288">
+            <a:hlinkClick xmlns:r="http://schemas.openxmlformats.org/officeDocument/2006/relationships" xmlns:a="http://schemas.openxmlformats.org/drawingml/2006/main" r:id="Rd7d3b02cdc0d4562"/>
+            <a:extLst xmlns:a="http://schemas.openxmlformats.org/drawingml/2006/main">
+              <a:ext uri="{FF2B5EF4-FFF2-40B4-BE49-F238E27FC236}">
+                <a16:creationId xmlns:a16="http://schemas.microsoft.com/office/drawing/2014/main" id="{06C0783F-8FDE-4413-A078-371C1A445621}"/>
               </a:ext>
             </a:extLst>
           </p:cNvPr>
@@ -16033,11 +16649,11 @@
       </p:sp>
       <p:sp>
         <p:nvSpPr>
-          <p:cNvPr id="8" name="c3-text-279">
-            <a:hlinkClick xmlns:r="http://schemas.openxmlformats.org/officeDocument/2006/relationships" xmlns:a="http://schemas.openxmlformats.org/drawingml/2006/main" r:id="Rdf6932e1ab414fd8"/>
-            <a:extLst xmlns:a="http://schemas.openxmlformats.org/drawingml/2006/main">
-              <a:ext uri="{FF2B5EF4-FFF2-40B4-BE49-F238E27FC236}">
-                <a16:creationId xmlns:a16="http://schemas.microsoft.com/office/drawing/2014/main" id="{57B7BA1E-A4D3-460C-AB95-AF7163552C69}"/>
+          <p:cNvPr id="8" name="c3-text-289">
+            <a:hlinkClick xmlns:r="http://schemas.openxmlformats.org/officeDocument/2006/relationships" xmlns:a="http://schemas.openxmlformats.org/drawingml/2006/main" r:id="Rb64d92a54156480e"/>
+            <a:extLst xmlns:a="http://schemas.openxmlformats.org/drawingml/2006/main">
+              <a:ext uri="{FF2B5EF4-FFF2-40B4-BE49-F238E27FC236}">
+                <a16:creationId xmlns:a16="http://schemas.microsoft.com/office/drawing/2014/main" id="{FDA29577-0E84-4F72-819B-5070372269B2}"/>
               </a:ext>
             </a:extLst>
           </p:cNvPr>
@@ -16091,10 +16707,10 @@
       </p:sp>
       <p:sp>
         <p:nvSpPr>
-          <p:cNvPr id="9" name="c3-shape-280">
-            <a:extLst xmlns:a="http://schemas.openxmlformats.org/drawingml/2006/main">
-              <a:ext uri="{FF2B5EF4-FFF2-40B4-BE49-F238E27FC236}">
-                <a16:creationId xmlns:a16="http://schemas.microsoft.com/office/drawing/2014/main" id="{90A35DD6-8E1F-4E1D-A6B1-0D316CFBC176}"/>
+          <p:cNvPr id="9" name="c3-shape-290">
+            <a:extLst xmlns:a="http://schemas.openxmlformats.org/drawingml/2006/main">
+              <a:ext uri="{FF2B5EF4-FFF2-40B4-BE49-F238E27FC236}">
+                <a16:creationId xmlns:a16="http://schemas.microsoft.com/office/drawing/2014/main" id="{F77185EF-4103-4BFC-802C-A99637BBF814}"/>
               </a:ext>
             </a:extLst>
           </p:cNvPr>
@@ -16123,11 +16739,11 @@
       </p:sp>
       <p:sp>
         <p:nvSpPr>
-          <p:cNvPr id="10" name="c3-text-281">
-            <a:hlinkClick xmlns:r="http://schemas.openxmlformats.org/officeDocument/2006/relationships" xmlns:a="http://schemas.openxmlformats.org/drawingml/2006/main" r:id="R84ab4c8d2aa54c7c"/>
-            <a:extLst xmlns:a="http://schemas.openxmlformats.org/drawingml/2006/main">
-              <a:ext uri="{FF2B5EF4-FFF2-40B4-BE49-F238E27FC236}">
-                <a16:creationId xmlns:a16="http://schemas.microsoft.com/office/drawing/2014/main" id="{D2FD390B-812C-461C-BE71-B624F8A5EA08}"/>
+          <p:cNvPr id="10" name="c3-text-291">
+            <a:hlinkClick xmlns:r="http://schemas.openxmlformats.org/officeDocument/2006/relationships" xmlns:a="http://schemas.openxmlformats.org/drawingml/2006/main" r:id="R9a833c5b8bdb41ea"/>
+            <a:extLst xmlns:a="http://schemas.openxmlformats.org/drawingml/2006/main">
+              <a:ext uri="{FF2B5EF4-FFF2-40B4-BE49-F238E27FC236}">
+                <a16:creationId xmlns:a16="http://schemas.microsoft.com/office/drawing/2014/main" id="{03F3D040-C7D0-4F93-BD4B-4C2859D83408}"/>
               </a:ext>
             </a:extLst>
           </p:cNvPr>
@@ -16181,11 +16797,11 @@
       </p:sp>
       <p:sp>
         <p:nvSpPr>
-          <p:cNvPr id="11" name="c3-text-282">
-            <a:hlinkClick xmlns:r="http://schemas.openxmlformats.org/officeDocument/2006/relationships" xmlns:a="http://schemas.openxmlformats.org/drawingml/2006/main" r:id="Rf24da2ae2a314d8d"/>
-            <a:extLst xmlns:a="http://schemas.openxmlformats.org/drawingml/2006/main">
-              <a:ext uri="{FF2B5EF4-FFF2-40B4-BE49-F238E27FC236}">
-                <a16:creationId xmlns:a16="http://schemas.microsoft.com/office/drawing/2014/main" id="{6AADE082-C1D7-4E2E-B29E-7AA81595A415}"/>
+          <p:cNvPr id="11" name="c3-text-292">
+            <a:hlinkClick xmlns:r="http://schemas.openxmlformats.org/officeDocument/2006/relationships" xmlns:a="http://schemas.openxmlformats.org/drawingml/2006/main" r:id="R744a5ab4b527427c"/>
+            <a:extLst xmlns:a="http://schemas.openxmlformats.org/drawingml/2006/main">
+              <a:ext uri="{FF2B5EF4-FFF2-40B4-BE49-F238E27FC236}">
+                <a16:creationId xmlns:a16="http://schemas.microsoft.com/office/drawing/2014/main" id="{44921494-06DE-4F7D-A9CD-114D1CCA1671}"/>
               </a:ext>
             </a:extLst>
           </p:cNvPr>
@@ -16239,10 +16855,10 @@
       </p:sp>
       <p:sp>
         <p:nvSpPr>
-          <p:cNvPr id="12" name="c3-shape-283">
-            <a:extLst xmlns:a="http://schemas.openxmlformats.org/drawingml/2006/main">
-              <a:ext uri="{FF2B5EF4-FFF2-40B4-BE49-F238E27FC236}">
-                <a16:creationId xmlns:a16="http://schemas.microsoft.com/office/drawing/2014/main" id="{4D085B0A-0BE6-4C79-B932-DC40D87C4685}"/>
+          <p:cNvPr id="12" name="c3-shape-293">
+            <a:extLst xmlns:a="http://schemas.openxmlformats.org/drawingml/2006/main">
+              <a:ext uri="{FF2B5EF4-FFF2-40B4-BE49-F238E27FC236}">
+                <a16:creationId xmlns:a16="http://schemas.microsoft.com/office/drawing/2014/main" id="{89F27F0A-5540-4636-BEE4-AEDA74DF6CA8}"/>
               </a:ext>
             </a:extLst>
           </p:cNvPr>
@@ -16271,11 +16887,11 @@
       </p:sp>
       <p:sp>
         <p:nvSpPr>
-          <p:cNvPr id="13" name="c3-text-284">
-            <a:hlinkClick xmlns:r="http://schemas.openxmlformats.org/officeDocument/2006/relationships" xmlns:a="http://schemas.openxmlformats.org/drawingml/2006/main" r:id="R7343094ada3d4418"/>
-            <a:extLst xmlns:a="http://schemas.openxmlformats.org/drawingml/2006/main">
-              <a:ext uri="{FF2B5EF4-FFF2-40B4-BE49-F238E27FC236}">
-                <a16:creationId xmlns:a16="http://schemas.microsoft.com/office/drawing/2014/main" id="{B1855DBD-FEEA-4F0D-9B13-EB11783BC0FC}"/>
+          <p:cNvPr id="13" name="c3-text-294">
+            <a:hlinkClick xmlns:r="http://schemas.openxmlformats.org/officeDocument/2006/relationships" xmlns:a="http://schemas.openxmlformats.org/drawingml/2006/main" r:id="R05cde9a0db8e4ac6"/>
+            <a:extLst xmlns:a="http://schemas.openxmlformats.org/drawingml/2006/main">
+              <a:ext uri="{FF2B5EF4-FFF2-40B4-BE49-F238E27FC236}">
+                <a16:creationId xmlns:a16="http://schemas.microsoft.com/office/drawing/2014/main" id="{DB34DED1-2A43-4F86-ACDC-0B09B93E2CCE}"/>
               </a:ext>
             </a:extLst>
           </p:cNvPr>
@@ -16329,11 +16945,11 @@
       </p:sp>
       <p:sp>
         <p:nvSpPr>
-          <p:cNvPr id="14" name="c3-text-285">
-            <a:hlinkClick xmlns:r="http://schemas.openxmlformats.org/officeDocument/2006/relationships" xmlns:a="http://schemas.openxmlformats.org/drawingml/2006/main" r:id="Rf0fce4653ed1490c"/>
-            <a:extLst xmlns:a="http://schemas.openxmlformats.org/drawingml/2006/main">
-              <a:ext uri="{FF2B5EF4-FFF2-40B4-BE49-F238E27FC236}">
-                <a16:creationId xmlns:a16="http://schemas.microsoft.com/office/drawing/2014/main" id="{24942E7D-ADC7-4F79-99F2-B2C882E686B6}"/>
+          <p:cNvPr id="14" name="c3-text-295">
+            <a:hlinkClick xmlns:r="http://schemas.openxmlformats.org/officeDocument/2006/relationships" xmlns:a="http://schemas.openxmlformats.org/drawingml/2006/main" r:id="R36a8fd14825843ba"/>
+            <a:extLst xmlns:a="http://schemas.openxmlformats.org/drawingml/2006/main">
+              <a:ext uri="{FF2B5EF4-FFF2-40B4-BE49-F238E27FC236}">
+                <a16:creationId xmlns:a16="http://schemas.microsoft.com/office/drawing/2014/main" id="{5BF46AB5-F96E-45C4-A9A7-44EFE5A13866}"/>
               </a:ext>
             </a:extLst>
           </p:cNvPr>
@@ -16387,11 +17003,11 @@
       </p:sp>
       <p:sp>
         <p:nvSpPr>
-          <p:cNvPr id="15" name="c3-text-286">
-            <a:hlinkClick xmlns:r="http://schemas.openxmlformats.org/officeDocument/2006/relationships" xmlns:a="http://schemas.openxmlformats.org/drawingml/2006/main" r:id="Rae7acd5097a94570"/>
-            <a:extLst xmlns:a="http://schemas.openxmlformats.org/drawingml/2006/main">
-              <a:ext uri="{FF2B5EF4-FFF2-40B4-BE49-F238E27FC236}">
-                <a16:creationId xmlns:a16="http://schemas.microsoft.com/office/drawing/2014/main" id="{999C4EB8-507C-470F-9754-EB68E1554BE7}"/>
+          <p:cNvPr id="15" name="c3-text-296">
+            <a:hlinkClick xmlns:r="http://schemas.openxmlformats.org/officeDocument/2006/relationships" xmlns:a="http://schemas.openxmlformats.org/drawingml/2006/main" r:id="R9319c96fb9ca4a00"/>
+            <a:extLst xmlns:a="http://schemas.openxmlformats.org/drawingml/2006/main">
+              <a:ext uri="{FF2B5EF4-FFF2-40B4-BE49-F238E27FC236}">
+                <a16:creationId xmlns:a16="http://schemas.microsoft.com/office/drawing/2014/main" id="{3F4B156A-9E49-4F58-9EF9-57BDADFCC489}"/>
               </a:ext>
             </a:extLst>
           </p:cNvPr>
@@ -16438,18 +17054,18 @@
                 <a:ea typeface="Calibri"/>
                 <a:cs typeface="Calibri"/>
               </a:rPr>
-              <a:t>[5] Codex quickstart</a:t>
-            </a:r>
-          </a:p>
-        </p:txBody>
-      </p:sp>
-      <p:sp>
-        <p:nvSpPr>
-          <p:cNvPr id="16" name="c3-text-287">
-            <a:hlinkClick xmlns:r="http://schemas.openxmlformats.org/officeDocument/2006/relationships" xmlns:a="http://schemas.openxmlformats.org/drawingml/2006/main" r:id="R28c8422fda774554"/>
-            <a:extLst xmlns:a="http://schemas.openxmlformats.org/drawingml/2006/main">
-              <a:ext uri="{FF2B5EF4-FFF2-40B4-BE49-F238E27FC236}">
-                <a16:creationId xmlns:a16="http://schemas.microsoft.com/office/drawing/2014/main" id="{7C8F10AA-0766-4A59-B5B0-1E87156B3B41}"/>
+              <a:t>[5] Codex in VS Code</a:t>
+            </a:r>
+          </a:p>
+        </p:txBody>
+      </p:sp>
+      <p:sp>
+        <p:nvSpPr>
+          <p:cNvPr id="16" name="c3-text-297">
+            <a:hlinkClick xmlns:r="http://schemas.openxmlformats.org/officeDocument/2006/relationships" xmlns:a="http://schemas.openxmlformats.org/drawingml/2006/main" r:id="R567bdb351ab74b53"/>
+            <a:extLst xmlns:a="http://schemas.openxmlformats.org/drawingml/2006/main">
+              <a:ext uri="{FF2B5EF4-FFF2-40B4-BE49-F238E27FC236}">
+                <a16:creationId xmlns:a16="http://schemas.microsoft.com/office/drawing/2014/main" id="{D64896E5-DB99-4153-8D07-29AC3BB32087}"/>
               </a:ext>
             </a:extLst>
           </p:cNvPr>
@@ -16496,17 +17112,17 @@
                 <a:ea typeface="Calibri"/>
                 <a:cs typeface="Calibri"/>
               </a:rPr>
-              <a:t>Desktop installation and ChatGPT sign-in</a:t>
-            </a:r>
-          </a:p>
-        </p:txBody>
-      </p:sp>
-      <p:sp>
-        <p:nvSpPr>
-          <p:cNvPr id="17" name="c3-shape-288">
-            <a:extLst xmlns:a="http://schemas.openxmlformats.org/drawingml/2006/main">
-              <a:ext uri="{FF2B5EF4-FFF2-40B4-BE49-F238E27FC236}">
-                <a16:creationId xmlns:a16="http://schemas.microsoft.com/office/drawing/2014/main" id="{DA38F1B0-C457-48F6-B66A-F589449E2FAE}"/>
+              <a:t>Extension installation and editor workflow</a:t>
+            </a:r>
+          </a:p>
+        </p:txBody>
+      </p:sp>
+      <p:sp>
+        <p:nvSpPr>
+          <p:cNvPr id="17" name="c3-shape-298">
+            <a:extLst xmlns:a="http://schemas.openxmlformats.org/drawingml/2006/main">
+              <a:ext uri="{FF2B5EF4-FFF2-40B4-BE49-F238E27FC236}">
+                <a16:creationId xmlns:a16="http://schemas.microsoft.com/office/drawing/2014/main" id="{60F6EFF2-D743-401F-89A8-6CB5860F9421}"/>
               </a:ext>
             </a:extLst>
           </p:cNvPr>
@@ -16535,11 +17151,11 @@
       </p:sp>
       <p:sp>
         <p:nvSpPr>
-          <p:cNvPr id="18" name="c3-text-289">
-            <a:hlinkClick xmlns:r="http://schemas.openxmlformats.org/officeDocument/2006/relationships" xmlns:a="http://schemas.openxmlformats.org/drawingml/2006/main" r:id="R78c13416c1724713"/>
-            <a:extLst xmlns:a="http://schemas.openxmlformats.org/drawingml/2006/main">
-              <a:ext uri="{FF2B5EF4-FFF2-40B4-BE49-F238E27FC236}">
-                <a16:creationId xmlns:a16="http://schemas.microsoft.com/office/drawing/2014/main" id="{3D34264C-5F45-44CF-80D8-E6DACECE7269}"/>
+          <p:cNvPr id="18" name="c3-text-299">
+            <a:hlinkClick xmlns:r="http://schemas.openxmlformats.org/officeDocument/2006/relationships" xmlns:a="http://schemas.openxmlformats.org/drawingml/2006/main" r:id="R6f6c7ccd732d4403"/>
+            <a:extLst xmlns:a="http://schemas.openxmlformats.org/drawingml/2006/main">
+              <a:ext uri="{FF2B5EF4-FFF2-40B4-BE49-F238E27FC236}">
+                <a16:creationId xmlns:a16="http://schemas.microsoft.com/office/drawing/2014/main" id="{EBF084AF-2931-40C5-B9AB-9E943FDA8BA0}"/>
               </a:ext>
             </a:extLst>
           </p:cNvPr>
@@ -16593,11 +17209,11 @@
       </p:sp>
       <p:sp>
         <p:nvSpPr>
-          <p:cNvPr id="19" name="c3-text-290">
-            <a:hlinkClick xmlns:r="http://schemas.openxmlformats.org/officeDocument/2006/relationships" xmlns:a="http://schemas.openxmlformats.org/drawingml/2006/main" r:id="Ra2f8e6ba7c9440a9"/>
-            <a:extLst xmlns:a="http://schemas.openxmlformats.org/drawingml/2006/main">
-              <a:ext uri="{FF2B5EF4-FFF2-40B4-BE49-F238E27FC236}">
-                <a16:creationId xmlns:a16="http://schemas.microsoft.com/office/drawing/2014/main" id="{9E008852-FB02-4368-B88A-FA7C55370FD1}"/>
+          <p:cNvPr id="19" name="c3-text-300">
+            <a:hlinkClick xmlns:r="http://schemas.openxmlformats.org/officeDocument/2006/relationships" xmlns:a="http://schemas.openxmlformats.org/drawingml/2006/main" r:id="R49e5241f92434387"/>
+            <a:extLst xmlns:a="http://schemas.openxmlformats.org/drawingml/2006/main">
+              <a:ext uri="{FF2B5EF4-FFF2-40B4-BE49-F238E27FC236}">
+                <a16:creationId xmlns:a16="http://schemas.microsoft.com/office/drawing/2014/main" id="{3CCEE28F-C5D4-446A-AD07-A70F2A4E4CB9}"/>
               </a:ext>
             </a:extLst>
           </p:cNvPr>
@@ -16651,10 +17267,10 @@
       </p:sp>
       <p:sp>
         <p:nvSpPr>
-          <p:cNvPr id="20" name="c3-shape-291">
-            <a:extLst xmlns:a="http://schemas.openxmlformats.org/drawingml/2006/main">
-              <a:ext uri="{FF2B5EF4-FFF2-40B4-BE49-F238E27FC236}">
-                <a16:creationId xmlns:a16="http://schemas.microsoft.com/office/drawing/2014/main" id="{1DA65412-A445-4527-BDA3-188E25B19C02}"/>
+          <p:cNvPr id="20" name="c3-shape-301">
+            <a:extLst xmlns:a="http://schemas.openxmlformats.org/drawingml/2006/main">
+              <a:ext uri="{FF2B5EF4-FFF2-40B4-BE49-F238E27FC236}">
+                <a16:creationId xmlns:a16="http://schemas.microsoft.com/office/drawing/2014/main" id="{4A272970-14AA-485D-9458-E56C72C5BBCE}"/>
               </a:ext>
             </a:extLst>
           </p:cNvPr>
@@ -16683,11 +17299,11 @@
       </p:sp>
       <p:sp>
         <p:nvSpPr>
-          <p:cNvPr id="21" name="c3-text-292">
-            <a:hlinkClick xmlns:r="http://schemas.openxmlformats.org/officeDocument/2006/relationships" xmlns:a="http://schemas.openxmlformats.org/drawingml/2006/main" r:id="R1f32416101a342f5"/>
-            <a:extLst xmlns:a="http://schemas.openxmlformats.org/drawingml/2006/main">
-              <a:ext uri="{FF2B5EF4-FFF2-40B4-BE49-F238E27FC236}">
-                <a16:creationId xmlns:a16="http://schemas.microsoft.com/office/drawing/2014/main" id="{08931209-2033-4833-AD5E-27027AB4AB99}"/>
+          <p:cNvPr id="21" name="c3-text-302">
+            <a:hlinkClick xmlns:r="http://schemas.openxmlformats.org/officeDocument/2006/relationships" xmlns:a="http://schemas.openxmlformats.org/drawingml/2006/main" r:id="R96d2989a9cc94a2f"/>
+            <a:extLst xmlns:a="http://schemas.openxmlformats.org/drawingml/2006/main">
+              <a:ext uri="{FF2B5EF4-FFF2-40B4-BE49-F238E27FC236}">
+                <a16:creationId xmlns:a16="http://schemas.microsoft.com/office/drawing/2014/main" id="{0FC49618-588E-4A86-8B8D-28011B1EC5B3}"/>
               </a:ext>
             </a:extLst>
           </p:cNvPr>
@@ -16741,11 +17357,11 @@
       </p:sp>
       <p:sp>
         <p:nvSpPr>
-          <p:cNvPr id="22" name="c3-text-293">
-            <a:hlinkClick xmlns:r="http://schemas.openxmlformats.org/officeDocument/2006/relationships" xmlns:a="http://schemas.openxmlformats.org/drawingml/2006/main" r:id="R10714949962248ee"/>
-            <a:extLst xmlns:a="http://schemas.openxmlformats.org/drawingml/2006/main">
-              <a:ext uri="{FF2B5EF4-FFF2-40B4-BE49-F238E27FC236}">
-                <a16:creationId xmlns:a16="http://schemas.microsoft.com/office/drawing/2014/main" id="{453AD451-6080-470A-A8CD-E67BA6684119}"/>
+          <p:cNvPr id="22" name="c3-text-303">
+            <a:hlinkClick xmlns:r="http://schemas.openxmlformats.org/officeDocument/2006/relationships" xmlns:a="http://schemas.openxmlformats.org/drawingml/2006/main" r:id="R4cdb2cdbbd084217"/>
+            <a:extLst xmlns:a="http://schemas.openxmlformats.org/drawingml/2006/main">
+              <a:ext uri="{FF2B5EF4-FFF2-40B4-BE49-F238E27FC236}">
+                <a16:creationId xmlns:a16="http://schemas.microsoft.com/office/drawing/2014/main" id="{CA06A6C4-7168-411B-90DA-8F5CC007BDA1}"/>
               </a:ext>
             </a:extLst>
           </p:cNvPr>
@@ -16799,10 +17415,10 @@
       </p:sp>
       <p:sp>
         <p:nvSpPr>
-          <p:cNvPr id="23" name="c3-shape-294">
-            <a:extLst xmlns:a="http://schemas.openxmlformats.org/drawingml/2006/main">
-              <a:ext uri="{FF2B5EF4-FFF2-40B4-BE49-F238E27FC236}">
-                <a16:creationId xmlns:a16="http://schemas.microsoft.com/office/drawing/2014/main" id="{5C24DA87-6B89-4EC4-A5FE-CF54CB75698D}"/>
+          <p:cNvPr id="23" name="c3-shape-304">
+            <a:extLst xmlns:a="http://schemas.openxmlformats.org/drawingml/2006/main">
+              <a:ext uri="{FF2B5EF4-FFF2-40B4-BE49-F238E27FC236}">
+                <a16:creationId xmlns:a16="http://schemas.microsoft.com/office/drawing/2014/main" id="{8271FA0A-2C60-4DC4-8EDC-5457AB5EC15E}"/>
               </a:ext>
             </a:extLst>
           </p:cNvPr>
@@ -16831,11 +17447,11 @@
       </p:sp>
       <p:sp>
         <p:nvSpPr>
-          <p:cNvPr id="24" name="c3-text-295">
-            <a:hlinkClick xmlns:r="http://schemas.openxmlformats.org/officeDocument/2006/relationships" xmlns:a="http://schemas.openxmlformats.org/drawingml/2006/main" r:id="Rb39cdbdf268c40b7"/>
-            <a:extLst xmlns:a="http://schemas.openxmlformats.org/drawingml/2006/main">
-              <a:ext uri="{FF2B5EF4-FFF2-40B4-BE49-F238E27FC236}">
-                <a16:creationId xmlns:a16="http://schemas.microsoft.com/office/drawing/2014/main" id="{74AF8F54-40C1-48ED-8D06-0DFED7E35AAD}"/>
+          <p:cNvPr id="24" name="c3-text-305">
+            <a:hlinkClick xmlns:r="http://schemas.openxmlformats.org/officeDocument/2006/relationships" xmlns:a="http://schemas.openxmlformats.org/drawingml/2006/main" r:id="R4b94f1be246c4a4d"/>
+            <a:extLst xmlns:a="http://schemas.openxmlformats.org/drawingml/2006/main">
+              <a:ext uri="{FF2B5EF4-FFF2-40B4-BE49-F238E27FC236}">
+                <a16:creationId xmlns:a16="http://schemas.microsoft.com/office/drawing/2014/main" id="{B1A3F094-BB3C-4B7C-B150-FFE698ED75B4}"/>
               </a:ext>
             </a:extLst>
           </p:cNvPr>
@@ -16889,11 +17505,11 @@
       </p:sp>
       <p:sp>
         <p:nvSpPr>
-          <p:cNvPr id="25" name="c3-text-296">
-            <a:hlinkClick xmlns:r="http://schemas.openxmlformats.org/officeDocument/2006/relationships" xmlns:a="http://schemas.openxmlformats.org/drawingml/2006/main" r:id="R2ae80565482c4610"/>
-            <a:extLst xmlns:a="http://schemas.openxmlformats.org/drawingml/2006/main">
-              <a:ext uri="{FF2B5EF4-FFF2-40B4-BE49-F238E27FC236}">
-                <a16:creationId xmlns:a16="http://schemas.microsoft.com/office/drawing/2014/main" id="{D2A607EE-AB29-4E2B-9DA9-8A7CE75FC1EB}"/>
+          <p:cNvPr id="25" name="c3-text-306">
+            <a:hlinkClick xmlns:r="http://schemas.openxmlformats.org/officeDocument/2006/relationships" xmlns:a="http://schemas.openxmlformats.org/drawingml/2006/main" r:id="Rfcc21b96323f4c63"/>
+            <a:extLst xmlns:a="http://schemas.openxmlformats.org/drawingml/2006/main">
+              <a:ext uri="{FF2B5EF4-FFF2-40B4-BE49-F238E27FC236}">
+                <a16:creationId xmlns:a16="http://schemas.microsoft.com/office/drawing/2014/main" id="{7940703A-B18E-4A2A-8FAD-B0F0523C4082}"/>
               </a:ext>
             </a:extLst>
           </p:cNvPr>
@@ -16947,10 +17563,10 @@
       </p:sp>
       <p:sp>
         <p:nvSpPr>
-          <p:cNvPr id="26" name="c3-text-337">
-            <a:extLst xmlns:a="http://schemas.openxmlformats.org/drawingml/2006/main">
-              <a:ext uri="{FF2B5EF4-FFF2-40B4-BE49-F238E27FC236}">
-                <a16:creationId xmlns:a16="http://schemas.microsoft.com/office/drawing/2014/main" id="{5409A4C3-CB66-4F0B-B059-F67553FBADF1}"/>
+          <p:cNvPr id="26" name="c3-text-355">
+            <a:extLst xmlns:a="http://schemas.openxmlformats.org/drawingml/2006/main">
+              <a:ext uri="{FF2B5EF4-FFF2-40B4-BE49-F238E27FC236}">
+                <a16:creationId xmlns:a16="http://schemas.microsoft.com/office/drawing/2014/main" id="{D5FEC06C-DE46-4A2C-81C9-0222EB8F8F54}"/>
               </a:ext>
             </a:extLst>
           </p:cNvPr>
@@ -17005,7 +17621,7 @@
     </p:spTree>
     <p:extLst>
       <p:ext uri="{BB962C8B-B14F-4D97-AF65-F5344CB8AC3E}">
-        <p14:creationId xmlns:p14="http://schemas.microsoft.com/office/powerpoint/2010/main" val="1495501332"/>
+        <p14:creationId xmlns:p14="http://schemas.microsoft.com/office/powerpoint/2010/main" val="1092580785"/>
       </p:ext>
     </p:extLst>
   </p:cSld>
@@ -17036,7 +17652,7 @@
           <p:cNvPr id="19" name="c3-text-18">
             <a:extLst xmlns:a="http://schemas.openxmlformats.org/drawingml/2006/main">
               <a:ext uri="{FF2B5EF4-FFF2-40B4-BE49-F238E27FC236}">
-                <a16:creationId xmlns:a16="http://schemas.microsoft.com/office/drawing/2014/main" id="{FE93E042-DF55-4E8E-B52D-64724C7D6376}"/>
+                <a16:creationId xmlns:a16="http://schemas.microsoft.com/office/drawing/2014/main" id="{8D83F3E5-62D9-4667-B2D7-2BA1ACFA9B32}"/>
               </a:ext>
             </a:extLst>
           </p:cNvPr>
@@ -17093,7 +17709,7 @@
           <p:cNvPr id="2" name="c3-text-19">
             <a:extLst xmlns:a="http://schemas.openxmlformats.org/drawingml/2006/main">
               <a:ext uri="{FF2B5EF4-FFF2-40B4-BE49-F238E27FC236}">
-                <a16:creationId xmlns:a16="http://schemas.microsoft.com/office/drawing/2014/main" id="{B59B2BF3-43C5-4B64-A55A-AA81AD47D898}"/>
+                <a16:creationId xmlns:a16="http://schemas.microsoft.com/office/drawing/2014/main" id="{E4EEBE92-72B3-466F-9B9C-AFC170B73C71}"/>
               </a:ext>
             </a:extLst>
           </p:cNvPr>
@@ -17150,7 +17766,7 @@
           <p:cNvPr id="3" name="c3-text-20">
             <a:extLst xmlns:a="http://schemas.openxmlformats.org/drawingml/2006/main">
               <a:ext uri="{FF2B5EF4-FFF2-40B4-BE49-F238E27FC236}">
-                <a16:creationId xmlns:a16="http://schemas.microsoft.com/office/drawing/2014/main" id="{07BF7E77-6195-4925-8002-EEAC37C0455F}"/>
+                <a16:creationId xmlns:a16="http://schemas.microsoft.com/office/drawing/2014/main" id="{690E8522-00D5-418B-9827-9714F7DA6EE3}"/>
               </a:ext>
             </a:extLst>
           </p:cNvPr>
@@ -17207,7 +17823,7 @@
           <p:cNvPr id="4" name="c3-shape-21">
             <a:extLst xmlns:a="http://schemas.openxmlformats.org/drawingml/2006/main">
               <a:ext uri="{FF2B5EF4-FFF2-40B4-BE49-F238E27FC236}">
-                <a16:creationId xmlns:a16="http://schemas.microsoft.com/office/drawing/2014/main" id="{2E12A6BA-9592-4CDF-BECE-6592BDC9C154}"/>
+                <a16:creationId xmlns:a16="http://schemas.microsoft.com/office/drawing/2014/main" id="{9DE55CEB-B4D1-4385-BA7B-A6F237255AE4}"/>
               </a:ext>
             </a:extLst>
           </p:cNvPr>
@@ -17241,7 +17857,7 @@
           <p:cNvPr id="5" name="c3-shape-22">
             <a:extLst xmlns:a="http://schemas.openxmlformats.org/drawingml/2006/main">
               <a:ext uri="{FF2B5EF4-FFF2-40B4-BE49-F238E27FC236}">
-                <a16:creationId xmlns:a16="http://schemas.microsoft.com/office/drawing/2014/main" id="{53A5A7C4-6B6A-4AE1-AD6A-5743ADD12D4B}"/>
+                <a16:creationId xmlns:a16="http://schemas.microsoft.com/office/drawing/2014/main" id="{2EEE42FA-AE73-48F0-9109-CA5B361AD7AF}"/>
               </a:ext>
             </a:extLst>
           </p:cNvPr>
@@ -17273,7 +17889,7 @@
           <p:cNvPr id="6" name="c3-text-23">
             <a:extLst xmlns:a="http://schemas.openxmlformats.org/drawingml/2006/main">
               <a:ext uri="{FF2B5EF4-FFF2-40B4-BE49-F238E27FC236}">
-                <a16:creationId xmlns:a16="http://schemas.microsoft.com/office/drawing/2014/main" id="{31C2F474-6AC2-407D-BF03-C3E5509BC1E7}"/>
+                <a16:creationId xmlns:a16="http://schemas.microsoft.com/office/drawing/2014/main" id="{21F9DE41-1540-4FF0-8C55-60A60DDEB73C}"/>
               </a:ext>
             </a:extLst>
           </p:cNvPr>
@@ -17330,7 +17946,7 @@
           <p:cNvPr id="7" name="c3-text-24">
             <a:extLst xmlns:a="http://schemas.openxmlformats.org/drawingml/2006/main">
               <a:ext uri="{FF2B5EF4-FFF2-40B4-BE49-F238E27FC236}">
-                <a16:creationId xmlns:a16="http://schemas.microsoft.com/office/drawing/2014/main" id="{C3992B19-7C25-4023-8F99-06DB0E709768}"/>
+                <a16:creationId xmlns:a16="http://schemas.microsoft.com/office/drawing/2014/main" id="{4B974E7A-6C9F-4DA1-9C48-69D42F662085}"/>
               </a:ext>
             </a:extLst>
           </p:cNvPr>
@@ -17433,7 +18049,7 @@
           <p:cNvPr id="8" name="c3-shape-25">
             <a:extLst xmlns:a="http://schemas.openxmlformats.org/drawingml/2006/main">
               <a:ext uri="{FF2B5EF4-FFF2-40B4-BE49-F238E27FC236}">
-                <a16:creationId xmlns:a16="http://schemas.microsoft.com/office/drawing/2014/main" id="{E49E45CC-A8CA-41E3-8522-D9AC4203AB1C}"/>
+                <a16:creationId xmlns:a16="http://schemas.microsoft.com/office/drawing/2014/main" id="{19502F21-6CBC-463A-BA69-60D6AE981101}"/>
               </a:ext>
             </a:extLst>
           </p:cNvPr>
@@ -17467,7 +18083,7 @@
           <p:cNvPr id="9" name="c3-shape-26">
             <a:extLst xmlns:a="http://schemas.openxmlformats.org/drawingml/2006/main">
               <a:ext uri="{FF2B5EF4-FFF2-40B4-BE49-F238E27FC236}">
-                <a16:creationId xmlns:a16="http://schemas.microsoft.com/office/drawing/2014/main" id="{89E251E1-C86D-4F7C-99CA-7A7F678AAC9D}"/>
+                <a16:creationId xmlns:a16="http://schemas.microsoft.com/office/drawing/2014/main" id="{55BB4583-76DE-4C1A-B162-FF76DBFEFE4C}"/>
               </a:ext>
             </a:extLst>
           </p:cNvPr>
@@ -17499,7 +18115,7 @@
           <p:cNvPr id="10" name="c3-text-27">
             <a:extLst xmlns:a="http://schemas.openxmlformats.org/drawingml/2006/main">
               <a:ext uri="{FF2B5EF4-FFF2-40B4-BE49-F238E27FC236}">
-                <a16:creationId xmlns:a16="http://schemas.microsoft.com/office/drawing/2014/main" id="{EC4BFC31-EED3-42FB-83EC-8EE94F36D951}"/>
+                <a16:creationId xmlns:a16="http://schemas.microsoft.com/office/drawing/2014/main" id="{9F4FFC5A-647A-4BF1-9DCD-7CDA4E6B1547}"/>
               </a:ext>
             </a:extLst>
           </p:cNvPr>
@@ -17556,7 +18172,7 @@
           <p:cNvPr id="11" name="c3-text-28">
             <a:extLst xmlns:a="http://schemas.openxmlformats.org/drawingml/2006/main">
               <a:ext uri="{FF2B5EF4-FFF2-40B4-BE49-F238E27FC236}">
-                <a16:creationId xmlns:a16="http://schemas.microsoft.com/office/drawing/2014/main" id="{E0B7AEE9-1406-45AB-AA7E-7FEA45FC567B}"/>
+                <a16:creationId xmlns:a16="http://schemas.microsoft.com/office/drawing/2014/main" id="{744D33F0-1CFA-40CA-94F8-AE83D4AE2DDF}"/>
               </a:ext>
             </a:extLst>
           </p:cNvPr>
@@ -17636,7 +18252,7 @@
           <p:cNvPr id="12" name="c3-shape-29">
             <a:extLst xmlns:a="http://schemas.openxmlformats.org/drawingml/2006/main">
               <a:ext uri="{FF2B5EF4-FFF2-40B4-BE49-F238E27FC236}">
-                <a16:creationId xmlns:a16="http://schemas.microsoft.com/office/drawing/2014/main" id="{77EC85F7-EE2C-4755-BC00-56B48FFD59BE}"/>
+                <a16:creationId xmlns:a16="http://schemas.microsoft.com/office/drawing/2014/main" id="{18DDEABE-A334-461E-9DCC-2FCACA958DC5}"/>
               </a:ext>
             </a:extLst>
           </p:cNvPr>
@@ -17670,7 +18286,7 @@
           <p:cNvPr id="13" name="c3-shape-30">
             <a:extLst xmlns:a="http://schemas.openxmlformats.org/drawingml/2006/main">
               <a:ext uri="{FF2B5EF4-FFF2-40B4-BE49-F238E27FC236}">
-                <a16:creationId xmlns:a16="http://schemas.microsoft.com/office/drawing/2014/main" id="{9667A105-152D-4670-8BCC-D9FEF8956E96}"/>
+                <a16:creationId xmlns:a16="http://schemas.microsoft.com/office/drawing/2014/main" id="{8035311D-9BAB-4298-A395-DB5BD7A37A2C}"/>
               </a:ext>
             </a:extLst>
           </p:cNvPr>
@@ -17702,7 +18318,7 @@
           <p:cNvPr id="14" name="c3-text-31">
             <a:extLst xmlns:a="http://schemas.openxmlformats.org/drawingml/2006/main">
               <a:ext uri="{FF2B5EF4-FFF2-40B4-BE49-F238E27FC236}">
-                <a16:creationId xmlns:a16="http://schemas.microsoft.com/office/drawing/2014/main" id="{26180DA8-5F28-46C4-AA1C-47CBE011103E}"/>
+                <a16:creationId xmlns:a16="http://schemas.microsoft.com/office/drawing/2014/main" id="{C56E4B1A-3E3E-4F2E-A8C4-1446C5C5CAE9}"/>
               </a:ext>
             </a:extLst>
           </p:cNvPr>
@@ -17759,7 +18375,7 @@
           <p:cNvPr id="15" name="c3-text-32">
             <a:extLst xmlns:a="http://schemas.openxmlformats.org/drawingml/2006/main">
               <a:ext uri="{FF2B5EF4-FFF2-40B4-BE49-F238E27FC236}">
-                <a16:creationId xmlns:a16="http://schemas.microsoft.com/office/drawing/2014/main" id="{F8E18BEC-29BF-439C-8586-723E482A6942}"/>
+                <a16:creationId xmlns:a16="http://schemas.microsoft.com/office/drawing/2014/main" id="{66EA7EC5-B847-4706-BB17-010A8A2EB739}"/>
               </a:ext>
             </a:extLst>
           </p:cNvPr>
@@ -17839,7 +18455,7 @@
           <p:cNvPr id="16" name="c3-shape-33">
             <a:extLst xmlns:a="http://schemas.openxmlformats.org/drawingml/2006/main">
               <a:ext uri="{FF2B5EF4-FFF2-40B4-BE49-F238E27FC236}">
-                <a16:creationId xmlns:a16="http://schemas.microsoft.com/office/drawing/2014/main" id="{6F4DEBE0-DA63-4654-B743-636B1334B2CD}"/>
+                <a16:creationId xmlns:a16="http://schemas.microsoft.com/office/drawing/2014/main" id="{76AC34BC-A428-4C45-B81A-623434744F24}"/>
               </a:ext>
             </a:extLst>
           </p:cNvPr>
@@ -17873,7 +18489,7 @@
           <p:cNvPr id="17" name="c3-text-34">
             <a:extLst xmlns:a="http://schemas.openxmlformats.org/drawingml/2006/main">
               <a:ext uri="{FF2B5EF4-FFF2-40B4-BE49-F238E27FC236}">
-                <a16:creationId xmlns:a16="http://schemas.microsoft.com/office/drawing/2014/main" id="{2D2FB5BE-C1F7-48C6-8FCE-3F9042B0AA10}"/>
+                <a16:creationId xmlns:a16="http://schemas.microsoft.com/office/drawing/2014/main" id="{17BFB7F7-3F61-464E-B69B-386D72F6F335}"/>
               </a:ext>
             </a:extLst>
           </p:cNvPr>
@@ -17927,10 +18543,10 @@
       </p:sp>
       <p:sp>
         <p:nvSpPr>
-          <p:cNvPr id="18" name="c3-text-311">
-            <a:extLst xmlns:a="http://schemas.openxmlformats.org/drawingml/2006/main">
-              <a:ext uri="{FF2B5EF4-FFF2-40B4-BE49-F238E27FC236}">
-                <a16:creationId xmlns:a16="http://schemas.microsoft.com/office/drawing/2014/main" id="{5C1A6D4E-F164-45C8-9194-08665B839EE9}"/>
+          <p:cNvPr id="18" name="c3-text-329">
+            <a:extLst xmlns:a="http://schemas.openxmlformats.org/drawingml/2006/main">
+              <a:ext uri="{FF2B5EF4-FFF2-40B4-BE49-F238E27FC236}">
+                <a16:creationId xmlns:a16="http://schemas.microsoft.com/office/drawing/2014/main" id="{223B0D97-1F7E-4C1B-AB36-7BE7DE33C87B}"/>
               </a:ext>
             </a:extLst>
           </p:cNvPr>
@@ -17985,7 +18601,7 @@
     </p:spTree>
     <p:extLst>
       <p:ext uri="{BB962C8B-B14F-4D97-AF65-F5344CB8AC3E}">
-        <p14:creationId xmlns:p14="http://schemas.microsoft.com/office/powerpoint/2010/main" val="1821985872"/>
+        <p14:creationId xmlns:p14="http://schemas.microsoft.com/office/powerpoint/2010/main" val="1942204812"/>
       </p:ext>
     </p:extLst>
   </p:cSld>
@@ -18013,10 +18629,10 @@
       </p:grpSpPr>
       <p:sp>
         <p:nvSpPr>
-          <p:cNvPr id="14" name="c3-text-297">
-            <a:extLst xmlns:a="http://schemas.openxmlformats.org/drawingml/2006/main">
-              <a:ext uri="{FF2B5EF4-FFF2-40B4-BE49-F238E27FC236}">
-                <a16:creationId xmlns:a16="http://schemas.microsoft.com/office/drawing/2014/main" id="{6601F513-F439-42EB-A76B-28A49F8E25F2}"/>
+          <p:cNvPr id="22" name="c3-text-307">
+            <a:extLst xmlns:a="http://schemas.openxmlformats.org/drawingml/2006/main">
+              <a:ext uri="{FF2B5EF4-FFF2-40B4-BE49-F238E27FC236}">
+                <a16:creationId xmlns:a16="http://schemas.microsoft.com/office/drawing/2014/main" id="{4805DC99-04E4-44DA-BDB5-12D184F38719}"/>
               </a:ext>
             </a:extLst>
           </p:cNvPr>
@@ -18070,10 +18686,10 @@
       </p:sp>
       <p:sp>
         <p:nvSpPr>
-          <p:cNvPr id="2" name="c3-text-298">
-            <a:extLst xmlns:a="http://schemas.openxmlformats.org/drawingml/2006/main">
-              <a:ext uri="{FF2B5EF4-FFF2-40B4-BE49-F238E27FC236}">
-                <a16:creationId xmlns:a16="http://schemas.microsoft.com/office/drawing/2014/main" id="{642D8DF0-2B4F-4545-B2BF-4EEA5943C1EE}"/>
+          <p:cNvPr id="2" name="c3-text-308">
+            <a:extLst xmlns:a="http://schemas.openxmlformats.org/drawingml/2006/main">
+              <a:ext uri="{FF2B5EF4-FFF2-40B4-BE49-F238E27FC236}">
+                <a16:creationId xmlns:a16="http://schemas.microsoft.com/office/drawing/2014/main" id="{E2C029FC-7F3B-4BD2-9313-47AFAEF98BF6}"/>
               </a:ext>
             </a:extLst>
           </p:cNvPr>
@@ -18127,10 +18743,10 @@
       </p:sp>
       <p:sp>
         <p:nvSpPr>
-          <p:cNvPr id="3" name="c3-text-299">
-            <a:extLst xmlns:a="http://schemas.openxmlformats.org/drawingml/2006/main">
-              <a:ext uri="{FF2B5EF4-FFF2-40B4-BE49-F238E27FC236}">
-                <a16:creationId xmlns:a16="http://schemas.microsoft.com/office/drawing/2014/main" id="{09F9F351-9E5D-45A6-B394-6D5009891E56}"/>
+          <p:cNvPr id="3" name="c3-text-309">
+            <a:extLst xmlns:a="http://schemas.openxmlformats.org/drawingml/2006/main">
+              <a:ext uri="{FF2B5EF4-FFF2-40B4-BE49-F238E27FC236}">
+                <a16:creationId xmlns:a16="http://schemas.microsoft.com/office/drawing/2014/main" id="{A289F09A-9198-4736-8345-B7D759D7185F}"/>
               </a:ext>
             </a:extLst>
           </p:cNvPr>
@@ -18184,11 +18800,11 @@
       </p:sp>
       <p:sp>
         <p:nvSpPr>
-          <p:cNvPr id="4" name="c3-text-300">
-            <a:hlinkClick xmlns:r="http://schemas.openxmlformats.org/officeDocument/2006/relationships" xmlns:a="http://schemas.openxmlformats.org/drawingml/2006/main" r:id="R58d3b0f7d54241bb"/>
-            <a:extLst xmlns:a="http://schemas.openxmlformats.org/drawingml/2006/main">
-              <a:ext uri="{FF2B5EF4-FFF2-40B4-BE49-F238E27FC236}">
-                <a16:creationId xmlns:a16="http://schemas.microsoft.com/office/drawing/2014/main" id="{B2DFEA30-90D4-4B18-8935-903173EB81D6}"/>
+          <p:cNvPr id="4" name="c3-text-310">
+            <a:hlinkClick xmlns:r="http://schemas.openxmlformats.org/officeDocument/2006/relationships" xmlns:a="http://schemas.openxmlformats.org/drawingml/2006/main" r:id="R892095f7b8c7453e"/>
+            <a:extLst xmlns:a="http://schemas.openxmlformats.org/drawingml/2006/main">
+              <a:ext uri="{FF2B5EF4-FFF2-40B4-BE49-F238E27FC236}">
+                <a16:creationId xmlns:a16="http://schemas.microsoft.com/office/drawing/2014/main" id="{59D0F364-8194-42D8-AC4D-28E6A21AE3AA}"/>
               </a:ext>
             </a:extLst>
           </p:cNvPr>
@@ -18242,11 +18858,11 @@
       </p:sp>
       <p:sp>
         <p:nvSpPr>
-          <p:cNvPr id="5" name="c3-text-301">
-            <a:hlinkClick xmlns:r="http://schemas.openxmlformats.org/officeDocument/2006/relationships" xmlns:a="http://schemas.openxmlformats.org/drawingml/2006/main" r:id="Rf37a7b9adbc3469a"/>
-            <a:extLst xmlns:a="http://schemas.openxmlformats.org/drawingml/2006/main">
-              <a:ext uri="{FF2B5EF4-FFF2-40B4-BE49-F238E27FC236}">
-                <a16:creationId xmlns:a16="http://schemas.microsoft.com/office/drawing/2014/main" id="{45FB0436-D367-4BE8-896F-FDAFFCDE6F69}"/>
+          <p:cNvPr id="5" name="c3-text-311">
+            <a:hlinkClick xmlns:r="http://schemas.openxmlformats.org/officeDocument/2006/relationships" xmlns:a="http://schemas.openxmlformats.org/drawingml/2006/main" r:id="R93b87eb0a2ff42ae"/>
+            <a:extLst xmlns:a="http://schemas.openxmlformats.org/drawingml/2006/main">
+              <a:ext uri="{FF2B5EF4-FFF2-40B4-BE49-F238E27FC236}">
+                <a16:creationId xmlns:a16="http://schemas.microsoft.com/office/drawing/2014/main" id="{953E40AD-0CF9-4B18-A544-425A150C4D10}"/>
               </a:ext>
             </a:extLst>
           </p:cNvPr>
@@ -18300,10 +18916,10 @@
       </p:sp>
       <p:sp>
         <p:nvSpPr>
-          <p:cNvPr id="6" name="c3-shape-302">
-            <a:extLst xmlns:a="http://schemas.openxmlformats.org/drawingml/2006/main">
-              <a:ext uri="{FF2B5EF4-FFF2-40B4-BE49-F238E27FC236}">
-                <a16:creationId xmlns:a16="http://schemas.microsoft.com/office/drawing/2014/main" id="{048325A0-F892-4115-B99A-0BD43F3C01FC}"/>
+          <p:cNvPr id="6" name="c3-shape-312">
+            <a:extLst xmlns:a="http://schemas.openxmlformats.org/drawingml/2006/main">
+              <a:ext uri="{FF2B5EF4-FFF2-40B4-BE49-F238E27FC236}">
+                <a16:creationId xmlns:a16="http://schemas.microsoft.com/office/drawing/2014/main" id="{84071299-7455-4E57-A8E7-64919A2DC482}"/>
               </a:ext>
             </a:extLst>
           </p:cNvPr>
@@ -18332,11 +18948,11 @@
       </p:sp>
       <p:sp>
         <p:nvSpPr>
-          <p:cNvPr id="7" name="c3-text-303">
-            <a:hlinkClick xmlns:r="http://schemas.openxmlformats.org/officeDocument/2006/relationships" xmlns:a="http://schemas.openxmlformats.org/drawingml/2006/main" r:id="Rd06688da2c27461a"/>
-            <a:extLst xmlns:a="http://schemas.openxmlformats.org/drawingml/2006/main">
-              <a:ext uri="{FF2B5EF4-FFF2-40B4-BE49-F238E27FC236}">
-                <a16:creationId xmlns:a16="http://schemas.microsoft.com/office/drawing/2014/main" id="{E890022F-F1F5-4B95-BF14-F10B098CBB4D}"/>
+          <p:cNvPr id="7" name="c3-text-313">
+            <a:hlinkClick xmlns:r="http://schemas.openxmlformats.org/officeDocument/2006/relationships" xmlns:a="http://schemas.openxmlformats.org/drawingml/2006/main" r:id="Re18de4fa9b704a0a"/>
+            <a:extLst xmlns:a="http://schemas.openxmlformats.org/drawingml/2006/main">
+              <a:ext uri="{FF2B5EF4-FFF2-40B4-BE49-F238E27FC236}">
+                <a16:creationId xmlns:a16="http://schemas.microsoft.com/office/drawing/2014/main" id="{A6ED5200-B1D3-49DC-8A98-9C86FD4489EA}"/>
               </a:ext>
             </a:extLst>
           </p:cNvPr>
@@ -18390,11 +19006,11 @@
       </p:sp>
       <p:sp>
         <p:nvSpPr>
-          <p:cNvPr id="8" name="c3-text-304">
-            <a:hlinkClick xmlns:r="http://schemas.openxmlformats.org/officeDocument/2006/relationships" xmlns:a="http://schemas.openxmlformats.org/drawingml/2006/main" r:id="Re155524c8a3147f1"/>
-            <a:extLst xmlns:a="http://schemas.openxmlformats.org/drawingml/2006/main">
-              <a:ext uri="{FF2B5EF4-FFF2-40B4-BE49-F238E27FC236}">
-                <a16:creationId xmlns:a16="http://schemas.microsoft.com/office/drawing/2014/main" id="{91C51F5C-0D91-46D7-BCCA-B6821A77A956}"/>
+          <p:cNvPr id="8" name="c3-text-314">
+            <a:hlinkClick xmlns:r="http://schemas.openxmlformats.org/officeDocument/2006/relationships" xmlns:a="http://schemas.openxmlformats.org/drawingml/2006/main" r:id="R5a6e16247d7d4fb3"/>
+            <a:extLst xmlns:a="http://schemas.openxmlformats.org/drawingml/2006/main">
+              <a:ext uri="{FF2B5EF4-FFF2-40B4-BE49-F238E27FC236}">
+                <a16:creationId xmlns:a16="http://schemas.microsoft.com/office/drawing/2014/main" id="{31DB6CBE-4859-4AD8-9E1B-080FA08054C2}"/>
               </a:ext>
             </a:extLst>
           </p:cNvPr>
@@ -18448,10 +19064,10 @@
       </p:sp>
       <p:sp>
         <p:nvSpPr>
-          <p:cNvPr id="9" name="c3-shape-305">
-            <a:extLst xmlns:a="http://schemas.openxmlformats.org/drawingml/2006/main">
-              <a:ext uri="{FF2B5EF4-FFF2-40B4-BE49-F238E27FC236}">
-                <a16:creationId xmlns:a16="http://schemas.microsoft.com/office/drawing/2014/main" id="{FAA1E989-5AB7-4959-AEE1-947D1F403524}"/>
+          <p:cNvPr id="9" name="c3-shape-315">
+            <a:extLst xmlns:a="http://schemas.openxmlformats.org/drawingml/2006/main">
+              <a:ext uri="{FF2B5EF4-FFF2-40B4-BE49-F238E27FC236}">
+                <a16:creationId xmlns:a16="http://schemas.microsoft.com/office/drawing/2014/main" id="{A7A5684F-3A9F-4F05-BBAB-381FA17C05F1}"/>
               </a:ext>
             </a:extLst>
           </p:cNvPr>
@@ -18480,11 +19096,11 @@
       </p:sp>
       <p:sp>
         <p:nvSpPr>
-          <p:cNvPr id="10" name="c3-text-306">
-            <a:hlinkClick xmlns:r="http://schemas.openxmlformats.org/officeDocument/2006/relationships" xmlns:a="http://schemas.openxmlformats.org/drawingml/2006/main" r:id="Rc373a62047ca4bdc"/>
-            <a:extLst xmlns:a="http://schemas.openxmlformats.org/drawingml/2006/main">
-              <a:ext uri="{FF2B5EF4-FFF2-40B4-BE49-F238E27FC236}">
-                <a16:creationId xmlns:a16="http://schemas.microsoft.com/office/drawing/2014/main" id="{1B454BEE-58AD-446B-A76D-8CFB26038B3F}"/>
+          <p:cNvPr id="10" name="c3-text-316">
+            <a:hlinkClick xmlns:r="http://schemas.openxmlformats.org/officeDocument/2006/relationships" xmlns:a="http://schemas.openxmlformats.org/drawingml/2006/main" r:id="Rf4f28e4c58574f76"/>
+            <a:extLst xmlns:a="http://schemas.openxmlformats.org/drawingml/2006/main">
+              <a:ext uri="{FF2B5EF4-FFF2-40B4-BE49-F238E27FC236}">
+                <a16:creationId xmlns:a16="http://schemas.microsoft.com/office/drawing/2014/main" id="{9C9BA0CF-7649-4B18-98F3-4916F4A4F3A4}"/>
               </a:ext>
             </a:extLst>
           </p:cNvPr>
@@ -18538,11 +19154,11 @@
       </p:sp>
       <p:sp>
         <p:nvSpPr>
-          <p:cNvPr id="11" name="c3-text-307">
-            <a:hlinkClick xmlns:r="http://schemas.openxmlformats.org/officeDocument/2006/relationships" xmlns:a="http://schemas.openxmlformats.org/drawingml/2006/main" r:id="R35d6641e8c22437d"/>
-            <a:extLst xmlns:a="http://schemas.openxmlformats.org/drawingml/2006/main">
-              <a:ext uri="{FF2B5EF4-FFF2-40B4-BE49-F238E27FC236}">
-                <a16:creationId xmlns:a16="http://schemas.microsoft.com/office/drawing/2014/main" id="{0FF3CADD-88AE-42C2-B5FA-7B7CA379FBEC}"/>
+          <p:cNvPr id="11" name="c3-text-317">
+            <a:hlinkClick xmlns:r="http://schemas.openxmlformats.org/officeDocument/2006/relationships" xmlns:a="http://schemas.openxmlformats.org/drawingml/2006/main" r:id="R07e481cf2a774697"/>
+            <a:extLst xmlns:a="http://schemas.openxmlformats.org/drawingml/2006/main">
+              <a:ext uri="{FF2B5EF4-FFF2-40B4-BE49-F238E27FC236}">
+                <a16:creationId xmlns:a16="http://schemas.microsoft.com/office/drawing/2014/main" id="{685973DB-21CF-49AF-B839-5D5AE4354205}"/>
               </a:ext>
             </a:extLst>
           </p:cNvPr>
@@ -18596,10 +19212,10 @@
       </p:sp>
       <p:sp>
         <p:nvSpPr>
-          <p:cNvPr id="12" name="c3-shape-308">
-            <a:extLst xmlns:a="http://schemas.openxmlformats.org/drawingml/2006/main">
-              <a:ext uri="{FF2B5EF4-FFF2-40B4-BE49-F238E27FC236}">
-                <a16:creationId xmlns:a16="http://schemas.microsoft.com/office/drawing/2014/main" id="{BFC8E4C6-0902-4294-88C6-2146971A9253}"/>
+          <p:cNvPr id="12" name="c3-shape-318">
+            <a:extLst xmlns:a="http://schemas.openxmlformats.org/drawingml/2006/main">
+              <a:ext uri="{FF2B5EF4-FFF2-40B4-BE49-F238E27FC236}">
+                <a16:creationId xmlns:a16="http://schemas.microsoft.com/office/drawing/2014/main" id="{5EF4F411-E505-4BBE-BD0A-0A5209F16A25}"/>
               </a:ext>
             </a:extLst>
           </p:cNvPr>
@@ -18628,10 +19244,422 @@
       </p:sp>
       <p:sp>
         <p:nvSpPr>
-          <p:cNvPr id="13" name="c3-text-338">
-            <a:extLst xmlns:a="http://schemas.openxmlformats.org/drawingml/2006/main">
-              <a:ext uri="{FF2B5EF4-FFF2-40B4-BE49-F238E27FC236}">
-                <a16:creationId xmlns:a16="http://schemas.microsoft.com/office/drawing/2014/main" id="{1E999C20-C4D1-40D0-9D25-6F1EE92903EA}"/>
+          <p:cNvPr id="13" name="c3-text-319">
+            <a:hlinkClick xmlns:r="http://schemas.openxmlformats.org/officeDocument/2006/relationships" xmlns:a="http://schemas.openxmlformats.org/drawingml/2006/main" r:id="Ra04fd6a6cdf840d2"/>
+            <a:extLst xmlns:a="http://schemas.openxmlformats.org/drawingml/2006/main">
+              <a:ext uri="{FF2B5EF4-FFF2-40B4-BE49-F238E27FC236}">
+                <a16:creationId xmlns:a16="http://schemas.microsoft.com/office/drawing/2014/main" id="{FBA73471-282A-42F6-92DB-8CEEDC48B93E}"/>
+              </a:ext>
+            </a:extLst>
+          </p:cNvPr>
+          <p:cNvSpPr>
+            <a:spLocks xmlns:a="http://schemas.openxmlformats.org/drawingml/2006/main" noGrp="1"/>
+          </p:cNvSpPr>
+          <p:nvPr/>
+        </p:nvSpPr>
+        <p:spPr>
+          <a:xfrm xmlns:a="http://schemas.openxmlformats.org/drawingml/2006/main">
+            <a:off x="609600" y="3848100"/>
+            <a:ext cx="3771900" cy="285750"/>
+          </a:xfrm>
+          <a:prstGeom xmlns:a="http://schemas.openxmlformats.org/drawingml/2006/main" prst="rect">
+            <a:avLst/>
+          </a:prstGeom>
+          <a:noFill xmlns:a="http://schemas.openxmlformats.org/drawingml/2006/main"/>
+          <a:ln xmlns:a="http://schemas.openxmlformats.org/drawingml/2006/main" w="0">
+            <a:noFill/>
+          </a:ln>
+        </p:spPr>
+        <p:txBody>
+          <a:bodyPr xmlns:a="http://schemas.openxmlformats.org/drawingml/2006/main" wrap="square" lIns="9525" tIns="9525" rIns="9525" bIns="9525" anchor="ctr">
+            <a:noAutofit/>
+          </a:bodyPr>
+          <a:lstStyle xmlns:a="http://schemas.openxmlformats.org/drawingml/2006/main"/>
+          <a:p xmlns:a="http://schemas.openxmlformats.org/drawingml/2006/main">
+            <a:pPr>
+              <a:defRPr sz="1500" b="0">
+                <a:solidFill>
+                  <a:srgbClr val="D9A06B"/>
+                </a:solidFill>
+                <a:latin typeface="Calibri"/>
+                <a:ea typeface="Calibri"/>
+                <a:cs typeface="Calibri"/>
+              </a:defRPr>
+            </a:pPr>
+            <a:r>
+              <a:rPr sz="1500" b="0" u="sng">
+                <a:solidFill>
+                  <a:srgbClr val="D9A06B"/>
+                </a:solidFill>
+                <a:latin typeface="Calibri"/>
+                <a:ea typeface="Calibri"/>
+                <a:cs typeface="Calibri"/>
+              </a:rPr>
+              <a:t>[12] Claude Code in VS Code</a:t>
+            </a:r>
+          </a:p>
+        </p:txBody>
+      </p:sp>
+      <p:sp>
+        <p:nvSpPr>
+          <p:cNvPr id="14" name="c3-text-320">
+            <a:hlinkClick xmlns:r="http://schemas.openxmlformats.org/officeDocument/2006/relationships" xmlns:a="http://schemas.openxmlformats.org/drawingml/2006/main" r:id="R408db5f21be94ee0"/>
+            <a:extLst xmlns:a="http://schemas.openxmlformats.org/drawingml/2006/main">
+              <a:ext uri="{FF2B5EF4-FFF2-40B4-BE49-F238E27FC236}">
+                <a16:creationId xmlns:a16="http://schemas.microsoft.com/office/drawing/2014/main" id="{0E26E954-46B7-4713-A37F-53D94A11C156}"/>
+              </a:ext>
+            </a:extLst>
+          </p:cNvPr>
+          <p:cNvSpPr>
+            <a:spLocks xmlns:a="http://schemas.openxmlformats.org/drawingml/2006/main" noGrp="1"/>
+          </p:cNvSpPr>
+          <p:nvPr/>
+        </p:nvSpPr>
+        <p:spPr>
+          <a:xfrm xmlns:a="http://schemas.openxmlformats.org/drawingml/2006/main">
+            <a:off x="609600" y="4152900"/>
+            <a:ext cx="3771900" cy="428625"/>
+          </a:xfrm>
+          <a:prstGeom xmlns:a="http://schemas.openxmlformats.org/drawingml/2006/main" prst="rect">
+            <a:avLst/>
+          </a:prstGeom>
+          <a:noFill xmlns:a="http://schemas.openxmlformats.org/drawingml/2006/main"/>
+          <a:ln xmlns:a="http://schemas.openxmlformats.org/drawingml/2006/main" w="0">
+            <a:noFill/>
+          </a:ln>
+        </p:spPr>
+        <p:txBody>
+          <a:bodyPr xmlns:a="http://schemas.openxmlformats.org/drawingml/2006/main" wrap="square" lIns="9525" tIns="9525" rIns="9525" bIns="9525" anchor="ctr">
+            <a:noAutofit/>
+          </a:bodyPr>
+          <a:lstStyle xmlns:a="http://schemas.openxmlformats.org/drawingml/2006/main"/>
+          <a:p xmlns:a="http://schemas.openxmlformats.org/drawingml/2006/main">
+            <a:pPr>
+              <a:defRPr sz="1350" b="0">
+                <a:solidFill>
+                  <a:srgbClr val="ECE6DE"/>
+                </a:solidFill>
+                <a:latin typeface="Calibri"/>
+                <a:ea typeface="Calibri"/>
+                <a:cs typeface="Calibri"/>
+              </a:defRPr>
+            </a:pPr>
+            <a:r>
+              <a:rPr sz="1350" b="0" u="sng">
+                <a:solidFill>
+                  <a:srgbClr val="ECE6DE"/>
+                </a:solidFill>
+                <a:latin typeface="Calibri"/>
+                <a:ea typeface="Calibri"/>
+                <a:cs typeface="Calibri"/>
+              </a:rPr>
+              <a:t>Extension, editor context and reviewing edits</a:t>
+            </a:r>
+          </a:p>
+        </p:txBody>
+      </p:sp>
+      <p:sp>
+        <p:nvSpPr>
+          <p:cNvPr id="15" name="c3-text-321">
+            <a:hlinkClick xmlns:r="http://schemas.openxmlformats.org/officeDocument/2006/relationships" xmlns:a="http://schemas.openxmlformats.org/drawingml/2006/main" r:id="Rd48d9d0b8cc54f0c"/>
+            <a:extLst xmlns:a="http://schemas.openxmlformats.org/drawingml/2006/main">
+              <a:ext uri="{FF2B5EF4-FFF2-40B4-BE49-F238E27FC236}">
+                <a16:creationId xmlns:a16="http://schemas.microsoft.com/office/drawing/2014/main" id="{002DA2E9-FE26-4E6B-8B6C-45FE7FF9BD44}"/>
+              </a:ext>
+            </a:extLst>
+          </p:cNvPr>
+          <p:cNvSpPr>
+            <a:spLocks xmlns:a="http://schemas.openxmlformats.org/drawingml/2006/main" noGrp="1"/>
+          </p:cNvSpPr>
+          <p:nvPr/>
+        </p:nvSpPr>
+        <p:spPr>
+          <a:xfrm xmlns:a="http://schemas.openxmlformats.org/drawingml/2006/main">
+            <a:off x="4762500" y="1504950"/>
+            <a:ext cx="3771900" cy="285750"/>
+          </a:xfrm>
+          <a:prstGeom xmlns:a="http://schemas.openxmlformats.org/drawingml/2006/main" prst="rect">
+            <a:avLst/>
+          </a:prstGeom>
+          <a:noFill xmlns:a="http://schemas.openxmlformats.org/drawingml/2006/main"/>
+          <a:ln xmlns:a="http://schemas.openxmlformats.org/drawingml/2006/main" w="0">
+            <a:noFill/>
+          </a:ln>
+        </p:spPr>
+        <p:txBody>
+          <a:bodyPr xmlns:a="http://schemas.openxmlformats.org/drawingml/2006/main" wrap="square" lIns="9525" tIns="9525" rIns="9525" bIns="9525" anchor="ctr">
+            <a:noAutofit/>
+          </a:bodyPr>
+          <a:lstStyle xmlns:a="http://schemas.openxmlformats.org/drawingml/2006/main"/>
+          <a:p xmlns:a="http://schemas.openxmlformats.org/drawingml/2006/main">
+            <a:pPr>
+              <a:defRPr sz="1500" b="0">
+                <a:solidFill>
+                  <a:srgbClr val="D9A06B"/>
+                </a:solidFill>
+                <a:latin typeface="Calibri"/>
+                <a:ea typeface="Calibri"/>
+                <a:cs typeface="Calibri"/>
+              </a:defRPr>
+            </a:pPr>
+            <a:r>
+              <a:rPr sz="1500" b="0" u="sng">
+                <a:solidFill>
+                  <a:srgbClr val="D9A06B"/>
+                </a:solidFill>
+                <a:latin typeface="Calibri"/>
+                <a:ea typeface="Calibri"/>
+                <a:cs typeface="Calibri"/>
+              </a:rPr>
+              <a:t>[13] Codex extension</a:t>
+            </a:r>
+          </a:p>
+        </p:txBody>
+      </p:sp>
+      <p:sp>
+        <p:nvSpPr>
+          <p:cNvPr id="16" name="c3-text-322">
+            <a:hlinkClick xmlns:r="http://schemas.openxmlformats.org/officeDocument/2006/relationships" xmlns:a="http://schemas.openxmlformats.org/drawingml/2006/main" r:id="R554becfa1a7e4a04"/>
+            <a:extLst xmlns:a="http://schemas.openxmlformats.org/drawingml/2006/main">
+              <a:ext uri="{FF2B5EF4-FFF2-40B4-BE49-F238E27FC236}">
+                <a16:creationId xmlns:a16="http://schemas.microsoft.com/office/drawing/2014/main" id="{9DECAAEE-82B0-4C3D-B0D4-970D44206098}"/>
+              </a:ext>
+            </a:extLst>
+          </p:cNvPr>
+          <p:cNvSpPr>
+            <a:spLocks xmlns:a="http://schemas.openxmlformats.org/drawingml/2006/main" noGrp="1"/>
+          </p:cNvSpPr>
+          <p:nvPr/>
+        </p:nvSpPr>
+        <p:spPr>
+          <a:xfrm xmlns:a="http://schemas.openxmlformats.org/drawingml/2006/main">
+            <a:off x="4762500" y="1809750"/>
+            <a:ext cx="3771900" cy="428625"/>
+          </a:xfrm>
+          <a:prstGeom xmlns:a="http://schemas.openxmlformats.org/drawingml/2006/main" prst="rect">
+            <a:avLst/>
+          </a:prstGeom>
+          <a:noFill xmlns:a="http://schemas.openxmlformats.org/drawingml/2006/main"/>
+          <a:ln xmlns:a="http://schemas.openxmlformats.org/drawingml/2006/main" w="0">
+            <a:noFill/>
+          </a:ln>
+        </p:spPr>
+        <p:txBody>
+          <a:bodyPr xmlns:a="http://schemas.openxmlformats.org/drawingml/2006/main" wrap="square" lIns="9525" tIns="9525" rIns="9525" bIns="9525" anchor="ctr">
+            <a:noAutofit/>
+          </a:bodyPr>
+          <a:lstStyle xmlns:a="http://schemas.openxmlformats.org/drawingml/2006/main"/>
+          <a:p xmlns:a="http://schemas.openxmlformats.org/drawingml/2006/main">
+            <a:pPr>
+              <a:defRPr sz="1350" b="0">
+                <a:solidFill>
+                  <a:srgbClr val="ECE6DE"/>
+                </a:solidFill>
+                <a:latin typeface="Calibri"/>
+                <a:ea typeface="Calibri"/>
+                <a:cs typeface="Calibri"/>
+              </a:defRPr>
+            </a:pPr>
+            <a:r>
+              <a:rPr sz="1350" b="0" u="sng">
+                <a:solidFill>
+                  <a:srgbClr val="ECE6DE"/>
+                </a:solidFill>
+                <a:latin typeface="Calibri"/>
+                <a:ea typeface="Calibri"/>
+                <a:cs typeface="Calibri"/>
+              </a:rPr>
+              <a:t>Official OpenAI extension on Visual Studio Marketplace</a:t>
+            </a:r>
+          </a:p>
+        </p:txBody>
+      </p:sp>
+      <p:sp>
+        <p:nvSpPr>
+          <p:cNvPr id="17" name="c3-shape-323">
+            <a:extLst xmlns:a="http://schemas.openxmlformats.org/drawingml/2006/main">
+              <a:ext uri="{FF2B5EF4-FFF2-40B4-BE49-F238E27FC236}">
+                <a16:creationId xmlns:a16="http://schemas.microsoft.com/office/drawing/2014/main" id="{0BE76138-520C-469E-8EFC-774CD94B3F36}"/>
+              </a:ext>
+            </a:extLst>
+          </p:cNvPr>
+          <p:cNvSpPr>
+            <a:spLocks xmlns:a="http://schemas.openxmlformats.org/drawingml/2006/main" noGrp="1"/>
+          </p:cNvSpPr>
+          <p:nvPr/>
+        </p:nvSpPr>
+        <p:spPr>
+          <a:xfrm xmlns:a="http://schemas.openxmlformats.org/drawingml/2006/main">
+            <a:off x="4762500" y="2238375"/>
+            <a:ext cx="3771900" cy="9525"/>
+          </a:xfrm>
+          <a:prstGeom xmlns:a="http://schemas.openxmlformats.org/drawingml/2006/main" prst="rect">
+            <a:avLst/>
+          </a:prstGeom>
+          <a:solidFill xmlns:a="http://schemas.openxmlformats.org/drawingml/2006/main">
+            <a:srgbClr val="3A4458"/>
+          </a:solidFill>
+          <a:ln xmlns:a="http://schemas.openxmlformats.org/drawingml/2006/main" w="9525">
+            <a:solidFill>
+              <a:srgbClr val="3A4458"/>
+            </a:solidFill>
+          </a:ln>
+        </p:spPr>
+      </p:sp>
+      <p:sp>
+        <p:nvSpPr>
+          <p:cNvPr id="18" name="c3-text-324">
+            <a:hlinkClick xmlns:r="http://schemas.openxmlformats.org/officeDocument/2006/relationships" xmlns:a="http://schemas.openxmlformats.org/drawingml/2006/main" r:id="Rabb2dc05518d4beb"/>
+            <a:extLst xmlns:a="http://schemas.openxmlformats.org/drawingml/2006/main">
+              <a:ext uri="{FF2B5EF4-FFF2-40B4-BE49-F238E27FC236}">
+                <a16:creationId xmlns:a16="http://schemas.microsoft.com/office/drawing/2014/main" id="{62EC016D-A9F0-411A-8C98-12BB5B1B9F38}"/>
+              </a:ext>
+            </a:extLst>
+          </p:cNvPr>
+          <p:cNvSpPr>
+            <a:spLocks xmlns:a="http://schemas.openxmlformats.org/drawingml/2006/main" noGrp="1"/>
+          </p:cNvSpPr>
+          <p:nvPr/>
+        </p:nvSpPr>
+        <p:spPr>
+          <a:xfrm xmlns:a="http://schemas.openxmlformats.org/drawingml/2006/main">
+            <a:off x="4762500" y="2286000"/>
+            <a:ext cx="3771900" cy="285750"/>
+          </a:xfrm>
+          <a:prstGeom xmlns:a="http://schemas.openxmlformats.org/drawingml/2006/main" prst="rect">
+            <a:avLst/>
+          </a:prstGeom>
+          <a:noFill xmlns:a="http://schemas.openxmlformats.org/drawingml/2006/main"/>
+          <a:ln xmlns:a="http://schemas.openxmlformats.org/drawingml/2006/main" w="0">
+            <a:noFill/>
+          </a:ln>
+        </p:spPr>
+        <p:txBody>
+          <a:bodyPr xmlns:a="http://schemas.openxmlformats.org/drawingml/2006/main" wrap="square" lIns="9525" tIns="9525" rIns="9525" bIns="9525" anchor="ctr">
+            <a:noAutofit/>
+          </a:bodyPr>
+          <a:lstStyle xmlns:a="http://schemas.openxmlformats.org/drawingml/2006/main"/>
+          <a:p xmlns:a="http://schemas.openxmlformats.org/drawingml/2006/main">
+            <a:pPr>
+              <a:defRPr sz="1500" b="0">
+                <a:solidFill>
+                  <a:srgbClr val="D9A06B"/>
+                </a:solidFill>
+                <a:latin typeface="Calibri"/>
+                <a:ea typeface="Calibri"/>
+                <a:cs typeface="Calibri"/>
+              </a:defRPr>
+            </a:pPr>
+            <a:r>
+              <a:rPr sz="1500" b="0" u="sng">
+                <a:solidFill>
+                  <a:srgbClr val="D9A06B"/>
+                </a:solidFill>
+                <a:latin typeface="Calibri"/>
+                <a:ea typeface="Calibri"/>
+                <a:cs typeface="Calibri"/>
+              </a:rPr>
+              <a:t>[14] Claude Code extension</a:t>
+            </a:r>
+          </a:p>
+        </p:txBody>
+      </p:sp>
+      <p:sp>
+        <p:nvSpPr>
+          <p:cNvPr id="19" name="c3-text-325">
+            <a:hlinkClick xmlns:r="http://schemas.openxmlformats.org/officeDocument/2006/relationships" xmlns:a="http://schemas.openxmlformats.org/drawingml/2006/main" r:id="Rebf54c40318b43f6"/>
+            <a:extLst xmlns:a="http://schemas.openxmlformats.org/drawingml/2006/main">
+              <a:ext uri="{FF2B5EF4-FFF2-40B4-BE49-F238E27FC236}">
+                <a16:creationId xmlns:a16="http://schemas.microsoft.com/office/drawing/2014/main" id="{06C8601F-61DF-4147-9A08-90D9BBE9A058}"/>
+              </a:ext>
+            </a:extLst>
+          </p:cNvPr>
+          <p:cNvSpPr>
+            <a:spLocks xmlns:a="http://schemas.openxmlformats.org/drawingml/2006/main" noGrp="1"/>
+          </p:cNvSpPr>
+          <p:nvPr/>
+        </p:nvSpPr>
+        <p:spPr>
+          <a:xfrm xmlns:a="http://schemas.openxmlformats.org/drawingml/2006/main">
+            <a:off x="4762500" y="2590800"/>
+            <a:ext cx="3771900" cy="428625"/>
+          </a:xfrm>
+          <a:prstGeom xmlns:a="http://schemas.openxmlformats.org/drawingml/2006/main" prst="rect">
+            <a:avLst/>
+          </a:prstGeom>
+          <a:noFill xmlns:a="http://schemas.openxmlformats.org/drawingml/2006/main"/>
+          <a:ln xmlns:a="http://schemas.openxmlformats.org/drawingml/2006/main" w="0">
+            <a:noFill/>
+          </a:ln>
+        </p:spPr>
+        <p:txBody>
+          <a:bodyPr xmlns:a="http://schemas.openxmlformats.org/drawingml/2006/main" wrap="square" lIns="9525" tIns="9525" rIns="9525" bIns="9525" anchor="ctr">
+            <a:noAutofit/>
+          </a:bodyPr>
+          <a:lstStyle xmlns:a="http://schemas.openxmlformats.org/drawingml/2006/main"/>
+          <a:p xmlns:a="http://schemas.openxmlformats.org/drawingml/2006/main">
+            <a:pPr>
+              <a:defRPr sz="1350" b="0">
+                <a:solidFill>
+                  <a:srgbClr val="ECE6DE"/>
+                </a:solidFill>
+                <a:latin typeface="Calibri"/>
+                <a:ea typeface="Calibri"/>
+                <a:cs typeface="Calibri"/>
+              </a:defRPr>
+            </a:pPr>
+            <a:r>
+              <a:rPr sz="1350" b="0" u="sng">
+                <a:solidFill>
+                  <a:srgbClr val="ECE6DE"/>
+                </a:solidFill>
+                <a:latin typeface="Calibri"/>
+                <a:ea typeface="Calibri"/>
+                <a:cs typeface="Calibri"/>
+              </a:rPr>
+              <a:t>Official Anthropic extension on Visual Studio Marketplace</a:t>
+            </a:r>
+          </a:p>
+        </p:txBody>
+      </p:sp>
+      <p:sp>
+        <p:nvSpPr>
+          <p:cNvPr id="20" name="c3-shape-326">
+            <a:extLst xmlns:a="http://schemas.openxmlformats.org/drawingml/2006/main">
+              <a:ext uri="{FF2B5EF4-FFF2-40B4-BE49-F238E27FC236}">
+                <a16:creationId xmlns:a16="http://schemas.microsoft.com/office/drawing/2014/main" id="{78F79E2F-C19E-4A75-AACB-D604E97137B9}"/>
+              </a:ext>
+            </a:extLst>
+          </p:cNvPr>
+          <p:cNvSpPr>
+            <a:spLocks xmlns:a="http://schemas.openxmlformats.org/drawingml/2006/main" noGrp="1"/>
+          </p:cNvSpPr>
+          <p:nvPr/>
+        </p:nvSpPr>
+        <p:spPr>
+          <a:xfrm xmlns:a="http://schemas.openxmlformats.org/drawingml/2006/main">
+            <a:off x="4762500" y="3019425"/>
+            <a:ext cx="3771900" cy="9525"/>
+          </a:xfrm>
+          <a:prstGeom xmlns:a="http://schemas.openxmlformats.org/drawingml/2006/main" prst="rect">
+            <a:avLst/>
+          </a:prstGeom>
+          <a:solidFill xmlns:a="http://schemas.openxmlformats.org/drawingml/2006/main">
+            <a:srgbClr val="3A4458"/>
+          </a:solidFill>
+          <a:ln xmlns:a="http://schemas.openxmlformats.org/drawingml/2006/main" w="9525">
+            <a:solidFill>
+              <a:srgbClr val="3A4458"/>
+            </a:solidFill>
+          </a:ln>
+        </p:spPr>
+      </p:sp>
+      <p:sp>
+        <p:nvSpPr>
+          <p:cNvPr id="21" name="c3-text-356">
+            <a:extLst xmlns:a="http://schemas.openxmlformats.org/drawingml/2006/main">
+              <a:ext uri="{FF2B5EF4-FFF2-40B4-BE49-F238E27FC236}">
+                <a16:creationId xmlns:a16="http://schemas.microsoft.com/office/drawing/2014/main" id="{08962552-92D9-470C-9463-8F944DB8BC4E}"/>
               </a:ext>
             </a:extLst>
           </p:cNvPr>
@@ -18686,7 +19714,7 @@
     </p:spTree>
     <p:extLst>
       <p:ext uri="{BB962C8B-B14F-4D97-AF65-F5344CB8AC3E}">
-        <p14:creationId xmlns:p14="http://schemas.microsoft.com/office/powerpoint/2010/main" val="1776990760"/>
+        <p14:creationId xmlns:p14="http://schemas.microsoft.com/office/powerpoint/2010/main" val="2017353226"/>
       </p:ext>
     </p:extLst>
   </p:cSld>
@@ -18717,7 +19745,7 @@
           <p:cNvPr id="16" name="c3-text-35">
             <a:extLst xmlns:a="http://schemas.openxmlformats.org/drawingml/2006/main">
               <a:ext uri="{FF2B5EF4-FFF2-40B4-BE49-F238E27FC236}">
-                <a16:creationId xmlns:a16="http://schemas.microsoft.com/office/drawing/2014/main" id="{786AFEC3-7029-425E-85EC-C1A4D2F240D3}"/>
+                <a16:creationId xmlns:a16="http://schemas.microsoft.com/office/drawing/2014/main" id="{2ED26BE5-5633-4B47-B77F-7C6E22FE2CC6}"/>
               </a:ext>
             </a:extLst>
           </p:cNvPr>
@@ -18774,7 +19802,7 @@
           <p:cNvPr id="2" name="c3-text-36">
             <a:extLst xmlns:a="http://schemas.openxmlformats.org/drawingml/2006/main">
               <a:ext uri="{FF2B5EF4-FFF2-40B4-BE49-F238E27FC236}">
-                <a16:creationId xmlns:a16="http://schemas.microsoft.com/office/drawing/2014/main" id="{44FA2275-15EA-40CB-9D5B-CC66763890C2}"/>
+                <a16:creationId xmlns:a16="http://schemas.microsoft.com/office/drawing/2014/main" id="{4CDA0AAB-3292-4ED9-A06A-B7769F158249}"/>
               </a:ext>
             </a:extLst>
           </p:cNvPr>
@@ -18831,7 +19859,7 @@
           <p:cNvPr id="3" name="c3-text-37">
             <a:extLst xmlns:a="http://schemas.openxmlformats.org/drawingml/2006/main">
               <a:ext uri="{FF2B5EF4-FFF2-40B4-BE49-F238E27FC236}">
-                <a16:creationId xmlns:a16="http://schemas.microsoft.com/office/drawing/2014/main" id="{9BEF847A-E3F8-4C99-9045-E84DB2572B76}"/>
+                <a16:creationId xmlns:a16="http://schemas.microsoft.com/office/drawing/2014/main" id="{F1F16A03-0553-461B-8F20-5D4C81F91CDA}"/>
               </a:ext>
             </a:extLst>
           </p:cNvPr>
@@ -18888,7 +19916,7 @@
           <p:cNvPr id="4" name="c3-shape-38">
             <a:extLst xmlns:a="http://schemas.openxmlformats.org/drawingml/2006/main">
               <a:ext uri="{FF2B5EF4-FFF2-40B4-BE49-F238E27FC236}">
-                <a16:creationId xmlns:a16="http://schemas.microsoft.com/office/drawing/2014/main" id="{22668950-8AB2-4BAA-939F-CB0A55242E4E}"/>
+                <a16:creationId xmlns:a16="http://schemas.microsoft.com/office/drawing/2014/main" id="{C3379662-5D87-4C8E-9412-91F3BED5D301}"/>
               </a:ext>
             </a:extLst>
           </p:cNvPr>
@@ -18922,7 +19950,7 @@
           <p:cNvPr id="5" name="c3-text-39">
             <a:extLst xmlns:a="http://schemas.openxmlformats.org/drawingml/2006/main">
               <a:ext uri="{FF2B5EF4-FFF2-40B4-BE49-F238E27FC236}">
-                <a16:creationId xmlns:a16="http://schemas.microsoft.com/office/drawing/2014/main" id="{A496B603-B96D-4DA1-AABB-86FB3DCD20BD}"/>
+                <a16:creationId xmlns:a16="http://schemas.microsoft.com/office/drawing/2014/main" id="{C829CEA2-0A3B-4048-80CB-C09AF364B58C}"/>
               </a:ext>
             </a:extLst>
           </p:cNvPr>
@@ -18979,7 +20007,7 @@
           <p:cNvPr id="6" name="c3-shape-40">
             <a:extLst xmlns:a="http://schemas.openxmlformats.org/drawingml/2006/main">
               <a:ext uri="{FF2B5EF4-FFF2-40B4-BE49-F238E27FC236}">
-                <a16:creationId xmlns:a16="http://schemas.microsoft.com/office/drawing/2014/main" id="{DFFEA9E3-98BC-4CCE-A087-07AC5B92800C}"/>
+                <a16:creationId xmlns:a16="http://schemas.microsoft.com/office/drawing/2014/main" id="{8551BC99-EC1E-4934-A707-F5AFD088F0D0}"/>
               </a:ext>
             </a:extLst>
           </p:cNvPr>
@@ -19011,7 +20039,7 @@
           <p:cNvPr id="7" name="c3-shape-41">
             <a:extLst xmlns:a="http://schemas.openxmlformats.org/drawingml/2006/main">
               <a:ext uri="{FF2B5EF4-FFF2-40B4-BE49-F238E27FC236}">
-                <a16:creationId xmlns:a16="http://schemas.microsoft.com/office/drawing/2014/main" id="{6667AAFD-55EA-4B19-B47F-278208D6663B}"/>
+                <a16:creationId xmlns:a16="http://schemas.microsoft.com/office/drawing/2014/main" id="{0A3DAAE8-70B4-46AC-AD12-18679BF77BE5}"/>
               </a:ext>
             </a:extLst>
           </p:cNvPr>
@@ -19045,7 +20073,7 @@
           <p:cNvPr id="8" name="c3-text-42">
             <a:extLst xmlns:a="http://schemas.openxmlformats.org/drawingml/2006/main">
               <a:ext uri="{FF2B5EF4-FFF2-40B4-BE49-F238E27FC236}">
-                <a16:creationId xmlns:a16="http://schemas.microsoft.com/office/drawing/2014/main" id="{B56BF250-5AE9-4A2E-95B9-377A760AFEDC}"/>
+                <a16:creationId xmlns:a16="http://schemas.microsoft.com/office/drawing/2014/main" id="{8B4AD2B6-CF67-468F-BD7F-B09914DA04FC}"/>
               </a:ext>
             </a:extLst>
           </p:cNvPr>
@@ -19102,7 +20130,7 @@
           <p:cNvPr id="9" name="c3-shape-43">
             <a:extLst xmlns:a="http://schemas.openxmlformats.org/drawingml/2006/main">
               <a:ext uri="{FF2B5EF4-FFF2-40B4-BE49-F238E27FC236}">
-                <a16:creationId xmlns:a16="http://schemas.microsoft.com/office/drawing/2014/main" id="{B26E98BC-AD89-4580-843A-80074A039D03}"/>
+                <a16:creationId xmlns:a16="http://schemas.microsoft.com/office/drawing/2014/main" id="{D9716CC8-C0A3-444D-BD11-DC874A0F762D}"/>
               </a:ext>
             </a:extLst>
           </p:cNvPr>
@@ -19134,7 +20162,7 @@
           <p:cNvPr id="10" name="c3-shape-44">
             <a:extLst xmlns:a="http://schemas.openxmlformats.org/drawingml/2006/main">
               <a:ext uri="{FF2B5EF4-FFF2-40B4-BE49-F238E27FC236}">
-                <a16:creationId xmlns:a16="http://schemas.microsoft.com/office/drawing/2014/main" id="{63F0F29F-C711-48C2-82FC-7140A8F7D29B}"/>
+                <a16:creationId xmlns:a16="http://schemas.microsoft.com/office/drawing/2014/main" id="{796FE752-7D41-4E2C-889E-B5E8CFAF5953}"/>
               </a:ext>
             </a:extLst>
           </p:cNvPr>
@@ -19168,7 +20196,7 @@
           <p:cNvPr id="11" name="c3-text-45">
             <a:extLst xmlns:a="http://schemas.openxmlformats.org/drawingml/2006/main">
               <a:ext uri="{FF2B5EF4-FFF2-40B4-BE49-F238E27FC236}">
-                <a16:creationId xmlns:a16="http://schemas.microsoft.com/office/drawing/2014/main" id="{D2F8567B-3AB3-4185-ABD6-82929721DC25}"/>
+                <a16:creationId xmlns:a16="http://schemas.microsoft.com/office/drawing/2014/main" id="{FE3D923B-CD77-409D-8E9F-6573A834E077}"/>
               </a:ext>
             </a:extLst>
           </p:cNvPr>
@@ -19225,7 +20253,7 @@
           <p:cNvPr id="12" name="c3-shape-46">
             <a:extLst xmlns:a="http://schemas.openxmlformats.org/drawingml/2006/main">
               <a:ext uri="{FF2B5EF4-FFF2-40B4-BE49-F238E27FC236}">
-                <a16:creationId xmlns:a16="http://schemas.microsoft.com/office/drawing/2014/main" id="{807EB786-3AC4-423B-A56A-DBB8FFF45DBF}"/>
+                <a16:creationId xmlns:a16="http://schemas.microsoft.com/office/drawing/2014/main" id="{D4E17CC1-DDB4-41DC-8D63-12A38662BB30}"/>
               </a:ext>
             </a:extLst>
           </p:cNvPr>
@@ -19259,7 +20287,7 @@
           <p:cNvPr id="13" name="c3-text-47">
             <a:extLst xmlns:a="http://schemas.openxmlformats.org/drawingml/2006/main">
               <a:ext uri="{FF2B5EF4-FFF2-40B4-BE49-F238E27FC236}">
-                <a16:creationId xmlns:a16="http://schemas.microsoft.com/office/drawing/2014/main" id="{F4FB0FCC-9B74-4B1D-AD26-A018CF8A96BC}"/>
+                <a16:creationId xmlns:a16="http://schemas.microsoft.com/office/drawing/2014/main" id="{680B7F65-8062-41C7-AEA0-EBEE52D9C18F}"/>
               </a:ext>
             </a:extLst>
           </p:cNvPr>
@@ -19316,7 +20344,7 @@
           <p:cNvPr id="14" name="c3-text-48">
             <a:extLst xmlns:a="http://schemas.openxmlformats.org/drawingml/2006/main">
               <a:ext uri="{FF2B5EF4-FFF2-40B4-BE49-F238E27FC236}">
-                <a16:creationId xmlns:a16="http://schemas.microsoft.com/office/drawing/2014/main" id="{EE5447C5-AF92-43AF-92FA-CA5B23EC286A}"/>
+                <a16:creationId xmlns:a16="http://schemas.microsoft.com/office/drawing/2014/main" id="{55B5E851-7590-4035-A0C3-937F80D3D8DA}"/>
               </a:ext>
             </a:extLst>
           </p:cNvPr>
@@ -19370,10 +20398,10 @@
       </p:sp>
       <p:sp>
         <p:nvSpPr>
-          <p:cNvPr id="15" name="c3-text-312">
-            <a:extLst xmlns:a="http://schemas.openxmlformats.org/drawingml/2006/main">
-              <a:ext uri="{FF2B5EF4-FFF2-40B4-BE49-F238E27FC236}">
-                <a16:creationId xmlns:a16="http://schemas.microsoft.com/office/drawing/2014/main" id="{D202472F-A74D-446D-B26E-9BB299337571}"/>
+          <p:cNvPr id="15" name="c3-text-330">
+            <a:extLst xmlns:a="http://schemas.openxmlformats.org/drawingml/2006/main">
+              <a:ext uri="{FF2B5EF4-FFF2-40B4-BE49-F238E27FC236}">
+                <a16:creationId xmlns:a16="http://schemas.microsoft.com/office/drawing/2014/main" id="{591FBAF1-D752-441D-B296-6A38CC90B8A0}"/>
               </a:ext>
             </a:extLst>
           </p:cNvPr>
@@ -19428,7 +20456,7 @@
     </p:spTree>
     <p:extLst>
       <p:ext uri="{BB962C8B-B14F-4D97-AF65-F5344CB8AC3E}">
-        <p14:creationId xmlns:p14="http://schemas.microsoft.com/office/powerpoint/2010/main" val="1143740327"/>
+        <p14:creationId xmlns:p14="http://schemas.microsoft.com/office/powerpoint/2010/main" val="627744157"/>
       </p:ext>
     </p:extLst>
   </p:cSld>
@@ -19459,7 +20487,7 @@
           <p:cNvPr id="15" name="c3-text-49">
             <a:extLst xmlns:a="http://schemas.openxmlformats.org/drawingml/2006/main">
               <a:ext uri="{FF2B5EF4-FFF2-40B4-BE49-F238E27FC236}">
-                <a16:creationId xmlns:a16="http://schemas.microsoft.com/office/drawing/2014/main" id="{EEB3D7F1-3571-4612-B9A0-A1435AEBEBA0}"/>
+                <a16:creationId xmlns:a16="http://schemas.microsoft.com/office/drawing/2014/main" id="{5DC31CC5-3782-4B28-978D-4E3BB0DA98B5}"/>
               </a:ext>
             </a:extLst>
           </p:cNvPr>
@@ -19516,7 +20544,7 @@
           <p:cNvPr id="2" name="c3-text-50">
             <a:extLst xmlns:a="http://schemas.openxmlformats.org/drawingml/2006/main">
               <a:ext uri="{FF2B5EF4-FFF2-40B4-BE49-F238E27FC236}">
-                <a16:creationId xmlns:a16="http://schemas.microsoft.com/office/drawing/2014/main" id="{7CFBC8A8-5CC4-484A-8ED9-D75E7E982038}"/>
+                <a16:creationId xmlns:a16="http://schemas.microsoft.com/office/drawing/2014/main" id="{ADAADE20-121B-41B9-9EF0-2C1DF9B1E930}"/>
               </a:ext>
             </a:extLst>
           </p:cNvPr>
@@ -19573,7 +20601,7 @@
           <p:cNvPr id="3" name="c3-text-51">
             <a:extLst xmlns:a="http://schemas.openxmlformats.org/drawingml/2006/main">
               <a:ext uri="{FF2B5EF4-FFF2-40B4-BE49-F238E27FC236}">
-                <a16:creationId xmlns:a16="http://schemas.microsoft.com/office/drawing/2014/main" id="{C773E329-0784-47CB-A7EC-B9885E22B6B1}"/>
+                <a16:creationId xmlns:a16="http://schemas.microsoft.com/office/drawing/2014/main" id="{BC8E4629-A3E5-457C-B617-6A03B13EA553}"/>
               </a:ext>
             </a:extLst>
           </p:cNvPr>
@@ -19630,7 +20658,7 @@
           <p:cNvPr id="4" name="c3-shape-52">
             <a:extLst xmlns:a="http://schemas.openxmlformats.org/drawingml/2006/main">
               <a:ext uri="{FF2B5EF4-FFF2-40B4-BE49-F238E27FC236}">
-                <a16:creationId xmlns:a16="http://schemas.microsoft.com/office/drawing/2014/main" id="{AACF5364-DCCC-4CA0-B999-4E311251D8AD}"/>
+                <a16:creationId xmlns:a16="http://schemas.microsoft.com/office/drawing/2014/main" id="{155B6A2C-6E78-4AC3-BD49-78ACBEE9B5AB}"/>
               </a:ext>
             </a:extLst>
           </p:cNvPr>
@@ -19664,7 +20692,7 @@
           <p:cNvPr id="5" name="c3-text-53">
             <a:extLst xmlns:a="http://schemas.openxmlformats.org/drawingml/2006/main">
               <a:ext uri="{FF2B5EF4-FFF2-40B4-BE49-F238E27FC236}">
-                <a16:creationId xmlns:a16="http://schemas.microsoft.com/office/drawing/2014/main" id="{393DCF8D-39A6-458C-B70F-AAA2B0D4AB07}"/>
+                <a16:creationId xmlns:a16="http://schemas.microsoft.com/office/drawing/2014/main" id="{1A48B608-0EB0-464D-BFF2-47AB1BCD35B9}"/>
               </a:ext>
             </a:extLst>
           </p:cNvPr>
@@ -19777,7 +20805,7 @@
           <p:cNvPr id="6" name="c3-shape-54">
             <a:extLst xmlns:a="http://schemas.openxmlformats.org/drawingml/2006/main">
               <a:ext uri="{FF2B5EF4-FFF2-40B4-BE49-F238E27FC236}">
-                <a16:creationId xmlns:a16="http://schemas.microsoft.com/office/drawing/2014/main" id="{0FA9A0F2-11DB-4577-A0A2-3CDF2BCC247C}"/>
+                <a16:creationId xmlns:a16="http://schemas.microsoft.com/office/drawing/2014/main" id="{01707B03-D865-43F0-8742-03092DF5B46C}"/>
               </a:ext>
             </a:extLst>
           </p:cNvPr>
@@ -19811,7 +20839,7 @@
           <p:cNvPr id="7" name="c3-shape-55">
             <a:extLst xmlns:a="http://schemas.openxmlformats.org/drawingml/2006/main">
               <a:ext uri="{FF2B5EF4-FFF2-40B4-BE49-F238E27FC236}">
-                <a16:creationId xmlns:a16="http://schemas.microsoft.com/office/drawing/2014/main" id="{EB74EFA0-E9DD-479B-A046-41AF453E4BAA}"/>
+                <a16:creationId xmlns:a16="http://schemas.microsoft.com/office/drawing/2014/main" id="{8C4A4403-6090-49E9-8717-A2AF7F383F51}"/>
               </a:ext>
             </a:extLst>
           </p:cNvPr>
@@ -19843,7 +20871,7 @@
           <p:cNvPr id="8" name="c3-text-56">
             <a:extLst xmlns:a="http://schemas.openxmlformats.org/drawingml/2006/main">
               <a:ext uri="{FF2B5EF4-FFF2-40B4-BE49-F238E27FC236}">
-                <a16:creationId xmlns:a16="http://schemas.microsoft.com/office/drawing/2014/main" id="{D77513D6-F3B4-4C4C-8985-8231EC5C2E62}"/>
+                <a16:creationId xmlns:a16="http://schemas.microsoft.com/office/drawing/2014/main" id="{B6ECD51B-CCC8-4F1B-9BC1-BB5306797B9F}"/>
               </a:ext>
             </a:extLst>
           </p:cNvPr>
@@ -19900,7 +20928,7 @@
           <p:cNvPr id="9" name="c3-text-57">
             <a:extLst xmlns:a="http://schemas.openxmlformats.org/drawingml/2006/main">
               <a:ext uri="{FF2B5EF4-FFF2-40B4-BE49-F238E27FC236}">
-                <a16:creationId xmlns:a16="http://schemas.microsoft.com/office/drawing/2014/main" id="{E5F6E622-057C-452D-AE34-54AE21023CC2}"/>
+                <a16:creationId xmlns:a16="http://schemas.microsoft.com/office/drawing/2014/main" id="{67EFCE99-2DDF-4027-8187-F3CF7E10646B}"/>
               </a:ext>
             </a:extLst>
           </p:cNvPr>
@@ -19980,7 +21008,7 @@
           <p:cNvPr id="10" name="c3-shape-58">
             <a:extLst xmlns:a="http://schemas.openxmlformats.org/drawingml/2006/main">
               <a:ext uri="{FF2B5EF4-FFF2-40B4-BE49-F238E27FC236}">
-                <a16:creationId xmlns:a16="http://schemas.microsoft.com/office/drawing/2014/main" id="{C3115B16-4A73-4A99-843B-52F8172892EC}"/>
+                <a16:creationId xmlns:a16="http://schemas.microsoft.com/office/drawing/2014/main" id="{5E0C620E-A564-41A7-B321-1135E8F5E0EB}"/>
               </a:ext>
             </a:extLst>
           </p:cNvPr>
@@ -20014,7 +21042,7 @@
           <p:cNvPr id="11" name="c3-shape-59">
             <a:extLst xmlns:a="http://schemas.openxmlformats.org/drawingml/2006/main">
               <a:ext uri="{FF2B5EF4-FFF2-40B4-BE49-F238E27FC236}">
-                <a16:creationId xmlns:a16="http://schemas.microsoft.com/office/drawing/2014/main" id="{595E3FB5-8C7C-4EA3-8B95-B255344DD7C2}"/>
+                <a16:creationId xmlns:a16="http://schemas.microsoft.com/office/drawing/2014/main" id="{2E87C5DD-79E2-469B-9FBB-3CBBFF08FF91}"/>
               </a:ext>
             </a:extLst>
           </p:cNvPr>
@@ -20046,7 +21074,7 @@
           <p:cNvPr id="12" name="c3-text-60">
             <a:extLst xmlns:a="http://schemas.openxmlformats.org/drawingml/2006/main">
               <a:ext uri="{FF2B5EF4-FFF2-40B4-BE49-F238E27FC236}">
-                <a16:creationId xmlns:a16="http://schemas.microsoft.com/office/drawing/2014/main" id="{A0EE8694-FF5D-49E2-80B5-05CBAD57575C}"/>
+                <a16:creationId xmlns:a16="http://schemas.microsoft.com/office/drawing/2014/main" id="{EB9356A2-D82C-4E8D-A225-AEE7BFBE9A8F}"/>
               </a:ext>
             </a:extLst>
           </p:cNvPr>
@@ -20103,7 +21131,7 @@
           <p:cNvPr id="13" name="c3-text-61">
             <a:extLst xmlns:a="http://schemas.openxmlformats.org/drawingml/2006/main">
               <a:ext uri="{FF2B5EF4-FFF2-40B4-BE49-F238E27FC236}">
-                <a16:creationId xmlns:a16="http://schemas.microsoft.com/office/drawing/2014/main" id="{296E1BD2-4854-4751-A5AF-171F014FEFED}"/>
+                <a16:creationId xmlns:a16="http://schemas.microsoft.com/office/drawing/2014/main" id="{64262296-CA88-4EA1-AFED-5163373892C5}"/>
               </a:ext>
             </a:extLst>
           </p:cNvPr>
@@ -20180,10 +21208,10 @@
       </p:sp>
       <p:sp>
         <p:nvSpPr>
-          <p:cNvPr id="14" name="c3-text-313">
-            <a:extLst xmlns:a="http://schemas.openxmlformats.org/drawingml/2006/main">
-              <a:ext uri="{FF2B5EF4-FFF2-40B4-BE49-F238E27FC236}">
-                <a16:creationId xmlns:a16="http://schemas.microsoft.com/office/drawing/2014/main" id="{F9474FEB-72F4-4AE5-A6D6-588F8E969736}"/>
+          <p:cNvPr id="14" name="c3-text-331">
+            <a:extLst xmlns:a="http://schemas.openxmlformats.org/drawingml/2006/main">
+              <a:ext uri="{FF2B5EF4-FFF2-40B4-BE49-F238E27FC236}">
+                <a16:creationId xmlns:a16="http://schemas.microsoft.com/office/drawing/2014/main" id="{F91EDF01-874E-4B41-A2A2-A747EB2C03C9}"/>
               </a:ext>
             </a:extLst>
           </p:cNvPr>
@@ -20238,7 +21266,7 @@
     </p:spTree>
     <p:extLst>
       <p:ext uri="{BB962C8B-B14F-4D97-AF65-F5344CB8AC3E}">
-        <p14:creationId xmlns:p14="http://schemas.microsoft.com/office/powerpoint/2010/main" val="1871686541"/>
+        <p14:creationId xmlns:p14="http://schemas.microsoft.com/office/powerpoint/2010/main" val="409736093"/>
       </p:ext>
     </p:extLst>
   </p:cSld>
@@ -20269,7 +21297,7 @@
           <p:cNvPr id="8" name="c3-text-62">
             <a:extLst xmlns:a="http://schemas.openxmlformats.org/drawingml/2006/main">
               <a:ext uri="{FF2B5EF4-FFF2-40B4-BE49-F238E27FC236}">
-                <a16:creationId xmlns:a16="http://schemas.microsoft.com/office/drawing/2014/main" id="{842A8594-FA29-4E22-AE6E-6B261092A91D}"/>
+                <a16:creationId xmlns:a16="http://schemas.microsoft.com/office/drawing/2014/main" id="{78BCDA5D-FD65-42BA-B87D-DEB27E6EAB95}"/>
               </a:ext>
             </a:extLst>
           </p:cNvPr>
@@ -20326,7 +21354,7 @@
           <p:cNvPr id="2" name="c3-text-63">
             <a:extLst xmlns:a="http://schemas.openxmlformats.org/drawingml/2006/main">
               <a:ext uri="{FF2B5EF4-FFF2-40B4-BE49-F238E27FC236}">
-                <a16:creationId xmlns:a16="http://schemas.microsoft.com/office/drawing/2014/main" id="{FF1FBF04-06D9-4BDA-BDD6-5170800BB97F}"/>
+                <a16:creationId xmlns:a16="http://schemas.microsoft.com/office/drawing/2014/main" id="{4BFEA15F-5C48-420C-BE31-3FBD5FB50553}"/>
               </a:ext>
             </a:extLst>
           </p:cNvPr>
@@ -20383,7 +21411,7 @@
           <p:cNvPr id="3" name="c3-text-64">
             <a:extLst xmlns:a="http://schemas.openxmlformats.org/drawingml/2006/main">
               <a:ext uri="{FF2B5EF4-FFF2-40B4-BE49-F238E27FC236}">
-                <a16:creationId xmlns:a16="http://schemas.microsoft.com/office/drawing/2014/main" id="{43E5C11B-443B-49A0-9B04-85CA082B2A28}"/>
+                <a16:creationId xmlns:a16="http://schemas.microsoft.com/office/drawing/2014/main" id="{B992B547-E92C-4D6E-91F7-5A12BC36C3A3}"/>
               </a:ext>
             </a:extLst>
           </p:cNvPr>
@@ -20440,7 +21468,7 @@
           <p:cNvPr id="4" name="c3-shape-65">
             <a:extLst xmlns:a="http://schemas.openxmlformats.org/drawingml/2006/main">
               <a:ext uri="{FF2B5EF4-FFF2-40B4-BE49-F238E27FC236}">
-                <a16:creationId xmlns:a16="http://schemas.microsoft.com/office/drawing/2014/main" id="{4EEFA1AC-ED4D-4017-8AC9-D13DFA94892A}"/>
+                <a16:creationId xmlns:a16="http://schemas.microsoft.com/office/drawing/2014/main" id="{EBDF6D24-F114-4C1B-BE49-1F915A6A198E}"/>
               </a:ext>
             </a:extLst>
           </p:cNvPr>
@@ -20474,7 +21502,7 @@
           <p:cNvPr id="5" name="c3-text-66">
             <a:extLst xmlns:a="http://schemas.openxmlformats.org/drawingml/2006/main">
               <a:ext uri="{FF2B5EF4-FFF2-40B4-BE49-F238E27FC236}">
-                <a16:creationId xmlns:a16="http://schemas.microsoft.com/office/drawing/2014/main" id="{65DE386E-B59E-417F-95EB-00B942DA85FD}"/>
+                <a16:creationId xmlns:a16="http://schemas.microsoft.com/office/drawing/2014/main" id="{107D9927-49EC-46B2-8054-6CEFCB025A56}"/>
               </a:ext>
             </a:extLst>
           </p:cNvPr>
@@ -20733,7 +21761,7 @@
           <p:cNvPr id="6" name="c3-text-67">
             <a:extLst xmlns:a="http://schemas.openxmlformats.org/drawingml/2006/main">
               <a:ext uri="{FF2B5EF4-FFF2-40B4-BE49-F238E27FC236}">
-                <a16:creationId xmlns:a16="http://schemas.microsoft.com/office/drawing/2014/main" id="{7370197E-EA35-4F4A-8418-DD92BBE3100F}"/>
+                <a16:creationId xmlns:a16="http://schemas.microsoft.com/office/drawing/2014/main" id="{4E40A4E9-8B1B-4EC7-9CA1-4CE73662542E}"/>
               </a:ext>
             </a:extLst>
           </p:cNvPr>
@@ -20787,10 +21815,10 @@
       </p:sp>
       <p:sp>
         <p:nvSpPr>
-          <p:cNvPr id="7" name="c3-text-314">
-            <a:extLst xmlns:a="http://schemas.openxmlformats.org/drawingml/2006/main">
-              <a:ext uri="{FF2B5EF4-FFF2-40B4-BE49-F238E27FC236}">
-                <a16:creationId xmlns:a16="http://schemas.microsoft.com/office/drawing/2014/main" id="{55BDED2F-AEEA-4FF2-A86B-442EB267DE0B}"/>
+          <p:cNvPr id="7" name="c3-text-332">
+            <a:extLst xmlns:a="http://schemas.openxmlformats.org/drawingml/2006/main">
+              <a:ext uri="{FF2B5EF4-FFF2-40B4-BE49-F238E27FC236}">
+                <a16:creationId xmlns:a16="http://schemas.microsoft.com/office/drawing/2014/main" id="{2B0F2251-5874-4D04-BB3A-00838AF3FB95}"/>
               </a:ext>
             </a:extLst>
           </p:cNvPr>
@@ -20845,7 +21873,7 @@
     </p:spTree>
     <p:extLst>
       <p:ext uri="{BB962C8B-B14F-4D97-AF65-F5344CB8AC3E}">
-        <p14:creationId xmlns:p14="http://schemas.microsoft.com/office/powerpoint/2010/main" val="749904653"/>
+        <p14:creationId xmlns:p14="http://schemas.microsoft.com/office/powerpoint/2010/main" val="1529120459"/>
       </p:ext>
     </p:extLst>
   </p:cSld>
@@ -20876,7 +21904,7 @@
           <p:cNvPr id="9" name="c3-text-68">
             <a:extLst xmlns:a="http://schemas.openxmlformats.org/drawingml/2006/main">
               <a:ext uri="{FF2B5EF4-FFF2-40B4-BE49-F238E27FC236}">
-                <a16:creationId xmlns:a16="http://schemas.microsoft.com/office/drawing/2014/main" id="{4E471565-DAEB-47F7-BC19-48B415DD9233}"/>
+                <a16:creationId xmlns:a16="http://schemas.microsoft.com/office/drawing/2014/main" id="{F194606F-83AE-4DD0-B619-2582F5AD05AC}"/>
               </a:ext>
             </a:extLst>
           </p:cNvPr>
@@ -20933,7 +21961,7 @@
           <p:cNvPr id="2" name="c3-text-69">
             <a:extLst xmlns:a="http://schemas.openxmlformats.org/drawingml/2006/main">
               <a:ext uri="{FF2B5EF4-FFF2-40B4-BE49-F238E27FC236}">
-                <a16:creationId xmlns:a16="http://schemas.microsoft.com/office/drawing/2014/main" id="{05EFE84D-8EE7-44FB-9C0A-387BB91AC7D2}"/>
+                <a16:creationId xmlns:a16="http://schemas.microsoft.com/office/drawing/2014/main" id="{68B7B78B-D9C2-451E-A316-E3379BFDF78A}"/>
               </a:ext>
             </a:extLst>
           </p:cNvPr>
@@ -20990,7 +22018,7 @@
           <p:cNvPr id="3" name="c3-text-70">
             <a:extLst xmlns:a="http://schemas.openxmlformats.org/drawingml/2006/main">
               <a:ext uri="{FF2B5EF4-FFF2-40B4-BE49-F238E27FC236}">
-                <a16:creationId xmlns:a16="http://schemas.microsoft.com/office/drawing/2014/main" id="{029CE715-7D96-4F62-BA48-E0BA3F638CAF}"/>
+                <a16:creationId xmlns:a16="http://schemas.microsoft.com/office/drawing/2014/main" id="{55CFC44D-05F5-4FEC-8B32-F790210900A8}"/>
               </a:ext>
             </a:extLst>
           </p:cNvPr>
@@ -21047,7 +22075,7 @@
           <p:cNvPr id="4" name="c3-shape-71">
             <a:extLst xmlns:a="http://schemas.openxmlformats.org/drawingml/2006/main">
               <a:ext uri="{FF2B5EF4-FFF2-40B4-BE49-F238E27FC236}">
-                <a16:creationId xmlns:a16="http://schemas.microsoft.com/office/drawing/2014/main" id="{03F53DEA-9AE8-41F3-A875-0D56EF320744}"/>
+                <a16:creationId xmlns:a16="http://schemas.microsoft.com/office/drawing/2014/main" id="{86AF6BA5-FD51-46C6-8120-89D9CBA497CC}"/>
               </a:ext>
             </a:extLst>
           </p:cNvPr>
@@ -21081,7 +22109,7 @@
           <p:cNvPr id="5" name="c3-text-72">
             <a:extLst xmlns:a="http://schemas.openxmlformats.org/drawingml/2006/main">
               <a:ext uri="{FF2B5EF4-FFF2-40B4-BE49-F238E27FC236}">
-                <a16:creationId xmlns:a16="http://schemas.microsoft.com/office/drawing/2014/main" id="{9495FA86-7E24-4C65-A4C3-9EC97AFF4B4A}"/>
+                <a16:creationId xmlns:a16="http://schemas.microsoft.com/office/drawing/2014/main" id="{668CB32F-DD8C-40B2-8F7C-A01AE99443E3}"/>
               </a:ext>
             </a:extLst>
           </p:cNvPr>
@@ -21507,7 +22535,7 @@
           <p:cNvPr id="6" name="c3-shape-73">
             <a:extLst xmlns:a="http://schemas.openxmlformats.org/drawingml/2006/main">
               <a:ext uri="{FF2B5EF4-FFF2-40B4-BE49-F238E27FC236}">
-                <a16:creationId xmlns:a16="http://schemas.microsoft.com/office/drawing/2014/main" id="{3146F8E5-6580-4FCB-B439-C4983D931A0E}"/>
+                <a16:creationId xmlns:a16="http://schemas.microsoft.com/office/drawing/2014/main" id="{2D561CC9-84D9-4985-8906-2C10D9C474A5}"/>
               </a:ext>
             </a:extLst>
           </p:cNvPr>
@@ -21541,7 +22569,7 @@
           <p:cNvPr id="7" name="c3-text-74">
             <a:extLst xmlns:a="http://schemas.openxmlformats.org/drawingml/2006/main">
               <a:ext uri="{FF2B5EF4-FFF2-40B4-BE49-F238E27FC236}">
-                <a16:creationId xmlns:a16="http://schemas.microsoft.com/office/drawing/2014/main" id="{1E1E4719-7A12-43AC-8912-10E6073B79C8}"/>
+                <a16:creationId xmlns:a16="http://schemas.microsoft.com/office/drawing/2014/main" id="{4482FAF0-9385-42E9-A9EC-795DCB546F1F}"/>
               </a:ext>
             </a:extLst>
           </p:cNvPr>
@@ -21595,10 +22623,10 @@
       </p:sp>
       <p:sp>
         <p:nvSpPr>
-          <p:cNvPr id="8" name="c3-text-315">
-            <a:extLst xmlns:a="http://schemas.openxmlformats.org/drawingml/2006/main">
-              <a:ext uri="{FF2B5EF4-FFF2-40B4-BE49-F238E27FC236}">
-                <a16:creationId xmlns:a16="http://schemas.microsoft.com/office/drawing/2014/main" id="{9F140942-B46F-497F-9A42-0EA07399B529}"/>
+          <p:cNvPr id="8" name="c3-text-333">
+            <a:extLst xmlns:a="http://schemas.openxmlformats.org/drawingml/2006/main">
+              <a:ext uri="{FF2B5EF4-FFF2-40B4-BE49-F238E27FC236}">
+                <a16:creationId xmlns:a16="http://schemas.microsoft.com/office/drawing/2014/main" id="{E811F74D-F621-4291-926F-4B9820FA9BC8}"/>
               </a:ext>
             </a:extLst>
           </p:cNvPr>
@@ -21653,7 +22681,7 @@
     </p:spTree>
     <p:extLst>
       <p:ext uri="{BB962C8B-B14F-4D97-AF65-F5344CB8AC3E}">
-        <p14:creationId xmlns:p14="http://schemas.microsoft.com/office/powerpoint/2010/main" val="735680209"/>
+        <p14:creationId xmlns:p14="http://schemas.microsoft.com/office/powerpoint/2010/main" val="2040094324"/>
       </p:ext>
     </p:extLst>
   </p:cSld>
@@ -21684,7 +22712,7 @@
           <p:cNvPr id="9" name="c3-text-75">
             <a:extLst xmlns:a="http://schemas.openxmlformats.org/drawingml/2006/main">
               <a:ext uri="{FF2B5EF4-FFF2-40B4-BE49-F238E27FC236}">
-                <a16:creationId xmlns:a16="http://schemas.microsoft.com/office/drawing/2014/main" id="{18E2E0A1-0773-4FBC-B774-7C50EA439FAD}"/>
+                <a16:creationId xmlns:a16="http://schemas.microsoft.com/office/drawing/2014/main" id="{B0FA8840-8029-4444-9812-44BAE8D88F13}"/>
               </a:ext>
             </a:extLst>
           </p:cNvPr>
@@ -21741,7 +22769,7 @@
           <p:cNvPr id="2" name="c3-text-76">
             <a:extLst xmlns:a="http://schemas.openxmlformats.org/drawingml/2006/main">
               <a:ext uri="{FF2B5EF4-FFF2-40B4-BE49-F238E27FC236}">
-                <a16:creationId xmlns:a16="http://schemas.microsoft.com/office/drawing/2014/main" id="{BADEDDCC-3B86-4703-8928-7EE0165576F3}"/>
+                <a16:creationId xmlns:a16="http://schemas.microsoft.com/office/drawing/2014/main" id="{DC9D81C0-E4ED-44EC-86CC-5E744F200769}"/>
               </a:ext>
             </a:extLst>
           </p:cNvPr>
@@ -21798,7 +22826,7 @@
           <p:cNvPr id="3" name="c3-text-77">
             <a:extLst xmlns:a="http://schemas.openxmlformats.org/drawingml/2006/main">
               <a:ext uri="{FF2B5EF4-FFF2-40B4-BE49-F238E27FC236}">
-                <a16:creationId xmlns:a16="http://schemas.microsoft.com/office/drawing/2014/main" id="{826C942F-C764-44EA-B306-069972DB16E1}"/>
+                <a16:creationId xmlns:a16="http://schemas.microsoft.com/office/drawing/2014/main" id="{4170E539-60B6-44A7-9C8F-DD167AF0BABA}"/>
               </a:ext>
             </a:extLst>
           </p:cNvPr>
@@ -21855,7 +22883,7 @@
           <p:cNvPr id="4" name="c3-shape-78">
             <a:extLst xmlns:a="http://schemas.openxmlformats.org/drawingml/2006/main">
               <a:ext uri="{FF2B5EF4-FFF2-40B4-BE49-F238E27FC236}">
-                <a16:creationId xmlns:a16="http://schemas.microsoft.com/office/drawing/2014/main" id="{B074C8BA-0ACB-4B4D-BD66-778C76955ADC}"/>
+                <a16:creationId xmlns:a16="http://schemas.microsoft.com/office/drawing/2014/main" id="{BDE4E10D-8B73-41D4-B83E-5FC9DE36E4EC}"/>
               </a:ext>
             </a:extLst>
           </p:cNvPr>
@@ -21889,7 +22917,7 @@
           <p:cNvPr id="5" name="c3-text-79">
             <a:extLst xmlns:a="http://schemas.openxmlformats.org/drawingml/2006/main">
               <a:ext uri="{FF2B5EF4-FFF2-40B4-BE49-F238E27FC236}">
-                <a16:creationId xmlns:a16="http://schemas.microsoft.com/office/drawing/2014/main" id="{8A8F194F-4DD2-4B0B-99E7-441381412D20}"/>
+                <a16:creationId xmlns:a16="http://schemas.microsoft.com/office/drawing/2014/main" id="{D31A2E6B-5673-4ED8-972C-4A57A8602462}"/>
               </a:ext>
             </a:extLst>
           </p:cNvPr>
@@ -22296,7 +23324,7 @@
           <p:cNvPr id="6" name="c3-shape-80">
             <a:extLst xmlns:a="http://schemas.openxmlformats.org/drawingml/2006/main">
               <a:ext uri="{FF2B5EF4-FFF2-40B4-BE49-F238E27FC236}">
-                <a16:creationId xmlns:a16="http://schemas.microsoft.com/office/drawing/2014/main" id="{00FEFD6C-0748-4330-AECB-EFB352279E35}"/>
+                <a16:creationId xmlns:a16="http://schemas.microsoft.com/office/drawing/2014/main" id="{FCE4DF0A-D6C9-4E06-BF1E-0611DBD1DF9D}"/>
               </a:ext>
             </a:extLst>
           </p:cNvPr>
@@ -22330,7 +23358,7 @@
           <p:cNvPr id="7" name="c3-text-81">
             <a:extLst xmlns:a="http://schemas.openxmlformats.org/drawingml/2006/main">
               <a:ext uri="{FF2B5EF4-FFF2-40B4-BE49-F238E27FC236}">
-                <a16:creationId xmlns:a16="http://schemas.microsoft.com/office/drawing/2014/main" id="{FE2A6E1A-870A-4F0F-9330-791C328DA32D}"/>
+                <a16:creationId xmlns:a16="http://schemas.microsoft.com/office/drawing/2014/main" id="{A0ABCA95-855E-496E-B512-744EEA8CE039}"/>
               </a:ext>
             </a:extLst>
           </p:cNvPr>
@@ -22384,10 +23412,10 @@
       </p:sp>
       <p:sp>
         <p:nvSpPr>
-          <p:cNvPr id="8" name="c3-text-316">
-            <a:extLst xmlns:a="http://schemas.openxmlformats.org/drawingml/2006/main">
-              <a:ext uri="{FF2B5EF4-FFF2-40B4-BE49-F238E27FC236}">
-                <a16:creationId xmlns:a16="http://schemas.microsoft.com/office/drawing/2014/main" id="{13A222C3-C947-4251-858C-E3A9925AE1D5}"/>
+          <p:cNvPr id="8" name="c3-text-334">
+            <a:extLst xmlns:a="http://schemas.openxmlformats.org/drawingml/2006/main">
+              <a:ext uri="{FF2B5EF4-FFF2-40B4-BE49-F238E27FC236}">
+                <a16:creationId xmlns:a16="http://schemas.microsoft.com/office/drawing/2014/main" id="{EB34F286-EFEA-4A80-8764-B293AFB90D23}"/>
               </a:ext>
             </a:extLst>
           </p:cNvPr>
@@ -22442,7 +23470,7 @@
     </p:spTree>
     <p:extLst>
       <p:ext uri="{BB962C8B-B14F-4D97-AF65-F5344CB8AC3E}">
-        <p14:creationId xmlns:p14="http://schemas.microsoft.com/office/powerpoint/2010/main" val="1579526577"/>
+        <p14:creationId xmlns:p14="http://schemas.microsoft.com/office/powerpoint/2010/main" val="2048598192"/>
       </p:ext>
     </p:extLst>
   </p:cSld>
@@ -22473,7 +23501,7 @@
           <p:cNvPr id="16" name="c3-text-82">
             <a:extLst xmlns:a="http://schemas.openxmlformats.org/drawingml/2006/main">
               <a:ext uri="{FF2B5EF4-FFF2-40B4-BE49-F238E27FC236}">
-                <a16:creationId xmlns:a16="http://schemas.microsoft.com/office/drawing/2014/main" id="{945F1F66-8B07-4AAC-B2CE-82A1ECC48365}"/>
+                <a16:creationId xmlns:a16="http://schemas.microsoft.com/office/drawing/2014/main" id="{C6C98AE6-7885-45F2-928E-9EDA530B29BC}"/>
               </a:ext>
             </a:extLst>
           </p:cNvPr>
@@ -22530,7 +23558,7 @@
           <p:cNvPr id="2" name="c3-text-83">
             <a:extLst xmlns:a="http://schemas.openxmlformats.org/drawingml/2006/main">
               <a:ext uri="{FF2B5EF4-FFF2-40B4-BE49-F238E27FC236}">
-                <a16:creationId xmlns:a16="http://schemas.microsoft.com/office/drawing/2014/main" id="{CFFB37A4-C0D2-45FC-9A85-FE5E32F07B18}"/>
+                <a16:creationId xmlns:a16="http://schemas.microsoft.com/office/drawing/2014/main" id="{5B180A52-F3C3-47A0-9CE9-6257362685D2}"/>
               </a:ext>
             </a:extLst>
           </p:cNvPr>
@@ -22587,7 +23615,7 @@
           <p:cNvPr id="3" name="c3-text-84">
             <a:extLst xmlns:a="http://schemas.openxmlformats.org/drawingml/2006/main">
               <a:ext uri="{FF2B5EF4-FFF2-40B4-BE49-F238E27FC236}">
-                <a16:creationId xmlns:a16="http://schemas.microsoft.com/office/drawing/2014/main" id="{D2D8C479-F6D7-4B39-90D2-B075FBAB1FBE}"/>
+                <a16:creationId xmlns:a16="http://schemas.microsoft.com/office/drawing/2014/main" id="{529BEED1-BAFE-491D-9FAC-9233B9C84BFA}"/>
               </a:ext>
             </a:extLst>
           </p:cNvPr>
@@ -22644,7 +23672,7 @@
           <p:cNvPr id="4" name="c3-shape-85">
             <a:extLst xmlns:a="http://schemas.openxmlformats.org/drawingml/2006/main">
               <a:ext uri="{FF2B5EF4-FFF2-40B4-BE49-F238E27FC236}">
-                <a16:creationId xmlns:a16="http://schemas.microsoft.com/office/drawing/2014/main" id="{16C0B6B4-6E5B-4BB0-8226-3F478DF14442}"/>
+                <a16:creationId xmlns:a16="http://schemas.microsoft.com/office/drawing/2014/main" id="{69554F1E-D76E-4662-9E31-42ED0A56AE2D}"/>
               </a:ext>
             </a:extLst>
           </p:cNvPr>
@@ -22678,7 +23706,7 @@
           <p:cNvPr id="5" name="c3-text-86">
             <a:extLst xmlns:a="http://schemas.openxmlformats.org/drawingml/2006/main">
               <a:ext uri="{FF2B5EF4-FFF2-40B4-BE49-F238E27FC236}">
-                <a16:creationId xmlns:a16="http://schemas.microsoft.com/office/drawing/2014/main" id="{1DC0F5F0-01F2-4277-AE19-A7144277AF6E}"/>
+                <a16:creationId xmlns:a16="http://schemas.microsoft.com/office/drawing/2014/main" id="{361463BF-20FD-43E0-BA75-ABF77F64755B}"/>
               </a:ext>
             </a:extLst>
           </p:cNvPr>
@@ -22758,7 +23786,7 @@
           <p:cNvPr id="6" name="c3-shape-87">
             <a:extLst xmlns:a="http://schemas.openxmlformats.org/drawingml/2006/main">
               <a:ext uri="{FF2B5EF4-FFF2-40B4-BE49-F238E27FC236}">
-                <a16:creationId xmlns:a16="http://schemas.microsoft.com/office/drawing/2014/main" id="{8625489F-0F20-420B-8883-5FFC45BF8F0F}"/>
+                <a16:creationId xmlns:a16="http://schemas.microsoft.com/office/drawing/2014/main" id="{78F666F9-351C-4A58-9F41-4FC9EF287806}"/>
               </a:ext>
             </a:extLst>
           </p:cNvPr>
@@ -22790,7 +23818,7 @@
           <p:cNvPr id="7" name="c3-shape-88">
             <a:extLst xmlns:a="http://schemas.openxmlformats.org/drawingml/2006/main">
               <a:ext uri="{FF2B5EF4-FFF2-40B4-BE49-F238E27FC236}">
-                <a16:creationId xmlns:a16="http://schemas.microsoft.com/office/drawing/2014/main" id="{7A759C5F-E8E8-4E73-9658-6222F5A55A3C}"/>
+                <a16:creationId xmlns:a16="http://schemas.microsoft.com/office/drawing/2014/main" id="{7BF1B57E-19DD-4CAE-8EDA-F45E0FC91676}"/>
               </a:ext>
             </a:extLst>
           </p:cNvPr>
@@ -22824,7 +23852,7 @@
           <p:cNvPr id="8" name="c3-text-89">
             <a:extLst xmlns:a="http://schemas.openxmlformats.org/drawingml/2006/main">
               <a:ext uri="{FF2B5EF4-FFF2-40B4-BE49-F238E27FC236}">
-                <a16:creationId xmlns:a16="http://schemas.microsoft.com/office/drawing/2014/main" id="{179662A2-5310-43A4-A9A8-44127BF32057}"/>
+                <a16:creationId xmlns:a16="http://schemas.microsoft.com/office/drawing/2014/main" id="{F52DC1C3-C095-436D-B3D6-AEE18ED618BC}"/>
               </a:ext>
             </a:extLst>
           </p:cNvPr>
@@ -22904,7 +23932,7 @@
           <p:cNvPr id="9" name="c3-shape-90">
             <a:extLst xmlns:a="http://schemas.openxmlformats.org/drawingml/2006/main">
               <a:ext uri="{FF2B5EF4-FFF2-40B4-BE49-F238E27FC236}">
-                <a16:creationId xmlns:a16="http://schemas.microsoft.com/office/drawing/2014/main" id="{7E661FE7-8E9A-4EA1-BA87-2CA83FB6354E}"/>
+                <a16:creationId xmlns:a16="http://schemas.microsoft.com/office/drawing/2014/main" id="{B2AE20C7-D531-4383-8552-5302288FCFAB}"/>
               </a:ext>
             </a:extLst>
           </p:cNvPr>
@@ -22936,7 +23964,7 @@
           <p:cNvPr id="10" name="c3-shape-91">
             <a:extLst xmlns:a="http://schemas.openxmlformats.org/drawingml/2006/main">
               <a:ext uri="{FF2B5EF4-FFF2-40B4-BE49-F238E27FC236}">
-                <a16:creationId xmlns:a16="http://schemas.microsoft.com/office/drawing/2014/main" id="{A0564A30-6D0D-48E2-A007-1073062962DA}"/>
+                <a16:creationId xmlns:a16="http://schemas.microsoft.com/office/drawing/2014/main" id="{7BE02479-C564-4313-92CB-6BE192F26FEE}"/>
               </a:ext>
             </a:extLst>
           </p:cNvPr>
@@ -22970,7 +23998,7 @@
           <p:cNvPr id="11" name="c3-text-92">
             <a:extLst xmlns:a="http://schemas.openxmlformats.org/drawingml/2006/main">
               <a:ext uri="{FF2B5EF4-FFF2-40B4-BE49-F238E27FC236}">
-                <a16:creationId xmlns:a16="http://schemas.microsoft.com/office/drawing/2014/main" id="{FE4FBB14-9F2D-4105-86D0-EAE8E7417CE2}"/>
+                <a16:creationId xmlns:a16="http://schemas.microsoft.com/office/drawing/2014/main" id="{E61CB608-EE82-467D-A0AF-C3AF32D7A396}"/>
               </a:ext>
             </a:extLst>
           </p:cNvPr>
@@ -23050,7 +24078,7 @@
           <p:cNvPr id="12" name="c3-shape-93">
             <a:extLst xmlns:a="http://schemas.openxmlformats.org/drawingml/2006/main">
               <a:ext uri="{FF2B5EF4-FFF2-40B4-BE49-F238E27FC236}">
-                <a16:creationId xmlns:a16="http://schemas.microsoft.com/office/drawing/2014/main" id="{72EAA691-170A-4E07-86F6-DB946469321D}"/>
+                <a16:creationId xmlns:a16="http://schemas.microsoft.com/office/drawing/2014/main" id="{3EA6C5EB-5E95-460F-AC98-C12E21890E6A}"/>
               </a:ext>
             </a:extLst>
           </p:cNvPr>
@@ -23084,7 +24112,7 @@
           <p:cNvPr id="13" name="c3-text-94">
             <a:extLst xmlns:a="http://schemas.openxmlformats.org/drawingml/2006/main">
               <a:ext uri="{FF2B5EF4-FFF2-40B4-BE49-F238E27FC236}">
-                <a16:creationId xmlns:a16="http://schemas.microsoft.com/office/drawing/2014/main" id="{52C96451-7F43-47D0-834B-BE93E1E78D66}"/>
+                <a16:creationId xmlns:a16="http://schemas.microsoft.com/office/drawing/2014/main" id="{24AB9B42-8994-466F-9398-6AB2F3956534}"/>
               </a:ext>
             </a:extLst>
           </p:cNvPr>
@@ -23241,7 +24269,7 @@
           <p:cNvPr id="14" name="c3-text-95">
             <a:extLst xmlns:a="http://schemas.openxmlformats.org/drawingml/2006/main">
               <a:ext uri="{FF2B5EF4-FFF2-40B4-BE49-F238E27FC236}">
-                <a16:creationId xmlns:a16="http://schemas.microsoft.com/office/drawing/2014/main" id="{5F71308A-CF7A-48AF-B284-65DBC7F104DF}"/>
+                <a16:creationId xmlns:a16="http://schemas.microsoft.com/office/drawing/2014/main" id="{16461792-D92A-4604-A370-1BD91C3DB484}"/>
               </a:ext>
             </a:extLst>
           </p:cNvPr>
@@ -23295,10 +24323,10 @@
       </p:sp>
       <p:sp>
         <p:nvSpPr>
-          <p:cNvPr id="15" name="c3-text-317">
-            <a:extLst xmlns:a="http://schemas.openxmlformats.org/drawingml/2006/main">
-              <a:ext uri="{FF2B5EF4-FFF2-40B4-BE49-F238E27FC236}">
-                <a16:creationId xmlns:a16="http://schemas.microsoft.com/office/drawing/2014/main" id="{5C526A2E-D91E-44DC-859F-61174250ED88}"/>
+          <p:cNvPr id="15" name="c3-text-335">
+            <a:extLst xmlns:a="http://schemas.openxmlformats.org/drawingml/2006/main">
+              <a:ext uri="{FF2B5EF4-FFF2-40B4-BE49-F238E27FC236}">
+                <a16:creationId xmlns:a16="http://schemas.microsoft.com/office/drawing/2014/main" id="{0D76EF62-1CA4-4681-86BC-3381083AFCFB}"/>
               </a:ext>
             </a:extLst>
           </p:cNvPr>
@@ -23353,7 +24381,7 @@
     </p:spTree>
     <p:extLst>
       <p:ext uri="{BB962C8B-B14F-4D97-AF65-F5344CB8AC3E}">
-        <p14:creationId xmlns:p14="http://schemas.microsoft.com/office/powerpoint/2010/main" val="2069434908"/>
+        <p14:creationId xmlns:p14="http://schemas.microsoft.com/office/powerpoint/2010/main" val="12475910"/>
       </p:ext>
     </p:extLst>
   </p:cSld>

--- a/virtual_human_course/Module_2/Chapter_03/Slides/Module_2_Chapter_03_Integration_with_the_Virtual_Human.pptx
+++ b/virtual_human_course/Module_2/Chapter_03/Slides/Module_2_Chapter_03_Integration_with_the_Virtual_Human.pptx
@@ -2,39 +2,39 @@
 <file path=ppt/presentation.xml><?xml version="1.0" encoding="utf-8"?>
 <ns0:presentation xmlns:ns0="http://schemas.openxmlformats.org/presentationml/2006/main" xmlns:ns1="http://schemas.openxmlformats.org/officeDocument/2006/relationships">
   <ns0:sldMasterIdLst>
-    <ns0:sldMasterId id="2147483648" ns1:id="R974c7ad43a9245c3"/>
+    <ns0:sldMasterId id="2147483648" ns1:id="R978161a033184336"/>
   </ns0:sldMasterIdLst>
   <ns0:sldIdLst>
-    <ns0:sldId id="256" ns1:id="Re46aeef0fd164fd4"/>
-    <ns0:sldId id="257" ns1:id="Re822417972254cad"/>
-    <ns0:sldId id="258" ns1:id="R6b144ee434a44046"/>
-    <ns0:sldId id="259" ns1:id="Rc128e8f9c6594e44"/>
-    <ns0:sldId id="260" ns1:id="R5bbf371ab2684599"/>
-    <ns0:sldId id="261" ns1:id="R94c5038f8e19496d"/>
-    <ns0:sldId id="262" ns1:id="R2ba8ba2b4def4e08"/>
-    <ns0:sldId id="263" ns1:id="R1e0be1f3583d4ce4"/>
-    <ns0:sldId id="264" ns1:id="Rab4171faa24b4068"/>
-    <ns0:sldId id="265" ns1:id="R134a36a7b62043cc"/>
-    <ns0:sldId id="266" ns1:id="R8665781912f74f98"/>
-    <ns0:sldId id="267" ns1:id="Rba0f3cd530d8430d"/>
-    <ns0:sldId id="268" ns1:id="R6372bf8394f0475a"/>
-    <ns0:sldId id="269" ns1:id="R52da2ccecad4469b"/>
-    <ns0:sldId id="270" ns1:id="Ra326bf9f228a4774"/>
-    <ns0:sldId id="271" ns1:id="Rd7b3e49cde054726"/>
-    <ns0:sldId id="272" ns1:id="R1be3ea7f0e854591"/>
-    <ns0:sldId id="273" ns1:id="Rf4b6a4153cdf481c"/>
-    <ns0:sldId id="274" ns1:id="R17aa4f6c8b0f4603"/>
-    <ns0:sldId id="275" ns1:id="R2b6dc6ddd0f54df7"/>
-    <ns0:sldId id="276" ns1:id="Rc73773b01c824860"/>
-    <ns0:sldId id="277" ns1:id="R641b2db037614cd7"/>
-    <ns0:sldId id="278" ns1:id="R56eb5e4f79dd4526"/>
-    <ns0:sldId id="279" ns1:id="R2d82acf915594468"/>
-    <ns0:sldId id="280" ns1:id="Rf86069d02d964653"/>
-    <ns0:sldId id="281" ns1:id="Rf10220983eaf4339"/>
-    <ns0:sldId id="282" ns1:id="Ra27b56a5916f4657"/>
-    <ns0:sldId id="283" ns1:id="Rca538d106c2944a1"/>
-    <ns0:sldId id="284" ns1:id="R2f76bd1302384467"/>
-    <ns0:sldId id="285" ns1:id="Rda6abe3bb2674359"/>
+    <ns0:sldId id="256" ns1:id="R047225957e984d54"/>
+    <ns0:sldId id="257" ns1:id="R5ff861d089cf4c31"/>
+    <ns0:sldId id="258" ns1:id="R9773ae3c5a7e4c56"/>
+    <ns0:sldId id="259" ns1:id="R02eefebeb20c4d77"/>
+    <ns0:sldId id="260" ns1:id="Ra3d6f506e602412f"/>
+    <ns0:sldId id="261" ns1:id="R67e3ee4336244fe1"/>
+    <ns0:sldId id="262" ns1:id="R79a5b3f705614136"/>
+    <ns0:sldId id="263" ns1:id="R21b8baf6104645b4"/>
+    <ns0:sldId id="264" ns1:id="R87a59ee26dce43f7"/>
+    <ns0:sldId id="265" ns1:id="R9f82e7bef3e04c03"/>
+    <ns0:sldId id="266" ns1:id="Rd03449face1e4b78"/>
+    <ns0:sldId id="267" ns1:id="R7449cfd00a5f4f34"/>
+    <ns0:sldId id="268" ns1:id="R7820f328fce249e3"/>
+    <ns0:sldId id="269" ns1:id="R3d51b8ee3aef4e0b"/>
+    <ns0:sldId id="270" ns1:id="R29a4ac3c7dfb4ee3"/>
+    <ns0:sldId id="271" ns1:id="Ra0fd9ad986dc445e"/>
+    <ns0:sldId id="272" ns1:id="R10dbaf50730a46d0"/>
+    <ns0:sldId id="273" ns1:id="R1bf524a1888b4a70"/>
+    <ns0:sldId id="274" ns1:id="R8bc0bb0ab30e4e3c"/>
+    <ns0:sldId id="275" ns1:id="R3f367b41612a433a"/>
+    <ns0:sldId id="276" ns1:id="Rbaad4f2950c64e7f"/>
+    <ns0:sldId id="277" ns1:id="R4653197cfa6242b7"/>
+    <ns0:sldId id="278" ns1:id="R207babe490704dcb"/>
+    <ns0:sldId id="279" ns1:id="R80620f2ae1234287"/>
+    <ns0:sldId id="280" ns1:id="Rfc2555b510744ebb"/>
+    <ns0:sldId id="281" ns1:id="R98ec24464a7146dc"/>
+    <ns0:sldId id="282" ns1:id="Rb0a33d0e3b5e4476"/>
+    <ns0:sldId id="283" ns1:id="Rb73ccecc53634f2a"/>
+    <ns0:sldId id="284" ns1:id="R9870c26bbb6b4380"/>
+    <ns0:sldId id="285" ns1:id="Rd826920f71a74516"/>
   </ns0:sldIdLst>
   <ns0:sldSz cx="9144000" cy="5143500"/>
   <ns0:notesSz cx="6858000" cy="9144000"/>
@@ -91,7 +91,7 @@
           <p:nvPr/>
         </p:nvPicPr>
         <p:blipFill>
-          <a:blip xmlns:r="http://schemas.openxmlformats.org/officeDocument/2006/relationships" xmlns:a="http://schemas.openxmlformats.org/drawingml/2006/main" r:embed="R63dd5fb2b9524af6"/>
+          <a:blip xmlns:r="http://schemas.openxmlformats.org/officeDocument/2006/relationships" xmlns:a="http://schemas.openxmlformats.org/drawingml/2006/main" r:embed="R28e26406a76d451d"/>
           <a:srcRect xmlns:a="http://schemas.openxmlformats.org/drawingml/2006/main" l="0" t="0" r="0" b="0"/>
           <a:stretch xmlns:a="http://schemas.openxmlformats.org/drawingml/2006/main"/>
         </p:blipFill>
@@ -236,7 +236,7 @@
           <p:nvPr/>
         </p:nvPicPr>
         <p:blipFill>
-          <a:blip xmlns:r="http://schemas.openxmlformats.org/officeDocument/2006/relationships" xmlns:a="http://schemas.openxmlformats.org/drawingml/2006/main" r:embed="R440d6c46398d4cc7"/>
+          <a:blip xmlns:r="http://schemas.openxmlformats.org/officeDocument/2006/relationships" xmlns:a="http://schemas.openxmlformats.org/drawingml/2006/main" r:embed="Re11bed767851458d"/>
           <a:srcRect xmlns:a="http://schemas.openxmlformats.org/drawingml/2006/main" l="0" t="0" r="0" b="0"/>
           <a:stretch xmlns:a="http://schemas.openxmlformats.org/drawingml/2006/main"/>
         </p:blipFill>
@@ -1173,14 +1173,14 @@
   </p:cSld>
   <p:clrMap bg1="lt1" tx1="dk1" bg2="lt2" tx2="dk2" accent1="accent1" accent2="accent2" accent3="accent3" accent4="accent4" accent5="accent5" accent6="accent6" hlink="hlink" folHlink="folHlink"/>
   <p:sldLayoutIdLst>
-    <p:sldLayoutId xmlns:r="http://schemas.openxmlformats.org/officeDocument/2006/relationships" id="2147483649" r:id="Rbb5f0ce3da844896"/>
-    <p:sldLayoutId xmlns:r="http://schemas.openxmlformats.org/officeDocument/2006/relationships" id="2147483650" r:id="Raab02497b02a4679"/>
-    <p:sldLayoutId xmlns:r="http://schemas.openxmlformats.org/officeDocument/2006/relationships" id="2147483651" r:id="R90cae51abf5a4df2"/>
-    <p:sldLayoutId xmlns:r="http://schemas.openxmlformats.org/officeDocument/2006/relationships" id="2147483652" r:id="Rad944d6423fb4705"/>
-    <p:sldLayoutId xmlns:r="http://schemas.openxmlformats.org/officeDocument/2006/relationships" id="2147483653" r:id="R0edb43366bd04c65"/>
-    <p:sldLayoutId xmlns:r="http://schemas.openxmlformats.org/officeDocument/2006/relationships" id="2147483654" r:id="R7c07bf09d44a466f"/>
-    <p:sldLayoutId xmlns:r="http://schemas.openxmlformats.org/officeDocument/2006/relationships" id="2147483655" r:id="Rf92bae38c0a541e6"/>
-    <p:sldLayoutId xmlns:r="http://schemas.openxmlformats.org/officeDocument/2006/relationships" id="2147483656" r:id="Rf9cf25a7d68f48e0"/>
+    <p:sldLayoutId xmlns:r="http://schemas.openxmlformats.org/officeDocument/2006/relationships" id="2147483649" r:id="R9e616681ec1a4508"/>
+    <p:sldLayoutId xmlns:r="http://schemas.openxmlformats.org/officeDocument/2006/relationships" id="2147483650" r:id="Ra94c4783bfa546dd"/>
+    <p:sldLayoutId xmlns:r="http://schemas.openxmlformats.org/officeDocument/2006/relationships" id="2147483651" r:id="R15df07aeaabd4c3d"/>
+    <p:sldLayoutId xmlns:r="http://schemas.openxmlformats.org/officeDocument/2006/relationships" id="2147483652" r:id="R2842feabf48d4cee"/>
+    <p:sldLayoutId xmlns:r="http://schemas.openxmlformats.org/officeDocument/2006/relationships" id="2147483653" r:id="R2dd32180e65f4065"/>
+    <p:sldLayoutId xmlns:r="http://schemas.openxmlformats.org/officeDocument/2006/relationships" id="2147483654" r:id="Rfc14233be1e248d9"/>
+    <p:sldLayoutId xmlns:r="http://schemas.openxmlformats.org/officeDocument/2006/relationships" id="2147483655" r:id="R0a9c79d32cd14fc4"/>
+    <p:sldLayoutId xmlns:r="http://schemas.openxmlformats.org/officeDocument/2006/relationships" id="2147483656" r:id="R266b106f7b5a4588"/>
   </p:sldLayoutIdLst>
   <p:hf sldNum="0" hdr="0" ftr="0" dt="0"/>
   <p:txStyles>
@@ -1846,7 +1846,7 @@
           <p:nvPr/>
         </p:nvPicPr>
         <p:blipFill>
-          <a:blip xmlns:r="http://schemas.openxmlformats.org/officeDocument/2006/relationships" xmlns:a="http://schemas.openxmlformats.org/drawingml/2006/main" r:embed="R48b72a8e6db843c8"/>
+          <a:blip xmlns:r="http://schemas.openxmlformats.org/officeDocument/2006/relationships" xmlns:a="http://schemas.openxmlformats.org/drawingml/2006/main" r:embed="Rd986ce0c67044015"/>
           <a:srcRect xmlns:a="http://schemas.openxmlformats.org/drawingml/2006/main" l="0" t="27" r="0" b="27"/>
           <a:stretch xmlns:a="http://schemas.openxmlformats.org/drawingml/2006/main">
             <a:fillRect l="0" t="0" r="0" b="0"/>
@@ -2642,10 +2642,10 @@
       </p:sp>
       <p:sp>
         <p:nvSpPr>
-          <p:cNvPr id="53" name="c3-text-327">
-            <a:extLst xmlns:a="http://schemas.openxmlformats.org/drawingml/2006/main">
-              <a:ext uri="{FF2B5EF4-FFF2-40B4-BE49-F238E27FC236}">
-                <a16:creationId xmlns:a16="http://schemas.microsoft.com/office/drawing/2014/main" id="{542131F1-561D-4947-97D0-8F92D9AD045B}"/>
+          <p:cNvPr id="53" name="c3-text-328">
+            <a:extLst xmlns:a="http://schemas.openxmlformats.org/drawingml/2006/main">
+              <a:ext uri="{FF2B5EF4-FFF2-40B4-BE49-F238E27FC236}">
+                <a16:creationId xmlns:a16="http://schemas.microsoft.com/office/drawing/2014/main" id="{0B8C38AE-BAC3-4C48-B4F1-04C371219B3B}"/>
               </a:ext>
             </a:extLst>
           </p:cNvPr>
@@ -2728,10 +2728,10 @@
       </p:grpSpPr>
       <p:sp>
         <p:nvSpPr>
-          <p:cNvPr id="7" name="c3-text-96">
-            <a:extLst xmlns:a="http://schemas.openxmlformats.org/drawingml/2006/main">
-              <a:ext uri="{FF2B5EF4-FFF2-40B4-BE49-F238E27FC236}">
-                <a16:creationId xmlns:a16="http://schemas.microsoft.com/office/drawing/2014/main" id="{F2C43843-7FD5-4E94-9A8F-DDDB96857273}"/>
+          <p:cNvPr id="8" name="c3-text-96">
+            <a:extLst xmlns:a="http://schemas.openxmlformats.org/drawingml/2006/main">
+              <a:ext uri="{FF2B5EF4-FFF2-40B4-BE49-F238E27FC236}">
+                <a16:creationId xmlns:a16="http://schemas.microsoft.com/office/drawing/2014/main" id="{FAC47261-F0E8-4026-A599-2EFCF80B956B}"/>
               </a:ext>
             </a:extLst>
           </p:cNvPr>
@@ -2788,7 +2788,7 @@
           <p:cNvPr id="2" name="c3-text-97">
             <a:extLst xmlns:a="http://schemas.openxmlformats.org/drawingml/2006/main">
               <a:ext uri="{FF2B5EF4-FFF2-40B4-BE49-F238E27FC236}">
-                <a16:creationId xmlns:a16="http://schemas.microsoft.com/office/drawing/2014/main" id="{D2962306-39EC-41BA-A515-E24BBBB01D47}"/>
+                <a16:creationId xmlns:a16="http://schemas.microsoft.com/office/drawing/2014/main" id="{75BE6173-BEAB-4BF7-9A38-1E7DAF7534FB}"/>
               </a:ext>
             </a:extLst>
           </p:cNvPr>
@@ -2845,7 +2845,7 @@
           <p:cNvPr id="3" name="c3-text-98">
             <a:extLst xmlns:a="http://schemas.openxmlformats.org/drawingml/2006/main">
               <a:ext uri="{FF2B5EF4-FFF2-40B4-BE49-F238E27FC236}">
-                <a16:creationId xmlns:a16="http://schemas.microsoft.com/office/drawing/2014/main" id="{620F3B2D-3F0D-4A0C-86BA-F4A1B1008A70}"/>
+                <a16:creationId xmlns:a16="http://schemas.microsoft.com/office/drawing/2014/main" id="{A3138BBE-D6D8-41CF-8D93-35666BFCDF89}"/>
               </a:ext>
             </a:extLst>
           </p:cNvPr>
@@ -2902,18 +2902,18 @@
           <p:cNvPr id="4" name="c3-shape-99">
             <a:extLst xmlns:a="http://schemas.openxmlformats.org/drawingml/2006/main">
               <a:ext uri="{FF2B5EF4-FFF2-40B4-BE49-F238E27FC236}">
-                <a16:creationId xmlns:a16="http://schemas.microsoft.com/office/drawing/2014/main" id="{934EBB7F-DDC9-445F-A308-A41B24DF5F82}"/>
-              </a:ext>
-            </a:extLst>
-          </p:cNvPr>
-          <p:cNvSpPr>
-            <a:spLocks xmlns:a="http://schemas.openxmlformats.org/drawingml/2006/main" noGrp="1"/>
-          </p:cNvSpPr>
-          <p:nvPr/>
-        </p:nvSpPr>
-        <p:spPr>
-          <a:xfrm xmlns:a="http://schemas.openxmlformats.org/drawingml/2006/main">
-            <a:off x="609600" y="1524000"/>
+                <a16:creationId xmlns:a16="http://schemas.microsoft.com/office/drawing/2014/main" id="{AC7E70CE-828B-4491-9BCF-59CE413A8765}"/>
+              </a:ext>
+            </a:extLst>
+          </p:cNvPr>
+          <p:cNvSpPr>
+            <a:spLocks xmlns:a="http://schemas.openxmlformats.org/drawingml/2006/main" noGrp="1"/>
+          </p:cNvSpPr>
+          <p:nvPr/>
+        </p:nvSpPr>
+        <p:spPr>
+          <a:xfrm xmlns:a="http://schemas.openxmlformats.org/drawingml/2006/main">
+            <a:off x="609600" y="1428750"/>
             <a:ext cx="7924800" cy="2428875"/>
           </a:xfrm>
           <a:prstGeom xmlns:a="http://schemas.openxmlformats.org/drawingml/2006/main" prst="roundRect">
@@ -2936,18 +2936,18 @@
           <p:cNvPr id="5" name="c3-text-100">
             <a:extLst xmlns:a="http://schemas.openxmlformats.org/drawingml/2006/main">
               <a:ext uri="{FF2B5EF4-FFF2-40B4-BE49-F238E27FC236}">
-                <a16:creationId xmlns:a16="http://schemas.microsoft.com/office/drawing/2014/main" id="{0EFB323D-B1A8-4655-8791-607AD1318C43}"/>
-              </a:ext>
-            </a:extLst>
-          </p:cNvPr>
-          <p:cNvSpPr>
-            <a:spLocks xmlns:a="http://schemas.openxmlformats.org/drawingml/2006/main" noGrp="1"/>
-          </p:cNvSpPr>
-          <p:nvPr/>
-        </p:nvSpPr>
-        <p:spPr>
-          <a:xfrm xmlns:a="http://schemas.openxmlformats.org/drawingml/2006/main">
-            <a:off x="781050" y="1657350"/>
+                <a16:creationId xmlns:a16="http://schemas.microsoft.com/office/drawing/2014/main" id="{3828BBD3-1B58-478C-80BC-00331DF32EF0}"/>
+              </a:ext>
+            </a:extLst>
+          </p:cNvPr>
+          <p:cNvSpPr>
+            <a:spLocks xmlns:a="http://schemas.openxmlformats.org/drawingml/2006/main" noGrp="1"/>
+          </p:cNvSpPr>
+          <p:nvPr/>
+        </p:nvSpPr>
+        <p:spPr>
+          <a:xfrm xmlns:a="http://schemas.openxmlformats.org/drawingml/2006/main">
+            <a:off x="781050" y="1562100"/>
             <a:ext cx="7581900" cy="2162175"/>
           </a:xfrm>
           <a:prstGeom xmlns:a="http://schemas.openxmlformats.org/drawingml/2006/main" prst="rect">
@@ -3437,10 +3437,67 @@
       </p:sp>
       <p:sp>
         <p:nvSpPr>
-          <p:cNvPr id="6" name="c3-text-336">
-            <a:extLst xmlns:a="http://schemas.openxmlformats.org/drawingml/2006/main">
-              <a:ext uri="{FF2B5EF4-FFF2-40B4-BE49-F238E27FC236}">
-                <a16:creationId xmlns:a16="http://schemas.microsoft.com/office/drawing/2014/main" id="{4E586A86-6D1F-4833-9E8F-14A497D73E2D}"/>
+          <p:cNvPr id="6" name="c3-text-101">
+            <a:extLst xmlns:a="http://schemas.openxmlformats.org/drawingml/2006/main">
+              <a:ext uri="{FF2B5EF4-FFF2-40B4-BE49-F238E27FC236}">
+                <a16:creationId xmlns:a16="http://schemas.microsoft.com/office/drawing/2014/main" id="{A0EC61BA-CE58-4067-B66D-7CF18D060AC3}"/>
+              </a:ext>
+            </a:extLst>
+          </p:cNvPr>
+          <p:cNvSpPr>
+            <a:spLocks xmlns:a="http://schemas.openxmlformats.org/drawingml/2006/main" noGrp="1"/>
+          </p:cNvSpPr>
+          <p:nvPr/>
+        </p:nvSpPr>
+        <p:spPr>
+          <a:xfrm xmlns:a="http://schemas.openxmlformats.org/drawingml/2006/main">
+            <a:off x="609600" y="4048125"/>
+            <a:ext cx="7924800" cy="400050"/>
+          </a:xfrm>
+          <a:prstGeom xmlns:a="http://schemas.openxmlformats.org/drawingml/2006/main" prst="rect">
+            <a:avLst/>
+          </a:prstGeom>
+          <a:noFill xmlns:a="http://schemas.openxmlformats.org/drawingml/2006/main"/>
+          <a:ln xmlns:a="http://schemas.openxmlformats.org/drawingml/2006/main" w="0">
+            <a:noFill/>
+          </a:ln>
+        </p:spPr>
+        <p:txBody>
+          <a:bodyPr xmlns:a="http://schemas.openxmlformats.org/drawingml/2006/main" wrap="square" lIns="9525" tIns="9525" rIns="9525" bIns="9525" anchor="ctr">
+            <a:noAutofit/>
+          </a:bodyPr>
+          <a:lstStyle xmlns:a="http://schemas.openxmlformats.org/drawingml/2006/main"/>
+          <a:p xmlns:a="http://schemas.openxmlformats.org/drawingml/2006/main">
+            <a:pPr>
+              <a:defRPr sz="1725" b="0">
+                <a:solidFill>
+                  <a:srgbClr val="7FA8E3"/>
+                </a:solidFill>
+                <a:latin typeface="Calibri"/>
+                <a:ea typeface="Calibri"/>
+                <a:cs typeface="Calibri"/>
+              </a:defRPr>
+            </a:pPr>
+            <a:r>
+              <a:rPr sz="1725" b="0">
+                <a:solidFill>
+                  <a:srgbClr val="7FA8E3"/>
+                </a:solidFill>
+                <a:latin typeface="Calibri"/>
+                <a:ea typeface="Calibri"/>
+                <a:cs typeface="Calibri"/>
+              </a:rPr>
+              <a:t>Rebuild this route together, then test Clear conversation.</a:t>
+            </a:r>
+          </a:p>
+        </p:txBody>
+      </p:sp>
+      <p:sp>
+        <p:nvSpPr>
+          <p:cNvPr id="7" name="c3-text-337">
+            <a:extLst xmlns:a="http://schemas.openxmlformats.org/drawingml/2006/main">
+              <a:ext uri="{FF2B5EF4-FFF2-40B4-BE49-F238E27FC236}">
+                <a16:creationId xmlns:a16="http://schemas.microsoft.com/office/drawing/2014/main" id="{18F3C954-5FC3-41E5-B1C9-D19AF936C5C1}"/>
               </a:ext>
             </a:extLst>
           </p:cNvPr>
@@ -3495,7 +3552,7 @@
     </p:spTree>
     <p:extLst>
       <p:ext uri="{BB962C8B-B14F-4D97-AF65-F5344CB8AC3E}">
-        <p14:creationId xmlns:p14="http://schemas.microsoft.com/office/powerpoint/2010/main" val="1977768221"/>
+        <p14:creationId xmlns:p14="http://schemas.microsoft.com/office/powerpoint/2010/main" val="144252726"/>
       </p:ext>
     </p:extLst>
   </p:cSld>
@@ -3523,10 +3580,10 @@
       </p:grpSpPr>
       <p:sp>
         <p:nvSpPr>
-          <p:cNvPr id="19" name="c3-text-101">
-            <a:extLst xmlns:a="http://schemas.openxmlformats.org/drawingml/2006/main">
-              <a:ext uri="{FF2B5EF4-FFF2-40B4-BE49-F238E27FC236}">
-                <a16:creationId xmlns:a16="http://schemas.microsoft.com/office/drawing/2014/main" id="{D14218E1-5BC1-4B58-B48F-5A95EDFD8F5C}"/>
+          <p:cNvPr id="19" name="c3-text-102">
+            <a:extLst xmlns:a="http://schemas.openxmlformats.org/drawingml/2006/main">
+              <a:ext uri="{FF2B5EF4-FFF2-40B4-BE49-F238E27FC236}">
+                <a16:creationId xmlns:a16="http://schemas.microsoft.com/office/drawing/2014/main" id="{320C5AFB-B8C7-4D29-A39E-FE0C107B0EBE}"/>
               </a:ext>
             </a:extLst>
           </p:cNvPr>
@@ -3580,10 +3637,10 @@
       </p:sp>
       <p:sp>
         <p:nvSpPr>
-          <p:cNvPr id="2" name="c3-text-102">
-            <a:extLst xmlns:a="http://schemas.openxmlformats.org/drawingml/2006/main">
-              <a:ext uri="{FF2B5EF4-FFF2-40B4-BE49-F238E27FC236}">
-                <a16:creationId xmlns:a16="http://schemas.microsoft.com/office/drawing/2014/main" id="{1633C678-DD64-4300-B03F-177BC148E9AE}"/>
+          <p:cNvPr id="2" name="c3-text-103">
+            <a:extLst xmlns:a="http://schemas.openxmlformats.org/drawingml/2006/main">
+              <a:ext uri="{FF2B5EF4-FFF2-40B4-BE49-F238E27FC236}">
+                <a16:creationId xmlns:a16="http://schemas.microsoft.com/office/drawing/2014/main" id="{24065F95-01F4-4CBC-8970-A3FD5A414404}"/>
               </a:ext>
             </a:extLst>
           </p:cNvPr>
@@ -3637,10 +3694,10 @@
       </p:sp>
       <p:sp>
         <p:nvSpPr>
-          <p:cNvPr id="3" name="c3-text-103">
-            <a:extLst xmlns:a="http://schemas.openxmlformats.org/drawingml/2006/main">
-              <a:ext uri="{FF2B5EF4-FFF2-40B4-BE49-F238E27FC236}">
-                <a16:creationId xmlns:a16="http://schemas.microsoft.com/office/drawing/2014/main" id="{5606432E-EF3E-4F6B-B9C5-C84586D4FD6D}"/>
+          <p:cNvPr id="3" name="c3-text-104">
+            <a:extLst xmlns:a="http://schemas.openxmlformats.org/drawingml/2006/main">
+              <a:ext uri="{FF2B5EF4-FFF2-40B4-BE49-F238E27FC236}">
+                <a16:creationId xmlns:a16="http://schemas.microsoft.com/office/drawing/2014/main" id="{29D39A43-01F6-4646-8886-B7F6A909B318}"/>
               </a:ext>
             </a:extLst>
           </p:cNvPr>
@@ -3694,10 +3751,10 @@
       </p:sp>
       <p:sp>
         <p:nvSpPr>
-          <p:cNvPr id="4" name="c3-shape-104">
-            <a:extLst xmlns:a="http://schemas.openxmlformats.org/drawingml/2006/main">
-              <a:ext uri="{FF2B5EF4-FFF2-40B4-BE49-F238E27FC236}">
-                <a16:creationId xmlns:a16="http://schemas.microsoft.com/office/drawing/2014/main" id="{4561D95E-1FD0-436C-8E2D-B0AF0FA8155F}"/>
+          <p:cNvPr id="4" name="c3-shape-105">
+            <a:extLst xmlns:a="http://schemas.openxmlformats.org/drawingml/2006/main">
+              <a:ext uri="{FF2B5EF4-FFF2-40B4-BE49-F238E27FC236}">
+                <a16:creationId xmlns:a16="http://schemas.microsoft.com/office/drawing/2014/main" id="{1FF29364-E7A7-44E1-AC1F-92349EA19480}"/>
               </a:ext>
             </a:extLst>
           </p:cNvPr>
@@ -3728,10 +3785,10 @@
       </p:sp>
       <p:sp>
         <p:nvSpPr>
-          <p:cNvPr id="5" name="c3-shape-105">
-            <a:extLst xmlns:a="http://schemas.openxmlformats.org/drawingml/2006/main">
-              <a:ext uri="{FF2B5EF4-FFF2-40B4-BE49-F238E27FC236}">
-                <a16:creationId xmlns:a16="http://schemas.microsoft.com/office/drawing/2014/main" id="{6EDCDB5C-E9AD-4320-BAC3-C13F606E3FC8}"/>
+          <p:cNvPr id="5" name="c3-shape-106">
+            <a:extLst xmlns:a="http://schemas.openxmlformats.org/drawingml/2006/main">
+              <a:ext uri="{FF2B5EF4-FFF2-40B4-BE49-F238E27FC236}">
+                <a16:creationId xmlns:a16="http://schemas.microsoft.com/office/drawing/2014/main" id="{DE611815-9AD3-4A9F-A626-C9191CA7B69F}"/>
               </a:ext>
             </a:extLst>
           </p:cNvPr>
@@ -3760,10 +3817,10 @@
       </p:sp>
       <p:sp>
         <p:nvSpPr>
-          <p:cNvPr id="6" name="c3-text-106">
-            <a:extLst xmlns:a="http://schemas.openxmlformats.org/drawingml/2006/main">
-              <a:ext uri="{FF2B5EF4-FFF2-40B4-BE49-F238E27FC236}">
-                <a16:creationId xmlns:a16="http://schemas.microsoft.com/office/drawing/2014/main" id="{3E74C926-FC6D-478D-9E08-69CF97CF799C}"/>
+          <p:cNvPr id="6" name="c3-text-107">
+            <a:extLst xmlns:a="http://schemas.openxmlformats.org/drawingml/2006/main">
+              <a:ext uri="{FF2B5EF4-FFF2-40B4-BE49-F238E27FC236}">
+                <a16:creationId xmlns:a16="http://schemas.microsoft.com/office/drawing/2014/main" id="{8A5D4744-29BD-4150-B439-B48966EEBA12}"/>
               </a:ext>
             </a:extLst>
           </p:cNvPr>
@@ -3817,10 +3874,10 @@
       </p:sp>
       <p:sp>
         <p:nvSpPr>
-          <p:cNvPr id="7" name="c3-text-107">
-            <a:extLst xmlns:a="http://schemas.openxmlformats.org/drawingml/2006/main">
-              <a:ext uri="{FF2B5EF4-FFF2-40B4-BE49-F238E27FC236}">
-                <a16:creationId xmlns:a16="http://schemas.microsoft.com/office/drawing/2014/main" id="{BFBCDBF7-B91B-4447-848B-5106CFFC8F78}"/>
+          <p:cNvPr id="7" name="c3-text-108">
+            <a:extLst xmlns:a="http://schemas.openxmlformats.org/drawingml/2006/main">
+              <a:ext uri="{FF2B5EF4-FFF2-40B4-BE49-F238E27FC236}">
+                <a16:creationId xmlns:a16="http://schemas.microsoft.com/office/drawing/2014/main" id="{7A68C2BF-3490-4700-A578-D28111E0734C}"/>
               </a:ext>
             </a:extLst>
           </p:cNvPr>
@@ -3874,10 +3931,10 @@
       </p:sp>
       <p:sp>
         <p:nvSpPr>
-          <p:cNvPr id="8" name="c3-shape-108">
-            <a:extLst xmlns:a="http://schemas.openxmlformats.org/drawingml/2006/main">
-              <a:ext uri="{FF2B5EF4-FFF2-40B4-BE49-F238E27FC236}">
-                <a16:creationId xmlns:a16="http://schemas.microsoft.com/office/drawing/2014/main" id="{0A588B66-19E4-4918-B5FC-06CBE74385CA}"/>
+          <p:cNvPr id="8" name="c3-shape-109">
+            <a:extLst xmlns:a="http://schemas.openxmlformats.org/drawingml/2006/main">
+              <a:ext uri="{FF2B5EF4-FFF2-40B4-BE49-F238E27FC236}">
+                <a16:creationId xmlns:a16="http://schemas.microsoft.com/office/drawing/2014/main" id="{3C7EF7FB-1B3C-4AE8-A753-FE197B185C96}"/>
               </a:ext>
             </a:extLst>
           </p:cNvPr>
@@ -3908,10 +3965,10 @@
       </p:sp>
       <p:sp>
         <p:nvSpPr>
-          <p:cNvPr id="9" name="c3-shape-109">
-            <a:extLst xmlns:a="http://schemas.openxmlformats.org/drawingml/2006/main">
-              <a:ext uri="{FF2B5EF4-FFF2-40B4-BE49-F238E27FC236}">
-                <a16:creationId xmlns:a16="http://schemas.microsoft.com/office/drawing/2014/main" id="{639C5C1F-A193-423D-A43A-24D1C755F25B}"/>
+          <p:cNvPr id="9" name="c3-shape-110">
+            <a:extLst xmlns:a="http://schemas.openxmlformats.org/drawingml/2006/main">
+              <a:ext uri="{FF2B5EF4-FFF2-40B4-BE49-F238E27FC236}">
+                <a16:creationId xmlns:a16="http://schemas.microsoft.com/office/drawing/2014/main" id="{127CFB61-6A88-4B94-A54F-6B7AE187B087}"/>
               </a:ext>
             </a:extLst>
           </p:cNvPr>
@@ -3940,10 +3997,10 @@
       </p:sp>
       <p:sp>
         <p:nvSpPr>
-          <p:cNvPr id="10" name="c3-text-110">
-            <a:extLst xmlns:a="http://schemas.openxmlformats.org/drawingml/2006/main">
-              <a:ext uri="{FF2B5EF4-FFF2-40B4-BE49-F238E27FC236}">
-                <a16:creationId xmlns:a16="http://schemas.microsoft.com/office/drawing/2014/main" id="{745ECC01-2820-48FB-8221-75D7108E7FE0}"/>
+          <p:cNvPr id="10" name="c3-text-111">
+            <a:extLst xmlns:a="http://schemas.openxmlformats.org/drawingml/2006/main">
+              <a:ext uri="{FF2B5EF4-FFF2-40B4-BE49-F238E27FC236}">
+                <a16:creationId xmlns:a16="http://schemas.microsoft.com/office/drawing/2014/main" id="{BDB74661-CE35-4B1F-B223-D7BFA7545CEA}"/>
               </a:ext>
             </a:extLst>
           </p:cNvPr>
@@ -3997,10 +4054,10 @@
       </p:sp>
       <p:sp>
         <p:nvSpPr>
-          <p:cNvPr id="11" name="c3-text-111">
-            <a:extLst xmlns:a="http://schemas.openxmlformats.org/drawingml/2006/main">
-              <a:ext uri="{FF2B5EF4-FFF2-40B4-BE49-F238E27FC236}">
-                <a16:creationId xmlns:a16="http://schemas.microsoft.com/office/drawing/2014/main" id="{CA2BB258-5938-4010-AD41-F2C97DF1421C}"/>
+          <p:cNvPr id="11" name="c3-text-112">
+            <a:extLst xmlns:a="http://schemas.openxmlformats.org/drawingml/2006/main">
+              <a:ext uri="{FF2B5EF4-FFF2-40B4-BE49-F238E27FC236}">
+                <a16:creationId xmlns:a16="http://schemas.microsoft.com/office/drawing/2014/main" id="{B2954F6F-C5AD-4A7B-8DF2-B33ABA888DCC}"/>
               </a:ext>
             </a:extLst>
           </p:cNvPr>
@@ -4054,10 +4111,10 @@
       </p:sp>
       <p:sp>
         <p:nvSpPr>
-          <p:cNvPr id="12" name="c3-shape-112">
-            <a:extLst xmlns:a="http://schemas.openxmlformats.org/drawingml/2006/main">
-              <a:ext uri="{FF2B5EF4-FFF2-40B4-BE49-F238E27FC236}">
-                <a16:creationId xmlns:a16="http://schemas.microsoft.com/office/drawing/2014/main" id="{DAB103FA-E740-4CE2-81F5-1CB72F88BE09}"/>
+          <p:cNvPr id="12" name="c3-shape-113">
+            <a:extLst xmlns:a="http://schemas.openxmlformats.org/drawingml/2006/main">
+              <a:ext uri="{FF2B5EF4-FFF2-40B4-BE49-F238E27FC236}">
+                <a16:creationId xmlns:a16="http://schemas.microsoft.com/office/drawing/2014/main" id="{855396A3-3D1F-4CF7-A015-4213ABFC748C}"/>
               </a:ext>
             </a:extLst>
           </p:cNvPr>
@@ -4088,10 +4145,10 @@
       </p:sp>
       <p:sp>
         <p:nvSpPr>
-          <p:cNvPr id="13" name="c3-shape-113">
-            <a:extLst xmlns:a="http://schemas.openxmlformats.org/drawingml/2006/main">
-              <a:ext uri="{FF2B5EF4-FFF2-40B4-BE49-F238E27FC236}">
-                <a16:creationId xmlns:a16="http://schemas.microsoft.com/office/drawing/2014/main" id="{1DBC1330-5CC6-45EA-8D56-876B6FD5EB04}"/>
+          <p:cNvPr id="13" name="c3-shape-114">
+            <a:extLst xmlns:a="http://schemas.openxmlformats.org/drawingml/2006/main">
+              <a:ext uri="{FF2B5EF4-FFF2-40B4-BE49-F238E27FC236}">
+                <a16:creationId xmlns:a16="http://schemas.microsoft.com/office/drawing/2014/main" id="{F0AAC318-7DFF-4C04-A524-044A8EDD9CF3}"/>
               </a:ext>
             </a:extLst>
           </p:cNvPr>
@@ -4120,10 +4177,10 @@
       </p:sp>
       <p:sp>
         <p:nvSpPr>
-          <p:cNvPr id="14" name="c3-text-114">
-            <a:extLst xmlns:a="http://schemas.openxmlformats.org/drawingml/2006/main">
-              <a:ext uri="{FF2B5EF4-FFF2-40B4-BE49-F238E27FC236}">
-                <a16:creationId xmlns:a16="http://schemas.microsoft.com/office/drawing/2014/main" id="{A56A5EC4-7217-43C4-ABF0-937C65145B25}"/>
+          <p:cNvPr id="14" name="c3-text-115">
+            <a:extLst xmlns:a="http://schemas.openxmlformats.org/drawingml/2006/main">
+              <a:ext uri="{FF2B5EF4-FFF2-40B4-BE49-F238E27FC236}">
+                <a16:creationId xmlns:a16="http://schemas.microsoft.com/office/drawing/2014/main" id="{5417C5C2-1DA7-4BA8-A315-22C7DE9D7AB2}"/>
               </a:ext>
             </a:extLst>
           </p:cNvPr>
@@ -4177,10 +4234,10 @@
       </p:sp>
       <p:sp>
         <p:nvSpPr>
-          <p:cNvPr id="15" name="c3-text-115">
-            <a:extLst xmlns:a="http://schemas.openxmlformats.org/drawingml/2006/main">
-              <a:ext uri="{FF2B5EF4-FFF2-40B4-BE49-F238E27FC236}">
-                <a16:creationId xmlns:a16="http://schemas.microsoft.com/office/drawing/2014/main" id="{2209F4C5-5CE6-490B-AB72-CDD97BFF9F09}"/>
+          <p:cNvPr id="15" name="c3-text-116">
+            <a:extLst xmlns:a="http://schemas.openxmlformats.org/drawingml/2006/main">
+              <a:ext uri="{FF2B5EF4-FFF2-40B4-BE49-F238E27FC236}">
+                <a16:creationId xmlns:a16="http://schemas.microsoft.com/office/drawing/2014/main" id="{45601D19-A23E-4743-B5DE-C5C5C573ECDD}"/>
               </a:ext>
             </a:extLst>
           </p:cNvPr>
@@ -4234,10 +4291,10 @@
       </p:sp>
       <p:sp>
         <p:nvSpPr>
-          <p:cNvPr id="16" name="c3-shape-116">
-            <a:extLst xmlns:a="http://schemas.openxmlformats.org/drawingml/2006/main">
-              <a:ext uri="{FF2B5EF4-FFF2-40B4-BE49-F238E27FC236}">
-                <a16:creationId xmlns:a16="http://schemas.microsoft.com/office/drawing/2014/main" id="{BC5B3D7A-E3D6-447D-9AC9-030427CB6E47}"/>
+          <p:cNvPr id="16" name="c3-shape-117">
+            <a:extLst xmlns:a="http://schemas.openxmlformats.org/drawingml/2006/main">
+              <a:ext uri="{FF2B5EF4-FFF2-40B4-BE49-F238E27FC236}">
+                <a16:creationId xmlns:a16="http://schemas.microsoft.com/office/drawing/2014/main" id="{21C5AF8D-06F6-4300-83B3-4F1F7F93F0B7}"/>
               </a:ext>
             </a:extLst>
           </p:cNvPr>
@@ -4268,10 +4325,10 @@
       </p:sp>
       <p:sp>
         <p:nvSpPr>
-          <p:cNvPr id="17" name="c3-text-117">
-            <a:extLst xmlns:a="http://schemas.openxmlformats.org/drawingml/2006/main">
-              <a:ext uri="{FF2B5EF4-FFF2-40B4-BE49-F238E27FC236}">
-                <a16:creationId xmlns:a16="http://schemas.microsoft.com/office/drawing/2014/main" id="{55419BF7-1095-469E-AE8B-B5706D32E8F2}"/>
+          <p:cNvPr id="17" name="c3-text-118">
+            <a:extLst xmlns:a="http://schemas.openxmlformats.org/drawingml/2006/main">
+              <a:ext uri="{FF2B5EF4-FFF2-40B4-BE49-F238E27FC236}">
+                <a16:creationId xmlns:a16="http://schemas.microsoft.com/office/drawing/2014/main" id="{78814A32-96C7-455C-AF4B-AF8661B80907}"/>
               </a:ext>
             </a:extLst>
           </p:cNvPr>
@@ -4325,10 +4382,10 @@
       </p:sp>
       <p:sp>
         <p:nvSpPr>
-          <p:cNvPr id="18" name="c3-text-337">
-            <a:extLst xmlns:a="http://schemas.openxmlformats.org/drawingml/2006/main">
-              <a:ext uri="{FF2B5EF4-FFF2-40B4-BE49-F238E27FC236}">
-                <a16:creationId xmlns:a16="http://schemas.microsoft.com/office/drawing/2014/main" id="{38073565-E37A-4528-AEDB-BCBDADC703D4}"/>
+          <p:cNvPr id="18" name="c3-text-338">
+            <a:extLst xmlns:a="http://schemas.openxmlformats.org/drawingml/2006/main">
+              <a:ext uri="{FF2B5EF4-FFF2-40B4-BE49-F238E27FC236}">
+                <a16:creationId xmlns:a16="http://schemas.microsoft.com/office/drawing/2014/main" id="{AEFFC7EA-225A-43C6-A654-BCE9639A9880}"/>
               </a:ext>
             </a:extLst>
           </p:cNvPr>
@@ -4383,7 +4440,7 @@
     </p:spTree>
     <p:extLst>
       <p:ext uri="{BB962C8B-B14F-4D97-AF65-F5344CB8AC3E}">
-        <p14:creationId xmlns:p14="http://schemas.microsoft.com/office/powerpoint/2010/main" val="813115273"/>
+        <p14:creationId xmlns:p14="http://schemas.microsoft.com/office/powerpoint/2010/main" val="242308862"/>
       </p:ext>
     </p:extLst>
   </p:cSld>
@@ -4411,10 +4468,10 @@
       </p:grpSpPr>
       <p:sp>
         <p:nvSpPr>
-          <p:cNvPr id="15" name="c3-text-118">
-            <a:extLst xmlns:a="http://schemas.openxmlformats.org/drawingml/2006/main">
-              <a:ext uri="{FF2B5EF4-FFF2-40B4-BE49-F238E27FC236}">
-                <a16:creationId xmlns:a16="http://schemas.microsoft.com/office/drawing/2014/main" id="{2525ED39-C56E-4150-8817-EFE8B44B19FC}"/>
+          <p:cNvPr id="15" name="c3-text-119">
+            <a:extLst xmlns:a="http://schemas.openxmlformats.org/drawingml/2006/main">
+              <a:ext uri="{FF2B5EF4-FFF2-40B4-BE49-F238E27FC236}">
+                <a16:creationId xmlns:a16="http://schemas.microsoft.com/office/drawing/2014/main" id="{2E1F74DE-9E43-48B3-9A36-965FDE25831D}"/>
               </a:ext>
             </a:extLst>
           </p:cNvPr>
@@ -4468,10 +4525,10 @@
       </p:sp>
       <p:sp>
         <p:nvSpPr>
-          <p:cNvPr id="2" name="c3-text-119">
-            <a:extLst xmlns:a="http://schemas.openxmlformats.org/drawingml/2006/main">
-              <a:ext uri="{FF2B5EF4-FFF2-40B4-BE49-F238E27FC236}">
-                <a16:creationId xmlns:a16="http://schemas.microsoft.com/office/drawing/2014/main" id="{559FD161-DCE0-41FE-A9AD-7EA80155C514}"/>
+          <p:cNvPr id="2" name="c3-text-120">
+            <a:extLst xmlns:a="http://schemas.openxmlformats.org/drawingml/2006/main">
+              <a:ext uri="{FF2B5EF4-FFF2-40B4-BE49-F238E27FC236}">
+                <a16:creationId xmlns:a16="http://schemas.microsoft.com/office/drawing/2014/main" id="{DD286AFF-4BD0-43CB-9C6E-C4683AC66C62}"/>
               </a:ext>
             </a:extLst>
           </p:cNvPr>
@@ -4525,10 +4582,10 @@
       </p:sp>
       <p:sp>
         <p:nvSpPr>
-          <p:cNvPr id="3" name="c3-text-120">
-            <a:extLst xmlns:a="http://schemas.openxmlformats.org/drawingml/2006/main">
-              <a:ext uri="{FF2B5EF4-FFF2-40B4-BE49-F238E27FC236}">
-                <a16:creationId xmlns:a16="http://schemas.microsoft.com/office/drawing/2014/main" id="{FAC5C7EF-8DFE-48A2-BEAA-9CD98A50A736}"/>
+          <p:cNvPr id="3" name="c3-text-121">
+            <a:extLst xmlns:a="http://schemas.openxmlformats.org/drawingml/2006/main">
+              <a:ext uri="{FF2B5EF4-FFF2-40B4-BE49-F238E27FC236}">
+                <a16:creationId xmlns:a16="http://schemas.microsoft.com/office/drawing/2014/main" id="{5050BDAC-D273-4E0A-8AB3-C3DD9AA01446}"/>
               </a:ext>
             </a:extLst>
           </p:cNvPr>
@@ -4582,10 +4639,10 @@
       </p:sp>
       <p:sp>
         <p:nvSpPr>
-          <p:cNvPr id="4" name="c3-shape-121">
-            <a:extLst xmlns:a="http://schemas.openxmlformats.org/drawingml/2006/main">
-              <a:ext uri="{FF2B5EF4-FFF2-40B4-BE49-F238E27FC236}">
-                <a16:creationId xmlns:a16="http://schemas.microsoft.com/office/drawing/2014/main" id="{A85D29B0-3166-4B6B-886D-F93CA43C66AB}"/>
+          <p:cNvPr id="4" name="c3-shape-122">
+            <a:extLst xmlns:a="http://schemas.openxmlformats.org/drawingml/2006/main">
+              <a:ext uri="{FF2B5EF4-FFF2-40B4-BE49-F238E27FC236}">
+                <a16:creationId xmlns:a16="http://schemas.microsoft.com/office/drawing/2014/main" id="{C974345F-23B9-4A79-B39E-42DFCE72C38B}"/>
               </a:ext>
             </a:extLst>
           </p:cNvPr>
@@ -4616,10 +4673,10 @@
       </p:sp>
       <p:sp>
         <p:nvSpPr>
-          <p:cNvPr id="5" name="c3-shape-122">
-            <a:extLst xmlns:a="http://schemas.openxmlformats.org/drawingml/2006/main">
-              <a:ext uri="{FF2B5EF4-FFF2-40B4-BE49-F238E27FC236}">
-                <a16:creationId xmlns:a16="http://schemas.microsoft.com/office/drawing/2014/main" id="{567609A1-33D1-4A10-9894-45E284438163}"/>
+          <p:cNvPr id="5" name="c3-shape-123">
+            <a:extLst xmlns:a="http://schemas.openxmlformats.org/drawingml/2006/main">
+              <a:ext uri="{FF2B5EF4-FFF2-40B4-BE49-F238E27FC236}">
+                <a16:creationId xmlns:a16="http://schemas.microsoft.com/office/drawing/2014/main" id="{EC7084AA-63AC-4B08-9C56-FB484F89952F}"/>
               </a:ext>
             </a:extLst>
           </p:cNvPr>
@@ -4648,10 +4705,10 @@
       </p:sp>
       <p:sp>
         <p:nvSpPr>
-          <p:cNvPr id="6" name="c3-text-123">
-            <a:extLst xmlns:a="http://schemas.openxmlformats.org/drawingml/2006/main">
-              <a:ext uri="{FF2B5EF4-FFF2-40B4-BE49-F238E27FC236}">
-                <a16:creationId xmlns:a16="http://schemas.microsoft.com/office/drawing/2014/main" id="{E31E72F1-F8AC-414E-87F7-8660EAF4131E}"/>
+          <p:cNvPr id="6" name="c3-text-124">
+            <a:extLst xmlns:a="http://schemas.openxmlformats.org/drawingml/2006/main">
+              <a:ext uri="{FF2B5EF4-FFF2-40B4-BE49-F238E27FC236}">
+                <a16:creationId xmlns:a16="http://schemas.microsoft.com/office/drawing/2014/main" id="{DDF4E5EC-E708-4350-93E1-C518433667E4}"/>
               </a:ext>
             </a:extLst>
           </p:cNvPr>
@@ -4705,10 +4762,10 @@
       </p:sp>
       <p:sp>
         <p:nvSpPr>
-          <p:cNvPr id="7" name="c3-text-124">
-            <a:extLst xmlns:a="http://schemas.openxmlformats.org/drawingml/2006/main">
-              <a:ext uri="{FF2B5EF4-FFF2-40B4-BE49-F238E27FC236}">
-                <a16:creationId xmlns:a16="http://schemas.microsoft.com/office/drawing/2014/main" id="{D896E197-5045-4BCD-878D-9CC773427484}"/>
+          <p:cNvPr id="7" name="c3-text-125">
+            <a:extLst xmlns:a="http://schemas.openxmlformats.org/drawingml/2006/main">
+              <a:ext uri="{FF2B5EF4-FFF2-40B4-BE49-F238E27FC236}">
+                <a16:creationId xmlns:a16="http://schemas.microsoft.com/office/drawing/2014/main" id="{4CBDB048-E28F-4E90-97D7-3F39FD83B008}"/>
               </a:ext>
             </a:extLst>
           </p:cNvPr>
@@ -4808,10 +4865,10 @@
       </p:sp>
       <p:sp>
         <p:nvSpPr>
-          <p:cNvPr id="8" name="c3-shape-125">
-            <a:extLst xmlns:a="http://schemas.openxmlformats.org/drawingml/2006/main">
-              <a:ext uri="{FF2B5EF4-FFF2-40B4-BE49-F238E27FC236}">
-                <a16:creationId xmlns:a16="http://schemas.microsoft.com/office/drawing/2014/main" id="{FC8FF05F-11C0-42DC-8736-EE39278B81B6}"/>
+          <p:cNvPr id="8" name="c3-shape-126">
+            <a:extLst xmlns:a="http://schemas.openxmlformats.org/drawingml/2006/main">
+              <a:ext uri="{FF2B5EF4-FFF2-40B4-BE49-F238E27FC236}">
+                <a16:creationId xmlns:a16="http://schemas.microsoft.com/office/drawing/2014/main" id="{4D15012C-97C5-4C40-A3FB-1679AF600975}"/>
               </a:ext>
             </a:extLst>
           </p:cNvPr>
@@ -4842,10 +4899,10 @@
       </p:sp>
       <p:sp>
         <p:nvSpPr>
-          <p:cNvPr id="9" name="c3-shape-126">
-            <a:extLst xmlns:a="http://schemas.openxmlformats.org/drawingml/2006/main">
-              <a:ext uri="{FF2B5EF4-FFF2-40B4-BE49-F238E27FC236}">
-                <a16:creationId xmlns:a16="http://schemas.microsoft.com/office/drawing/2014/main" id="{44536EC4-E604-42DB-90D4-80C9825B28C3}"/>
+          <p:cNvPr id="9" name="c3-shape-127">
+            <a:extLst xmlns:a="http://schemas.openxmlformats.org/drawingml/2006/main">
+              <a:ext uri="{FF2B5EF4-FFF2-40B4-BE49-F238E27FC236}">
+                <a16:creationId xmlns:a16="http://schemas.microsoft.com/office/drawing/2014/main" id="{F5F47B8B-5BFA-405E-8DD1-1B4F78A2FC2A}"/>
               </a:ext>
             </a:extLst>
           </p:cNvPr>
@@ -4874,10 +4931,10 @@
       </p:sp>
       <p:sp>
         <p:nvSpPr>
-          <p:cNvPr id="10" name="c3-text-127">
-            <a:extLst xmlns:a="http://schemas.openxmlformats.org/drawingml/2006/main">
-              <a:ext uri="{FF2B5EF4-FFF2-40B4-BE49-F238E27FC236}">
-                <a16:creationId xmlns:a16="http://schemas.microsoft.com/office/drawing/2014/main" id="{219B029A-088D-40B6-9D61-EB49526987ED}"/>
+          <p:cNvPr id="10" name="c3-text-128">
+            <a:extLst xmlns:a="http://schemas.openxmlformats.org/drawingml/2006/main">
+              <a:ext uri="{FF2B5EF4-FFF2-40B4-BE49-F238E27FC236}">
+                <a16:creationId xmlns:a16="http://schemas.microsoft.com/office/drawing/2014/main" id="{1F19BA27-5AAC-4FCC-9545-2D952EF7352B}"/>
               </a:ext>
             </a:extLst>
           </p:cNvPr>
@@ -4931,10 +4988,10 @@
       </p:sp>
       <p:sp>
         <p:nvSpPr>
-          <p:cNvPr id="11" name="c3-text-128">
-            <a:extLst xmlns:a="http://schemas.openxmlformats.org/drawingml/2006/main">
-              <a:ext uri="{FF2B5EF4-FFF2-40B4-BE49-F238E27FC236}">
-                <a16:creationId xmlns:a16="http://schemas.microsoft.com/office/drawing/2014/main" id="{6F4439A3-5DF6-4DDE-B176-79359BA0E9D5}"/>
+          <p:cNvPr id="11" name="c3-text-129">
+            <a:extLst xmlns:a="http://schemas.openxmlformats.org/drawingml/2006/main">
+              <a:ext uri="{FF2B5EF4-FFF2-40B4-BE49-F238E27FC236}">
+                <a16:creationId xmlns:a16="http://schemas.microsoft.com/office/drawing/2014/main" id="{C978CE99-0699-45E2-848C-F95DB067BDD4}"/>
               </a:ext>
             </a:extLst>
           </p:cNvPr>
@@ -5034,10 +5091,10 @@
       </p:sp>
       <p:sp>
         <p:nvSpPr>
-          <p:cNvPr id="12" name="c3-shape-129">
-            <a:extLst xmlns:a="http://schemas.openxmlformats.org/drawingml/2006/main">
-              <a:ext uri="{FF2B5EF4-FFF2-40B4-BE49-F238E27FC236}">
-                <a16:creationId xmlns:a16="http://schemas.microsoft.com/office/drawing/2014/main" id="{76B07B87-FA49-4C6D-B40B-E56B5661D9FE}"/>
+          <p:cNvPr id="12" name="c3-shape-130">
+            <a:extLst xmlns:a="http://schemas.openxmlformats.org/drawingml/2006/main">
+              <a:ext uri="{FF2B5EF4-FFF2-40B4-BE49-F238E27FC236}">
+                <a16:creationId xmlns:a16="http://schemas.microsoft.com/office/drawing/2014/main" id="{E75389FD-753B-47FC-9134-C9E8AAEC2A1A}"/>
               </a:ext>
             </a:extLst>
           </p:cNvPr>
@@ -5068,10 +5125,10 @@
       </p:sp>
       <p:sp>
         <p:nvSpPr>
-          <p:cNvPr id="13" name="c3-text-130">
-            <a:extLst xmlns:a="http://schemas.openxmlformats.org/drawingml/2006/main">
-              <a:ext uri="{FF2B5EF4-FFF2-40B4-BE49-F238E27FC236}">
-                <a16:creationId xmlns:a16="http://schemas.microsoft.com/office/drawing/2014/main" id="{DADFE1BA-858C-4CB9-9D0D-9C4138BD9ABC}"/>
+          <p:cNvPr id="13" name="c3-text-131">
+            <a:extLst xmlns:a="http://schemas.openxmlformats.org/drawingml/2006/main">
+              <a:ext uri="{FF2B5EF4-FFF2-40B4-BE49-F238E27FC236}">
+                <a16:creationId xmlns:a16="http://schemas.microsoft.com/office/drawing/2014/main" id="{A2846D2D-E5AD-46AD-AB6B-9216472D44B9}"/>
               </a:ext>
             </a:extLst>
           </p:cNvPr>
@@ -5125,10 +5182,10 @@
       </p:sp>
       <p:sp>
         <p:nvSpPr>
-          <p:cNvPr id="14" name="c3-text-338">
-            <a:extLst xmlns:a="http://schemas.openxmlformats.org/drawingml/2006/main">
-              <a:ext uri="{FF2B5EF4-FFF2-40B4-BE49-F238E27FC236}">
-                <a16:creationId xmlns:a16="http://schemas.microsoft.com/office/drawing/2014/main" id="{65E71853-E254-4211-92EA-5D15E488EE4A}"/>
+          <p:cNvPr id="14" name="c3-text-339">
+            <a:extLst xmlns:a="http://schemas.openxmlformats.org/drawingml/2006/main">
+              <a:ext uri="{FF2B5EF4-FFF2-40B4-BE49-F238E27FC236}">
+                <a16:creationId xmlns:a16="http://schemas.microsoft.com/office/drawing/2014/main" id="{C672AA5A-5430-42A4-8BAA-6CB8D0DADAE2}"/>
               </a:ext>
             </a:extLst>
           </p:cNvPr>
@@ -5183,7 +5240,7 @@
     </p:spTree>
     <p:extLst>
       <p:ext uri="{BB962C8B-B14F-4D97-AF65-F5344CB8AC3E}">
-        <p14:creationId xmlns:p14="http://schemas.microsoft.com/office/powerpoint/2010/main" val="872418530"/>
+        <p14:creationId xmlns:p14="http://schemas.microsoft.com/office/powerpoint/2010/main" val="1274021273"/>
       </p:ext>
     </p:extLst>
   </p:cSld>
@@ -5211,10 +5268,10 @@
       </p:grpSpPr>
       <p:sp>
         <p:nvSpPr>
-          <p:cNvPr id="19" name="c3-text-131">
-            <a:extLst xmlns:a="http://schemas.openxmlformats.org/drawingml/2006/main">
-              <a:ext uri="{FF2B5EF4-FFF2-40B4-BE49-F238E27FC236}">
-                <a16:creationId xmlns:a16="http://schemas.microsoft.com/office/drawing/2014/main" id="{B11E43E7-25EA-4186-9A08-18001DF69AC3}"/>
+          <p:cNvPr id="19" name="c3-text-132">
+            <a:extLst xmlns:a="http://schemas.openxmlformats.org/drawingml/2006/main">
+              <a:ext uri="{FF2B5EF4-FFF2-40B4-BE49-F238E27FC236}">
+                <a16:creationId xmlns:a16="http://schemas.microsoft.com/office/drawing/2014/main" id="{3F4F1BA0-8A95-4AA9-9282-092E4FB7939D}"/>
               </a:ext>
             </a:extLst>
           </p:cNvPr>
@@ -5268,10 +5325,10 @@
       </p:sp>
       <p:sp>
         <p:nvSpPr>
-          <p:cNvPr id="2" name="c3-text-132">
-            <a:extLst xmlns:a="http://schemas.openxmlformats.org/drawingml/2006/main">
-              <a:ext uri="{FF2B5EF4-FFF2-40B4-BE49-F238E27FC236}">
-                <a16:creationId xmlns:a16="http://schemas.microsoft.com/office/drawing/2014/main" id="{5072701E-5DE8-4A6F-890D-94B1BC65DD60}"/>
+          <p:cNvPr id="2" name="c3-text-133">
+            <a:extLst xmlns:a="http://schemas.openxmlformats.org/drawingml/2006/main">
+              <a:ext uri="{FF2B5EF4-FFF2-40B4-BE49-F238E27FC236}">
+                <a16:creationId xmlns:a16="http://schemas.microsoft.com/office/drawing/2014/main" id="{D9032C41-4863-498A-B9D6-057C4B08B588}"/>
               </a:ext>
             </a:extLst>
           </p:cNvPr>
@@ -5325,10 +5382,10 @@
       </p:sp>
       <p:sp>
         <p:nvSpPr>
-          <p:cNvPr id="3" name="c3-text-133">
-            <a:extLst xmlns:a="http://schemas.openxmlformats.org/drawingml/2006/main">
-              <a:ext uri="{FF2B5EF4-FFF2-40B4-BE49-F238E27FC236}">
-                <a16:creationId xmlns:a16="http://schemas.microsoft.com/office/drawing/2014/main" id="{B18E2175-23C9-4098-BFDF-FED628B437EA}"/>
+          <p:cNvPr id="3" name="c3-text-134">
+            <a:extLst xmlns:a="http://schemas.openxmlformats.org/drawingml/2006/main">
+              <a:ext uri="{FF2B5EF4-FFF2-40B4-BE49-F238E27FC236}">
+                <a16:creationId xmlns:a16="http://schemas.microsoft.com/office/drawing/2014/main" id="{4EDD6579-9A7A-40B0-BDF1-9A7FD8CA0C0D}"/>
               </a:ext>
             </a:extLst>
           </p:cNvPr>
@@ -5382,10 +5439,10 @@
       </p:sp>
       <p:sp>
         <p:nvSpPr>
-          <p:cNvPr id="4" name="c3-shape-134">
-            <a:extLst xmlns:a="http://schemas.openxmlformats.org/drawingml/2006/main">
-              <a:ext uri="{FF2B5EF4-FFF2-40B4-BE49-F238E27FC236}">
-                <a16:creationId xmlns:a16="http://schemas.microsoft.com/office/drawing/2014/main" id="{4AF0AD4A-143C-47FD-932E-08A71610075B}"/>
+          <p:cNvPr id="4" name="c3-shape-135">
+            <a:extLst xmlns:a="http://schemas.openxmlformats.org/drawingml/2006/main">
+              <a:ext uri="{FF2B5EF4-FFF2-40B4-BE49-F238E27FC236}">
+                <a16:creationId xmlns:a16="http://schemas.microsoft.com/office/drawing/2014/main" id="{D4642FDA-8FED-4F20-9AB7-C1854C729040}"/>
               </a:ext>
             </a:extLst>
           </p:cNvPr>
@@ -5416,10 +5473,10 @@
       </p:sp>
       <p:sp>
         <p:nvSpPr>
-          <p:cNvPr id="5" name="c3-shape-135">
-            <a:extLst xmlns:a="http://schemas.openxmlformats.org/drawingml/2006/main">
-              <a:ext uri="{FF2B5EF4-FFF2-40B4-BE49-F238E27FC236}">
-                <a16:creationId xmlns:a16="http://schemas.microsoft.com/office/drawing/2014/main" id="{B220E505-7FD6-45C1-9438-CBAE32B234F7}"/>
+          <p:cNvPr id="5" name="c3-shape-136">
+            <a:extLst xmlns:a="http://schemas.openxmlformats.org/drawingml/2006/main">
+              <a:ext uri="{FF2B5EF4-FFF2-40B4-BE49-F238E27FC236}">
+                <a16:creationId xmlns:a16="http://schemas.microsoft.com/office/drawing/2014/main" id="{87615552-A884-4AB6-BEE0-8C87D61AAE98}"/>
               </a:ext>
             </a:extLst>
           </p:cNvPr>
@@ -5448,10 +5505,10 @@
       </p:sp>
       <p:sp>
         <p:nvSpPr>
-          <p:cNvPr id="6" name="c3-text-136">
-            <a:extLst xmlns:a="http://schemas.openxmlformats.org/drawingml/2006/main">
-              <a:ext uri="{FF2B5EF4-FFF2-40B4-BE49-F238E27FC236}">
-                <a16:creationId xmlns:a16="http://schemas.microsoft.com/office/drawing/2014/main" id="{0BD2EC9E-B705-4F15-8546-B04F77AF3116}"/>
+          <p:cNvPr id="6" name="c3-text-137">
+            <a:extLst xmlns:a="http://schemas.openxmlformats.org/drawingml/2006/main">
+              <a:ext uri="{FF2B5EF4-FFF2-40B4-BE49-F238E27FC236}">
+                <a16:creationId xmlns:a16="http://schemas.microsoft.com/office/drawing/2014/main" id="{2C9891F2-2FC3-4883-B712-096A1C13E768}"/>
               </a:ext>
             </a:extLst>
           </p:cNvPr>
@@ -5505,10 +5562,10 @@
       </p:sp>
       <p:sp>
         <p:nvSpPr>
-          <p:cNvPr id="7" name="c3-text-137">
-            <a:extLst xmlns:a="http://schemas.openxmlformats.org/drawingml/2006/main">
-              <a:ext uri="{FF2B5EF4-FFF2-40B4-BE49-F238E27FC236}">
-                <a16:creationId xmlns:a16="http://schemas.microsoft.com/office/drawing/2014/main" id="{5AFD07EA-3AB0-4C39-87E6-3B08480FCFF3}"/>
+          <p:cNvPr id="7" name="c3-text-138">
+            <a:extLst xmlns:a="http://schemas.openxmlformats.org/drawingml/2006/main">
+              <a:ext uri="{FF2B5EF4-FFF2-40B4-BE49-F238E27FC236}">
+                <a16:creationId xmlns:a16="http://schemas.microsoft.com/office/drawing/2014/main" id="{98CDB295-98CD-45FC-A3EC-90E5A1A4D2DF}"/>
               </a:ext>
             </a:extLst>
           </p:cNvPr>
@@ -5562,10 +5619,10 @@
       </p:sp>
       <p:sp>
         <p:nvSpPr>
-          <p:cNvPr id="8" name="c3-shape-138">
-            <a:extLst xmlns:a="http://schemas.openxmlformats.org/drawingml/2006/main">
-              <a:ext uri="{FF2B5EF4-FFF2-40B4-BE49-F238E27FC236}">
-                <a16:creationId xmlns:a16="http://schemas.microsoft.com/office/drawing/2014/main" id="{D7BC42D9-983F-40CF-BF4F-DA94EACE1C20}"/>
+          <p:cNvPr id="8" name="c3-shape-139">
+            <a:extLst xmlns:a="http://schemas.openxmlformats.org/drawingml/2006/main">
+              <a:ext uri="{FF2B5EF4-FFF2-40B4-BE49-F238E27FC236}">
+                <a16:creationId xmlns:a16="http://schemas.microsoft.com/office/drawing/2014/main" id="{E2B668AC-937B-44FA-BF0D-BF0C4E81EF8C}"/>
               </a:ext>
             </a:extLst>
           </p:cNvPr>
@@ -5596,10 +5653,10 @@
       </p:sp>
       <p:sp>
         <p:nvSpPr>
-          <p:cNvPr id="9" name="c3-shape-139">
-            <a:extLst xmlns:a="http://schemas.openxmlformats.org/drawingml/2006/main">
-              <a:ext uri="{FF2B5EF4-FFF2-40B4-BE49-F238E27FC236}">
-                <a16:creationId xmlns:a16="http://schemas.microsoft.com/office/drawing/2014/main" id="{C3829F33-1D0A-4AB7-9E6E-9BBBF01CC44A}"/>
+          <p:cNvPr id="9" name="c3-shape-140">
+            <a:extLst xmlns:a="http://schemas.openxmlformats.org/drawingml/2006/main">
+              <a:ext uri="{FF2B5EF4-FFF2-40B4-BE49-F238E27FC236}">
+                <a16:creationId xmlns:a16="http://schemas.microsoft.com/office/drawing/2014/main" id="{37ADD6E4-9EE6-4F3D-A650-3E7FDEC078D6}"/>
               </a:ext>
             </a:extLst>
           </p:cNvPr>
@@ -5628,10 +5685,10 @@
       </p:sp>
       <p:sp>
         <p:nvSpPr>
-          <p:cNvPr id="10" name="c3-text-140">
-            <a:extLst xmlns:a="http://schemas.openxmlformats.org/drawingml/2006/main">
-              <a:ext uri="{FF2B5EF4-FFF2-40B4-BE49-F238E27FC236}">
-                <a16:creationId xmlns:a16="http://schemas.microsoft.com/office/drawing/2014/main" id="{5932210E-8834-4C99-954C-7DAC6E9F3340}"/>
+          <p:cNvPr id="10" name="c3-text-141">
+            <a:extLst xmlns:a="http://schemas.openxmlformats.org/drawingml/2006/main">
+              <a:ext uri="{FF2B5EF4-FFF2-40B4-BE49-F238E27FC236}">
+                <a16:creationId xmlns:a16="http://schemas.microsoft.com/office/drawing/2014/main" id="{5418BF6E-FB7B-4069-80D3-8E9230B088A1}"/>
               </a:ext>
             </a:extLst>
           </p:cNvPr>
@@ -5685,10 +5742,10 @@
       </p:sp>
       <p:sp>
         <p:nvSpPr>
-          <p:cNvPr id="11" name="c3-text-141">
-            <a:extLst xmlns:a="http://schemas.openxmlformats.org/drawingml/2006/main">
-              <a:ext uri="{FF2B5EF4-FFF2-40B4-BE49-F238E27FC236}">
-                <a16:creationId xmlns:a16="http://schemas.microsoft.com/office/drawing/2014/main" id="{4DDEF941-CA4A-4306-992A-47B5CFECDCCB}"/>
+          <p:cNvPr id="11" name="c3-text-142">
+            <a:extLst xmlns:a="http://schemas.openxmlformats.org/drawingml/2006/main">
+              <a:ext uri="{FF2B5EF4-FFF2-40B4-BE49-F238E27FC236}">
+                <a16:creationId xmlns:a16="http://schemas.microsoft.com/office/drawing/2014/main" id="{C8B13F8D-8D76-4F1A-A40B-85EE91599E4D}"/>
               </a:ext>
             </a:extLst>
           </p:cNvPr>
@@ -5758,17 +5815,17 @@
                 <a:ea typeface="Calibri"/>
                 <a:cs typeface="Calibri"/>
               </a:rPr>
-              <a:t>When does the avatar forget?</a:t>
-            </a:r>
-          </a:p>
-        </p:txBody>
-      </p:sp>
-      <p:sp>
-        <p:nvSpPr>
-          <p:cNvPr id="12" name="c3-shape-142">
-            <a:extLst xmlns:a="http://schemas.openxmlformats.org/drawingml/2006/main">
-              <a:ext uri="{FF2B5EF4-FFF2-40B4-BE49-F238E27FC236}">
-                <a16:creationId xmlns:a16="http://schemas.microsoft.com/office/drawing/2014/main" id="{2B0B2018-8904-4608-881D-C4A511D5039F}"/>
+              <a:t>Which messages reach the model?</a:t>
+            </a:r>
+          </a:p>
+        </p:txBody>
+      </p:sp>
+      <p:sp>
+        <p:nvSpPr>
+          <p:cNvPr id="12" name="c3-shape-143">
+            <a:extLst xmlns:a="http://schemas.openxmlformats.org/drawingml/2006/main">
+              <a:ext uri="{FF2B5EF4-FFF2-40B4-BE49-F238E27FC236}">
+                <a16:creationId xmlns:a16="http://schemas.microsoft.com/office/drawing/2014/main" id="{0EF7C0FB-1595-4551-954C-9B7F90984588}"/>
               </a:ext>
             </a:extLst>
           </p:cNvPr>
@@ -5799,10 +5856,10 @@
       </p:sp>
       <p:sp>
         <p:nvSpPr>
-          <p:cNvPr id="13" name="c3-shape-143">
-            <a:extLst xmlns:a="http://schemas.openxmlformats.org/drawingml/2006/main">
-              <a:ext uri="{FF2B5EF4-FFF2-40B4-BE49-F238E27FC236}">
-                <a16:creationId xmlns:a16="http://schemas.microsoft.com/office/drawing/2014/main" id="{1412FD49-9803-46F4-BCA4-E570CB8298DA}"/>
+          <p:cNvPr id="13" name="c3-shape-144">
+            <a:extLst xmlns:a="http://schemas.openxmlformats.org/drawingml/2006/main">
+              <a:ext uri="{FF2B5EF4-FFF2-40B4-BE49-F238E27FC236}">
+                <a16:creationId xmlns:a16="http://schemas.microsoft.com/office/drawing/2014/main" id="{098B0763-62DF-48FB-B4BC-02D39313F208}"/>
               </a:ext>
             </a:extLst>
           </p:cNvPr>
@@ -5831,10 +5888,10 @@
       </p:sp>
       <p:sp>
         <p:nvSpPr>
-          <p:cNvPr id="14" name="c3-text-144">
-            <a:extLst xmlns:a="http://schemas.openxmlformats.org/drawingml/2006/main">
-              <a:ext uri="{FF2B5EF4-FFF2-40B4-BE49-F238E27FC236}">
-                <a16:creationId xmlns:a16="http://schemas.microsoft.com/office/drawing/2014/main" id="{75B4894E-0D0F-46B7-926E-5E55E9141730}"/>
+          <p:cNvPr id="14" name="c3-text-145">
+            <a:extLst xmlns:a="http://schemas.openxmlformats.org/drawingml/2006/main">
+              <a:ext uri="{FF2B5EF4-FFF2-40B4-BE49-F238E27FC236}">
+                <a16:creationId xmlns:a16="http://schemas.microsoft.com/office/drawing/2014/main" id="{75C2D0AC-8E58-403B-9CD7-F89893FEB611}"/>
               </a:ext>
             </a:extLst>
           </p:cNvPr>
@@ -5888,10 +5945,10 @@
       </p:sp>
       <p:sp>
         <p:nvSpPr>
-          <p:cNvPr id="15" name="c3-text-145">
-            <a:extLst xmlns:a="http://schemas.openxmlformats.org/drawingml/2006/main">
-              <a:ext uri="{FF2B5EF4-FFF2-40B4-BE49-F238E27FC236}">
-                <a16:creationId xmlns:a16="http://schemas.microsoft.com/office/drawing/2014/main" id="{F5F841B1-C586-4A77-9232-375E143503B9}"/>
+          <p:cNvPr id="15" name="c3-text-146">
+            <a:extLst xmlns:a="http://schemas.openxmlformats.org/drawingml/2006/main">
+              <a:ext uri="{FF2B5EF4-FFF2-40B4-BE49-F238E27FC236}">
+                <a16:creationId xmlns:a16="http://schemas.microsoft.com/office/drawing/2014/main" id="{4ABA2E2F-5CE6-4092-8B75-06BF018BA1CA}"/>
               </a:ext>
             </a:extLst>
           </p:cNvPr>
@@ -5945,10 +6002,10 @@
       </p:sp>
       <p:sp>
         <p:nvSpPr>
-          <p:cNvPr id="16" name="c3-shape-146">
-            <a:extLst xmlns:a="http://schemas.openxmlformats.org/drawingml/2006/main">
-              <a:ext uri="{FF2B5EF4-FFF2-40B4-BE49-F238E27FC236}">
-                <a16:creationId xmlns:a16="http://schemas.microsoft.com/office/drawing/2014/main" id="{6EFEB506-70BB-4E87-804B-55C7CDC2E951}"/>
+          <p:cNvPr id="16" name="c3-shape-147">
+            <a:extLst xmlns:a="http://schemas.openxmlformats.org/drawingml/2006/main">
+              <a:ext uri="{FF2B5EF4-FFF2-40B4-BE49-F238E27FC236}">
+                <a16:creationId xmlns:a16="http://schemas.microsoft.com/office/drawing/2014/main" id="{D6B0B302-C67D-4225-AC59-B31F93D7644E}"/>
               </a:ext>
             </a:extLst>
           </p:cNvPr>
@@ -5979,10 +6036,10 @@
       </p:sp>
       <p:sp>
         <p:nvSpPr>
-          <p:cNvPr id="17" name="c3-text-147">
-            <a:extLst xmlns:a="http://schemas.openxmlformats.org/drawingml/2006/main">
-              <a:ext uri="{FF2B5EF4-FFF2-40B4-BE49-F238E27FC236}">
-                <a16:creationId xmlns:a16="http://schemas.microsoft.com/office/drawing/2014/main" id="{088AB6AB-5DD7-4483-AAC8-AE86549CB9FA}"/>
+          <p:cNvPr id="17" name="c3-text-148">
+            <a:extLst xmlns:a="http://schemas.openxmlformats.org/drawingml/2006/main">
+              <a:ext uri="{FF2B5EF4-FFF2-40B4-BE49-F238E27FC236}">
+                <a16:creationId xmlns:a16="http://schemas.microsoft.com/office/drawing/2014/main" id="{7C527530-834B-4511-8A18-3BA04840BC33}"/>
               </a:ext>
             </a:extLst>
           </p:cNvPr>
@@ -6036,10 +6093,10 @@
       </p:sp>
       <p:sp>
         <p:nvSpPr>
-          <p:cNvPr id="18" name="c3-text-339">
-            <a:extLst xmlns:a="http://schemas.openxmlformats.org/drawingml/2006/main">
-              <a:ext uri="{FF2B5EF4-FFF2-40B4-BE49-F238E27FC236}">
-                <a16:creationId xmlns:a16="http://schemas.microsoft.com/office/drawing/2014/main" id="{67FB0FE2-0BB6-4926-A459-835E73CB98FE}"/>
+          <p:cNvPr id="18" name="c3-text-340">
+            <a:extLst xmlns:a="http://schemas.openxmlformats.org/drawingml/2006/main">
+              <a:ext uri="{FF2B5EF4-FFF2-40B4-BE49-F238E27FC236}">
+                <a16:creationId xmlns:a16="http://schemas.microsoft.com/office/drawing/2014/main" id="{4B7241BC-F6C5-4038-AC0F-D79874B2D94B}"/>
               </a:ext>
             </a:extLst>
           </p:cNvPr>
@@ -6094,7 +6151,7 @@
     </p:spTree>
     <p:extLst>
       <p:ext uri="{BB962C8B-B14F-4D97-AF65-F5344CB8AC3E}">
-        <p14:creationId xmlns:p14="http://schemas.microsoft.com/office/powerpoint/2010/main" val="1358239144"/>
+        <p14:creationId xmlns:p14="http://schemas.microsoft.com/office/powerpoint/2010/main" val="728876253"/>
       </p:ext>
     </p:extLst>
   </p:cSld>
@@ -6122,10 +6179,10 @@
       </p:grpSpPr>
       <p:sp>
         <p:nvSpPr>
-          <p:cNvPr id="19" name="c3-text-148">
-            <a:extLst xmlns:a="http://schemas.openxmlformats.org/drawingml/2006/main">
-              <a:ext uri="{FF2B5EF4-FFF2-40B4-BE49-F238E27FC236}">
-                <a16:creationId xmlns:a16="http://schemas.microsoft.com/office/drawing/2014/main" id="{DEB25771-BA54-4905-AF88-371101366AD5}"/>
+          <p:cNvPr id="19" name="c3-text-149">
+            <a:extLst xmlns:a="http://schemas.openxmlformats.org/drawingml/2006/main">
+              <a:ext uri="{FF2B5EF4-FFF2-40B4-BE49-F238E27FC236}">
+                <a16:creationId xmlns:a16="http://schemas.microsoft.com/office/drawing/2014/main" id="{B9FFBD45-FB9D-48A5-AB3C-964891DCA7B3}"/>
               </a:ext>
             </a:extLst>
           </p:cNvPr>
@@ -6179,10 +6236,10 @@
       </p:sp>
       <p:sp>
         <p:nvSpPr>
-          <p:cNvPr id="2" name="c3-text-149">
-            <a:extLst xmlns:a="http://schemas.openxmlformats.org/drawingml/2006/main">
-              <a:ext uri="{FF2B5EF4-FFF2-40B4-BE49-F238E27FC236}">
-                <a16:creationId xmlns:a16="http://schemas.microsoft.com/office/drawing/2014/main" id="{CBF37588-E67D-4CD0-B359-B96FA9FF9321}"/>
+          <p:cNvPr id="2" name="c3-text-150">
+            <a:extLst xmlns:a="http://schemas.openxmlformats.org/drawingml/2006/main">
+              <a:ext uri="{FF2B5EF4-FFF2-40B4-BE49-F238E27FC236}">
+                <a16:creationId xmlns:a16="http://schemas.microsoft.com/office/drawing/2014/main" id="{2E5DDEA1-DBF2-433B-B9F8-8847311C6095}"/>
               </a:ext>
             </a:extLst>
           </p:cNvPr>
@@ -6236,10 +6293,10 @@
       </p:sp>
       <p:sp>
         <p:nvSpPr>
-          <p:cNvPr id="3" name="c3-text-150">
-            <a:extLst xmlns:a="http://schemas.openxmlformats.org/drawingml/2006/main">
-              <a:ext uri="{FF2B5EF4-FFF2-40B4-BE49-F238E27FC236}">
-                <a16:creationId xmlns:a16="http://schemas.microsoft.com/office/drawing/2014/main" id="{E35352EB-3B2B-4AB7-84D4-AA7428356DD1}"/>
+          <p:cNvPr id="3" name="c3-text-151">
+            <a:extLst xmlns:a="http://schemas.openxmlformats.org/drawingml/2006/main">
+              <a:ext uri="{FF2B5EF4-FFF2-40B4-BE49-F238E27FC236}">
+                <a16:creationId xmlns:a16="http://schemas.microsoft.com/office/drawing/2014/main" id="{CF2C4F9F-75A8-4F9A-AF66-80A53C9DA224}"/>
               </a:ext>
             </a:extLst>
           </p:cNvPr>
@@ -6293,10 +6350,10 @@
       </p:sp>
       <p:sp>
         <p:nvSpPr>
-          <p:cNvPr id="4" name="c3-shape-151">
-            <a:extLst xmlns:a="http://schemas.openxmlformats.org/drawingml/2006/main">
-              <a:ext uri="{FF2B5EF4-FFF2-40B4-BE49-F238E27FC236}">
-                <a16:creationId xmlns:a16="http://schemas.microsoft.com/office/drawing/2014/main" id="{1E36279A-8E95-45A3-BDB4-481C6A5D263A}"/>
+          <p:cNvPr id="4" name="c3-shape-152">
+            <a:extLst xmlns:a="http://schemas.openxmlformats.org/drawingml/2006/main">
+              <a:ext uri="{FF2B5EF4-FFF2-40B4-BE49-F238E27FC236}">
+                <a16:creationId xmlns:a16="http://schemas.microsoft.com/office/drawing/2014/main" id="{4C1ACF9A-F5A0-43E2-A478-219ED2F4721D}"/>
               </a:ext>
             </a:extLst>
           </p:cNvPr>
@@ -6327,10 +6384,10 @@
       </p:sp>
       <p:sp>
         <p:nvSpPr>
-          <p:cNvPr id="5" name="c3-shape-152">
-            <a:extLst xmlns:a="http://schemas.openxmlformats.org/drawingml/2006/main">
-              <a:ext uri="{FF2B5EF4-FFF2-40B4-BE49-F238E27FC236}">
-                <a16:creationId xmlns:a16="http://schemas.microsoft.com/office/drawing/2014/main" id="{690F6C4E-51FA-45D9-B5DE-4BE323B9E520}"/>
+          <p:cNvPr id="5" name="c3-shape-153">
+            <a:extLst xmlns:a="http://schemas.openxmlformats.org/drawingml/2006/main">
+              <a:ext uri="{FF2B5EF4-FFF2-40B4-BE49-F238E27FC236}">
+                <a16:creationId xmlns:a16="http://schemas.microsoft.com/office/drawing/2014/main" id="{7CC47BA6-429B-446B-ACED-2926FE5FF298}"/>
               </a:ext>
             </a:extLst>
           </p:cNvPr>
@@ -6359,10 +6416,10 @@
       </p:sp>
       <p:sp>
         <p:nvSpPr>
-          <p:cNvPr id="6" name="c3-text-153">
-            <a:extLst xmlns:a="http://schemas.openxmlformats.org/drawingml/2006/main">
-              <a:ext uri="{FF2B5EF4-FFF2-40B4-BE49-F238E27FC236}">
-                <a16:creationId xmlns:a16="http://schemas.microsoft.com/office/drawing/2014/main" id="{14AD5B1C-B568-47A4-8947-7E718B609243}"/>
+          <p:cNvPr id="6" name="c3-text-154">
+            <a:extLst xmlns:a="http://schemas.openxmlformats.org/drawingml/2006/main">
+              <a:ext uri="{FF2B5EF4-FFF2-40B4-BE49-F238E27FC236}">
+                <a16:creationId xmlns:a16="http://schemas.microsoft.com/office/drawing/2014/main" id="{8C0FAB7E-A953-413C-B76C-4AEED80575F0}"/>
               </a:ext>
             </a:extLst>
           </p:cNvPr>
@@ -6416,10 +6473,10 @@
       </p:sp>
       <p:sp>
         <p:nvSpPr>
-          <p:cNvPr id="7" name="c3-text-154">
-            <a:extLst xmlns:a="http://schemas.openxmlformats.org/drawingml/2006/main">
-              <a:ext uri="{FF2B5EF4-FFF2-40B4-BE49-F238E27FC236}">
-                <a16:creationId xmlns:a16="http://schemas.microsoft.com/office/drawing/2014/main" id="{EF62082D-AB45-4DA6-BDC0-D7770A5ACFD8}"/>
+          <p:cNvPr id="7" name="c3-text-155">
+            <a:extLst xmlns:a="http://schemas.openxmlformats.org/drawingml/2006/main">
+              <a:ext uri="{FF2B5EF4-FFF2-40B4-BE49-F238E27FC236}">
+                <a16:creationId xmlns:a16="http://schemas.microsoft.com/office/drawing/2014/main" id="{8409E8CA-A957-49F1-AE08-849E02DD4B4D}"/>
               </a:ext>
             </a:extLst>
           </p:cNvPr>
@@ -6473,10 +6530,10 @@
       </p:sp>
       <p:sp>
         <p:nvSpPr>
-          <p:cNvPr id="8" name="c3-shape-155">
-            <a:extLst xmlns:a="http://schemas.openxmlformats.org/drawingml/2006/main">
-              <a:ext uri="{FF2B5EF4-FFF2-40B4-BE49-F238E27FC236}">
-                <a16:creationId xmlns:a16="http://schemas.microsoft.com/office/drawing/2014/main" id="{FCC6E5C9-E49B-4C2F-A68E-0A6574303420}"/>
+          <p:cNvPr id="8" name="c3-shape-156">
+            <a:extLst xmlns:a="http://schemas.openxmlformats.org/drawingml/2006/main">
+              <a:ext uri="{FF2B5EF4-FFF2-40B4-BE49-F238E27FC236}">
+                <a16:creationId xmlns:a16="http://schemas.microsoft.com/office/drawing/2014/main" id="{1F264C72-3BE0-4795-BDC2-B621863814E3}"/>
               </a:ext>
             </a:extLst>
           </p:cNvPr>
@@ -6507,10 +6564,10 @@
       </p:sp>
       <p:sp>
         <p:nvSpPr>
-          <p:cNvPr id="9" name="c3-shape-156">
-            <a:extLst xmlns:a="http://schemas.openxmlformats.org/drawingml/2006/main">
-              <a:ext uri="{FF2B5EF4-FFF2-40B4-BE49-F238E27FC236}">
-                <a16:creationId xmlns:a16="http://schemas.microsoft.com/office/drawing/2014/main" id="{E77882FD-EF3C-4308-B4A8-DE4C7A0E0D08}"/>
+          <p:cNvPr id="9" name="c3-shape-157">
+            <a:extLst xmlns:a="http://schemas.openxmlformats.org/drawingml/2006/main">
+              <a:ext uri="{FF2B5EF4-FFF2-40B4-BE49-F238E27FC236}">
+                <a16:creationId xmlns:a16="http://schemas.microsoft.com/office/drawing/2014/main" id="{16011E0B-1149-4458-AFCA-A980FB40E6B4}"/>
               </a:ext>
             </a:extLst>
           </p:cNvPr>
@@ -6539,10 +6596,10 @@
       </p:sp>
       <p:sp>
         <p:nvSpPr>
-          <p:cNvPr id="10" name="c3-text-157">
-            <a:extLst xmlns:a="http://schemas.openxmlformats.org/drawingml/2006/main">
-              <a:ext uri="{FF2B5EF4-FFF2-40B4-BE49-F238E27FC236}">
-                <a16:creationId xmlns:a16="http://schemas.microsoft.com/office/drawing/2014/main" id="{7B5ECE17-91B7-497F-85FD-864E2D7179EA}"/>
+          <p:cNvPr id="10" name="c3-text-158">
+            <a:extLst xmlns:a="http://schemas.openxmlformats.org/drawingml/2006/main">
+              <a:ext uri="{FF2B5EF4-FFF2-40B4-BE49-F238E27FC236}">
+                <a16:creationId xmlns:a16="http://schemas.microsoft.com/office/drawing/2014/main" id="{27D0B0DE-59F3-4DD8-BC45-12CA7D1DAA67}"/>
               </a:ext>
             </a:extLst>
           </p:cNvPr>
@@ -6596,10 +6653,10 @@
       </p:sp>
       <p:sp>
         <p:nvSpPr>
-          <p:cNvPr id="11" name="c3-text-158">
-            <a:extLst xmlns:a="http://schemas.openxmlformats.org/drawingml/2006/main">
-              <a:ext uri="{FF2B5EF4-FFF2-40B4-BE49-F238E27FC236}">
-                <a16:creationId xmlns:a16="http://schemas.microsoft.com/office/drawing/2014/main" id="{63910BE3-6246-45A8-9910-B6F63F60ADE6}"/>
+          <p:cNvPr id="11" name="c3-text-159">
+            <a:extLst xmlns:a="http://schemas.openxmlformats.org/drawingml/2006/main">
+              <a:ext uri="{FF2B5EF4-FFF2-40B4-BE49-F238E27FC236}">
+                <a16:creationId xmlns:a16="http://schemas.microsoft.com/office/drawing/2014/main" id="{39191DBC-3D2A-4F33-8678-4C729A606A54}"/>
               </a:ext>
             </a:extLst>
           </p:cNvPr>
@@ -6653,10 +6710,10 @@
       </p:sp>
       <p:sp>
         <p:nvSpPr>
-          <p:cNvPr id="12" name="c3-shape-159">
-            <a:extLst xmlns:a="http://schemas.openxmlformats.org/drawingml/2006/main">
-              <a:ext uri="{FF2B5EF4-FFF2-40B4-BE49-F238E27FC236}">
-                <a16:creationId xmlns:a16="http://schemas.microsoft.com/office/drawing/2014/main" id="{EC0905EE-FC58-4A4E-8133-C55755C2AC88}"/>
+          <p:cNvPr id="12" name="c3-shape-160">
+            <a:extLst xmlns:a="http://schemas.openxmlformats.org/drawingml/2006/main">
+              <a:ext uri="{FF2B5EF4-FFF2-40B4-BE49-F238E27FC236}">
+                <a16:creationId xmlns:a16="http://schemas.microsoft.com/office/drawing/2014/main" id="{830C097E-CF3E-43DE-8803-CCFB6833A6C3}"/>
               </a:ext>
             </a:extLst>
           </p:cNvPr>
@@ -6687,10 +6744,10 @@
       </p:sp>
       <p:sp>
         <p:nvSpPr>
-          <p:cNvPr id="13" name="c3-shape-160">
-            <a:extLst xmlns:a="http://schemas.openxmlformats.org/drawingml/2006/main">
-              <a:ext uri="{FF2B5EF4-FFF2-40B4-BE49-F238E27FC236}">
-                <a16:creationId xmlns:a16="http://schemas.microsoft.com/office/drawing/2014/main" id="{7B61E350-6477-4933-AE36-0688E6866E4D}"/>
+          <p:cNvPr id="13" name="c3-shape-161">
+            <a:extLst xmlns:a="http://schemas.openxmlformats.org/drawingml/2006/main">
+              <a:ext uri="{FF2B5EF4-FFF2-40B4-BE49-F238E27FC236}">
+                <a16:creationId xmlns:a16="http://schemas.microsoft.com/office/drawing/2014/main" id="{A1605D17-5509-46A1-92E3-A315E76F25F2}"/>
               </a:ext>
             </a:extLst>
           </p:cNvPr>
@@ -6719,10 +6776,10 @@
       </p:sp>
       <p:sp>
         <p:nvSpPr>
-          <p:cNvPr id="14" name="c3-text-161">
-            <a:extLst xmlns:a="http://schemas.openxmlformats.org/drawingml/2006/main">
-              <a:ext uri="{FF2B5EF4-FFF2-40B4-BE49-F238E27FC236}">
-                <a16:creationId xmlns:a16="http://schemas.microsoft.com/office/drawing/2014/main" id="{F6D0ACCF-DA6A-4791-B6F2-320315EA4DFC}"/>
+          <p:cNvPr id="14" name="c3-text-162">
+            <a:extLst xmlns:a="http://schemas.openxmlformats.org/drawingml/2006/main">
+              <a:ext uri="{FF2B5EF4-FFF2-40B4-BE49-F238E27FC236}">
+                <a16:creationId xmlns:a16="http://schemas.microsoft.com/office/drawing/2014/main" id="{F8C765B7-8A40-4A0A-BC07-75D996F6EE41}"/>
               </a:ext>
             </a:extLst>
           </p:cNvPr>
@@ -6776,10 +6833,10 @@
       </p:sp>
       <p:sp>
         <p:nvSpPr>
-          <p:cNvPr id="15" name="c3-text-162">
-            <a:extLst xmlns:a="http://schemas.openxmlformats.org/drawingml/2006/main">
-              <a:ext uri="{FF2B5EF4-FFF2-40B4-BE49-F238E27FC236}">
-                <a16:creationId xmlns:a16="http://schemas.microsoft.com/office/drawing/2014/main" id="{C1C0DBA6-17FC-4034-B8A2-F8E4465CA5A4}"/>
+          <p:cNvPr id="15" name="c3-text-163">
+            <a:extLst xmlns:a="http://schemas.openxmlformats.org/drawingml/2006/main">
+              <a:ext uri="{FF2B5EF4-FFF2-40B4-BE49-F238E27FC236}">
+                <a16:creationId xmlns:a16="http://schemas.microsoft.com/office/drawing/2014/main" id="{ED54D16F-031C-41C3-9FC8-10866EDCDC80}"/>
               </a:ext>
             </a:extLst>
           </p:cNvPr>
@@ -6833,10 +6890,10 @@
       </p:sp>
       <p:sp>
         <p:nvSpPr>
-          <p:cNvPr id="16" name="c3-shape-163">
-            <a:extLst xmlns:a="http://schemas.openxmlformats.org/drawingml/2006/main">
-              <a:ext uri="{FF2B5EF4-FFF2-40B4-BE49-F238E27FC236}">
-                <a16:creationId xmlns:a16="http://schemas.microsoft.com/office/drawing/2014/main" id="{13FCCCF0-88D3-4991-8CF9-A65F59907FE1}"/>
+          <p:cNvPr id="16" name="c3-shape-164">
+            <a:extLst xmlns:a="http://schemas.openxmlformats.org/drawingml/2006/main">
+              <a:ext uri="{FF2B5EF4-FFF2-40B4-BE49-F238E27FC236}">
+                <a16:creationId xmlns:a16="http://schemas.microsoft.com/office/drawing/2014/main" id="{F3061405-1AED-4ADC-896E-E7D20ABA800C}"/>
               </a:ext>
             </a:extLst>
           </p:cNvPr>
@@ -6867,10 +6924,10 @@
       </p:sp>
       <p:sp>
         <p:nvSpPr>
-          <p:cNvPr id="17" name="c3-text-164">
-            <a:extLst xmlns:a="http://schemas.openxmlformats.org/drawingml/2006/main">
-              <a:ext uri="{FF2B5EF4-FFF2-40B4-BE49-F238E27FC236}">
-                <a16:creationId xmlns:a16="http://schemas.microsoft.com/office/drawing/2014/main" id="{AD0087E8-71B5-4D09-AF8B-E77E31E0795A}"/>
+          <p:cNvPr id="17" name="c3-text-165">
+            <a:extLst xmlns:a="http://schemas.openxmlformats.org/drawingml/2006/main">
+              <a:ext uri="{FF2B5EF4-FFF2-40B4-BE49-F238E27FC236}">
+                <a16:creationId xmlns:a16="http://schemas.microsoft.com/office/drawing/2014/main" id="{7D8C7242-90C9-445A-B939-88F21E3ABED3}"/>
               </a:ext>
             </a:extLst>
           </p:cNvPr>
@@ -6924,10 +6981,10 @@
       </p:sp>
       <p:sp>
         <p:nvSpPr>
-          <p:cNvPr id="18" name="c3-text-340">
-            <a:extLst xmlns:a="http://schemas.openxmlformats.org/drawingml/2006/main">
-              <a:ext uri="{FF2B5EF4-FFF2-40B4-BE49-F238E27FC236}">
-                <a16:creationId xmlns:a16="http://schemas.microsoft.com/office/drawing/2014/main" id="{AA2D8878-CB3D-404D-AEBF-6290ABB07D27}"/>
+          <p:cNvPr id="18" name="c3-text-341">
+            <a:extLst xmlns:a="http://schemas.openxmlformats.org/drawingml/2006/main">
+              <a:ext uri="{FF2B5EF4-FFF2-40B4-BE49-F238E27FC236}">
+                <a16:creationId xmlns:a16="http://schemas.microsoft.com/office/drawing/2014/main" id="{754220AD-AEC8-46B2-9D15-47B1479F1888}"/>
               </a:ext>
             </a:extLst>
           </p:cNvPr>
@@ -6982,7 +7039,7 @@
     </p:spTree>
     <p:extLst>
       <p:ext uri="{BB962C8B-B14F-4D97-AF65-F5344CB8AC3E}">
-        <p14:creationId xmlns:p14="http://schemas.microsoft.com/office/powerpoint/2010/main" val="523308279"/>
+        <p14:creationId xmlns:p14="http://schemas.microsoft.com/office/powerpoint/2010/main" val="839954596"/>
       </p:ext>
     </p:extLst>
   </p:cSld>
@@ -7010,10 +7067,10 @@
       </p:grpSpPr>
       <p:sp>
         <p:nvSpPr>
-          <p:cNvPr id="8" name="c3-text-165">
-            <a:extLst xmlns:a="http://schemas.openxmlformats.org/drawingml/2006/main">
-              <a:ext uri="{FF2B5EF4-FFF2-40B4-BE49-F238E27FC236}">
-                <a16:creationId xmlns:a16="http://schemas.microsoft.com/office/drawing/2014/main" id="{55CA7948-369C-4EDD-925C-764ABAB50DF3}"/>
+          <p:cNvPr id="8" name="c3-text-166">
+            <a:extLst xmlns:a="http://schemas.openxmlformats.org/drawingml/2006/main">
+              <a:ext uri="{FF2B5EF4-FFF2-40B4-BE49-F238E27FC236}">
+                <a16:creationId xmlns:a16="http://schemas.microsoft.com/office/drawing/2014/main" id="{2622F983-13C1-4924-AE73-4F60F0DE4E06}"/>
               </a:ext>
             </a:extLst>
           </p:cNvPr>
@@ -7067,10 +7124,10 @@
       </p:sp>
       <p:sp>
         <p:nvSpPr>
-          <p:cNvPr id="2" name="c3-text-166">
-            <a:extLst xmlns:a="http://schemas.openxmlformats.org/drawingml/2006/main">
-              <a:ext uri="{FF2B5EF4-FFF2-40B4-BE49-F238E27FC236}">
-                <a16:creationId xmlns:a16="http://schemas.microsoft.com/office/drawing/2014/main" id="{EA0A97EC-A7D4-4098-A10B-18BE72625E49}"/>
+          <p:cNvPr id="2" name="c3-text-167">
+            <a:extLst xmlns:a="http://schemas.openxmlformats.org/drawingml/2006/main">
+              <a:ext uri="{FF2B5EF4-FFF2-40B4-BE49-F238E27FC236}">
+                <a16:creationId xmlns:a16="http://schemas.microsoft.com/office/drawing/2014/main" id="{CA0369EF-4267-44DE-8FCE-BA3161E7E60C}"/>
               </a:ext>
             </a:extLst>
           </p:cNvPr>
@@ -7124,10 +7181,10 @@
       </p:sp>
       <p:sp>
         <p:nvSpPr>
-          <p:cNvPr id="3" name="c3-text-167">
-            <a:extLst xmlns:a="http://schemas.openxmlformats.org/drawingml/2006/main">
-              <a:ext uri="{FF2B5EF4-FFF2-40B4-BE49-F238E27FC236}">
-                <a16:creationId xmlns:a16="http://schemas.microsoft.com/office/drawing/2014/main" id="{E82C4835-F037-478E-B962-1B6BB285E5AC}"/>
+          <p:cNvPr id="3" name="c3-text-168">
+            <a:extLst xmlns:a="http://schemas.openxmlformats.org/drawingml/2006/main">
+              <a:ext uri="{FF2B5EF4-FFF2-40B4-BE49-F238E27FC236}">
+                <a16:creationId xmlns:a16="http://schemas.microsoft.com/office/drawing/2014/main" id="{66C4F435-F581-42EC-89D9-8F905C4EC72D}"/>
               </a:ext>
             </a:extLst>
           </p:cNvPr>
@@ -7181,10 +7238,10 @@
       </p:sp>
       <p:sp>
         <p:nvSpPr>
-          <p:cNvPr id="4" name="c3-text-168">
-            <a:extLst xmlns:a="http://schemas.openxmlformats.org/drawingml/2006/main">
-              <a:ext uri="{FF2B5EF4-FFF2-40B4-BE49-F238E27FC236}">
-                <a16:creationId xmlns:a16="http://schemas.microsoft.com/office/drawing/2014/main" id="{8D367991-CCF2-4C13-A9C3-986DDD0D756D}"/>
+          <p:cNvPr id="4" name="c3-text-169">
+            <a:extLst xmlns:a="http://schemas.openxmlformats.org/drawingml/2006/main">
+              <a:ext uri="{FF2B5EF4-FFF2-40B4-BE49-F238E27FC236}">
+                <a16:creationId xmlns:a16="http://schemas.microsoft.com/office/drawing/2014/main" id="{0D1CA956-6F54-4C7B-A0B1-99B8DB4FFBB2}"/>
               </a:ext>
             </a:extLst>
           </p:cNvPr>
@@ -7238,10 +7295,10 @@
       </p:sp>
       <p:sp>
         <p:nvSpPr>
-          <p:cNvPr id="5" name="c3-text-169">
-            <a:extLst xmlns:a="http://schemas.openxmlformats.org/drawingml/2006/main">
-              <a:ext uri="{FF2B5EF4-FFF2-40B4-BE49-F238E27FC236}">
-                <a16:creationId xmlns:a16="http://schemas.microsoft.com/office/drawing/2014/main" id="{843273CB-568D-489F-8DA6-2502D7E3D26F}"/>
+          <p:cNvPr id="5" name="c3-text-170">
+            <a:extLst xmlns:a="http://schemas.openxmlformats.org/drawingml/2006/main">
+              <a:ext uri="{FF2B5EF4-FFF2-40B4-BE49-F238E27FC236}">
+                <a16:creationId xmlns:a16="http://schemas.microsoft.com/office/drawing/2014/main" id="{99839CF7-485D-4AFB-92E8-87D76C5DC76E}"/>
               </a:ext>
             </a:extLst>
           </p:cNvPr>
@@ -7295,10 +7352,10 @@
       </p:sp>
       <p:sp>
         <p:nvSpPr>
-          <p:cNvPr id="6" name="c3-text-170">
-            <a:extLst xmlns:a="http://schemas.openxmlformats.org/drawingml/2006/main">
-              <a:ext uri="{FF2B5EF4-FFF2-40B4-BE49-F238E27FC236}">
-                <a16:creationId xmlns:a16="http://schemas.microsoft.com/office/drawing/2014/main" id="{95835677-C1E3-43EF-8F87-585FCD0453AD}"/>
+          <p:cNvPr id="6" name="c3-text-171">
+            <a:extLst xmlns:a="http://schemas.openxmlformats.org/drawingml/2006/main">
+              <a:ext uri="{FF2B5EF4-FFF2-40B4-BE49-F238E27FC236}">
+                <a16:creationId xmlns:a16="http://schemas.microsoft.com/office/drawing/2014/main" id="{A1428A66-25E0-453D-A377-4964FE2332BC}"/>
               </a:ext>
             </a:extLst>
           </p:cNvPr>
@@ -7352,10 +7409,10 @@
       </p:sp>
       <p:sp>
         <p:nvSpPr>
-          <p:cNvPr id="7" name="c3-text-341">
-            <a:extLst xmlns:a="http://schemas.openxmlformats.org/drawingml/2006/main">
-              <a:ext uri="{FF2B5EF4-FFF2-40B4-BE49-F238E27FC236}">
-                <a16:creationId xmlns:a16="http://schemas.microsoft.com/office/drawing/2014/main" id="{F1D65AF2-3406-4D62-9926-90D0B034709E}"/>
+          <p:cNvPr id="7" name="c3-text-342">
+            <a:extLst xmlns:a="http://schemas.openxmlformats.org/drawingml/2006/main">
+              <a:ext uri="{FF2B5EF4-FFF2-40B4-BE49-F238E27FC236}">
+                <a16:creationId xmlns:a16="http://schemas.microsoft.com/office/drawing/2014/main" id="{D4B18716-4557-4BC4-AB69-CFA5DBAD2212}"/>
               </a:ext>
             </a:extLst>
           </p:cNvPr>
@@ -7410,7 +7467,7 @@
     </p:spTree>
     <p:extLst>
       <p:ext uri="{BB962C8B-B14F-4D97-AF65-F5344CB8AC3E}">
-        <p14:creationId xmlns:p14="http://schemas.microsoft.com/office/powerpoint/2010/main" val="604449495"/>
+        <p14:creationId xmlns:p14="http://schemas.microsoft.com/office/powerpoint/2010/main" val="266431276"/>
       </p:ext>
     </p:extLst>
   </p:cSld>
@@ -7438,10 +7495,10 @@
       </p:grpSpPr>
       <p:sp>
         <p:nvSpPr>
-          <p:cNvPr id="26" name="c3-text-171">
-            <a:extLst xmlns:a="http://schemas.openxmlformats.org/drawingml/2006/main">
-              <a:ext uri="{FF2B5EF4-FFF2-40B4-BE49-F238E27FC236}">
-                <a16:creationId xmlns:a16="http://schemas.microsoft.com/office/drawing/2014/main" id="{1C0025C9-B489-4DA4-ACF9-226D5E632326}"/>
+          <p:cNvPr id="26" name="c3-text-172">
+            <a:extLst xmlns:a="http://schemas.openxmlformats.org/drawingml/2006/main">
+              <a:ext uri="{FF2B5EF4-FFF2-40B4-BE49-F238E27FC236}">
+                <a16:creationId xmlns:a16="http://schemas.microsoft.com/office/drawing/2014/main" id="{2BD5F728-F33D-4A61-9757-84AA018FEF33}"/>
               </a:ext>
             </a:extLst>
           </p:cNvPr>
@@ -7495,10 +7552,10 @@
       </p:sp>
       <p:sp>
         <p:nvSpPr>
-          <p:cNvPr id="2" name="c3-text-172">
-            <a:extLst xmlns:a="http://schemas.openxmlformats.org/drawingml/2006/main">
-              <a:ext uri="{FF2B5EF4-FFF2-40B4-BE49-F238E27FC236}">
-                <a16:creationId xmlns:a16="http://schemas.microsoft.com/office/drawing/2014/main" id="{06FEEE20-03D5-475D-8BCE-ACE4E1253CAD}"/>
+          <p:cNvPr id="2" name="c3-text-173">
+            <a:extLst xmlns:a="http://schemas.openxmlformats.org/drawingml/2006/main">
+              <a:ext uri="{FF2B5EF4-FFF2-40B4-BE49-F238E27FC236}">
+                <a16:creationId xmlns:a16="http://schemas.microsoft.com/office/drawing/2014/main" id="{F64746AF-99A0-41AC-8669-652A0ABD94E9}"/>
               </a:ext>
             </a:extLst>
           </p:cNvPr>
@@ -7552,10 +7609,10 @@
       </p:sp>
       <p:sp>
         <p:nvSpPr>
-          <p:cNvPr id="3" name="c3-text-173">
-            <a:extLst xmlns:a="http://schemas.openxmlformats.org/drawingml/2006/main">
-              <a:ext uri="{FF2B5EF4-FFF2-40B4-BE49-F238E27FC236}">
-                <a16:creationId xmlns:a16="http://schemas.microsoft.com/office/drawing/2014/main" id="{D98BB5A8-EACC-4843-89BC-E006F7E88ECF}"/>
+          <p:cNvPr id="3" name="c3-text-174">
+            <a:extLst xmlns:a="http://schemas.openxmlformats.org/drawingml/2006/main">
+              <a:ext uri="{FF2B5EF4-FFF2-40B4-BE49-F238E27FC236}">
+                <a16:creationId xmlns:a16="http://schemas.microsoft.com/office/drawing/2014/main" id="{90463A3E-6D11-4105-BB43-BA66FA441E99}"/>
               </a:ext>
             </a:extLst>
           </p:cNvPr>
@@ -7609,10 +7666,10 @@
       </p:sp>
       <p:sp>
         <p:nvSpPr>
-          <p:cNvPr id="4" name="c3-shape-174">
-            <a:extLst xmlns:a="http://schemas.openxmlformats.org/drawingml/2006/main">
-              <a:ext uri="{FF2B5EF4-FFF2-40B4-BE49-F238E27FC236}">
-                <a16:creationId xmlns:a16="http://schemas.microsoft.com/office/drawing/2014/main" id="{A9D6871C-FFAF-4EB8-B613-96DFAC9F9412}"/>
+          <p:cNvPr id="4" name="c3-shape-175">
+            <a:extLst xmlns:a="http://schemas.openxmlformats.org/drawingml/2006/main">
+              <a:ext uri="{FF2B5EF4-FFF2-40B4-BE49-F238E27FC236}">
+                <a16:creationId xmlns:a16="http://schemas.microsoft.com/office/drawing/2014/main" id="{B4C2E119-49C8-4B57-A7BE-B20721EA65D3}"/>
               </a:ext>
             </a:extLst>
           </p:cNvPr>
@@ -7643,10 +7700,10 @@
       </p:sp>
       <p:sp>
         <p:nvSpPr>
-          <p:cNvPr id="5" name="c3-text-175">
-            <a:extLst xmlns:a="http://schemas.openxmlformats.org/drawingml/2006/main">
-              <a:ext uri="{FF2B5EF4-FFF2-40B4-BE49-F238E27FC236}">
-                <a16:creationId xmlns:a16="http://schemas.microsoft.com/office/drawing/2014/main" id="{798766E3-A190-4112-A491-E5C617A98561}"/>
+          <p:cNvPr id="5" name="c3-text-176">
+            <a:extLst xmlns:a="http://schemas.openxmlformats.org/drawingml/2006/main">
+              <a:ext uri="{FF2B5EF4-FFF2-40B4-BE49-F238E27FC236}">
+                <a16:creationId xmlns:a16="http://schemas.microsoft.com/office/drawing/2014/main" id="{D38C180E-BF9C-4D53-A1B7-1AA373EBF2AD}"/>
               </a:ext>
             </a:extLst>
           </p:cNvPr>
@@ -7700,10 +7757,10 @@
       </p:sp>
       <p:sp>
         <p:nvSpPr>
-          <p:cNvPr id="6" name="c3-shape-176">
-            <a:extLst xmlns:a="http://schemas.openxmlformats.org/drawingml/2006/main">
-              <a:ext uri="{FF2B5EF4-FFF2-40B4-BE49-F238E27FC236}">
-                <a16:creationId xmlns:a16="http://schemas.microsoft.com/office/drawing/2014/main" id="{A6221423-9C2B-466C-937E-98464548A19F}"/>
+          <p:cNvPr id="6" name="c3-shape-177">
+            <a:extLst xmlns:a="http://schemas.openxmlformats.org/drawingml/2006/main">
+              <a:ext uri="{FF2B5EF4-FFF2-40B4-BE49-F238E27FC236}">
+                <a16:creationId xmlns:a16="http://schemas.microsoft.com/office/drawing/2014/main" id="{3B259D69-4C13-45D3-9E54-B6BD60A687E4}"/>
               </a:ext>
             </a:extLst>
           </p:cNvPr>
@@ -7732,10 +7789,10 @@
       </p:sp>
       <p:sp>
         <p:nvSpPr>
-          <p:cNvPr id="7" name="c3-shape-177">
-            <a:extLst xmlns:a="http://schemas.openxmlformats.org/drawingml/2006/main">
-              <a:ext uri="{FF2B5EF4-FFF2-40B4-BE49-F238E27FC236}">
-                <a16:creationId xmlns:a16="http://schemas.microsoft.com/office/drawing/2014/main" id="{E23106D6-DF68-401C-89B8-E0AB7F5C6EF1}"/>
+          <p:cNvPr id="7" name="c3-shape-178">
+            <a:extLst xmlns:a="http://schemas.openxmlformats.org/drawingml/2006/main">
+              <a:ext uri="{FF2B5EF4-FFF2-40B4-BE49-F238E27FC236}">
+                <a16:creationId xmlns:a16="http://schemas.microsoft.com/office/drawing/2014/main" id="{5B70D8E9-E810-4960-ADBA-E1D4C8FB002B}"/>
               </a:ext>
             </a:extLst>
           </p:cNvPr>
@@ -7766,10 +7823,10 @@
       </p:sp>
       <p:sp>
         <p:nvSpPr>
-          <p:cNvPr id="8" name="c3-text-178">
-            <a:extLst xmlns:a="http://schemas.openxmlformats.org/drawingml/2006/main">
-              <a:ext uri="{FF2B5EF4-FFF2-40B4-BE49-F238E27FC236}">
-                <a16:creationId xmlns:a16="http://schemas.microsoft.com/office/drawing/2014/main" id="{A3890762-AC3B-46B8-8043-FD2F323883B4}"/>
+          <p:cNvPr id="8" name="c3-text-179">
+            <a:extLst xmlns:a="http://schemas.openxmlformats.org/drawingml/2006/main">
+              <a:ext uri="{FF2B5EF4-FFF2-40B4-BE49-F238E27FC236}">
+                <a16:creationId xmlns:a16="http://schemas.microsoft.com/office/drawing/2014/main" id="{4877358F-D6FF-4F63-B94D-64C969C98A20}"/>
               </a:ext>
             </a:extLst>
           </p:cNvPr>
@@ -7823,10 +7880,10 @@
       </p:sp>
       <p:sp>
         <p:nvSpPr>
-          <p:cNvPr id="9" name="c3-shape-179">
-            <a:extLst xmlns:a="http://schemas.openxmlformats.org/drawingml/2006/main">
-              <a:ext uri="{FF2B5EF4-FFF2-40B4-BE49-F238E27FC236}">
-                <a16:creationId xmlns:a16="http://schemas.microsoft.com/office/drawing/2014/main" id="{5F70CB96-86BC-40B7-A53F-41B13A4BBC6D}"/>
+          <p:cNvPr id="9" name="c3-shape-180">
+            <a:extLst xmlns:a="http://schemas.openxmlformats.org/drawingml/2006/main">
+              <a:ext uri="{FF2B5EF4-FFF2-40B4-BE49-F238E27FC236}">
+                <a16:creationId xmlns:a16="http://schemas.microsoft.com/office/drawing/2014/main" id="{EE524F37-0DE3-47BE-B6BA-84C9251FF48A}"/>
               </a:ext>
             </a:extLst>
           </p:cNvPr>
@@ -7855,10 +7912,10 @@
       </p:sp>
       <p:sp>
         <p:nvSpPr>
-          <p:cNvPr id="10" name="c3-shape-180">
-            <a:extLst xmlns:a="http://schemas.openxmlformats.org/drawingml/2006/main">
-              <a:ext uri="{FF2B5EF4-FFF2-40B4-BE49-F238E27FC236}">
-                <a16:creationId xmlns:a16="http://schemas.microsoft.com/office/drawing/2014/main" id="{6B2D00C4-9259-4A2F-8EDF-5409757495F2}"/>
+          <p:cNvPr id="10" name="c3-shape-181">
+            <a:extLst xmlns:a="http://schemas.openxmlformats.org/drawingml/2006/main">
+              <a:ext uri="{FF2B5EF4-FFF2-40B4-BE49-F238E27FC236}">
+                <a16:creationId xmlns:a16="http://schemas.microsoft.com/office/drawing/2014/main" id="{969506AB-C751-4C5E-B565-F61179716EFA}"/>
               </a:ext>
             </a:extLst>
           </p:cNvPr>
@@ -7889,10 +7946,10 @@
       </p:sp>
       <p:sp>
         <p:nvSpPr>
-          <p:cNvPr id="11" name="c3-text-181">
-            <a:extLst xmlns:a="http://schemas.openxmlformats.org/drawingml/2006/main">
-              <a:ext uri="{FF2B5EF4-FFF2-40B4-BE49-F238E27FC236}">
-                <a16:creationId xmlns:a16="http://schemas.microsoft.com/office/drawing/2014/main" id="{D00FE0C8-57F5-4CC8-A177-66B520651706}"/>
+          <p:cNvPr id="11" name="c3-text-182">
+            <a:extLst xmlns:a="http://schemas.openxmlformats.org/drawingml/2006/main">
+              <a:ext uri="{FF2B5EF4-FFF2-40B4-BE49-F238E27FC236}">
+                <a16:creationId xmlns:a16="http://schemas.microsoft.com/office/drawing/2014/main" id="{5A247FD4-4FBC-4A14-B235-BF1CCB28BA6A}"/>
               </a:ext>
             </a:extLst>
           </p:cNvPr>
@@ -7946,10 +8003,10 @@
       </p:sp>
       <p:sp>
         <p:nvSpPr>
-          <p:cNvPr id="12" name="c3-text-182">
-            <a:extLst xmlns:a="http://schemas.openxmlformats.org/drawingml/2006/main">
-              <a:ext uri="{FF2B5EF4-FFF2-40B4-BE49-F238E27FC236}">
-                <a16:creationId xmlns:a16="http://schemas.microsoft.com/office/drawing/2014/main" id="{5C7ED2CD-AD89-4C25-9CED-688A48990FF9}"/>
+          <p:cNvPr id="12" name="c3-text-183">
+            <a:extLst xmlns:a="http://schemas.openxmlformats.org/drawingml/2006/main">
+              <a:ext uri="{FF2B5EF4-FFF2-40B4-BE49-F238E27FC236}">
+                <a16:creationId xmlns:a16="http://schemas.microsoft.com/office/drawing/2014/main" id="{A4119E08-B338-4BE6-9650-489C63FC5B0A}"/>
               </a:ext>
             </a:extLst>
           </p:cNvPr>
@@ -8003,10 +8060,10 @@
       </p:sp>
       <p:sp>
         <p:nvSpPr>
-          <p:cNvPr id="13" name="c3-shape-183">
-            <a:extLst xmlns:a="http://schemas.openxmlformats.org/drawingml/2006/main">
-              <a:ext uri="{FF2B5EF4-FFF2-40B4-BE49-F238E27FC236}">
-                <a16:creationId xmlns:a16="http://schemas.microsoft.com/office/drawing/2014/main" id="{4FD87C3B-CA10-48E1-BD12-6E88A6047E7A}"/>
+          <p:cNvPr id="13" name="c3-shape-184">
+            <a:extLst xmlns:a="http://schemas.openxmlformats.org/drawingml/2006/main">
+              <a:ext uri="{FF2B5EF4-FFF2-40B4-BE49-F238E27FC236}">
+                <a16:creationId xmlns:a16="http://schemas.microsoft.com/office/drawing/2014/main" id="{53731C08-F0B7-480D-836B-F781EA6EE746}"/>
               </a:ext>
             </a:extLst>
           </p:cNvPr>
@@ -8037,10 +8094,10 @@
       </p:sp>
       <p:sp>
         <p:nvSpPr>
-          <p:cNvPr id="14" name="c3-text-184">
-            <a:extLst xmlns:a="http://schemas.openxmlformats.org/drawingml/2006/main">
-              <a:ext uri="{FF2B5EF4-FFF2-40B4-BE49-F238E27FC236}">
-                <a16:creationId xmlns:a16="http://schemas.microsoft.com/office/drawing/2014/main" id="{0EAA7B6B-68F8-4D20-9423-1E60E4261422}"/>
+          <p:cNvPr id="14" name="c3-text-185">
+            <a:extLst xmlns:a="http://schemas.openxmlformats.org/drawingml/2006/main">
+              <a:ext uri="{FF2B5EF4-FFF2-40B4-BE49-F238E27FC236}">
+                <a16:creationId xmlns:a16="http://schemas.microsoft.com/office/drawing/2014/main" id="{3ACAD0F7-8C98-42A4-9057-4666557B95A2}"/>
               </a:ext>
             </a:extLst>
           </p:cNvPr>
@@ -8094,10 +8151,10 @@
       </p:sp>
       <p:sp>
         <p:nvSpPr>
-          <p:cNvPr id="15" name="c3-shape-185">
-            <a:extLst xmlns:a="http://schemas.openxmlformats.org/drawingml/2006/main">
-              <a:ext uri="{FF2B5EF4-FFF2-40B4-BE49-F238E27FC236}">
-                <a16:creationId xmlns:a16="http://schemas.microsoft.com/office/drawing/2014/main" id="{558E5D3F-CCB7-4F02-A721-0C54777B5A04}"/>
+          <p:cNvPr id="15" name="c3-shape-186">
+            <a:extLst xmlns:a="http://schemas.openxmlformats.org/drawingml/2006/main">
+              <a:ext uri="{FF2B5EF4-FFF2-40B4-BE49-F238E27FC236}">
+                <a16:creationId xmlns:a16="http://schemas.microsoft.com/office/drawing/2014/main" id="{72AE3DCA-5736-43C5-BB84-F64270175F9B}"/>
               </a:ext>
             </a:extLst>
           </p:cNvPr>
@@ -8126,10 +8183,10 @@
       </p:sp>
       <p:sp>
         <p:nvSpPr>
-          <p:cNvPr id="16" name="c3-shape-186">
-            <a:extLst xmlns:a="http://schemas.openxmlformats.org/drawingml/2006/main">
-              <a:ext uri="{FF2B5EF4-FFF2-40B4-BE49-F238E27FC236}">
-                <a16:creationId xmlns:a16="http://schemas.microsoft.com/office/drawing/2014/main" id="{6F0E3A10-9D7D-4724-9FC6-CE5D792D5E94}"/>
+          <p:cNvPr id="16" name="c3-shape-187">
+            <a:extLst xmlns:a="http://schemas.openxmlformats.org/drawingml/2006/main">
+              <a:ext uri="{FF2B5EF4-FFF2-40B4-BE49-F238E27FC236}">
+                <a16:creationId xmlns:a16="http://schemas.microsoft.com/office/drawing/2014/main" id="{9FBA56FA-D0F2-43BE-B32E-D2368EB71CCD}"/>
               </a:ext>
             </a:extLst>
           </p:cNvPr>
@@ -8160,10 +8217,10 @@
       </p:sp>
       <p:sp>
         <p:nvSpPr>
-          <p:cNvPr id="17" name="c3-text-187">
-            <a:extLst xmlns:a="http://schemas.openxmlformats.org/drawingml/2006/main">
-              <a:ext uri="{FF2B5EF4-FFF2-40B4-BE49-F238E27FC236}">
-                <a16:creationId xmlns:a16="http://schemas.microsoft.com/office/drawing/2014/main" id="{4D6B8DAF-18E9-4A70-820E-5EB90F06340F}"/>
+          <p:cNvPr id="17" name="c3-text-188">
+            <a:extLst xmlns:a="http://schemas.openxmlformats.org/drawingml/2006/main">
+              <a:ext uri="{FF2B5EF4-FFF2-40B4-BE49-F238E27FC236}">
+                <a16:creationId xmlns:a16="http://schemas.microsoft.com/office/drawing/2014/main" id="{F000F546-186B-403A-ACD9-9CFDC71E2146}"/>
               </a:ext>
             </a:extLst>
           </p:cNvPr>
@@ -8217,10 +8274,10 @@
       </p:sp>
       <p:sp>
         <p:nvSpPr>
-          <p:cNvPr id="18" name="c3-shape-188">
-            <a:extLst xmlns:a="http://schemas.openxmlformats.org/drawingml/2006/main">
-              <a:ext uri="{FF2B5EF4-FFF2-40B4-BE49-F238E27FC236}">
-                <a16:creationId xmlns:a16="http://schemas.microsoft.com/office/drawing/2014/main" id="{61EAE2AC-2E32-48DF-9D40-FF7508877A90}"/>
+          <p:cNvPr id="18" name="c3-shape-189">
+            <a:extLst xmlns:a="http://schemas.openxmlformats.org/drawingml/2006/main">
+              <a:ext uri="{FF2B5EF4-FFF2-40B4-BE49-F238E27FC236}">
+                <a16:creationId xmlns:a16="http://schemas.microsoft.com/office/drawing/2014/main" id="{AF346467-04E9-419E-BC8E-C95C71775650}"/>
               </a:ext>
             </a:extLst>
           </p:cNvPr>
@@ -8249,10 +8306,10 @@
       </p:sp>
       <p:sp>
         <p:nvSpPr>
-          <p:cNvPr id="19" name="c3-text-189">
-            <a:extLst xmlns:a="http://schemas.openxmlformats.org/drawingml/2006/main">
-              <a:ext uri="{FF2B5EF4-FFF2-40B4-BE49-F238E27FC236}">
-                <a16:creationId xmlns:a16="http://schemas.microsoft.com/office/drawing/2014/main" id="{3FA043C3-4128-4F69-B67F-12A6F4A8DAE4}"/>
+          <p:cNvPr id="19" name="c3-text-190">
+            <a:extLst xmlns:a="http://schemas.openxmlformats.org/drawingml/2006/main">
+              <a:ext uri="{FF2B5EF4-FFF2-40B4-BE49-F238E27FC236}">
+                <a16:creationId xmlns:a16="http://schemas.microsoft.com/office/drawing/2014/main" id="{1FA4CDF7-373C-4ED0-915A-BC67D2106840}"/>
               </a:ext>
             </a:extLst>
           </p:cNvPr>
@@ -8306,10 +8363,10 @@
       </p:sp>
       <p:sp>
         <p:nvSpPr>
-          <p:cNvPr id="20" name="c3-shape-190">
-            <a:extLst xmlns:a="http://schemas.openxmlformats.org/drawingml/2006/main">
-              <a:ext uri="{FF2B5EF4-FFF2-40B4-BE49-F238E27FC236}">
-                <a16:creationId xmlns:a16="http://schemas.microsoft.com/office/drawing/2014/main" id="{221285FA-DAAA-484B-A5C4-56895A4A5861}"/>
+          <p:cNvPr id="20" name="c3-shape-191">
+            <a:extLst xmlns:a="http://schemas.openxmlformats.org/drawingml/2006/main">
+              <a:ext uri="{FF2B5EF4-FFF2-40B4-BE49-F238E27FC236}">
+                <a16:creationId xmlns:a16="http://schemas.microsoft.com/office/drawing/2014/main" id="{3A40442B-2F7A-420A-B359-B117F445D93C}"/>
               </a:ext>
             </a:extLst>
           </p:cNvPr>
@@ -8338,10 +8395,10 @@
       </p:sp>
       <p:sp>
         <p:nvSpPr>
-          <p:cNvPr id="21" name="c3-shape-191">
-            <a:extLst xmlns:a="http://schemas.openxmlformats.org/drawingml/2006/main">
-              <a:ext uri="{FF2B5EF4-FFF2-40B4-BE49-F238E27FC236}">
-                <a16:creationId xmlns:a16="http://schemas.microsoft.com/office/drawing/2014/main" id="{E9C66288-421F-4541-8D17-B93BC08F535A}"/>
+          <p:cNvPr id="21" name="c3-shape-192">
+            <a:extLst xmlns:a="http://schemas.openxmlformats.org/drawingml/2006/main">
+              <a:ext uri="{FF2B5EF4-FFF2-40B4-BE49-F238E27FC236}">
+                <a16:creationId xmlns:a16="http://schemas.microsoft.com/office/drawing/2014/main" id="{F0A47C34-B8FA-4CAE-B85C-5F0390A54E05}"/>
               </a:ext>
             </a:extLst>
           </p:cNvPr>
@@ -8370,10 +8427,10 @@
       </p:sp>
       <p:sp>
         <p:nvSpPr>
-          <p:cNvPr id="22" name="c3-shape-192">
-            <a:extLst xmlns:a="http://schemas.openxmlformats.org/drawingml/2006/main">
-              <a:ext uri="{FF2B5EF4-FFF2-40B4-BE49-F238E27FC236}">
-                <a16:creationId xmlns:a16="http://schemas.microsoft.com/office/drawing/2014/main" id="{AE06A3EB-A118-42D0-920C-586DFDA149E5}"/>
+          <p:cNvPr id="22" name="c3-shape-193">
+            <a:extLst xmlns:a="http://schemas.openxmlformats.org/drawingml/2006/main">
+              <a:ext uri="{FF2B5EF4-FFF2-40B4-BE49-F238E27FC236}">
+                <a16:creationId xmlns:a16="http://schemas.microsoft.com/office/drawing/2014/main" id="{A90962DF-8F8A-4E46-8659-08EAB3E9A091}"/>
               </a:ext>
             </a:extLst>
           </p:cNvPr>
@@ -8402,10 +8459,10 @@
       </p:sp>
       <p:sp>
         <p:nvSpPr>
-          <p:cNvPr id="23" name="c3-text-193">
-            <a:extLst xmlns:a="http://schemas.openxmlformats.org/drawingml/2006/main">
-              <a:ext uri="{FF2B5EF4-FFF2-40B4-BE49-F238E27FC236}">
-                <a16:creationId xmlns:a16="http://schemas.microsoft.com/office/drawing/2014/main" id="{1FB3DB64-FA1E-4E15-AD4B-484D2BA71288}"/>
+          <p:cNvPr id="23" name="c3-text-194">
+            <a:extLst xmlns:a="http://schemas.openxmlformats.org/drawingml/2006/main">
+              <a:ext uri="{FF2B5EF4-FFF2-40B4-BE49-F238E27FC236}">
+                <a16:creationId xmlns:a16="http://schemas.microsoft.com/office/drawing/2014/main" id="{FA0193CE-9A27-48CB-9BB0-30B1F0AC0900}"/>
               </a:ext>
             </a:extLst>
           </p:cNvPr>
@@ -8459,10 +8516,10 @@
       </p:sp>
       <p:sp>
         <p:nvSpPr>
-          <p:cNvPr id="24" name="c3-text-194">
-            <a:extLst xmlns:a="http://schemas.openxmlformats.org/drawingml/2006/main">
-              <a:ext uri="{FF2B5EF4-FFF2-40B4-BE49-F238E27FC236}">
-                <a16:creationId xmlns:a16="http://schemas.microsoft.com/office/drawing/2014/main" id="{1AFF953A-DC83-4242-BB7F-22C2FB31B91E}"/>
+          <p:cNvPr id="24" name="c3-text-195">
+            <a:extLst xmlns:a="http://schemas.openxmlformats.org/drawingml/2006/main">
+              <a:ext uri="{FF2B5EF4-FFF2-40B4-BE49-F238E27FC236}">
+                <a16:creationId xmlns:a16="http://schemas.microsoft.com/office/drawing/2014/main" id="{7B035BB4-A14B-4A97-BEB6-D7647CC681C2}"/>
               </a:ext>
             </a:extLst>
           </p:cNvPr>
@@ -8516,10 +8573,10 @@
       </p:sp>
       <p:sp>
         <p:nvSpPr>
-          <p:cNvPr id="25" name="c3-text-342">
-            <a:extLst xmlns:a="http://schemas.openxmlformats.org/drawingml/2006/main">
-              <a:ext uri="{FF2B5EF4-FFF2-40B4-BE49-F238E27FC236}">
-                <a16:creationId xmlns:a16="http://schemas.microsoft.com/office/drawing/2014/main" id="{BF7F942B-46A7-4A00-93DD-CD5276143524}"/>
+          <p:cNvPr id="25" name="c3-text-343">
+            <a:extLst xmlns:a="http://schemas.openxmlformats.org/drawingml/2006/main">
+              <a:ext uri="{FF2B5EF4-FFF2-40B4-BE49-F238E27FC236}">
+                <a16:creationId xmlns:a16="http://schemas.microsoft.com/office/drawing/2014/main" id="{80ADDF8D-3532-4046-A78D-8E71240C381D}"/>
               </a:ext>
             </a:extLst>
           </p:cNvPr>
@@ -8574,7 +8631,7 @@
     </p:spTree>
     <p:extLst>
       <p:ext uri="{BB962C8B-B14F-4D97-AF65-F5344CB8AC3E}">
-        <p14:creationId xmlns:p14="http://schemas.microsoft.com/office/powerpoint/2010/main" val="1390559699"/>
+        <p14:creationId xmlns:p14="http://schemas.microsoft.com/office/powerpoint/2010/main" val="1898120856"/>
       </p:ext>
     </p:extLst>
   </p:cSld>
@@ -8602,10 +8659,10 @@
       </p:grpSpPr>
       <p:sp>
         <p:nvSpPr>
-          <p:cNvPr id="10" name="c3-text-195">
-            <a:extLst xmlns:a="http://schemas.openxmlformats.org/drawingml/2006/main">
-              <a:ext uri="{FF2B5EF4-FFF2-40B4-BE49-F238E27FC236}">
-                <a16:creationId xmlns:a16="http://schemas.microsoft.com/office/drawing/2014/main" id="{CC5EE0E0-9BFC-43A4-965E-A92BAB761202}"/>
+          <p:cNvPr id="10" name="c3-text-196">
+            <a:extLst xmlns:a="http://schemas.openxmlformats.org/drawingml/2006/main">
+              <a:ext uri="{FF2B5EF4-FFF2-40B4-BE49-F238E27FC236}">
+                <a16:creationId xmlns:a16="http://schemas.microsoft.com/office/drawing/2014/main" id="{337D7201-E5CF-42E4-AD0C-76BA404A85F3}"/>
               </a:ext>
             </a:extLst>
           </p:cNvPr>
@@ -8659,10 +8716,10 @@
       </p:sp>
       <p:sp>
         <p:nvSpPr>
-          <p:cNvPr id="2" name="c3-text-196">
-            <a:extLst xmlns:a="http://schemas.openxmlformats.org/drawingml/2006/main">
-              <a:ext uri="{FF2B5EF4-FFF2-40B4-BE49-F238E27FC236}">
-                <a16:creationId xmlns:a16="http://schemas.microsoft.com/office/drawing/2014/main" id="{86112007-FA83-43F2-A09D-0340AA765E68}"/>
+          <p:cNvPr id="2" name="c3-text-197">
+            <a:extLst xmlns:a="http://schemas.openxmlformats.org/drawingml/2006/main">
+              <a:ext uri="{FF2B5EF4-FFF2-40B4-BE49-F238E27FC236}">
+                <a16:creationId xmlns:a16="http://schemas.microsoft.com/office/drawing/2014/main" id="{FEAAEE7A-51F6-4152-82CF-39D1FF007406}"/>
               </a:ext>
             </a:extLst>
           </p:cNvPr>
@@ -8716,10 +8773,10 @@
       </p:sp>
       <p:sp>
         <p:nvSpPr>
-          <p:cNvPr id="3" name="c3-text-197">
-            <a:extLst xmlns:a="http://schemas.openxmlformats.org/drawingml/2006/main">
-              <a:ext uri="{FF2B5EF4-FFF2-40B4-BE49-F238E27FC236}">
-                <a16:creationId xmlns:a16="http://schemas.microsoft.com/office/drawing/2014/main" id="{1B7225BE-7256-48AD-B269-15FCA60882ED}"/>
+          <p:cNvPr id="3" name="c3-text-198">
+            <a:extLst xmlns:a="http://schemas.openxmlformats.org/drawingml/2006/main">
+              <a:ext uri="{FF2B5EF4-FFF2-40B4-BE49-F238E27FC236}">
+                <a16:creationId xmlns:a16="http://schemas.microsoft.com/office/drawing/2014/main" id="{A6148D2E-916E-45DC-A899-F1D4AB4A3552}"/>
               </a:ext>
             </a:extLst>
           </p:cNvPr>
@@ -8773,10 +8830,10 @@
       </p:sp>
       <p:sp>
         <p:nvSpPr>
-          <p:cNvPr id="4" name="c3-shape-198">
-            <a:extLst xmlns:a="http://schemas.openxmlformats.org/drawingml/2006/main">
-              <a:ext uri="{FF2B5EF4-FFF2-40B4-BE49-F238E27FC236}">
-                <a16:creationId xmlns:a16="http://schemas.microsoft.com/office/drawing/2014/main" id="{83B51827-F0EB-4D5D-96CE-D81B65DE8BD8}"/>
+          <p:cNvPr id="4" name="c3-shape-199">
+            <a:extLst xmlns:a="http://schemas.openxmlformats.org/drawingml/2006/main">
+              <a:ext uri="{FF2B5EF4-FFF2-40B4-BE49-F238E27FC236}">
+                <a16:creationId xmlns:a16="http://schemas.microsoft.com/office/drawing/2014/main" id="{E59B31D4-A8B3-480A-A9F2-428F4C876125}"/>
               </a:ext>
             </a:extLst>
           </p:cNvPr>
@@ -8807,10 +8864,10 @@
       </p:sp>
       <p:sp>
         <p:nvSpPr>
-          <p:cNvPr id="5" name="c3-text-199">
-            <a:extLst xmlns:a="http://schemas.openxmlformats.org/drawingml/2006/main">
-              <a:ext uri="{FF2B5EF4-FFF2-40B4-BE49-F238E27FC236}">
-                <a16:creationId xmlns:a16="http://schemas.microsoft.com/office/drawing/2014/main" id="{6047E08F-6F81-415B-8C16-0983740F921D}"/>
+          <p:cNvPr id="5" name="c3-text-200">
+            <a:extLst xmlns:a="http://schemas.openxmlformats.org/drawingml/2006/main">
+              <a:ext uri="{FF2B5EF4-FFF2-40B4-BE49-F238E27FC236}">
+                <a16:creationId xmlns:a16="http://schemas.microsoft.com/office/drawing/2014/main" id="{16231E54-B0AE-4E79-BCD4-1BC1CABFFF08}"/>
               </a:ext>
             </a:extLst>
           </p:cNvPr>
@@ -9052,10 +9109,10 @@
       </p:sp>
       <p:sp>
         <p:nvSpPr>
-          <p:cNvPr id="6" name="c3-text-200">
-            <a:extLst xmlns:a="http://schemas.openxmlformats.org/drawingml/2006/main">
-              <a:ext uri="{FF2B5EF4-FFF2-40B4-BE49-F238E27FC236}">
-                <a16:creationId xmlns:a16="http://schemas.microsoft.com/office/drawing/2014/main" id="{F89ABD8B-0EAA-4E5C-8980-25D9063513CC}"/>
+          <p:cNvPr id="6" name="c3-text-201">
+            <a:extLst xmlns:a="http://schemas.openxmlformats.org/drawingml/2006/main">
+              <a:ext uri="{FF2B5EF4-FFF2-40B4-BE49-F238E27FC236}">
+                <a16:creationId xmlns:a16="http://schemas.microsoft.com/office/drawing/2014/main" id="{04371BF5-2D0B-42E8-AA5D-FE7FFC9E9BFD}"/>
               </a:ext>
             </a:extLst>
           </p:cNvPr>
@@ -9109,10 +9166,10 @@
       </p:sp>
       <p:sp>
         <p:nvSpPr>
-          <p:cNvPr id="7" name="c3-shape-201">
-            <a:extLst xmlns:a="http://schemas.openxmlformats.org/drawingml/2006/main">
-              <a:ext uri="{FF2B5EF4-FFF2-40B4-BE49-F238E27FC236}">
-                <a16:creationId xmlns:a16="http://schemas.microsoft.com/office/drawing/2014/main" id="{B5AF999D-1D73-4D68-8663-F83D9F139321}"/>
+          <p:cNvPr id="7" name="c3-shape-202">
+            <a:extLst xmlns:a="http://schemas.openxmlformats.org/drawingml/2006/main">
+              <a:ext uri="{FF2B5EF4-FFF2-40B4-BE49-F238E27FC236}">
+                <a16:creationId xmlns:a16="http://schemas.microsoft.com/office/drawing/2014/main" id="{1DA1C08F-1482-417E-9A1C-CEA13367C5AD}"/>
               </a:ext>
             </a:extLst>
           </p:cNvPr>
@@ -9143,10 +9200,10 @@
       </p:sp>
       <p:sp>
         <p:nvSpPr>
-          <p:cNvPr id="8" name="c3-text-202">
-            <a:extLst xmlns:a="http://schemas.openxmlformats.org/drawingml/2006/main">
-              <a:ext uri="{FF2B5EF4-FFF2-40B4-BE49-F238E27FC236}">
-                <a16:creationId xmlns:a16="http://schemas.microsoft.com/office/drawing/2014/main" id="{F1B00882-E237-481A-A17E-FD7E2549ABAC}"/>
+          <p:cNvPr id="8" name="c3-text-203">
+            <a:extLst xmlns:a="http://schemas.openxmlformats.org/drawingml/2006/main">
+              <a:ext uri="{FF2B5EF4-FFF2-40B4-BE49-F238E27FC236}">
+                <a16:creationId xmlns:a16="http://schemas.microsoft.com/office/drawing/2014/main" id="{D89E7947-3600-4A0B-A33B-BD930D7B25C9}"/>
               </a:ext>
             </a:extLst>
           </p:cNvPr>
@@ -9490,10 +9547,10 @@
       </p:sp>
       <p:sp>
         <p:nvSpPr>
-          <p:cNvPr id="9" name="c3-text-343">
-            <a:extLst xmlns:a="http://schemas.openxmlformats.org/drawingml/2006/main">
-              <a:ext uri="{FF2B5EF4-FFF2-40B4-BE49-F238E27FC236}">
-                <a16:creationId xmlns:a16="http://schemas.microsoft.com/office/drawing/2014/main" id="{5D295146-49B7-480F-8813-CDD79D70A844}"/>
+          <p:cNvPr id="9" name="c3-text-344">
+            <a:extLst xmlns:a="http://schemas.openxmlformats.org/drawingml/2006/main">
+              <a:ext uri="{FF2B5EF4-FFF2-40B4-BE49-F238E27FC236}">
+                <a16:creationId xmlns:a16="http://schemas.microsoft.com/office/drawing/2014/main" id="{78912525-2361-4334-B74A-C2805E6EAA0B}"/>
               </a:ext>
             </a:extLst>
           </p:cNvPr>
@@ -9548,7 +9605,7 @@
     </p:spTree>
     <p:extLst>
       <p:ext uri="{BB962C8B-B14F-4D97-AF65-F5344CB8AC3E}">
-        <p14:creationId xmlns:p14="http://schemas.microsoft.com/office/powerpoint/2010/main" val="1055849026"/>
+        <p14:creationId xmlns:p14="http://schemas.microsoft.com/office/powerpoint/2010/main" val="677505914"/>
       </p:ext>
     </p:extLst>
   </p:cSld>
@@ -9576,10 +9633,10 @@
       </p:grpSpPr>
       <p:sp>
         <p:nvSpPr>
-          <p:cNvPr id="9" name="c3-text-203">
-            <a:extLst xmlns:a="http://schemas.openxmlformats.org/drawingml/2006/main">
-              <a:ext uri="{FF2B5EF4-FFF2-40B4-BE49-F238E27FC236}">
-                <a16:creationId xmlns:a16="http://schemas.microsoft.com/office/drawing/2014/main" id="{59A9464B-1AB9-4F48-8B59-6A79D1C8BBED}"/>
+          <p:cNvPr id="9" name="c3-text-204">
+            <a:extLst xmlns:a="http://schemas.openxmlformats.org/drawingml/2006/main">
+              <a:ext uri="{FF2B5EF4-FFF2-40B4-BE49-F238E27FC236}">
+                <a16:creationId xmlns:a16="http://schemas.microsoft.com/office/drawing/2014/main" id="{483C42C2-159B-4F57-90CA-DF575283AD17}"/>
               </a:ext>
             </a:extLst>
           </p:cNvPr>
@@ -9633,10 +9690,10 @@
       </p:sp>
       <p:sp>
         <p:nvSpPr>
-          <p:cNvPr id="2" name="c3-text-204">
-            <a:extLst xmlns:a="http://schemas.openxmlformats.org/drawingml/2006/main">
-              <a:ext uri="{FF2B5EF4-FFF2-40B4-BE49-F238E27FC236}">
-                <a16:creationId xmlns:a16="http://schemas.microsoft.com/office/drawing/2014/main" id="{77B6C96E-E5D9-4ECD-8606-E0718BAFEC56}"/>
+          <p:cNvPr id="2" name="c3-text-205">
+            <a:extLst xmlns:a="http://schemas.openxmlformats.org/drawingml/2006/main">
+              <a:ext uri="{FF2B5EF4-FFF2-40B4-BE49-F238E27FC236}">
+                <a16:creationId xmlns:a16="http://schemas.microsoft.com/office/drawing/2014/main" id="{BE95E805-9BE4-46ED-8F13-9198FCFF93FF}"/>
               </a:ext>
             </a:extLst>
           </p:cNvPr>
@@ -9690,10 +9747,10 @@
       </p:sp>
       <p:sp>
         <p:nvSpPr>
-          <p:cNvPr id="3" name="c3-text-205">
-            <a:extLst xmlns:a="http://schemas.openxmlformats.org/drawingml/2006/main">
-              <a:ext uri="{FF2B5EF4-FFF2-40B4-BE49-F238E27FC236}">
-                <a16:creationId xmlns:a16="http://schemas.microsoft.com/office/drawing/2014/main" id="{11532CA1-1B0C-458C-96DC-317E949D3049}"/>
+          <p:cNvPr id="3" name="c3-text-206">
+            <a:extLst xmlns:a="http://schemas.openxmlformats.org/drawingml/2006/main">
+              <a:ext uri="{FF2B5EF4-FFF2-40B4-BE49-F238E27FC236}">
+                <a16:creationId xmlns:a16="http://schemas.microsoft.com/office/drawing/2014/main" id="{F4A2CB5E-12AC-4F74-B883-9A6FB25A31B9}"/>
               </a:ext>
             </a:extLst>
           </p:cNvPr>
@@ -9747,11 +9804,11 @@
       </p:sp>
       <p:sp>
         <p:nvSpPr>
-          <p:cNvPr id="4" name="c3-text-206">
-            <a:hlinkClick xmlns:r="http://schemas.openxmlformats.org/officeDocument/2006/relationships" xmlns:a="http://schemas.openxmlformats.org/drawingml/2006/main" r:id="Re7f288d805984b8b"/>
-            <a:extLst xmlns:a="http://schemas.openxmlformats.org/drawingml/2006/main">
-              <a:ext uri="{FF2B5EF4-FFF2-40B4-BE49-F238E27FC236}">
-                <a16:creationId xmlns:a16="http://schemas.microsoft.com/office/drawing/2014/main" id="{8F4B696F-21B3-48FF-BABC-ED2DFF5FB647}"/>
+          <p:cNvPr id="4" name="c3-text-207">
+            <a:hlinkClick xmlns:r="http://schemas.openxmlformats.org/officeDocument/2006/relationships" xmlns:a="http://schemas.openxmlformats.org/drawingml/2006/main" r:id="Rf12c7b7acb574e7c"/>
+            <a:extLst xmlns:a="http://schemas.openxmlformats.org/drawingml/2006/main">
+              <a:ext uri="{FF2B5EF4-FFF2-40B4-BE49-F238E27FC236}">
+                <a16:creationId xmlns:a16="http://schemas.microsoft.com/office/drawing/2014/main" id="{1943DF18-8FA4-46F0-9EC7-53FF756F66A6}"/>
               </a:ext>
             </a:extLst>
           </p:cNvPr>
@@ -9805,10 +9862,10 @@
       </p:sp>
       <p:sp>
         <p:nvSpPr>
-          <p:cNvPr id="5" name="c3-text-207">
-            <a:extLst xmlns:a="http://schemas.openxmlformats.org/drawingml/2006/main">
-              <a:ext uri="{FF2B5EF4-FFF2-40B4-BE49-F238E27FC236}">
-                <a16:creationId xmlns:a16="http://schemas.microsoft.com/office/drawing/2014/main" id="{1E65EDA9-9FCC-4181-928F-82B8F8E5EACF}"/>
+          <p:cNvPr id="5" name="c3-text-208">
+            <a:extLst xmlns:a="http://schemas.openxmlformats.org/drawingml/2006/main">
+              <a:ext uri="{FF2B5EF4-FFF2-40B4-BE49-F238E27FC236}">
+                <a16:creationId xmlns:a16="http://schemas.microsoft.com/office/drawing/2014/main" id="{ABBAB497-1F57-48F3-8615-191F1834EE8F}"/>
               </a:ext>
             </a:extLst>
           </p:cNvPr>
@@ -9862,11 +9919,11 @@
       </p:sp>
       <p:sp>
         <p:nvSpPr>
-          <p:cNvPr id="6" name="c3-text-208">
-            <a:hlinkClick xmlns:r="http://schemas.openxmlformats.org/officeDocument/2006/relationships" xmlns:a="http://schemas.openxmlformats.org/drawingml/2006/main" r:id="Rc7c9747f50e9437f"/>
-            <a:extLst xmlns:a="http://schemas.openxmlformats.org/drawingml/2006/main">
-              <a:ext uri="{FF2B5EF4-FFF2-40B4-BE49-F238E27FC236}">
-                <a16:creationId xmlns:a16="http://schemas.microsoft.com/office/drawing/2014/main" id="{3D8DC705-4C75-4E66-A4E2-C9DF2E54E32F}"/>
+          <p:cNvPr id="6" name="c3-text-209">
+            <a:hlinkClick xmlns:r="http://schemas.openxmlformats.org/officeDocument/2006/relationships" xmlns:a="http://schemas.openxmlformats.org/drawingml/2006/main" r:id="R78bfcf22d4794ced"/>
+            <a:extLst xmlns:a="http://schemas.openxmlformats.org/drawingml/2006/main">
+              <a:ext uri="{FF2B5EF4-FFF2-40B4-BE49-F238E27FC236}">
+                <a16:creationId xmlns:a16="http://schemas.microsoft.com/office/drawing/2014/main" id="{CEEA2104-18DA-45CA-B30B-E4E16FBB1238}"/>
               </a:ext>
             </a:extLst>
           </p:cNvPr>
@@ -9920,10 +9977,10 @@
       </p:sp>
       <p:sp>
         <p:nvSpPr>
-          <p:cNvPr id="7" name="c3-text-209">
-            <a:extLst xmlns:a="http://schemas.openxmlformats.org/drawingml/2006/main">
-              <a:ext uri="{FF2B5EF4-FFF2-40B4-BE49-F238E27FC236}">
-                <a16:creationId xmlns:a16="http://schemas.microsoft.com/office/drawing/2014/main" id="{D2B37BD4-832C-4A17-9469-3A855ED47AD8}"/>
+          <p:cNvPr id="7" name="c3-text-210">
+            <a:extLst xmlns:a="http://schemas.openxmlformats.org/drawingml/2006/main">
+              <a:ext uri="{FF2B5EF4-FFF2-40B4-BE49-F238E27FC236}">
+                <a16:creationId xmlns:a16="http://schemas.microsoft.com/office/drawing/2014/main" id="{987D83D1-2375-4B6F-9FFF-3F6BF7CB420D}"/>
               </a:ext>
             </a:extLst>
           </p:cNvPr>
@@ -9977,10 +10034,10 @@
       </p:sp>
       <p:sp>
         <p:nvSpPr>
-          <p:cNvPr id="8" name="c3-text-344">
-            <a:extLst xmlns:a="http://schemas.openxmlformats.org/drawingml/2006/main">
-              <a:ext uri="{FF2B5EF4-FFF2-40B4-BE49-F238E27FC236}">
-                <a16:creationId xmlns:a16="http://schemas.microsoft.com/office/drawing/2014/main" id="{9BD5A25A-BD2B-4E61-A0F0-709AFB5B9C9B}"/>
+          <p:cNvPr id="8" name="c3-text-345">
+            <a:extLst xmlns:a="http://schemas.openxmlformats.org/drawingml/2006/main">
+              <a:ext uri="{FF2B5EF4-FFF2-40B4-BE49-F238E27FC236}">
+                <a16:creationId xmlns:a16="http://schemas.microsoft.com/office/drawing/2014/main" id="{F3369879-723B-47A1-8A5F-A84EEEFB113A}"/>
               </a:ext>
             </a:extLst>
           </p:cNvPr>
@@ -10035,7 +10092,7 @@
     </p:spTree>
     <p:extLst>
       <p:ext uri="{BB962C8B-B14F-4D97-AF65-F5344CB8AC3E}">
-        <p14:creationId xmlns:p14="http://schemas.microsoft.com/office/powerpoint/2010/main" val="1805647806"/>
+        <p14:creationId xmlns:p14="http://schemas.microsoft.com/office/powerpoint/2010/main" val="1127837892"/>
       </p:ext>
     </p:extLst>
   </p:cSld>
@@ -10063,10 +10120,10 @@
       </p:grpSpPr>
       <p:sp>
         <p:nvSpPr>
-          <p:cNvPr id="9" name="c3-text-210">
-            <a:extLst xmlns:a="http://schemas.openxmlformats.org/drawingml/2006/main">
-              <a:ext uri="{FF2B5EF4-FFF2-40B4-BE49-F238E27FC236}">
-                <a16:creationId xmlns:a16="http://schemas.microsoft.com/office/drawing/2014/main" id="{315C4C44-5E8F-4806-B985-8899F8663A27}"/>
+          <p:cNvPr id="9" name="c3-text-211">
+            <a:extLst xmlns:a="http://schemas.openxmlformats.org/drawingml/2006/main">
+              <a:ext uri="{FF2B5EF4-FFF2-40B4-BE49-F238E27FC236}">
+                <a16:creationId xmlns:a16="http://schemas.microsoft.com/office/drawing/2014/main" id="{9B32CCE3-7D6F-4C4B-92A4-B0F890430E3D}"/>
               </a:ext>
             </a:extLst>
           </p:cNvPr>
@@ -10120,10 +10177,10 @@
       </p:sp>
       <p:sp>
         <p:nvSpPr>
-          <p:cNvPr id="2" name="c3-text-211">
-            <a:extLst xmlns:a="http://schemas.openxmlformats.org/drawingml/2006/main">
-              <a:ext uri="{FF2B5EF4-FFF2-40B4-BE49-F238E27FC236}">
-                <a16:creationId xmlns:a16="http://schemas.microsoft.com/office/drawing/2014/main" id="{8365F425-A180-4F18-A95B-65CE833B5BDE}"/>
+          <p:cNvPr id="2" name="c3-text-212">
+            <a:extLst xmlns:a="http://schemas.openxmlformats.org/drawingml/2006/main">
+              <a:ext uri="{FF2B5EF4-FFF2-40B4-BE49-F238E27FC236}">
+                <a16:creationId xmlns:a16="http://schemas.microsoft.com/office/drawing/2014/main" id="{500F3D57-1B79-4D4B-A115-3427328A1AD8}"/>
               </a:ext>
             </a:extLst>
           </p:cNvPr>
@@ -10177,10 +10234,10 @@
       </p:sp>
       <p:sp>
         <p:nvSpPr>
-          <p:cNvPr id="3" name="c3-text-212">
-            <a:extLst xmlns:a="http://schemas.openxmlformats.org/drawingml/2006/main">
-              <a:ext uri="{FF2B5EF4-FFF2-40B4-BE49-F238E27FC236}">
-                <a16:creationId xmlns:a16="http://schemas.microsoft.com/office/drawing/2014/main" id="{9EAC5B92-5151-4234-917A-A8F3EA88A0D3}"/>
+          <p:cNvPr id="3" name="c3-text-213">
+            <a:extLst xmlns:a="http://schemas.openxmlformats.org/drawingml/2006/main">
+              <a:ext uri="{FF2B5EF4-FFF2-40B4-BE49-F238E27FC236}">
+                <a16:creationId xmlns:a16="http://schemas.microsoft.com/office/drawing/2014/main" id="{57B3BEA5-D484-44A0-90C6-CB680CCCB2A4}"/>
               </a:ext>
             </a:extLst>
           </p:cNvPr>
@@ -10234,10 +10291,10 @@
       </p:sp>
       <p:sp>
         <p:nvSpPr>
-          <p:cNvPr id="4" name="c3-text-213">
-            <a:extLst xmlns:a="http://schemas.openxmlformats.org/drawingml/2006/main">
-              <a:ext uri="{FF2B5EF4-FFF2-40B4-BE49-F238E27FC236}">
-                <a16:creationId xmlns:a16="http://schemas.microsoft.com/office/drawing/2014/main" id="{3FAA0606-11E5-49CC-A879-39DBD4AB63DF}"/>
+          <p:cNvPr id="4" name="c3-text-214">
+            <a:extLst xmlns:a="http://schemas.openxmlformats.org/drawingml/2006/main">
+              <a:ext uri="{FF2B5EF4-FFF2-40B4-BE49-F238E27FC236}">
+                <a16:creationId xmlns:a16="http://schemas.microsoft.com/office/drawing/2014/main" id="{DC2A24CD-B94F-4BBF-8496-0D9287B7784C}"/>
               </a:ext>
             </a:extLst>
           </p:cNvPr>
@@ -10291,10 +10348,10 @@
       </p:sp>
       <p:sp>
         <p:nvSpPr>
-          <p:cNvPr id="5" name="c3-shape-214">
-            <a:extLst xmlns:a="http://schemas.openxmlformats.org/drawingml/2006/main">
-              <a:ext uri="{FF2B5EF4-FFF2-40B4-BE49-F238E27FC236}">
-                <a16:creationId xmlns:a16="http://schemas.microsoft.com/office/drawing/2014/main" id="{648EE26E-AD12-4255-B4FA-2C8D74D5EB71}"/>
+          <p:cNvPr id="5" name="c3-shape-215">
+            <a:extLst xmlns:a="http://schemas.openxmlformats.org/drawingml/2006/main">
+              <a:ext uri="{FF2B5EF4-FFF2-40B4-BE49-F238E27FC236}">
+                <a16:creationId xmlns:a16="http://schemas.microsoft.com/office/drawing/2014/main" id="{847FCD2E-E7C3-49A7-ABF7-99568D4FA487}"/>
               </a:ext>
             </a:extLst>
           </p:cNvPr>
@@ -10325,10 +10382,10 @@
       </p:sp>
       <p:sp>
         <p:nvSpPr>
-          <p:cNvPr id="6" name="c3-text-215">
-            <a:extLst xmlns:a="http://schemas.openxmlformats.org/drawingml/2006/main">
-              <a:ext uri="{FF2B5EF4-FFF2-40B4-BE49-F238E27FC236}">
-                <a16:creationId xmlns:a16="http://schemas.microsoft.com/office/drawing/2014/main" id="{046061E8-87BA-4404-A079-37018FA0FD7A}"/>
+          <p:cNvPr id="6" name="c3-text-216">
+            <a:extLst xmlns:a="http://schemas.openxmlformats.org/drawingml/2006/main">
+              <a:ext uri="{FF2B5EF4-FFF2-40B4-BE49-F238E27FC236}">
+                <a16:creationId xmlns:a16="http://schemas.microsoft.com/office/drawing/2014/main" id="{ADB3E1E2-60B9-4A5A-8DBA-B30E4B27E830}"/>
               </a:ext>
             </a:extLst>
           </p:cNvPr>
@@ -10393,10 +10450,10 @@
       </p:sp>
       <p:sp>
         <p:nvSpPr>
-          <p:cNvPr id="7" name="c3-text-216">
-            <a:extLst xmlns:a="http://schemas.openxmlformats.org/drawingml/2006/main">
-              <a:ext uri="{FF2B5EF4-FFF2-40B4-BE49-F238E27FC236}">
-                <a16:creationId xmlns:a16="http://schemas.microsoft.com/office/drawing/2014/main" id="{30B0D134-CC21-46AF-B1E8-BE6DB5BE1145}"/>
+          <p:cNvPr id="7" name="c3-text-217">
+            <a:extLst xmlns:a="http://schemas.openxmlformats.org/drawingml/2006/main">
+              <a:ext uri="{FF2B5EF4-FFF2-40B4-BE49-F238E27FC236}">
+                <a16:creationId xmlns:a16="http://schemas.microsoft.com/office/drawing/2014/main" id="{C21E9483-5C0E-4564-8409-FAF7AD041469}"/>
               </a:ext>
             </a:extLst>
           </p:cNvPr>
@@ -10450,10 +10507,10 @@
       </p:sp>
       <p:sp>
         <p:nvSpPr>
-          <p:cNvPr id="8" name="c3-text-345">
-            <a:extLst xmlns:a="http://schemas.openxmlformats.org/drawingml/2006/main">
-              <a:ext uri="{FF2B5EF4-FFF2-40B4-BE49-F238E27FC236}">
-                <a16:creationId xmlns:a16="http://schemas.microsoft.com/office/drawing/2014/main" id="{D11E0E51-8FC5-4E47-AD10-390112C87F4D}"/>
+          <p:cNvPr id="8" name="c3-text-346">
+            <a:extLst xmlns:a="http://schemas.openxmlformats.org/drawingml/2006/main">
+              <a:ext uri="{FF2B5EF4-FFF2-40B4-BE49-F238E27FC236}">
+                <a16:creationId xmlns:a16="http://schemas.microsoft.com/office/drawing/2014/main" id="{31554B04-DA06-4DD2-9AD1-A5D61B1DDE13}"/>
               </a:ext>
             </a:extLst>
           </p:cNvPr>
@@ -10508,7 +10565,7 @@
     </p:spTree>
     <p:extLst>
       <p:ext uri="{BB962C8B-B14F-4D97-AF65-F5344CB8AC3E}">
-        <p14:creationId xmlns:p14="http://schemas.microsoft.com/office/powerpoint/2010/main" val="171767742"/>
+        <p14:creationId xmlns:p14="http://schemas.microsoft.com/office/powerpoint/2010/main" val="168617154"/>
       </p:ext>
     </p:extLst>
   </p:cSld>
@@ -10539,7 +10596,7 @@
           <p:cNvPr id="19" name="c3-text-1">
             <a:extLst xmlns:a="http://schemas.openxmlformats.org/drawingml/2006/main">
               <a:ext uri="{FF2B5EF4-FFF2-40B4-BE49-F238E27FC236}">
-                <a16:creationId xmlns:a16="http://schemas.microsoft.com/office/drawing/2014/main" id="{1A63C37B-EB87-4A53-AACE-736CC0CAC3BC}"/>
+                <a16:creationId xmlns:a16="http://schemas.microsoft.com/office/drawing/2014/main" id="{5F6B3308-81C7-41E8-891E-364EC2331EA4}"/>
               </a:ext>
             </a:extLst>
           </p:cNvPr>
@@ -10596,7 +10653,7 @@
           <p:cNvPr id="2" name="c3-text-2">
             <a:extLst xmlns:a="http://schemas.openxmlformats.org/drawingml/2006/main">
               <a:ext uri="{FF2B5EF4-FFF2-40B4-BE49-F238E27FC236}">
-                <a16:creationId xmlns:a16="http://schemas.microsoft.com/office/drawing/2014/main" id="{C971385F-CB35-4F72-B268-C99DAC5E2D6D}"/>
+                <a16:creationId xmlns:a16="http://schemas.microsoft.com/office/drawing/2014/main" id="{022F4CDD-1E99-4328-90CD-C1F0046F216E}"/>
               </a:ext>
             </a:extLst>
           </p:cNvPr>
@@ -10653,7 +10710,7 @@
           <p:cNvPr id="3" name="c3-text-3">
             <a:extLst xmlns:a="http://schemas.openxmlformats.org/drawingml/2006/main">
               <a:ext uri="{FF2B5EF4-FFF2-40B4-BE49-F238E27FC236}">
-                <a16:creationId xmlns:a16="http://schemas.microsoft.com/office/drawing/2014/main" id="{154E1341-50A7-40BE-9EF1-E55007716046}"/>
+                <a16:creationId xmlns:a16="http://schemas.microsoft.com/office/drawing/2014/main" id="{CA9B9BEE-6E1A-43F9-A90A-21E9D0AEB1B5}"/>
               </a:ext>
             </a:extLst>
           </p:cNvPr>
@@ -10710,7 +10767,7 @@
           <p:cNvPr id="4" name="c3-shape-4">
             <a:extLst xmlns:a="http://schemas.openxmlformats.org/drawingml/2006/main">
               <a:ext uri="{FF2B5EF4-FFF2-40B4-BE49-F238E27FC236}">
-                <a16:creationId xmlns:a16="http://schemas.microsoft.com/office/drawing/2014/main" id="{A749E67A-6832-4B8C-A0F2-7F088A096D82}"/>
+                <a16:creationId xmlns:a16="http://schemas.microsoft.com/office/drawing/2014/main" id="{611B9DF8-23B0-4A93-8515-7AFF07FD05AE}"/>
               </a:ext>
             </a:extLst>
           </p:cNvPr>
@@ -10744,7 +10801,7 @@
           <p:cNvPr id="5" name="c3-text-5">
             <a:extLst xmlns:a="http://schemas.openxmlformats.org/drawingml/2006/main">
               <a:ext uri="{FF2B5EF4-FFF2-40B4-BE49-F238E27FC236}">
-                <a16:creationId xmlns:a16="http://schemas.microsoft.com/office/drawing/2014/main" id="{925E1836-8CF9-49E5-9EB8-5A9B2434854C}"/>
+                <a16:creationId xmlns:a16="http://schemas.microsoft.com/office/drawing/2014/main" id="{FFDCC80E-ABF0-4A49-9D29-688A2826492B}"/>
               </a:ext>
             </a:extLst>
           </p:cNvPr>
@@ -10824,7 +10881,7 @@
           <p:cNvPr id="6" name="c3-shape-6">
             <a:extLst xmlns:a="http://schemas.openxmlformats.org/drawingml/2006/main">
               <a:ext uri="{FF2B5EF4-FFF2-40B4-BE49-F238E27FC236}">
-                <a16:creationId xmlns:a16="http://schemas.microsoft.com/office/drawing/2014/main" id="{9F3837AB-835C-4AA9-A36F-EF94BD9B8CF8}"/>
+                <a16:creationId xmlns:a16="http://schemas.microsoft.com/office/drawing/2014/main" id="{27EB7BE9-E250-42A8-A8DF-5AE96D985CA5}"/>
               </a:ext>
             </a:extLst>
           </p:cNvPr>
@@ -10856,7 +10913,7 @@
           <p:cNvPr id="7" name="c3-shape-7">
             <a:extLst xmlns:a="http://schemas.openxmlformats.org/drawingml/2006/main">
               <a:ext uri="{FF2B5EF4-FFF2-40B4-BE49-F238E27FC236}">
-                <a16:creationId xmlns:a16="http://schemas.microsoft.com/office/drawing/2014/main" id="{B29E185A-6D10-4A12-BA54-1778B88E8E17}"/>
+                <a16:creationId xmlns:a16="http://schemas.microsoft.com/office/drawing/2014/main" id="{B7E6B3F6-93F0-4DF3-A4B0-5C1DADC405FB}"/>
               </a:ext>
             </a:extLst>
           </p:cNvPr>
@@ -10890,7 +10947,7 @@
           <p:cNvPr id="8" name="c3-text-8">
             <a:extLst xmlns:a="http://schemas.openxmlformats.org/drawingml/2006/main">
               <a:ext uri="{FF2B5EF4-FFF2-40B4-BE49-F238E27FC236}">
-                <a16:creationId xmlns:a16="http://schemas.microsoft.com/office/drawing/2014/main" id="{E62D980C-709F-4FD6-AD7B-8FC38AFB87D5}"/>
+                <a16:creationId xmlns:a16="http://schemas.microsoft.com/office/drawing/2014/main" id="{7CF99BAF-4E42-4B86-B5DC-76DEA5A57A31}"/>
               </a:ext>
             </a:extLst>
           </p:cNvPr>
@@ -10970,7 +11027,7 @@
           <p:cNvPr id="9" name="c3-shape-9">
             <a:extLst xmlns:a="http://schemas.openxmlformats.org/drawingml/2006/main">
               <a:ext uri="{FF2B5EF4-FFF2-40B4-BE49-F238E27FC236}">
-                <a16:creationId xmlns:a16="http://schemas.microsoft.com/office/drawing/2014/main" id="{F0DD240F-7882-45C3-B8EC-DE71E3191F52}"/>
+                <a16:creationId xmlns:a16="http://schemas.microsoft.com/office/drawing/2014/main" id="{EFA52000-31D4-47D5-904A-A78315448B69}"/>
               </a:ext>
             </a:extLst>
           </p:cNvPr>
@@ -11002,7 +11059,7 @@
           <p:cNvPr id="10" name="c3-shape-10">
             <a:extLst xmlns:a="http://schemas.openxmlformats.org/drawingml/2006/main">
               <a:ext uri="{FF2B5EF4-FFF2-40B4-BE49-F238E27FC236}">
-                <a16:creationId xmlns:a16="http://schemas.microsoft.com/office/drawing/2014/main" id="{90F96ACE-CDDE-4A80-8DBA-E996B79EF612}"/>
+                <a16:creationId xmlns:a16="http://schemas.microsoft.com/office/drawing/2014/main" id="{DAC25DE6-F68E-4657-B5C4-4C10402586A0}"/>
               </a:ext>
             </a:extLst>
           </p:cNvPr>
@@ -11036,7 +11093,7 @@
           <p:cNvPr id="11" name="c3-text-11">
             <a:extLst xmlns:a="http://schemas.openxmlformats.org/drawingml/2006/main">
               <a:ext uri="{FF2B5EF4-FFF2-40B4-BE49-F238E27FC236}">
-                <a16:creationId xmlns:a16="http://schemas.microsoft.com/office/drawing/2014/main" id="{D98E2F05-16A6-44C2-80C0-023A511466CC}"/>
+                <a16:creationId xmlns:a16="http://schemas.microsoft.com/office/drawing/2014/main" id="{F00C00BD-C2F2-4E5C-913A-33AA3BC74584}"/>
               </a:ext>
             </a:extLst>
           </p:cNvPr>
@@ -11116,7 +11173,7 @@
           <p:cNvPr id="12" name="c3-shape-12">
             <a:extLst xmlns:a="http://schemas.openxmlformats.org/drawingml/2006/main">
               <a:ext uri="{FF2B5EF4-FFF2-40B4-BE49-F238E27FC236}">
-                <a16:creationId xmlns:a16="http://schemas.microsoft.com/office/drawing/2014/main" id="{0CD49E03-53B6-4BBD-B44F-E35AC572FD99}"/>
+                <a16:creationId xmlns:a16="http://schemas.microsoft.com/office/drawing/2014/main" id="{A099B4B7-291B-4EDE-B7A5-0E924EB13639}"/>
               </a:ext>
             </a:extLst>
           </p:cNvPr>
@@ -11148,7 +11205,7 @@
           <p:cNvPr id="13" name="c3-shape-13">
             <a:extLst xmlns:a="http://schemas.openxmlformats.org/drawingml/2006/main">
               <a:ext uri="{FF2B5EF4-FFF2-40B4-BE49-F238E27FC236}">
-                <a16:creationId xmlns:a16="http://schemas.microsoft.com/office/drawing/2014/main" id="{0628C058-43B1-425E-A955-655986211456}"/>
+                <a16:creationId xmlns:a16="http://schemas.microsoft.com/office/drawing/2014/main" id="{E9E91219-E72B-4CD1-A5AE-A95643F1A443}"/>
               </a:ext>
             </a:extLst>
           </p:cNvPr>
@@ -11182,7 +11239,7 @@
           <p:cNvPr id="14" name="c3-text-14">
             <a:extLst xmlns:a="http://schemas.openxmlformats.org/drawingml/2006/main">
               <a:ext uri="{FF2B5EF4-FFF2-40B4-BE49-F238E27FC236}">
-                <a16:creationId xmlns:a16="http://schemas.microsoft.com/office/drawing/2014/main" id="{A4D5758E-C63F-44BF-9E4F-4D1DFF1B519D}"/>
+                <a16:creationId xmlns:a16="http://schemas.microsoft.com/office/drawing/2014/main" id="{7A4B57E8-3FA5-48E9-B3E5-AD6E97B6C41B}"/>
               </a:ext>
             </a:extLst>
           </p:cNvPr>
@@ -11262,7 +11319,7 @@
           <p:cNvPr id="15" name="c3-shape-15">
             <a:extLst xmlns:a="http://schemas.openxmlformats.org/drawingml/2006/main">
               <a:ext uri="{FF2B5EF4-FFF2-40B4-BE49-F238E27FC236}">
-                <a16:creationId xmlns:a16="http://schemas.microsoft.com/office/drawing/2014/main" id="{FD99FBF5-943B-4D0E-BC22-06938DE1FA5F}"/>
+                <a16:creationId xmlns:a16="http://schemas.microsoft.com/office/drawing/2014/main" id="{6F7A504C-2738-484F-B1BB-E03A99711EB7}"/>
               </a:ext>
             </a:extLst>
           </p:cNvPr>
@@ -11296,7 +11353,7 @@
           <p:cNvPr id="16" name="c3-text-16">
             <a:extLst xmlns:a="http://schemas.openxmlformats.org/drawingml/2006/main">
               <a:ext uri="{FF2B5EF4-FFF2-40B4-BE49-F238E27FC236}">
-                <a16:creationId xmlns:a16="http://schemas.microsoft.com/office/drawing/2014/main" id="{5792E4B1-8B6F-477A-BFE2-44C9CA01BB06}"/>
+                <a16:creationId xmlns:a16="http://schemas.microsoft.com/office/drawing/2014/main" id="{F354F7C6-FAB3-40B9-96F9-682499D44AEE}"/>
               </a:ext>
             </a:extLst>
           </p:cNvPr>
@@ -11353,7 +11410,7 @@
           <p:cNvPr id="17" name="c3-text-17">
             <a:extLst xmlns:a="http://schemas.openxmlformats.org/drawingml/2006/main">
               <a:ext uri="{FF2B5EF4-FFF2-40B4-BE49-F238E27FC236}">
-                <a16:creationId xmlns:a16="http://schemas.microsoft.com/office/drawing/2014/main" id="{81468DCA-8D01-4710-9A57-B1108367D68C}"/>
+                <a16:creationId xmlns:a16="http://schemas.microsoft.com/office/drawing/2014/main" id="{5E5FBDA2-EB8F-4E18-999D-1437783586F6}"/>
               </a:ext>
             </a:extLst>
           </p:cNvPr>
@@ -11407,10 +11464,10 @@
       </p:sp>
       <p:sp>
         <p:nvSpPr>
-          <p:cNvPr id="18" name="c3-text-328">
-            <a:extLst xmlns:a="http://schemas.openxmlformats.org/drawingml/2006/main">
-              <a:ext uri="{FF2B5EF4-FFF2-40B4-BE49-F238E27FC236}">
-                <a16:creationId xmlns:a16="http://schemas.microsoft.com/office/drawing/2014/main" id="{438E57D7-BD2D-4138-888A-10A416649E63}"/>
+          <p:cNvPr id="18" name="c3-text-329">
+            <a:extLst xmlns:a="http://schemas.openxmlformats.org/drawingml/2006/main">
+              <a:ext uri="{FF2B5EF4-FFF2-40B4-BE49-F238E27FC236}">
+                <a16:creationId xmlns:a16="http://schemas.microsoft.com/office/drawing/2014/main" id="{9D89279F-0092-4C14-BB67-CA4094DB8ABC}"/>
               </a:ext>
             </a:extLst>
           </p:cNvPr>
@@ -11465,7 +11522,7 @@
     </p:spTree>
     <p:extLst>
       <p:ext uri="{BB962C8B-B14F-4D97-AF65-F5344CB8AC3E}">
-        <p14:creationId xmlns:p14="http://schemas.microsoft.com/office/powerpoint/2010/main" val="410835045"/>
+        <p14:creationId xmlns:p14="http://schemas.microsoft.com/office/powerpoint/2010/main" val="1405820419"/>
       </p:ext>
     </p:extLst>
   </p:cSld>
@@ -11493,10 +11550,10 @@
       </p:grpSpPr>
       <p:sp>
         <p:nvSpPr>
-          <p:cNvPr id="18" name="c3-text-217">
-            <a:extLst xmlns:a="http://schemas.openxmlformats.org/drawingml/2006/main">
-              <a:ext uri="{FF2B5EF4-FFF2-40B4-BE49-F238E27FC236}">
-                <a16:creationId xmlns:a16="http://schemas.microsoft.com/office/drawing/2014/main" id="{84844235-6210-4895-B241-734D005D7084}"/>
+          <p:cNvPr id="18" name="c3-text-218">
+            <a:extLst xmlns:a="http://schemas.openxmlformats.org/drawingml/2006/main">
+              <a:ext uri="{FF2B5EF4-FFF2-40B4-BE49-F238E27FC236}">
+                <a16:creationId xmlns:a16="http://schemas.microsoft.com/office/drawing/2014/main" id="{9C025715-BF30-4F56-83C4-E0C7977E2B17}"/>
               </a:ext>
             </a:extLst>
           </p:cNvPr>
@@ -11550,10 +11607,10 @@
       </p:sp>
       <p:sp>
         <p:nvSpPr>
-          <p:cNvPr id="2" name="c3-text-218">
-            <a:extLst xmlns:a="http://schemas.openxmlformats.org/drawingml/2006/main">
-              <a:ext uri="{FF2B5EF4-FFF2-40B4-BE49-F238E27FC236}">
-                <a16:creationId xmlns:a16="http://schemas.microsoft.com/office/drawing/2014/main" id="{C6CF1FEB-808E-476E-B058-7CBABCA34BB7}"/>
+          <p:cNvPr id="2" name="c3-text-219">
+            <a:extLst xmlns:a="http://schemas.openxmlformats.org/drawingml/2006/main">
+              <a:ext uri="{FF2B5EF4-FFF2-40B4-BE49-F238E27FC236}">
+                <a16:creationId xmlns:a16="http://schemas.microsoft.com/office/drawing/2014/main" id="{95150F95-3064-4F4C-9210-1836647C0423}"/>
               </a:ext>
             </a:extLst>
           </p:cNvPr>
@@ -11607,10 +11664,10 @@
       </p:sp>
       <p:sp>
         <p:nvSpPr>
-          <p:cNvPr id="3" name="c3-text-219">
-            <a:extLst xmlns:a="http://schemas.openxmlformats.org/drawingml/2006/main">
-              <a:ext uri="{FF2B5EF4-FFF2-40B4-BE49-F238E27FC236}">
-                <a16:creationId xmlns:a16="http://schemas.microsoft.com/office/drawing/2014/main" id="{EE9E0DDA-2EE1-47C9-AB0F-79C102F3B2F2}"/>
+          <p:cNvPr id="3" name="c3-text-220">
+            <a:extLst xmlns:a="http://schemas.openxmlformats.org/drawingml/2006/main">
+              <a:ext uri="{FF2B5EF4-FFF2-40B4-BE49-F238E27FC236}">
+                <a16:creationId xmlns:a16="http://schemas.microsoft.com/office/drawing/2014/main" id="{BD183527-77A3-4570-83F7-97EDA4B73EF2}"/>
               </a:ext>
             </a:extLst>
           </p:cNvPr>
@@ -11671,7 +11728,7 @@
           <p:nvPr/>
         </p:nvPicPr>
         <p:blipFill>
-          <a:blip xmlns:r="http://schemas.openxmlformats.org/officeDocument/2006/relationships" xmlns:a="http://schemas.openxmlformats.org/drawingml/2006/main" r:embed="Rba37df6ffec74f84"/>
+          <a:blip xmlns:r="http://schemas.openxmlformats.org/officeDocument/2006/relationships" xmlns:a="http://schemas.openxmlformats.org/drawingml/2006/main" r:embed="Rf50785e724764885"/>
           <a:stretch xmlns:a="http://schemas.openxmlformats.org/drawingml/2006/main"/>
         </p:blipFill>
         <p:spPr>
@@ -11693,7 +11750,7 @@
           <p:nvPr/>
         </p:nvPicPr>
         <p:blipFill>
-          <a:blip xmlns:r="http://schemas.openxmlformats.org/officeDocument/2006/relationships" xmlns:a="http://schemas.openxmlformats.org/drawingml/2006/main" r:embed="Rc8d6525085a344ad"/>
+          <a:blip xmlns:r="http://schemas.openxmlformats.org/officeDocument/2006/relationships" xmlns:a="http://schemas.openxmlformats.org/drawingml/2006/main" r:embed="Reb9257540c76468b"/>
           <a:stretch xmlns:a="http://schemas.openxmlformats.org/drawingml/2006/main"/>
         </p:blipFill>
         <p:spPr>
@@ -11708,10 +11765,10 @@
       </p:pic>
       <p:sp>
         <p:nvSpPr>
-          <p:cNvPr id="6" name="c3-text-220">
-            <a:extLst xmlns:a="http://schemas.openxmlformats.org/drawingml/2006/main">
-              <a:ext uri="{FF2B5EF4-FFF2-40B4-BE49-F238E27FC236}">
-                <a16:creationId xmlns:a16="http://schemas.microsoft.com/office/drawing/2014/main" id="{A1EF6B28-7DF1-4D3A-9C99-C97350A5FCB3}"/>
+          <p:cNvPr id="6" name="c3-text-221">
+            <a:extLst xmlns:a="http://schemas.openxmlformats.org/drawingml/2006/main">
+              <a:ext uri="{FF2B5EF4-FFF2-40B4-BE49-F238E27FC236}">
+                <a16:creationId xmlns:a16="http://schemas.microsoft.com/office/drawing/2014/main" id="{95745E15-7894-4F28-822B-AF2CF054127F}"/>
               </a:ext>
             </a:extLst>
           </p:cNvPr>
@@ -11765,10 +11822,10 @@
       </p:sp>
       <p:sp>
         <p:nvSpPr>
-          <p:cNvPr id="7" name="c3-text-221">
-            <a:extLst xmlns:a="http://schemas.openxmlformats.org/drawingml/2006/main">
-              <a:ext uri="{FF2B5EF4-FFF2-40B4-BE49-F238E27FC236}">
-                <a16:creationId xmlns:a16="http://schemas.microsoft.com/office/drawing/2014/main" id="{C4D5D367-E5EC-4D6B-9933-90724A1928CE}"/>
+          <p:cNvPr id="7" name="c3-text-222">
+            <a:extLst xmlns:a="http://schemas.openxmlformats.org/drawingml/2006/main">
+              <a:ext uri="{FF2B5EF4-FFF2-40B4-BE49-F238E27FC236}">
+                <a16:creationId xmlns:a16="http://schemas.microsoft.com/office/drawing/2014/main" id="{1A01F35C-70D7-4176-B3A8-26A352AC5A3D}"/>
               </a:ext>
             </a:extLst>
           </p:cNvPr>
@@ -11822,10 +11879,10 @@
       </p:sp>
       <p:sp>
         <p:nvSpPr>
-          <p:cNvPr id="8" name="c3-text-222">
-            <a:extLst xmlns:a="http://schemas.openxmlformats.org/drawingml/2006/main">
-              <a:ext uri="{FF2B5EF4-FFF2-40B4-BE49-F238E27FC236}">
-                <a16:creationId xmlns:a16="http://schemas.microsoft.com/office/drawing/2014/main" id="{53D0C931-ED1D-4235-B7EE-1B29FD5BB575}"/>
+          <p:cNvPr id="8" name="c3-text-223">
+            <a:extLst xmlns:a="http://schemas.openxmlformats.org/drawingml/2006/main">
+              <a:ext uri="{FF2B5EF4-FFF2-40B4-BE49-F238E27FC236}">
+                <a16:creationId xmlns:a16="http://schemas.microsoft.com/office/drawing/2014/main" id="{AA9C9D3D-A0D8-48FE-8256-273B730AFFB3}"/>
               </a:ext>
             </a:extLst>
           </p:cNvPr>
@@ -11879,10 +11936,10 @@
       </p:sp>
       <p:sp>
         <p:nvSpPr>
-          <p:cNvPr id="9" name="c3-text-223">
-            <a:extLst xmlns:a="http://schemas.openxmlformats.org/drawingml/2006/main">
-              <a:ext uri="{FF2B5EF4-FFF2-40B4-BE49-F238E27FC236}">
-                <a16:creationId xmlns:a16="http://schemas.microsoft.com/office/drawing/2014/main" id="{C499196A-B9CC-4FDE-8287-69231A131BE8}"/>
+          <p:cNvPr id="9" name="c3-text-224">
+            <a:extLst xmlns:a="http://schemas.openxmlformats.org/drawingml/2006/main">
+              <a:ext uri="{FF2B5EF4-FFF2-40B4-BE49-F238E27FC236}">
+                <a16:creationId xmlns:a16="http://schemas.microsoft.com/office/drawing/2014/main" id="{88CCC4E3-4F37-4AA5-99AD-AB074A4405E2}"/>
               </a:ext>
             </a:extLst>
           </p:cNvPr>
@@ -11936,10 +11993,10 @@
       </p:sp>
       <p:sp>
         <p:nvSpPr>
-          <p:cNvPr id="10" name="c3-text-224">
-            <a:extLst xmlns:a="http://schemas.openxmlformats.org/drawingml/2006/main">
-              <a:ext uri="{FF2B5EF4-FFF2-40B4-BE49-F238E27FC236}">
-                <a16:creationId xmlns:a16="http://schemas.microsoft.com/office/drawing/2014/main" id="{1C1EE81E-35C8-4E47-B3EB-8C4C78D7E5FA}"/>
+          <p:cNvPr id="10" name="c3-text-225">
+            <a:extLst xmlns:a="http://schemas.openxmlformats.org/drawingml/2006/main">
+              <a:ext uri="{FF2B5EF4-FFF2-40B4-BE49-F238E27FC236}">
+                <a16:creationId xmlns:a16="http://schemas.microsoft.com/office/drawing/2014/main" id="{2F115FA9-3D79-42FA-BC87-6985F10F966A}"/>
               </a:ext>
             </a:extLst>
           </p:cNvPr>
@@ -11993,10 +12050,10 @@
       </p:sp>
       <p:sp>
         <p:nvSpPr>
-          <p:cNvPr id="11" name="c3-text-225">
-            <a:extLst xmlns:a="http://schemas.openxmlformats.org/drawingml/2006/main">
-              <a:ext uri="{FF2B5EF4-FFF2-40B4-BE49-F238E27FC236}">
-                <a16:creationId xmlns:a16="http://schemas.microsoft.com/office/drawing/2014/main" id="{B33C896D-2403-4BCC-BC65-D3A6A5586503}"/>
+          <p:cNvPr id="11" name="c3-text-226">
+            <a:extLst xmlns:a="http://schemas.openxmlformats.org/drawingml/2006/main">
+              <a:ext uri="{FF2B5EF4-FFF2-40B4-BE49-F238E27FC236}">
+                <a16:creationId xmlns:a16="http://schemas.microsoft.com/office/drawing/2014/main" id="{C4738C8F-6A06-4B04-8998-41615C179770}"/>
               </a:ext>
             </a:extLst>
           </p:cNvPr>
@@ -12050,10 +12107,10 @@
       </p:sp>
       <p:sp>
         <p:nvSpPr>
-          <p:cNvPr id="12" name="c3-text-226">
-            <a:extLst xmlns:a="http://schemas.openxmlformats.org/drawingml/2006/main">
-              <a:ext uri="{FF2B5EF4-FFF2-40B4-BE49-F238E27FC236}">
-                <a16:creationId xmlns:a16="http://schemas.microsoft.com/office/drawing/2014/main" id="{3558A142-AA4C-4438-9AE8-250E715B057E}"/>
+          <p:cNvPr id="12" name="c3-text-227">
+            <a:extLst xmlns:a="http://schemas.openxmlformats.org/drawingml/2006/main">
+              <a:ext uri="{FF2B5EF4-FFF2-40B4-BE49-F238E27FC236}">
+                <a16:creationId xmlns:a16="http://schemas.microsoft.com/office/drawing/2014/main" id="{BA2143F2-EE2B-40AC-AE67-A8E5F5DD19C6}"/>
               </a:ext>
             </a:extLst>
           </p:cNvPr>
@@ -12107,10 +12164,10 @@
       </p:sp>
       <p:sp>
         <p:nvSpPr>
-          <p:cNvPr id="13" name="c3-text-227">
-            <a:extLst xmlns:a="http://schemas.openxmlformats.org/drawingml/2006/main">
-              <a:ext uri="{FF2B5EF4-FFF2-40B4-BE49-F238E27FC236}">
-                <a16:creationId xmlns:a16="http://schemas.microsoft.com/office/drawing/2014/main" id="{41F057DC-201E-4358-8FBA-14044FEEBB6A}"/>
+          <p:cNvPr id="13" name="c3-text-228">
+            <a:extLst xmlns:a="http://schemas.openxmlformats.org/drawingml/2006/main">
+              <a:ext uri="{FF2B5EF4-FFF2-40B4-BE49-F238E27FC236}">
+                <a16:creationId xmlns:a16="http://schemas.microsoft.com/office/drawing/2014/main" id="{27FD9E15-7B46-46DA-B257-EC8C3A0C4D14}"/>
               </a:ext>
             </a:extLst>
           </p:cNvPr>
@@ -12164,11 +12221,11 @@
       </p:sp>
       <p:sp>
         <p:nvSpPr>
-          <p:cNvPr id="14" name="c3-text-228">
-            <a:hlinkClick xmlns:r="http://schemas.openxmlformats.org/officeDocument/2006/relationships" xmlns:a="http://schemas.openxmlformats.org/drawingml/2006/main" r:id="Rbd00344792a74bda"/>
-            <a:extLst xmlns:a="http://schemas.openxmlformats.org/drawingml/2006/main">
-              <a:ext uri="{FF2B5EF4-FFF2-40B4-BE49-F238E27FC236}">
-                <a16:creationId xmlns:a16="http://schemas.microsoft.com/office/drawing/2014/main" id="{E5B175E2-640B-464A-A1E2-DA70D8C628C4}"/>
+          <p:cNvPr id="14" name="c3-text-229">
+            <a:hlinkClick xmlns:r="http://schemas.openxmlformats.org/officeDocument/2006/relationships" xmlns:a="http://schemas.openxmlformats.org/drawingml/2006/main" r:id="R4ce74e8f533b4cae"/>
+            <a:extLst xmlns:a="http://schemas.openxmlformats.org/drawingml/2006/main">
+              <a:ext uri="{FF2B5EF4-FFF2-40B4-BE49-F238E27FC236}">
+                <a16:creationId xmlns:a16="http://schemas.microsoft.com/office/drawing/2014/main" id="{3F12EDB6-CDA3-44F6-9FB5-27D43B29D2A2}"/>
               </a:ext>
             </a:extLst>
           </p:cNvPr>
@@ -12222,11 +12279,11 @@
       </p:sp>
       <p:sp>
         <p:nvSpPr>
-          <p:cNvPr id="15" name="c3-text-229">
-            <a:hlinkClick xmlns:r="http://schemas.openxmlformats.org/officeDocument/2006/relationships" xmlns:a="http://schemas.openxmlformats.org/drawingml/2006/main" r:id="R7eb35aad35ea46fc"/>
-            <a:extLst xmlns:a="http://schemas.openxmlformats.org/drawingml/2006/main">
-              <a:ext uri="{FF2B5EF4-FFF2-40B4-BE49-F238E27FC236}">
-                <a16:creationId xmlns:a16="http://schemas.microsoft.com/office/drawing/2014/main" id="{5CE2DD7A-C1AB-4E97-A144-A63AFA0AA7FB}"/>
+          <p:cNvPr id="15" name="c3-text-230">
+            <a:hlinkClick xmlns:r="http://schemas.openxmlformats.org/officeDocument/2006/relationships" xmlns:a="http://schemas.openxmlformats.org/drawingml/2006/main" r:id="R3b7ea3e29d2e49db"/>
+            <a:extLst xmlns:a="http://schemas.openxmlformats.org/drawingml/2006/main">
+              <a:ext uri="{FF2B5EF4-FFF2-40B4-BE49-F238E27FC236}">
+                <a16:creationId xmlns:a16="http://schemas.microsoft.com/office/drawing/2014/main" id="{B0F9D8E6-EDCE-44AC-8751-40DC3563B857}"/>
               </a:ext>
             </a:extLst>
           </p:cNvPr>
@@ -12280,10 +12337,10 @@
       </p:sp>
       <p:sp>
         <p:nvSpPr>
-          <p:cNvPr id="16" name="c3-text-230">
-            <a:extLst xmlns:a="http://schemas.openxmlformats.org/drawingml/2006/main">
-              <a:ext uri="{FF2B5EF4-FFF2-40B4-BE49-F238E27FC236}">
-                <a16:creationId xmlns:a16="http://schemas.microsoft.com/office/drawing/2014/main" id="{E29F2FAB-797A-45A5-B4EC-BDB2D1615825}"/>
+          <p:cNvPr id="16" name="c3-text-231">
+            <a:extLst xmlns:a="http://schemas.openxmlformats.org/drawingml/2006/main">
+              <a:ext uri="{FF2B5EF4-FFF2-40B4-BE49-F238E27FC236}">
+                <a16:creationId xmlns:a16="http://schemas.microsoft.com/office/drawing/2014/main" id="{304144EA-DA42-4B93-B0EA-7F9E79A34051}"/>
               </a:ext>
             </a:extLst>
           </p:cNvPr>
@@ -12337,10 +12394,10 @@
       </p:sp>
       <p:sp>
         <p:nvSpPr>
-          <p:cNvPr id="17" name="c3-text-346">
-            <a:extLst xmlns:a="http://schemas.openxmlformats.org/drawingml/2006/main">
-              <a:ext uri="{FF2B5EF4-FFF2-40B4-BE49-F238E27FC236}">
-                <a16:creationId xmlns:a16="http://schemas.microsoft.com/office/drawing/2014/main" id="{9205BEF3-568A-4E15-A35F-3EA780E7C668}"/>
+          <p:cNvPr id="17" name="c3-text-347">
+            <a:extLst xmlns:a="http://schemas.openxmlformats.org/drawingml/2006/main">
+              <a:ext uri="{FF2B5EF4-FFF2-40B4-BE49-F238E27FC236}">
+                <a16:creationId xmlns:a16="http://schemas.microsoft.com/office/drawing/2014/main" id="{208B34C0-1F40-49BB-9C7A-B11FEAB4B797}"/>
               </a:ext>
             </a:extLst>
           </p:cNvPr>
@@ -12395,7 +12452,7 @@
     </p:spTree>
     <p:extLst>
       <p:ext uri="{BB962C8B-B14F-4D97-AF65-F5344CB8AC3E}">
-        <p14:creationId xmlns:p14="http://schemas.microsoft.com/office/powerpoint/2010/main" val="386127341"/>
+        <p14:creationId xmlns:p14="http://schemas.microsoft.com/office/powerpoint/2010/main" val="899019000"/>
       </p:ext>
     </p:extLst>
   </p:cSld>
@@ -12423,10 +12480,10 @@
       </p:grpSpPr>
       <p:sp>
         <p:nvSpPr>
-          <p:cNvPr id="10" name="c3-text-231">
-            <a:extLst xmlns:a="http://schemas.openxmlformats.org/drawingml/2006/main">
-              <a:ext uri="{FF2B5EF4-FFF2-40B4-BE49-F238E27FC236}">
-                <a16:creationId xmlns:a16="http://schemas.microsoft.com/office/drawing/2014/main" id="{97142F02-A5BD-4C0C-9B6C-DDAF953CAA8B}"/>
+          <p:cNvPr id="10" name="c3-text-232">
+            <a:extLst xmlns:a="http://schemas.openxmlformats.org/drawingml/2006/main">
+              <a:ext uri="{FF2B5EF4-FFF2-40B4-BE49-F238E27FC236}">
+                <a16:creationId xmlns:a16="http://schemas.microsoft.com/office/drawing/2014/main" id="{A06FD4EB-58F3-4307-A2CD-ECFC067B73A6}"/>
               </a:ext>
             </a:extLst>
           </p:cNvPr>
@@ -12480,10 +12537,10 @@
       </p:sp>
       <p:sp>
         <p:nvSpPr>
-          <p:cNvPr id="2" name="c3-text-232">
-            <a:extLst xmlns:a="http://schemas.openxmlformats.org/drawingml/2006/main">
-              <a:ext uri="{FF2B5EF4-FFF2-40B4-BE49-F238E27FC236}">
-                <a16:creationId xmlns:a16="http://schemas.microsoft.com/office/drawing/2014/main" id="{6AEF2B25-5A0C-4DB2-A2ED-CBA52A44BFF1}"/>
+          <p:cNvPr id="2" name="c3-text-233">
+            <a:extLst xmlns:a="http://schemas.openxmlformats.org/drawingml/2006/main">
+              <a:ext uri="{FF2B5EF4-FFF2-40B4-BE49-F238E27FC236}">
+                <a16:creationId xmlns:a16="http://schemas.microsoft.com/office/drawing/2014/main" id="{32B5F6E2-C2EC-477A-AB1E-B4A8272034E6}"/>
               </a:ext>
             </a:extLst>
           </p:cNvPr>
@@ -12537,10 +12594,10 @@
       </p:sp>
       <p:sp>
         <p:nvSpPr>
-          <p:cNvPr id="3" name="c3-text-233">
-            <a:extLst xmlns:a="http://schemas.openxmlformats.org/drawingml/2006/main">
-              <a:ext uri="{FF2B5EF4-FFF2-40B4-BE49-F238E27FC236}">
-                <a16:creationId xmlns:a16="http://schemas.microsoft.com/office/drawing/2014/main" id="{AB0CC948-7476-4733-9CFF-40FE08D177F8}"/>
+          <p:cNvPr id="3" name="c3-text-234">
+            <a:extLst xmlns:a="http://schemas.openxmlformats.org/drawingml/2006/main">
+              <a:ext uri="{FF2B5EF4-FFF2-40B4-BE49-F238E27FC236}">
+                <a16:creationId xmlns:a16="http://schemas.microsoft.com/office/drawing/2014/main" id="{E948C89F-59D3-49AC-BFCB-047CD21C0F9D}"/>
               </a:ext>
             </a:extLst>
           </p:cNvPr>
@@ -12594,10 +12651,10 @@
       </p:sp>
       <p:sp>
         <p:nvSpPr>
-          <p:cNvPr id="4" name="c3-text-234">
-            <a:extLst xmlns:a="http://schemas.openxmlformats.org/drawingml/2006/main">
-              <a:ext uri="{FF2B5EF4-FFF2-40B4-BE49-F238E27FC236}">
-                <a16:creationId xmlns:a16="http://schemas.microsoft.com/office/drawing/2014/main" id="{335B7447-15F2-4318-A99D-A913B56939A3}"/>
+          <p:cNvPr id="4" name="c3-text-235">
+            <a:extLst xmlns:a="http://schemas.openxmlformats.org/drawingml/2006/main">
+              <a:ext uri="{FF2B5EF4-FFF2-40B4-BE49-F238E27FC236}">
+                <a16:creationId xmlns:a16="http://schemas.microsoft.com/office/drawing/2014/main" id="{487A51CB-B402-4008-B172-586C8455A6BF}"/>
               </a:ext>
             </a:extLst>
           </p:cNvPr>
@@ -12651,10 +12708,10 @@
       </p:sp>
       <p:sp>
         <p:nvSpPr>
-          <p:cNvPr id="5" name="c3-text-235">
-            <a:extLst xmlns:a="http://schemas.openxmlformats.org/drawingml/2006/main">
-              <a:ext uri="{FF2B5EF4-FFF2-40B4-BE49-F238E27FC236}">
-                <a16:creationId xmlns:a16="http://schemas.microsoft.com/office/drawing/2014/main" id="{3892D147-3E1D-4A22-9CB1-5E82D3D28405}"/>
+          <p:cNvPr id="5" name="c3-text-236">
+            <a:extLst xmlns:a="http://schemas.openxmlformats.org/drawingml/2006/main">
+              <a:ext uri="{FF2B5EF4-FFF2-40B4-BE49-F238E27FC236}">
+                <a16:creationId xmlns:a16="http://schemas.microsoft.com/office/drawing/2014/main" id="{4687F19A-7603-41B2-B0D5-B71FB5195D47}"/>
               </a:ext>
             </a:extLst>
           </p:cNvPr>
@@ -12708,10 +12765,10 @@
       </p:sp>
       <p:sp>
         <p:nvSpPr>
-          <p:cNvPr id="6" name="c3-text-236">
-            <a:extLst xmlns:a="http://schemas.openxmlformats.org/drawingml/2006/main">
-              <a:ext uri="{FF2B5EF4-FFF2-40B4-BE49-F238E27FC236}">
-                <a16:creationId xmlns:a16="http://schemas.microsoft.com/office/drawing/2014/main" id="{062F99A4-5D06-4D99-9BAA-7DC87AE8E77F}"/>
+          <p:cNvPr id="6" name="c3-text-237">
+            <a:extLst xmlns:a="http://schemas.openxmlformats.org/drawingml/2006/main">
+              <a:ext uri="{FF2B5EF4-FFF2-40B4-BE49-F238E27FC236}">
+                <a16:creationId xmlns:a16="http://schemas.microsoft.com/office/drawing/2014/main" id="{A111611B-07BF-41BD-B525-69D0B1E1A0EA}"/>
               </a:ext>
             </a:extLst>
           </p:cNvPr>
@@ -12765,10 +12822,10 @@
       </p:sp>
       <p:sp>
         <p:nvSpPr>
-          <p:cNvPr id="7" name="c3-text-237">
-            <a:extLst xmlns:a="http://schemas.openxmlformats.org/drawingml/2006/main">
-              <a:ext uri="{FF2B5EF4-FFF2-40B4-BE49-F238E27FC236}">
-                <a16:creationId xmlns:a16="http://schemas.microsoft.com/office/drawing/2014/main" id="{AB67416A-8BE2-49CA-A4C8-964496C33D2C}"/>
+          <p:cNvPr id="7" name="c3-text-238">
+            <a:extLst xmlns:a="http://schemas.openxmlformats.org/drawingml/2006/main">
+              <a:ext uri="{FF2B5EF4-FFF2-40B4-BE49-F238E27FC236}">
+                <a16:creationId xmlns:a16="http://schemas.microsoft.com/office/drawing/2014/main" id="{BD17C9EB-D5E9-43E7-9B58-43E1C236EC49}"/>
               </a:ext>
             </a:extLst>
           </p:cNvPr>
@@ -12815,18 +12872,18 @@
                 <a:ea typeface="Calibri"/>
                 <a:cs typeface="Calibri"/>
               </a:rPr>
-              <a:t>4. Open the codex-demo folder in VS Code and start a chat.</a:t>
-            </a:r>
-          </a:p>
-        </p:txBody>
-      </p:sp>
-      <p:sp>
-        <p:nvSpPr>
-          <p:cNvPr id="8" name="c3-text-238">
-            <a:hlinkClick xmlns:r="http://schemas.openxmlformats.org/officeDocument/2006/relationships" xmlns:a="http://schemas.openxmlformats.org/drawingml/2006/main" r:id="Rda260804d73a4db3"/>
-            <a:extLst xmlns:a="http://schemas.openxmlformats.org/drawingml/2006/main">
-              <a:ext uri="{FF2B5EF4-FFF2-40B4-BE49-F238E27FC236}">
-                <a16:creationId xmlns:a16="http://schemas.microsoft.com/office/drawing/2014/main" id="{B72B8FEE-5C73-47DE-BE85-2ED08A0CBC06}"/>
+              <a:t>4. Create and open an empty codex-demo folder. Start a chat.</a:t>
+            </a:r>
+          </a:p>
+        </p:txBody>
+      </p:sp>
+      <p:sp>
+        <p:nvSpPr>
+          <p:cNvPr id="8" name="c3-text-239">
+            <a:hlinkClick xmlns:r="http://schemas.openxmlformats.org/officeDocument/2006/relationships" xmlns:a="http://schemas.openxmlformats.org/drawingml/2006/main" r:id="Re0bb6cada2c9425a"/>
+            <a:extLst xmlns:a="http://schemas.openxmlformats.org/drawingml/2006/main">
+              <a:ext uri="{FF2B5EF4-FFF2-40B4-BE49-F238E27FC236}">
+                <a16:creationId xmlns:a16="http://schemas.microsoft.com/office/drawing/2014/main" id="{8C85D787-F7D8-4ADC-89D0-04841E696A53}"/>
               </a:ext>
             </a:extLst>
           </p:cNvPr>
@@ -12880,10 +12937,10 @@
       </p:sp>
       <p:sp>
         <p:nvSpPr>
-          <p:cNvPr id="9" name="c3-text-347">
-            <a:extLst xmlns:a="http://schemas.openxmlformats.org/drawingml/2006/main">
-              <a:ext uri="{FF2B5EF4-FFF2-40B4-BE49-F238E27FC236}">
-                <a16:creationId xmlns:a16="http://schemas.microsoft.com/office/drawing/2014/main" id="{061F7C1D-F250-4B34-942E-2CB607C0A96F}"/>
+          <p:cNvPr id="9" name="c3-text-348">
+            <a:extLst xmlns:a="http://schemas.openxmlformats.org/drawingml/2006/main">
+              <a:ext uri="{FF2B5EF4-FFF2-40B4-BE49-F238E27FC236}">
+                <a16:creationId xmlns:a16="http://schemas.microsoft.com/office/drawing/2014/main" id="{CE678793-8A41-457E-B4CE-A2E6CD2B72FB}"/>
               </a:ext>
             </a:extLst>
           </p:cNvPr>
@@ -12938,7 +12995,7 @@
     </p:spTree>
     <p:extLst>
       <p:ext uri="{BB962C8B-B14F-4D97-AF65-F5344CB8AC3E}">
-        <p14:creationId xmlns:p14="http://schemas.microsoft.com/office/powerpoint/2010/main" val="2044670408"/>
+        <p14:creationId xmlns:p14="http://schemas.microsoft.com/office/powerpoint/2010/main" val="1603879359"/>
       </p:ext>
     </p:extLst>
   </p:cSld>
@@ -12966,10 +13023,10 @@
       </p:grpSpPr>
       <p:sp>
         <p:nvSpPr>
-          <p:cNvPr id="8" name="c3-text-239">
-            <a:extLst xmlns:a="http://schemas.openxmlformats.org/drawingml/2006/main">
-              <a:ext uri="{FF2B5EF4-FFF2-40B4-BE49-F238E27FC236}">
-                <a16:creationId xmlns:a16="http://schemas.microsoft.com/office/drawing/2014/main" id="{388846F4-BCD9-48FB-81D2-9E095F0D7F98}"/>
+          <p:cNvPr id="8" name="c3-text-240">
+            <a:extLst xmlns:a="http://schemas.openxmlformats.org/drawingml/2006/main">
+              <a:ext uri="{FF2B5EF4-FFF2-40B4-BE49-F238E27FC236}">
+                <a16:creationId xmlns:a16="http://schemas.microsoft.com/office/drawing/2014/main" id="{7081193A-DBC3-4D6D-BE7B-882BE07F27F0}"/>
               </a:ext>
             </a:extLst>
           </p:cNvPr>
@@ -13023,10 +13080,10 @@
       </p:sp>
       <p:sp>
         <p:nvSpPr>
-          <p:cNvPr id="2" name="c3-text-240">
-            <a:extLst xmlns:a="http://schemas.openxmlformats.org/drawingml/2006/main">
-              <a:ext uri="{FF2B5EF4-FFF2-40B4-BE49-F238E27FC236}">
-                <a16:creationId xmlns:a16="http://schemas.microsoft.com/office/drawing/2014/main" id="{A98DCB60-850F-4863-99B2-5AA396B84B54}"/>
+          <p:cNvPr id="2" name="c3-text-241">
+            <a:extLst xmlns:a="http://schemas.openxmlformats.org/drawingml/2006/main">
+              <a:ext uri="{FF2B5EF4-FFF2-40B4-BE49-F238E27FC236}">
+                <a16:creationId xmlns:a16="http://schemas.microsoft.com/office/drawing/2014/main" id="{FCB1AB67-A5E1-4595-92FE-0ECC27793716}"/>
               </a:ext>
             </a:extLst>
           </p:cNvPr>
@@ -13080,10 +13137,10 @@
       </p:sp>
       <p:sp>
         <p:nvSpPr>
-          <p:cNvPr id="3" name="c3-text-241">
-            <a:extLst xmlns:a="http://schemas.openxmlformats.org/drawingml/2006/main">
-              <a:ext uri="{FF2B5EF4-FFF2-40B4-BE49-F238E27FC236}">
-                <a16:creationId xmlns:a16="http://schemas.microsoft.com/office/drawing/2014/main" id="{4F9A66ED-383E-407B-8994-6274468823D6}"/>
+          <p:cNvPr id="3" name="c3-text-242">
+            <a:extLst xmlns:a="http://schemas.openxmlformats.org/drawingml/2006/main">
+              <a:ext uri="{FF2B5EF4-FFF2-40B4-BE49-F238E27FC236}">
+                <a16:creationId xmlns:a16="http://schemas.microsoft.com/office/drawing/2014/main" id="{1235C180-5A1D-4F32-9DD8-194E5D277D19}"/>
               </a:ext>
             </a:extLst>
           </p:cNvPr>
@@ -13137,10 +13194,10 @@
       </p:sp>
       <p:sp>
         <p:nvSpPr>
-          <p:cNvPr id="4" name="c3-text-242">
-            <a:extLst xmlns:a="http://schemas.openxmlformats.org/drawingml/2006/main">
-              <a:ext uri="{FF2B5EF4-FFF2-40B4-BE49-F238E27FC236}">
-                <a16:creationId xmlns:a16="http://schemas.microsoft.com/office/drawing/2014/main" id="{3401ADD3-1E9A-4B62-9038-3276D7B21B00}"/>
+          <p:cNvPr id="4" name="c3-text-243">
+            <a:extLst xmlns:a="http://schemas.openxmlformats.org/drawingml/2006/main">
+              <a:ext uri="{FF2B5EF4-FFF2-40B4-BE49-F238E27FC236}">
+                <a16:creationId xmlns:a16="http://schemas.microsoft.com/office/drawing/2014/main" id="{CF25B153-028B-49B6-AC9C-565E6E63C593}"/>
               </a:ext>
             </a:extLst>
           </p:cNvPr>
@@ -13194,10 +13251,10 @@
       </p:sp>
       <p:sp>
         <p:nvSpPr>
-          <p:cNvPr id="5" name="c3-text-243">
-            <a:extLst xmlns:a="http://schemas.openxmlformats.org/drawingml/2006/main">
-              <a:ext uri="{FF2B5EF4-FFF2-40B4-BE49-F238E27FC236}">
-                <a16:creationId xmlns:a16="http://schemas.microsoft.com/office/drawing/2014/main" id="{0F778CDB-32A2-4833-BA82-BD6A8B2607B4}"/>
+          <p:cNvPr id="5" name="c3-text-244">
+            <a:extLst xmlns:a="http://schemas.openxmlformats.org/drawingml/2006/main">
+              <a:ext uri="{FF2B5EF4-FFF2-40B4-BE49-F238E27FC236}">
+                <a16:creationId xmlns:a16="http://schemas.microsoft.com/office/drawing/2014/main" id="{D3FB5585-A651-4E8D-B362-5ED4B711000F}"/>
               </a:ext>
             </a:extLst>
           </p:cNvPr>
@@ -13320,10 +13377,10 @@
       </p:sp>
       <p:sp>
         <p:nvSpPr>
-          <p:cNvPr id="6" name="c3-text-244">
-            <a:extLst xmlns:a="http://schemas.openxmlformats.org/drawingml/2006/main">
-              <a:ext uri="{FF2B5EF4-FFF2-40B4-BE49-F238E27FC236}">
-                <a16:creationId xmlns:a16="http://schemas.microsoft.com/office/drawing/2014/main" id="{6B9CF057-6DFE-43E2-AD9E-52CB635C84AA}"/>
+          <p:cNvPr id="6" name="c3-text-245">
+            <a:extLst xmlns:a="http://schemas.openxmlformats.org/drawingml/2006/main">
+              <a:ext uri="{FF2B5EF4-FFF2-40B4-BE49-F238E27FC236}">
+                <a16:creationId xmlns:a16="http://schemas.microsoft.com/office/drawing/2014/main" id="{00DFB014-4AD0-41B1-850F-3DED794138A5}"/>
               </a:ext>
             </a:extLst>
           </p:cNvPr>
@@ -13377,10 +13434,10 @@
       </p:sp>
       <p:sp>
         <p:nvSpPr>
-          <p:cNvPr id="7" name="c3-text-348">
-            <a:extLst xmlns:a="http://schemas.openxmlformats.org/drawingml/2006/main">
-              <a:ext uri="{FF2B5EF4-FFF2-40B4-BE49-F238E27FC236}">
-                <a16:creationId xmlns:a16="http://schemas.microsoft.com/office/drawing/2014/main" id="{F755E782-D2AE-4B77-BCE5-CF7D4A21698F}"/>
+          <p:cNvPr id="7" name="c3-text-349">
+            <a:extLst xmlns:a="http://schemas.openxmlformats.org/drawingml/2006/main">
+              <a:ext uri="{FF2B5EF4-FFF2-40B4-BE49-F238E27FC236}">
+                <a16:creationId xmlns:a16="http://schemas.microsoft.com/office/drawing/2014/main" id="{4BD5D585-7DD1-4DF7-A3EA-ED0149BDA46C}"/>
               </a:ext>
             </a:extLst>
           </p:cNvPr>
@@ -13435,7 +13492,7 @@
     </p:spTree>
     <p:extLst>
       <p:ext uri="{BB962C8B-B14F-4D97-AF65-F5344CB8AC3E}">
-        <p14:creationId xmlns:p14="http://schemas.microsoft.com/office/powerpoint/2010/main" val="1415975028"/>
+        <p14:creationId xmlns:p14="http://schemas.microsoft.com/office/powerpoint/2010/main" val="1353133172"/>
       </p:ext>
     </p:extLst>
   </p:cSld>
@@ -13463,10 +13520,10 @@
       </p:grpSpPr>
       <p:sp>
         <p:nvSpPr>
-          <p:cNvPr id="8" name="c3-text-245">
-            <a:extLst xmlns:a="http://schemas.openxmlformats.org/drawingml/2006/main">
-              <a:ext uri="{FF2B5EF4-FFF2-40B4-BE49-F238E27FC236}">
-                <a16:creationId xmlns:a16="http://schemas.microsoft.com/office/drawing/2014/main" id="{0AB9F3AE-8A23-4637-AA3C-7118C716B7B1}"/>
+          <p:cNvPr id="8" name="c3-text-246">
+            <a:extLst xmlns:a="http://schemas.openxmlformats.org/drawingml/2006/main">
+              <a:ext uri="{FF2B5EF4-FFF2-40B4-BE49-F238E27FC236}">
+                <a16:creationId xmlns:a16="http://schemas.microsoft.com/office/drawing/2014/main" id="{EB2DC17B-2A13-4917-B0E8-F09A5C856D8B}"/>
               </a:ext>
             </a:extLst>
           </p:cNvPr>
@@ -13520,10 +13577,10 @@
       </p:sp>
       <p:sp>
         <p:nvSpPr>
-          <p:cNvPr id="2" name="c3-text-246">
-            <a:extLst xmlns:a="http://schemas.openxmlformats.org/drawingml/2006/main">
-              <a:ext uri="{FF2B5EF4-FFF2-40B4-BE49-F238E27FC236}">
-                <a16:creationId xmlns:a16="http://schemas.microsoft.com/office/drawing/2014/main" id="{2E95A778-7353-4564-9306-6A064490E852}"/>
+          <p:cNvPr id="2" name="c3-text-247">
+            <a:extLst xmlns:a="http://schemas.openxmlformats.org/drawingml/2006/main">
+              <a:ext uri="{FF2B5EF4-FFF2-40B4-BE49-F238E27FC236}">
+                <a16:creationId xmlns:a16="http://schemas.microsoft.com/office/drawing/2014/main" id="{AD5969E7-94A5-4E85-8E3D-4BCEE8D26992}"/>
               </a:ext>
             </a:extLst>
           </p:cNvPr>
@@ -13577,10 +13634,10 @@
       </p:sp>
       <p:sp>
         <p:nvSpPr>
-          <p:cNvPr id="3" name="c3-text-247">
-            <a:extLst xmlns:a="http://schemas.openxmlformats.org/drawingml/2006/main">
-              <a:ext uri="{FF2B5EF4-FFF2-40B4-BE49-F238E27FC236}">
-                <a16:creationId xmlns:a16="http://schemas.microsoft.com/office/drawing/2014/main" id="{40F41678-61AE-41E8-8CCD-B118EA5054AB}"/>
+          <p:cNvPr id="3" name="c3-text-248">
+            <a:extLst xmlns:a="http://schemas.openxmlformats.org/drawingml/2006/main">
+              <a:ext uri="{FF2B5EF4-FFF2-40B4-BE49-F238E27FC236}">
+                <a16:creationId xmlns:a16="http://schemas.microsoft.com/office/drawing/2014/main" id="{BC3B66D9-A460-40A9-9585-D30411EF52C1}"/>
               </a:ext>
             </a:extLst>
           </p:cNvPr>
@@ -13634,10 +13691,10 @@
       </p:sp>
       <p:sp>
         <p:nvSpPr>
-          <p:cNvPr id="4" name="c3-text-248">
-            <a:extLst xmlns:a="http://schemas.openxmlformats.org/drawingml/2006/main">
-              <a:ext uri="{FF2B5EF4-FFF2-40B4-BE49-F238E27FC236}">
-                <a16:creationId xmlns:a16="http://schemas.microsoft.com/office/drawing/2014/main" id="{B7CF7F90-3FD0-49E4-809E-418228BE1FDF}"/>
+          <p:cNvPr id="4" name="c3-text-249">
+            <a:extLst xmlns:a="http://schemas.openxmlformats.org/drawingml/2006/main">
+              <a:ext uri="{FF2B5EF4-FFF2-40B4-BE49-F238E27FC236}">
+                <a16:creationId xmlns:a16="http://schemas.microsoft.com/office/drawing/2014/main" id="{E980DECF-743C-4B9A-801A-14868FF8EB1C}"/>
               </a:ext>
             </a:extLst>
           </p:cNvPr>
@@ -13691,10 +13748,10 @@
       </p:sp>
       <p:sp>
         <p:nvSpPr>
-          <p:cNvPr id="5" name="c3-text-249">
-            <a:extLst xmlns:a="http://schemas.openxmlformats.org/drawingml/2006/main">
-              <a:ext uri="{FF2B5EF4-FFF2-40B4-BE49-F238E27FC236}">
-                <a16:creationId xmlns:a16="http://schemas.microsoft.com/office/drawing/2014/main" id="{A5C38DBC-6DC3-4460-8B13-85A6B4B04044}"/>
+          <p:cNvPr id="5" name="c3-text-250">
+            <a:extLst xmlns:a="http://schemas.openxmlformats.org/drawingml/2006/main">
+              <a:ext uri="{FF2B5EF4-FFF2-40B4-BE49-F238E27FC236}">
+                <a16:creationId xmlns:a16="http://schemas.microsoft.com/office/drawing/2014/main" id="{207274CD-1BF7-4811-8DF7-83F723F2B162}"/>
               </a:ext>
             </a:extLst>
           </p:cNvPr>
@@ -13748,10 +13805,10 @@
       </p:sp>
       <p:sp>
         <p:nvSpPr>
-          <p:cNvPr id="6" name="c3-text-250">
-            <a:extLst xmlns:a="http://schemas.openxmlformats.org/drawingml/2006/main">
-              <a:ext uri="{FF2B5EF4-FFF2-40B4-BE49-F238E27FC236}">
-                <a16:creationId xmlns:a16="http://schemas.microsoft.com/office/drawing/2014/main" id="{EEA0DD6B-9826-4A7D-BA20-CAE520A42634}"/>
+          <p:cNvPr id="6" name="c3-text-251">
+            <a:extLst xmlns:a="http://schemas.openxmlformats.org/drawingml/2006/main">
+              <a:ext uri="{FF2B5EF4-FFF2-40B4-BE49-F238E27FC236}">
+                <a16:creationId xmlns:a16="http://schemas.microsoft.com/office/drawing/2014/main" id="{ED6D8A9A-FA7D-4EC9-95D4-165A88B82140}"/>
               </a:ext>
             </a:extLst>
           </p:cNvPr>
@@ -13805,10 +13862,10 @@
       </p:sp>
       <p:sp>
         <p:nvSpPr>
-          <p:cNvPr id="7" name="c3-text-349">
-            <a:extLst xmlns:a="http://schemas.openxmlformats.org/drawingml/2006/main">
-              <a:ext uri="{FF2B5EF4-FFF2-40B4-BE49-F238E27FC236}">
-                <a16:creationId xmlns:a16="http://schemas.microsoft.com/office/drawing/2014/main" id="{93BAF674-C694-4455-B620-13301CAE8A3D}"/>
+          <p:cNvPr id="7" name="c3-text-350">
+            <a:extLst xmlns:a="http://schemas.openxmlformats.org/drawingml/2006/main">
+              <a:ext uri="{FF2B5EF4-FFF2-40B4-BE49-F238E27FC236}">
+                <a16:creationId xmlns:a16="http://schemas.microsoft.com/office/drawing/2014/main" id="{D21A9589-6EB4-488B-B9A0-1C30DC99962D}"/>
               </a:ext>
             </a:extLst>
           </p:cNvPr>
@@ -13863,7 +13920,7 @@
     </p:spTree>
     <p:extLst>
       <p:ext uri="{BB962C8B-B14F-4D97-AF65-F5344CB8AC3E}">
-        <p14:creationId xmlns:p14="http://schemas.microsoft.com/office/powerpoint/2010/main" val="643208727"/>
+        <p14:creationId xmlns:p14="http://schemas.microsoft.com/office/powerpoint/2010/main" val="770769477"/>
       </p:ext>
     </p:extLst>
   </p:cSld>
@@ -13891,10 +13948,10 @@
       </p:grpSpPr>
       <p:sp>
         <p:nvSpPr>
-          <p:cNvPr id="7" name="c3-text-251">
-            <a:extLst xmlns:a="http://schemas.openxmlformats.org/drawingml/2006/main">
-              <a:ext uri="{FF2B5EF4-FFF2-40B4-BE49-F238E27FC236}">
-                <a16:creationId xmlns:a16="http://schemas.microsoft.com/office/drawing/2014/main" id="{00B7CFA3-A93C-4468-A3A3-C979A075D48C}"/>
+          <p:cNvPr id="7" name="c3-text-252">
+            <a:extLst xmlns:a="http://schemas.openxmlformats.org/drawingml/2006/main">
+              <a:ext uri="{FF2B5EF4-FFF2-40B4-BE49-F238E27FC236}">
+                <a16:creationId xmlns:a16="http://schemas.microsoft.com/office/drawing/2014/main" id="{B6636ACA-2256-4039-BE50-60C44D411DF9}"/>
               </a:ext>
             </a:extLst>
           </p:cNvPr>
@@ -13948,10 +14005,10 @@
       </p:sp>
       <p:sp>
         <p:nvSpPr>
-          <p:cNvPr id="2" name="c3-text-252">
-            <a:extLst xmlns:a="http://schemas.openxmlformats.org/drawingml/2006/main">
-              <a:ext uri="{FF2B5EF4-FFF2-40B4-BE49-F238E27FC236}">
-                <a16:creationId xmlns:a16="http://schemas.microsoft.com/office/drawing/2014/main" id="{52449A07-61D3-4FC1-9498-A6D2BF1BF72A}"/>
+          <p:cNvPr id="2" name="c3-text-253">
+            <a:extLst xmlns:a="http://schemas.openxmlformats.org/drawingml/2006/main">
+              <a:ext uri="{FF2B5EF4-FFF2-40B4-BE49-F238E27FC236}">
+                <a16:creationId xmlns:a16="http://schemas.microsoft.com/office/drawing/2014/main" id="{7F6A631E-1E8B-43D8-AF03-07E95702C316}"/>
               </a:ext>
             </a:extLst>
           </p:cNvPr>
@@ -14005,10 +14062,10 @@
       </p:sp>
       <p:sp>
         <p:nvSpPr>
-          <p:cNvPr id="3" name="c3-text-253">
-            <a:extLst xmlns:a="http://schemas.openxmlformats.org/drawingml/2006/main">
-              <a:ext uri="{FF2B5EF4-FFF2-40B4-BE49-F238E27FC236}">
-                <a16:creationId xmlns:a16="http://schemas.microsoft.com/office/drawing/2014/main" id="{92C9A617-8BED-4336-A4C6-4F37F56E2FF5}"/>
+          <p:cNvPr id="3" name="c3-text-254">
+            <a:extLst xmlns:a="http://schemas.openxmlformats.org/drawingml/2006/main">
+              <a:ext uri="{FF2B5EF4-FFF2-40B4-BE49-F238E27FC236}">
+                <a16:creationId xmlns:a16="http://schemas.microsoft.com/office/drawing/2014/main" id="{ECDD8819-A866-4F1E-B589-63EEE49FF05A}"/>
               </a:ext>
             </a:extLst>
           </p:cNvPr>
@@ -14062,10 +14119,10 @@
       </p:sp>
       <p:sp>
         <p:nvSpPr>
-          <p:cNvPr id="4" name="c3-text-254">
-            <a:extLst xmlns:a="http://schemas.openxmlformats.org/drawingml/2006/main">
-              <a:ext uri="{FF2B5EF4-FFF2-40B4-BE49-F238E27FC236}">
-                <a16:creationId xmlns:a16="http://schemas.microsoft.com/office/drawing/2014/main" id="{2E460722-2D68-4696-ABF0-F47EC24B0395}"/>
+          <p:cNvPr id="4" name="c3-text-255">
+            <a:extLst xmlns:a="http://schemas.openxmlformats.org/drawingml/2006/main">
+              <a:ext uri="{FF2B5EF4-FFF2-40B4-BE49-F238E27FC236}">
+                <a16:creationId xmlns:a16="http://schemas.microsoft.com/office/drawing/2014/main" id="{9F309169-4CBB-44B2-A859-8DD18E8FD684}"/>
               </a:ext>
             </a:extLst>
           </p:cNvPr>
@@ -14280,10 +14337,10 @@
       </p:sp>
       <p:sp>
         <p:nvSpPr>
-          <p:cNvPr id="5" name="c3-text-255">
-            <a:extLst xmlns:a="http://schemas.openxmlformats.org/drawingml/2006/main">
-              <a:ext uri="{FF2B5EF4-FFF2-40B4-BE49-F238E27FC236}">
-                <a16:creationId xmlns:a16="http://schemas.microsoft.com/office/drawing/2014/main" id="{CE6BC9CE-C183-483A-92D5-EEC96AD696CF}"/>
+          <p:cNvPr id="5" name="c3-text-256">
+            <a:extLst xmlns:a="http://schemas.openxmlformats.org/drawingml/2006/main">
+              <a:ext uri="{FF2B5EF4-FFF2-40B4-BE49-F238E27FC236}">
+                <a16:creationId xmlns:a16="http://schemas.microsoft.com/office/drawing/2014/main" id="{434AEF7C-B2ED-4535-B06B-286A1AA6C95E}"/>
               </a:ext>
             </a:extLst>
           </p:cNvPr>
@@ -14337,10 +14394,10 @@
       </p:sp>
       <p:sp>
         <p:nvSpPr>
-          <p:cNvPr id="6" name="c3-text-350">
-            <a:extLst xmlns:a="http://schemas.openxmlformats.org/drawingml/2006/main">
-              <a:ext uri="{FF2B5EF4-FFF2-40B4-BE49-F238E27FC236}">
-                <a16:creationId xmlns:a16="http://schemas.microsoft.com/office/drawing/2014/main" id="{2BBA2F27-ED25-4559-816A-75A2D5CBD897}"/>
+          <p:cNvPr id="6" name="c3-text-351">
+            <a:extLst xmlns:a="http://schemas.openxmlformats.org/drawingml/2006/main">
+              <a:ext uri="{FF2B5EF4-FFF2-40B4-BE49-F238E27FC236}">
+                <a16:creationId xmlns:a16="http://schemas.microsoft.com/office/drawing/2014/main" id="{698BF551-3F49-4B50-9452-6BF462919A1B}"/>
               </a:ext>
             </a:extLst>
           </p:cNvPr>
@@ -14395,7 +14452,7 @@
     </p:spTree>
     <p:extLst>
       <p:ext uri="{BB962C8B-B14F-4D97-AF65-F5344CB8AC3E}">
-        <p14:creationId xmlns:p14="http://schemas.microsoft.com/office/powerpoint/2010/main" val="1734824745"/>
+        <p14:creationId xmlns:p14="http://schemas.microsoft.com/office/powerpoint/2010/main" val="366171344"/>
       </p:ext>
     </p:extLst>
   </p:cSld>
@@ -14423,10 +14480,10 @@
       </p:grpSpPr>
       <p:sp>
         <p:nvSpPr>
-          <p:cNvPr id="9" name="c3-text-256">
-            <a:extLst xmlns:a="http://schemas.openxmlformats.org/drawingml/2006/main">
-              <a:ext uri="{FF2B5EF4-FFF2-40B4-BE49-F238E27FC236}">
-                <a16:creationId xmlns:a16="http://schemas.microsoft.com/office/drawing/2014/main" id="{A5A5DEBE-68BB-4962-9B04-87664DA300C0}"/>
+          <p:cNvPr id="9" name="c3-text-257">
+            <a:extLst xmlns:a="http://schemas.openxmlformats.org/drawingml/2006/main">
+              <a:ext uri="{FF2B5EF4-FFF2-40B4-BE49-F238E27FC236}">
+                <a16:creationId xmlns:a16="http://schemas.microsoft.com/office/drawing/2014/main" id="{6552B080-39CA-4BFF-BD11-BF0391E89D09}"/>
               </a:ext>
             </a:extLst>
           </p:cNvPr>
@@ -14480,10 +14537,10 @@
       </p:sp>
       <p:sp>
         <p:nvSpPr>
-          <p:cNvPr id="2" name="c3-text-257">
-            <a:extLst xmlns:a="http://schemas.openxmlformats.org/drawingml/2006/main">
-              <a:ext uri="{FF2B5EF4-FFF2-40B4-BE49-F238E27FC236}">
-                <a16:creationId xmlns:a16="http://schemas.microsoft.com/office/drawing/2014/main" id="{DAC35777-5E1D-478A-BA60-714E1D1FBBFA}"/>
+          <p:cNvPr id="2" name="c3-text-258">
+            <a:extLst xmlns:a="http://schemas.openxmlformats.org/drawingml/2006/main">
+              <a:ext uri="{FF2B5EF4-FFF2-40B4-BE49-F238E27FC236}">
+                <a16:creationId xmlns:a16="http://schemas.microsoft.com/office/drawing/2014/main" id="{CEA6C9AC-AB5D-47B0-85B8-494E34BDEA9B}"/>
               </a:ext>
             </a:extLst>
           </p:cNvPr>
@@ -14537,10 +14594,10 @@
       </p:sp>
       <p:sp>
         <p:nvSpPr>
-          <p:cNvPr id="3" name="c3-text-258">
-            <a:extLst xmlns:a="http://schemas.openxmlformats.org/drawingml/2006/main">
-              <a:ext uri="{FF2B5EF4-FFF2-40B4-BE49-F238E27FC236}">
-                <a16:creationId xmlns:a16="http://schemas.microsoft.com/office/drawing/2014/main" id="{706F92E7-841C-4B3C-B0F1-B7BFAEC44128}"/>
+          <p:cNvPr id="3" name="c3-text-259">
+            <a:extLst xmlns:a="http://schemas.openxmlformats.org/drawingml/2006/main">
+              <a:ext uri="{FF2B5EF4-FFF2-40B4-BE49-F238E27FC236}">
+                <a16:creationId xmlns:a16="http://schemas.microsoft.com/office/drawing/2014/main" id="{B9094B7D-F211-4F17-8672-872FF12CC092}"/>
               </a:ext>
             </a:extLst>
           </p:cNvPr>
@@ -14594,10 +14651,10 @@
       </p:sp>
       <p:sp>
         <p:nvSpPr>
-          <p:cNvPr id="4" name="c3-text-259">
-            <a:extLst xmlns:a="http://schemas.openxmlformats.org/drawingml/2006/main">
-              <a:ext uri="{FF2B5EF4-FFF2-40B4-BE49-F238E27FC236}">
-                <a16:creationId xmlns:a16="http://schemas.microsoft.com/office/drawing/2014/main" id="{B5D2570D-5A6A-458D-9B85-1DD89A1A0F63}"/>
+          <p:cNvPr id="4" name="c3-text-260">
+            <a:extLst xmlns:a="http://schemas.openxmlformats.org/drawingml/2006/main">
+              <a:ext uri="{FF2B5EF4-FFF2-40B4-BE49-F238E27FC236}">
+                <a16:creationId xmlns:a16="http://schemas.microsoft.com/office/drawing/2014/main" id="{7D73893A-2770-4E4D-9466-2EABD59D0FF3}"/>
               </a:ext>
             </a:extLst>
           </p:cNvPr>
@@ -14651,10 +14708,10 @@
       </p:sp>
       <p:sp>
         <p:nvSpPr>
-          <p:cNvPr id="5" name="c3-text-260">
-            <a:extLst xmlns:a="http://schemas.openxmlformats.org/drawingml/2006/main">
-              <a:ext uri="{FF2B5EF4-FFF2-40B4-BE49-F238E27FC236}">
-                <a16:creationId xmlns:a16="http://schemas.microsoft.com/office/drawing/2014/main" id="{C177981E-DADB-4F0D-84FE-4AEC158323B5}"/>
+          <p:cNvPr id="5" name="c3-text-261">
+            <a:extLst xmlns:a="http://schemas.openxmlformats.org/drawingml/2006/main">
+              <a:ext uri="{FF2B5EF4-FFF2-40B4-BE49-F238E27FC236}">
+                <a16:creationId xmlns:a16="http://schemas.microsoft.com/office/drawing/2014/main" id="{6A96D481-B9C9-434B-A0EF-0AAC15CA2780}"/>
               </a:ext>
             </a:extLst>
           </p:cNvPr>
@@ -14708,10 +14765,10 @@
       </p:sp>
       <p:sp>
         <p:nvSpPr>
-          <p:cNvPr id="6" name="c3-text-261">
-            <a:extLst xmlns:a="http://schemas.openxmlformats.org/drawingml/2006/main">
-              <a:ext uri="{FF2B5EF4-FFF2-40B4-BE49-F238E27FC236}">
-                <a16:creationId xmlns:a16="http://schemas.microsoft.com/office/drawing/2014/main" id="{8AE35299-EAF1-446F-ADB1-51DCE8ED4DEC}"/>
+          <p:cNvPr id="6" name="c3-text-262">
+            <a:extLst xmlns:a="http://schemas.openxmlformats.org/drawingml/2006/main">
+              <a:ext uri="{FF2B5EF4-FFF2-40B4-BE49-F238E27FC236}">
+                <a16:creationId xmlns:a16="http://schemas.microsoft.com/office/drawing/2014/main" id="{527B8BF4-C55B-486A-97A3-41C73BB3CDD6}"/>
               </a:ext>
             </a:extLst>
           </p:cNvPr>
@@ -14765,10 +14822,10 @@
       </p:sp>
       <p:sp>
         <p:nvSpPr>
-          <p:cNvPr id="7" name="c3-text-262">
-            <a:extLst xmlns:a="http://schemas.openxmlformats.org/drawingml/2006/main">
-              <a:ext uri="{FF2B5EF4-FFF2-40B4-BE49-F238E27FC236}">
-                <a16:creationId xmlns:a16="http://schemas.microsoft.com/office/drawing/2014/main" id="{905B4D6A-7A23-45CF-BDAD-9D98BF929CF6}"/>
+          <p:cNvPr id="7" name="c3-text-263">
+            <a:extLst xmlns:a="http://schemas.openxmlformats.org/drawingml/2006/main">
+              <a:ext uri="{FF2B5EF4-FFF2-40B4-BE49-F238E27FC236}">
+                <a16:creationId xmlns:a16="http://schemas.microsoft.com/office/drawing/2014/main" id="{99029B6C-E7A4-4FEF-8489-A43CD80A2454}"/>
               </a:ext>
             </a:extLst>
           </p:cNvPr>
@@ -14822,10 +14879,10 @@
       </p:sp>
       <p:sp>
         <p:nvSpPr>
-          <p:cNvPr id="8" name="c3-text-351">
-            <a:extLst xmlns:a="http://schemas.openxmlformats.org/drawingml/2006/main">
-              <a:ext uri="{FF2B5EF4-FFF2-40B4-BE49-F238E27FC236}">
-                <a16:creationId xmlns:a16="http://schemas.microsoft.com/office/drawing/2014/main" id="{C0182FAF-829B-4821-88B2-38A835DF0C82}"/>
+          <p:cNvPr id="8" name="c3-text-352">
+            <a:extLst xmlns:a="http://schemas.openxmlformats.org/drawingml/2006/main">
+              <a:ext uri="{FF2B5EF4-FFF2-40B4-BE49-F238E27FC236}">
+                <a16:creationId xmlns:a16="http://schemas.microsoft.com/office/drawing/2014/main" id="{FC1787C1-48F3-449F-9963-82D067A30DA4}"/>
               </a:ext>
             </a:extLst>
           </p:cNvPr>
@@ -14880,7 +14937,7 @@
     </p:spTree>
     <p:extLst>
       <p:ext uri="{BB962C8B-B14F-4D97-AF65-F5344CB8AC3E}">
-        <p14:creationId xmlns:p14="http://schemas.microsoft.com/office/powerpoint/2010/main" val="995569140"/>
+        <p14:creationId xmlns:p14="http://schemas.microsoft.com/office/powerpoint/2010/main" val="819514385"/>
       </p:ext>
     </p:extLst>
   </p:cSld>
@@ -14908,10 +14965,10 @@
       </p:grpSpPr>
       <p:sp>
         <p:nvSpPr>
-          <p:cNvPr id="8" name="c3-text-263">
-            <a:extLst xmlns:a="http://schemas.openxmlformats.org/drawingml/2006/main">
-              <a:ext uri="{FF2B5EF4-FFF2-40B4-BE49-F238E27FC236}">
-                <a16:creationId xmlns:a16="http://schemas.microsoft.com/office/drawing/2014/main" id="{213114E4-7D1D-4D29-BBA2-B5FCA1658D4D}"/>
+          <p:cNvPr id="8" name="c3-text-264">
+            <a:extLst xmlns:a="http://schemas.openxmlformats.org/drawingml/2006/main">
+              <a:ext uri="{FF2B5EF4-FFF2-40B4-BE49-F238E27FC236}">
+                <a16:creationId xmlns:a16="http://schemas.microsoft.com/office/drawing/2014/main" id="{060988EA-66BB-4223-93C0-68967AA71FC9}"/>
               </a:ext>
             </a:extLst>
           </p:cNvPr>
@@ -14965,10 +15022,10 @@
       </p:sp>
       <p:sp>
         <p:nvSpPr>
-          <p:cNvPr id="2" name="c3-text-264">
-            <a:extLst xmlns:a="http://schemas.openxmlformats.org/drawingml/2006/main">
-              <a:ext uri="{FF2B5EF4-FFF2-40B4-BE49-F238E27FC236}">
-                <a16:creationId xmlns:a16="http://schemas.microsoft.com/office/drawing/2014/main" id="{8F7DC9DA-640B-457C-826C-B3851B3924CC}"/>
+          <p:cNvPr id="2" name="c3-text-265">
+            <a:extLst xmlns:a="http://schemas.openxmlformats.org/drawingml/2006/main">
+              <a:ext uri="{FF2B5EF4-FFF2-40B4-BE49-F238E27FC236}">
+                <a16:creationId xmlns:a16="http://schemas.microsoft.com/office/drawing/2014/main" id="{67154C4A-3EDD-4B9D-9F70-3795EDB64037}"/>
               </a:ext>
             </a:extLst>
           </p:cNvPr>
@@ -15022,10 +15079,10 @@
       </p:sp>
       <p:sp>
         <p:nvSpPr>
-          <p:cNvPr id="3" name="c3-text-265">
-            <a:extLst xmlns:a="http://schemas.openxmlformats.org/drawingml/2006/main">
-              <a:ext uri="{FF2B5EF4-FFF2-40B4-BE49-F238E27FC236}">
-                <a16:creationId xmlns:a16="http://schemas.microsoft.com/office/drawing/2014/main" id="{F910374C-812C-45F5-8D13-B489FADE024F}"/>
+          <p:cNvPr id="3" name="c3-text-266">
+            <a:extLst xmlns:a="http://schemas.openxmlformats.org/drawingml/2006/main">
+              <a:ext uri="{FF2B5EF4-FFF2-40B4-BE49-F238E27FC236}">
+                <a16:creationId xmlns:a16="http://schemas.microsoft.com/office/drawing/2014/main" id="{EE9A3580-E272-4D72-BCAE-5A6DF5D05839}"/>
               </a:ext>
             </a:extLst>
           </p:cNvPr>
@@ -15079,10 +15136,10 @@
       </p:sp>
       <p:sp>
         <p:nvSpPr>
-          <p:cNvPr id="4" name="c3-text-266">
-            <a:extLst xmlns:a="http://schemas.openxmlformats.org/drawingml/2006/main">
-              <a:ext uri="{FF2B5EF4-FFF2-40B4-BE49-F238E27FC236}">
-                <a16:creationId xmlns:a16="http://schemas.microsoft.com/office/drawing/2014/main" id="{EA355EA3-A288-42EF-94DA-D1DF16C8BA7B}"/>
+          <p:cNvPr id="4" name="c3-text-267">
+            <a:extLst xmlns:a="http://schemas.openxmlformats.org/drawingml/2006/main">
+              <a:ext uri="{FF2B5EF4-FFF2-40B4-BE49-F238E27FC236}">
+                <a16:creationId xmlns:a16="http://schemas.microsoft.com/office/drawing/2014/main" id="{26F56C39-DF59-4D12-9BD8-7321E05251A9}"/>
               </a:ext>
             </a:extLst>
           </p:cNvPr>
@@ -15136,10 +15193,10 @@
       </p:sp>
       <p:sp>
         <p:nvSpPr>
-          <p:cNvPr id="5" name="c3-text-267">
-            <a:extLst xmlns:a="http://schemas.openxmlformats.org/drawingml/2006/main">
-              <a:ext uri="{FF2B5EF4-FFF2-40B4-BE49-F238E27FC236}">
-                <a16:creationId xmlns:a16="http://schemas.microsoft.com/office/drawing/2014/main" id="{4283E8A1-A75E-41FB-94ED-FACF3ACB9C8E}"/>
+          <p:cNvPr id="5" name="c3-text-268">
+            <a:extLst xmlns:a="http://schemas.openxmlformats.org/drawingml/2006/main">
+              <a:ext uri="{FF2B5EF4-FFF2-40B4-BE49-F238E27FC236}">
+                <a16:creationId xmlns:a16="http://schemas.microsoft.com/office/drawing/2014/main" id="{695C484B-7F33-44F7-806C-30F0078A5CC9}"/>
               </a:ext>
             </a:extLst>
           </p:cNvPr>
@@ -15193,10 +15250,10 @@
       </p:sp>
       <p:sp>
         <p:nvSpPr>
-          <p:cNvPr id="6" name="c3-text-268">
-            <a:extLst xmlns:a="http://schemas.openxmlformats.org/drawingml/2006/main">
-              <a:ext uri="{FF2B5EF4-FFF2-40B4-BE49-F238E27FC236}">
-                <a16:creationId xmlns:a16="http://schemas.microsoft.com/office/drawing/2014/main" id="{F33BB785-2EC1-4127-902F-B3521DA5B980}"/>
+          <p:cNvPr id="6" name="c3-text-269">
+            <a:extLst xmlns:a="http://schemas.openxmlformats.org/drawingml/2006/main">
+              <a:ext uri="{FF2B5EF4-FFF2-40B4-BE49-F238E27FC236}">
+                <a16:creationId xmlns:a16="http://schemas.microsoft.com/office/drawing/2014/main" id="{9CF44020-D459-447A-AD5E-16E72EA49657}"/>
               </a:ext>
             </a:extLst>
           </p:cNvPr>
@@ -15250,10 +15307,10 @@
       </p:sp>
       <p:sp>
         <p:nvSpPr>
-          <p:cNvPr id="7" name="c3-text-352">
-            <a:extLst xmlns:a="http://schemas.openxmlformats.org/drawingml/2006/main">
-              <a:ext uri="{FF2B5EF4-FFF2-40B4-BE49-F238E27FC236}">
-                <a16:creationId xmlns:a16="http://schemas.microsoft.com/office/drawing/2014/main" id="{BA2C399E-4408-4726-8662-8D5EF87E6F75}"/>
+          <p:cNvPr id="7" name="c3-text-353">
+            <a:extLst xmlns:a="http://schemas.openxmlformats.org/drawingml/2006/main">
+              <a:ext uri="{FF2B5EF4-FFF2-40B4-BE49-F238E27FC236}">
+                <a16:creationId xmlns:a16="http://schemas.microsoft.com/office/drawing/2014/main" id="{DCFA5566-1012-4CAC-8649-FB039BD03BA3}"/>
               </a:ext>
             </a:extLst>
           </p:cNvPr>
@@ -15308,7 +15365,7 @@
     </p:spTree>
     <p:extLst>
       <p:ext uri="{BB962C8B-B14F-4D97-AF65-F5344CB8AC3E}">
-        <p14:creationId xmlns:p14="http://schemas.microsoft.com/office/powerpoint/2010/main" val="2086863679"/>
+        <p14:creationId xmlns:p14="http://schemas.microsoft.com/office/powerpoint/2010/main" val="155394904"/>
       </p:ext>
     </p:extLst>
   </p:cSld>
@@ -15336,10 +15393,10 @@
       </p:grpSpPr>
       <p:sp>
         <p:nvSpPr>
-          <p:cNvPr id="8" name="c3-text-269">
-            <a:extLst xmlns:a="http://schemas.openxmlformats.org/drawingml/2006/main">
-              <a:ext uri="{FF2B5EF4-FFF2-40B4-BE49-F238E27FC236}">
-                <a16:creationId xmlns:a16="http://schemas.microsoft.com/office/drawing/2014/main" id="{2F2CE539-9654-4204-B697-2B8B948E0462}"/>
+          <p:cNvPr id="8" name="c3-text-270">
+            <a:extLst xmlns:a="http://schemas.openxmlformats.org/drawingml/2006/main">
+              <a:ext uri="{FF2B5EF4-FFF2-40B4-BE49-F238E27FC236}">
+                <a16:creationId xmlns:a16="http://schemas.microsoft.com/office/drawing/2014/main" id="{EF94B991-B681-4AC3-BABF-C16652441C04}"/>
               </a:ext>
             </a:extLst>
           </p:cNvPr>
@@ -15393,10 +15450,10 @@
       </p:sp>
       <p:sp>
         <p:nvSpPr>
-          <p:cNvPr id="2" name="c3-text-270">
-            <a:extLst xmlns:a="http://schemas.openxmlformats.org/drawingml/2006/main">
-              <a:ext uri="{FF2B5EF4-FFF2-40B4-BE49-F238E27FC236}">
-                <a16:creationId xmlns:a16="http://schemas.microsoft.com/office/drawing/2014/main" id="{80789EED-4344-4964-8DDB-07658E63BE2D}"/>
+          <p:cNvPr id="2" name="c3-text-271">
+            <a:extLst xmlns:a="http://schemas.openxmlformats.org/drawingml/2006/main">
+              <a:ext uri="{FF2B5EF4-FFF2-40B4-BE49-F238E27FC236}">
+                <a16:creationId xmlns:a16="http://schemas.microsoft.com/office/drawing/2014/main" id="{09CA8FD4-01F7-41E8-BF52-58D3A2FE33D8}"/>
               </a:ext>
             </a:extLst>
           </p:cNvPr>
@@ -15450,10 +15507,10 @@
       </p:sp>
       <p:sp>
         <p:nvSpPr>
-          <p:cNvPr id="3" name="c3-text-271">
-            <a:extLst xmlns:a="http://schemas.openxmlformats.org/drawingml/2006/main">
-              <a:ext uri="{FF2B5EF4-FFF2-40B4-BE49-F238E27FC236}">
-                <a16:creationId xmlns:a16="http://schemas.microsoft.com/office/drawing/2014/main" id="{BAE72736-40CC-450A-B575-E51268C04A4A}"/>
+          <p:cNvPr id="3" name="c3-text-272">
+            <a:extLst xmlns:a="http://schemas.openxmlformats.org/drawingml/2006/main">
+              <a:ext uri="{FF2B5EF4-FFF2-40B4-BE49-F238E27FC236}">
+                <a16:creationId xmlns:a16="http://schemas.microsoft.com/office/drawing/2014/main" id="{888C7CA3-7692-4342-BAA9-1931A7E0EA9B}"/>
               </a:ext>
             </a:extLst>
           </p:cNvPr>
@@ -15507,10 +15564,10 @@
       </p:sp>
       <p:sp>
         <p:nvSpPr>
-          <p:cNvPr id="4" name="c3-text-272">
-            <a:extLst xmlns:a="http://schemas.openxmlformats.org/drawingml/2006/main">
-              <a:ext uri="{FF2B5EF4-FFF2-40B4-BE49-F238E27FC236}">
-                <a16:creationId xmlns:a16="http://schemas.microsoft.com/office/drawing/2014/main" id="{3968F4CA-934E-4834-B5D2-C1E72B5824D1}"/>
+          <p:cNvPr id="4" name="c3-text-273">
+            <a:extLst xmlns:a="http://schemas.openxmlformats.org/drawingml/2006/main">
+              <a:ext uri="{FF2B5EF4-FFF2-40B4-BE49-F238E27FC236}">
+                <a16:creationId xmlns:a16="http://schemas.microsoft.com/office/drawing/2014/main" id="{BB08D613-C1F5-4A3B-9992-49CD8FD014F3}"/>
               </a:ext>
             </a:extLst>
           </p:cNvPr>
@@ -15564,10 +15621,10 @@
       </p:sp>
       <p:sp>
         <p:nvSpPr>
-          <p:cNvPr id="5" name="c3-text-273">
-            <a:extLst xmlns:a="http://schemas.openxmlformats.org/drawingml/2006/main">
-              <a:ext uri="{FF2B5EF4-FFF2-40B4-BE49-F238E27FC236}">
-                <a16:creationId xmlns:a16="http://schemas.microsoft.com/office/drawing/2014/main" id="{A38E115E-D804-4C93-944F-3595CA001110}"/>
+          <p:cNvPr id="5" name="c3-text-274">
+            <a:extLst xmlns:a="http://schemas.openxmlformats.org/drawingml/2006/main">
+              <a:ext uri="{FF2B5EF4-FFF2-40B4-BE49-F238E27FC236}">
+                <a16:creationId xmlns:a16="http://schemas.microsoft.com/office/drawing/2014/main" id="{B9EE3E3F-76D8-4290-B219-49FC556FE4D6}"/>
               </a:ext>
             </a:extLst>
           </p:cNvPr>
@@ -15621,10 +15678,10 @@
       </p:sp>
       <p:sp>
         <p:nvSpPr>
-          <p:cNvPr id="6" name="c3-text-274">
-            <a:extLst xmlns:a="http://schemas.openxmlformats.org/drawingml/2006/main">
-              <a:ext uri="{FF2B5EF4-FFF2-40B4-BE49-F238E27FC236}">
-                <a16:creationId xmlns:a16="http://schemas.microsoft.com/office/drawing/2014/main" id="{A50A28BE-8B5C-49C7-AB7A-97C4F379281D}"/>
+          <p:cNvPr id="6" name="c3-text-275">
+            <a:extLst xmlns:a="http://schemas.openxmlformats.org/drawingml/2006/main">
+              <a:ext uri="{FF2B5EF4-FFF2-40B4-BE49-F238E27FC236}">
+                <a16:creationId xmlns:a16="http://schemas.microsoft.com/office/drawing/2014/main" id="{1BFCB5D5-D0BC-4A9D-92D1-A4BD9505B715}"/>
               </a:ext>
             </a:extLst>
           </p:cNvPr>
@@ -15678,10 +15735,10 @@
       </p:sp>
       <p:sp>
         <p:nvSpPr>
-          <p:cNvPr id="7" name="c3-text-353">
-            <a:extLst xmlns:a="http://schemas.openxmlformats.org/drawingml/2006/main">
-              <a:ext uri="{FF2B5EF4-FFF2-40B4-BE49-F238E27FC236}">
-                <a16:creationId xmlns:a16="http://schemas.microsoft.com/office/drawing/2014/main" id="{3157001B-8626-4239-B9C9-052F27FCF7CB}"/>
+          <p:cNvPr id="7" name="c3-text-354">
+            <a:extLst xmlns:a="http://schemas.openxmlformats.org/drawingml/2006/main">
+              <a:ext uri="{FF2B5EF4-FFF2-40B4-BE49-F238E27FC236}">
+                <a16:creationId xmlns:a16="http://schemas.microsoft.com/office/drawing/2014/main" id="{0C637DD1-5157-407A-8130-0549F32372FF}"/>
               </a:ext>
             </a:extLst>
           </p:cNvPr>
@@ -15736,7 +15793,7 @@
     </p:spTree>
     <p:extLst>
       <p:ext uri="{BB962C8B-B14F-4D97-AF65-F5344CB8AC3E}">
-        <p14:creationId xmlns:p14="http://schemas.microsoft.com/office/powerpoint/2010/main" val="629054148"/>
+        <p14:creationId xmlns:p14="http://schemas.microsoft.com/office/powerpoint/2010/main" val="1451776477"/>
       </p:ext>
     </p:extLst>
   </p:cSld>
@@ -15764,10 +15821,10 @@
       </p:grpSpPr>
       <p:sp>
         <p:nvSpPr>
-          <p:cNvPr id="9" name="c3-text-275">
-            <a:extLst xmlns:a="http://schemas.openxmlformats.org/drawingml/2006/main">
-              <a:ext uri="{FF2B5EF4-FFF2-40B4-BE49-F238E27FC236}">
-                <a16:creationId xmlns:a16="http://schemas.microsoft.com/office/drawing/2014/main" id="{D816341C-5601-4406-9013-D721243DFFB3}"/>
+          <p:cNvPr id="9" name="c3-text-276">
+            <a:extLst xmlns:a="http://schemas.openxmlformats.org/drawingml/2006/main">
+              <a:ext uri="{FF2B5EF4-FFF2-40B4-BE49-F238E27FC236}">
+                <a16:creationId xmlns:a16="http://schemas.microsoft.com/office/drawing/2014/main" id="{40F246BD-4D95-4663-AD38-5D2FB41EA809}"/>
               </a:ext>
             </a:extLst>
           </p:cNvPr>
@@ -15821,10 +15878,10 @@
       </p:sp>
       <p:sp>
         <p:nvSpPr>
-          <p:cNvPr id="2" name="c3-text-276">
-            <a:extLst xmlns:a="http://schemas.openxmlformats.org/drawingml/2006/main">
-              <a:ext uri="{FF2B5EF4-FFF2-40B4-BE49-F238E27FC236}">
-                <a16:creationId xmlns:a16="http://schemas.microsoft.com/office/drawing/2014/main" id="{E30D8BF2-EC70-4E16-B3EB-D417F54DBC80}"/>
+          <p:cNvPr id="2" name="c3-text-277">
+            <a:extLst xmlns:a="http://schemas.openxmlformats.org/drawingml/2006/main">
+              <a:ext uri="{FF2B5EF4-FFF2-40B4-BE49-F238E27FC236}">
+                <a16:creationId xmlns:a16="http://schemas.microsoft.com/office/drawing/2014/main" id="{887D220D-7411-47C4-9A2D-C3355FEDA115}"/>
               </a:ext>
             </a:extLst>
           </p:cNvPr>
@@ -15878,10 +15935,10 @@
       </p:sp>
       <p:sp>
         <p:nvSpPr>
-          <p:cNvPr id="3" name="c3-text-277">
-            <a:extLst xmlns:a="http://schemas.openxmlformats.org/drawingml/2006/main">
-              <a:ext uri="{FF2B5EF4-FFF2-40B4-BE49-F238E27FC236}">
-                <a16:creationId xmlns:a16="http://schemas.microsoft.com/office/drawing/2014/main" id="{051076CA-2AE1-4EAC-972D-976502F7C7EE}"/>
+          <p:cNvPr id="3" name="c3-text-278">
+            <a:extLst xmlns:a="http://schemas.openxmlformats.org/drawingml/2006/main">
+              <a:ext uri="{FF2B5EF4-FFF2-40B4-BE49-F238E27FC236}">
+                <a16:creationId xmlns:a16="http://schemas.microsoft.com/office/drawing/2014/main" id="{65375349-C8BA-4555-B360-FC9C36CC3E51}"/>
               </a:ext>
             </a:extLst>
           </p:cNvPr>
@@ -15935,10 +15992,10 @@
       </p:sp>
       <p:sp>
         <p:nvSpPr>
-          <p:cNvPr id="4" name="c3-text-278">
-            <a:extLst xmlns:a="http://schemas.openxmlformats.org/drawingml/2006/main">
-              <a:ext uri="{FF2B5EF4-FFF2-40B4-BE49-F238E27FC236}">
-                <a16:creationId xmlns:a16="http://schemas.microsoft.com/office/drawing/2014/main" id="{BFD0FC6D-B73D-4528-BB5E-9A84A7863CEB}"/>
+          <p:cNvPr id="4" name="c3-text-279">
+            <a:extLst xmlns:a="http://schemas.openxmlformats.org/drawingml/2006/main">
+              <a:ext uri="{FF2B5EF4-FFF2-40B4-BE49-F238E27FC236}">
+                <a16:creationId xmlns:a16="http://schemas.microsoft.com/office/drawing/2014/main" id="{BB74547F-3F77-4385-A763-AC7B486298CD}"/>
               </a:ext>
             </a:extLst>
           </p:cNvPr>
@@ -15992,10 +16049,10 @@
       </p:sp>
       <p:sp>
         <p:nvSpPr>
-          <p:cNvPr id="5" name="c3-text-279">
-            <a:extLst xmlns:a="http://schemas.openxmlformats.org/drawingml/2006/main">
-              <a:ext uri="{FF2B5EF4-FFF2-40B4-BE49-F238E27FC236}">
-                <a16:creationId xmlns:a16="http://schemas.microsoft.com/office/drawing/2014/main" id="{5A140E1F-B0D0-4516-83F4-CE8C69C9FB9C}"/>
+          <p:cNvPr id="5" name="c3-text-280">
+            <a:extLst xmlns:a="http://schemas.openxmlformats.org/drawingml/2006/main">
+              <a:ext uri="{FF2B5EF4-FFF2-40B4-BE49-F238E27FC236}">
+                <a16:creationId xmlns:a16="http://schemas.microsoft.com/office/drawing/2014/main" id="{00DF3A93-322F-4D73-AF2D-D039852A8634}"/>
               </a:ext>
             </a:extLst>
           </p:cNvPr>
@@ -16072,10 +16129,10 @@
       </p:sp>
       <p:sp>
         <p:nvSpPr>
-          <p:cNvPr id="6" name="c3-text-280">
-            <a:extLst xmlns:a="http://schemas.openxmlformats.org/drawingml/2006/main">
-              <a:ext uri="{FF2B5EF4-FFF2-40B4-BE49-F238E27FC236}">
-                <a16:creationId xmlns:a16="http://schemas.microsoft.com/office/drawing/2014/main" id="{24996859-A78E-4711-94D0-F63F05C1E1A6}"/>
+          <p:cNvPr id="6" name="c3-text-281">
+            <a:extLst xmlns:a="http://schemas.openxmlformats.org/drawingml/2006/main">
+              <a:ext uri="{FF2B5EF4-FFF2-40B4-BE49-F238E27FC236}">
+                <a16:creationId xmlns:a16="http://schemas.microsoft.com/office/drawing/2014/main" id="{8DA5A6AD-0CD3-4CFA-AB79-1A871A63C5BF}"/>
               </a:ext>
             </a:extLst>
           </p:cNvPr>
@@ -16129,10 +16186,10 @@
       </p:sp>
       <p:sp>
         <p:nvSpPr>
-          <p:cNvPr id="7" name="c3-text-281">
-            <a:extLst xmlns:a="http://schemas.openxmlformats.org/drawingml/2006/main">
-              <a:ext uri="{FF2B5EF4-FFF2-40B4-BE49-F238E27FC236}">
-                <a16:creationId xmlns:a16="http://schemas.microsoft.com/office/drawing/2014/main" id="{A3F74591-E674-4A4F-AE29-6C7D94A34689}"/>
+          <p:cNvPr id="7" name="c3-text-282">
+            <a:extLst xmlns:a="http://schemas.openxmlformats.org/drawingml/2006/main">
+              <a:ext uri="{FF2B5EF4-FFF2-40B4-BE49-F238E27FC236}">
+                <a16:creationId xmlns:a16="http://schemas.microsoft.com/office/drawing/2014/main" id="{E3FF882F-6016-470C-801A-9B2189571251}"/>
               </a:ext>
             </a:extLst>
           </p:cNvPr>
@@ -16186,10 +16243,10 @@
       </p:sp>
       <p:sp>
         <p:nvSpPr>
-          <p:cNvPr id="8" name="c3-text-354">
-            <a:extLst xmlns:a="http://schemas.openxmlformats.org/drawingml/2006/main">
-              <a:ext uri="{FF2B5EF4-FFF2-40B4-BE49-F238E27FC236}">
-                <a16:creationId xmlns:a16="http://schemas.microsoft.com/office/drawing/2014/main" id="{DF548EED-757D-4147-B8A2-E9196F8DEB3B}"/>
+          <p:cNvPr id="8" name="c3-text-355">
+            <a:extLst xmlns:a="http://schemas.openxmlformats.org/drawingml/2006/main">
+              <a:ext uri="{FF2B5EF4-FFF2-40B4-BE49-F238E27FC236}">
+                <a16:creationId xmlns:a16="http://schemas.microsoft.com/office/drawing/2014/main" id="{D9C2E7AE-61C0-4A8C-A740-C881499E02BD}"/>
               </a:ext>
             </a:extLst>
           </p:cNvPr>
@@ -16244,7 +16301,7 @@
     </p:spTree>
     <p:extLst>
       <p:ext uri="{BB962C8B-B14F-4D97-AF65-F5344CB8AC3E}">
-        <p14:creationId xmlns:p14="http://schemas.microsoft.com/office/powerpoint/2010/main" val="1018610378"/>
+        <p14:creationId xmlns:p14="http://schemas.microsoft.com/office/powerpoint/2010/main" val="169402539"/>
       </p:ext>
     </p:extLst>
   </p:cSld>
@@ -16272,10 +16329,10 @@
       </p:grpSpPr>
       <p:sp>
         <p:nvSpPr>
-          <p:cNvPr id="27" name="c3-text-282">
-            <a:extLst xmlns:a="http://schemas.openxmlformats.org/drawingml/2006/main">
-              <a:ext uri="{FF2B5EF4-FFF2-40B4-BE49-F238E27FC236}">
-                <a16:creationId xmlns:a16="http://schemas.microsoft.com/office/drawing/2014/main" id="{69AED067-93FA-447F-867E-5DDDA4A5D0B3}"/>
+          <p:cNvPr id="27" name="c3-text-283">
+            <a:extLst xmlns:a="http://schemas.openxmlformats.org/drawingml/2006/main">
+              <a:ext uri="{FF2B5EF4-FFF2-40B4-BE49-F238E27FC236}">
+                <a16:creationId xmlns:a16="http://schemas.microsoft.com/office/drawing/2014/main" id="{37AC615B-139A-4A14-959D-E7758E481133}"/>
               </a:ext>
             </a:extLst>
           </p:cNvPr>
@@ -16329,10 +16386,10 @@
       </p:sp>
       <p:sp>
         <p:nvSpPr>
-          <p:cNvPr id="2" name="c3-text-283">
-            <a:extLst xmlns:a="http://schemas.openxmlformats.org/drawingml/2006/main">
-              <a:ext uri="{FF2B5EF4-FFF2-40B4-BE49-F238E27FC236}">
-                <a16:creationId xmlns:a16="http://schemas.microsoft.com/office/drawing/2014/main" id="{5F3E9543-725D-45F2-9DD1-EF3BD0590A47}"/>
+          <p:cNvPr id="2" name="c3-text-284">
+            <a:extLst xmlns:a="http://schemas.openxmlformats.org/drawingml/2006/main">
+              <a:ext uri="{FF2B5EF4-FFF2-40B4-BE49-F238E27FC236}">
+                <a16:creationId xmlns:a16="http://schemas.microsoft.com/office/drawing/2014/main" id="{0B88AD3A-88DC-4456-9ADA-1AF8CE73A424}"/>
               </a:ext>
             </a:extLst>
           </p:cNvPr>
@@ -16386,10 +16443,10 @@
       </p:sp>
       <p:sp>
         <p:nvSpPr>
-          <p:cNvPr id="3" name="c3-text-284">
-            <a:extLst xmlns:a="http://schemas.openxmlformats.org/drawingml/2006/main">
-              <a:ext uri="{FF2B5EF4-FFF2-40B4-BE49-F238E27FC236}">
-                <a16:creationId xmlns:a16="http://schemas.microsoft.com/office/drawing/2014/main" id="{BD913727-79A7-42DA-9C8F-F58D25E0BA80}"/>
+          <p:cNvPr id="3" name="c3-text-285">
+            <a:extLst xmlns:a="http://schemas.openxmlformats.org/drawingml/2006/main">
+              <a:ext uri="{FF2B5EF4-FFF2-40B4-BE49-F238E27FC236}">
+                <a16:creationId xmlns:a16="http://schemas.microsoft.com/office/drawing/2014/main" id="{7877CCF5-45B0-4A1B-9702-813ED90EA823}"/>
               </a:ext>
             </a:extLst>
           </p:cNvPr>
@@ -16443,11 +16500,11 @@
       </p:sp>
       <p:sp>
         <p:nvSpPr>
-          <p:cNvPr id="4" name="c3-text-285">
-            <a:hlinkClick xmlns:r="http://schemas.openxmlformats.org/officeDocument/2006/relationships" xmlns:a="http://schemas.openxmlformats.org/drawingml/2006/main" r:id="R54d7460087e94d15"/>
-            <a:extLst xmlns:a="http://schemas.openxmlformats.org/drawingml/2006/main">
-              <a:ext uri="{FF2B5EF4-FFF2-40B4-BE49-F238E27FC236}">
-                <a16:creationId xmlns:a16="http://schemas.microsoft.com/office/drawing/2014/main" id="{E522913F-B85F-4128-85A9-457976719D19}"/>
+          <p:cNvPr id="4" name="c3-text-286">
+            <a:hlinkClick xmlns:r="http://schemas.openxmlformats.org/officeDocument/2006/relationships" xmlns:a="http://schemas.openxmlformats.org/drawingml/2006/main" r:id="R84b407ed36c14a77"/>
+            <a:extLst xmlns:a="http://schemas.openxmlformats.org/drawingml/2006/main">
+              <a:ext uri="{FF2B5EF4-FFF2-40B4-BE49-F238E27FC236}">
+                <a16:creationId xmlns:a16="http://schemas.microsoft.com/office/drawing/2014/main" id="{0CBD5E3A-1CE0-4860-9F17-7D711CEE31A6}"/>
               </a:ext>
             </a:extLst>
           </p:cNvPr>
@@ -16501,11 +16558,11 @@
       </p:sp>
       <p:sp>
         <p:nvSpPr>
-          <p:cNvPr id="5" name="c3-text-286">
-            <a:hlinkClick xmlns:r="http://schemas.openxmlformats.org/officeDocument/2006/relationships" xmlns:a="http://schemas.openxmlformats.org/drawingml/2006/main" r:id="R4a5d353c6a3e45dd"/>
-            <a:extLst xmlns:a="http://schemas.openxmlformats.org/drawingml/2006/main">
-              <a:ext uri="{FF2B5EF4-FFF2-40B4-BE49-F238E27FC236}">
-                <a16:creationId xmlns:a16="http://schemas.microsoft.com/office/drawing/2014/main" id="{6C468909-F4AF-4D1F-96D2-AD9BC97D2F8D}"/>
+          <p:cNvPr id="5" name="c3-text-287">
+            <a:hlinkClick xmlns:r="http://schemas.openxmlformats.org/officeDocument/2006/relationships" xmlns:a="http://schemas.openxmlformats.org/drawingml/2006/main" r:id="R39e0c8f917214774"/>
+            <a:extLst xmlns:a="http://schemas.openxmlformats.org/drawingml/2006/main">
+              <a:ext uri="{FF2B5EF4-FFF2-40B4-BE49-F238E27FC236}">
+                <a16:creationId xmlns:a16="http://schemas.microsoft.com/office/drawing/2014/main" id="{7B874C93-A7AA-4599-8031-E696BD0C096C}"/>
               </a:ext>
             </a:extLst>
           </p:cNvPr>
@@ -16559,10 +16616,10 @@
       </p:sp>
       <p:sp>
         <p:nvSpPr>
-          <p:cNvPr id="6" name="c3-shape-287">
-            <a:extLst xmlns:a="http://schemas.openxmlformats.org/drawingml/2006/main">
-              <a:ext uri="{FF2B5EF4-FFF2-40B4-BE49-F238E27FC236}">
-                <a16:creationId xmlns:a16="http://schemas.microsoft.com/office/drawing/2014/main" id="{4DAC69E5-CDF7-424A-8654-E81CEC1F27B5}"/>
+          <p:cNvPr id="6" name="c3-shape-288">
+            <a:extLst xmlns:a="http://schemas.openxmlformats.org/drawingml/2006/main">
+              <a:ext uri="{FF2B5EF4-FFF2-40B4-BE49-F238E27FC236}">
+                <a16:creationId xmlns:a16="http://schemas.microsoft.com/office/drawing/2014/main" id="{B5CCE08F-5E41-4D56-A8CB-1E15BBAA3867}"/>
               </a:ext>
             </a:extLst>
           </p:cNvPr>
@@ -16591,11 +16648,11 @@
       </p:sp>
       <p:sp>
         <p:nvSpPr>
-          <p:cNvPr id="7" name="c3-text-288">
-            <a:hlinkClick xmlns:r="http://schemas.openxmlformats.org/officeDocument/2006/relationships" xmlns:a="http://schemas.openxmlformats.org/drawingml/2006/main" r:id="Rd7d3b02cdc0d4562"/>
-            <a:extLst xmlns:a="http://schemas.openxmlformats.org/drawingml/2006/main">
-              <a:ext uri="{FF2B5EF4-FFF2-40B4-BE49-F238E27FC236}">
-                <a16:creationId xmlns:a16="http://schemas.microsoft.com/office/drawing/2014/main" id="{06C0783F-8FDE-4413-A078-371C1A445621}"/>
+          <p:cNvPr id="7" name="c3-text-289">
+            <a:hlinkClick xmlns:r="http://schemas.openxmlformats.org/officeDocument/2006/relationships" xmlns:a="http://schemas.openxmlformats.org/drawingml/2006/main" r:id="R4debead0c21c4e45"/>
+            <a:extLst xmlns:a="http://schemas.openxmlformats.org/drawingml/2006/main">
+              <a:ext uri="{FF2B5EF4-FFF2-40B4-BE49-F238E27FC236}">
+                <a16:creationId xmlns:a16="http://schemas.microsoft.com/office/drawing/2014/main" id="{433B7999-7947-4058-B2E1-50BEE1FCEC3D}"/>
               </a:ext>
             </a:extLst>
           </p:cNvPr>
@@ -16649,11 +16706,11 @@
       </p:sp>
       <p:sp>
         <p:nvSpPr>
-          <p:cNvPr id="8" name="c3-text-289">
-            <a:hlinkClick xmlns:r="http://schemas.openxmlformats.org/officeDocument/2006/relationships" xmlns:a="http://schemas.openxmlformats.org/drawingml/2006/main" r:id="Rb64d92a54156480e"/>
-            <a:extLst xmlns:a="http://schemas.openxmlformats.org/drawingml/2006/main">
-              <a:ext uri="{FF2B5EF4-FFF2-40B4-BE49-F238E27FC236}">
-                <a16:creationId xmlns:a16="http://schemas.microsoft.com/office/drawing/2014/main" id="{FDA29577-0E84-4F72-819B-5070372269B2}"/>
+          <p:cNvPr id="8" name="c3-text-290">
+            <a:hlinkClick xmlns:r="http://schemas.openxmlformats.org/officeDocument/2006/relationships" xmlns:a="http://schemas.openxmlformats.org/drawingml/2006/main" r:id="R74ad086b19d54065"/>
+            <a:extLst xmlns:a="http://schemas.openxmlformats.org/drawingml/2006/main">
+              <a:ext uri="{FF2B5EF4-FFF2-40B4-BE49-F238E27FC236}">
+                <a16:creationId xmlns:a16="http://schemas.microsoft.com/office/drawing/2014/main" id="{C1A4A3F0-65C2-4BF7-A764-D6DEA4D4689C}"/>
               </a:ext>
             </a:extLst>
           </p:cNvPr>
@@ -16707,10 +16764,10 @@
       </p:sp>
       <p:sp>
         <p:nvSpPr>
-          <p:cNvPr id="9" name="c3-shape-290">
-            <a:extLst xmlns:a="http://schemas.openxmlformats.org/drawingml/2006/main">
-              <a:ext uri="{FF2B5EF4-FFF2-40B4-BE49-F238E27FC236}">
-                <a16:creationId xmlns:a16="http://schemas.microsoft.com/office/drawing/2014/main" id="{F77185EF-4103-4BFC-802C-A99637BBF814}"/>
+          <p:cNvPr id="9" name="c3-shape-291">
+            <a:extLst xmlns:a="http://schemas.openxmlformats.org/drawingml/2006/main">
+              <a:ext uri="{FF2B5EF4-FFF2-40B4-BE49-F238E27FC236}">
+                <a16:creationId xmlns:a16="http://schemas.microsoft.com/office/drawing/2014/main" id="{67B35BC2-51A1-4775-9C51-EEDF86BFFFFC}"/>
               </a:ext>
             </a:extLst>
           </p:cNvPr>
@@ -16739,11 +16796,11 @@
       </p:sp>
       <p:sp>
         <p:nvSpPr>
-          <p:cNvPr id="10" name="c3-text-291">
-            <a:hlinkClick xmlns:r="http://schemas.openxmlformats.org/officeDocument/2006/relationships" xmlns:a="http://schemas.openxmlformats.org/drawingml/2006/main" r:id="R9a833c5b8bdb41ea"/>
-            <a:extLst xmlns:a="http://schemas.openxmlformats.org/drawingml/2006/main">
-              <a:ext uri="{FF2B5EF4-FFF2-40B4-BE49-F238E27FC236}">
-                <a16:creationId xmlns:a16="http://schemas.microsoft.com/office/drawing/2014/main" id="{03F3D040-C7D0-4F93-BD4B-4C2859D83408}"/>
+          <p:cNvPr id="10" name="c3-text-292">
+            <a:hlinkClick xmlns:r="http://schemas.openxmlformats.org/officeDocument/2006/relationships" xmlns:a="http://schemas.openxmlformats.org/drawingml/2006/main" r:id="R0585dd0a353d4fa8"/>
+            <a:extLst xmlns:a="http://schemas.openxmlformats.org/drawingml/2006/main">
+              <a:ext uri="{FF2B5EF4-FFF2-40B4-BE49-F238E27FC236}">
+                <a16:creationId xmlns:a16="http://schemas.microsoft.com/office/drawing/2014/main" id="{B30F27CE-844D-4006-99D3-1A4D288B1689}"/>
               </a:ext>
             </a:extLst>
           </p:cNvPr>
@@ -16797,11 +16854,11 @@
       </p:sp>
       <p:sp>
         <p:nvSpPr>
-          <p:cNvPr id="11" name="c3-text-292">
-            <a:hlinkClick xmlns:r="http://schemas.openxmlformats.org/officeDocument/2006/relationships" xmlns:a="http://schemas.openxmlformats.org/drawingml/2006/main" r:id="R744a5ab4b527427c"/>
-            <a:extLst xmlns:a="http://schemas.openxmlformats.org/drawingml/2006/main">
-              <a:ext uri="{FF2B5EF4-FFF2-40B4-BE49-F238E27FC236}">
-                <a16:creationId xmlns:a16="http://schemas.microsoft.com/office/drawing/2014/main" id="{44921494-06DE-4F7D-A9CD-114D1CCA1671}"/>
+          <p:cNvPr id="11" name="c3-text-293">
+            <a:hlinkClick xmlns:r="http://schemas.openxmlformats.org/officeDocument/2006/relationships" xmlns:a="http://schemas.openxmlformats.org/drawingml/2006/main" r:id="R259b6b40ecda48b8"/>
+            <a:extLst xmlns:a="http://schemas.openxmlformats.org/drawingml/2006/main">
+              <a:ext uri="{FF2B5EF4-FFF2-40B4-BE49-F238E27FC236}">
+                <a16:creationId xmlns:a16="http://schemas.microsoft.com/office/drawing/2014/main" id="{1929159A-0C4A-4469-A439-B9BE56BAA10E}"/>
               </a:ext>
             </a:extLst>
           </p:cNvPr>
@@ -16855,10 +16912,10 @@
       </p:sp>
       <p:sp>
         <p:nvSpPr>
-          <p:cNvPr id="12" name="c3-shape-293">
-            <a:extLst xmlns:a="http://schemas.openxmlformats.org/drawingml/2006/main">
-              <a:ext uri="{FF2B5EF4-FFF2-40B4-BE49-F238E27FC236}">
-                <a16:creationId xmlns:a16="http://schemas.microsoft.com/office/drawing/2014/main" id="{89F27F0A-5540-4636-BEE4-AEDA74DF6CA8}"/>
+          <p:cNvPr id="12" name="c3-shape-294">
+            <a:extLst xmlns:a="http://schemas.openxmlformats.org/drawingml/2006/main">
+              <a:ext uri="{FF2B5EF4-FFF2-40B4-BE49-F238E27FC236}">
+                <a16:creationId xmlns:a16="http://schemas.microsoft.com/office/drawing/2014/main" id="{E54C1978-0C41-453D-8051-3DA94EB6EACA}"/>
               </a:ext>
             </a:extLst>
           </p:cNvPr>
@@ -16887,11 +16944,11 @@
       </p:sp>
       <p:sp>
         <p:nvSpPr>
-          <p:cNvPr id="13" name="c3-text-294">
-            <a:hlinkClick xmlns:r="http://schemas.openxmlformats.org/officeDocument/2006/relationships" xmlns:a="http://schemas.openxmlformats.org/drawingml/2006/main" r:id="R05cde9a0db8e4ac6"/>
-            <a:extLst xmlns:a="http://schemas.openxmlformats.org/drawingml/2006/main">
-              <a:ext uri="{FF2B5EF4-FFF2-40B4-BE49-F238E27FC236}">
-                <a16:creationId xmlns:a16="http://schemas.microsoft.com/office/drawing/2014/main" id="{DB34DED1-2A43-4F86-ACDC-0B09B93E2CCE}"/>
+          <p:cNvPr id="13" name="c3-text-295">
+            <a:hlinkClick xmlns:r="http://schemas.openxmlformats.org/officeDocument/2006/relationships" xmlns:a="http://schemas.openxmlformats.org/drawingml/2006/main" r:id="Rad5ede0e0b464c4d"/>
+            <a:extLst xmlns:a="http://schemas.openxmlformats.org/drawingml/2006/main">
+              <a:ext uri="{FF2B5EF4-FFF2-40B4-BE49-F238E27FC236}">
+                <a16:creationId xmlns:a16="http://schemas.microsoft.com/office/drawing/2014/main" id="{6F6C07A8-B1A5-4E95-8975-B5B9A7E1629F}"/>
               </a:ext>
             </a:extLst>
           </p:cNvPr>
@@ -16945,11 +17002,11 @@
       </p:sp>
       <p:sp>
         <p:nvSpPr>
-          <p:cNvPr id="14" name="c3-text-295">
-            <a:hlinkClick xmlns:r="http://schemas.openxmlformats.org/officeDocument/2006/relationships" xmlns:a="http://schemas.openxmlformats.org/drawingml/2006/main" r:id="R36a8fd14825843ba"/>
-            <a:extLst xmlns:a="http://schemas.openxmlformats.org/drawingml/2006/main">
-              <a:ext uri="{FF2B5EF4-FFF2-40B4-BE49-F238E27FC236}">
-                <a16:creationId xmlns:a16="http://schemas.microsoft.com/office/drawing/2014/main" id="{5BF46AB5-F96E-45C4-A9A7-44EFE5A13866}"/>
+          <p:cNvPr id="14" name="c3-text-296">
+            <a:hlinkClick xmlns:r="http://schemas.openxmlformats.org/officeDocument/2006/relationships" xmlns:a="http://schemas.openxmlformats.org/drawingml/2006/main" r:id="R56898fd93f5749c9"/>
+            <a:extLst xmlns:a="http://schemas.openxmlformats.org/drawingml/2006/main">
+              <a:ext uri="{FF2B5EF4-FFF2-40B4-BE49-F238E27FC236}">
+                <a16:creationId xmlns:a16="http://schemas.microsoft.com/office/drawing/2014/main" id="{FB362390-310B-430F-99E9-7AB7AFD2F4BD}"/>
               </a:ext>
             </a:extLst>
           </p:cNvPr>
@@ -17003,11 +17060,11 @@
       </p:sp>
       <p:sp>
         <p:nvSpPr>
-          <p:cNvPr id="15" name="c3-text-296">
-            <a:hlinkClick xmlns:r="http://schemas.openxmlformats.org/officeDocument/2006/relationships" xmlns:a="http://schemas.openxmlformats.org/drawingml/2006/main" r:id="R9319c96fb9ca4a00"/>
-            <a:extLst xmlns:a="http://schemas.openxmlformats.org/drawingml/2006/main">
-              <a:ext uri="{FF2B5EF4-FFF2-40B4-BE49-F238E27FC236}">
-                <a16:creationId xmlns:a16="http://schemas.microsoft.com/office/drawing/2014/main" id="{3F4B156A-9E49-4F58-9EF9-57BDADFCC489}"/>
+          <p:cNvPr id="15" name="c3-text-297">
+            <a:hlinkClick xmlns:r="http://schemas.openxmlformats.org/officeDocument/2006/relationships" xmlns:a="http://schemas.openxmlformats.org/drawingml/2006/main" r:id="R4639fc620cc344dc"/>
+            <a:extLst xmlns:a="http://schemas.openxmlformats.org/drawingml/2006/main">
+              <a:ext uri="{FF2B5EF4-FFF2-40B4-BE49-F238E27FC236}">
+                <a16:creationId xmlns:a16="http://schemas.microsoft.com/office/drawing/2014/main" id="{28B18646-99B1-4742-94D7-7B6840B91940}"/>
               </a:ext>
             </a:extLst>
           </p:cNvPr>
@@ -17061,11 +17118,11 @@
       </p:sp>
       <p:sp>
         <p:nvSpPr>
-          <p:cNvPr id="16" name="c3-text-297">
-            <a:hlinkClick xmlns:r="http://schemas.openxmlformats.org/officeDocument/2006/relationships" xmlns:a="http://schemas.openxmlformats.org/drawingml/2006/main" r:id="R567bdb351ab74b53"/>
-            <a:extLst xmlns:a="http://schemas.openxmlformats.org/drawingml/2006/main">
-              <a:ext uri="{FF2B5EF4-FFF2-40B4-BE49-F238E27FC236}">
-                <a16:creationId xmlns:a16="http://schemas.microsoft.com/office/drawing/2014/main" id="{D64896E5-DB99-4153-8D07-29AC3BB32087}"/>
+          <p:cNvPr id="16" name="c3-text-298">
+            <a:hlinkClick xmlns:r="http://schemas.openxmlformats.org/officeDocument/2006/relationships" xmlns:a="http://schemas.openxmlformats.org/drawingml/2006/main" r:id="R1ee89e38d1d14fa7"/>
+            <a:extLst xmlns:a="http://schemas.openxmlformats.org/drawingml/2006/main">
+              <a:ext uri="{FF2B5EF4-FFF2-40B4-BE49-F238E27FC236}">
+                <a16:creationId xmlns:a16="http://schemas.microsoft.com/office/drawing/2014/main" id="{6E7654EB-5756-47E7-9F9F-EBD2126B409B}"/>
               </a:ext>
             </a:extLst>
           </p:cNvPr>
@@ -17119,10 +17176,10 @@
       </p:sp>
       <p:sp>
         <p:nvSpPr>
-          <p:cNvPr id="17" name="c3-shape-298">
-            <a:extLst xmlns:a="http://schemas.openxmlformats.org/drawingml/2006/main">
-              <a:ext uri="{FF2B5EF4-FFF2-40B4-BE49-F238E27FC236}">
-                <a16:creationId xmlns:a16="http://schemas.microsoft.com/office/drawing/2014/main" id="{60F6EFF2-D743-401F-89A8-6CB5860F9421}"/>
+          <p:cNvPr id="17" name="c3-shape-299">
+            <a:extLst xmlns:a="http://schemas.openxmlformats.org/drawingml/2006/main">
+              <a:ext uri="{FF2B5EF4-FFF2-40B4-BE49-F238E27FC236}">
+                <a16:creationId xmlns:a16="http://schemas.microsoft.com/office/drawing/2014/main" id="{6BABE45D-8D24-4FE5-AACD-74F01C1E37ED}"/>
               </a:ext>
             </a:extLst>
           </p:cNvPr>
@@ -17151,11 +17208,11 @@
       </p:sp>
       <p:sp>
         <p:nvSpPr>
-          <p:cNvPr id="18" name="c3-text-299">
-            <a:hlinkClick xmlns:r="http://schemas.openxmlformats.org/officeDocument/2006/relationships" xmlns:a="http://schemas.openxmlformats.org/drawingml/2006/main" r:id="R6f6c7ccd732d4403"/>
-            <a:extLst xmlns:a="http://schemas.openxmlformats.org/drawingml/2006/main">
-              <a:ext uri="{FF2B5EF4-FFF2-40B4-BE49-F238E27FC236}">
-                <a16:creationId xmlns:a16="http://schemas.microsoft.com/office/drawing/2014/main" id="{EBF084AF-2931-40C5-B9AB-9E943FDA8BA0}"/>
+          <p:cNvPr id="18" name="c3-text-300">
+            <a:hlinkClick xmlns:r="http://schemas.openxmlformats.org/officeDocument/2006/relationships" xmlns:a="http://schemas.openxmlformats.org/drawingml/2006/main" r:id="Rc8c139c8c94d452d"/>
+            <a:extLst xmlns:a="http://schemas.openxmlformats.org/drawingml/2006/main">
+              <a:ext uri="{FF2B5EF4-FFF2-40B4-BE49-F238E27FC236}">
+                <a16:creationId xmlns:a16="http://schemas.microsoft.com/office/drawing/2014/main" id="{133DBF6D-0C14-4577-BDDF-F12C366255A2}"/>
               </a:ext>
             </a:extLst>
           </p:cNvPr>
@@ -17209,11 +17266,11 @@
       </p:sp>
       <p:sp>
         <p:nvSpPr>
-          <p:cNvPr id="19" name="c3-text-300">
-            <a:hlinkClick xmlns:r="http://schemas.openxmlformats.org/officeDocument/2006/relationships" xmlns:a="http://schemas.openxmlformats.org/drawingml/2006/main" r:id="R49e5241f92434387"/>
-            <a:extLst xmlns:a="http://schemas.openxmlformats.org/drawingml/2006/main">
-              <a:ext uri="{FF2B5EF4-FFF2-40B4-BE49-F238E27FC236}">
-                <a16:creationId xmlns:a16="http://schemas.microsoft.com/office/drawing/2014/main" id="{3CCEE28F-C5D4-446A-AD07-A70F2A4E4CB9}"/>
+          <p:cNvPr id="19" name="c3-text-301">
+            <a:hlinkClick xmlns:r="http://schemas.openxmlformats.org/officeDocument/2006/relationships" xmlns:a="http://schemas.openxmlformats.org/drawingml/2006/main" r:id="R5a1e60808ea7482a"/>
+            <a:extLst xmlns:a="http://schemas.openxmlformats.org/drawingml/2006/main">
+              <a:ext uri="{FF2B5EF4-FFF2-40B4-BE49-F238E27FC236}">
+                <a16:creationId xmlns:a16="http://schemas.microsoft.com/office/drawing/2014/main" id="{3E009703-F2F4-4836-9BB1-6AC5CA5AA339}"/>
               </a:ext>
             </a:extLst>
           </p:cNvPr>
@@ -17267,10 +17324,10 @@
       </p:sp>
       <p:sp>
         <p:nvSpPr>
-          <p:cNvPr id="20" name="c3-shape-301">
-            <a:extLst xmlns:a="http://schemas.openxmlformats.org/drawingml/2006/main">
-              <a:ext uri="{FF2B5EF4-FFF2-40B4-BE49-F238E27FC236}">
-                <a16:creationId xmlns:a16="http://schemas.microsoft.com/office/drawing/2014/main" id="{4A272970-14AA-485D-9458-E56C72C5BBCE}"/>
+          <p:cNvPr id="20" name="c3-shape-302">
+            <a:extLst xmlns:a="http://schemas.openxmlformats.org/drawingml/2006/main">
+              <a:ext uri="{FF2B5EF4-FFF2-40B4-BE49-F238E27FC236}">
+                <a16:creationId xmlns:a16="http://schemas.microsoft.com/office/drawing/2014/main" id="{0D20E9C7-31C8-4AC4-9FB5-63AF35A648A4}"/>
               </a:ext>
             </a:extLst>
           </p:cNvPr>
@@ -17299,11 +17356,11 @@
       </p:sp>
       <p:sp>
         <p:nvSpPr>
-          <p:cNvPr id="21" name="c3-text-302">
-            <a:hlinkClick xmlns:r="http://schemas.openxmlformats.org/officeDocument/2006/relationships" xmlns:a="http://schemas.openxmlformats.org/drawingml/2006/main" r:id="R96d2989a9cc94a2f"/>
-            <a:extLst xmlns:a="http://schemas.openxmlformats.org/drawingml/2006/main">
-              <a:ext uri="{FF2B5EF4-FFF2-40B4-BE49-F238E27FC236}">
-                <a16:creationId xmlns:a16="http://schemas.microsoft.com/office/drawing/2014/main" id="{0FC49618-588E-4A86-8B8D-28011B1EC5B3}"/>
+          <p:cNvPr id="21" name="c3-text-303">
+            <a:hlinkClick xmlns:r="http://schemas.openxmlformats.org/officeDocument/2006/relationships" xmlns:a="http://schemas.openxmlformats.org/drawingml/2006/main" r:id="Rfa61d79d9af54847"/>
+            <a:extLst xmlns:a="http://schemas.openxmlformats.org/drawingml/2006/main">
+              <a:ext uri="{FF2B5EF4-FFF2-40B4-BE49-F238E27FC236}">
+                <a16:creationId xmlns:a16="http://schemas.microsoft.com/office/drawing/2014/main" id="{59729D3C-DEB5-42F8-86D1-23507B8FF7C6}"/>
               </a:ext>
             </a:extLst>
           </p:cNvPr>
@@ -17357,11 +17414,11 @@
       </p:sp>
       <p:sp>
         <p:nvSpPr>
-          <p:cNvPr id="22" name="c3-text-303">
-            <a:hlinkClick xmlns:r="http://schemas.openxmlformats.org/officeDocument/2006/relationships" xmlns:a="http://schemas.openxmlformats.org/drawingml/2006/main" r:id="R4cdb2cdbbd084217"/>
-            <a:extLst xmlns:a="http://schemas.openxmlformats.org/drawingml/2006/main">
-              <a:ext uri="{FF2B5EF4-FFF2-40B4-BE49-F238E27FC236}">
-                <a16:creationId xmlns:a16="http://schemas.microsoft.com/office/drawing/2014/main" id="{CA06A6C4-7168-411B-90DA-8F5CC007BDA1}"/>
+          <p:cNvPr id="22" name="c3-text-304">
+            <a:hlinkClick xmlns:r="http://schemas.openxmlformats.org/officeDocument/2006/relationships" xmlns:a="http://schemas.openxmlformats.org/drawingml/2006/main" r:id="Rce8c6279882641df"/>
+            <a:extLst xmlns:a="http://schemas.openxmlformats.org/drawingml/2006/main">
+              <a:ext uri="{FF2B5EF4-FFF2-40B4-BE49-F238E27FC236}">
+                <a16:creationId xmlns:a16="http://schemas.microsoft.com/office/drawing/2014/main" id="{E5DCD677-75A6-4BBE-8A3C-2587B27D59CF}"/>
               </a:ext>
             </a:extLst>
           </p:cNvPr>
@@ -17415,10 +17472,10 @@
       </p:sp>
       <p:sp>
         <p:nvSpPr>
-          <p:cNvPr id="23" name="c3-shape-304">
-            <a:extLst xmlns:a="http://schemas.openxmlformats.org/drawingml/2006/main">
-              <a:ext uri="{FF2B5EF4-FFF2-40B4-BE49-F238E27FC236}">
-                <a16:creationId xmlns:a16="http://schemas.microsoft.com/office/drawing/2014/main" id="{8271FA0A-2C60-4DC4-8EDC-5457AB5EC15E}"/>
+          <p:cNvPr id="23" name="c3-shape-305">
+            <a:extLst xmlns:a="http://schemas.openxmlformats.org/drawingml/2006/main">
+              <a:ext uri="{FF2B5EF4-FFF2-40B4-BE49-F238E27FC236}">
+                <a16:creationId xmlns:a16="http://schemas.microsoft.com/office/drawing/2014/main" id="{72BBFA0C-DF02-44E1-8299-57CC66ED406E}"/>
               </a:ext>
             </a:extLst>
           </p:cNvPr>
@@ -17447,11 +17504,11 @@
       </p:sp>
       <p:sp>
         <p:nvSpPr>
-          <p:cNvPr id="24" name="c3-text-305">
-            <a:hlinkClick xmlns:r="http://schemas.openxmlformats.org/officeDocument/2006/relationships" xmlns:a="http://schemas.openxmlformats.org/drawingml/2006/main" r:id="R4b94f1be246c4a4d"/>
-            <a:extLst xmlns:a="http://schemas.openxmlformats.org/drawingml/2006/main">
-              <a:ext uri="{FF2B5EF4-FFF2-40B4-BE49-F238E27FC236}">
-                <a16:creationId xmlns:a16="http://schemas.microsoft.com/office/drawing/2014/main" id="{B1A3F094-BB3C-4B7C-B150-FFE698ED75B4}"/>
+          <p:cNvPr id="24" name="c3-text-306">
+            <a:hlinkClick xmlns:r="http://schemas.openxmlformats.org/officeDocument/2006/relationships" xmlns:a="http://schemas.openxmlformats.org/drawingml/2006/main" r:id="Raaa201ce87b34e16"/>
+            <a:extLst xmlns:a="http://schemas.openxmlformats.org/drawingml/2006/main">
+              <a:ext uri="{FF2B5EF4-FFF2-40B4-BE49-F238E27FC236}">
+                <a16:creationId xmlns:a16="http://schemas.microsoft.com/office/drawing/2014/main" id="{6BE9B282-DA72-4F9B-871D-B239FB455897}"/>
               </a:ext>
             </a:extLst>
           </p:cNvPr>
@@ -17505,11 +17562,11 @@
       </p:sp>
       <p:sp>
         <p:nvSpPr>
-          <p:cNvPr id="25" name="c3-text-306">
-            <a:hlinkClick xmlns:r="http://schemas.openxmlformats.org/officeDocument/2006/relationships" xmlns:a="http://schemas.openxmlformats.org/drawingml/2006/main" r:id="Rfcc21b96323f4c63"/>
-            <a:extLst xmlns:a="http://schemas.openxmlformats.org/drawingml/2006/main">
-              <a:ext uri="{FF2B5EF4-FFF2-40B4-BE49-F238E27FC236}">
-                <a16:creationId xmlns:a16="http://schemas.microsoft.com/office/drawing/2014/main" id="{7940703A-B18E-4A2A-8FAD-B0F0523C4082}"/>
+          <p:cNvPr id="25" name="c3-text-307">
+            <a:hlinkClick xmlns:r="http://schemas.openxmlformats.org/officeDocument/2006/relationships" xmlns:a="http://schemas.openxmlformats.org/drawingml/2006/main" r:id="Rd8c9e226cb59446e"/>
+            <a:extLst xmlns:a="http://schemas.openxmlformats.org/drawingml/2006/main">
+              <a:ext uri="{FF2B5EF4-FFF2-40B4-BE49-F238E27FC236}">
+                <a16:creationId xmlns:a16="http://schemas.microsoft.com/office/drawing/2014/main" id="{EF706D23-2618-4E96-B376-F9E11F3E5EBD}"/>
               </a:ext>
             </a:extLst>
           </p:cNvPr>
@@ -17563,10 +17620,10 @@
       </p:sp>
       <p:sp>
         <p:nvSpPr>
-          <p:cNvPr id="26" name="c3-text-355">
-            <a:extLst xmlns:a="http://schemas.openxmlformats.org/drawingml/2006/main">
-              <a:ext uri="{FF2B5EF4-FFF2-40B4-BE49-F238E27FC236}">
-                <a16:creationId xmlns:a16="http://schemas.microsoft.com/office/drawing/2014/main" id="{D5FEC06C-DE46-4A2C-81C9-0222EB8F8F54}"/>
+          <p:cNvPr id="26" name="c3-text-356">
+            <a:extLst xmlns:a="http://schemas.openxmlformats.org/drawingml/2006/main">
+              <a:ext uri="{FF2B5EF4-FFF2-40B4-BE49-F238E27FC236}">
+                <a16:creationId xmlns:a16="http://schemas.microsoft.com/office/drawing/2014/main" id="{8B904783-723A-40F3-B9A7-4F39A139FAC1}"/>
               </a:ext>
             </a:extLst>
           </p:cNvPr>
@@ -17621,7 +17678,7 @@
     </p:spTree>
     <p:extLst>
       <p:ext uri="{BB962C8B-B14F-4D97-AF65-F5344CB8AC3E}">
-        <p14:creationId xmlns:p14="http://schemas.microsoft.com/office/powerpoint/2010/main" val="1092580785"/>
+        <p14:creationId xmlns:p14="http://schemas.microsoft.com/office/powerpoint/2010/main" val="1657199483"/>
       </p:ext>
     </p:extLst>
   </p:cSld>
@@ -17652,7 +17709,7 @@
           <p:cNvPr id="19" name="c3-text-18">
             <a:extLst xmlns:a="http://schemas.openxmlformats.org/drawingml/2006/main">
               <a:ext uri="{FF2B5EF4-FFF2-40B4-BE49-F238E27FC236}">
-                <a16:creationId xmlns:a16="http://schemas.microsoft.com/office/drawing/2014/main" id="{8D83F3E5-62D9-4667-B2D7-2BA1ACFA9B32}"/>
+                <a16:creationId xmlns:a16="http://schemas.microsoft.com/office/drawing/2014/main" id="{CF4E9B93-E1C8-4712-9989-949306241844}"/>
               </a:ext>
             </a:extLst>
           </p:cNvPr>
@@ -17709,7 +17766,7 @@
           <p:cNvPr id="2" name="c3-text-19">
             <a:extLst xmlns:a="http://schemas.openxmlformats.org/drawingml/2006/main">
               <a:ext uri="{FF2B5EF4-FFF2-40B4-BE49-F238E27FC236}">
-                <a16:creationId xmlns:a16="http://schemas.microsoft.com/office/drawing/2014/main" id="{E4EEBE92-72B3-466F-9B9C-AFC170B73C71}"/>
+                <a16:creationId xmlns:a16="http://schemas.microsoft.com/office/drawing/2014/main" id="{50860515-DBE0-483D-8736-E679929B62CA}"/>
               </a:ext>
             </a:extLst>
           </p:cNvPr>
@@ -17766,7 +17823,7 @@
           <p:cNvPr id="3" name="c3-text-20">
             <a:extLst xmlns:a="http://schemas.openxmlformats.org/drawingml/2006/main">
               <a:ext uri="{FF2B5EF4-FFF2-40B4-BE49-F238E27FC236}">
-                <a16:creationId xmlns:a16="http://schemas.microsoft.com/office/drawing/2014/main" id="{690E8522-00D5-418B-9827-9714F7DA6EE3}"/>
+                <a16:creationId xmlns:a16="http://schemas.microsoft.com/office/drawing/2014/main" id="{3DECA6C3-1325-4E5F-9FE4-0AA635DBCCF7}"/>
               </a:ext>
             </a:extLst>
           </p:cNvPr>
@@ -17823,7 +17880,7 @@
           <p:cNvPr id="4" name="c3-shape-21">
             <a:extLst xmlns:a="http://schemas.openxmlformats.org/drawingml/2006/main">
               <a:ext uri="{FF2B5EF4-FFF2-40B4-BE49-F238E27FC236}">
-                <a16:creationId xmlns:a16="http://schemas.microsoft.com/office/drawing/2014/main" id="{9DE55CEB-B4D1-4385-BA7B-A6F237255AE4}"/>
+                <a16:creationId xmlns:a16="http://schemas.microsoft.com/office/drawing/2014/main" id="{3A58D83E-38DC-42AF-8587-0339D97092A1}"/>
               </a:ext>
             </a:extLst>
           </p:cNvPr>
@@ -17857,7 +17914,7 @@
           <p:cNvPr id="5" name="c3-shape-22">
             <a:extLst xmlns:a="http://schemas.openxmlformats.org/drawingml/2006/main">
               <a:ext uri="{FF2B5EF4-FFF2-40B4-BE49-F238E27FC236}">
-                <a16:creationId xmlns:a16="http://schemas.microsoft.com/office/drawing/2014/main" id="{2EEE42FA-AE73-48F0-9109-CA5B361AD7AF}"/>
+                <a16:creationId xmlns:a16="http://schemas.microsoft.com/office/drawing/2014/main" id="{EC461F7D-53D8-4398-A2E0-4E296BC7D194}"/>
               </a:ext>
             </a:extLst>
           </p:cNvPr>
@@ -17889,7 +17946,7 @@
           <p:cNvPr id="6" name="c3-text-23">
             <a:extLst xmlns:a="http://schemas.openxmlformats.org/drawingml/2006/main">
               <a:ext uri="{FF2B5EF4-FFF2-40B4-BE49-F238E27FC236}">
-                <a16:creationId xmlns:a16="http://schemas.microsoft.com/office/drawing/2014/main" id="{21F9DE41-1540-4FF0-8C55-60A60DDEB73C}"/>
+                <a16:creationId xmlns:a16="http://schemas.microsoft.com/office/drawing/2014/main" id="{AF92264C-6DA2-4A92-B124-30B4B3D40729}"/>
               </a:ext>
             </a:extLst>
           </p:cNvPr>
@@ -17946,7 +18003,7 @@
           <p:cNvPr id="7" name="c3-text-24">
             <a:extLst xmlns:a="http://schemas.openxmlformats.org/drawingml/2006/main">
               <a:ext uri="{FF2B5EF4-FFF2-40B4-BE49-F238E27FC236}">
-                <a16:creationId xmlns:a16="http://schemas.microsoft.com/office/drawing/2014/main" id="{4B974E7A-6C9F-4DA1-9C48-69D42F662085}"/>
+                <a16:creationId xmlns:a16="http://schemas.microsoft.com/office/drawing/2014/main" id="{31807FA8-848A-428C-8288-8F4DA936082D}"/>
               </a:ext>
             </a:extLst>
           </p:cNvPr>
@@ -18049,7 +18106,7 @@
           <p:cNvPr id="8" name="c3-shape-25">
             <a:extLst xmlns:a="http://schemas.openxmlformats.org/drawingml/2006/main">
               <a:ext uri="{FF2B5EF4-FFF2-40B4-BE49-F238E27FC236}">
-                <a16:creationId xmlns:a16="http://schemas.microsoft.com/office/drawing/2014/main" id="{19502F21-6CBC-463A-BA69-60D6AE981101}"/>
+                <a16:creationId xmlns:a16="http://schemas.microsoft.com/office/drawing/2014/main" id="{C76096E0-028A-400B-A56D-BD62EA81D67C}"/>
               </a:ext>
             </a:extLst>
           </p:cNvPr>
@@ -18083,7 +18140,7 @@
           <p:cNvPr id="9" name="c3-shape-26">
             <a:extLst xmlns:a="http://schemas.openxmlformats.org/drawingml/2006/main">
               <a:ext uri="{FF2B5EF4-FFF2-40B4-BE49-F238E27FC236}">
-                <a16:creationId xmlns:a16="http://schemas.microsoft.com/office/drawing/2014/main" id="{55BB4583-76DE-4C1A-B162-FF76DBFEFE4C}"/>
+                <a16:creationId xmlns:a16="http://schemas.microsoft.com/office/drawing/2014/main" id="{2AF3FDB6-3D37-43B3-8D71-B4F003BB6A6E}"/>
               </a:ext>
             </a:extLst>
           </p:cNvPr>
@@ -18115,7 +18172,7 @@
           <p:cNvPr id="10" name="c3-text-27">
             <a:extLst xmlns:a="http://schemas.openxmlformats.org/drawingml/2006/main">
               <a:ext uri="{FF2B5EF4-FFF2-40B4-BE49-F238E27FC236}">
-                <a16:creationId xmlns:a16="http://schemas.microsoft.com/office/drawing/2014/main" id="{9F4FFC5A-647A-4BF1-9DCD-7CDA4E6B1547}"/>
+                <a16:creationId xmlns:a16="http://schemas.microsoft.com/office/drawing/2014/main" id="{761AC44C-ED60-44E8-BA16-CD98640F368C}"/>
               </a:ext>
             </a:extLst>
           </p:cNvPr>
@@ -18172,7 +18229,7 @@
           <p:cNvPr id="11" name="c3-text-28">
             <a:extLst xmlns:a="http://schemas.openxmlformats.org/drawingml/2006/main">
               <a:ext uri="{FF2B5EF4-FFF2-40B4-BE49-F238E27FC236}">
-                <a16:creationId xmlns:a16="http://schemas.microsoft.com/office/drawing/2014/main" id="{744D33F0-1CFA-40CA-94F8-AE83D4AE2DDF}"/>
+                <a16:creationId xmlns:a16="http://schemas.microsoft.com/office/drawing/2014/main" id="{9DA77C92-EBC2-4F90-B120-D7FCBE93C59A}"/>
               </a:ext>
             </a:extLst>
           </p:cNvPr>
@@ -18252,7 +18309,7 @@
           <p:cNvPr id="12" name="c3-shape-29">
             <a:extLst xmlns:a="http://schemas.openxmlformats.org/drawingml/2006/main">
               <a:ext uri="{FF2B5EF4-FFF2-40B4-BE49-F238E27FC236}">
-                <a16:creationId xmlns:a16="http://schemas.microsoft.com/office/drawing/2014/main" id="{18DDEABE-A334-461E-9DCC-2FCACA958DC5}"/>
+                <a16:creationId xmlns:a16="http://schemas.microsoft.com/office/drawing/2014/main" id="{FF13867B-81D5-4D84-81AE-560AFB724245}"/>
               </a:ext>
             </a:extLst>
           </p:cNvPr>
@@ -18286,7 +18343,7 @@
           <p:cNvPr id="13" name="c3-shape-30">
             <a:extLst xmlns:a="http://schemas.openxmlformats.org/drawingml/2006/main">
               <a:ext uri="{FF2B5EF4-FFF2-40B4-BE49-F238E27FC236}">
-                <a16:creationId xmlns:a16="http://schemas.microsoft.com/office/drawing/2014/main" id="{8035311D-9BAB-4298-A395-DB5BD7A37A2C}"/>
+                <a16:creationId xmlns:a16="http://schemas.microsoft.com/office/drawing/2014/main" id="{C683D8F3-3296-429A-BA7B-DA2E75DF6145}"/>
               </a:ext>
             </a:extLst>
           </p:cNvPr>
@@ -18318,7 +18375,7 @@
           <p:cNvPr id="14" name="c3-text-31">
             <a:extLst xmlns:a="http://schemas.openxmlformats.org/drawingml/2006/main">
               <a:ext uri="{FF2B5EF4-FFF2-40B4-BE49-F238E27FC236}">
-                <a16:creationId xmlns:a16="http://schemas.microsoft.com/office/drawing/2014/main" id="{C56E4B1A-3E3E-4F2E-A8C4-1446C5C5CAE9}"/>
+                <a16:creationId xmlns:a16="http://schemas.microsoft.com/office/drawing/2014/main" id="{AAE794DB-28D4-43A6-A261-AB26C1092DC9}"/>
               </a:ext>
             </a:extLst>
           </p:cNvPr>
@@ -18375,7 +18432,7 @@
           <p:cNvPr id="15" name="c3-text-32">
             <a:extLst xmlns:a="http://schemas.openxmlformats.org/drawingml/2006/main">
               <a:ext uri="{FF2B5EF4-FFF2-40B4-BE49-F238E27FC236}">
-                <a16:creationId xmlns:a16="http://schemas.microsoft.com/office/drawing/2014/main" id="{66EA7EC5-B847-4706-BB17-010A8A2EB739}"/>
+                <a16:creationId xmlns:a16="http://schemas.microsoft.com/office/drawing/2014/main" id="{E0D394F7-8C2A-45D6-99AD-05429EC3F93F}"/>
               </a:ext>
             </a:extLst>
           </p:cNvPr>
@@ -18455,7 +18512,7 @@
           <p:cNvPr id="16" name="c3-shape-33">
             <a:extLst xmlns:a="http://schemas.openxmlformats.org/drawingml/2006/main">
               <a:ext uri="{FF2B5EF4-FFF2-40B4-BE49-F238E27FC236}">
-                <a16:creationId xmlns:a16="http://schemas.microsoft.com/office/drawing/2014/main" id="{76AC34BC-A428-4C45-B81A-623434744F24}"/>
+                <a16:creationId xmlns:a16="http://schemas.microsoft.com/office/drawing/2014/main" id="{5A5FAF23-17FF-44E5-8BA6-90E353F58A80}"/>
               </a:ext>
             </a:extLst>
           </p:cNvPr>
@@ -18489,7 +18546,7 @@
           <p:cNvPr id="17" name="c3-text-34">
             <a:extLst xmlns:a="http://schemas.openxmlformats.org/drawingml/2006/main">
               <a:ext uri="{FF2B5EF4-FFF2-40B4-BE49-F238E27FC236}">
-                <a16:creationId xmlns:a16="http://schemas.microsoft.com/office/drawing/2014/main" id="{17BFB7F7-3F61-464E-B69B-386D72F6F335}"/>
+                <a16:creationId xmlns:a16="http://schemas.microsoft.com/office/drawing/2014/main" id="{DA8E5DCE-F407-474F-85A8-C2B83701AF1F}"/>
               </a:ext>
             </a:extLst>
           </p:cNvPr>
@@ -18543,10 +18600,10 @@
       </p:sp>
       <p:sp>
         <p:nvSpPr>
-          <p:cNvPr id="18" name="c3-text-329">
-            <a:extLst xmlns:a="http://schemas.openxmlformats.org/drawingml/2006/main">
-              <a:ext uri="{FF2B5EF4-FFF2-40B4-BE49-F238E27FC236}">
-                <a16:creationId xmlns:a16="http://schemas.microsoft.com/office/drawing/2014/main" id="{223B0D97-1F7E-4C1B-AB36-7BE7DE33C87B}"/>
+          <p:cNvPr id="18" name="c3-text-330">
+            <a:extLst xmlns:a="http://schemas.openxmlformats.org/drawingml/2006/main">
+              <a:ext uri="{FF2B5EF4-FFF2-40B4-BE49-F238E27FC236}">
+                <a16:creationId xmlns:a16="http://schemas.microsoft.com/office/drawing/2014/main" id="{BBA62271-0F98-490C-8C4A-03284985DBED}"/>
               </a:ext>
             </a:extLst>
           </p:cNvPr>
@@ -18601,7 +18658,7 @@
     </p:spTree>
     <p:extLst>
       <p:ext uri="{BB962C8B-B14F-4D97-AF65-F5344CB8AC3E}">
-        <p14:creationId xmlns:p14="http://schemas.microsoft.com/office/powerpoint/2010/main" val="1942204812"/>
+        <p14:creationId xmlns:p14="http://schemas.microsoft.com/office/powerpoint/2010/main" val="544877504"/>
       </p:ext>
     </p:extLst>
   </p:cSld>
@@ -18629,10 +18686,10 @@
       </p:grpSpPr>
       <p:sp>
         <p:nvSpPr>
-          <p:cNvPr id="22" name="c3-text-307">
-            <a:extLst xmlns:a="http://schemas.openxmlformats.org/drawingml/2006/main">
-              <a:ext uri="{FF2B5EF4-FFF2-40B4-BE49-F238E27FC236}">
-                <a16:creationId xmlns:a16="http://schemas.microsoft.com/office/drawing/2014/main" id="{4805DC99-04E4-44DA-BDB5-12D184F38719}"/>
+          <p:cNvPr id="22" name="c3-text-308">
+            <a:extLst xmlns:a="http://schemas.openxmlformats.org/drawingml/2006/main">
+              <a:ext uri="{FF2B5EF4-FFF2-40B4-BE49-F238E27FC236}">
+                <a16:creationId xmlns:a16="http://schemas.microsoft.com/office/drawing/2014/main" id="{12B625F4-0833-4AC9-89EE-0335C3758657}"/>
               </a:ext>
             </a:extLst>
           </p:cNvPr>
@@ -18686,10 +18743,10 @@
       </p:sp>
       <p:sp>
         <p:nvSpPr>
-          <p:cNvPr id="2" name="c3-text-308">
-            <a:extLst xmlns:a="http://schemas.openxmlformats.org/drawingml/2006/main">
-              <a:ext uri="{FF2B5EF4-FFF2-40B4-BE49-F238E27FC236}">
-                <a16:creationId xmlns:a16="http://schemas.microsoft.com/office/drawing/2014/main" id="{E2C029FC-7F3B-4BD2-9313-47AFAEF98BF6}"/>
+          <p:cNvPr id="2" name="c3-text-309">
+            <a:extLst xmlns:a="http://schemas.openxmlformats.org/drawingml/2006/main">
+              <a:ext uri="{FF2B5EF4-FFF2-40B4-BE49-F238E27FC236}">
+                <a16:creationId xmlns:a16="http://schemas.microsoft.com/office/drawing/2014/main" id="{01DAA109-CC9A-4627-8668-BB27932D681A}"/>
               </a:ext>
             </a:extLst>
           </p:cNvPr>
@@ -18743,10 +18800,10 @@
       </p:sp>
       <p:sp>
         <p:nvSpPr>
-          <p:cNvPr id="3" name="c3-text-309">
-            <a:extLst xmlns:a="http://schemas.openxmlformats.org/drawingml/2006/main">
-              <a:ext uri="{FF2B5EF4-FFF2-40B4-BE49-F238E27FC236}">
-                <a16:creationId xmlns:a16="http://schemas.microsoft.com/office/drawing/2014/main" id="{A289F09A-9198-4736-8345-B7D759D7185F}"/>
+          <p:cNvPr id="3" name="c3-text-310">
+            <a:extLst xmlns:a="http://schemas.openxmlformats.org/drawingml/2006/main">
+              <a:ext uri="{FF2B5EF4-FFF2-40B4-BE49-F238E27FC236}">
+                <a16:creationId xmlns:a16="http://schemas.microsoft.com/office/drawing/2014/main" id="{0B897D2A-553C-4775-82BA-7406D46A246D}"/>
               </a:ext>
             </a:extLst>
           </p:cNvPr>
@@ -18800,11 +18857,11 @@
       </p:sp>
       <p:sp>
         <p:nvSpPr>
-          <p:cNvPr id="4" name="c3-text-310">
-            <a:hlinkClick xmlns:r="http://schemas.openxmlformats.org/officeDocument/2006/relationships" xmlns:a="http://schemas.openxmlformats.org/drawingml/2006/main" r:id="R892095f7b8c7453e"/>
-            <a:extLst xmlns:a="http://schemas.openxmlformats.org/drawingml/2006/main">
-              <a:ext uri="{FF2B5EF4-FFF2-40B4-BE49-F238E27FC236}">
-                <a16:creationId xmlns:a16="http://schemas.microsoft.com/office/drawing/2014/main" id="{59D0F364-8194-42D8-AC4D-28E6A21AE3AA}"/>
+          <p:cNvPr id="4" name="c3-text-311">
+            <a:hlinkClick xmlns:r="http://schemas.openxmlformats.org/officeDocument/2006/relationships" xmlns:a="http://schemas.openxmlformats.org/drawingml/2006/main" r:id="R5893385142d24a9b"/>
+            <a:extLst xmlns:a="http://schemas.openxmlformats.org/drawingml/2006/main">
+              <a:ext uri="{FF2B5EF4-FFF2-40B4-BE49-F238E27FC236}">
+                <a16:creationId xmlns:a16="http://schemas.microsoft.com/office/drawing/2014/main" id="{631DC38F-4E44-479B-A1DE-89DC7463AA59}"/>
               </a:ext>
             </a:extLst>
           </p:cNvPr>
@@ -18858,11 +18915,11 @@
       </p:sp>
       <p:sp>
         <p:nvSpPr>
-          <p:cNvPr id="5" name="c3-text-311">
-            <a:hlinkClick xmlns:r="http://schemas.openxmlformats.org/officeDocument/2006/relationships" xmlns:a="http://schemas.openxmlformats.org/drawingml/2006/main" r:id="R93b87eb0a2ff42ae"/>
-            <a:extLst xmlns:a="http://schemas.openxmlformats.org/drawingml/2006/main">
-              <a:ext uri="{FF2B5EF4-FFF2-40B4-BE49-F238E27FC236}">
-                <a16:creationId xmlns:a16="http://schemas.microsoft.com/office/drawing/2014/main" id="{953E40AD-0CF9-4B18-A544-425A150C4D10}"/>
+          <p:cNvPr id="5" name="c3-text-312">
+            <a:hlinkClick xmlns:r="http://schemas.openxmlformats.org/officeDocument/2006/relationships" xmlns:a="http://schemas.openxmlformats.org/drawingml/2006/main" r:id="R2ee2dc3367954a9d"/>
+            <a:extLst xmlns:a="http://schemas.openxmlformats.org/drawingml/2006/main">
+              <a:ext uri="{FF2B5EF4-FFF2-40B4-BE49-F238E27FC236}">
+                <a16:creationId xmlns:a16="http://schemas.microsoft.com/office/drawing/2014/main" id="{1E05A3C0-8645-4F92-B81E-73422A4E3B66}"/>
               </a:ext>
             </a:extLst>
           </p:cNvPr>
@@ -18916,10 +18973,10 @@
       </p:sp>
       <p:sp>
         <p:nvSpPr>
-          <p:cNvPr id="6" name="c3-shape-312">
-            <a:extLst xmlns:a="http://schemas.openxmlformats.org/drawingml/2006/main">
-              <a:ext uri="{FF2B5EF4-FFF2-40B4-BE49-F238E27FC236}">
-                <a16:creationId xmlns:a16="http://schemas.microsoft.com/office/drawing/2014/main" id="{84071299-7455-4E57-A8E7-64919A2DC482}"/>
+          <p:cNvPr id="6" name="c3-shape-313">
+            <a:extLst xmlns:a="http://schemas.openxmlformats.org/drawingml/2006/main">
+              <a:ext uri="{FF2B5EF4-FFF2-40B4-BE49-F238E27FC236}">
+                <a16:creationId xmlns:a16="http://schemas.microsoft.com/office/drawing/2014/main" id="{7B5E0399-9D4C-4924-9196-9E3331C73021}"/>
               </a:ext>
             </a:extLst>
           </p:cNvPr>
@@ -18948,11 +19005,11 @@
       </p:sp>
       <p:sp>
         <p:nvSpPr>
-          <p:cNvPr id="7" name="c3-text-313">
-            <a:hlinkClick xmlns:r="http://schemas.openxmlformats.org/officeDocument/2006/relationships" xmlns:a="http://schemas.openxmlformats.org/drawingml/2006/main" r:id="Re18de4fa9b704a0a"/>
-            <a:extLst xmlns:a="http://schemas.openxmlformats.org/drawingml/2006/main">
-              <a:ext uri="{FF2B5EF4-FFF2-40B4-BE49-F238E27FC236}">
-                <a16:creationId xmlns:a16="http://schemas.microsoft.com/office/drawing/2014/main" id="{A6ED5200-B1D3-49DC-8A98-9C86FD4489EA}"/>
+          <p:cNvPr id="7" name="c3-text-314">
+            <a:hlinkClick xmlns:r="http://schemas.openxmlformats.org/officeDocument/2006/relationships" xmlns:a="http://schemas.openxmlformats.org/drawingml/2006/main" r:id="Ra5fe75ee74f64ae9"/>
+            <a:extLst xmlns:a="http://schemas.openxmlformats.org/drawingml/2006/main">
+              <a:ext uri="{FF2B5EF4-FFF2-40B4-BE49-F238E27FC236}">
+                <a16:creationId xmlns:a16="http://schemas.microsoft.com/office/drawing/2014/main" id="{89E81B49-929B-4FC7-89F9-3E1CED102897}"/>
               </a:ext>
             </a:extLst>
           </p:cNvPr>
@@ -19006,11 +19063,11 @@
       </p:sp>
       <p:sp>
         <p:nvSpPr>
-          <p:cNvPr id="8" name="c3-text-314">
-            <a:hlinkClick xmlns:r="http://schemas.openxmlformats.org/officeDocument/2006/relationships" xmlns:a="http://schemas.openxmlformats.org/drawingml/2006/main" r:id="R5a6e16247d7d4fb3"/>
-            <a:extLst xmlns:a="http://schemas.openxmlformats.org/drawingml/2006/main">
-              <a:ext uri="{FF2B5EF4-FFF2-40B4-BE49-F238E27FC236}">
-                <a16:creationId xmlns:a16="http://schemas.microsoft.com/office/drawing/2014/main" id="{31DB6CBE-4859-4AD8-9E1B-080FA08054C2}"/>
+          <p:cNvPr id="8" name="c3-text-315">
+            <a:hlinkClick xmlns:r="http://schemas.openxmlformats.org/officeDocument/2006/relationships" xmlns:a="http://schemas.openxmlformats.org/drawingml/2006/main" r:id="R1f62cbacc6484266"/>
+            <a:extLst xmlns:a="http://schemas.openxmlformats.org/drawingml/2006/main">
+              <a:ext uri="{FF2B5EF4-FFF2-40B4-BE49-F238E27FC236}">
+                <a16:creationId xmlns:a16="http://schemas.microsoft.com/office/drawing/2014/main" id="{9EF52CB7-97BF-4C00-917F-85F62355EE5F}"/>
               </a:ext>
             </a:extLst>
           </p:cNvPr>
@@ -19064,10 +19121,10 @@
       </p:sp>
       <p:sp>
         <p:nvSpPr>
-          <p:cNvPr id="9" name="c3-shape-315">
-            <a:extLst xmlns:a="http://schemas.openxmlformats.org/drawingml/2006/main">
-              <a:ext uri="{FF2B5EF4-FFF2-40B4-BE49-F238E27FC236}">
-                <a16:creationId xmlns:a16="http://schemas.microsoft.com/office/drawing/2014/main" id="{A7A5684F-3A9F-4F05-BBAB-381FA17C05F1}"/>
+          <p:cNvPr id="9" name="c3-shape-316">
+            <a:extLst xmlns:a="http://schemas.openxmlformats.org/drawingml/2006/main">
+              <a:ext uri="{FF2B5EF4-FFF2-40B4-BE49-F238E27FC236}">
+                <a16:creationId xmlns:a16="http://schemas.microsoft.com/office/drawing/2014/main" id="{5C12838E-0950-4956-B05E-9A09D65F8467}"/>
               </a:ext>
             </a:extLst>
           </p:cNvPr>
@@ -19096,11 +19153,11 @@
       </p:sp>
       <p:sp>
         <p:nvSpPr>
-          <p:cNvPr id="10" name="c3-text-316">
-            <a:hlinkClick xmlns:r="http://schemas.openxmlformats.org/officeDocument/2006/relationships" xmlns:a="http://schemas.openxmlformats.org/drawingml/2006/main" r:id="Rf4f28e4c58574f76"/>
-            <a:extLst xmlns:a="http://schemas.openxmlformats.org/drawingml/2006/main">
-              <a:ext uri="{FF2B5EF4-FFF2-40B4-BE49-F238E27FC236}">
-                <a16:creationId xmlns:a16="http://schemas.microsoft.com/office/drawing/2014/main" id="{9C9BA0CF-7649-4B18-98F3-4916F4A4F3A4}"/>
+          <p:cNvPr id="10" name="c3-text-317">
+            <a:hlinkClick xmlns:r="http://schemas.openxmlformats.org/officeDocument/2006/relationships" xmlns:a="http://schemas.openxmlformats.org/drawingml/2006/main" r:id="Rc46fc70714804c39"/>
+            <a:extLst xmlns:a="http://schemas.openxmlformats.org/drawingml/2006/main">
+              <a:ext uri="{FF2B5EF4-FFF2-40B4-BE49-F238E27FC236}">
+                <a16:creationId xmlns:a16="http://schemas.microsoft.com/office/drawing/2014/main" id="{32015256-AF88-4F97-8440-1729E66E9B80}"/>
               </a:ext>
             </a:extLst>
           </p:cNvPr>
@@ -19154,11 +19211,11 @@
       </p:sp>
       <p:sp>
         <p:nvSpPr>
-          <p:cNvPr id="11" name="c3-text-317">
-            <a:hlinkClick xmlns:r="http://schemas.openxmlformats.org/officeDocument/2006/relationships" xmlns:a="http://schemas.openxmlformats.org/drawingml/2006/main" r:id="R07e481cf2a774697"/>
-            <a:extLst xmlns:a="http://schemas.openxmlformats.org/drawingml/2006/main">
-              <a:ext uri="{FF2B5EF4-FFF2-40B4-BE49-F238E27FC236}">
-                <a16:creationId xmlns:a16="http://schemas.microsoft.com/office/drawing/2014/main" id="{685973DB-21CF-49AF-B839-5D5AE4354205}"/>
+          <p:cNvPr id="11" name="c3-text-318">
+            <a:hlinkClick xmlns:r="http://schemas.openxmlformats.org/officeDocument/2006/relationships" xmlns:a="http://schemas.openxmlformats.org/drawingml/2006/main" r:id="Rf38173c393a84e77"/>
+            <a:extLst xmlns:a="http://schemas.openxmlformats.org/drawingml/2006/main">
+              <a:ext uri="{FF2B5EF4-FFF2-40B4-BE49-F238E27FC236}">
+                <a16:creationId xmlns:a16="http://schemas.microsoft.com/office/drawing/2014/main" id="{5432FB3E-4AED-4FBA-970E-183D168595B4}"/>
               </a:ext>
             </a:extLst>
           </p:cNvPr>
@@ -19212,10 +19269,10 @@
       </p:sp>
       <p:sp>
         <p:nvSpPr>
-          <p:cNvPr id="12" name="c3-shape-318">
-            <a:extLst xmlns:a="http://schemas.openxmlformats.org/drawingml/2006/main">
-              <a:ext uri="{FF2B5EF4-FFF2-40B4-BE49-F238E27FC236}">
-                <a16:creationId xmlns:a16="http://schemas.microsoft.com/office/drawing/2014/main" id="{5EF4F411-E505-4BBE-BD0A-0A5209F16A25}"/>
+          <p:cNvPr id="12" name="c3-shape-319">
+            <a:extLst xmlns:a="http://schemas.openxmlformats.org/drawingml/2006/main">
+              <a:ext uri="{FF2B5EF4-FFF2-40B4-BE49-F238E27FC236}">
+                <a16:creationId xmlns:a16="http://schemas.microsoft.com/office/drawing/2014/main" id="{816CEB49-709C-4C44-A9FB-1A903C162381}"/>
               </a:ext>
             </a:extLst>
           </p:cNvPr>
@@ -19244,11 +19301,11 @@
       </p:sp>
       <p:sp>
         <p:nvSpPr>
-          <p:cNvPr id="13" name="c3-text-319">
-            <a:hlinkClick xmlns:r="http://schemas.openxmlformats.org/officeDocument/2006/relationships" xmlns:a="http://schemas.openxmlformats.org/drawingml/2006/main" r:id="Ra04fd6a6cdf840d2"/>
-            <a:extLst xmlns:a="http://schemas.openxmlformats.org/drawingml/2006/main">
-              <a:ext uri="{FF2B5EF4-FFF2-40B4-BE49-F238E27FC236}">
-                <a16:creationId xmlns:a16="http://schemas.microsoft.com/office/drawing/2014/main" id="{FBA73471-282A-42F6-92DB-8CEEDC48B93E}"/>
+          <p:cNvPr id="13" name="c3-text-320">
+            <a:hlinkClick xmlns:r="http://schemas.openxmlformats.org/officeDocument/2006/relationships" xmlns:a="http://schemas.openxmlformats.org/drawingml/2006/main" r:id="Rca10b02a79884ecc"/>
+            <a:extLst xmlns:a="http://schemas.openxmlformats.org/drawingml/2006/main">
+              <a:ext uri="{FF2B5EF4-FFF2-40B4-BE49-F238E27FC236}">
+                <a16:creationId xmlns:a16="http://schemas.microsoft.com/office/drawing/2014/main" id="{FAF5EAA9-2F8C-431B-A714-308414811CB5}"/>
               </a:ext>
             </a:extLst>
           </p:cNvPr>
@@ -19302,11 +19359,11 @@
       </p:sp>
       <p:sp>
         <p:nvSpPr>
-          <p:cNvPr id="14" name="c3-text-320">
-            <a:hlinkClick xmlns:r="http://schemas.openxmlformats.org/officeDocument/2006/relationships" xmlns:a="http://schemas.openxmlformats.org/drawingml/2006/main" r:id="R408db5f21be94ee0"/>
-            <a:extLst xmlns:a="http://schemas.openxmlformats.org/drawingml/2006/main">
-              <a:ext uri="{FF2B5EF4-FFF2-40B4-BE49-F238E27FC236}">
-                <a16:creationId xmlns:a16="http://schemas.microsoft.com/office/drawing/2014/main" id="{0E26E954-46B7-4713-A37F-53D94A11C156}"/>
+          <p:cNvPr id="14" name="c3-text-321">
+            <a:hlinkClick xmlns:r="http://schemas.openxmlformats.org/officeDocument/2006/relationships" xmlns:a="http://schemas.openxmlformats.org/drawingml/2006/main" r:id="Rbe17e2717a004962"/>
+            <a:extLst xmlns:a="http://schemas.openxmlformats.org/drawingml/2006/main">
+              <a:ext uri="{FF2B5EF4-FFF2-40B4-BE49-F238E27FC236}">
+                <a16:creationId xmlns:a16="http://schemas.microsoft.com/office/drawing/2014/main" id="{2EE1E29C-5E55-4EE9-8519-1C82A20783E2}"/>
               </a:ext>
             </a:extLst>
           </p:cNvPr>
@@ -19360,11 +19417,11 @@
       </p:sp>
       <p:sp>
         <p:nvSpPr>
-          <p:cNvPr id="15" name="c3-text-321">
-            <a:hlinkClick xmlns:r="http://schemas.openxmlformats.org/officeDocument/2006/relationships" xmlns:a="http://schemas.openxmlformats.org/drawingml/2006/main" r:id="Rd48d9d0b8cc54f0c"/>
-            <a:extLst xmlns:a="http://schemas.openxmlformats.org/drawingml/2006/main">
-              <a:ext uri="{FF2B5EF4-FFF2-40B4-BE49-F238E27FC236}">
-                <a16:creationId xmlns:a16="http://schemas.microsoft.com/office/drawing/2014/main" id="{002DA2E9-FE26-4E6B-8B6C-45FE7FF9BD44}"/>
+          <p:cNvPr id="15" name="c3-text-322">
+            <a:hlinkClick xmlns:r="http://schemas.openxmlformats.org/officeDocument/2006/relationships" xmlns:a="http://schemas.openxmlformats.org/drawingml/2006/main" r:id="R8a91cdf5e4874c14"/>
+            <a:extLst xmlns:a="http://schemas.openxmlformats.org/drawingml/2006/main">
+              <a:ext uri="{FF2B5EF4-FFF2-40B4-BE49-F238E27FC236}">
+                <a16:creationId xmlns:a16="http://schemas.microsoft.com/office/drawing/2014/main" id="{675CD80F-3117-49D6-B19B-09691249BFC6}"/>
               </a:ext>
             </a:extLst>
           </p:cNvPr>
@@ -19418,11 +19475,11 @@
       </p:sp>
       <p:sp>
         <p:nvSpPr>
-          <p:cNvPr id="16" name="c3-text-322">
-            <a:hlinkClick xmlns:r="http://schemas.openxmlformats.org/officeDocument/2006/relationships" xmlns:a="http://schemas.openxmlformats.org/drawingml/2006/main" r:id="R554becfa1a7e4a04"/>
-            <a:extLst xmlns:a="http://schemas.openxmlformats.org/drawingml/2006/main">
-              <a:ext uri="{FF2B5EF4-FFF2-40B4-BE49-F238E27FC236}">
-                <a16:creationId xmlns:a16="http://schemas.microsoft.com/office/drawing/2014/main" id="{9DECAAEE-82B0-4C3D-B0D4-970D44206098}"/>
+          <p:cNvPr id="16" name="c3-text-323">
+            <a:hlinkClick xmlns:r="http://schemas.openxmlformats.org/officeDocument/2006/relationships" xmlns:a="http://schemas.openxmlformats.org/drawingml/2006/main" r:id="R8a5506d071ee4c10"/>
+            <a:extLst xmlns:a="http://schemas.openxmlformats.org/drawingml/2006/main">
+              <a:ext uri="{FF2B5EF4-FFF2-40B4-BE49-F238E27FC236}">
+                <a16:creationId xmlns:a16="http://schemas.microsoft.com/office/drawing/2014/main" id="{F10E84D8-6FC8-469A-92A3-A5F522218B96}"/>
               </a:ext>
             </a:extLst>
           </p:cNvPr>
@@ -19476,10 +19533,10 @@
       </p:sp>
       <p:sp>
         <p:nvSpPr>
-          <p:cNvPr id="17" name="c3-shape-323">
-            <a:extLst xmlns:a="http://schemas.openxmlformats.org/drawingml/2006/main">
-              <a:ext uri="{FF2B5EF4-FFF2-40B4-BE49-F238E27FC236}">
-                <a16:creationId xmlns:a16="http://schemas.microsoft.com/office/drawing/2014/main" id="{0BE76138-520C-469E-8EFC-774CD94B3F36}"/>
+          <p:cNvPr id="17" name="c3-shape-324">
+            <a:extLst xmlns:a="http://schemas.openxmlformats.org/drawingml/2006/main">
+              <a:ext uri="{FF2B5EF4-FFF2-40B4-BE49-F238E27FC236}">
+                <a16:creationId xmlns:a16="http://schemas.microsoft.com/office/drawing/2014/main" id="{6949EECB-87C8-40CF-9549-E8B148E6C4F5}"/>
               </a:ext>
             </a:extLst>
           </p:cNvPr>
@@ -19508,11 +19565,11 @@
       </p:sp>
       <p:sp>
         <p:nvSpPr>
-          <p:cNvPr id="18" name="c3-text-324">
-            <a:hlinkClick xmlns:r="http://schemas.openxmlformats.org/officeDocument/2006/relationships" xmlns:a="http://schemas.openxmlformats.org/drawingml/2006/main" r:id="Rabb2dc05518d4beb"/>
-            <a:extLst xmlns:a="http://schemas.openxmlformats.org/drawingml/2006/main">
-              <a:ext uri="{FF2B5EF4-FFF2-40B4-BE49-F238E27FC236}">
-                <a16:creationId xmlns:a16="http://schemas.microsoft.com/office/drawing/2014/main" id="{62EC016D-A9F0-411A-8C98-12BB5B1B9F38}"/>
+          <p:cNvPr id="18" name="c3-text-325">
+            <a:hlinkClick xmlns:r="http://schemas.openxmlformats.org/officeDocument/2006/relationships" xmlns:a="http://schemas.openxmlformats.org/drawingml/2006/main" r:id="Rb498be9598144dfc"/>
+            <a:extLst xmlns:a="http://schemas.openxmlformats.org/drawingml/2006/main">
+              <a:ext uri="{FF2B5EF4-FFF2-40B4-BE49-F238E27FC236}">
+                <a16:creationId xmlns:a16="http://schemas.microsoft.com/office/drawing/2014/main" id="{B6DACDE0-3015-4648-8E09-D3AFFF1A2409}"/>
               </a:ext>
             </a:extLst>
           </p:cNvPr>
@@ -19566,11 +19623,11 @@
       </p:sp>
       <p:sp>
         <p:nvSpPr>
-          <p:cNvPr id="19" name="c3-text-325">
-            <a:hlinkClick xmlns:r="http://schemas.openxmlformats.org/officeDocument/2006/relationships" xmlns:a="http://schemas.openxmlformats.org/drawingml/2006/main" r:id="Rebf54c40318b43f6"/>
-            <a:extLst xmlns:a="http://schemas.openxmlformats.org/drawingml/2006/main">
-              <a:ext uri="{FF2B5EF4-FFF2-40B4-BE49-F238E27FC236}">
-                <a16:creationId xmlns:a16="http://schemas.microsoft.com/office/drawing/2014/main" id="{06C8601F-61DF-4147-9A08-90D9BBE9A058}"/>
+          <p:cNvPr id="19" name="c3-text-326">
+            <a:hlinkClick xmlns:r="http://schemas.openxmlformats.org/officeDocument/2006/relationships" xmlns:a="http://schemas.openxmlformats.org/drawingml/2006/main" r:id="R78d203cfb51945d6"/>
+            <a:extLst xmlns:a="http://schemas.openxmlformats.org/drawingml/2006/main">
+              <a:ext uri="{FF2B5EF4-FFF2-40B4-BE49-F238E27FC236}">
+                <a16:creationId xmlns:a16="http://schemas.microsoft.com/office/drawing/2014/main" id="{C9605901-506C-4C7D-8892-BA643E32318C}"/>
               </a:ext>
             </a:extLst>
           </p:cNvPr>
@@ -19624,10 +19681,10 @@
       </p:sp>
       <p:sp>
         <p:nvSpPr>
-          <p:cNvPr id="20" name="c3-shape-326">
-            <a:extLst xmlns:a="http://schemas.openxmlformats.org/drawingml/2006/main">
-              <a:ext uri="{FF2B5EF4-FFF2-40B4-BE49-F238E27FC236}">
-                <a16:creationId xmlns:a16="http://schemas.microsoft.com/office/drawing/2014/main" id="{78F79E2F-C19E-4A75-AACB-D604E97137B9}"/>
+          <p:cNvPr id="20" name="c3-shape-327">
+            <a:extLst xmlns:a="http://schemas.openxmlformats.org/drawingml/2006/main">
+              <a:ext uri="{FF2B5EF4-FFF2-40B4-BE49-F238E27FC236}">
+                <a16:creationId xmlns:a16="http://schemas.microsoft.com/office/drawing/2014/main" id="{88C790D2-7BDC-4AC3-8413-61F68CE44D0A}"/>
               </a:ext>
             </a:extLst>
           </p:cNvPr>
@@ -19656,10 +19713,10 @@
       </p:sp>
       <p:sp>
         <p:nvSpPr>
-          <p:cNvPr id="21" name="c3-text-356">
-            <a:extLst xmlns:a="http://schemas.openxmlformats.org/drawingml/2006/main">
-              <a:ext uri="{FF2B5EF4-FFF2-40B4-BE49-F238E27FC236}">
-                <a16:creationId xmlns:a16="http://schemas.microsoft.com/office/drawing/2014/main" id="{08962552-92D9-470C-9463-8F944DB8BC4E}"/>
+          <p:cNvPr id="21" name="c3-text-357">
+            <a:extLst xmlns:a="http://schemas.openxmlformats.org/drawingml/2006/main">
+              <a:ext uri="{FF2B5EF4-FFF2-40B4-BE49-F238E27FC236}">
+                <a16:creationId xmlns:a16="http://schemas.microsoft.com/office/drawing/2014/main" id="{BC046334-F067-405B-8A59-D60A50AFDD7D}"/>
               </a:ext>
             </a:extLst>
           </p:cNvPr>
@@ -19714,7 +19771,7 @@
     </p:spTree>
     <p:extLst>
       <p:ext uri="{BB962C8B-B14F-4D97-AF65-F5344CB8AC3E}">
-        <p14:creationId xmlns:p14="http://schemas.microsoft.com/office/powerpoint/2010/main" val="2017353226"/>
+        <p14:creationId xmlns:p14="http://schemas.microsoft.com/office/powerpoint/2010/main" val="1468319102"/>
       </p:ext>
     </p:extLst>
   </p:cSld>
@@ -19745,7 +19802,7 @@
           <p:cNvPr id="16" name="c3-text-35">
             <a:extLst xmlns:a="http://schemas.openxmlformats.org/drawingml/2006/main">
               <a:ext uri="{FF2B5EF4-FFF2-40B4-BE49-F238E27FC236}">
-                <a16:creationId xmlns:a16="http://schemas.microsoft.com/office/drawing/2014/main" id="{2ED26BE5-5633-4B47-B77F-7C6E22FE2CC6}"/>
+                <a16:creationId xmlns:a16="http://schemas.microsoft.com/office/drawing/2014/main" id="{8600623D-1C3D-484B-99F6-14D7D2BAEB47}"/>
               </a:ext>
             </a:extLst>
           </p:cNvPr>
@@ -19802,7 +19859,7 @@
           <p:cNvPr id="2" name="c3-text-36">
             <a:extLst xmlns:a="http://schemas.openxmlformats.org/drawingml/2006/main">
               <a:ext uri="{FF2B5EF4-FFF2-40B4-BE49-F238E27FC236}">
-                <a16:creationId xmlns:a16="http://schemas.microsoft.com/office/drawing/2014/main" id="{4CDA0AAB-3292-4ED9-A06A-B7769F158249}"/>
+                <a16:creationId xmlns:a16="http://schemas.microsoft.com/office/drawing/2014/main" id="{138CFE24-D473-4756-B1B3-F9F8A96B2E04}"/>
               </a:ext>
             </a:extLst>
           </p:cNvPr>
@@ -19859,7 +19916,7 @@
           <p:cNvPr id="3" name="c3-text-37">
             <a:extLst xmlns:a="http://schemas.openxmlformats.org/drawingml/2006/main">
               <a:ext uri="{FF2B5EF4-FFF2-40B4-BE49-F238E27FC236}">
-                <a16:creationId xmlns:a16="http://schemas.microsoft.com/office/drawing/2014/main" id="{F1F16A03-0553-461B-8F20-5D4C81F91CDA}"/>
+                <a16:creationId xmlns:a16="http://schemas.microsoft.com/office/drawing/2014/main" id="{76EF6B6B-627F-454F-8142-95AF895EBC77}"/>
               </a:ext>
             </a:extLst>
           </p:cNvPr>
@@ -19916,7 +19973,7 @@
           <p:cNvPr id="4" name="c3-shape-38">
             <a:extLst xmlns:a="http://schemas.openxmlformats.org/drawingml/2006/main">
               <a:ext uri="{FF2B5EF4-FFF2-40B4-BE49-F238E27FC236}">
-                <a16:creationId xmlns:a16="http://schemas.microsoft.com/office/drawing/2014/main" id="{C3379662-5D87-4C8E-9412-91F3BED5D301}"/>
+                <a16:creationId xmlns:a16="http://schemas.microsoft.com/office/drawing/2014/main" id="{C81D39A0-206C-49FB-828C-7923596C4361}"/>
               </a:ext>
             </a:extLst>
           </p:cNvPr>
@@ -19950,7 +20007,7 @@
           <p:cNvPr id="5" name="c3-text-39">
             <a:extLst xmlns:a="http://schemas.openxmlformats.org/drawingml/2006/main">
               <a:ext uri="{FF2B5EF4-FFF2-40B4-BE49-F238E27FC236}">
-                <a16:creationId xmlns:a16="http://schemas.microsoft.com/office/drawing/2014/main" id="{C829CEA2-0A3B-4048-80CB-C09AF364B58C}"/>
+                <a16:creationId xmlns:a16="http://schemas.microsoft.com/office/drawing/2014/main" id="{80974AA0-5999-4B19-BF3A-22351E7F4582}"/>
               </a:ext>
             </a:extLst>
           </p:cNvPr>
@@ -20007,7 +20064,7 @@
           <p:cNvPr id="6" name="c3-shape-40">
             <a:extLst xmlns:a="http://schemas.openxmlformats.org/drawingml/2006/main">
               <a:ext uri="{FF2B5EF4-FFF2-40B4-BE49-F238E27FC236}">
-                <a16:creationId xmlns:a16="http://schemas.microsoft.com/office/drawing/2014/main" id="{8551BC99-EC1E-4934-A707-F5AFD088F0D0}"/>
+                <a16:creationId xmlns:a16="http://schemas.microsoft.com/office/drawing/2014/main" id="{E1D29399-B18A-44FC-8CF5-A9CBC0813E06}"/>
               </a:ext>
             </a:extLst>
           </p:cNvPr>
@@ -20039,7 +20096,7 @@
           <p:cNvPr id="7" name="c3-shape-41">
             <a:extLst xmlns:a="http://schemas.openxmlformats.org/drawingml/2006/main">
               <a:ext uri="{FF2B5EF4-FFF2-40B4-BE49-F238E27FC236}">
-                <a16:creationId xmlns:a16="http://schemas.microsoft.com/office/drawing/2014/main" id="{0A3DAAE8-70B4-46AC-AD12-18679BF77BE5}"/>
+                <a16:creationId xmlns:a16="http://schemas.microsoft.com/office/drawing/2014/main" id="{CA61AFE5-7EE1-49C4-910A-6B82FAA1B690}"/>
               </a:ext>
             </a:extLst>
           </p:cNvPr>
@@ -20073,7 +20130,7 @@
           <p:cNvPr id="8" name="c3-text-42">
             <a:extLst xmlns:a="http://schemas.openxmlformats.org/drawingml/2006/main">
               <a:ext uri="{FF2B5EF4-FFF2-40B4-BE49-F238E27FC236}">
-                <a16:creationId xmlns:a16="http://schemas.microsoft.com/office/drawing/2014/main" id="{8B4AD2B6-CF67-468F-BD7F-B09914DA04FC}"/>
+                <a16:creationId xmlns:a16="http://schemas.microsoft.com/office/drawing/2014/main" id="{E078A041-34C7-4F7F-8646-1AC263A4D59B}"/>
               </a:ext>
             </a:extLst>
           </p:cNvPr>
@@ -20130,7 +20187,7 @@
           <p:cNvPr id="9" name="c3-shape-43">
             <a:extLst xmlns:a="http://schemas.openxmlformats.org/drawingml/2006/main">
               <a:ext uri="{FF2B5EF4-FFF2-40B4-BE49-F238E27FC236}">
-                <a16:creationId xmlns:a16="http://schemas.microsoft.com/office/drawing/2014/main" id="{D9716CC8-C0A3-444D-BD11-DC874A0F762D}"/>
+                <a16:creationId xmlns:a16="http://schemas.microsoft.com/office/drawing/2014/main" id="{81EF5A5F-2711-41F8-B56B-0D240EEB6034}"/>
               </a:ext>
             </a:extLst>
           </p:cNvPr>
@@ -20162,7 +20219,7 @@
           <p:cNvPr id="10" name="c3-shape-44">
             <a:extLst xmlns:a="http://schemas.openxmlformats.org/drawingml/2006/main">
               <a:ext uri="{FF2B5EF4-FFF2-40B4-BE49-F238E27FC236}">
-                <a16:creationId xmlns:a16="http://schemas.microsoft.com/office/drawing/2014/main" id="{796FE752-7D41-4E2C-889E-B5E8CFAF5953}"/>
+                <a16:creationId xmlns:a16="http://schemas.microsoft.com/office/drawing/2014/main" id="{95FD2A77-C1A9-4E89-B332-1A7A435AF1E8}"/>
               </a:ext>
             </a:extLst>
           </p:cNvPr>
@@ -20196,7 +20253,7 @@
           <p:cNvPr id="11" name="c3-text-45">
             <a:extLst xmlns:a="http://schemas.openxmlformats.org/drawingml/2006/main">
               <a:ext uri="{FF2B5EF4-FFF2-40B4-BE49-F238E27FC236}">
-                <a16:creationId xmlns:a16="http://schemas.microsoft.com/office/drawing/2014/main" id="{FE3D923B-CD77-409D-8E9F-6573A834E077}"/>
+                <a16:creationId xmlns:a16="http://schemas.microsoft.com/office/drawing/2014/main" id="{31D77993-C3C6-46B2-B0A0-6BF6038857E3}"/>
               </a:ext>
             </a:extLst>
           </p:cNvPr>
@@ -20253,7 +20310,7 @@
           <p:cNvPr id="12" name="c3-shape-46">
             <a:extLst xmlns:a="http://schemas.openxmlformats.org/drawingml/2006/main">
               <a:ext uri="{FF2B5EF4-FFF2-40B4-BE49-F238E27FC236}">
-                <a16:creationId xmlns:a16="http://schemas.microsoft.com/office/drawing/2014/main" id="{D4E17CC1-DDB4-41DC-8D63-12A38662BB30}"/>
+                <a16:creationId xmlns:a16="http://schemas.microsoft.com/office/drawing/2014/main" id="{D4D60FE9-0E74-4E46-9E20-3D5BEF62CDDB}"/>
               </a:ext>
             </a:extLst>
           </p:cNvPr>
@@ -20287,7 +20344,7 @@
           <p:cNvPr id="13" name="c3-text-47">
             <a:extLst xmlns:a="http://schemas.openxmlformats.org/drawingml/2006/main">
               <a:ext uri="{FF2B5EF4-FFF2-40B4-BE49-F238E27FC236}">
-                <a16:creationId xmlns:a16="http://schemas.microsoft.com/office/drawing/2014/main" id="{680B7F65-8062-41C7-AEA0-EBEE52D9C18F}"/>
+                <a16:creationId xmlns:a16="http://schemas.microsoft.com/office/drawing/2014/main" id="{CBA84FE9-23C3-4508-BA75-708D6D44937A}"/>
               </a:ext>
             </a:extLst>
           </p:cNvPr>
@@ -20344,7 +20401,7 @@
           <p:cNvPr id="14" name="c3-text-48">
             <a:extLst xmlns:a="http://schemas.openxmlformats.org/drawingml/2006/main">
               <a:ext uri="{FF2B5EF4-FFF2-40B4-BE49-F238E27FC236}">
-                <a16:creationId xmlns:a16="http://schemas.microsoft.com/office/drawing/2014/main" id="{55B5E851-7590-4035-A0C3-937F80D3D8DA}"/>
+                <a16:creationId xmlns:a16="http://schemas.microsoft.com/office/drawing/2014/main" id="{0B2F0F7E-DF74-4109-BD30-EEEFCBEA2C09}"/>
               </a:ext>
             </a:extLst>
           </p:cNvPr>
@@ -20398,10 +20455,10 @@
       </p:sp>
       <p:sp>
         <p:nvSpPr>
-          <p:cNvPr id="15" name="c3-text-330">
-            <a:extLst xmlns:a="http://schemas.openxmlformats.org/drawingml/2006/main">
-              <a:ext uri="{FF2B5EF4-FFF2-40B4-BE49-F238E27FC236}">
-                <a16:creationId xmlns:a16="http://schemas.microsoft.com/office/drawing/2014/main" id="{591FBAF1-D752-441D-B296-6A38CC90B8A0}"/>
+          <p:cNvPr id="15" name="c3-text-331">
+            <a:extLst xmlns:a="http://schemas.openxmlformats.org/drawingml/2006/main">
+              <a:ext uri="{FF2B5EF4-FFF2-40B4-BE49-F238E27FC236}">
+                <a16:creationId xmlns:a16="http://schemas.microsoft.com/office/drawing/2014/main" id="{F0F83BE9-0DBA-4FD4-8425-35698F3775E2}"/>
               </a:ext>
             </a:extLst>
           </p:cNvPr>
@@ -20456,7 +20513,7 @@
     </p:spTree>
     <p:extLst>
       <p:ext uri="{BB962C8B-B14F-4D97-AF65-F5344CB8AC3E}">
-        <p14:creationId xmlns:p14="http://schemas.microsoft.com/office/powerpoint/2010/main" val="627744157"/>
+        <p14:creationId xmlns:p14="http://schemas.microsoft.com/office/powerpoint/2010/main" val="816451973"/>
       </p:ext>
     </p:extLst>
   </p:cSld>
@@ -20487,7 +20544,7 @@
           <p:cNvPr id="15" name="c3-text-49">
             <a:extLst xmlns:a="http://schemas.openxmlformats.org/drawingml/2006/main">
               <a:ext uri="{FF2B5EF4-FFF2-40B4-BE49-F238E27FC236}">
-                <a16:creationId xmlns:a16="http://schemas.microsoft.com/office/drawing/2014/main" id="{5DC31CC5-3782-4B28-978D-4E3BB0DA98B5}"/>
+                <a16:creationId xmlns:a16="http://schemas.microsoft.com/office/drawing/2014/main" id="{7D237B16-FBB9-4E9D-B216-56147CE96DE5}"/>
               </a:ext>
             </a:extLst>
           </p:cNvPr>
@@ -20544,7 +20601,7 @@
           <p:cNvPr id="2" name="c3-text-50">
             <a:extLst xmlns:a="http://schemas.openxmlformats.org/drawingml/2006/main">
               <a:ext uri="{FF2B5EF4-FFF2-40B4-BE49-F238E27FC236}">
-                <a16:creationId xmlns:a16="http://schemas.microsoft.com/office/drawing/2014/main" id="{ADAADE20-121B-41B9-9EF0-2C1DF9B1E930}"/>
+                <a16:creationId xmlns:a16="http://schemas.microsoft.com/office/drawing/2014/main" id="{6E3D7555-BCB1-4408-934E-4B52E394C8F4}"/>
               </a:ext>
             </a:extLst>
           </p:cNvPr>
@@ -20601,7 +20658,7 @@
           <p:cNvPr id="3" name="c3-text-51">
             <a:extLst xmlns:a="http://schemas.openxmlformats.org/drawingml/2006/main">
               <a:ext uri="{FF2B5EF4-FFF2-40B4-BE49-F238E27FC236}">
-                <a16:creationId xmlns:a16="http://schemas.microsoft.com/office/drawing/2014/main" id="{BC8E4629-A3E5-457C-B617-6A03B13EA553}"/>
+                <a16:creationId xmlns:a16="http://schemas.microsoft.com/office/drawing/2014/main" id="{5CF0F710-5631-4E7B-9F08-1C4878464354}"/>
               </a:ext>
             </a:extLst>
           </p:cNvPr>
@@ -20658,7 +20715,7 @@
           <p:cNvPr id="4" name="c3-shape-52">
             <a:extLst xmlns:a="http://schemas.openxmlformats.org/drawingml/2006/main">
               <a:ext uri="{FF2B5EF4-FFF2-40B4-BE49-F238E27FC236}">
-                <a16:creationId xmlns:a16="http://schemas.microsoft.com/office/drawing/2014/main" id="{155B6A2C-6E78-4AC3-BD49-78ACBEE9B5AB}"/>
+                <a16:creationId xmlns:a16="http://schemas.microsoft.com/office/drawing/2014/main" id="{EEBCBE7C-B1CC-4F41-851B-9B146B422408}"/>
               </a:ext>
             </a:extLst>
           </p:cNvPr>
@@ -20692,7 +20749,7 @@
           <p:cNvPr id="5" name="c3-text-53">
             <a:extLst xmlns:a="http://schemas.openxmlformats.org/drawingml/2006/main">
               <a:ext uri="{FF2B5EF4-FFF2-40B4-BE49-F238E27FC236}">
-                <a16:creationId xmlns:a16="http://schemas.microsoft.com/office/drawing/2014/main" id="{1A48B608-0EB0-464D-BFF2-47AB1BCD35B9}"/>
+                <a16:creationId xmlns:a16="http://schemas.microsoft.com/office/drawing/2014/main" id="{9BE0AACC-40D4-4E01-B856-F4F137C8057C}"/>
               </a:ext>
             </a:extLst>
           </p:cNvPr>
@@ -20805,7 +20862,7 @@
           <p:cNvPr id="6" name="c3-shape-54">
             <a:extLst xmlns:a="http://schemas.openxmlformats.org/drawingml/2006/main">
               <a:ext uri="{FF2B5EF4-FFF2-40B4-BE49-F238E27FC236}">
-                <a16:creationId xmlns:a16="http://schemas.microsoft.com/office/drawing/2014/main" id="{01707B03-D865-43F0-8742-03092DF5B46C}"/>
+                <a16:creationId xmlns:a16="http://schemas.microsoft.com/office/drawing/2014/main" id="{F4173DE5-C89B-4B6B-9420-A2E872DEE5C6}"/>
               </a:ext>
             </a:extLst>
           </p:cNvPr>
@@ -20839,7 +20896,7 @@
           <p:cNvPr id="7" name="c3-shape-55">
             <a:extLst xmlns:a="http://schemas.openxmlformats.org/drawingml/2006/main">
               <a:ext uri="{FF2B5EF4-FFF2-40B4-BE49-F238E27FC236}">
-                <a16:creationId xmlns:a16="http://schemas.microsoft.com/office/drawing/2014/main" id="{8C4A4403-6090-49E9-8717-A2AF7F383F51}"/>
+                <a16:creationId xmlns:a16="http://schemas.microsoft.com/office/drawing/2014/main" id="{A45AEE4D-52C5-4169-AE17-705D2A9CBFE7}"/>
               </a:ext>
             </a:extLst>
           </p:cNvPr>
@@ -20871,7 +20928,7 @@
           <p:cNvPr id="8" name="c3-text-56">
             <a:extLst xmlns:a="http://schemas.openxmlformats.org/drawingml/2006/main">
               <a:ext uri="{FF2B5EF4-FFF2-40B4-BE49-F238E27FC236}">
-                <a16:creationId xmlns:a16="http://schemas.microsoft.com/office/drawing/2014/main" id="{B6ECD51B-CCC8-4F1B-9BC1-BB5306797B9F}"/>
+                <a16:creationId xmlns:a16="http://schemas.microsoft.com/office/drawing/2014/main" id="{8594A196-07EF-484A-B692-E754E1E755F3}"/>
               </a:ext>
             </a:extLst>
           </p:cNvPr>
@@ -20928,7 +20985,7 @@
           <p:cNvPr id="9" name="c3-text-57">
             <a:extLst xmlns:a="http://schemas.openxmlformats.org/drawingml/2006/main">
               <a:ext uri="{FF2B5EF4-FFF2-40B4-BE49-F238E27FC236}">
-                <a16:creationId xmlns:a16="http://schemas.microsoft.com/office/drawing/2014/main" id="{67EFCE99-2DDF-4027-8187-F3CF7E10646B}"/>
+                <a16:creationId xmlns:a16="http://schemas.microsoft.com/office/drawing/2014/main" id="{74A6A259-30BA-4B04-A9A6-31B66AE32331}"/>
               </a:ext>
             </a:extLst>
           </p:cNvPr>
@@ -21008,7 +21065,7 @@
           <p:cNvPr id="10" name="c3-shape-58">
             <a:extLst xmlns:a="http://schemas.openxmlformats.org/drawingml/2006/main">
               <a:ext uri="{FF2B5EF4-FFF2-40B4-BE49-F238E27FC236}">
-                <a16:creationId xmlns:a16="http://schemas.microsoft.com/office/drawing/2014/main" id="{5E0C620E-A564-41A7-B321-1135E8F5E0EB}"/>
+                <a16:creationId xmlns:a16="http://schemas.microsoft.com/office/drawing/2014/main" id="{7794EBC6-1DEE-438D-B5BC-F0859B7B2BC4}"/>
               </a:ext>
             </a:extLst>
           </p:cNvPr>
@@ -21042,7 +21099,7 @@
           <p:cNvPr id="11" name="c3-shape-59">
             <a:extLst xmlns:a="http://schemas.openxmlformats.org/drawingml/2006/main">
               <a:ext uri="{FF2B5EF4-FFF2-40B4-BE49-F238E27FC236}">
-                <a16:creationId xmlns:a16="http://schemas.microsoft.com/office/drawing/2014/main" id="{2E87C5DD-79E2-469B-9FBB-3CBBFF08FF91}"/>
+                <a16:creationId xmlns:a16="http://schemas.microsoft.com/office/drawing/2014/main" id="{B96B1C6C-B350-479A-884B-166D206536E6}"/>
               </a:ext>
             </a:extLst>
           </p:cNvPr>
@@ -21074,7 +21131,7 @@
           <p:cNvPr id="12" name="c3-text-60">
             <a:extLst xmlns:a="http://schemas.openxmlformats.org/drawingml/2006/main">
               <a:ext uri="{FF2B5EF4-FFF2-40B4-BE49-F238E27FC236}">
-                <a16:creationId xmlns:a16="http://schemas.microsoft.com/office/drawing/2014/main" id="{EB9356A2-D82C-4E8D-A225-AEE7BFBE9A8F}"/>
+                <a16:creationId xmlns:a16="http://schemas.microsoft.com/office/drawing/2014/main" id="{5C18A416-35B8-4744-A3B9-B9DF50CCEEB6}"/>
               </a:ext>
             </a:extLst>
           </p:cNvPr>
@@ -21131,7 +21188,7 @@
           <p:cNvPr id="13" name="c3-text-61">
             <a:extLst xmlns:a="http://schemas.openxmlformats.org/drawingml/2006/main">
               <a:ext uri="{FF2B5EF4-FFF2-40B4-BE49-F238E27FC236}">
-                <a16:creationId xmlns:a16="http://schemas.microsoft.com/office/drawing/2014/main" id="{64262296-CA88-4EA1-AFED-5163373892C5}"/>
+                <a16:creationId xmlns:a16="http://schemas.microsoft.com/office/drawing/2014/main" id="{F85A485D-3B75-43E8-8A21-243566D9F79E}"/>
               </a:ext>
             </a:extLst>
           </p:cNvPr>
@@ -21178,7 +21235,7 @@
                 <a:ea typeface="Calibri"/>
                 <a:cs typeface="Calibri"/>
               </a:rPr>
-              <a:t>The latest ModelReply for the avatar:</a:t>
+              <a:t>The full ModelReply:</a:t>
             </a:r>
           </a:p>
           <a:p xmlns:a="http://schemas.openxmlformats.org/drawingml/2006/main">
@@ -21201,17 +21258,17 @@
                 <a:ea typeface="Calibri"/>
                 <a:cs typeface="Calibri"/>
               </a:rPr>
-              <a:t>emotion, expression, gesture.</a:t>
-            </a:r>
-          </a:p>
-        </p:txBody>
-      </p:sp>
-      <p:sp>
-        <p:nvSpPr>
-          <p:cNvPr id="14" name="c3-text-331">
-            <a:extLst xmlns:a="http://schemas.openxmlformats.org/drawingml/2006/main">
-              <a:ext uri="{FF2B5EF4-FFF2-40B4-BE49-F238E27FC236}">
-                <a16:creationId xmlns:a16="http://schemas.microsoft.com/office/drawing/2014/main" id="{F91EDF01-874E-4B41-A2A2-A747EB2C03C9}"/>
+              <a:t>speech and avatar behaviour.</a:t>
+            </a:r>
+          </a:p>
+        </p:txBody>
+      </p:sp>
+      <p:sp>
+        <p:nvSpPr>
+          <p:cNvPr id="14" name="c3-text-332">
+            <a:extLst xmlns:a="http://schemas.openxmlformats.org/drawingml/2006/main">
+              <a:ext uri="{FF2B5EF4-FFF2-40B4-BE49-F238E27FC236}">
+                <a16:creationId xmlns:a16="http://schemas.microsoft.com/office/drawing/2014/main" id="{7D0C8FD5-BBFE-46A0-8E15-C8C6446F32BE}"/>
               </a:ext>
             </a:extLst>
           </p:cNvPr>
@@ -21266,7 +21323,7 @@
     </p:spTree>
     <p:extLst>
       <p:ext uri="{BB962C8B-B14F-4D97-AF65-F5344CB8AC3E}">
-        <p14:creationId xmlns:p14="http://schemas.microsoft.com/office/powerpoint/2010/main" val="409736093"/>
+        <p14:creationId xmlns:p14="http://schemas.microsoft.com/office/powerpoint/2010/main" val="1502444178"/>
       </p:ext>
     </p:extLst>
   </p:cSld>
@@ -21297,7 +21354,7 @@
           <p:cNvPr id="8" name="c3-text-62">
             <a:extLst xmlns:a="http://schemas.openxmlformats.org/drawingml/2006/main">
               <a:ext uri="{FF2B5EF4-FFF2-40B4-BE49-F238E27FC236}">
-                <a16:creationId xmlns:a16="http://schemas.microsoft.com/office/drawing/2014/main" id="{78BCDA5D-FD65-42BA-B87D-DEB27E6EAB95}"/>
+                <a16:creationId xmlns:a16="http://schemas.microsoft.com/office/drawing/2014/main" id="{25B06B01-9590-48F3-B240-43851C36B808}"/>
               </a:ext>
             </a:extLst>
           </p:cNvPr>
@@ -21354,7 +21411,7 @@
           <p:cNvPr id="2" name="c3-text-63">
             <a:extLst xmlns:a="http://schemas.openxmlformats.org/drawingml/2006/main">
               <a:ext uri="{FF2B5EF4-FFF2-40B4-BE49-F238E27FC236}">
-                <a16:creationId xmlns:a16="http://schemas.microsoft.com/office/drawing/2014/main" id="{4BFEA15F-5C48-420C-BE31-3FBD5FB50553}"/>
+                <a16:creationId xmlns:a16="http://schemas.microsoft.com/office/drawing/2014/main" id="{B4847864-8597-47D2-A275-6591ECC22A18}"/>
               </a:ext>
             </a:extLst>
           </p:cNvPr>
@@ -21411,7 +21468,7 @@
           <p:cNvPr id="3" name="c3-text-64">
             <a:extLst xmlns:a="http://schemas.openxmlformats.org/drawingml/2006/main">
               <a:ext uri="{FF2B5EF4-FFF2-40B4-BE49-F238E27FC236}">
-                <a16:creationId xmlns:a16="http://schemas.microsoft.com/office/drawing/2014/main" id="{B992B547-E92C-4D6E-91F7-5A12BC36C3A3}"/>
+                <a16:creationId xmlns:a16="http://schemas.microsoft.com/office/drawing/2014/main" id="{E4478843-5FAB-4796-A2F9-0299D0206739}"/>
               </a:ext>
             </a:extLst>
           </p:cNvPr>
@@ -21468,7 +21525,7 @@
           <p:cNvPr id="4" name="c3-shape-65">
             <a:extLst xmlns:a="http://schemas.openxmlformats.org/drawingml/2006/main">
               <a:ext uri="{FF2B5EF4-FFF2-40B4-BE49-F238E27FC236}">
-                <a16:creationId xmlns:a16="http://schemas.microsoft.com/office/drawing/2014/main" id="{EBDF6D24-F114-4C1B-BE49-1F915A6A198E}"/>
+                <a16:creationId xmlns:a16="http://schemas.microsoft.com/office/drawing/2014/main" id="{6424B8F1-20C8-43D4-ACEE-8B069EBFF8F3}"/>
               </a:ext>
             </a:extLst>
           </p:cNvPr>
@@ -21502,7 +21559,7 @@
           <p:cNvPr id="5" name="c3-text-66">
             <a:extLst xmlns:a="http://schemas.openxmlformats.org/drawingml/2006/main">
               <a:ext uri="{FF2B5EF4-FFF2-40B4-BE49-F238E27FC236}">
-                <a16:creationId xmlns:a16="http://schemas.microsoft.com/office/drawing/2014/main" id="{107D9927-49EC-46B2-8054-6CEFCB025A56}"/>
+                <a16:creationId xmlns:a16="http://schemas.microsoft.com/office/drawing/2014/main" id="{A4D79418-9B17-4BE6-84F3-A7D228F58F51}"/>
               </a:ext>
             </a:extLst>
           </p:cNvPr>
@@ -21761,7 +21818,7 @@
           <p:cNvPr id="6" name="c3-text-67">
             <a:extLst xmlns:a="http://schemas.openxmlformats.org/drawingml/2006/main">
               <a:ext uri="{FF2B5EF4-FFF2-40B4-BE49-F238E27FC236}">
-                <a16:creationId xmlns:a16="http://schemas.microsoft.com/office/drawing/2014/main" id="{4E40A4E9-8B1B-4EC7-9CA1-4CE73662542E}"/>
+                <a16:creationId xmlns:a16="http://schemas.microsoft.com/office/drawing/2014/main" id="{FE492115-044D-4A90-A5F8-DC30D5FFAD01}"/>
               </a:ext>
             </a:extLst>
           </p:cNvPr>
@@ -21815,10 +21872,10 @@
       </p:sp>
       <p:sp>
         <p:nvSpPr>
-          <p:cNvPr id="7" name="c3-text-332">
-            <a:extLst xmlns:a="http://schemas.openxmlformats.org/drawingml/2006/main">
-              <a:ext uri="{FF2B5EF4-FFF2-40B4-BE49-F238E27FC236}">
-                <a16:creationId xmlns:a16="http://schemas.microsoft.com/office/drawing/2014/main" id="{2B0F2251-5874-4D04-BB3A-00838AF3FB95}"/>
+          <p:cNvPr id="7" name="c3-text-333">
+            <a:extLst xmlns:a="http://schemas.openxmlformats.org/drawingml/2006/main">
+              <a:ext uri="{FF2B5EF4-FFF2-40B4-BE49-F238E27FC236}">
+                <a16:creationId xmlns:a16="http://schemas.microsoft.com/office/drawing/2014/main" id="{F61CEC41-E868-422E-AF99-FBF159383580}"/>
               </a:ext>
             </a:extLst>
           </p:cNvPr>
@@ -21873,7 +21930,7 @@
     </p:spTree>
     <p:extLst>
       <p:ext uri="{BB962C8B-B14F-4D97-AF65-F5344CB8AC3E}">
-        <p14:creationId xmlns:p14="http://schemas.microsoft.com/office/powerpoint/2010/main" val="1529120459"/>
+        <p14:creationId xmlns:p14="http://schemas.microsoft.com/office/powerpoint/2010/main" val="833167792"/>
       </p:ext>
     </p:extLst>
   </p:cSld>
@@ -21904,7 +21961,7 @@
           <p:cNvPr id="9" name="c3-text-68">
             <a:extLst xmlns:a="http://schemas.openxmlformats.org/drawingml/2006/main">
               <a:ext uri="{FF2B5EF4-FFF2-40B4-BE49-F238E27FC236}">
-                <a16:creationId xmlns:a16="http://schemas.microsoft.com/office/drawing/2014/main" id="{F194606F-83AE-4DD0-B619-2582F5AD05AC}"/>
+                <a16:creationId xmlns:a16="http://schemas.microsoft.com/office/drawing/2014/main" id="{BBC69A9C-83D2-4E91-81C4-990C16A0CF38}"/>
               </a:ext>
             </a:extLst>
           </p:cNvPr>
@@ -21961,7 +22018,7 @@
           <p:cNvPr id="2" name="c3-text-69">
             <a:extLst xmlns:a="http://schemas.openxmlformats.org/drawingml/2006/main">
               <a:ext uri="{FF2B5EF4-FFF2-40B4-BE49-F238E27FC236}">
-                <a16:creationId xmlns:a16="http://schemas.microsoft.com/office/drawing/2014/main" id="{68B7B78B-D9C2-451E-A316-E3379BFDF78A}"/>
+                <a16:creationId xmlns:a16="http://schemas.microsoft.com/office/drawing/2014/main" id="{9B24FD0F-161F-47FA-AD23-5F7AAA8BE1B4}"/>
               </a:ext>
             </a:extLst>
           </p:cNvPr>
@@ -22018,7 +22075,7 @@
           <p:cNvPr id="3" name="c3-text-70">
             <a:extLst xmlns:a="http://schemas.openxmlformats.org/drawingml/2006/main">
               <a:ext uri="{FF2B5EF4-FFF2-40B4-BE49-F238E27FC236}">
-                <a16:creationId xmlns:a16="http://schemas.microsoft.com/office/drawing/2014/main" id="{55CFC44D-05F5-4FEC-8B32-F790210900A8}"/>
+                <a16:creationId xmlns:a16="http://schemas.microsoft.com/office/drawing/2014/main" id="{36E91D30-048B-4885-A325-8B0877974046}"/>
               </a:ext>
             </a:extLst>
           </p:cNvPr>
@@ -22075,7 +22132,7 @@
           <p:cNvPr id="4" name="c3-shape-71">
             <a:extLst xmlns:a="http://schemas.openxmlformats.org/drawingml/2006/main">
               <a:ext uri="{FF2B5EF4-FFF2-40B4-BE49-F238E27FC236}">
-                <a16:creationId xmlns:a16="http://schemas.microsoft.com/office/drawing/2014/main" id="{86AF6BA5-FD51-46C6-8120-89D9CBA497CC}"/>
+                <a16:creationId xmlns:a16="http://schemas.microsoft.com/office/drawing/2014/main" id="{D659A788-8F2B-43C4-8F19-D4ADA3A1117B}"/>
               </a:ext>
             </a:extLst>
           </p:cNvPr>
@@ -22109,7 +22166,7 @@
           <p:cNvPr id="5" name="c3-text-72">
             <a:extLst xmlns:a="http://schemas.openxmlformats.org/drawingml/2006/main">
               <a:ext uri="{FF2B5EF4-FFF2-40B4-BE49-F238E27FC236}">
-                <a16:creationId xmlns:a16="http://schemas.microsoft.com/office/drawing/2014/main" id="{668CB32F-DD8C-40B2-8F7C-A01AE99443E3}"/>
+                <a16:creationId xmlns:a16="http://schemas.microsoft.com/office/drawing/2014/main" id="{80D6A1A5-0242-4EF2-BCE0-B1371B1AECA5}"/>
               </a:ext>
             </a:extLst>
           </p:cNvPr>
@@ -22212,7 +22269,7 @@
                 <a:ea typeface="Consolas"/>
                 <a:cs typeface="Consolas"/>
               </a:rPr>
-              <a:t>    answer = structured_client.</a:t>
+              <a:t>    current_time = datetime.</a:t>
             </a:r>
             <a:r>
               <a:rPr sz="1350" b="0">
@@ -22223,7 +22280,7 @@
                 <a:ea typeface="Consolas"/>
                 <a:cs typeface="Consolas"/>
               </a:rPr>
-              <a:t>invoke</a:t>
+              <a:t>now</a:t>
             </a:r>
             <a:r>
               <a:rPr sz="1350" b="0">
@@ -22234,20 +22291,19 @@
                 <a:ea typeface="Consolas"/>
                 <a:cs typeface="Consolas"/>
               </a:rPr>
-              <a:t>(</a:t>
-            </a:r>
-          </a:p>
-          <a:p xmlns:a="http://schemas.openxmlformats.org/drawingml/2006/main">
-            <a:pPr>
-              <a:defRPr sz="1350" b="0">
-                <a:solidFill>
-                  <a:srgbClr val="BAC9DD"/>
+              <a:t>().</a:t>
+            </a:r>
+            <a:r>
+              <a:rPr sz="1350" b="0">
+                <a:solidFill>
+                  <a:srgbClr val="82AAFF"/>
                 </a:solidFill>
                 <a:latin typeface="Consolas"/>
                 <a:ea typeface="Consolas"/>
                 <a:cs typeface="Consolas"/>
-              </a:defRPr>
-            </a:pPr>
+              </a:rPr>
+              <a:t>strftime</a:t>
+            </a:r>
             <a:r>
               <a:rPr sz="1350" b="0">
                 <a:solidFill>
@@ -22257,18 +22313,18 @@
                 <a:ea typeface="Consolas"/>
                 <a:cs typeface="Consolas"/>
               </a:rPr>
-              <a:t>        prompt.</a:t>
+              <a:t>(</a:t>
             </a:r>
             <a:r>
               <a:rPr sz="1350" b="0">
                 <a:solidFill>
-                  <a:srgbClr val="82AAFF"/>
+                  <a:srgbClr val="B9DA8B"/>
                 </a:solidFill>
                 <a:latin typeface="Consolas"/>
                 <a:ea typeface="Consolas"/>
                 <a:cs typeface="Consolas"/>
               </a:rPr>
-              <a:t>format_messages</a:t>
+              <a:t>"%H:%M"</a:t>
             </a:r>
             <a:r>
               <a:rPr sz="1350" b="0">
@@ -22279,7 +22335,7 @@
                 <a:ea typeface="Consolas"/>
                 <a:cs typeface="Consolas"/>
               </a:rPr>
-              <a:t>(</a:t>
+              <a:t>)</a:t>
             </a:r>
           </a:p>
           <a:p xmlns:a="http://schemas.openxmlformats.org/drawingml/2006/main">
@@ -22302,20 +22358,19 @@
                 <a:ea typeface="Consolas"/>
                 <a:cs typeface="Consolas"/>
               </a:rPr>
-              <a:t>            current_time=current_time,</a:t>
-            </a:r>
-          </a:p>
-          <a:p xmlns:a="http://schemas.openxmlformats.org/drawingml/2006/main">
-            <a:pPr>
-              <a:defRPr sz="1350" b="0">
-                <a:solidFill>
-                  <a:srgbClr val="BAC9DD"/>
+              <a:t>    answer = structured_client.</a:t>
+            </a:r>
+            <a:r>
+              <a:rPr sz="1350" b="0">
+                <a:solidFill>
+                  <a:srgbClr val="82AAFF"/>
                 </a:solidFill>
                 <a:latin typeface="Consolas"/>
                 <a:ea typeface="Consolas"/>
                 <a:cs typeface="Consolas"/>
-              </a:defRPr>
-            </a:pPr>
+              </a:rPr>
+              <a:t>invoke</a:t>
+            </a:r>
             <a:r>
               <a:rPr sz="1350" b="0">
                 <a:solidFill>
@@ -22325,19 +22380,20 @@
                 <a:ea typeface="Consolas"/>
                 <a:cs typeface="Consolas"/>
               </a:rPr>
-              <a:t>            messages=state[</a:t>
-            </a:r>
-            <a:r>
-              <a:rPr sz="1350" b="0">
-                <a:solidFill>
-                  <a:srgbClr val="B9DA8B"/>
+              <a:t>(</a:t>
+            </a:r>
+          </a:p>
+          <a:p xmlns:a="http://schemas.openxmlformats.org/drawingml/2006/main">
+            <a:pPr>
+              <a:defRPr sz="1350" b="0">
+                <a:solidFill>
+                  <a:srgbClr val="BAC9DD"/>
                 </a:solidFill>
                 <a:latin typeface="Consolas"/>
                 <a:ea typeface="Consolas"/>
                 <a:cs typeface="Consolas"/>
-              </a:rPr>
-              <a:t>"messages"</a:t>
-            </a:r>
+              </a:defRPr>
+            </a:pPr>
             <a:r>
               <a:rPr sz="1350" b="0">
                 <a:solidFill>
@@ -22347,18 +22403,18 @@
                 <a:ea typeface="Consolas"/>
                 <a:cs typeface="Consolas"/>
               </a:rPr>
-              <a:t>][-</a:t>
+              <a:t>        prompt.</a:t>
             </a:r>
             <a:r>
               <a:rPr sz="1350" b="0">
                 <a:solidFill>
-                  <a:srgbClr val="E7B983"/>
+                  <a:srgbClr val="82AAFF"/>
                 </a:solidFill>
                 <a:latin typeface="Consolas"/>
                 <a:ea typeface="Consolas"/>
                 <a:cs typeface="Consolas"/>
               </a:rPr>
-              <a:t>MAX_MESSAGES</a:t>
+              <a:t>format_messages</a:t>
             </a:r>
             <a:r>
               <a:rPr sz="1350" b="0">
@@ -22369,7 +22425,7 @@
                 <a:ea typeface="Consolas"/>
                 <a:cs typeface="Consolas"/>
               </a:rPr>
-              <a:t>:]))</a:t>
+              <a:t>(</a:t>
             </a:r>
           </a:p>
           <a:p xmlns:a="http://schemas.openxmlformats.org/drawingml/2006/main">
@@ -22392,19 +22448,20 @@
                 <a:ea typeface="Consolas"/>
                 <a:cs typeface="Consolas"/>
               </a:rPr>
-              <a:t>    </a:t>
-            </a:r>
-            <a:r>
-              <a:rPr sz="1350" b="0">
-                <a:solidFill>
-                  <a:srgbClr val="CBA6F7"/>
+              <a:t>            current_time=current_time,</a:t>
+            </a:r>
+          </a:p>
+          <a:p xmlns:a="http://schemas.openxmlformats.org/drawingml/2006/main">
+            <a:pPr>
+              <a:defRPr sz="1350" b="0">
+                <a:solidFill>
+                  <a:srgbClr val="BAC9DD"/>
                 </a:solidFill>
                 <a:latin typeface="Consolas"/>
                 <a:ea typeface="Consolas"/>
                 <a:cs typeface="Consolas"/>
-              </a:rPr>
-              <a:t>return</a:t>
-            </a:r>
+              </a:defRPr>
+            </a:pPr>
             <a:r>
               <a:rPr sz="1350" b="0">
                 <a:solidFill>
@@ -22414,7 +22471,7 @@
                 <a:ea typeface="Consolas"/>
                 <a:cs typeface="Consolas"/>
               </a:rPr>
-              <a:t> {</a:t>
+              <a:t>            messages=state[</a:t>
             </a:r>
             <a:r>
               <a:rPr sz="1350" b="0">
@@ -22436,18 +22493,18 @@
                 <a:ea typeface="Consolas"/>
                 <a:cs typeface="Consolas"/>
               </a:rPr>
-              <a:t>: [</a:t>
+              <a:t>][-</a:t>
             </a:r>
             <a:r>
               <a:rPr sz="1350" b="0">
                 <a:solidFill>
-                  <a:srgbClr val="82AAFF"/>
+                  <a:srgbClr val="E7B983"/>
                 </a:solidFill>
                 <a:latin typeface="Consolas"/>
                 <a:ea typeface="Consolas"/>
                 <a:cs typeface="Consolas"/>
               </a:rPr>
-              <a:t>AIMessage</a:t>
+              <a:t>MAX_MESSAGES</a:t>
             </a:r>
             <a:r>
               <a:rPr sz="1350" b="0">
@@ -22458,7 +22515,7 @@
                 <a:ea typeface="Consolas"/>
                 <a:cs typeface="Consolas"/>
               </a:rPr>
-              <a:t>(answer.speech_text)],</a:t>
+              <a:t>:]))</a:t>
             </a:r>
           </a:p>
           <a:p xmlns:a="http://schemas.openxmlformats.org/drawingml/2006/main">
@@ -22481,18 +22538,18 @@
                 <a:ea typeface="Consolas"/>
                 <a:cs typeface="Consolas"/>
               </a:rPr>
-              <a:t>            </a:t>
+              <a:t>    </a:t>
             </a:r>
             <a:r>
               <a:rPr sz="1350" b="0">
                 <a:solidFill>
-                  <a:srgbClr val="B9DA8B"/>
+                  <a:srgbClr val="CBA6F7"/>
                 </a:solidFill>
                 <a:latin typeface="Consolas"/>
                 <a:ea typeface="Consolas"/>
                 <a:cs typeface="Consolas"/>
               </a:rPr>
-              <a:t>"reply"</a:t>
+              <a:t>return</a:t>
             </a:r>
             <a:r>
               <a:rPr sz="1350" b="0">
@@ -22503,18 +22560,18 @@
                 <a:ea typeface="Consolas"/>
                 <a:cs typeface="Consolas"/>
               </a:rPr>
-              <a:t>: answer.</a:t>
+              <a:t> {</a:t>
             </a:r>
             <a:r>
               <a:rPr sz="1350" b="0">
                 <a:solidFill>
-                  <a:srgbClr val="82AAFF"/>
+                  <a:srgbClr val="B9DA8B"/>
                 </a:solidFill>
                 <a:latin typeface="Consolas"/>
                 <a:ea typeface="Consolas"/>
                 <a:cs typeface="Consolas"/>
               </a:rPr>
-              <a:t>model_dump</a:t>
+              <a:t>"messages"</a:t>
             </a:r>
             <a:r>
               <a:rPr sz="1350" b="0">
@@ -22525,6 +22582,95 @@
                 <a:ea typeface="Consolas"/>
                 <a:cs typeface="Consolas"/>
               </a:rPr>
+              <a:t>: [</a:t>
+            </a:r>
+            <a:r>
+              <a:rPr sz="1350" b="0">
+                <a:solidFill>
+                  <a:srgbClr val="82AAFF"/>
+                </a:solidFill>
+                <a:latin typeface="Consolas"/>
+                <a:ea typeface="Consolas"/>
+                <a:cs typeface="Consolas"/>
+              </a:rPr>
+              <a:t>AIMessage</a:t>
+            </a:r>
+            <a:r>
+              <a:rPr sz="1350" b="0">
+                <a:solidFill>
+                  <a:srgbClr val="BAC9DD"/>
+                </a:solidFill>
+                <a:latin typeface="Consolas"/>
+                <a:ea typeface="Consolas"/>
+                <a:cs typeface="Consolas"/>
+              </a:rPr>
+              <a:t>(answer.speech_text)],</a:t>
+            </a:r>
+          </a:p>
+          <a:p xmlns:a="http://schemas.openxmlformats.org/drawingml/2006/main">
+            <a:pPr>
+              <a:defRPr sz="1350" b="0">
+                <a:solidFill>
+                  <a:srgbClr val="BAC9DD"/>
+                </a:solidFill>
+                <a:latin typeface="Consolas"/>
+                <a:ea typeface="Consolas"/>
+                <a:cs typeface="Consolas"/>
+              </a:defRPr>
+            </a:pPr>
+            <a:r>
+              <a:rPr sz="1350" b="0">
+                <a:solidFill>
+                  <a:srgbClr val="BAC9DD"/>
+                </a:solidFill>
+                <a:latin typeface="Consolas"/>
+                <a:ea typeface="Consolas"/>
+                <a:cs typeface="Consolas"/>
+              </a:rPr>
+              <a:t>            </a:t>
+            </a:r>
+            <a:r>
+              <a:rPr sz="1350" b="0">
+                <a:solidFill>
+                  <a:srgbClr val="B9DA8B"/>
+                </a:solidFill>
+                <a:latin typeface="Consolas"/>
+                <a:ea typeface="Consolas"/>
+                <a:cs typeface="Consolas"/>
+              </a:rPr>
+              <a:t>"reply"</a:t>
+            </a:r>
+            <a:r>
+              <a:rPr sz="1350" b="0">
+                <a:solidFill>
+                  <a:srgbClr val="BAC9DD"/>
+                </a:solidFill>
+                <a:latin typeface="Consolas"/>
+                <a:ea typeface="Consolas"/>
+                <a:cs typeface="Consolas"/>
+              </a:rPr>
+              <a:t>: answer.</a:t>
+            </a:r>
+            <a:r>
+              <a:rPr sz="1350" b="0">
+                <a:solidFill>
+                  <a:srgbClr val="82AAFF"/>
+                </a:solidFill>
+                <a:latin typeface="Consolas"/>
+                <a:ea typeface="Consolas"/>
+                <a:cs typeface="Consolas"/>
+              </a:rPr>
+              <a:t>model_dump</a:t>
+            </a:r>
+            <a:r>
+              <a:rPr sz="1350" b="0">
+                <a:solidFill>
+                  <a:srgbClr val="BAC9DD"/>
+                </a:solidFill>
+                <a:latin typeface="Consolas"/>
+                <a:ea typeface="Consolas"/>
+                <a:cs typeface="Consolas"/>
+              </a:rPr>
               <a:t>()}</a:t>
             </a:r>
           </a:p>
@@ -22535,7 +22681,7 @@
           <p:cNvPr id="6" name="c3-shape-73">
             <a:extLst xmlns:a="http://schemas.openxmlformats.org/drawingml/2006/main">
               <a:ext uri="{FF2B5EF4-FFF2-40B4-BE49-F238E27FC236}">
-                <a16:creationId xmlns:a16="http://schemas.microsoft.com/office/drawing/2014/main" id="{2D561CC9-84D9-4985-8906-2C10D9C474A5}"/>
+                <a16:creationId xmlns:a16="http://schemas.microsoft.com/office/drawing/2014/main" id="{7F407389-31EA-4026-A902-605155CF5A64}"/>
               </a:ext>
             </a:extLst>
           </p:cNvPr>
@@ -22569,7 +22715,7 @@
           <p:cNvPr id="7" name="c3-text-74">
             <a:extLst xmlns:a="http://schemas.openxmlformats.org/drawingml/2006/main">
               <a:ext uri="{FF2B5EF4-FFF2-40B4-BE49-F238E27FC236}">
-                <a16:creationId xmlns:a16="http://schemas.microsoft.com/office/drawing/2014/main" id="{4482FAF0-9385-42E9-A9EC-795DCB546F1F}"/>
+                <a16:creationId xmlns:a16="http://schemas.microsoft.com/office/drawing/2014/main" id="{667761DB-FBC0-4AC5-BCF9-6B1405A58016}"/>
               </a:ext>
             </a:extLst>
           </p:cNvPr>
@@ -22623,10 +22769,10 @@
       </p:sp>
       <p:sp>
         <p:nvSpPr>
-          <p:cNvPr id="8" name="c3-text-333">
-            <a:extLst xmlns:a="http://schemas.openxmlformats.org/drawingml/2006/main">
-              <a:ext uri="{FF2B5EF4-FFF2-40B4-BE49-F238E27FC236}">
-                <a16:creationId xmlns:a16="http://schemas.microsoft.com/office/drawing/2014/main" id="{E811F74D-F621-4291-926F-4B9820FA9BC8}"/>
+          <p:cNvPr id="8" name="c3-text-334">
+            <a:extLst xmlns:a="http://schemas.openxmlformats.org/drawingml/2006/main">
+              <a:ext uri="{FF2B5EF4-FFF2-40B4-BE49-F238E27FC236}">
+                <a16:creationId xmlns:a16="http://schemas.microsoft.com/office/drawing/2014/main" id="{2DC852C4-1A13-4F97-AEAC-8E64EEC28BA4}"/>
               </a:ext>
             </a:extLst>
           </p:cNvPr>
@@ -22681,7 +22827,7 @@
     </p:spTree>
     <p:extLst>
       <p:ext uri="{BB962C8B-B14F-4D97-AF65-F5344CB8AC3E}">
-        <p14:creationId xmlns:p14="http://schemas.microsoft.com/office/powerpoint/2010/main" val="2040094324"/>
+        <p14:creationId xmlns:p14="http://schemas.microsoft.com/office/powerpoint/2010/main" val="446419685"/>
       </p:ext>
     </p:extLst>
   </p:cSld>
@@ -22712,7 +22858,7 @@
           <p:cNvPr id="9" name="c3-text-75">
             <a:extLst xmlns:a="http://schemas.openxmlformats.org/drawingml/2006/main">
               <a:ext uri="{FF2B5EF4-FFF2-40B4-BE49-F238E27FC236}">
-                <a16:creationId xmlns:a16="http://schemas.microsoft.com/office/drawing/2014/main" id="{B0FA8840-8029-4444-9812-44BAE8D88F13}"/>
+                <a16:creationId xmlns:a16="http://schemas.microsoft.com/office/drawing/2014/main" id="{42BF008E-EFA2-4E2C-B05B-22E5EFA49F7F}"/>
               </a:ext>
             </a:extLst>
           </p:cNvPr>
@@ -22769,7 +22915,7 @@
           <p:cNvPr id="2" name="c3-text-76">
             <a:extLst xmlns:a="http://schemas.openxmlformats.org/drawingml/2006/main">
               <a:ext uri="{FF2B5EF4-FFF2-40B4-BE49-F238E27FC236}">
-                <a16:creationId xmlns:a16="http://schemas.microsoft.com/office/drawing/2014/main" id="{DC9D81C0-E4ED-44EC-86CC-5E744F200769}"/>
+                <a16:creationId xmlns:a16="http://schemas.microsoft.com/office/drawing/2014/main" id="{23AE1FB0-CF7B-413F-9F78-229B8E886304}"/>
               </a:ext>
             </a:extLst>
           </p:cNvPr>
@@ -22826,7 +22972,7 @@
           <p:cNvPr id="3" name="c3-text-77">
             <a:extLst xmlns:a="http://schemas.openxmlformats.org/drawingml/2006/main">
               <a:ext uri="{FF2B5EF4-FFF2-40B4-BE49-F238E27FC236}">
-                <a16:creationId xmlns:a16="http://schemas.microsoft.com/office/drawing/2014/main" id="{4170E539-60B6-44A7-9C8F-DD167AF0BABA}"/>
+                <a16:creationId xmlns:a16="http://schemas.microsoft.com/office/drawing/2014/main" id="{C33CDD5E-1D9E-462E-8C19-C67DDEA2B41E}"/>
               </a:ext>
             </a:extLst>
           </p:cNvPr>
@@ -22883,7 +23029,7 @@
           <p:cNvPr id="4" name="c3-shape-78">
             <a:extLst xmlns:a="http://schemas.openxmlformats.org/drawingml/2006/main">
               <a:ext uri="{FF2B5EF4-FFF2-40B4-BE49-F238E27FC236}">
-                <a16:creationId xmlns:a16="http://schemas.microsoft.com/office/drawing/2014/main" id="{BDE4E10D-8B73-41D4-B83E-5FC9DE36E4EC}"/>
+                <a16:creationId xmlns:a16="http://schemas.microsoft.com/office/drawing/2014/main" id="{91ECD520-575A-441C-B469-7085A230DB4B}"/>
               </a:ext>
             </a:extLst>
           </p:cNvPr>
@@ -22917,7 +23063,7 @@
           <p:cNvPr id="5" name="c3-text-79">
             <a:extLst xmlns:a="http://schemas.openxmlformats.org/drawingml/2006/main">
               <a:ext uri="{FF2B5EF4-FFF2-40B4-BE49-F238E27FC236}">
-                <a16:creationId xmlns:a16="http://schemas.microsoft.com/office/drawing/2014/main" id="{D31A2E6B-5673-4ED8-972C-4A57A8602462}"/>
+                <a16:creationId xmlns:a16="http://schemas.microsoft.com/office/drawing/2014/main" id="{094E89F6-F023-4803-A308-1CF1A174392E}"/>
               </a:ext>
             </a:extLst>
           </p:cNvPr>
@@ -23324,7 +23470,7 @@
           <p:cNvPr id="6" name="c3-shape-80">
             <a:extLst xmlns:a="http://schemas.openxmlformats.org/drawingml/2006/main">
               <a:ext uri="{FF2B5EF4-FFF2-40B4-BE49-F238E27FC236}">
-                <a16:creationId xmlns:a16="http://schemas.microsoft.com/office/drawing/2014/main" id="{FCE4DF0A-D6C9-4E06-BF1E-0611DBD1DF9D}"/>
+                <a16:creationId xmlns:a16="http://schemas.microsoft.com/office/drawing/2014/main" id="{53C4C277-842A-45C8-A5C6-B93B7E3C64D1}"/>
               </a:ext>
             </a:extLst>
           </p:cNvPr>
@@ -23358,7 +23504,7 @@
           <p:cNvPr id="7" name="c3-text-81">
             <a:extLst xmlns:a="http://schemas.openxmlformats.org/drawingml/2006/main">
               <a:ext uri="{FF2B5EF4-FFF2-40B4-BE49-F238E27FC236}">
-                <a16:creationId xmlns:a16="http://schemas.microsoft.com/office/drawing/2014/main" id="{A0ABCA95-855E-496E-B512-744EEA8CE039}"/>
+                <a16:creationId xmlns:a16="http://schemas.microsoft.com/office/drawing/2014/main" id="{1A749F45-8686-4078-894B-5E6B639F2AE8}"/>
               </a:ext>
             </a:extLst>
           </p:cNvPr>
@@ -23412,10 +23558,10 @@
       </p:sp>
       <p:sp>
         <p:nvSpPr>
-          <p:cNvPr id="8" name="c3-text-334">
-            <a:extLst xmlns:a="http://schemas.openxmlformats.org/drawingml/2006/main">
-              <a:ext uri="{FF2B5EF4-FFF2-40B4-BE49-F238E27FC236}">
-                <a16:creationId xmlns:a16="http://schemas.microsoft.com/office/drawing/2014/main" id="{EB34F286-EFEA-4A80-8764-B293AFB90D23}"/>
+          <p:cNvPr id="8" name="c3-text-335">
+            <a:extLst xmlns:a="http://schemas.openxmlformats.org/drawingml/2006/main">
+              <a:ext uri="{FF2B5EF4-FFF2-40B4-BE49-F238E27FC236}">
+                <a16:creationId xmlns:a16="http://schemas.microsoft.com/office/drawing/2014/main" id="{D3740710-E723-4AE4-9C23-92E9A9190AC2}"/>
               </a:ext>
             </a:extLst>
           </p:cNvPr>
@@ -23470,7 +23616,7 @@
     </p:spTree>
     <p:extLst>
       <p:ext uri="{BB962C8B-B14F-4D97-AF65-F5344CB8AC3E}">
-        <p14:creationId xmlns:p14="http://schemas.microsoft.com/office/powerpoint/2010/main" val="2048598192"/>
+        <p14:creationId xmlns:p14="http://schemas.microsoft.com/office/powerpoint/2010/main" val="1779486081"/>
       </p:ext>
     </p:extLst>
   </p:cSld>
@@ -23501,7 +23647,7 @@
           <p:cNvPr id="16" name="c3-text-82">
             <a:extLst xmlns:a="http://schemas.openxmlformats.org/drawingml/2006/main">
               <a:ext uri="{FF2B5EF4-FFF2-40B4-BE49-F238E27FC236}">
-                <a16:creationId xmlns:a16="http://schemas.microsoft.com/office/drawing/2014/main" id="{C6C98AE6-7885-45F2-928E-9EDA530B29BC}"/>
+                <a16:creationId xmlns:a16="http://schemas.microsoft.com/office/drawing/2014/main" id="{E8C67C61-ACFC-44DA-82E1-CA6800F4ED7A}"/>
               </a:ext>
             </a:extLst>
           </p:cNvPr>
@@ -23558,7 +23704,7 @@
           <p:cNvPr id="2" name="c3-text-83">
             <a:extLst xmlns:a="http://schemas.openxmlformats.org/drawingml/2006/main">
               <a:ext uri="{FF2B5EF4-FFF2-40B4-BE49-F238E27FC236}">
-                <a16:creationId xmlns:a16="http://schemas.microsoft.com/office/drawing/2014/main" id="{5B180A52-F3C3-47A0-9CE9-6257362685D2}"/>
+                <a16:creationId xmlns:a16="http://schemas.microsoft.com/office/drawing/2014/main" id="{05F9AA1B-FA95-42AF-994F-E001EBE21CF2}"/>
               </a:ext>
             </a:extLst>
           </p:cNvPr>
@@ -23615,7 +23761,7 @@
           <p:cNvPr id="3" name="c3-text-84">
             <a:extLst xmlns:a="http://schemas.openxmlformats.org/drawingml/2006/main">
               <a:ext uri="{FF2B5EF4-FFF2-40B4-BE49-F238E27FC236}">
-                <a16:creationId xmlns:a16="http://schemas.microsoft.com/office/drawing/2014/main" id="{529BEED1-BAFE-491D-9FAC-9233B9C84BFA}"/>
+                <a16:creationId xmlns:a16="http://schemas.microsoft.com/office/drawing/2014/main" id="{586D17E8-1006-4069-9467-805C171A24CA}"/>
               </a:ext>
             </a:extLst>
           </p:cNvPr>
@@ -23672,7 +23818,7 @@
           <p:cNvPr id="4" name="c3-shape-85">
             <a:extLst xmlns:a="http://schemas.openxmlformats.org/drawingml/2006/main">
               <a:ext uri="{FF2B5EF4-FFF2-40B4-BE49-F238E27FC236}">
-                <a16:creationId xmlns:a16="http://schemas.microsoft.com/office/drawing/2014/main" id="{69554F1E-D76E-4662-9E31-42ED0A56AE2D}"/>
+                <a16:creationId xmlns:a16="http://schemas.microsoft.com/office/drawing/2014/main" id="{BA2DA602-D2C3-48E6-AC43-58C56C85CC65}"/>
               </a:ext>
             </a:extLst>
           </p:cNvPr>
@@ -23706,7 +23852,7 @@
           <p:cNvPr id="5" name="c3-text-86">
             <a:extLst xmlns:a="http://schemas.openxmlformats.org/drawingml/2006/main">
               <a:ext uri="{FF2B5EF4-FFF2-40B4-BE49-F238E27FC236}">
-                <a16:creationId xmlns:a16="http://schemas.microsoft.com/office/drawing/2014/main" id="{361463BF-20FD-43E0-BA75-ABF77F64755B}"/>
+                <a16:creationId xmlns:a16="http://schemas.microsoft.com/office/drawing/2014/main" id="{E120BA4E-D681-429E-8EFD-80AC329E8482}"/>
               </a:ext>
             </a:extLst>
           </p:cNvPr>
@@ -23786,7 +23932,7 @@
           <p:cNvPr id="6" name="c3-shape-87">
             <a:extLst xmlns:a="http://schemas.openxmlformats.org/drawingml/2006/main">
               <a:ext uri="{FF2B5EF4-FFF2-40B4-BE49-F238E27FC236}">
-                <a16:creationId xmlns:a16="http://schemas.microsoft.com/office/drawing/2014/main" id="{78F666F9-351C-4A58-9F41-4FC9EF287806}"/>
+                <a16:creationId xmlns:a16="http://schemas.microsoft.com/office/drawing/2014/main" id="{1C68854D-826D-4299-839F-FCB94487FD62}"/>
               </a:ext>
             </a:extLst>
           </p:cNvPr>
@@ -23818,7 +23964,7 @@
           <p:cNvPr id="7" name="c3-shape-88">
             <a:extLst xmlns:a="http://schemas.openxmlformats.org/drawingml/2006/main">
               <a:ext uri="{FF2B5EF4-FFF2-40B4-BE49-F238E27FC236}">
-                <a16:creationId xmlns:a16="http://schemas.microsoft.com/office/drawing/2014/main" id="{7BF1B57E-19DD-4CAE-8EDA-F45E0FC91676}"/>
+                <a16:creationId xmlns:a16="http://schemas.microsoft.com/office/drawing/2014/main" id="{0F95C130-B4E0-4836-9385-45679936066D}"/>
               </a:ext>
             </a:extLst>
           </p:cNvPr>
@@ -23852,7 +23998,7 @@
           <p:cNvPr id="8" name="c3-text-89">
             <a:extLst xmlns:a="http://schemas.openxmlformats.org/drawingml/2006/main">
               <a:ext uri="{FF2B5EF4-FFF2-40B4-BE49-F238E27FC236}">
-                <a16:creationId xmlns:a16="http://schemas.microsoft.com/office/drawing/2014/main" id="{F52DC1C3-C095-436D-B3D6-AEE18ED618BC}"/>
+                <a16:creationId xmlns:a16="http://schemas.microsoft.com/office/drawing/2014/main" id="{59C14B2C-54AE-4ABF-BA91-AA475086A3B5}"/>
               </a:ext>
             </a:extLst>
           </p:cNvPr>
@@ -23932,7 +24078,7 @@
           <p:cNvPr id="9" name="c3-shape-90">
             <a:extLst xmlns:a="http://schemas.openxmlformats.org/drawingml/2006/main">
               <a:ext uri="{FF2B5EF4-FFF2-40B4-BE49-F238E27FC236}">
-                <a16:creationId xmlns:a16="http://schemas.microsoft.com/office/drawing/2014/main" id="{B2AE20C7-D531-4383-8552-5302288FCFAB}"/>
+                <a16:creationId xmlns:a16="http://schemas.microsoft.com/office/drawing/2014/main" id="{F691CCD8-794F-4EE8-8CBE-139C6559F288}"/>
               </a:ext>
             </a:extLst>
           </p:cNvPr>
@@ -23964,7 +24110,7 @@
           <p:cNvPr id="10" name="c3-shape-91">
             <a:extLst xmlns:a="http://schemas.openxmlformats.org/drawingml/2006/main">
               <a:ext uri="{FF2B5EF4-FFF2-40B4-BE49-F238E27FC236}">
-                <a16:creationId xmlns:a16="http://schemas.microsoft.com/office/drawing/2014/main" id="{7BE02479-C564-4313-92CB-6BE192F26FEE}"/>
+                <a16:creationId xmlns:a16="http://schemas.microsoft.com/office/drawing/2014/main" id="{F3F2B26B-188A-450E-ACA6-42D81143F546}"/>
               </a:ext>
             </a:extLst>
           </p:cNvPr>
@@ -23998,7 +24144,7 @@
           <p:cNvPr id="11" name="c3-text-92">
             <a:extLst xmlns:a="http://schemas.openxmlformats.org/drawingml/2006/main">
               <a:ext uri="{FF2B5EF4-FFF2-40B4-BE49-F238E27FC236}">
-                <a16:creationId xmlns:a16="http://schemas.microsoft.com/office/drawing/2014/main" id="{E61CB608-EE82-467D-A0AF-C3AF32D7A396}"/>
+                <a16:creationId xmlns:a16="http://schemas.microsoft.com/office/drawing/2014/main" id="{7DC93D23-E37C-4A53-8604-A32189B1A43C}"/>
               </a:ext>
             </a:extLst>
           </p:cNvPr>
@@ -24078,7 +24224,7 @@
           <p:cNvPr id="12" name="c3-shape-93">
             <a:extLst xmlns:a="http://schemas.openxmlformats.org/drawingml/2006/main">
               <a:ext uri="{FF2B5EF4-FFF2-40B4-BE49-F238E27FC236}">
-                <a16:creationId xmlns:a16="http://schemas.microsoft.com/office/drawing/2014/main" id="{3EA6C5EB-5E95-460F-AC98-C12E21890E6A}"/>
+                <a16:creationId xmlns:a16="http://schemas.microsoft.com/office/drawing/2014/main" id="{B844B2C2-F242-4CF3-8A53-B3E0DF4A000E}"/>
               </a:ext>
             </a:extLst>
           </p:cNvPr>
@@ -24112,7 +24258,7 @@
           <p:cNvPr id="13" name="c3-text-94">
             <a:extLst xmlns:a="http://schemas.openxmlformats.org/drawingml/2006/main">
               <a:ext uri="{FF2B5EF4-FFF2-40B4-BE49-F238E27FC236}">
-                <a16:creationId xmlns:a16="http://schemas.microsoft.com/office/drawing/2014/main" id="{24AB9B42-8994-466F-9398-6AB2F3956534}"/>
+                <a16:creationId xmlns:a16="http://schemas.microsoft.com/office/drawing/2014/main" id="{0464B151-6C0E-417D-BC7C-9011A0588BCE}"/>
               </a:ext>
             </a:extLst>
           </p:cNvPr>
@@ -24269,7 +24415,7 @@
           <p:cNvPr id="14" name="c3-text-95">
             <a:extLst xmlns:a="http://schemas.openxmlformats.org/drawingml/2006/main">
               <a:ext uri="{FF2B5EF4-FFF2-40B4-BE49-F238E27FC236}">
-                <a16:creationId xmlns:a16="http://schemas.microsoft.com/office/drawing/2014/main" id="{16461792-D92A-4604-A370-1BD91C3DB484}"/>
+                <a16:creationId xmlns:a16="http://schemas.microsoft.com/office/drawing/2014/main" id="{7D01560B-4E83-4365-A7A6-3B827D97F8A8}"/>
               </a:ext>
             </a:extLst>
           </p:cNvPr>
@@ -24323,10 +24469,10 @@
       </p:sp>
       <p:sp>
         <p:nvSpPr>
-          <p:cNvPr id="15" name="c3-text-335">
-            <a:extLst xmlns:a="http://schemas.openxmlformats.org/drawingml/2006/main">
-              <a:ext uri="{FF2B5EF4-FFF2-40B4-BE49-F238E27FC236}">
-                <a16:creationId xmlns:a16="http://schemas.microsoft.com/office/drawing/2014/main" id="{0D76EF62-1CA4-4681-86BC-3381083AFCFB}"/>
+          <p:cNvPr id="15" name="c3-text-336">
+            <a:extLst xmlns:a="http://schemas.openxmlformats.org/drawingml/2006/main">
+              <a:ext uri="{FF2B5EF4-FFF2-40B4-BE49-F238E27FC236}">
+                <a16:creationId xmlns:a16="http://schemas.microsoft.com/office/drawing/2014/main" id="{399B2685-3A2F-44A1-848C-9D71225D40E2}"/>
               </a:ext>
             </a:extLst>
           </p:cNvPr>
@@ -24381,7 +24527,7 @@
     </p:spTree>
     <p:extLst>
       <p:ext uri="{BB962C8B-B14F-4D97-AF65-F5344CB8AC3E}">
-        <p14:creationId xmlns:p14="http://schemas.microsoft.com/office/powerpoint/2010/main" val="12475910"/>
+        <p14:creationId xmlns:p14="http://schemas.microsoft.com/office/powerpoint/2010/main" val="2039621137"/>
       </p:ext>
     </p:extLst>
   </p:cSld>
